--- a/zen/07_融資・投資家資料/然グループ_統合ピッチデッキ_強化版.pptx
+++ b/zen/07_融資・投資家資料/然グループ_統合ピッチデッキ_強化版.pptx
@@ -3757,22 +3757,46 @@
                 </a:solidFill>
                 <a:latin typeface="IPAGothic"/>
               </a:rPr>
-              <a:t>収益モデルサマリー  ─  ストック収益の積み上げ</a:t>
-            </a:r>
-          </a:p>
-        </p:txBody>
-      </p:sp>
+              <a:t>収益モデルサマリー  ─  グループ損益と成長ストック</a:t>
+            </a:r>
+          </a:p>
+        </p:txBody>
+      </p:sp>
+      <p:pic>
+        <p:nvPicPr>
+          <p:cNvPr id="4" name="Picture 3" descr="image.png"/>
+          <p:cNvPicPr>
+            <a:picLocks noChangeAspect="1"/>
+          </p:cNvPicPr>
+          <p:nvPr/>
+        </p:nvPicPr>
+        <p:blipFill>
+          <a:blip r:embed="rId2"/>
+          <a:stretch>
+            <a:fillRect/>
+          </a:stretch>
+        </p:blipFill>
+        <p:spPr>
+          <a:xfrm>
+            <a:off x="274320" y="1005840"/>
+            <a:ext cx="5669280" cy="2834640"/>
+          </a:xfrm>
+          <a:prstGeom prst="rect">
+            <a:avLst/>
+          </a:prstGeom>
+        </p:spPr>
+      </p:pic>
       <p:graphicFrame>
         <p:nvGraphicFramePr>
-          <p:cNvPr id="4" name="Table 3"/>
+          <p:cNvPr id="5" name="Table 4"/>
           <p:cNvGraphicFramePr>
             <a:graphicFrameLocks noGrp="1"/>
           </p:cNvGraphicFramePr>
           <p:nvPr/>
         </p:nvGraphicFramePr>
         <p:xfrm>
-          <a:off x="274320" y="1005840"/>
-          <a:ext cx="6858000" cy="2743200"/>
+          <a:off x="5943600" y="1005840"/>
+          <a:ext cx="5943600" cy="2834640"/>
         </p:xfrm>
         <a:graphic>
           <a:graphicData uri="http://schemas.openxmlformats.org/drawingml/2006/table">
@@ -3781,12 +3805,14 @@
                 <a:tableStyleId>{5C22544A-7EE6-4342-B048-85BDC9FD1C3A}</a:tableStyleId>
               </a:tblPr>
               <a:tblGrid>
-                <a:gridCol w="1714500"/>
-                <a:gridCol w="1714500"/>
-                <a:gridCol w="1714500"/>
-                <a:gridCol w="1714500"/>
+                <a:gridCol w="990600"/>
+                <a:gridCol w="990600"/>
+                <a:gridCol w="990600"/>
+                <a:gridCol w="990600"/>
+                <a:gridCol w="990600"/>
+                <a:gridCol w="990600"/>
               </a:tblGrid>
-              <a:tr h="457200">
+              <a:tr h="472440">
                 <a:tc>
                   <a:txBody>
                     <a:bodyPr/>
@@ -3794,7 +3820,7 @@
                     <a:p>
                       <a:pPr algn="ctr"/>
                       <a:r>
-                        <a:rPr sz="1100" b="1">
+                        <a:rPr sz="1000" b="1">
                           <a:solidFill>
                             <a:srgbClr val="FFFFFF"/>
                           </a:solidFill>
@@ -3817,7 +3843,53 @@
                     <a:p>
                       <a:pPr algn="ctr"/>
                       <a:r>
-                        <a:rPr sz="1100" b="1">
+                        <a:rPr sz="1000" b="1">
+                          <a:solidFill>
+                            <a:srgbClr val="FFFFFF"/>
+                          </a:solidFill>
+                          <a:latin typeface="IPAGothic"/>
+                        </a:rPr>
+                        <a:t>月次売上/店</a:t>
+                      </a:r>
+                    </a:p>
+                  </a:txBody>
+                  <a:tcPr>
+                    <a:solidFill>
+                      <a:srgbClr val="2C4A3E"/>
+                    </a:solidFill>
+                  </a:tcPr>
+                </a:tc>
+                <a:tc>
+                  <a:txBody>
+                    <a:bodyPr/>
+                    <a:lstStyle/>
+                    <a:p>
+                      <a:pPr algn="ctr"/>
+                      <a:r>
+                        <a:rPr sz="1000" b="1">
+                          <a:solidFill>
+                            <a:srgbClr val="FFFFFF"/>
+                          </a:solidFill>
+                          <a:latin typeface="IPAGothic"/>
+                        </a:rPr>
+                        <a:t>利益率</a:t>
+                      </a:r>
+                    </a:p>
+                  </a:txBody>
+                  <a:tcPr>
+                    <a:solidFill>
+                      <a:srgbClr val="2C4A3E"/>
+                    </a:solidFill>
+                  </a:tcPr>
+                </a:tc>
+                <a:tc>
+                  <a:txBody>
+                    <a:bodyPr/>
+                    <a:lstStyle/>
+                    <a:p>
+                      <a:pPr algn="ctr"/>
+                      <a:r>
+                        <a:rPr sz="1000" b="1">
                           <a:solidFill>
                             <a:srgbClr val="FFFFFF"/>
                           </a:solidFill>
@@ -3840,7 +3912,7 @@
                     <a:p>
                       <a:pPr algn="ctr"/>
                       <a:r>
-                        <a:rPr sz="1100" b="1">
+                        <a:rPr sz="1000" b="1">
                           <a:solidFill>
                             <a:srgbClr val="FFFFFF"/>
                           </a:solidFill>
@@ -3863,7 +3935,7 @@
                     <a:p>
                       <a:pPr algn="ctr"/>
                       <a:r>
-                        <a:rPr sz="1100" b="1">
+                        <a:rPr sz="1000" b="1">
                           <a:solidFill>
                             <a:srgbClr val="FFFFFF"/>
                           </a:solidFill>
@@ -3880,7 +3952,7 @@
                   </a:tcPr>
                 </a:tc>
               </a:tr>
-              <a:tr h="457200">
+              <a:tr h="472440">
                 <a:tc>
                   <a:txBody>
                     <a:bodyPr/>
@@ -3888,7 +3960,7 @@
                     <a:p>
                       <a:pPr algn="ctr"/>
                       <a:r>
-                        <a:rPr sz="1100">
+                        <a:rPr sz="1000">
                           <a:solidFill>
                             <a:srgbClr val="1A1A1A"/>
                           </a:solidFill>
@@ -3911,13 +3983,13 @@
                     <a:p>
                       <a:pPr algn="ctr"/>
                       <a:r>
-                        <a:rPr sz="1100">
+                        <a:rPr sz="1000">
                           <a:solidFill>
                             <a:srgbClr val="1A1A1A"/>
                           </a:solidFill>
                           <a:latin typeface="IPAGothic"/>
                         </a:rPr>
-                        <a:t>330万円</a:t>
+                        <a:t>960万円</a:t>
                       </a:r>
                     </a:p>
                   </a:txBody>
@@ -3934,7 +4006,53 @@
                     <a:p>
                       <a:pPr algn="ctr"/>
                       <a:r>
-                        <a:rPr sz="1100">
+                        <a:rPr sz="1000">
+                          <a:solidFill>
+                            <a:srgbClr val="1A1A1A"/>
+                          </a:solidFill>
+                          <a:latin typeface="IPAGothic"/>
+                        </a:rPr>
+                        <a:t>15%</a:t>
+                      </a:r>
+                    </a:p>
+                  </a:txBody>
+                  <a:tcPr>
+                    <a:solidFill>
+                      <a:srgbClr val="F0EEE8"/>
+                    </a:solidFill>
+                  </a:tcPr>
+                </a:tc>
+                <a:tc>
+                  <a:txBody>
+                    <a:bodyPr/>
+                    <a:lstStyle/>
+                    <a:p>
+                      <a:pPr algn="ctr"/>
+                      <a:r>
+                        <a:rPr sz="1000">
+                          <a:solidFill>
+                            <a:srgbClr val="1A1A1A"/>
+                          </a:solidFill>
+                          <a:latin typeface="IPAGothic"/>
+                        </a:rPr>
+                        <a:t>144万円</a:t>
+                      </a:r>
+                    </a:p>
+                  </a:txBody>
+                  <a:tcPr>
+                    <a:solidFill>
+                      <a:srgbClr val="F0EEE8"/>
+                    </a:solidFill>
+                  </a:tcPr>
+                </a:tc>
+                <a:tc>
+                  <a:txBody>
+                    <a:bodyPr/>
+                    <a:lstStyle/>
+                    <a:p>
+                      <a:pPr algn="ctr"/>
+                      <a:r>
+                        <a:rPr sz="1000">
                           <a:solidFill>
                             <a:srgbClr val="1A1A1A"/>
                           </a:solidFill>
@@ -3957,13 +4075,13 @@
                     <a:p>
                       <a:pPr algn="ctr"/>
                       <a:r>
-                        <a:rPr sz="1100">
+                        <a:rPr sz="1000">
                           <a:solidFill>
                             <a:srgbClr val="1A1A1A"/>
                           </a:solidFill>
                           <a:latin typeface="IPAGothic"/>
                         </a:rPr>
-                        <a:t>2,200万円＋</a:t>
+                        <a:t>2,880万円</a:t>
                       </a:r>
                     </a:p>
                   </a:txBody>
@@ -3974,7 +4092,7 @@
                   </a:tcPr>
                 </a:tc>
               </a:tr>
-              <a:tr h="457200">
+              <a:tr h="472440">
                 <a:tc>
                   <a:txBody>
                     <a:bodyPr/>
@@ -3982,7 +4100,7 @@
                     <a:p>
                       <a:pPr algn="ctr"/>
                       <a:r>
-                        <a:rPr sz="1100">
+                        <a:rPr sz="1000">
                           <a:solidFill>
                             <a:srgbClr val="1A1A1A"/>
                           </a:solidFill>
@@ -4005,13 +4123,13 @@
                     <a:p>
                       <a:pPr algn="ctr"/>
                       <a:r>
-                        <a:rPr sz="1100">
+                        <a:rPr sz="1000">
                           <a:solidFill>
                             <a:srgbClr val="1A1A1A"/>
                           </a:solidFill>
                           <a:latin typeface="IPAGothic"/>
                         </a:rPr>
-                        <a:t>200万円</a:t>
+                        <a:t>675万円</a:t>
                       </a:r>
                     </a:p>
                   </a:txBody>
@@ -4028,7 +4146,53 @@
                     <a:p>
                       <a:pPr algn="ctr"/>
                       <a:r>
-                        <a:rPr sz="1100">
+                        <a:rPr sz="1000">
+                          <a:solidFill>
+                            <a:srgbClr val="1A1A1A"/>
+                          </a:solidFill>
+                          <a:latin typeface="IPAGothic"/>
+                        </a:rPr>
+                        <a:t>18%</a:t>
+                      </a:r>
+                    </a:p>
+                  </a:txBody>
+                  <a:tcPr>
+                    <a:solidFill>
+                      <a:srgbClr val="FFFFFF"/>
+                    </a:solidFill>
+                  </a:tcPr>
+                </a:tc>
+                <a:tc>
+                  <a:txBody>
+                    <a:bodyPr/>
+                    <a:lstStyle/>
+                    <a:p>
+                      <a:pPr algn="ctr"/>
+                      <a:r>
+                        <a:rPr sz="1000">
+                          <a:solidFill>
+                            <a:srgbClr val="1A1A1A"/>
+                          </a:solidFill>
+                          <a:latin typeface="IPAGothic"/>
+                        </a:rPr>
+                        <a:t>120万円</a:t>
+                      </a:r>
+                    </a:p>
+                  </a:txBody>
+                  <a:tcPr>
+                    <a:solidFill>
+                      <a:srgbClr val="FFFFFF"/>
+                    </a:solidFill>
+                  </a:tcPr>
+                </a:tc>
+                <a:tc>
+                  <a:txBody>
+                    <a:bodyPr/>
+                    <a:lstStyle/>
+                    <a:p>
+                      <a:pPr algn="ctr"/>
+                      <a:r>
+                        <a:rPr sz="1000">
                           <a:solidFill>
                             <a:srgbClr val="1A1A1A"/>
                           </a:solidFill>
@@ -4051,13 +4215,13 @@
                     <a:p>
                       <a:pPr algn="ctr"/>
                       <a:r>
-                        <a:rPr sz="1100">
+                        <a:rPr sz="1000">
                           <a:solidFill>
                             <a:srgbClr val="1A1A1A"/>
                           </a:solidFill>
                           <a:latin typeface="IPAGothic"/>
                         </a:rPr>
-                        <a:t>1,000万円</a:t>
+                        <a:t>600万円</a:t>
                       </a:r>
                     </a:p>
                   </a:txBody>
@@ -4068,7 +4232,7 @@
                   </a:tcPr>
                 </a:tc>
               </a:tr>
-              <a:tr h="457200">
+              <a:tr h="472440">
                 <a:tc>
                   <a:txBody>
                     <a:bodyPr/>
@@ -4076,7 +4240,7 @@
                     <a:p>
                       <a:pPr algn="ctr"/>
                       <a:r>
-                        <a:rPr sz="1100">
+                        <a:rPr sz="1000">
                           <a:solidFill>
                             <a:srgbClr val="1A1A1A"/>
                           </a:solidFill>
@@ -4099,13 +4263,13 @@
                     <a:p>
                       <a:pPr algn="ctr"/>
                       <a:r>
-                        <a:rPr sz="1100">
+                        <a:rPr sz="1000">
                           <a:solidFill>
                             <a:srgbClr val="1A1A1A"/>
                           </a:solidFill>
                           <a:latin typeface="IPAGothic"/>
                         </a:rPr>
-                        <a:t>132万円</a:t>
+                        <a:t>480万円</a:t>
                       </a:r>
                     </a:p>
                   </a:txBody>
@@ -4122,7 +4286,53 @@
                     <a:p>
                       <a:pPr algn="ctr"/>
                       <a:r>
-                        <a:rPr sz="1100">
+                        <a:rPr sz="1000">
+                          <a:solidFill>
+                            <a:srgbClr val="1A1A1A"/>
+                          </a:solidFill>
+                          <a:latin typeface="IPAGothic"/>
+                        </a:rPr>
+                        <a:t>12.5%</a:t>
+                      </a:r>
+                    </a:p>
+                  </a:txBody>
+                  <a:tcPr>
+                    <a:solidFill>
+                      <a:srgbClr val="F0EEE8"/>
+                    </a:solidFill>
+                  </a:tcPr>
+                </a:tc>
+                <a:tc>
+                  <a:txBody>
+                    <a:bodyPr/>
+                    <a:lstStyle/>
+                    <a:p>
+                      <a:pPr algn="ctr"/>
+                      <a:r>
+                        <a:rPr sz="1000">
+                          <a:solidFill>
+                            <a:srgbClr val="1A1A1A"/>
+                          </a:solidFill>
+                          <a:latin typeface="IPAGothic"/>
+                        </a:rPr>
+                        <a:t>60万円</a:t>
+                      </a:r>
+                    </a:p>
+                  </a:txBody>
+                  <a:tcPr>
+                    <a:solidFill>
+                      <a:srgbClr val="F0EEE8"/>
+                    </a:solidFill>
+                  </a:tcPr>
+                </a:tc>
+                <a:tc>
+                  <a:txBody>
+                    <a:bodyPr/>
+                    <a:lstStyle/>
+                    <a:p>
+                      <a:pPr algn="ctr"/>
+                      <a:r>
+                        <a:rPr sz="1000">
                           <a:solidFill>
                             <a:srgbClr val="1A1A1A"/>
                           </a:solidFill>
@@ -4145,13 +4355,13 @@
                     <a:p>
                       <a:pPr algn="ctr"/>
                       <a:r>
-                        <a:rPr sz="1100">
+                        <a:rPr sz="1000">
                           <a:solidFill>
                             <a:srgbClr val="1A1A1A"/>
                           </a:solidFill>
                           <a:latin typeface="IPAGothic"/>
                         </a:rPr>
-                        <a:t>1,500万円＋</a:t>
+                        <a:t>1,800万円</a:t>
                       </a:r>
                     </a:p>
                   </a:txBody>
@@ -4162,7 +4372,7 @@
                   </a:tcPr>
                 </a:tc>
               </a:tr>
-              <a:tr h="457200">
+              <a:tr h="472440">
                 <a:tc>
                   <a:txBody>
                     <a:bodyPr/>
@@ -4170,7 +4380,7 @@
                     <a:p>
                       <a:pPr algn="ctr"/>
                       <a:r>
-                        <a:rPr sz="1100">
+                        <a:rPr sz="1000">
                           <a:solidFill>
                             <a:srgbClr val="1A1A1A"/>
                           </a:solidFill>
@@ -4193,7 +4403,53 @@
                     <a:p>
                       <a:pPr algn="ctr"/>
                       <a:r>
-                        <a:rPr sz="1100">
+                        <a:rPr sz="1000">
+                          <a:solidFill>
+                            <a:srgbClr val="1A1A1A"/>
+                          </a:solidFill>
+                          <a:latin typeface="IPAGothic"/>
+                        </a:rPr>
+                        <a:t>─</a:t>
+                      </a:r>
+                    </a:p>
+                  </a:txBody>
+                  <a:tcPr>
+                    <a:solidFill>
+                      <a:srgbClr val="FFFFFF"/>
+                    </a:solidFill>
+                  </a:tcPr>
+                </a:tc>
+                <a:tc>
+                  <a:txBody>
+                    <a:bodyPr/>
+                    <a:lstStyle/>
+                    <a:p>
+                      <a:pPr algn="ctr"/>
+                      <a:r>
+                        <a:rPr sz="1000">
+                          <a:solidFill>
+                            <a:srgbClr val="1A1A1A"/>
+                          </a:solidFill>
+                          <a:latin typeface="IPAGothic"/>
+                        </a:rPr>
+                        <a:t>─</a:t>
+                      </a:r>
+                    </a:p>
+                  </a:txBody>
+                  <a:tcPr>
+                    <a:solidFill>
+                      <a:srgbClr val="FFFFFF"/>
+                    </a:solidFill>
+                  </a:tcPr>
+                </a:tc>
+                <a:tc>
+                  <a:txBody>
+                    <a:bodyPr/>
+                    <a:lstStyle/>
+                    <a:p>
+                      <a:pPr algn="ctr"/>
+                      <a:r>
+                        <a:rPr sz="1000">
                           <a:solidFill>
                             <a:srgbClr val="1A1A1A"/>
                           </a:solidFill>
@@ -4216,7 +4472,7 @@
                     <a:p>
                       <a:pPr algn="ctr"/>
                       <a:r>
-                        <a:rPr sz="1100">
+                        <a:rPr sz="1000">
                           <a:solidFill>
                             <a:srgbClr val="1A1A1A"/>
                           </a:solidFill>
@@ -4239,13 +4495,13 @@
                     <a:p>
                       <a:pPr algn="ctr"/>
                       <a:r>
-                        <a:rPr sz="1100">
+                        <a:rPr sz="1000">
                           <a:solidFill>
                             <a:srgbClr val="1A1A1A"/>
                           </a:solidFill>
                           <a:latin typeface="IPAGothic"/>
                         </a:rPr>
-                        <a:t>83万円＋</a:t>
+                        <a:t>83万円</a:t>
                       </a:r>
                     </a:p>
                   </a:txBody>
@@ -4256,7 +4512,7 @@
                   </a:tcPr>
                 </a:tc>
               </a:tr>
-              <a:tr h="457200">
+              <a:tr h="472440">
                 <a:tc>
                   <a:txBody>
                     <a:bodyPr/>
@@ -4264,7 +4520,7 @@
                     <a:p>
                       <a:pPr algn="ctr"/>
                       <a:r>
-                        <a:rPr sz="1100">
+                        <a:rPr sz="1000">
                           <a:solidFill>
                             <a:srgbClr val="1A1A1A"/>
                           </a:solidFill>
@@ -4287,7 +4543,7 @@
                     <a:p>
                       <a:pPr algn="ctr"/>
                       <a:r>
-                        <a:rPr sz="1100">
+                        <a:rPr sz="1000">
                           <a:solidFill>
                             <a:srgbClr val="1A1A1A"/>
                           </a:solidFill>
@@ -4310,7 +4566,53 @@
                     <a:p>
                       <a:pPr algn="ctr"/>
                       <a:r>
-                        <a:rPr sz="1100">
+                        <a:rPr sz="1000">
+                          <a:solidFill>
+                            <a:srgbClr val="1A1A1A"/>
+                          </a:solidFill>
+                          <a:latin typeface="IPAGothic"/>
+                        </a:rPr>
+                        <a:t>─</a:t>
+                      </a:r>
+                    </a:p>
+                  </a:txBody>
+                  <a:tcPr>
+                    <a:solidFill>
+                      <a:srgbClr val="F0EEE8"/>
+                    </a:solidFill>
+                  </a:tcPr>
+                </a:tc>
+                <a:tc>
+                  <a:txBody>
+                    <a:bodyPr/>
+                    <a:lstStyle/>
+                    <a:p>
+                      <a:pPr algn="ctr"/>
+                      <a:r>
+                        <a:rPr sz="1000">
+                          <a:solidFill>
+                            <a:srgbClr val="1A1A1A"/>
+                          </a:solidFill>
+                          <a:latin typeface="IPAGothic"/>
+                        </a:rPr>
+                        <a:t>─</a:t>
+                      </a:r>
+                    </a:p>
+                  </a:txBody>
+                  <a:tcPr>
+                    <a:solidFill>
+                      <a:srgbClr val="F0EEE8"/>
+                    </a:solidFill>
+                  </a:tcPr>
+                </a:tc>
+                <a:tc>
+                  <a:txBody>
+                    <a:bodyPr/>
+                    <a:lstStyle/>
+                    <a:p>
+                      <a:pPr algn="ctr"/>
+                      <a:r>
+                        <a:rPr sz="1000">
                           <a:solidFill>
                             <a:srgbClr val="1A1A1A"/>
                           </a:solidFill>
@@ -4333,13 +4635,13 @@
                     <a:p>
                       <a:pPr algn="ctr"/>
                       <a:r>
-                        <a:rPr sz="1100">
+                        <a:rPr sz="1000">
                           <a:solidFill>
                             <a:srgbClr val="1A1A1A"/>
                           </a:solidFill>
                           <a:latin typeface="IPAGothic"/>
                         </a:rPr>
-                        <a:t>4,783万円〜</a:t>
+                        <a:t>5,363万円〜</a:t>
                       </a:r>
                     </a:p>
                   </a:txBody>
@@ -4354,30 +4656,6 @@
           </a:graphicData>
         </a:graphic>
       </p:graphicFrame>
-      <p:pic>
-        <p:nvPicPr>
-          <p:cNvPr id="5" name="Picture 4" descr="image.png"/>
-          <p:cNvPicPr>
-            <a:picLocks noChangeAspect="1"/>
-          </p:cNvPicPr>
-          <p:nvPr/>
-        </p:nvPicPr>
-        <p:blipFill>
-          <a:blip r:embed="rId2"/>
-          <a:stretch>
-            <a:fillRect/>
-          </a:stretch>
-        </p:blipFill>
-        <p:spPr>
-          <a:xfrm>
-            <a:off x="7132320" y="1005840"/>
-            <a:ext cx="4754880" cy="2743200"/>
-          </a:xfrm>
-          <a:prstGeom prst="rect">
-            <a:avLst/>
-          </a:prstGeom>
-        </p:spPr>
-      </p:pic>
       <p:sp>
         <p:nvSpPr>
           <p:cNvPr id="6" name="Rectangle 5"/>
@@ -4386,7 +4664,7 @@
         </p:nvSpPr>
         <p:spPr>
           <a:xfrm>
-            <a:off x="274320" y="3931920"/>
+            <a:off x="274320" y="4023360"/>
             <a:ext cx="11612880" cy="347472"/>
           </a:xfrm>
           <a:prstGeom prst="rect">
@@ -4429,7 +4707,7 @@
         </p:nvSpPr>
         <p:spPr>
           <a:xfrm>
-            <a:off x="365760" y="3968496"/>
+            <a:off x="365760" y="4059936"/>
             <a:ext cx="11430000" cy="292608"/>
           </a:xfrm>
           <a:prstGeom prst="rect">
@@ -4464,7 +4742,7 @@
         </p:nvSpPr>
         <p:spPr>
           <a:xfrm>
-            <a:off x="365760" y="4315968"/>
+            <a:off x="365760" y="4407408"/>
             <a:ext cx="11430000" cy="347472"/>
           </a:xfrm>
           <a:prstGeom prst="rect">
@@ -4486,7 +4764,7 @@
                 </a:solidFill>
                 <a:latin typeface="IPAGothic"/>
               </a:rPr>
-              <a:t>▸ FCロイヤルティはFC40店規模で月1,709万円のストック収益</a:t>
+              <a:t>▸ Y1 グループ月次売上合計：約2,115万円（利益率約15%、月次利益324万円）</a:t>
             </a:r>
           </a:p>
         </p:txBody>
@@ -4499,7 +4777,7 @@
         </p:nvSpPr>
         <p:spPr>
           <a:xfrm>
-            <a:off x="365760" y="4663440"/>
+            <a:off x="365760" y="4754880"/>
             <a:ext cx="11430000" cy="347472"/>
           </a:xfrm>
           <a:prstGeom prst="rect">
@@ -4521,7 +4799,7 @@
                 </a:solidFill>
                 <a:latin typeface="IPAGothic"/>
               </a:rPr>
-              <a:t>▸ 直営利益＋FCロイヤルティの二重収益構造でリスク分散</a:t>
+              <a:t>▸ FCロイヤルティはFC40店規模で月1,296万円のストック収益（安定成長）</a:t>
             </a:r>
           </a:p>
         </p:txBody>
@@ -4534,7 +4812,7 @@
         </p:nvSpPr>
         <p:spPr>
           <a:xfrm>
-            <a:off x="365760" y="5010912"/>
+            <a:off x="365760" y="5102352"/>
             <a:ext cx="11430000" cy="347472"/>
           </a:xfrm>
           <a:prstGeom prst="rect">
@@ -4556,7 +4834,7 @@
                 </a:solidFill>
                 <a:latin typeface="IPAGothic"/>
               </a:rPr>
-              <a:t>▸ SNS事業部はグループ全店のSNS内製→広告費年300万削減</a:t>
+              <a:t>▸ 成長フェーズ（Y3〜）で利益率が改善：規模の経済＋仕入共通化</a:t>
             </a:r>
           </a:p>
         </p:txBody>
@@ -4569,7 +4847,7 @@
         </p:nvSpPr>
         <p:spPr>
           <a:xfrm>
-            <a:off x="365760" y="5358384"/>
+            <a:off x="365760" y="5449824"/>
             <a:ext cx="11430000" cy="347472"/>
           </a:xfrm>
           <a:prstGeom prst="rect">
@@ -4591,7 +4869,7 @@
                 </a:solidFill>
                 <a:latin typeface="IPAGothic"/>
               </a:rPr>
-              <a:t>▸ 「然カード」共通会員でリピート率向上→LTV最大化</a:t>
+              <a:t>▸ 直営利益＋FCロイヤルティの二重収益でリスク分散</a:t>
             </a:r>
           </a:p>
         </p:txBody>
@@ -4808,7 +5086,7 @@
                 </a:solidFill>
                 <a:latin typeface="IPAGothic"/>
               </a:rPr>
-              <a:t>5,000万円</a:t>
+              <a:t>3,000万円</a:t>
             </a:r>
           </a:p>
         </p:txBody>
@@ -4921,7 +5199,7 @@
                 </a:solidFill>
                 <a:latin typeface="IPAGothic"/>
               </a:rPr>
-              <a:t>第2回（Y2〜3）：2〜3億円  /  VC・事業会社提携  /  関西展開・FC加速</a:t>
+              <a:t>第2回（Y2〜3）：1〜2億円  /  VC・事業会社提携  /  FC加速・関西展開</a:t>
             </a:r>
           </a:p>
         </p:txBody>
@@ -5057,7 +5335,7 @@
                           </a:solidFill>
                           <a:latin typeface="IPAGothic"/>
                         </a:rPr>
-                        <a:t>3,000万円</a:t>
+                        <a:t>2,000万円</a:t>
                       </a:r>
                     </a:p>
                   </a:txBody>
@@ -5080,7 +5358,7 @@
                           </a:solidFill>
                           <a:latin typeface="IPAGothic"/>
                         </a:rPr>
-                        <a:t>内装1,375万＋厨房450万＋敷金＋運転資金</a:t>
+                        <a:t>内装900万＋厨房450万＋敷金＋運転資金（居抜き活用）</a:t>
                       </a:r>
                     </a:p>
                   </a:txBody>
@@ -5128,7 +5406,7 @@
                           </a:solidFill>
                           <a:latin typeface="IPAGothic"/>
                         </a:rPr>
-                        <a:t>930万円</a:t>
+                        <a:t>700万円</a:t>
                       </a:r>
                     </a:p>
                   </a:txBody>
@@ -5151,7 +5429,7 @@
                           </a:solidFill>
                           <a:latin typeface="IPAGothic"/>
                         </a:rPr>
-                        <a:t>内装400万＋設備200万＋保証金＋運転資金</a:t>
+                        <a:t>内装350万＋設備180万＋保証金＋初期運転資金</a:t>
                       </a:r>
                     </a:p>
                   </a:txBody>
@@ -5199,7 +5477,7 @@
                           </a:solidFill>
                           <a:latin typeface="IPAGothic"/>
                         </a:rPr>
-                        <a:t>500万円</a:t>
+                        <a:t>200万円</a:t>
                       </a:r>
                     </a:p>
                   </a:txBody>
@@ -5270,7 +5548,7 @@
                           </a:solidFill>
                           <a:latin typeface="IPAGothic"/>
                         </a:rPr>
-                        <a:t>570万円</a:t>
+                        <a:t>100万円</a:t>
                       </a:r>
                     </a:p>
                   </a:txBody>
@@ -5341,7 +5619,7 @@
                           </a:solidFill>
                           <a:latin typeface="IPAGothic"/>
                         </a:rPr>
-                        <a:t>5,000万円</a:t>
+                        <a:t>3,000万円</a:t>
                       </a:r>
                     </a:p>
                   </a:txBody>
@@ -5421,7 +5699,7 @@
                 </a:solidFill>
                 <a:latin typeface="IPAGothic"/>
               </a:rPr>
-              <a:t>・Y3以降：配当原資となるEBITDA 1.8億円（グループ月商6,000万円）</a:t>
+              <a:t>・Y1〜2：初期投資回収フェーズ。各店舗の安定稼働と収益基盤の構築に集中</a:t>
             </a:r>
           </a:p>
           <a:p>
@@ -5433,7 +5711,19 @@
                 </a:solidFill>
                 <a:latin typeface="IPAGothic"/>
               </a:rPr>
-              <a:t>・Y5：年商20億円・EBITDA 6億円  →  EXIT（M&amp;A or IPO）を視野に</a:t>
+              <a:t>・Y3以降：FCスケールで利益率が改善。EBITDA1.8億円（月商6,000万）で成長が加速</a:t>
+            </a:r>
+          </a:p>
+          <a:p>
+            <a:pPr algn="l"/>
+            <a:r>
+              <a:rPr sz="1100" b="0">
+                <a:solidFill>
+                  <a:srgbClr val="1A1A1A"/>
+                </a:solidFill>
+                <a:latin typeface="IPAGothic"/>
+              </a:rPr>
+              <a:t>・Y5：年商20億円・EBITDA6億円  →  EXIT（M&amp;A or IPO）を視野に</a:t>
             </a:r>
           </a:p>
           <a:p>
@@ -8742,7 +9032,7 @@
                           </a:solidFill>
                           <a:latin typeface="IPAGothic"/>
                         </a:rPr>
-                        <a:t>客単価</a:t>
+                        <a:t>月次売上/店</a:t>
                       </a:r>
                     </a:p>
                   </a:txBody>
@@ -8765,7 +9055,7 @@
                           </a:solidFill>
                           <a:latin typeface="IPAGothic"/>
                         </a:rPr>
-                        <a:t>ターゲット</a:t>
+                        <a:t>利益率</a:t>
                       </a:r>
                     </a:p>
                   </a:txBody>
@@ -8882,7 +9172,7 @@
                           </a:solidFill>
                           <a:latin typeface="IPAGothic"/>
                         </a:rPr>
-                        <a:t>1,800〜9,000円</a:t>
+                        <a:t>960万円</a:t>
                       </a:r>
                     </a:p>
                   </a:txBody>
@@ -8905,7 +9195,7 @@
                           </a:solidFill>
                           <a:latin typeface="IPAGothic"/>
                         </a:rPr>
-                        <a:t>ワーカー＋インバウンド</a:t>
+                        <a:t>15%</a:t>
                       </a:r>
                     </a:p>
                   </a:txBody>
@@ -8951,7 +9241,7 @@
                           </a:solidFill>
                           <a:latin typeface="IPAGothic"/>
                         </a:rPr>
-                        <a:t>330万円</a:t>
+                        <a:t>144万円</a:t>
                       </a:r>
                     </a:p>
                   </a:txBody>
@@ -9022,7 +9312,7 @@
                           </a:solidFill>
                           <a:latin typeface="IPAGothic"/>
                         </a:rPr>
-                        <a:t>4,000〜6,000円</a:t>
+                        <a:t>675万円</a:t>
                       </a:r>
                     </a:p>
                   </a:txBody>
@@ -9045,7 +9335,7 @@
                           </a:solidFill>
                           <a:latin typeface="IPAGothic"/>
                         </a:rPr>
-                        <a:t>20〜40代・飲み会需要</a:t>
+                        <a:t>18%</a:t>
                       </a:r>
                     </a:p>
                   </a:txBody>
@@ -9091,7 +9381,7 @@
                           </a:solidFill>
                           <a:latin typeface="IPAGothic"/>
                         </a:rPr>
-                        <a:t>200万円</a:t>
+                        <a:t>120万円</a:t>
                       </a:r>
                     </a:p>
                   </a:txBody>
@@ -9162,7 +9452,7 @@
                           </a:solidFill>
                           <a:latin typeface="IPAGothic"/>
                         </a:rPr>
-                        <a:t>1,500円</a:t>
+                        <a:t>480万円</a:t>
                       </a:r>
                     </a:p>
                   </a:txBody>
@@ -9185,7 +9475,7 @@
                           </a:solidFill>
                           <a:latin typeface="IPAGothic"/>
                         </a:rPr>
-                        <a:t>ビジネスパーソン（ランチ）</a:t>
+                        <a:t>12.5%</a:t>
                       </a:r>
                     </a:p>
                   </a:txBody>
@@ -9231,7 +9521,7 @@
                           </a:solidFill>
                           <a:latin typeface="IPAGothic"/>
                         </a:rPr>
-                        <a:t>132万円</a:t>
+                        <a:t>60万円</a:t>
                       </a:r>
                     </a:p>
                   </a:txBody>
@@ -9325,7 +9615,7 @@
                           </a:solidFill>
                           <a:latin typeface="IPAGothic"/>
                         </a:rPr>
-                        <a:t>飲食店オーナー</a:t>
+                        <a:t>─</a:t>
                       </a:r>
                     </a:p>
                   </a:txBody>
@@ -11032,7 +11322,7 @@
                 </a:solidFill>
                 <a:latin typeface="IPAGothic"/>
               </a:rPr>
-              <a:t>330万円</a:t>
+              <a:t>144万円</a:t>
             </a:r>
           </a:p>
         </p:txBody>
@@ -11145,7 +11435,7 @@
                 </a:solidFill>
                 <a:latin typeface="IPAGothic"/>
               </a:rPr>
-              <a:t>34%</a:t>
+              <a:t>15%</a:t>
             </a:r>
           </a:p>
         </p:txBody>
@@ -11258,7 +11548,7 @@
                 </a:solidFill>
                 <a:latin typeface="IPAGothic"/>
               </a:rPr>
-              <a:t>15〜18ヶ月</a:t>
+              <a:t>18〜24ヶ月</a:t>
             </a:r>
           </a:p>
         </p:txBody>
@@ -12142,7 +12432,7 @@
                 </a:solidFill>
                 <a:latin typeface="IPAGothic"/>
               </a:rPr>
-              <a:t>600万円</a:t>
+              <a:t>675万円</a:t>
             </a:r>
           </a:p>
         </p:txBody>
@@ -12255,7 +12545,7 @@
                 </a:solidFill>
                 <a:latin typeface="IPAGothic"/>
               </a:rPr>
-              <a:t>200万円</a:t>
+              <a:t>120万円</a:t>
             </a:r>
           </a:p>
         </p:txBody>
@@ -12368,7 +12658,7 @@
                 </a:solidFill>
                 <a:latin typeface="IPAGothic"/>
               </a:rPr>
-              <a:t>33%</a:t>
+              <a:t>18%</a:t>
             </a:r>
           </a:p>
         </p:txBody>
@@ -13411,7 +13701,7 @@
                 </a:solidFill>
                 <a:latin typeface="IPAGothic"/>
               </a:rPr>
-              <a:t>348万円</a:t>
+              <a:t>480万円</a:t>
             </a:r>
           </a:p>
         </p:txBody>
@@ -13524,7 +13814,7 @@
                 </a:solidFill>
                 <a:latin typeface="IPAGothic"/>
               </a:rPr>
-              <a:t>132万円</a:t>
+              <a:t>60万円</a:t>
             </a:r>
           </a:p>
         </p:txBody>
@@ -13637,7 +13927,7 @@
                 </a:solidFill>
                 <a:latin typeface="IPAGothic"/>
               </a:rPr>
-              <a:t>1日43人</a:t>
+              <a:t>12.5%</a:t>
             </a:r>
           </a:p>
         </p:txBody>
@@ -13672,7 +13962,7 @@
                 </a:solidFill>
                 <a:latin typeface="IPAGothic"/>
               </a:rPr>
-              <a:t>BEP</a:t>
+              <a:t>利益率</a:t>
             </a:r>
           </a:p>
         </p:txBody>
@@ -13750,7 +14040,7 @@
                 </a:solidFill>
                 <a:latin typeface="IPAGothic"/>
               </a:rPr>
-              <a:t>8〜10ヶ月</a:t>
+              <a:t>15〜18ヶ月</a:t>
             </a:r>
           </a:p>
         </p:txBody>
@@ -13844,7 +14134,7 @@
                 </a:solidFill>
                 <a:latin typeface="IPAGothic"/>
               </a:rPr>
-              <a:t>月次営業利益：約108万円</a:t>
+              <a:t>月次売上：480万円</a:t>
             </a:r>
           </a:p>
           <a:p>
@@ -13856,7 +14146,7 @@
                 </a:solidFill>
                 <a:latin typeface="IPAGothic"/>
               </a:rPr>
-              <a:t>投資回収期間：約12ヶ月</a:t>
+              <a:t>月次営業利益：約50万円（ロイヤルティ控除後）</a:t>
             </a:r>
           </a:p>
           <a:p>
@@ -13868,7 +14158,19 @@
                 </a:solidFill>
                 <a:latin typeface="IPAGothic"/>
               </a:rPr>
-              <a:t>本部ロイヤルティ：FC10店で月139万円</a:t>
+              <a:t>投資回収期間：約18〜22ヶ月</a:t>
+            </a:r>
+          </a:p>
+          <a:p>
+            <a:pPr algn="l"/>
+            <a:r>
+              <a:rPr sz="1100" b="0">
+                <a:solidFill>
+                  <a:srgbClr val="1A1A1A"/>
+                </a:solidFill>
+                <a:latin typeface="IPAGothic"/>
+              </a:rPr>
+              <a:t>本部ロイヤルティ：FC10店で月192万円（売上の4%）</a:t>
             </a:r>
           </a:p>
         </p:txBody>

--- a/zen/07_融資・投資家資料/然グループ_統合ピッチデッキ_強化版.pptx
+++ b/zen/07_融資・投資家資料/然グループ_統合ピッチデッキ_強化版.pptx
@@ -4129,7 +4129,7 @@
                           </a:solidFill>
                           <a:latin typeface="IPAGothic"/>
                         </a:rPr>
-                        <a:t>675万円</a:t>
+                        <a:t>1,200万円</a:t>
                       </a:r>
                     </a:p>
                   </a:txBody>
@@ -4152,7 +4152,7 @@
                           </a:solidFill>
                           <a:latin typeface="IPAGothic"/>
                         </a:rPr>
-                        <a:t>18%</a:t>
+                        <a:t>17%</a:t>
                       </a:r>
                     </a:p>
                   </a:txBody>
@@ -4175,7 +4175,7 @@
                           </a:solidFill>
                           <a:latin typeface="IPAGothic"/>
                         </a:rPr>
-                        <a:t>120万円</a:t>
+                        <a:t>200万円</a:t>
                       </a:r>
                     </a:p>
                   </a:txBody>
@@ -4221,7 +4221,7 @@
                           </a:solidFill>
                           <a:latin typeface="IPAGothic"/>
                         </a:rPr>
-                        <a:t>600万円</a:t>
+                        <a:t>1,000万円</a:t>
                       </a:r>
                     </a:p>
                   </a:txBody>
@@ -4641,7 +4641,7 @@
                           </a:solidFill>
                           <a:latin typeface="IPAGothic"/>
                         </a:rPr>
-                        <a:t>5,363万円〜</a:t>
+                        <a:t>5,763万円〜</a:t>
                       </a:r>
                     </a:p>
                   </a:txBody>
@@ -4764,7 +4764,7 @@
                 </a:solidFill>
                 <a:latin typeface="IPAGothic"/>
               </a:rPr>
-              <a:t>▸ Y1 グループ月次売上合計：約2,115万円（利益率約15%、月次利益324万円）</a:t>
+              <a:t>▸ Y1 グループ月次売上合計：約2,640万円（利益率約15%、月次利益約404万円）</a:t>
             </a:r>
           </a:p>
         </p:txBody>
@@ -9289,7 +9289,7 @@
                           </a:solidFill>
                           <a:latin typeface="IPAGothic"/>
                         </a:rPr>
-                        <a:t>発酵×炭火居酒屋</a:t>
+                        <a:t>炭火コース＋宴会居酒屋</a:t>
                       </a:r>
                     </a:p>
                   </a:txBody>
@@ -9312,7 +9312,7 @@
                           </a:solidFill>
                           <a:latin typeface="IPAGothic"/>
                         </a:rPr>
-                        <a:t>675万円</a:t>
+                        <a:t>1,200万円</a:t>
                       </a:r>
                     </a:p>
                   </a:txBody>
@@ -9335,7 +9335,7 @@
                           </a:solidFill>
                           <a:latin typeface="IPAGothic"/>
                         </a:rPr>
-                        <a:t>18%</a:t>
+                        <a:t>17%</a:t>
                       </a:r>
                     </a:p>
                   </a:txBody>
@@ -9381,7 +9381,7 @@
                           </a:solidFill>
                           <a:latin typeface="IPAGothic"/>
                         </a:rPr>
-                        <a:t>120万円</a:t>
+                        <a:t>200万円</a:t>
                       </a:r>
                     </a:p>
                   </a:txBody>
@@ -11996,7 +11996,7 @@
                 </a:solidFill>
                 <a:latin typeface="IPAGothic"/>
               </a:rPr>
-              <a:t>▸ 発酵肉（麹漬け・味噌漬け）を核心に据えた独自メニュー</a:t>
+              <a:t>▸ 35〜40坪・55席（個室・半個室15席含む）で宴会需要を獲得</a:t>
             </a:r>
           </a:p>
         </p:txBody>
@@ -12031,7 +12031,7 @@
                 </a:solidFill>
                 <a:latin typeface="IPAGothic"/>
               </a:rPr>
-              <a:t>▸ 炭火グリルをオープンキッチンで「見せる」体験型設計</a:t>
+              <a:t>▸ 発酵肉（麹漬け・味噌漬け）を炭火グリルで「見せる」体験型設計</a:t>
             </a:r>
           </a:p>
         </p:txBody>
@@ -12066,7 +12066,7 @@
                 </a:solidFill>
                 <a:latin typeface="IPAGothic"/>
               </a:rPr>
-              <a:t>▸ 日本酒・焼酎との発酵ペアリングでドリンク単価向上</a:t>
+              <a:t>▸ ディナーコース主体（8,000〜10,000円）＋平日ランチ炭火定食2,000円</a:t>
             </a:r>
           </a:p>
         </p:txBody>
@@ -12101,7 +12101,7 @@
                 </a:solidFill>
                 <a:latin typeface="IPAGothic"/>
               </a:rPr>
-              <a:t>▸ 22〜25坪・30〜35席・客単価 4,000〜6,000円</a:t>
+              <a:t>▸ 日本酒・焼酎の発酵ペアリングでドリンク単価を底上げ</a:t>
             </a:r>
           </a:p>
         </p:txBody>
@@ -12136,7 +12136,7 @@
                 </a:solidFill>
                 <a:latin typeface="IPAGothic"/>
               </a:rPr>
-              <a:t>▸ ディナー特化・予約制で客単価を安定化</a:t>
+              <a:t>▸ 週5日ランチ＋週7日ディナーで昼夜二毛作を実現</a:t>
             </a:r>
           </a:p>
         </p:txBody>
@@ -12432,7 +12432,7 @@
                 </a:solidFill>
                 <a:latin typeface="IPAGothic"/>
               </a:rPr>
-              <a:t>675万円</a:t>
+              <a:t>1,200万円</a:t>
             </a:r>
           </a:p>
         </p:txBody>
@@ -12545,7 +12545,7 @@
                 </a:solidFill>
                 <a:latin typeface="IPAGothic"/>
               </a:rPr>
-              <a:t>120万円</a:t>
+              <a:t>200万円</a:t>
             </a:r>
           </a:p>
         </p:txBody>
@@ -12658,7 +12658,7 @@
                 </a:solidFill>
                 <a:latin typeface="IPAGothic"/>
               </a:rPr>
-              <a:t>18%</a:t>
+              <a:t>17%</a:t>
             </a:r>
           </a:p>
         </p:txBody>
@@ -12771,7 +12771,7 @@
                 </a:solidFill>
                 <a:latin typeface="IPAGothic"/>
               </a:rPr>
-              <a:t>5,000円</a:t>
+              <a:t>8,000〜10,000円</a:t>
             </a:r>
           </a:p>
         </p:txBody>

--- a/zen/07_融資・投資家資料/然グループ_統合ピッチデッキ_強化版.pptx
+++ b/zen/07_融資・投資家資料/然グループ_統合ピッチデッキ_強化版.pptx
@@ -18,6 +18,9 @@
     <p:sldId id="266" r:id="rId17"/>
     <p:sldId id="267" r:id="rId18"/>
     <p:sldId id="268" r:id="rId19"/>
+    <p:sldId id="269" r:id="rId20"/>
+    <p:sldId id="270" r:id="rId21"/>
+    <p:sldId id="271" r:id="rId22"/>
   </p:sldIdLst>
   <p:sldSz cx="12188952" cy="6858000" type="screen4x3"/>
   <p:notesSz cx="6858000" cy="9144000"/>
@@ -3757,7 +3760,7 @@
                 </a:solidFill>
                 <a:latin typeface="IPAGothic"/>
               </a:rPr>
-              <a:t>収益モデルサマリー  ─  グループ損益と成長ストック</a:t>
+              <a:t>5カ年数値計画</a:t>
             </a:r>
           </a:p>
         </p:txBody>
@@ -3779,7 +3782,7 @@
         <p:spPr>
           <a:xfrm>
             <a:off x="274320" y="1005840"/>
-            <a:ext cx="5669280" cy="2834640"/>
+            <a:ext cx="6858000" cy="3840480"/>
           </a:xfrm>
           <a:prstGeom prst="rect">
             <a:avLst/>
@@ -3795,8 +3798,8 @@
           <p:nvPr/>
         </p:nvGraphicFramePr>
         <p:xfrm>
-          <a:off x="5943600" y="1005840"/>
-          <a:ext cx="5943600" cy="2834640"/>
+          <a:off x="7315200" y="1005840"/>
+          <a:ext cx="4572000" cy="3017520"/>
         </p:xfrm>
         <a:graphic>
           <a:graphicData uri="http://schemas.openxmlformats.org/drawingml/2006/table">
@@ -3805,28 +3808,26 @@
                 <a:tableStyleId>{5C22544A-7EE6-4342-B048-85BDC9FD1C3A}</a:tableStyleId>
               </a:tblPr>
               <a:tblGrid>
-                <a:gridCol w="990600"/>
-                <a:gridCol w="990600"/>
-                <a:gridCol w="990600"/>
-                <a:gridCol w="990600"/>
-                <a:gridCol w="990600"/>
-                <a:gridCol w="990600"/>
+                <a:gridCol w="1143000"/>
+                <a:gridCol w="1143000"/>
+                <a:gridCol w="1143000"/>
+                <a:gridCol w="1143000"/>
               </a:tblGrid>
-              <a:tr h="472440">
-                <a:tc>
-                  <a:txBody>
-                    <a:bodyPr/>
-                    <a:lstStyle/>
-                    <a:p>
-                      <a:pPr algn="ctr"/>
-                      <a:r>
-                        <a:rPr sz="1000" b="1">
+              <a:tr h="502920">
+                <a:tc>
+                  <a:txBody>
+                    <a:bodyPr/>
+                    <a:lstStyle/>
+                    <a:p>
+                      <a:pPr algn="ctr"/>
+                      <a:r>
+                        <a:rPr sz="1200" b="1">
                           <a:solidFill>
                             <a:srgbClr val="FFFFFF"/>
                           </a:solidFill>
                           <a:latin typeface="IPAGothic"/>
                         </a:rPr>
-                        <a:t>ブランド</a:t>
+                        <a:t>年度</a:t>
                       </a:r>
                     </a:p>
                   </a:txBody>
@@ -3843,13 +3844,13 @@
                     <a:p>
                       <a:pPr algn="ctr"/>
                       <a:r>
-                        <a:rPr sz="1000" b="1">
+                        <a:rPr sz="1200" b="1">
                           <a:solidFill>
                             <a:srgbClr val="FFFFFF"/>
                           </a:solidFill>
                           <a:latin typeface="IPAGothic"/>
                         </a:rPr>
-                        <a:t>月次売上/店</a:t>
+                        <a:t>店舗数</a:t>
                       </a:r>
                     </a:p>
                   </a:txBody>
@@ -3866,13 +3867,13 @@
                     <a:p>
                       <a:pPr algn="ctr"/>
                       <a:r>
-                        <a:rPr sz="1000" b="1">
+                        <a:rPr sz="1200" b="1">
                           <a:solidFill>
                             <a:srgbClr val="FFFFFF"/>
                           </a:solidFill>
                           <a:latin typeface="IPAGothic"/>
                         </a:rPr>
-                        <a:t>利益率</a:t>
+                        <a:t>月商</a:t>
                       </a:r>
                     </a:p>
                   </a:txBody>
@@ -3889,13 +3890,13 @@
                     <a:p>
                       <a:pPr algn="ctr"/>
                       <a:r>
-                        <a:rPr sz="1000" b="1">
+                        <a:rPr sz="1200" b="1">
                           <a:solidFill>
                             <a:srgbClr val="FFFFFF"/>
                           </a:solidFill>
                           <a:latin typeface="IPAGothic"/>
                         </a:rPr>
-                        <a:t>1店月次利益</a:t>
+                        <a:t>年商</a:t>
                       </a:r>
                     </a:p>
                   </a:txBody>
@@ -3905,68 +3906,22 @@
                     </a:solidFill>
                   </a:tcPr>
                 </a:tc>
-                <a:tc>
-                  <a:txBody>
-                    <a:bodyPr/>
-                    <a:lstStyle/>
-                    <a:p>
-                      <a:pPr algn="ctr"/>
-                      <a:r>
-                        <a:rPr sz="1000" b="1">
-                          <a:solidFill>
-                            <a:srgbClr val="FFFFFF"/>
-                          </a:solidFill>
-                          <a:latin typeface="IPAGothic"/>
-                        </a:rPr>
-                        <a:t>目標店舗</a:t>
-                      </a:r>
-                    </a:p>
-                  </a:txBody>
-                  <a:tcPr>
-                    <a:solidFill>
-                      <a:srgbClr val="2C4A3E"/>
-                    </a:solidFill>
-                  </a:tcPr>
-                </a:tc>
-                <a:tc>
-                  <a:txBody>
-                    <a:bodyPr/>
-                    <a:lstStyle/>
-                    <a:p>
-                      <a:pPr algn="ctr"/>
-                      <a:r>
-                        <a:rPr sz="1000" b="1">
-                          <a:solidFill>
-                            <a:srgbClr val="FFFFFF"/>
-                          </a:solidFill>
-                          <a:latin typeface="IPAGothic"/>
-                        </a:rPr>
-                        <a:t>グループ月次利益</a:t>
-                      </a:r>
-                    </a:p>
-                  </a:txBody>
-                  <a:tcPr>
-                    <a:solidFill>
-                      <a:srgbClr val="2C4A3E"/>
-                    </a:solidFill>
-                  </a:tcPr>
-                </a:tc>
               </a:tr>
-              <a:tr h="472440">
-                <a:tc>
-                  <a:txBody>
-                    <a:bodyPr/>
-                    <a:lstStyle/>
-                    <a:p>
-                      <a:pPr algn="ctr"/>
-                      <a:r>
-                        <a:rPr sz="1000">
+              <a:tr h="502920">
+                <a:tc>
+                  <a:txBody>
+                    <a:bodyPr/>
+                    <a:lstStyle/>
+                    <a:p>
+                      <a:pPr algn="ctr"/>
+                      <a:r>
+                        <a:rPr sz="1200">
                           <a:solidFill>
                             <a:srgbClr val="1A1A1A"/>
                           </a:solidFill>
                           <a:latin typeface="IPAGothic"/>
                         </a:rPr>
-                        <a:t>だし 然</a:t>
+                        <a:t>Y1 2026</a:t>
                       </a:r>
                     </a:p>
                   </a:txBody>
@@ -3983,13 +3938,13 @@
                     <a:p>
                       <a:pPr algn="ctr"/>
                       <a:r>
-                        <a:rPr sz="1000">
+                        <a:rPr sz="1200">
                           <a:solidFill>
                             <a:srgbClr val="1A1A1A"/>
                           </a:solidFill>
                           <a:latin typeface="IPAGothic"/>
                         </a:rPr>
-                        <a:t>960万円</a:t>
+                        <a:t>3店</a:t>
                       </a:r>
                     </a:p>
                   </a:txBody>
@@ -4006,13 +3961,13 @@
                     <a:p>
                       <a:pPr algn="ctr"/>
                       <a:r>
-                        <a:rPr sz="1000">
+                        <a:rPr sz="1200">
                           <a:solidFill>
                             <a:srgbClr val="1A1A1A"/>
                           </a:solidFill>
                           <a:latin typeface="IPAGothic"/>
                         </a:rPr>
-                        <a:t>15%</a:t>
+                        <a:t>1,200万</a:t>
                       </a:r>
                     </a:p>
                   </a:txBody>
@@ -4029,13 +3984,13 @@
                     <a:p>
                       <a:pPr algn="ctr"/>
                       <a:r>
-                        <a:rPr sz="1000">
+                        <a:rPr sz="1200">
                           <a:solidFill>
                             <a:srgbClr val="1A1A1A"/>
                           </a:solidFill>
                           <a:latin typeface="IPAGothic"/>
                         </a:rPr>
-                        <a:t>144万円</a:t>
+                        <a:t>1.4億</a:t>
                       </a:r>
                     </a:p>
                   </a:txBody>
@@ -4045,20 +4000,116 @@
                     </a:solidFill>
                   </a:tcPr>
                 </a:tc>
-                <a:tc>
-                  <a:txBody>
-                    <a:bodyPr/>
-                    <a:lstStyle/>
-                    <a:p>
-                      <a:pPr algn="ctr"/>
-                      <a:r>
-                        <a:rPr sz="1000">
+              </a:tr>
+              <a:tr h="502920">
+                <a:tc>
+                  <a:txBody>
+                    <a:bodyPr/>
+                    <a:lstStyle/>
+                    <a:p>
+                      <a:pPr algn="ctr"/>
+                      <a:r>
+                        <a:rPr sz="1200">
                           <a:solidFill>
                             <a:srgbClr val="1A1A1A"/>
                           </a:solidFill>
                           <a:latin typeface="IPAGothic"/>
                         </a:rPr>
-                        <a:t>20店</a:t>
+                        <a:t>Y2 2027</a:t>
+                      </a:r>
+                    </a:p>
+                  </a:txBody>
+                  <a:tcPr>
+                    <a:solidFill>
+                      <a:srgbClr val="FFFFFF"/>
+                    </a:solidFill>
+                  </a:tcPr>
+                </a:tc>
+                <a:tc>
+                  <a:txBody>
+                    <a:bodyPr/>
+                    <a:lstStyle/>
+                    <a:p>
+                      <a:pPr algn="ctr"/>
+                      <a:r>
+                        <a:rPr sz="1200">
+                          <a:solidFill>
+                            <a:srgbClr val="1A1A1A"/>
+                          </a:solidFill>
+                          <a:latin typeface="IPAGothic"/>
+                        </a:rPr>
+                        <a:t>9店</a:t>
+                      </a:r>
+                    </a:p>
+                  </a:txBody>
+                  <a:tcPr>
+                    <a:solidFill>
+                      <a:srgbClr val="FFFFFF"/>
+                    </a:solidFill>
+                  </a:tcPr>
+                </a:tc>
+                <a:tc>
+                  <a:txBody>
+                    <a:bodyPr/>
+                    <a:lstStyle/>
+                    <a:p>
+                      <a:pPr algn="ctr"/>
+                      <a:r>
+                        <a:rPr sz="1200">
+                          <a:solidFill>
+                            <a:srgbClr val="1A1A1A"/>
+                          </a:solidFill>
+                          <a:latin typeface="IPAGothic"/>
+                        </a:rPr>
+                        <a:t>3,000万</a:t>
+                      </a:r>
+                    </a:p>
+                  </a:txBody>
+                  <a:tcPr>
+                    <a:solidFill>
+                      <a:srgbClr val="FFFFFF"/>
+                    </a:solidFill>
+                  </a:tcPr>
+                </a:tc>
+                <a:tc>
+                  <a:txBody>
+                    <a:bodyPr/>
+                    <a:lstStyle/>
+                    <a:p>
+                      <a:pPr algn="ctr"/>
+                      <a:r>
+                        <a:rPr sz="1200">
+                          <a:solidFill>
+                            <a:srgbClr val="1A1A1A"/>
+                          </a:solidFill>
+                          <a:latin typeface="IPAGothic"/>
+                        </a:rPr>
+                        <a:t>3.6億</a:t>
+                      </a:r>
+                    </a:p>
+                  </a:txBody>
+                  <a:tcPr>
+                    <a:solidFill>
+                      <a:srgbClr val="FFFFFF"/>
+                    </a:solidFill>
+                  </a:tcPr>
+                </a:tc>
+              </a:tr>
+              <a:tr h="502920">
+                <a:tc>
+                  <a:txBody>
+                    <a:bodyPr/>
+                    <a:lstStyle/>
+                    <a:p>
+                      <a:pPr algn="ctr"/>
+                      <a:r>
+                        <a:rPr sz="1200">
+                          <a:solidFill>
+                            <a:srgbClr val="1A1A1A"/>
+                          </a:solidFill>
+                          <a:latin typeface="IPAGothic"/>
+                        </a:rPr>
+                        <a:t>Y3 2028</a:t>
                       </a:r>
                     </a:p>
                   </a:txBody>
@@ -4075,13 +4126,13 @@
                     <a:p>
                       <a:pPr algn="ctr"/>
                       <a:r>
-                        <a:rPr sz="1000">
+                        <a:rPr sz="1200">
                           <a:solidFill>
                             <a:srgbClr val="1A1A1A"/>
                           </a:solidFill>
                           <a:latin typeface="IPAGothic"/>
                         </a:rPr>
-                        <a:t>2,880万円</a:t>
+                        <a:t>22店</a:t>
                       </a:r>
                     </a:p>
                   </a:txBody>
@@ -4091,22 +4142,68 @@
                     </a:solidFill>
                   </a:tcPr>
                 </a:tc>
+                <a:tc>
+                  <a:txBody>
+                    <a:bodyPr/>
+                    <a:lstStyle/>
+                    <a:p>
+                      <a:pPr algn="ctr"/>
+                      <a:r>
+                        <a:rPr sz="1200">
+                          <a:solidFill>
+                            <a:srgbClr val="1A1A1A"/>
+                          </a:solidFill>
+                          <a:latin typeface="IPAGothic"/>
+                        </a:rPr>
+                        <a:t>6,000万</a:t>
+                      </a:r>
+                    </a:p>
+                  </a:txBody>
+                  <a:tcPr>
+                    <a:solidFill>
+                      <a:srgbClr val="F0EEE8"/>
+                    </a:solidFill>
+                  </a:tcPr>
+                </a:tc>
+                <a:tc>
+                  <a:txBody>
+                    <a:bodyPr/>
+                    <a:lstStyle/>
+                    <a:p>
+                      <a:pPr algn="ctr"/>
+                      <a:r>
+                        <a:rPr sz="1200">
+                          <a:solidFill>
+                            <a:srgbClr val="1A1A1A"/>
+                          </a:solidFill>
+                          <a:latin typeface="IPAGothic"/>
+                        </a:rPr>
+                        <a:t>7.2億</a:t>
+                      </a:r>
+                    </a:p>
+                  </a:txBody>
+                  <a:tcPr>
+                    <a:solidFill>
+                      <a:srgbClr val="F0EEE8"/>
+                    </a:solidFill>
+                  </a:tcPr>
+                </a:tc>
               </a:tr>
-              <a:tr h="472440">
-                <a:tc>
-                  <a:txBody>
-                    <a:bodyPr/>
-                    <a:lstStyle/>
-                    <a:p>
-                      <a:pPr algn="ctr"/>
-                      <a:r>
-                        <a:rPr sz="1000">
+              <a:tr h="502920">
+                <a:tc>
+                  <a:txBody>
+                    <a:bodyPr/>
+                    <a:lstStyle/>
+                    <a:p>
+                      <a:pPr algn="ctr"/>
+                      <a:r>
+                        <a:rPr sz="1200">
                           <a:solidFill>
                             <a:srgbClr val="1A1A1A"/>
                           </a:solidFill>
                           <a:latin typeface="IPAGothic"/>
                         </a:rPr>
-                        <a:t>肉酒場 然</a:t>
+                        <a:t>Y4 2029</a:t>
                       </a:r>
                     </a:p>
                   </a:txBody>
@@ -4123,13 +4220,13 @@
                     <a:p>
                       <a:pPr algn="ctr"/>
                       <a:r>
-                        <a:rPr sz="1000">
+                        <a:rPr sz="1200">
                           <a:solidFill>
                             <a:srgbClr val="1A1A1A"/>
                           </a:solidFill>
                           <a:latin typeface="IPAGothic"/>
                         </a:rPr>
-                        <a:t>1,200万円</a:t>
+                        <a:t>35店</a:t>
                       </a:r>
                     </a:p>
                   </a:txBody>
@@ -4146,13 +4243,13 @@
                     <a:p>
                       <a:pPr algn="ctr"/>
                       <a:r>
-                        <a:rPr sz="1000">
+                        <a:rPr sz="1200">
                           <a:solidFill>
                             <a:srgbClr val="1A1A1A"/>
                           </a:solidFill>
                           <a:latin typeface="IPAGothic"/>
                         </a:rPr>
-                        <a:t>17%</a:t>
+                        <a:t>10,000万</a:t>
                       </a:r>
                     </a:p>
                   </a:txBody>
@@ -4169,13 +4266,13 @@
                     <a:p>
                       <a:pPr algn="ctr"/>
                       <a:r>
-                        <a:rPr sz="1000">
+                        <a:rPr sz="1200">
                           <a:solidFill>
                             <a:srgbClr val="1A1A1A"/>
                           </a:solidFill>
                           <a:latin typeface="IPAGothic"/>
                         </a:rPr>
-                        <a:t>200万円</a:t>
+                        <a:t>12億</a:t>
                       </a:r>
                     </a:p>
                   </a:txBody>
@@ -4185,68 +4282,68 @@
                     </a:solidFill>
                   </a:tcPr>
                 </a:tc>
-                <a:tc>
-                  <a:txBody>
-                    <a:bodyPr/>
-                    <a:lstStyle/>
-                    <a:p>
-                      <a:pPr algn="ctr"/>
-                      <a:r>
-                        <a:rPr sz="1000">
+              </a:tr>
+              <a:tr h="502920">
+                <a:tc>
+                  <a:txBody>
+                    <a:bodyPr/>
+                    <a:lstStyle/>
+                    <a:p>
+                      <a:pPr algn="ctr"/>
+                      <a:r>
+                        <a:rPr sz="1200">
                           <a:solidFill>
                             <a:srgbClr val="1A1A1A"/>
                           </a:solidFill>
                           <a:latin typeface="IPAGothic"/>
                         </a:rPr>
-                        <a:t>5店</a:t>
-                      </a:r>
-                    </a:p>
-                  </a:txBody>
-                  <a:tcPr>
-                    <a:solidFill>
-                      <a:srgbClr val="FFFFFF"/>
-                    </a:solidFill>
-                  </a:tcPr>
-                </a:tc>
-                <a:tc>
-                  <a:txBody>
-                    <a:bodyPr/>
-                    <a:lstStyle/>
-                    <a:p>
-                      <a:pPr algn="ctr"/>
-                      <a:r>
-                        <a:rPr sz="1000">
+                        <a:t>Y5 2030</a:t>
+                      </a:r>
+                    </a:p>
+                  </a:txBody>
+                  <a:tcPr>
+                    <a:solidFill>
+                      <a:srgbClr val="F0EEE8"/>
+                    </a:solidFill>
+                  </a:tcPr>
+                </a:tc>
+                <a:tc>
+                  <a:txBody>
+                    <a:bodyPr/>
+                    <a:lstStyle/>
+                    <a:p>
+                      <a:pPr algn="ctr"/>
+                      <a:r>
+                        <a:rPr sz="1200">
                           <a:solidFill>
                             <a:srgbClr val="1A1A1A"/>
                           </a:solidFill>
                           <a:latin typeface="IPAGothic"/>
                         </a:rPr>
-                        <a:t>1,000万円</a:t>
-                      </a:r>
-                    </a:p>
-                  </a:txBody>
-                  <a:tcPr>
-                    <a:solidFill>
-                      <a:srgbClr val="FFFFFF"/>
-                    </a:solidFill>
-                  </a:tcPr>
-                </a:tc>
-              </a:tr>
-              <a:tr h="472440">
-                <a:tc>
-                  <a:txBody>
-                    <a:bodyPr/>
-                    <a:lstStyle/>
-                    <a:p>
-                      <a:pPr algn="ctr"/>
-                      <a:r>
-                        <a:rPr sz="1000">
+                        <a:t>55店</a:t>
+                      </a:r>
+                    </a:p>
+                  </a:txBody>
+                  <a:tcPr>
+                    <a:solidFill>
+                      <a:srgbClr val="F0EEE8"/>
+                    </a:solidFill>
+                  </a:tcPr>
+                </a:tc>
+                <a:tc>
+                  <a:txBody>
+                    <a:bodyPr/>
+                    <a:lstStyle/>
+                    <a:p>
+                      <a:pPr algn="ctr"/>
+                      <a:r>
+                        <a:rPr sz="1200">
                           <a:solidFill>
                             <a:srgbClr val="1A1A1A"/>
                           </a:solidFill>
                           <a:latin typeface="IPAGothic"/>
                         </a:rPr>
-                        <a:t>蕎麦 然</a:t>
+                        <a:t>17,000万</a:t>
                       </a:r>
                     </a:p>
                   </a:txBody>
@@ -4263,385 +4360,13 @@
                     <a:p>
                       <a:pPr algn="ctr"/>
                       <a:r>
-                        <a:rPr sz="1000">
+                        <a:rPr sz="1200">
                           <a:solidFill>
                             <a:srgbClr val="1A1A1A"/>
                           </a:solidFill>
                           <a:latin typeface="IPAGothic"/>
                         </a:rPr>
-                        <a:t>480万円</a:t>
-                      </a:r>
-                    </a:p>
-                  </a:txBody>
-                  <a:tcPr>
-                    <a:solidFill>
-                      <a:srgbClr val="F0EEE8"/>
-                    </a:solidFill>
-                  </a:tcPr>
-                </a:tc>
-                <a:tc>
-                  <a:txBody>
-                    <a:bodyPr/>
-                    <a:lstStyle/>
-                    <a:p>
-                      <a:pPr algn="ctr"/>
-                      <a:r>
-                        <a:rPr sz="1000">
-                          <a:solidFill>
-                            <a:srgbClr val="1A1A1A"/>
-                          </a:solidFill>
-                          <a:latin typeface="IPAGothic"/>
-                        </a:rPr>
-                        <a:t>12.5%</a:t>
-                      </a:r>
-                    </a:p>
-                  </a:txBody>
-                  <a:tcPr>
-                    <a:solidFill>
-                      <a:srgbClr val="F0EEE8"/>
-                    </a:solidFill>
-                  </a:tcPr>
-                </a:tc>
-                <a:tc>
-                  <a:txBody>
-                    <a:bodyPr/>
-                    <a:lstStyle/>
-                    <a:p>
-                      <a:pPr algn="ctr"/>
-                      <a:r>
-                        <a:rPr sz="1000">
-                          <a:solidFill>
-                            <a:srgbClr val="1A1A1A"/>
-                          </a:solidFill>
-                          <a:latin typeface="IPAGothic"/>
-                        </a:rPr>
-                        <a:t>60万円</a:t>
-                      </a:r>
-                    </a:p>
-                  </a:txBody>
-                  <a:tcPr>
-                    <a:solidFill>
-                      <a:srgbClr val="F0EEE8"/>
-                    </a:solidFill>
-                  </a:tcPr>
-                </a:tc>
-                <a:tc>
-                  <a:txBody>
-                    <a:bodyPr/>
-                    <a:lstStyle/>
-                    <a:p>
-                      <a:pPr algn="ctr"/>
-                      <a:r>
-                        <a:rPr sz="1000">
-                          <a:solidFill>
-                            <a:srgbClr val="1A1A1A"/>
-                          </a:solidFill>
-                          <a:latin typeface="IPAGothic"/>
-                        </a:rPr>
-                        <a:t>30店</a:t>
-                      </a:r>
-                    </a:p>
-                  </a:txBody>
-                  <a:tcPr>
-                    <a:solidFill>
-                      <a:srgbClr val="F0EEE8"/>
-                    </a:solidFill>
-                  </a:tcPr>
-                </a:tc>
-                <a:tc>
-                  <a:txBody>
-                    <a:bodyPr/>
-                    <a:lstStyle/>
-                    <a:p>
-                      <a:pPr algn="ctr"/>
-                      <a:r>
-                        <a:rPr sz="1000">
-                          <a:solidFill>
-                            <a:srgbClr val="1A1A1A"/>
-                          </a:solidFill>
-                          <a:latin typeface="IPAGothic"/>
-                        </a:rPr>
-                        <a:t>1,800万円</a:t>
-                      </a:r>
-                    </a:p>
-                  </a:txBody>
-                  <a:tcPr>
-                    <a:solidFill>
-                      <a:srgbClr val="F0EEE8"/>
-                    </a:solidFill>
-                  </a:tcPr>
-                </a:tc>
-              </a:tr>
-              <a:tr h="472440">
-                <a:tc>
-                  <a:txBody>
-                    <a:bodyPr/>
-                    <a:lstStyle/>
-                    <a:p>
-                      <a:pPr algn="ctr"/>
-                      <a:r>
-                        <a:rPr sz="1000">
-                          <a:solidFill>
-                            <a:srgbClr val="1A1A1A"/>
-                          </a:solidFill>
-                          <a:latin typeface="IPAGothic"/>
-                        </a:rPr>
-                        <a:t>SNS事業部</a:t>
-                      </a:r>
-                    </a:p>
-                  </a:txBody>
-                  <a:tcPr>
-                    <a:solidFill>
-                      <a:srgbClr val="FFFFFF"/>
-                    </a:solidFill>
-                  </a:tcPr>
-                </a:tc>
-                <a:tc>
-                  <a:txBody>
-                    <a:bodyPr/>
-                    <a:lstStyle/>
-                    <a:p>
-                      <a:pPr algn="ctr"/>
-                      <a:r>
-                        <a:rPr sz="1000">
-                          <a:solidFill>
-                            <a:srgbClr val="1A1A1A"/>
-                          </a:solidFill>
-                          <a:latin typeface="IPAGothic"/>
-                        </a:rPr>
-                        <a:t>─</a:t>
-                      </a:r>
-                    </a:p>
-                  </a:txBody>
-                  <a:tcPr>
-                    <a:solidFill>
-                      <a:srgbClr val="FFFFFF"/>
-                    </a:solidFill>
-                  </a:tcPr>
-                </a:tc>
-                <a:tc>
-                  <a:txBody>
-                    <a:bodyPr/>
-                    <a:lstStyle/>
-                    <a:p>
-                      <a:pPr algn="ctr"/>
-                      <a:r>
-                        <a:rPr sz="1000">
-                          <a:solidFill>
-                            <a:srgbClr val="1A1A1A"/>
-                          </a:solidFill>
-                          <a:latin typeface="IPAGothic"/>
-                        </a:rPr>
-                        <a:t>─</a:t>
-                      </a:r>
-                    </a:p>
-                  </a:txBody>
-                  <a:tcPr>
-                    <a:solidFill>
-                      <a:srgbClr val="FFFFFF"/>
-                    </a:solidFill>
-                  </a:tcPr>
-                </a:tc>
-                <a:tc>
-                  <a:txBody>
-                    <a:bodyPr/>
-                    <a:lstStyle/>
-                    <a:p>
-                      <a:pPr algn="ctr"/>
-                      <a:r>
-                        <a:rPr sz="1000">
-                          <a:solidFill>
-                            <a:srgbClr val="1A1A1A"/>
-                          </a:solidFill>
-                          <a:latin typeface="IPAGothic"/>
-                        </a:rPr>
-                        <a:t>83万円</a:t>
-                      </a:r>
-                    </a:p>
-                  </a:txBody>
-                  <a:tcPr>
-                    <a:solidFill>
-                      <a:srgbClr val="FFFFFF"/>
-                    </a:solidFill>
-                  </a:tcPr>
-                </a:tc>
-                <a:tc>
-                  <a:txBody>
-                    <a:bodyPr/>
-                    <a:lstStyle/>
-                    <a:p>
-                      <a:pPr algn="ctr"/>
-                      <a:r>
-                        <a:rPr sz="1000">
-                          <a:solidFill>
-                            <a:srgbClr val="1A1A1A"/>
-                          </a:solidFill>
-                          <a:latin typeface="IPAGothic"/>
-                        </a:rPr>
-                        <a:t>─</a:t>
-                      </a:r>
-                    </a:p>
-                  </a:txBody>
-                  <a:tcPr>
-                    <a:solidFill>
-                      <a:srgbClr val="FFFFFF"/>
-                    </a:solidFill>
-                  </a:tcPr>
-                </a:tc>
-                <a:tc>
-                  <a:txBody>
-                    <a:bodyPr/>
-                    <a:lstStyle/>
-                    <a:p>
-                      <a:pPr algn="ctr"/>
-                      <a:r>
-                        <a:rPr sz="1000">
-                          <a:solidFill>
-                            <a:srgbClr val="1A1A1A"/>
-                          </a:solidFill>
-                          <a:latin typeface="IPAGothic"/>
-                        </a:rPr>
-                        <a:t>83万円</a:t>
-                      </a:r>
-                    </a:p>
-                  </a:txBody>
-                  <a:tcPr>
-                    <a:solidFill>
-                      <a:srgbClr val="FFFFFF"/>
-                    </a:solidFill>
-                  </a:tcPr>
-                </a:tc>
-              </a:tr>
-              <a:tr h="472440">
-                <a:tc>
-                  <a:txBody>
-                    <a:bodyPr/>
-                    <a:lstStyle/>
-                    <a:p>
-                      <a:pPr algn="ctr"/>
-                      <a:r>
-                        <a:rPr sz="1000">
-                          <a:solidFill>
-                            <a:srgbClr val="1A1A1A"/>
-                          </a:solidFill>
-                          <a:latin typeface="IPAGothic"/>
-                        </a:rPr>
-                        <a:t>合計（安定期）</a:t>
-                      </a:r>
-                    </a:p>
-                  </a:txBody>
-                  <a:tcPr>
-                    <a:solidFill>
-                      <a:srgbClr val="F0EEE8"/>
-                    </a:solidFill>
-                  </a:tcPr>
-                </a:tc>
-                <a:tc>
-                  <a:txBody>
-                    <a:bodyPr/>
-                    <a:lstStyle/>
-                    <a:p>
-                      <a:pPr algn="ctr"/>
-                      <a:r>
-                        <a:rPr sz="1000">
-                          <a:solidFill>
-                            <a:srgbClr val="1A1A1A"/>
-                          </a:solidFill>
-                          <a:latin typeface="IPAGothic"/>
-                        </a:rPr>
-                        <a:t>─</a:t>
-                      </a:r>
-                    </a:p>
-                  </a:txBody>
-                  <a:tcPr>
-                    <a:solidFill>
-                      <a:srgbClr val="F0EEE8"/>
-                    </a:solidFill>
-                  </a:tcPr>
-                </a:tc>
-                <a:tc>
-                  <a:txBody>
-                    <a:bodyPr/>
-                    <a:lstStyle/>
-                    <a:p>
-                      <a:pPr algn="ctr"/>
-                      <a:r>
-                        <a:rPr sz="1000">
-                          <a:solidFill>
-                            <a:srgbClr val="1A1A1A"/>
-                          </a:solidFill>
-                          <a:latin typeface="IPAGothic"/>
-                        </a:rPr>
-                        <a:t>─</a:t>
-                      </a:r>
-                    </a:p>
-                  </a:txBody>
-                  <a:tcPr>
-                    <a:solidFill>
-                      <a:srgbClr val="F0EEE8"/>
-                    </a:solidFill>
-                  </a:tcPr>
-                </a:tc>
-                <a:tc>
-                  <a:txBody>
-                    <a:bodyPr/>
-                    <a:lstStyle/>
-                    <a:p>
-                      <a:pPr algn="ctr"/>
-                      <a:r>
-                        <a:rPr sz="1000">
-                          <a:solidFill>
-                            <a:srgbClr val="1A1A1A"/>
-                          </a:solidFill>
-                          <a:latin typeface="IPAGothic"/>
-                        </a:rPr>
-                        <a:t>─</a:t>
-                      </a:r>
-                    </a:p>
-                  </a:txBody>
-                  <a:tcPr>
-                    <a:solidFill>
-                      <a:srgbClr val="F0EEE8"/>
-                    </a:solidFill>
-                  </a:tcPr>
-                </a:tc>
-                <a:tc>
-                  <a:txBody>
-                    <a:bodyPr/>
-                    <a:lstStyle/>
-                    <a:p>
-                      <a:pPr algn="ctr"/>
-                      <a:r>
-                        <a:rPr sz="1000">
-                          <a:solidFill>
-                            <a:srgbClr val="1A1A1A"/>
-                          </a:solidFill>
-                          <a:latin typeface="IPAGothic"/>
-                        </a:rPr>
-                        <a:t>55店</a:t>
-                      </a:r>
-                    </a:p>
-                  </a:txBody>
-                  <a:tcPr>
-                    <a:solidFill>
-                      <a:srgbClr val="F0EEE8"/>
-                    </a:solidFill>
-                  </a:tcPr>
-                </a:tc>
-                <a:tc>
-                  <a:txBody>
-                    <a:bodyPr/>
-                    <a:lstStyle/>
-                    <a:p>
-                      <a:pPr algn="ctr"/>
-                      <a:r>
-                        <a:rPr sz="1000">
-                          <a:solidFill>
-                            <a:srgbClr val="1A1A1A"/>
-                          </a:solidFill>
-                          <a:latin typeface="IPAGothic"/>
-                        </a:rPr>
-                        <a:t>5,763万円〜</a:t>
+                        <a:t>20億</a:t>
                       </a:r>
                     </a:p>
                   </a:txBody>
@@ -4664,8 +4389,460 @@
         </p:nvSpPr>
         <p:spPr>
           <a:xfrm>
-            <a:off x="274320" y="4023360"/>
-            <a:ext cx="11612880" cy="347472"/>
+            <a:off x="7315200" y="4206240"/>
+            <a:ext cx="4572000" cy="640080"/>
+          </a:xfrm>
+          <a:prstGeom prst="rect">
+            <a:avLst/>
+          </a:prstGeom>
+          <a:solidFill>
+            <a:srgbClr val="C49A22"/>
+          </a:solidFill>
+          <a:ln>
+            <a:noFill/>
+          </a:ln>
+        </p:spPr>
+        <p:style>
+          <a:lnRef idx="1">
+            <a:schemeClr val="accent1"/>
+          </a:lnRef>
+          <a:fillRef idx="3">
+            <a:schemeClr val="accent1"/>
+          </a:fillRef>
+          <a:effectRef idx="2">
+            <a:schemeClr val="accent1"/>
+          </a:effectRef>
+          <a:fontRef idx="minor">
+            <a:schemeClr val="lt1"/>
+          </a:fontRef>
+        </p:style>
+        <p:txBody>
+          <a:bodyPr rtlCol="0" anchor="ctr"/>
+          <a:lstStyle/>
+          <a:p>
+            <a:pPr algn="ctr"/>
+          </a:p>
+        </p:txBody>
+      </p:sp>
+      <p:sp>
+        <p:nvSpPr>
+          <p:cNvPr id="7" name="TextBox 6"/>
+          <p:cNvSpPr txBox="1"/>
+          <p:nvPr/>
+        </p:nvSpPr>
+        <p:spPr>
+          <a:xfrm>
+            <a:off x="7406640" y="4251960"/>
+            <a:ext cx="4389120" cy="274320"/>
+          </a:xfrm>
+          <a:prstGeom prst="rect">
+            <a:avLst/>
+          </a:prstGeom>
+          <a:noFill/>
+        </p:spPr>
+        <p:txBody>
+          <a:bodyPr wrap="square">
+            <a:spAutoFit/>
+          </a:bodyPr>
+          <a:lstStyle/>
+          <a:p>
+            <a:pPr algn="l"/>
+            <a:r>
+              <a:rPr sz="1000" b="1" i="0">
+                <a:solidFill>
+                  <a:srgbClr val="FFFFFF"/>
+                </a:solidFill>
+                <a:latin typeface="IPAGothic"/>
+              </a:rPr>
+              <a:t>Year 5 目標</a:t>
+            </a:r>
+          </a:p>
+        </p:txBody>
+      </p:sp>
+      <p:sp>
+        <p:nvSpPr>
+          <p:cNvPr id="8" name="TextBox 7"/>
+          <p:cNvSpPr txBox="1"/>
+          <p:nvPr/>
+        </p:nvSpPr>
+        <p:spPr>
+          <a:xfrm>
+            <a:off x="7406640" y="4526280"/>
+            <a:ext cx="4389120" cy="320040"/>
+          </a:xfrm>
+          <a:prstGeom prst="rect">
+            <a:avLst/>
+          </a:prstGeom>
+          <a:noFill/>
+        </p:spPr>
+        <p:txBody>
+          <a:bodyPr wrap="square">
+            <a:spAutoFit/>
+          </a:bodyPr>
+          <a:lstStyle/>
+          <a:p>
+            <a:pPr algn="ctr"/>
+            <a:r>
+              <a:rPr sz="1100" b="1" i="0">
+                <a:solidFill>
+                  <a:srgbClr val="FFFFFF"/>
+                </a:solidFill>
+                <a:latin typeface="IPAGothic"/>
+              </a:rPr>
+              <a:t>年商 20億円  /  55店舗  /  EBITDA 6億円</a:t>
+            </a:r>
+          </a:p>
+        </p:txBody>
+      </p:sp>
+      <p:sp>
+        <p:nvSpPr>
+          <p:cNvPr id="9" name="Rectangle 8"/>
+          <p:cNvSpPr/>
+          <p:nvPr/>
+        </p:nvSpPr>
+        <p:spPr>
+          <a:xfrm>
+            <a:off x="274320" y="5074920"/>
+            <a:ext cx="2743200" cy="1463040"/>
+          </a:xfrm>
+          <a:prstGeom prst="rect">
+            <a:avLst/>
+          </a:prstGeom>
+          <a:solidFill>
+            <a:srgbClr val="C49A22"/>
+          </a:solidFill>
+          <a:ln>
+            <a:noFill/>
+          </a:ln>
+        </p:spPr>
+        <p:style>
+          <a:lnRef idx="1">
+            <a:schemeClr val="accent1"/>
+          </a:lnRef>
+          <a:fillRef idx="3">
+            <a:schemeClr val="accent1"/>
+          </a:fillRef>
+          <a:effectRef idx="2">
+            <a:schemeClr val="accent1"/>
+          </a:effectRef>
+          <a:fontRef idx="minor">
+            <a:schemeClr val="lt1"/>
+          </a:fontRef>
+        </p:style>
+        <p:txBody>
+          <a:bodyPr rtlCol="0" anchor="ctr"/>
+          <a:lstStyle/>
+          <a:p>
+            <a:pPr algn="ctr"/>
+          </a:p>
+        </p:txBody>
+      </p:sp>
+      <p:sp>
+        <p:nvSpPr>
+          <p:cNvPr id="10" name="TextBox 9"/>
+          <p:cNvSpPr txBox="1"/>
+          <p:nvPr/>
+        </p:nvSpPr>
+        <p:spPr>
+          <a:xfrm>
+            <a:off x="274320" y="5120640"/>
+            <a:ext cx="2743200" cy="411480"/>
+          </a:xfrm>
+          <a:prstGeom prst="rect">
+            <a:avLst/>
+          </a:prstGeom>
+          <a:noFill/>
+        </p:spPr>
+        <p:txBody>
+          <a:bodyPr wrap="square">
+            <a:spAutoFit/>
+          </a:bodyPr>
+          <a:lstStyle/>
+          <a:p>
+            <a:pPr algn="ctr"/>
+            <a:r>
+              <a:rPr sz="1800" b="1" i="0">
+                <a:solidFill>
+                  <a:srgbClr val="FFFFFF"/>
+                </a:solidFill>
+                <a:latin typeface="IPAGothic"/>
+              </a:rPr>
+              <a:t>Y1</a:t>
+            </a:r>
+          </a:p>
+        </p:txBody>
+      </p:sp>
+      <p:sp>
+        <p:nvSpPr>
+          <p:cNvPr id="11" name="TextBox 10"/>
+          <p:cNvSpPr txBox="1"/>
+          <p:nvPr/>
+        </p:nvSpPr>
+        <p:spPr>
+          <a:xfrm>
+            <a:off x="365760" y="5577840"/>
+            <a:ext cx="2560320" cy="822960"/>
+          </a:xfrm>
+          <a:prstGeom prst="rect">
+            <a:avLst/>
+          </a:prstGeom>
+          <a:noFill/>
+        </p:spPr>
+        <p:txBody>
+          <a:bodyPr wrap="square">
+            <a:spAutoFit/>
+          </a:bodyPr>
+          <a:lstStyle/>
+          <a:p>
+            <a:pPr algn="ctr"/>
+            <a:r>
+              <a:rPr sz="1000" b="0" i="0">
+                <a:solidFill>
+                  <a:srgbClr val="FFFFFF"/>
+                </a:solidFill>
+                <a:latin typeface="IPAGothic"/>
+              </a:rPr>
+              <a:t>だし然・蕎麦然1号店開業</a:t>
+            </a:r>
+          </a:p>
+        </p:txBody>
+      </p:sp>
+      <p:sp>
+        <p:nvSpPr>
+          <p:cNvPr id="12" name="Rectangle 11"/>
+          <p:cNvSpPr/>
+          <p:nvPr/>
+        </p:nvSpPr>
+        <p:spPr>
+          <a:xfrm>
+            <a:off x="3200400" y="5074920"/>
+            <a:ext cx="2743200" cy="1463040"/>
+          </a:xfrm>
+          <a:prstGeom prst="rect">
+            <a:avLst/>
+          </a:prstGeom>
+          <a:solidFill>
+            <a:srgbClr val="8B2020"/>
+          </a:solidFill>
+          <a:ln>
+            <a:noFill/>
+          </a:ln>
+        </p:spPr>
+        <p:style>
+          <a:lnRef idx="1">
+            <a:schemeClr val="accent1"/>
+          </a:lnRef>
+          <a:fillRef idx="3">
+            <a:schemeClr val="accent1"/>
+          </a:fillRef>
+          <a:effectRef idx="2">
+            <a:schemeClr val="accent1"/>
+          </a:effectRef>
+          <a:fontRef idx="minor">
+            <a:schemeClr val="lt1"/>
+          </a:fontRef>
+        </p:style>
+        <p:txBody>
+          <a:bodyPr rtlCol="0" anchor="ctr"/>
+          <a:lstStyle/>
+          <a:p>
+            <a:pPr algn="ctr"/>
+          </a:p>
+        </p:txBody>
+      </p:sp>
+      <p:sp>
+        <p:nvSpPr>
+          <p:cNvPr id="13" name="TextBox 12"/>
+          <p:cNvSpPr txBox="1"/>
+          <p:nvPr/>
+        </p:nvSpPr>
+        <p:spPr>
+          <a:xfrm>
+            <a:off x="3200400" y="5120640"/>
+            <a:ext cx="2743200" cy="411480"/>
+          </a:xfrm>
+          <a:prstGeom prst="rect">
+            <a:avLst/>
+          </a:prstGeom>
+          <a:noFill/>
+        </p:spPr>
+        <p:txBody>
+          <a:bodyPr wrap="square">
+            <a:spAutoFit/>
+          </a:bodyPr>
+          <a:lstStyle/>
+          <a:p>
+            <a:pPr algn="ctr"/>
+            <a:r>
+              <a:rPr sz="1800" b="1" i="0">
+                <a:solidFill>
+                  <a:srgbClr val="C49A22"/>
+                </a:solidFill>
+                <a:latin typeface="IPAGothic"/>
+              </a:rPr>
+              <a:t>Y2</a:t>
+            </a:r>
+          </a:p>
+        </p:txBody>
+      </p:sp>
+      <p:sp>
+        <p:nvSpPr>
+          <p:cNvPr id="14" name="TextBox 13"/>
+          <p:cNvSpPr txBox="1"/>
+          <p:nvPr/>
+        </p:nvSpPr>
+        <p:spPr>
+          <a:xfrm>
+            <a:off x="3291840" y="5577840"/>
+            <a:ext cx="2560320" cy="822960"/>
+          </a:xfrm>
+          <a:prstGeom prst="rect">
+            <a:avLst/>
+          </a:prstGeom>
+          <a:noFill/>
+        </p:spPr>
+        <p:txBody>
+          <a:bodyPr wrap="square">
+            <a:spAutoFit/>
+          </a:bodyPr>
+          <a:lstStyle/>
+          <a:p>
+            <a:pPr algn="ctr"/>
+            <a:r>
+              <a:rPr sz="1000" b="0" i="0">
+                <a:solidFill>
+                  <a:srgbClr val="FFFFFF"/>
+                </a:solidFill>
+                <a:latin typeface="IPAGothic"/>
+              </a:rPr>
+              <a:t>FC展開開始・肉酒場然2号店</a:t>
+            </a:r>
+          </a:p>
+        </p:txBody>
+      </p:sp>
+      <p:sp>
+        <p:nvSpPr>
+          <p:cNvPr id="15" name="Rectangle 14"/>
+          <p:cNvSpPr/>
+          <p:nvPr/>
+        </p:nvSpPr>
+        <p:spPr>
+          <a:xfrm>
+            <a:off x="6126480" y="5074920"/>
+            <a:ext cx="2743200" cy="1463040"/>
+          </a:xfrm>
+          <a:prstGeom prst="rect">
+            <a:avLst/>
+          </a:prstGeom>
+          <a:solidFill>
+            <a:srgbClr val="1A2A4A"/>
+          </a:solidFill>
+          <a:ln>
+            <a:noFill/>
+          </a:ln>
+        </p:spPr>
+        <p:style>
+          <a:lnRef idx="1">
+            <a:schemeClr val="accent1"/>
+          </a:lnRef>
+          <a:fillRef idx="3">
+            <a:schemeClr val="accent1"/>
+          </a:fillRef>
+          <a:effectRef idx="2">
+            <a:schemeClr val="accent1"/>
+          </a:effectRef>
+          <a:fontRef idx="minor">
+            <a:schemeClr val="lt1"/>
+          </a:fontRef>
+        </p:style>
+        <p:txBody>
+          <a:bodyPr rtlCol="0" anchor="ctr"/>
+          <a:lstStyle/>
+          <a:p>
+            <a:pPr algn="ctr"/>
+          </a:p>
+        </p:txBody>
+      </p:sp>
+      <p:sp>
+        <p:nvSpPr>
+          <p:cNvPr id="16" name="TextBox 15"/>
+          <p:cNvSpPr txBox="1"/>
+          <p:nvPr/>
+        </p:nvSpPr>
+        <p:spPr>
+          <a:xfrm>
+            <a:off x="6126480" y="5120640"/>
+            <a:ext cx="2743200" cy="411480"/>
+          </a:xfrm>
+          <a:prstGeom prst="rect">
+            <a:avLst/>
+          </a:prstGeom>
+          <a:noFill/>
+        </p:spPr>
+        <p:txBody>
+          <a:bodyPr wrap="square">
+            <a:spAutoFit/>
+          </a:bodyPr>
+          <a:lstStyle/>
+          <a:p>
+            <a:pPr algn="ctr"/>
+            <a:r>
+              <a:rPr sz="1800" b="1" i="0">
+                <a:solidFill>
+                  <a:srgbClr val="C49A22"/>
+                </a:solidFill>
+                <a:latin typeface="IPAGothic"/>
+              </a:rPr>
+              <a:t>Y3</a:t>
+            </a:r>
+          </a:p>
+        </p:txBody>
+      </p:sp>
+      <p:sp>
+        <p:nvSpPr>
+          <p:cNvPr id="17" name="TextBox 16"/>
+          <p:cNvSpPr txBox="1"/>
+          <p:nvPr/>
+        </p:nvSpPr>
+        <p:spPr>
+          <a:xfrm>
+            <a:off x="6217920" y="5577840"/>
+            <a:ext cx="2560320" cy="822960"/>
+          </a:xfrm>
+          <a:prstGeom prst="rect">
+            <a:avLst/>
+          </a:prstGeom>
+          <a:noFill/>
+        </p:spPr>
+        <p:txBody>
+          <a:bodyPr wrap="square">
+            <a:spAutoFit/>
+          </a:bodyPr>
+          <a:lstStyle/>
+          <a:p>
+            <a:pPr algn="ctr"/>
+            <a:r>
+              <a:rPr sz="1000" b="0" i="0">
+                <a:solidFill>
+                  <a:srgbClr val="FFFFFF"/>
+                </a:solidFill>
+                <a:latin typeface="IPAGothic"/>
+              </a:rPr>
+              <a:t>関西進出・SNS事業部外販</a:t>
+            </a:r>
+          </a:p>
+        </p:txBody>
+      </p:sp>
+      <p:sp>
+        <p:nvSpPr>
+          <p:cNvPr id="18" name="Rectangle 17"/>
+          <p:cNvSpPr/>
+          <p:nvPr/>
+        </p:nvSpPr>
+        <p:spPr>
+          <a:xfrm>
+            <a:off x="9052560" y="5074920"/>
+            <a:ext cx="2743200" cy="1463040"/>
           </a:xfrm>
           <a:prstGeom prst="rect">
             <a:avLst/>
@@ -4701,14 +4878,14 @@
       </p:sp>
       <p:sp>
         <p:nvSpPr>
-          <p:cNvPr id="7" name="TextBox 6"/>
+          <p:cNvPr id="19" name="TextBox 18"/>
           <p:cNvSpPr txBox="1"/>
           <p:nvPr/>
         </p:nvSpPr>
         <p:spPr>
           <a:xfrm>
-            <a:off x="365760" y="4059936"/>
-            <a:ext cx="11430000" cy="292608"/>
+            <a:off x="9052560" y="5120640"/>
+            <a:ext cx="2743200" cy="411480"/>
           </a:xfrm>
           <a:prstGeom prst="rect">
             <a:avLst/>
@@ -4721,29 +4898,29 @@
           </a:bodyPr>
           <a:lstStyle/>
           <a:p>
-            <a:pPr algn="l"/>
-            <a:r>
-              <a:rPr sz="1200" b="1" i="0">
-                <a:solidFill>
-                  <a:srgbClr val="FFFFFF"/>
-                </a:solidFill>
-                <a:latin typeface="IPAGothic"/>
-              </a:rPr>
-              <a:t>収益構造のポイント</a:t>
-            </a:r>
-          </a:p>
-        </p:txBody>
-      </p:sp>
-      <p:sp>
-        <p:nvSpPr>
-          <p:cNvPr id="8" name="TextBox 7"/>
+            <a:pPr algn="ctr"/>
+            <a:r>
+              <a:rPr sz="1800" b="1" i="0">
+                <a:solidFill>
+                  <a:srgbClr val="C49A22"/>
+                </a:solidFill>
+                <a:latin typeface="IPAGothic"/>
+              </a:rPr>
+              <a:t>Y5</a:t>
+            </a:r>
+          </a:p>
+        </p:txBody>
+      </p:sp>
+      <p:sp>
+        <p:nvSpPr>
+          <p:cNvPr id="20" name="TextBox 19"/>
           <p:cNvSpPr txBox="1"/>
           <p:nvPr/>
         </p:nvSpPr>
         <p:spPr>
           <a:xfrm>
-            <a:off x="365760" y="4407408"/>
-            <a:ext cx="11430000" cy="347472"/>
+            <a:off x="9144000" y="5577840"/>
+            <a:ext cx="2560320" cy="822960"/>
           </a:xfrm>
           <a:prstGeom prst="rect">
             <a:avLst/>
@@ -4756,120 +4933,15 @@
           </a:bodyPr>
           <a:lstStyle/>
           <a:p>
-            <a:pPr algn="l"/>
-            <a:r>
-              <a:rPr sz="1100" b="0" i="0">
-                <a:solidFill>
-                  <a:srgbClr val="1A1A1A"/>
-                </a:solidFill>
-                <a:latin typeface="IPAGothic"/>
-              </a:rPr>
-              <a:t>▸ Y1 グループ月次売上合計：約2,640万円（利益率約15%、月次利益約404万円）</a:t>
-            </a:r>
-          </a:p>
-        </p:txBody>
-      </p:sp>
-      <p:sp>
-        <p:nvSpPr>
-          <p:cNvPr id="9" name="TextBox 8"/>
-          <p:cNvSpPr txBox="1"/>
-          <p:nvPr/>
-        </p:nvSpPr>
-        <p:spPr>
-          <a:xfrm>
-            <a:off x="365760" y="4754880"/>
-            <a:ext cx="11430000" cy="347472"/>
-          </a:xfrm>
-          <a:prstGeom prst="rect">
-            <a:avLst/>
-          </a:prstGeom>
-          <a:noFill/>
-        </p:spPr>
-        <p:txBody>
-          <a:bodyPr wrap="square">
-            <a:spAutoFit/>
-          </a:bodyPr>
-          <a:lstStyle/>
-          <a:p>
-            <a:pPr algn="l"/>
-            <a:r>
-              <a:rPr sz="1100" b="0" i="0">
-                <a:solidFill>
-                  <a:srgbClr val="1A1A1A"/>
-                </a:solidFill>
-                <a:latin typeface="IPAGothic"/>
-              </a:rPr>
-              <a:t>▸ FCロイヤルティはFC40店規模で月1,296万円のストック収益（安定成長）</a:t>
-            </a:r>
-          </a:p>
-        </p:txBody>
-      </p:sp>
-      <p:sp>
-        <p:nvSpPr>
-          <p:cNvPr id="10" name="TextBox 9"/>
-          <p:cNvSpPr txBox="1"/>
-          <p:nvPr/>
-        </p:nvSpPr>
-        <p:spPr>
-          <a:xfrm>
-            <a:off x="365760" y="5102352"/>
-            <a:ext cx="11430000" cy="347472"/>
-          </a:xfrm>
-          <a:prstGeom prst="rect">
-            <a:avLst/>
-          </a:prstGeom>
-          <a:noFill/>
-        </p:spPr>
-        <p:txBody>
-          <a:bodyPr wrap="square">
-            <a:spAutoFit/>
-          </a:bodyPr>
-          <a:lstStyle/>
-          <a:p>
-            <a:pPr algn="l"/>
-            <a:r>
-              <a:rPr sz="1100" b="0" i="0">
-                <a:solidFill>
-                  <a:srgbClr val="1A1A1A"/>
-                </a:solidFill>
-                <a:latin typeface="IPAGothic"/>
-              </a:rPr>
-              <a:t>▸ 成長フェーズ（Y3〜）で利益率が改善：規模の経済＋仕入共通化</a:t>
-            </a:r>
-          </a:p>
-        </p:txBody>
-      </p:sp>
-      <p:sp>
-        <p:nvSpPr>
-          <p:cNvPr id="11" name="TextBox 10"/>
-          <p:cNvSpPr txBox="1"/>
-          <p:nvPr/>
-        </p:nvSpPr>
-        <p:spPr>
-          <a:xfrm>
-            <a:off x="365760" y="5449824"/>
-            <a:ext cx="11430000" cy="347472"/>
-          </a:xfrm>
-          <a:prstGeom prst="rect">
-            <a:avLst/>
-          </a:prstGeom>
-          <a:noFill/>
-        </p:spPr>
-        <p:txBody>
-          <a:bodyPr wrap="square">
-            <a:spAutoFit/>
-          </a:bodyPr>
-          <a:lstStyle/>
-          <a:p>
-            <a:pPr algn="l"/>
-            <a:r>
-              <a:rPr sz="1100" b="0" i="0">
-                <a:solidFill>
-                  <a:srgbClr val="1A1A1A"/>
-                </a:solidFill>
-                <a:latin typeface="IPAGothic"/>
-              </a:rPr>
-              <a:t>▸ 直営利益＋FCロイヤルティの二重収益でリスク分散</a:t>
+            <a:pPr algn="ctr"/>
+            <a:r>
+              <a:rPr sz="1000" b="0" i="0">
+                <a:solidFill>
+                  <a:srgbClr val="FFFFFF"/>
+                </a:solidFill>
+                <a:latin typeface="IPAGothic"/>
+              </a:rPr>
+              <a:t>55店舗・年商20億・EXIT準備</a:t>
             </a:r>
           </a:p>
         </p:txBody>
@@ -4973,248 +5045,46 @@
                 </a:solidFill>
                 <a:latin typeface="IPAGothic"/>
               </a:rPr>
-              <a:t>資金調達計画</a:t>
-            </a:r>
-          </a:p>
-        </p:txBody>
-      </p:sp>
-      <p:sp>
-        <p:nvSpPr>
-          <p:cNvPr id="4" name="Rectangle 3"/>
-          <p:cNvSpPr/>
-          <p:nvPr/>
-        </p:nvSpPr>
+              <a:t>収益モデルサマリー  ─  グループ損益と成長ストック</a:t>
+            </a:r>
+          </a:p>
+        </p:txBody>
+      </p:sp>
+      <p:pic>
+        <p:nvPicPr>
+          <p:cNvPr id="4" name="Picture 3" descr="image.png"/>
+          <p:cNvPicPr>
+            <a:picLocks noChangeAspect="1"/>
+          </p:cNvPicPr>
+          <p:nvPr/>
+        </p:nvPicPr>
+        <p:blipFill>
+          <a:blip r:embed="rId2"/>
+          <a:stretch>
+            <a:fillRect/>
+          </a:stretch>
+        </p:blipFill>
         <p:spPr>
           <a:xfrm>
             <a:off x="274320" y="1005840"/>
-            <a:ext cx="4114800" cy="1188720"/>
-          </a:xfrm>
-          <a:prstGeom prst="rect">
-            <a:avLst/>
-          </a:prstGeom>
-          <a:solidFill>
-            <a:srgbClr val="2C4A3E"/>
-          </a:solidFill>
-          <a:ln>
-            <a:noFill/>
-          </a:ln>
-        </p:spPr>
-        <p:style>
-          <a:lnRef idx="1">
-            <a:schemeClr val="accent1"/>
-          </a:lnRef>
-          <a:fillRef idx="3">
-            <a:schemeClr val="accent1"/>
-          </a:fillRef>
-          <a:effectRef idx="2">
-            <a:schemeClr val="accent1"/>
-          </a:effectRef>
-          <a:fontRef idx="minor">
-            <a:schemeClr val="lt1"/>
-          </a:fontRef>
-        </p:style>
-        <p:txBody>
-          <a:bodyPr rtlCol="0" anchor="ctr"/>
-          <a:lstStyle/>
-          <a:p>
-            <a:pPr algn="ctr"/>
-          </a:p>
-        </p:txBody>
-      </p:sp>
-      <p:sp>
-        <p:nvSpPr>
-          <p:cNvPr id="5" name="TextBox 4"/>
-          <p:cNvSpPr txBox="1"/>
-          <p:nvPr/>
-        </p:nvSpPr>
-        <p:spPr>
-          <a:xfrm>
-            <a:off x="365760" y="1051560"/>
-            <a:ext cx="3931920" cy="365760"/>
-          </a:xfrm>
-          <a:prstGeom prst="rect">
-            <a:avLst/>
-          </a:prstGeom>
-          <a:noFill/>
-        </p:spPr>
-        <p:txBody>
-          <a:bodyPr wrap="square">
-            <a:spAutoFit/>
-          </a:bodyPr>
-          <a:lstStyle/>
-          <a:p>
-            <a:pPr algn="l"/>
-            <a:r>
-              <a:rPr sz="1300" b="0" i="0">
-                <a:solidFill>
-                  <a:srgbClr val="FFFFFF"/>
-                </a:solidFill>
-                <a:latin typeface="IPAGothic"/>
-              </a:rPr>
-              <a:t>第1回 調達目標</a:t>
-            </a:r>
-          </a:p>
-        </p:txBody>
-      </p:sp>
-      <p:sp>
-        <p:nvSpPr>
-          <p:cNvPr id="6" name="TextBox 5"/>
-          <p:cNvSpPr txBox="1"/>
-          <p:nvPr/>
-        </p:nvSpPr>
-        <p:spPr>
-          <a:xfrm>
-            <a:off x="365760" y="1417320"/>
-            <a:ext cx="3931920" cy="685800"/>
-          </a:xfrm>
-          <a:prstGeom prst="rect">
-            <a:avLst/>
-          </a:prstGeom>
-          <a:noFill/>
-        </p:spPr>
-        <p:txBody>
-          <a:bodyPr wrap="square">
-            <a:spAutoFit/>
-          </a:bodyPr>
-          <a:lstStyle/>
-          <a:p>
-            <a:pPr algn="ctr"/>
-            <a:r>
-              <a:rPr sz="3800" b="1" i="0">
-                <a:solidFill>
-                  <a:srgbClr val="C49A22"/>
-                </a:solidFill>
-                <a:latin typeface="IPAGothic"/>
-              </a:rPr>
-              <a:t>3,000万円</a:t>
-            </a:r>
-          </a:p>
-        </p:txBody>
-      </p:sp>
-      <p:sp>
-        <p:nvSpPr>
-          <p:cNvPr id="7" name="Rectangle 6"/>
-          <p:cNvSpPr/>
-          <p:nvPr/>
-        </p:nvSpPr>
-        <p:spPr>
-          <a:xfrm>
-            <a:off x="4663440" y="1005840"/>
-            <a:ext cx="7223760" cy="1188720"/>
-          </a:xfrm>
-          <a:prstGeom prst="rect">
-            <a:avLst/>
-          </a:prstGeom>
-          <a:solidFill>
-            <a:srgbClr val="F0EEE8"/>
-          </a:solidFill>
-          <a:ln>
-            <a:noFill/>
-          </a:ln>
-        </p:spPr>
-        <p:style>
-          <a:lnRef idx="1">
-            <a:schemeClr val="accent1"/>
-          </a:lnRef>
-          <a:fillRef idx="3">
-            <a:schemeClr val="accent1"/>
-          </a:fillRef>
-          <a:effectRef idx="2">
-            <a:schemeClr val="accent1"/>
-          </a:effectRef>
-          <a:fontRef idx="minor">
-            <a:schemeClr val="lt1"/>
-          </a:fontRef>
-        </p:style>
-        <p:txBody>
-          <a:bodyPr rtlCol="0" anchor="ctr"/>
-          <a:lstStyle/>
-          <a:p>
-            <a:pPr algn="ctr"/>
-          </a:p>
-        </p:txBody>
-      </p:sp>
-      <p:sp>
-        <p:nvSpPr>
-          <p:cNvPr id="8" name="TextBox 7"/>
-          <p:cNvSpPr txBox="1"/>
-          <p:nvPr/>
-        </p:nvSpPr>
-        <p:spPr>
-          <a:xfrm>
-            <a:off x="4754880" y="1234440"/>
-            <a:ext cx="7040880" cy="457200"/>
-          </a:xfrm>
-          <a:prstGeom prst="rect">
-            <a:avLst/>
-          </a:prstGeom>
-          <a:noFill/>
-        </p:spPr>
-        <p:txBody>
-          <a:bodyPr wrap="square">
-            <a:spAutoFit/>
-          </a:bodyPr>
-          <a:lstStyle/>
-          <a:p>
-            <a:pPr algn="l"/>
-            <a:r>
-              <a:rPr sz="1500" b="1" i="0">
-                <a:solidFill>
-                  <a:srgbClr val="2C4A3E"/>
-                </a:solidFill>
-                <a:latin typeface="IPAGothic"/>
-              </a:rPr>
-              <a:t>調達方法：日本政策金融公庫 ＋ エンジェル投資家</a:t>
-            </a:r>
-          </a:p>
-        </p:txBody>
-      </p:sp>
-      <p:sp>
-        <p:nvSpPr>
-          <p:cNvPr id="9" name="TextBox 8"/>
-          <p:cNvSpPr txBox="1"/>
-          <p:nvPr/>
-        </p:nvSpPr>
-        <p:spPr>
-          <a:xfrm>
-            <a:off x="4754880" y="1691640"/>
-            <a:ext cx="7040880" cy="365760"/>
-          </a:xfrm>
-          <a:prstGeom prst="rect">
-            <a:avLst/>
-          </a:prstGeom>
-          <a:noFill/>
-        </p:spPr>
-        <p:txBody>
-          <a:bodyPr wrap="square">
-            <a:spAutoFit/>
-          </a:bodyPr>
-          <a:lstStyle/>
-          <a:p>
-            <a:pPr algn="l"/>
-            <a:r>
-              <a:rPr sz="1100" b="0" i="0">
-                <a:solidFill>
-                  <a:srgbClr val="1A1A1A"/>
-                </a:solidFill>
-                <a:latin typeface="IPAGothic"/>
-              </a:rPr>
-              <a:t>第2回（Y2〜3）：1〜2億円  /  VC・事業会社提携  /  FC加速・関西展開</a:t>
-            </a:r>
-          </a:p>
-        </p:txBody>
-      </p:sp>
+            <a:ext cx="5669280" cy="2834640"/>
+          </a:xfrm>
+          <a:prstGeom prst="rect">
+            <a:avLst/>
+          </a:prstGeom>
+        </p:spPr>
+      </p:pic>
       <p:graphicFrame>
         <p:nvGraphicFramePr>
-          <p:cNvPr id="10" name="Table 9"/>
+          <p:cNvPr id="5" name="Table 4"/>
           <p:cNvGraphicFramePr>
             <a:graphicFrameLocks noGrp="1"/>
           </p:cNvGraphicFramePr>
           <p:nvPr/>
         </p:nvGraphicFramePr>
         <p:xfrm>
-          <a:off x="274320" y="2377440"/>
-          <a:ext cx="11612880" cy="2560320"/>
+          <a:off x="5943600" y="1005840"/>
+          <a:ext cx="5943600" cy="2834640"/>
         </p:xfrm>
         <a:graphic>
           <a:graphicData uri="http://schemas.openxmlformats.org/drawingml/2006/table">
@@ -5223,25 +5093,28 @@
                 <a:tableStyleId>{5C22544A-7EE6-4342-B048-85BDC9FD1C3A}</a:tableStyleId>
               </a:tblPr>
               <a:tblGrid>
-                <a:gridCol w="3870960"/>
-                <a:gridCol w="3870960"/>
-                <a:gridCol w="3870960"/>
+                <a:gridCol w="990600"/>
+                <a:gridCol w="990600"/>
+                <a:gridCol w="990600"/>
+                <a:gridCol w="990600"/>
+                <a:gridCol w="990600"/>
+                <a:gridCol w="990600"/>
               </a:tblGrid>
-              <a:tr h="426720">
-                <a:tc>
-                  <a:txBody>
-                    <a:bodyPr/>
-                    <a:lstStyle/>
-                    <a:p>
-                      <a:pPr algn="ctr"/>
-                      <a:r>
-                        <a:rPr sz="1100" b="1">
+              <a:tr h="472440">
+                <a:tc>
+                  <a:txBody>
+                    <a:bodyPr/>
+                    <a:lstStyle/>
+                    <a:p>
+                      <a:pPr algn="ctr"/>
+                      <a:r>
+                        <a:rPr sz="1000" b="1">
                           <a:solidFill>
                             <a:srgbClr val="FFFFFF"/>
                           </a:solidFill>
                           <a:latin typeface="IPAGothic"/>
                         </a:rPr>
-                        <a:t>用途</a:t>
+                        <a:t>ブランド</a:t>
                       </a:r>
                     </a:p>
                   </a:txBody>
@@ -5258,13 +5131,13 @@
                     <a:p>
                       <a:pPr algn="ctr"/>
                       <a:r>
-                        <a:rPr sz="1100" b="1">
+                        <a:rPr sz="1000" b="1">
                           <a:solidFill>
                             <a:srgbClr val="FFFFFF"/>
                           </a:solidFill>
                           <a:latin typeface="IPAGothic"/>
                         </a:rPr>
-                        <a:t>金額</a:t>
+                        <a:t>月次売上/店</a:t>
                       </a:r>
                     </a:p>
                   </a:txBody>
@@ -5281,13 +5154,13 @@
                     <a:p>
                       <a:pPr algn="ctr"/>
                       <a:r>
-                        <a:rPr sz="1100" b="1">
+                        <a:rPr sz="1000" b="1">
                           <a:solidFill>
                             <a:srgbClr val="FFFFFF"/>
                           </a:solidFill>
                           <a:latin typeface="IPAGothic"/>
                         </a:rPr>
-                        <a:t>内訳</a:t>
+                        <a:t>利益率</a:t>
                       </a:r>
                     </a:p>
                   </a:txBody>
@@ -5297,22 +5170,91 @@
                     </a:solidFill>
                   </a:tcPr>
                 </a:tc>
+                <a:tc>
+                  <a:txBody>
+                    <a:bodyPr/>
+                    <a:lstStyle/>
+                    <a:p>
+                      <a:pPr algn="ctr"/>
+                      <a:r>
+                        <a:rPr sz="1000" b="1">
+                          <a:solidFill>
+                            <a:srgbClr val="FFFFFF"/>
+                          </a:solidFill>
+                          <a:latin typeface="IPAGothic"/>
+                        </a:rPr>
+                        <a:t>1店月次利益</a:t>
+                      </a:r>
+                    </a:p>
+                  </a:txBody>
+                  <a:tcPr>
+                    <a:solidFill>
+                      <a:srgbClr val="2C4A3E"/>
+                    </a:solidFill>
+                  </a:tcPr>
+                </a:tc>
+                <a:tc>
+                  <a:txBody>
+                    <a:bodyPr/>
+                    <a:lstStyle/>
+                    <a:p>
+                      <a:pPr algn="ctr"/>
+                      <a:r>
+                        <a:rPr sz="1000" b="1">
+                          <a:solidFill>
+                            <a:srgbClr val="FFFFFF"/>
+                          </a:solidFill>
+                          <a:latin typeface="IPAGothic"/>
+                        </a:rPr>
+                        <a:t>目標店舗</a:t>
+                      </a:r>
+                    </a:p>
+                  </a:txBody>
+                  <a:tcPr>
+                    <a:solidFill>
+                      <a:srgbClr val="2C4A3E"/>
+                    </a:solidFill>
+                  </a:tcPr>
+                </a:tc>
+                <a:tc>
+                  <a:txBody>
+                    <a:bodyPr/>
+                    <a:lstStyle/>
+                    <a:p>
+                      <a:pPr algn="ctr"/>
+                      <a:r>
+                        <a:rPr sz="1000" b="1">
+                          <a:solidFill>
+                            <a:srgbClr val="FFFFFF"/>
+                          </a:solidFill>
+                          <a:latin typeface="IPAGothic"/>
+                        </a:rPr>
+                        <a:t>グループ月次利益</a:t>
+                      </a:r>
+                    </a:p>
+                  </a:txBody>
+                  <a:tcPr>
+                    <a:solidFill>
+                      <a:srgbClr val="2C4A3E"/>
+                    </a:solidFill>
+                  </a:tcPr>
+                </a:tc>
               </a:tr>
-              <a:tr h="426720">
-                <a:tc>
-                  <a:txBody>
-                    <a:bodyPr/>
-                    <a:lstStyle/>
-                    <a:p>
-                      <a:pPr algn="ctr"/>
-                      <a:r>
-                        <a:rPr sz="1100">
+              <a:tr h="472440">
+                <a:tc>
+                  <a:txBody>
+                    <a:bodyPr/>
+                    <a:lstStyle/>
+                    <a:p>
+                      <a:pPr algn="ctr"/>
+                      <a:r>
+                        <a:rPr sz="1000">
                           <a:solidFill>
                             <a:srgbClr val="1A1A1A"/>
                           </a:solidFill>
                           <a:latin typeface="IPAGothic"/>
                         </a:rPr>
-                        <a:t>だし 然 1号店 開業費</a:t>
+                        <a:t>だし 然</a:t>
                       </a:r>
                     </a:p>
                   </a:txBody>
@@ -5329,13 +5271,13 @@
                     <a:p>
                       <a:pPr algn="ctr"/>
                       <a:r>
-                        <a:rPr sz="1100">
+                        <a:rPr sz="1000">
                           <a:solidFill>
                             <a:srgbClr val="1A1A1A"/>
                           </a:solidFill>
                           <a:latin typeface="IPAGothic"/>
                         </a:rPr>
-                        <a:t>2,000万円</a:t>
+                        <a:t>960万円</a:t>
                       </a:r>
                     </a:p>
                   </a:txBody>
@@ -5352,13 +5294,13 @@
                     <a:p>
                       <a:pPr algn="ctr"/>
                       <a:r>
-                        <a:rPr sz="1100">
+                        <a:rPr sz="1000">
                           <a:solidFill>
                             <a:srgbClr val="1A1A1A"/>
                           </a:solidFill>
                           <a:latin typeface="IPAGothic"/>
                         </a:rPr>
-                        <a:t>内装900万＋厨房450万＋敷金＋運転資金（居抜き活用）</a:t>
+                        <a:t>15%</a:t>
                       </a:r>
                     </a:p>
                   </a:txBody>
@@ -5368,22 +5310,91 @@
                     </a:solidFill>
                   </a:tcPr>
                 </a:tc>
+                <a:tc>
+                  <a:txBody>
+                    <a:bodyPr/>
+                    <a:lstStyle/>
+                    <a:p>
+                      <a:pPr algn="ctr"/>
+                      <a:r>
+                        <a:rPr sz="1000">
+                          <a:solidFill>
+                            <a:srgbClr val="1A1A1A"/>
+                          </a:solidFill>
+                          <a:latin typeface="IPAGothic"/>
+                        </a:rPr>
+                        <a:t>144万円</a:t>
+                      </a:r>
+                    </a:p>
+                  </a:txBody>
+                  <a:tcPr>
+                    <a:solidFill>
+                      <a:srgbClr val="F0EEE8"/>
+                    </a:solidFill>
+                  </a:tcPr>
+                </a:tc>
+                <a:tc>
+                  <a:txBody>
+                    <a:bodyPr/>
+                    <a:lstStyle/>
+                    <a:p>
+                      <a:pPr algn="ctr"/>
+                      <a:r>
+                        <a:rPr sz="1000">
+                          <a:solidFill>
+                            <a:srgbClr val="1A1A1A"/>
+                          </a:solidFill>
+                          <a:latin typeface="IPAGothic"/>
+                        </a:rPr>
+                        <a:t>20店</a:t>
+                      </a:r>
+                    </a:p>
+                  </a:txBody>
+                  <a:tcPr>
+                    <a:solidFill>
+                      <a:srgbClr val="F0EEE8"/>
+                    </a:solidFill>
+                  </a:tcPr>
+                </a:tc>
+                <a:tc>
+                  <a:txBody>
+                    <a:bodyPr/>
+                    <a:lstStyle/>
+                    <a:p>
+                      <a:pPr algn="ctr"/>
+                      <a:r>
+                        <a:rPr sz="1000">
+                          <a:solidFill>
+                            <a:srgbClr val="1A1A1A"/>
+                          </a:solidFill>
+                          <a:latin typeface="IPAGothic"/>
+                        </a:rPr>
+                        <a:t>2,880万円</a:t>
+                      </a:r>
+                    </a:p>
+                  </a:txBody>
+                  <a:tcPr>
+                    <a:solidFill>
+                      <a:srgbClr val="F0EEE8"/>
+                    </a:solidFill>
+                  </a:tcPr>
+                </a:tc>
               </a:tr>
-              <a:tr h="426720">
-                <a:tc>
-                  <a:txBody>
-                    <a:bodyPr/>
-                    <a:lstStyle/>
-                    <a:p>
-                      <a:pPr algn="ctr"/>
-                      <a:r>
-                        <a:rPr sz="1100">
+              <a:tr h="472440">
+                <a:tc>
+                  <a:txBody>
+                    <a:bodyPr/>
+                    <a:lstStyle/>
+                    <a:p>
+                      <a:pPr algn="ctr"/>
+                      <a:r>
+                        <a:rPr sz="1000">
                           <a:solidFill>
                             <a:srgbClr val="1A1A1A"/>
                           </a:solidFill>
                           <a:latin typeface="IPAGothic"/>
                         </a:rPr>
-                        <a:t>蕎麦 然 1号店 開業費</a:t>
+                        <a:t>肉酒場 然</a:t>
                       </a:r>
                     </a:p>
                   </a:txBody>
@@ -5400,13 +5411,13 @@
                     <a:p>
                       <a:pPr algn="ctr"/>
                       <a:r>
-                        <a:rPr sz="1100">
+                        <a:rPr sz="1000">
                           <a:solidFill>
                             <a:srgbClr val="1A1A1A"/>
                           </a:solidFill>
                           <a:latin typeface="IPAGothic"/>
                         </a:rPr>
-                        <a:t>700万円</a:t>
+                        <a:t>1,200万円</a:t>
                       </a:r>
                     </a:p>
                   </a:txBody>
@@ -5423,13 +5434,13 @@
                     <a:p>
                       <a:pPr algn="ctr"/>
                       <a:r>
-                        <a:rPr sz="1100">
+                        <a:rPr sz="1000">
                           <a:solidFill>
                             <a:srgbClr val="1A1A1A"/>
                           </a:solidFill>
                           <a:latin typeface="IPAGothic"/>
                         </a:rPr>
-                        <a:t>内装350万＋設備180万＋保証金＋初期運転資金</a:t>
+                        <a:t>17%</a:t>
                       </a:r>
                     </a:p>
                   </a:txBody>
@@ -5439,22 +5450,91 @@
                     </a:solidFill>
                   </a:tcPr>
                 </a:tc>
+                <a:tc>
+                  <a:txBody>
+                    <a:bodyPr/>
+                    <a:lstStyle/>
+                    <a:p>
+                      <a:pPr algn="ctr"/>
+                      <a:r>
+                        <a:rPr sz="1000">
+                          <a:solidFill>
+                            <a:srgbClr val="1A1A1A"/>
+                          </a:solidFill>
+                          <a:latin typeface="IPAGothic"/>
+                        </a:rPr>
+                        <a:t>200万円</a:t>
+                      </a:r>
+                    </a:p>
+                  </a:txBody>
+                  <a:tcPr>
+                    <a:solidFill>
+                      <a:srgbClr val="FFFFFF"/>
+                    </a:solidFill>
+                  </a:tcPr>
+                </a:tc>
+                <a:tc>
+                  <a:txBody>
+                    <a:bodyPr/>
+                    <a:lstStyle/>
+                    <a:p>
+                      <a:pPr algn="ctr"/>
+                      <a:r>
+                        <a:rPr sz="1000">
+                          <a:solidFill>
+                            <a:srgbClr val="1A1A1A"/>
+                          </a:solidFill>
+                          <a:latin typeface="IPAGothic"/>
+                        </a:rPr>
+                        <a:t>5店</a:t>
+                      </a:r>
+                    </a:p>
+                  </a:txBody>
+                  <a:tcPr>
+                    <a:solidFill>
+                      <a:srgbClr val="FFFFFF"/>
+                    </a:solidFill>
+                  </a:tcPr>
+                </a:tc>
+                <a:tc>
+                  <a:txBody>
+                    <a:bodyPr/>
+                    <a:lstStyle/>
+                    <a:p>
+                      <a:pPr algn="ctr"/>
+                      <a:r>
+                        <a:rPr sz="1000">
+                          <a:solidFill>
+                            <a:srgbClr val="1A1A1A"/>
+                          </a:solidFill>
+                          <a:latin typeface="IPAGothic"/>
+                        </a:rPr>
+                        <a:t>1,000万円</a:t>
+                      </a:r>
+                    </a:p>
+                  </a:txBody>
+                  <a:tcPr>
+                    <a:solidFill>
+                      <a:srgbClr val="FFFFFF"/>
+                    </a:solidFill>
+                  </a:tcPr>
+                </a:tc>
               </a:tr>
-              <a:tr h="426720">
-                <a:tc>
-                  <a:txBody>
-                    <a:bodyPr/>
-                    <a:lstStyle/>
-                    <a:p>
-                      <a:pPr algn="ctr"/>
-                      <a:r>
-                        <a:rPr sz="1100">
+              <a:tr h="472440">
+                <a:tc>
+                  <a:txBody>
+                    <a:bodyPr/>
+                    <a:lstStyle/>
+                    <a:p>
+                      <a:pPr algn="ctr"/>
+                      <a:r>
+                        <a:rPr sz="1000">
                           <a:solidFill>
                             <a:srgbClr val="1A1A1A"/>
                           </a:solidFill>
                           <a:latin typeface="IPAGothic"/>
                         </a:rPr>
-                        <a:t>人材採用・研修費</a:t>
+                        <a:t>蕎麦 然（小型）</a:t>
                       </a:r>
                     </a:p>
                   </a:txBody>
@@ -5471,13 +5551,13 @@
                     <a:p>
                       <a:pPr algn="ctr"/>
                       <a:r>
-                        <a:rPr sz="1100">
+                        <a:rPr sz="1000">
                           <a:solidFill>
                             <a:srgbClr val="1A1A1A"/>
                           </a:solidFill>
                           <a:latin typeface="IPAGothic"/>
                         </a:rPr>
-                        <a:t>200万円</a:t>
+                        <a:t>350万円</a:t>
                       </a:r>
                     </a:p>
                   </a:txBody>
@@ -5494,13 +5574,13 @@
                     <a:p>
                       <a:pPr algn="ctr"/>
                       <a:r>
-                        <a:rPr sz="1100">
+                        <a:rPr sz="1000">
                           <a:solidFill>
                             <a:srgbClr val="1A1A1A"/>
                           </a:solidFill>
                           <a:latin typeface="IPAGothic"/>
                         </a:rPr>
-                        <a:t>店長・料理長採用・マニュアル構築</a:t>
+                        <a:t>12%</a:t>
                       </a:r>
                     </a:p>
                   </a:txBody>
@@ -5510,22 +5590,91 @@
                     </a:solidFill>
                   </a:tcPr>
                 </a:tc>
+                <a:tc>
+                  <a:txBody>
+                    <a:bodyPr/>
+                    <a:lstStyle/>
+                    <a:p>
+                      <a:pPr algn="ctr"/>
+                      <a:r>
+                        <a:rPr sz="1000">
+                          <a:solidFill>
+                            <a:srgbClr val="1A1A1A"/>
+                          </a:solidFill>
+                          <a:latin typeface="IPAGothic"/>
+                        </a:rPr>
+                        <a:t>42万円</a:t>
+                      </a:r>
+                    </a:p>
+                  </a:txBody>
+                  <a:tcPr>
+                    <a:solidFill>
+                      <a:srgbClr val="F0EEE8"/>
+                    </a:solidFill>
+                  </a:tcPr>
+                </a:tc>
+                <a:tc>
+                  <a:txBody>
+                    <a:bodyPr/>
+                    <a:lstStyle/>
+                    <a:p>
+                      <a:pPr algn="ctr"/>
+                      <a:r>
+                        <a:rPr sz="1000">
+                          <a:solidFill>
+                            <a:srgbClr val="1A1A1A"/>
+                          </a:solidFill>
+                          <a:latin typeface="IPAGothic"/>
+                        </a:rPr>
+                        <a:t>30店</a:t>
+                      </a:r>
+                    </a:p>
+                  </a:txBody>
+                  <a:tcPr>
+                    <a:solidFill>
+                      <a:srgbClr val="F0EEE8"/>
+                    </a:solidFill>
+                  </a:tcPr>
+                </a:tc>
+                <a:tc>
+                  <a:txBody>
+                    <a:bodyPr/>
+                    <a:lstStyle/>
+                    <a:p>
+                      <a:pPr algn="ctr"/>
+                      <a:r>
+                        <a:rPr sz="1000">
+                          <a:solidFill>
+                            <a:srgbClr val="1A1A1A"/>
+                          </a:solidFill>
+                          <a:latin typeface="IPAGothic"/>
+                        </a:rPr>
+                        <a:t>1,260万円</a:t>
+                      </a:r>
+                    </a:p>
+                  </a:txBody>
+                  <a:tcPr>
+                    <a:solidFill>
+                      <a:srgbClr val="F0EEE8"/>
+                    </a:solidFill>
+                  </a:tcPr>
+                </a:tc>
               </a:tr>
-              <a:tr h="426720">
-                <a:tc>
-                  <a:txBody>
-                    <a:bodyPr/>
-                    <a:lstStyle/>
-                    <a:p>
-                      <a:pPr algn="ctr"/>
-                      <a:r>
-                        <a:rPr sz="1100">
+              <a:tr h="472440">
+                <a:tc>
+                  <a:txBody>
+                    <a:bodyPr/>
+                    <a:lstStyle/>
+                    <a:p>
+                      <a:pPr algn="ctr"/>
+                      <a:r>
+                        <a:rPr sz="1000">
                           <a:solidFill>
                             <a:srgbClr val="1A1A1A"/>
                           </a:solidFill>
                           <a:latin typeface="IPAGothic"/>
                         </a:rPr>
-                        <a:t>運転資金・マーケ費</a:t>
+                        <a:t>SNS事業部</a:t>
                       </a:r>
                     </a:p>
                   </a:txBody>
@@ -5542,13 +5691,13 @@
                     <a:p>
                       <a:pPr algn="ctr"/>
                       <a:r>
-                        <a:rPr sz="1100">
+                        <a:rPr sz="1000">
                           <a:solidFill>
                             <a:srgbClr val="1A1A1A"/>
                           </a:solidFill>
                           <a:latin typeface="IPAGothic"/>
                         </a:rPr>
-                        <a:t>100万円</a:t>
+                        <a:t>─</a:t>
                       </a:r>
                     </a:p>
                   </a:txBody>
@@ -5565,13 +5714,13 @@
                     <a:p>
                       <a:pPr algn="ctr"/>
                       <a:r>
-                        <a:rPr sz="1100">
+                        <a:rPr sz="1000">
                           <a:solidFill>
                             <a:srgbClr val="1A1A1A"/>
                           </a:solidFill>
                           <a:latin typeface="IPAGothic"/>
                         </a:rPr>
-                        <a:t>グループ管理・SNS・広告・オープン販促</a:t>
+                        <a:t>─</a:t>
                       </a:r>
                     </a:p>
                   </a:txBody>
@@ -5581,22 +5730,91 @@
                     </a:solidFill>
                   </a:tcPr>
                 </a:tc>
+                <a:tc>
+                  <a:txBody>
+                    <a:bodyPr/>
+                    <a:lstStyle/>
+                    <a:p>
+                      <a:pPr algn="ctr"/>
+                      <a:r>
+                        <a:rPr sz="1000">
+                          <a:solidFill>
+                            <a:srgbClr val="1A1A1A"/>
+                          </a:solidFill>
+                          <a:latin typeface="IPAGothic"/>
+                        </a:rPr>
+                        <a:t>83万円</a:t>
+                      </a:r>
+                    </a:p>
+                  </a:txBody>
+                  <a:tcPr>
+                    <a:solidFill>
+                      <a:srgbClr val="FFFFFF"/>
+                    </a:solidFill>
+                  </a:tcPr>
+                </a:tc>
+                <a:tc>
+                  <a:txBody>
+                    <a:bodyPr/>
+                    <a:lstStyle/>
+                    <a:p>
+                      <a:pPr algn="ctr"/>
+                      <a:r>
+                        <a:rPr sz="1000">
+                          <a:solidFill>
+                            <a:srgbClr val="1A1A1A"/>
+                          </a:solidFill>
+                          <a:latin typeface="IPAGothic"/>
+                        </a:rPr>
+                        <a:t>─</a:t>
+                      </a:r>
+                    </a:p>
+                  </a:txBody>
+                  <a:tcPr>
+                    <a:solidFill>
+                      <a:srgbClr val="FFFFFF"/>
+                    </a:solidFill>
+                  </a:tcPr>
+                </a:tc>
+                <a:tc>
+                  <a:txBody>
+                    <a:bodyPr/>
+                    <a:lstStyle/>
+                    <a:p>
+                      <a:pPr algn="ctr"/>
+                      <a:r>
+                        <a:rPr sz="1000">
+                          <a:solidFill>
+                            <a:srgbClr val="1A1A1A"/>
+                          </a:solidFill>
+                          <a:latin typeface="IPAGothic"/>
+                        </a:rPr>
+                        <a:t>83万円</a:t>
+                      </a:r>
+                    </a:p>
+                  </a:txBody>
+                  <a:tcPr>
+                    <a:solidFill>
+                      <a:srgbClr val="FFFFFF"/>
+                    </a:solidFill>
+                  </a:tcPr>
+                </a:tc>
               </a:tr>
-              <a:tr h="426720">
-                <a:tc>
-                  <a:txBody>
-                    <a:bodyPr/>
-                    <a:lstStyle/>
-                    <a:p>
-                      <a:pPr algn="ctr"/>
-                      <a:r>
-                        <a:rPr sz="1100">
+              <a:tr h="472440">
+                <a:tc>
+                  <a:txBody>
+                    <a:bodyPr/>
+                    <a:lstStyle/>
+                    <a:p>
+                      <a:pPr algn="ctr"/>
+                      <a:r>
+                        <a:rPr sz="1000">
                           <a:solidFill>
                             <a:srgbClr val="1A1A1A"/>
                           </a:solidFill>
                           <a:latin typeface="IPAGothic"/>
                         </a:rPr>
-                        <a:t>合計</a:t>
+                        <a:t>合計（安定期）</a:t>
                       </a:r>
                     </a:p>
                   </a:txBody>
@@ -5613,13 +5831,13 @@
                     <a:p>
                       <a:pPr algn="ctr"/>
                       <a:r>
-                        <a:rPr sz="1100">
+                        <a:rPr sz="1000">
                           <a:solidFill>
                             <a:srgbClr val="1A1A1A"/>
                           </a:solidFill>
                           <a:latin typeface="IPAGothic"/>
                         </a:rPr>
-                        <a:t>3,000万円</a:t>
+                        <a:t>─</a:t>
                       </a:r>
                     </a:p>
                   </a:txBody>
@@ -5636,13 +5854,82 @@
                     <a:p>
                       <a:pPr algn="ctr"/>
                       <a:r>
-                        <a:rPr sz="1100">
+                        <a:rPr sz="1000">
                           <a:solidFill>
                             <a:srgbClr val="1A1A1A"/>
                           </a:solidFill>
                           <a:latin typeface="IPAGothic"/>
                         </a:rPr>
-                        <a:t/>
+                        <a:t>─</a:t>
+                      </a:r>
+                    </a:p>
+                  </a:txBody>
+                  <a:tcPr>
+                    <a:solidFill>
+                      <a:srgbClr val="F0EEE8"/>
+                    </a:solidFill>
+                  </a:tcPr>
+                </a:tc>
+                <a:tc>
+                  <a:txBody>
+                    <a:bodyPr/>
+                    <a:lstStyle/>
+                    <a:p>
+                      <a:pPr algn="ctr"/>
+                      <a:r>
+                        <a:rPr sz="1000">
+                          <a:solidFill>
+                            <a:srgbClr val="1A1A1A"/>
+                          </a:solidFill>
+                          <a:latin typeface="IPAGothic"/>
+                        </a:rPr>
+                        <a:t>─</a:t>
+                      </a:r>
+                    </a:p>
+                  </a:txBody>
+                  <a:tcPr>
+                    <a:solidFill>
+                      <a:srgbClr val="F0EEE8"/>
+                    </a:solidFill>
+                  </a:tcPr>
+                </a:tc>
+                <a:tc>
+                  <a:txBody>
+                    <a:bodyPr/>
+                    <a:lstStyle/>
+                    <a:p>
+                      <a:pPr algn="ctr"/>
+                      <a:r>
+                        <a:rPr sz="1000">
+                          <a:solidFill>
+                            <a:srgbClr val="1A1A1A"/>
+                          </a:solidFill>
+                          <a:latin typeface="IPAGothic"/>
+                        </a:rPr>
+                        <a:t>55店</a:t>
+                      </a:r>
+                    </a:p>
+                  </a:txBody>
+                  <a:tcPr>
+                    <a:solidFill>
+                      <a:srgbClr val="F0EEE8"/>
+                    </a:solidFill>
+                  </a:tcPr>
+                </a:tc>
+                <a:tc>
+                  <a:txBody>
+                    <a:bodyPr/>
+                    <a:lstStyle/>
+                    <a:p>
+                      <a:pPr algn="ctr"/>
+                      <a:r>
+                        <a:rPr sz="1000">
+                          <a:solidFill>
+                            <a:srgbClr val="1A1A1A"/>
+                          </a:solidFill>
+                          <a:latin typeface="IPAGothic"/>
+                        </a:rPr>
+                        <a:t>5,223万円〜</a:t>
                       </a:r>
                     </a:p>
                   </a:txBody>
@@ -5659,14 +5946,57 @@
       </p:graphicFrame>
       <p:sp>
         <p:nvSpPr>
-          <p:cNvPr id="11" name="TextBox 10"/>
+          <p:cNvPr id="6" name="Rectangle 5"/>
+          <p:cNvSpPr/>
+          <p:nvPr/>
+        </p:nvSpPr>
+        <p:spPr>
+          <a:xfrm>
+            <a:off x="274320" y="4023360"/>
+            <a:ext cx="11612880" cy="347472"/>
+          </a:xfrm>
+          <a:prstGeom prst="rect">
+            <a:avLst/>
+          </a:prstGeom>
+          <a:solidFill>
+            <a:srgbClr val="2C4A3E"/>
+          </a:solidFill>
+          <a:ln>
+            <a:noFill/>
+          </a:ln>
+        </p:spPr>
+        <p:style>
+          <a:lnRef idx="1">
+            <a:schemeClr val="accent1"/>
+          </a:lnRef>
+          <a:fillRef idx="3">
+            <a:schemeClr val="accent1"/>
+          </a:fillRef>
+          <a:effectRef idx="2">
+            <a:schemeClr val="accent1"/>
+          </a:effectRef>
+          <a:fontRef idx="minor">
+            <a:schemeClr val="lt1"/>
+          </a:fontRef>
+        </p:style>
+        <p:txBody>
+          <a:bodyPr rtlCol="0" anchor="ctr"/>
+          <a:lstStyle/>
+          <a:p>
+            <a:pPr algn="ctr"/>
+          </a:p>
+        </p:txBody>
+      </p:sp>
+      <p:sp>
+        <p:nvSpPr>
+          <p:cNvPr id="7" name="TextBox 6"/>
           <p:cNvSpPr txBox="1"/>
           <p:nvPr/>
         </p:nvSpPr>
         <p:spPr>
           <a:xfrm>
-            <a:off x="274320" y="5120640"/>
-            <a:ext cx="11612880" cy="1463040"/>
+            <a:off x="365760" y="4059936"/>
+            <a:ext cx="11430000" cy="292608"/>
           </a:xfrm>
           <a:prstGeom prst="rect">
             <a:avLst/>
@@ -5681,61 +6011,153 @@
           <a:p>
             <a:pPr algn="l"/>
             <a:r>
-              <a:rPr sz="1100" b="0">
+              <a:rPr sz="1200" b="1" i="0">
+                <a:solidFill>
+                  <a:srgbClr val="FFFFFF"/>
+                </a:solidFill>
+                <a:latin typeface="IPAGothic"/>
+              </a:rPr>
+              <a:t>収益構造のポイント</a:t>
+            </a:r>
+          </a:p>
+        </p:txBody>
+      </p:sp>
+      <p:sp>
+        <p:nvSpPr>
+          <p:cNvPr id="8" name="TextBox 7"/>
+          <p:cNvSpPr txBox="1"/>
+          <p:nvPr/>
+        </p:nvSpPr>
+        <p:spPr>
+          <a:xfrm>
+            <a:off x="365760" y="4407408"/>
+            <a:ext cx="11430000" cy="347472"/>
+          </a:xfrm>
+          <a:prstGeom prst="rect">
+            <a:avLst/>
+          </a:prstGeom>
+          <a:noFill/>
+        </p:spPr>
+        <p:txBody>
+          <a:bodyPr wrap="square">
+            <a:spAutoFit/>
+          </a:bodyPr>
+          <a:lstStyle/>
+          <a:p>
+            <a:pPr algn="l"/>
+            <a:r>
+              <a:rPr sz="1100" b="0" i="0">
                 <a:solidFill>
                   <a:srgbClr val="1A1A1A"/>
                 </a:solidFill>
                 <a:latin typeface="IPAGothic"/>
               </a:rPr>
-              <a:t>■ 投資家へのリターンイメージ</a:t>
-            </a:r>
-          </a:p>
+              <a:t>▸ Y1 グループ月次売上：約2,510万円（利益率約15%、月次利益約386万円）</a:t>
+            </a:r>
+          </a:p>
+        </p:txBody>
+      </p:sp>
+      <p:sp>
+        <p:nvSpPr>
+          <p:cNvPr id="9" name="TextBox 8"/>
+          <p:cNvSpPr txBox="1"/>
+          <p:nvPr/>
+        </p:nvSpPr>
+        <p:spPr>
+          <a:xfrm>
+            <a:off x="365760" y="4754880"/>
+            <a:ext cx="11430000" cy="347472"/>
+          </a:xfrm>
+          <a:prstGeom prst="rect">
+            <a:avLst/>
+          </a:prstGeom>
+          <a:noFill/>
+        </p:spPr>
+        <p:txBody>
+          <a:bodyPr wrap="square">
+            <a:spAutoFit/>
+          </a:bodyPr>
+          <a:lstStyle/>
           <a:p>
             <a:pPr algn="l"/>
             <a:r>
-              <a:rPr sz="1100" b="0">
+              <a:rPr sz="1100" b="0" i="0">
                 <a:solidFill>
                   <a:srgbClr val="1A1A1A"/>
                 </a:solidFill>
                 <a:latin typeface="IPAGothic"/>
               </a:rPr>
-              <a:t>・Y1〜2：初期投資回収フェーズ。各店舗の安定稼働と収益基盤の構築に集中</a:t>
-            </a:r>
-          </a:p>
+              <a:t>▸ FCロイヤルティはFC40店規模で月1,296万円のストック収益（安定成長）</a:t>
+            </a:r>
+          </a:p>
+        </p:txBody>
+      </p:sp>
+      <p:sp>
+        <p:nvSpPr>
+          <p:cNvPr id="10" name="TextBox 9"/>
+          <p:cNvSpPr txBox="1"/>
+          <p:nvPr/>
+        </p:nvSpPr>
+        <p:spPr>
+          <a:xfrm>
+            <a:off x="365760" y="5102352"/>
+            <a:ext cx="11430000" cy="347472"/>
+          </a:xfrm>
+          <a:prstGeom prst="rect">
+            <a:avLst/>
+          </a:prstGeom>
+          <a:noFill/>
+        </p:spPr>
+        <p:txBody>
+          <a:bodyPr wrap="square">
+            <a:spAutoFit/>
+          </a:bodyPr>
+          <a:lstStyle/>
           <a:p>
             <a:pPr algn="l"/>
             <a:r>
-              <a:rPr sz="1100" b="0">
+              <a:rPr sz="1100" b="0" i="0">
                 <a:solidFill>
                   <a:srgbClr val="1A1A1A"/>
                 </a:solidFill>
                 <a:latin typeface="IPAGothic"/>
               </a:rPr>
-              <a:t>・Y3以降：FCスケールで利益率が改善。EBITDA1.8億円（月商6,000万）で成長が加速</a:t>
-            </a:r>
-          </a:p>
+              <a:t>▸ 成長フェーズ（Y3〜）で利益率が改善：規模の経済＋仕入共通化</a:t>
+            </a:r>
+          </a:p>
+        </p:txBody>
+      </p:sp>
+      <p:sp>
+        <p:nvSpPr>
+          <p:cNvPr id="11" name="TextBox 10"/>
+          <p:cNvSpPr txBox="1"/>
+          <p:nvPr/>
+        </p:nvSpPr>
+        <p:spPr>
+          <a:xfrm>
+            <a:off x="365760" y="5449824"/>
+            <a:ext cx="11430000" cy="347472"/>
+          </a:xfrm>
+          <a:prstGeom prst="rect">
+            <a:avLst/>
+          </a:prstGeom>
+          <a:noFill/>
+        </p:spPr>
+        <p:txBody>
+          <a:bodyPr wrap="square">
+            <a:spAutoFit/>
+          </a:bodyPr>
+          <a:lstStyle/>
           <a:p>
             <a:pPr algn="l"/>
             <a:r>
-              <a:rPr sz="1100" b="0">
+              <a:rPr sz="1100" b="0" i="0">
                 <a:solidFill>
                   <a:srgbClr val="1A1A1A"/>
                 </a:solidFill>
                 <a:latin typeface="IPAGothic"/>
               </a:rPr>
-              <a:t>・Y5：年商20億円・EBITDA6億円  →  EXIT（M&amp;A or IPO）を視野に</a:t>
-            </a:r>
-          </a:p>
-          <a:p>
-            <a:pPr algn="l"/>
-            <a:r>
-              <a:rPr sz="1100" b="0">
-                <a:solidFill>
-                  <a:srgbClr val="1A1A1A"/>
-                </a:solidFill>
-                <a:latin typeface="IPAGothic"/>
-              </a:rPr>
-              <a:t>・FCロイヤルティ収入はストック型のため、EXIT評価倍率向上に寄与</a:t>
+              <a:t>▸ 直営利益＋FCロイヤルティの二重収益でリスク分散</a:t>
             </a:r>
           </a:p>
         </p:txBody>
@@ -5839,6 +6261,3842 @@
                 </a:solidFill>
                 <a:latin typeface="IPAGothic"/>
               </a:rPr>
+              <a:t>グループ 事業計画 P&amp;L  ─  5カ年損益計画</a:t>
+            </a:r>
+          </a:p>
+        </p:txBody>
+      </p:sp>
+      <p:graphicFrame>
+        <p:nvGraphicFramePr>
+          <p:cNvPr id="4" name="Table 3"/>
+          <p:cNvGraphicFramePr>
+            <a:graphicFrameLocks noGrp="1"/>
+          </p:cNvGraphicFramePr>
+          <p:nvPr/>
+        </p:nvGraphicFramePr>
+        <p:xfrm>
+          <a:off x="274320" y="1005840"/>
+          <a:ext cx="11612880" cy="4114800"/>
+        </p:xfrm>
+        <a:graphic>
+          <a:graphicData uri="http://schemas.openxmlformats.org/drawingml/2006/table">
+            <a:tbl>
+              <a:tblPr firstRow="1" bandRow="1">
+                <a:tableStyleId>{5C22544A-7EE6-4342-B048-85BDC9FD1C3A}</a:tableStyleId>
+              </a:tblPr>
+              <a:tblGrid>
+                <a:gridCol w="2286000"/>
+                <a:gridCol w="1865376"/>
+                <a:gridCol w="1865376"/>
+                <a:gridCol w="1865376"/>
+                <a:gridCol w="1865376"/>
+                <a:gridCol w="1865376"/>
+              </a:tblGrid>
+              <a:tr h="411480">
+                <a:tc>
+                  <a:txBody>
+                    <a:bodyPr/>
+                    <a:lstStyle/>
+                    <a:p>
+                      <a:pPr algn="ctr"/>
+                      <a:r>
+                        <a:rPr sz="1100" b="1">
+                          <a:solidFill>
+                            <a:srgbClr val="FFFFFF"/>
+                          </a:solidFill>
+                          <a:latin typeface="IPAGothic"/>
+                        </a:rPr>
+                        <a:t/>
+                      </a:r>
+                    </a:p>
+                  </a:txBody>
+                  <a:tcPr>
+                    <a:solidFill>
+                      <a:srgbClr val="2C4A3E"/>
+                    </a:solidFill>
+                  </a:tcPr>
+                </a:tc>
+                <a:tc>
+                  <a:txBody>
+                    <a:bodyPr/>
+                    <a:lstStyle/>
+                    <a:p>
+                      <a:pPr algn="ctr"/>
+                      <a:r>
+                        <a:rPr sz="1100" b="1">
+                          <a:solidFill>
+                            <a:srgbClr val="FFFFFF"/>
+                          </a:solidFill>
+                          <a:latin typeface="IPAGothic"/>
+                        </a:rPr>
+                        <a:t>Y1 2026</a:t>
+                      </a:r>
+                    </a:p>
+                  </a:txBody>
+                  <a:tcPr>
+                    <a:solidFill>
+                      <a:srgbClr val="2C4A3E"/>
+                    </a:solidFill>
+                  </a:tcPr>
+                </a:tc>
+                <a:tc>
+                  <a:txBody>
+                    <a:bodyPr/>
+                    <a:lstStyle/>
+                    <a:p>
+                      <a:pPr algn="ctr"/>
+                      <a:r>
+                        <a:rPr sz="1100" b="1">
+                          <a:solidFill>
+                            <a:srgbClr val="FFFFFF"/>
+                          </a:solidFill>
+                          <a:latin typeface="IPAGothic"/>
+                        </a:rPr>
+                        <a:t>Y2 2027</a:t>
+                      </a:r>
+                    </a:p>
+                  </a:txBody>
+                  <a:tcPr>
+                    <a:solidFill>
+                      <a:srgbClr val="2C4A3E"/>
+                    </a:solidFill>
+                  </a:tcPr>
+                </a:tc>
+                <a:tc>
+                  <a:txBody>
+                    <a:bodyPr/>
+                    <a:lstStyle/>
+                    <a:p>
+                      <a:pPr algn="ctr"/>
+                      <a:r>
+                        <a:rPr sz="1100" b="1">
+                          <a:solidFill>
+                            <a:srgbClr val="FFFFFF"/>
+                          </a:solidFill>
+                          <a:latin typeface="IPAGothic"/>
+                        </a:rPr>
+                        <a:t>Y3 2028</a:t>
+                      </a:r>
+                    </a:p>
+                  </a:txBody>
+                  <a:tcPr>
+                    <a:solidFill>
+                      <a:srgbClr val="2C4A3E"/>
+                    </a:solidFill>
+                  </a:tcPr>
+                </a:tc>
+                <a:tc>
+                  <a:txBody>
+                    <a:bodyPr/>
+                    <a:lstStyle/>
+                    <a:p>
+                      <a:pPr algn="ctr"/>
+                      <a:r>
+                        <a:rPr sz="1100" b="1">
+                          <a:solidFill>
+                            <a:srgbClr val="FFFFFF"/>
+                          </a:solidFill>
+                          <a:latin typeface="IPAGothic"/>
+                        </a:rPr>
+                        <a:t>Y4 2029</a:t>
+                      </a:r>
+                    </a:p>
+                  </a:txBody>
+                  <a:tcPr>
+                    <a:solidFill>
+                      <a:srgbClr val="2C4A3E"/>
+                    </a:solidFill>
+                  </a:tcPr>
+                </a:tc>
+                <a:tc>
+                  <a:txBody>
+                    <a:bodyPr/>
+                    <a:lstStyle/>
+                    <a:p>
+                      <a:pPr algn="ctr"/>
+                      <a:r>
+                        <a:rPr sz="1100" b="1">
+                          <a:solidFill>
+                            <a:srgbClr val="FFFFFF"/>
+                          </a:solidFill>
+                          <a:latin typeface="IPAGothic"/>
+                        </a:rPr>
+                        <a:t>Y5 2030</a:t>
+                      </a:r>
+                    </a:p>
+                  </a:txBody>
+                  <a:tcPr>
+                    <a:solidFill>
+                      <a:srgbClr val="2C4A3E"/>
+                    </a:solidFill>
+                  </a:tcPr>
+                </a:tc>
+              </a:tr>
+              <a:tr h="411480">
+                <a:tc>
+                  <a:txBody>
+                    <a:bodyPr/>
+                    <a:lstStyle/>
+                    <a:p>
+                      <a:pPr algn="l"/>
+                      <a:r>
+                        <a:rPr sz="1000" b="0">
+                          <a:solidFill>
+                            <a:srgbClr val="1A1A1A"/>
+                          </a:solidFill>
+                          <a:latin typeface="IPAGothic"/>
+                        </a:rPr>
+                        <a:t>売上高（万円）</a:t>
+                      </a:r>
+                    </a:p>
+                  </a:txBody>
+                  <a:tcPr>
+                    <a:solidFill>
+                      <a:srgbClr val="F0EEE8"/>
+                    </a:solidFill>
+                  </a:tcPr>
+                </a:tc>
+                <a:tc>
+                  <a:txBody>
+                    <a:bodyPr/>
+                    <a:lstStyle/>
+                    <a:p>
+                      <a:pPr algn="ctr"/>
+                      <a:r>
+                        <a:rPr sz="1000" b="0">
+                          <a:solidFill>
+                            <a:srgbClr val="1A1A1A"/>
+                          </a:solidFill>
+                          <a:latin typeface="IPAGothic"/>
+                        </a:rPr>
+                        <a:t>14,000</a:t>
+                      </a:r>
+                    </a:p>
+                  </a:txBody>
+                  <a:tcPr>
+                    <a:solidFill>
+                      <a:srgbClr val="F0EEE8"/>
+                    </a:solidFill>
+                  </a:tcPr>
+                </a:tc>
+                <a:tc>
+                  <a:txBody>
+                    <a:bodyPr/>
+                    <a:lstStyle/>
+                    <a:p>
+                      <a:pPr algn="ctr"/>
+                      <a:r>
+                        <a:rPr sz="1000" b="0">
+                          <a:solidFill>
+                            <a:srgbClr val="1A1A1A"/>
+                          </a:solidFill>
+                          <a:latin typeface="IPAGothic"/>
+                        </a:rPr>
+                        <a:t>36,000</a:t>
+                      </a:r>
+                    </a:p>
+                  </a:txBody>
+                  <a:tcPr>
+                    <a:solidFill>
+                      <a:srgbClr val="F0EEE8"/>
+                    </a:solidFill>
+                  </a:tcPr>
+                </a:tc>
+                <a:tc>
+                  <a:txBody>
+                    <a:bodyPr/>
+                    <a:lstStyle/>
+                    <a:p>
+                      <a:pPr algn="ctr"/>
+                      <a:r>
+                        <a:rPr sz="1000" b="0">
+                          <a:solidFill>
+                            <a:srgbClr val="1A1A1A"/>
+                          </a:solidFill>
+                          <a:latin typeface="IPAGothic"/>
+                        </a:rPr>
+                        <a:t>72,000</a:t>
+                      </a:r>
+                    </a:p>
+                  </a:txBody>
+                  <a:tcPr>
+                    <a:solidFill>
+                      <a:srgbClr val="F0EEE8"/>
+                    </a:solidFill>
+                  </a:tcPr>
+                </a:tc>
+                <a:tc>
+                  <a:txBody>
+                    <a:bodyPr/>
+                    <a:lstStyle/>
+                    <a:p>
+                      <a:pPr algn="ctr"/>
+                      <a:r>
+                        <a:rPr sz="1000" b="0">
+                          <a:solidFill>
+                            <a:srgbClr val="1A1A1A"/>
+                          </a:solidFill>
+                          <a:latin typeface="IPAGothic"/>
+                        </a:rPr>
+                        <a:t>120,000</a:t>
+                      </a:r>
+                    </a:p>
+                  </a:txBody>
+                  <a:tcPr>
+                    <a:solidFill>
+                      <a:srgbClr val="F0EEE8"/>
+                    </a:solidFill>
+                  </a:tcPr>
+                </a:tc>
+                <a:tc>
+                  <a:txBody>
+                    <a:bodyPr/>
+                    <a:lstStyle/>
+                    <a:p>
+                      <a:pPr algn="ctr"/>
+                      <a:r>
+                        <a:rPr sz="1000" b="0">
+                          <a:solidFill>
+                            <a:srgbClr val="1A1A1A"/>
+                          </a:solidFill>
+                          <a:latin typeface="IPAGothic"/>
+                        </a:rPr>
+                        <a:t>200,000</a:t>
+                      </a:r>
+                    </a:p>
+                  </a:txBody>
+                  <a:tcPr>
+                    <a:solidFill>
+                      <a:srgbClr val="F0EEE8"/>
+                    </a:solidFill>
+                  </a:tcPr>
+                </a:tc>
+              </a:tr>
+              <a:tr h="411480">
+                <a:tc>
+                  <a:txBody>
+                    <a:bodyPr/>
+                    <a:lstStyle/>
+                    <a:p>
+                      <a:pPr algn="l"/>
+                      <a:r>
+                        <a:rPr sz="1000" b="0">
+                          <a:solidFill>
+                            <a:srgbClr val="1A1A1A"/>
+                          </a:solidFill>
+                          <a:latin typeface="IPAGothic"/>
+                        </a:rPr>
+                        <a:t>　売上原価（31%）</a:t>
+                      </a:r>
+                    </a:p>
+                  </a:txBody>
+                  <a:tcPr>
+                    <a:solidFill>
+                      <a:srgbClr val="FFFFFF"/>
+                    </a:solidFill>
+                  </a:tcPr>
+                </a:tc>
+                <a:tc>
+                  <a:txBody>
+                    <a:bodyPr/>
+                    <a:lstStyle/>
+                    <a:p>
+                      <a:pPr algn="ctr"/>
+                      <a:r>
+                        <a:rPr sz="1000" b="0">
+                          <a:solidFill>
+                            <a:srgbClr val="1A1A1A"/>
+                          </a:solidFill>
+                          <a:latin typeface="IPAGothic"/>
+                        </a:rPr>
+                        <a:t>▲4,340</a:t>
+                      </a:r>
+                    </a:p>
+                  </a:txBody>
+                  <a:tcPr>
+                    <a:solidFill>
+                      <a:srgbClr val="FFFFFF"/>
+                    </a:solidFill>
+                  </a:tcPr>
+                </a:tc>
+                <a:tc>
+                  <a:txBody>
+                    <a:bodyPr/>
+                    <a:lstStyle/>
+                    <a:p>
+                      <a:pPr algn="ctr"/>
+                      <a:r>
+                        <a:rPr sz="1000" b="0">
+                          <a:solidFill>
+                            <a:srgbClr val="1A1A1A"/>
+                          </a:solidFill>
+                          <a:latin typeface="IPAGothic"/>
+                        </a:rPr>
+                        <a:t>▲11,160</a:t>
+                      </a:r>
+                    </a:p>
+                  </a:txBody>
+                  <a:tcPr>
+                    <a:solidFill>
+                      <a:srgbClr val="FFFFFF"/>
+                    </a:solidFill>
+                  </a:tcPr>
+                </a:tc>
+                <a:tc>
+                  <a:txBody>
+                    <a:bodyPr/>
+                    <a:lstStyle/>
+                    <a:p>
+                      <a:pPr algn="ctr"/>
+                      <a:r>
+                        <a:rPr sz="1000" b="0">
+                          <a:solidFill>
+                            <a:srgbClr val="1A1A1A"/>
+                          </a:solidFill>
+                          <a:latin typeface="IPAGothic"/>
+                        </a:rPr>
+                        <a:t>▲22,320</a:t>
+                      </a:r>
+                    </a:p>
+                  </a:txBody>
+                  <a:tcPr>
+                    <a:solidFill>
+                      <a:srgbClr val="FFFFFF"/>
+                    </a:solidFill>
+                  </a:tcPr>
+                </a:tc>
+                <a:tc>
+                  <a:txBody>
+                    <a:bodyPr/>
+                    <a:lstStyle/>
+                    <a:p>
+                      <a:pPr algn="ctr"/>
+                      <a:r>
+                        <a:rPr sz="1000" b="0">
+                          <a:solidFill>
+                            <a:srgbClr val="1A1A1A"/>
+                          </a:solidFill>
+                          <a:latin typeface="IPAGothic"/>
+                        </a:rPr>
+                        <a:t>▲37,200</a:t>
+                      </a:r>
+                    </a:p>
+                  </a:txBody>
+                  <a:tcPr>
+                    <a:solidFill>
+                      <a:srgbClr val="FFFFFF"/>
+                    </a:solidFill>
+                  </a:tcPr>
+                </a:tc>
+                <a:tc>
+                  <a:txBody>
+                    <a:bodyPr/>
+                    <a:lstStyle/>
+                    <a:p>
+                      <a:pPr algn="ctr"/>
+                      <a:r>
+                        <a:rPr sz="1000" b="0">
+                          <a:solidFill>
+                            <a:srgbClr val="1A1A1A"/>
+                          </a:solidFill>
+                          <a:latin typeface="IPAGothic"/>
+                        </a:rPr>
+                        <a:t>▲62,000</a:t>
+                      </a:r>
+                    </a:p>
+                  </a:txBody>
+                  <a:tcPr>
+                    <a:solidFill>
+                      <a:srgbClr val="FFFFFF"/>
+                    </a:solidFill>
+                  </a:tcPr>
+                </a:tc>
+              </a:tr>
+              <a:tr h="411480">
+                <a:tc>
+                  <a:txBody>
+                    <a:bodyPr/>
+                    <a:lstStyle/>
+                    <a:p>
+                      <a:pPr algn="l"/>
+                      <a:r>
+                        <a:rPr sz="1000" b="1">
+                          <a:solidFill>
+                            <a:srgbClr val="1A1A1A"/>
+                          </a:solidFill>
+                          <a:latin typeface="IPAGothic"/>
+                        </a:rPr>
+                        <a:t>売上総利益</a:t>
+                      </a:r>
+                    </a:p>
+                  </a:txBody>
+                  <a:tcPr>
+                    <a:solidFill>
+                      <a:srgbClr val="E8F4EE"/>
+                    </a:solidFill>
+                  </a:tcPr>
+                </a:tc>
+                <a:tc>
+                  <a:txBody>
+                    <a:bodyPr/>
+                    <a:lstStyle/>
+                    <a:p>
+                      <a:pPr algn="ctr"/>
+                      <a:r>
+                        <a:rPr sz="1000" b="1">
+                          <a:solidFill>
+                            <a:srgbClr val="1A1A1A"/>
+                          </a:solidFill>
+                          <a:latin typeface="IPAGothic"/>
+                        </a:rPr>
+                        <a:t>9,660</a:t>
+                      </a:r>
+                    </a:p>
+                  </a:txBody>
+                  <a:tcPr>
+                    <a:solidFill>
+                      <a:srgbClr val="E8F4EE"/>
+                    </a:solidFill>
+                  </a:tcPr>
+                </a:tc>
+                <a:tc>
+                  <a:txBody>
+                    <a:bodyPr/>
+                    <a:lstStyle/>
+                    <a:p>
+                      <a:pPr algn="ctr"/>
+                      <a:r>
+                        <a:rPr sz="1000" b="1">
+                          <a:solidFill>
+                            <a:srgbClr val="1A1A1A"/>
+                          </a:solidFill>
+                          <a:latin typeface="IPAGothic"/>
+                        </a:rPr>
+                        <a:t>24,840</a:t>
+                      </a:r>
+                    </a:p>
+                  </a:txBody>
+                  <a:tcPr>
+                    <a:solidFill>
+                      <a:srgbClr val="E8F4EE"/>
+                    </a:solidFill>
+                  </a:tcPr>
+                </a:tc>
+                <a:tc>
+                  <a:txBody>
+                    <a:bodyPr/>
+                    <a:lstStyle/>
+                    <a:p>
+                      <a:pPr algn="ctr"/>
+                      <a:r>
+                        <a:rPr sz="1000" b="1">
+                          <a:solidFill>
+                            <a:srgbClr val="1A1A1A"/>
+                          </a:solidFill>
+                          <a:latin typeface="IPAGothic"/>
+                        </a:rPr>
+                        <a:t>49,680</a:t>
+                      </a:r>
+                    </a:p>
+                  </a:txBody>
+                  <a:tcPr>
+                    <a:solidFill>
+                      <a:srgbClr val="E8F4EE"/>
+                    </a:solidFill>
+                  </a:tcPr>
+                </a:tc>
+                <a:tc>
+                  <a:txBody>
+                    <a:bodyPr/>
+                    <a:lstStyle/>
+                    <a:p>
+                      <a:pPr algn="ctr"/>
+                      <a:r>
+                        <a:rPr sz="1000" b="1">
+                          <a:solidFill>
+                            <a:srgbClr val="1A1A1A"/>
+                          </a:solidFill>
+                          <a:latin typeface="IPAGothic"/>
+                        </a:rPr>
+                        <a:t>82,800</a:t>
+                      </a:r>
+                    </a:p>
+                  </a:txBody>
+                  <a:tcPr>
+                    <a:solidFill>
+                      <a:srgbClr val="E8F4EE"/>
+                    </a:solidFill>
+                  </a:tcPr>
+                </a:tc>
+                <a:tc>
+                  <a:txBody>
+                    <a:bodyPr/>
+                    <a:lstStyle/>
+                    <a:p>
+                      <a:pPr algn="ctr"/>
+                      <a:r>
+                        <a:rPr sz="1000" b="1">
+                          <a:solidFill>
+                            <a:srgbClr val="1A1A1A"/>
+                          </a:solidFill>
+                          <a:latin typeface="IPAGothic"/>
+                        </a:rPr>
+                        <a:t>138,000</a:t>
+                      </a:r>
+                    </a:p>
+                  </a:txBody>
+                  <a:tcPr>
+                    <a:solidFill>
+                      <a:srgbClr val="E8F4EE"/>
+                    </a:solidFill>
+                  </a:tcPr>
+                </a:tc>
+              </a:tr>
+              <a:tr h="411480">
+                <a:tc>
+                  <a:txBody>
+                    <a:bodyPr/>
+                    <a:lstStyle/>
+                    <a:p>
+                      <a:pPr algn="l"/>
+                      <a:r>
+                        <a:rPr sz="1000" b="0">
+                          <a:solidFill>
+                            <a:srgbClr val="1A1A1A"/>
+                          </a:solidFill>
+                          <a:latin typeface="IPAGothic"/>
+                        </a:rPr>
+                        <a:t>　粗利率</a:t>
+                      </a:r>
+                    </a:p>
+                  </a:txBody>
+                  <a:tcPr>
+                    <a:solidFill>
+                      <a:srgbClr val="FFFFFF"/>
+                    </a:solidFill>
+                  </a:tcPr>
+                </a:tc>
+                <a:tc>
+                  <a:txBody>
+                    <a:bodyPr/>
+                    <a:lstStyle/>
+                    <a:p>
+                      <a:pPr algn="ctr"/>
+                      <a:r>
+                        <a:rPr sz="1000" b="0">
+                          <a:solidFill>
+                            <a:srgbClr val="1A1A1A"/>
+                          </a:solidFill>
+                          <a:latin typeface="IPAGothic"/>
+                        </a:rPr>
+                        <a:t>69%</a:t>
+                      </a:r>
+                    </a:p>
+                  </a:txBody>
+                  <a:tcPr>
+                    <a:solidFill>
+                      <a:srgbClr val="FFFFFF"/>
+                    </a:solidFill>
+                  </a:tcPr>
+                </a:tc>
+                <a:tc>
+                  <a:txBody>
+                    <a:bodyPr/>
+                    <a:lstStyle/>
+                    <a:p>
+                      <a:pPr algn="ctr"/>
+                      <a:r>
+                        <a:rPr sz="1000" b="0">
+                          <a:solidFill>
+                            <a:srgbClr val="1A1A1A"/>
+                          </a:solidFill>
+                          <a:latin typeface="IPAGothic"/>
+                        </a:rPr>
+                        <a:t>69%</a:t>
+                      </a:r>
+                    </a:p>
+                  </a:txBody>
+                  <a:tcPr>
+                    <a:solidFill>
+                      <a:srgbClr val="FFFFFF"/>
+                    </a:solidFill>
+                  </a:tcPr>
+                </a:tc>
+                <a:tc>
+                  <a:txBody>
+                    <a:bodyPr/>
+                    <a:lstStyle/>
+                    <a:p>
+                      <a:pPr algn="ctr"/>
+                      <a:r>
+                        <a:rPr sz="1000" b="0">
+                          <a:solidFill>
+                            <a:srgbClr val="1A1A1A"/>
+                          </a:solidFill>
+                          <a:latin typeface="IPAGothic"/>
+                        </a:rPr>
+                        <a:t>69%</a:t>
+                      </a:r>
+                    </a:p>
+                  </a:txBody>
+                  <a:tcPr>
+                    <a:solidFill>
+                      <a:srgbClr val="FFFFFF"/>
+                    </a:solidFill>
+                  </a:tcPr>
+                </a:tc>
+                <a:tc>
+                  <a:txBody>
+                    <a:bodyPr/>
+                    <a:lstStyle/>
+                    <a:p>
+                      <a:pPr algn="ctr"/>
+                      <a:r>
+                        <a:rPr sz="1000" b="0">
+                          <a:solidFill>
+                            <a:srgbClr val="1A1A1A"/>
+                          </a:solidFill>
+                          <a:latin typeface="IPAGothic"/>
+                        </a:rPr>
+                        <a:t>69%</a:t>
+                      </a:r>
+                    </a:p>
+                  </a:txBody>
+                  <a:tcPr>
+                    <a:solidFill>
+                      <a:srgbClr val="FFFFFF"/>
+                    </a:solidFill>
+                  </a:tcPr>
+                </a:tc>
+                <a:tc>
+                  <a:txBody>
+                    <a:bodyPr/>
+                    <a:lstStyle/>
+                    <a:p>
+                      <a:pPr algn="ctr"/>
+                      <a:r>
+                        <a:rPr sz="1000" b="0">
+                          <a:solidFill>
+                            <a:srgbClr val="1A1A1A"/>
+                          </a:solidFill>
+                          <a:latin typeface="IPAGothic"/>
+                        </a:rPr>
+                        <a:t>69%</a:t>
+                      </a:r>
+                    </a:p>
+                  </a:txBody>
+                  <a:tcPr>
+                    <a:solidFill>
+                      <a:srgbClr val="FFFFFF"/>
+                    </a:solidFill>
+                  </a:tcPr>
+                </a:tc>
+              </a:tr>
+              <a:tr h="411480">
+                <a:tc>
+                  <a:txBody>
+                    <a:bodyPr/>
+                    <a:lstStyle/>
+                    <a:p>
+                      <a:pPr algn="l"/>
+                      <a:r>
+                        <a:rPr sz="1000" b="0">
+                          <a:solidFill>
+                            <a:srgbClr val="1A1A1A"/>
+                          </a:solidFill>
+                          <a:latin typeface="IPAGothic"/>
+                        </a:rPr>
+                        <a:t>　人件費</a:t>
+                      </a:r>
+                    </a:p>
+                  </a:txBody>
+                  <a:tcPr>
+                    <a:solidFill>
+                      <a:srgbClr val="F0EEE8"/>
+                    </a:solidFill>
+                  </a:tcPr>
+                </a:tc>
+                <a:tc>
+                  <a:txBody>
+                    <a:bodyPr/>
+                    <a:lstStyle/>
+                    <a:p>
+                      <a:pPr algn="ctr"/>
+                      <a:r>
+                        <a:rPr sz="1000" b="0">
+                          <a:solidFill>
+                            <a:srgbClr val="1A1A1A"/>
+                          </a:solidFill>
+                          <a:latin typeface="IPAGothic"/>
+                        </a:rPr>
+                        <a:t>▲3,500</a:t>
+                      </a:r>
+                    </a:p>
+                  </a:txBody>
+                  <a:tcPr>
+                    <a:solidFill>
+                      <a:srgbClr val="F0EEE8"/>
+                    </a:solidFill>
+                  </a:tcPr>
+                </a:tc>
+                <a:tc>
+                  <a:txBody>
+                    <a:bodyPr/>
+                    <a:lstStyle/>
+                    <a:p>
+                      <a:pPr algn="ctr"/>
+                      <a:r>
+                        <a:rPr sz="1000" b="0">
+                          <a:solidFill>
+                            <a:srgbClr val="1A1A1A"/>
+                          </a:solidFill>
+                          <a:latin typeface="IPAGothic"/>
+                        </a:rPr>
+                        <a:t>▲8,500</a:t>
+                      </a:r>
+                    </a:p>
+                  </a:txBody>
+                  <a:tcPr>
+                    <a:solidFill>
+                      <a:srgbClr val="F0EEE8"/>
+                    </a:solidFill>
+                  </a:tcPr>
+                </a:tc>
+                <a:tc>
+                  <a:txBody>
+                    <a:bodyPr/>
+                    <a:lstStyle/>
+                    <a:p>
+                      <a:pPr algn="ctr"/>
+                      <a:r>
+                        <a:rPr sz="1000" b="0">
+                          <a:solidFill>
+                            <a:srgbClr val="1A1A1A"/>
+                          </a:solidFill>
+                          <a:latin typeface="IPAGothic"/>
+                        </a:rPr>
+                        <a:t>▲16,000</a:t>
+                      </a:r>
+                    </a:p>
+                  </a:txBody>
+                  <a:tcPr>
+                    <a:solidFill>
+                      <a:srgbClr val="F0EEE8"/>
+                    </a:solidFill>
+                  </a:tcPr>
+                </a:tc>
+                <a:tc>
+                  <a:txBody>
+                    <a:bodyPr/>
+                    <a:lstStyle/>
+                    <a:p>
+                      <a:pPr algn="ctr"/>
+                      <a:r>
+                        <a:rPr sz="1000" b="0">
+                          <a:solidFill>
+                            <a:srgbClr val="1A1A1A"/>
+                          </a:solidFill>
+                          <a:latin typeface="IPAGothic"/>
+                        </a:rPr>
+                        <a:t>▲26,000</a:t>
+                      </a:r>
+                    </a:p>
+                  </a:txBody>
+                  <a:tcPr>
+                    <a:solidFill>
+                      <a:srgbClr val="F0EEE8"/>
+                    </a:solidFill>
+                  </a:tcPr>
+                </a:tc>
+                <a:tc>
+                  <a:txBody>
+                    <a:bodyPr/>
+                    <a:lstStyle/>
+                    <a:p>
+                      <a:pPr algn="ctr"/>
+                      <a:r>
+                        <a:rPr sz="1000" b="0">
+                          <a:solidFill>
+                            <a:srgbClr val="1A1A1A"/>
+                          </a:solidFill>
+                          <a:latin typeface="IPAGothic"/>
+                        </a:rPr>
+                        <a:t>▲42,000</a:t>
+                      </a:r>
+                    </a:p>
+                  </a:txBody>
+                  <a:tcPr>
+                    <a:solidFill>
+                      <a:srgbClr val="F0EEE8"/>
+                    </a:solidFill>
+                  </a:tcPr>
+                </a:tc>
+              </a:tr>
+              <a:tr h="411480">
+                <a:tc>
+                  <a:txBody>
+                    <a:bodyPr/>
+                    <a:lstStyle/>
+                    <a:p>
+                      <a:pPr algn="l"/>
+                      <a:r>
+                        <a:rPr sz="1000" b="0">
+                          <a:solidFill>
+                            <a:srgbClr val="1A1A1A"/>
+                          </a:solidFill>
+                          <a:latin typeface="IPAGothic"/>
+                        </a:rPr>
+                        <a:t>　家賃合計</a:t>
+                      </a:r>
+                    </a:p>
+                  </a:txBody>
+                  <a:tcPr>
+                    <a:solidFill>
+                      <a:srgbClr val="FFFFFF"/>
+                    </a:solidFill>
+                  </a:tcPr>
+                </a:tc>
+                <a:tc>
+                  <a:txBody>
+                    <a:bodyPr/>
+                    <a:lstStyle/>
+                    <a:p>
+                      <a:pPr algn="ctr"/>
+                      <a:r>
+                        <a:rPr sz="1000" b="0">
+                          <a:solidFill>
+                            <a:srgbClr val="1A1A1A"/>
+                          </a:solidFill>
+                          <a:latin typeface="IPAGothic"/>
+                        </a:rPr>
+                        <a:t>▲1,500</a:t>
+                      </a:r>
+                    </a:p>
+                  </a:txBody>
+                  <a:tcPr>
+                    <a:solidFill>
+                      <a:srgbClr val="FFFFFF"/>
+                    </a:solidFill>
+                  </a:tcPr>
+                </a:tc>
+                <a:tc>
+                  <a:txBody>
+                    <a:bodyPr/>
+                    <a:lstStyle/>
+                    <a:p>
+                      <a:pPr algn="ctr"/>
+                      <a:r>
+                        <a:rPr sz="1000" b="0">
+                          <a:solidFill>
+                            <a:srgbClr val="1A1A1A"/>
+                          </a:solidFill>
+                          <a:latin typeface="IPAGothic"/>
+                        </a:rPr>
+                        <a:t>▲3,600</a:t>
+                      </a:r>
+                    </a:p>
+                  </a:txBody>
+                  <a:tcPr>
+                    <a:solidFill>
+                      <a:srgbClr val="FFFFFF"/>
+                    </a:solidFill>
+                  </a:tcPr>
+                </a:tc>
+                <a:tc>
+                  <a:txBody>
+                    <a:bodyPr/>
+                    <a:lstStyle/>
+                    <a:p>
+                      <a:pPr algn="ctr"/>
+                      <a:r>
+                        <a:rPr sz="1000" b="0">
+                          <a:solidFill>
+                            <a:srgbClr val="1A1A1A"/>
+                          </a:solidFill>
+                          <a:latin typeface="IPAGothic"/>
+                        </a:rPr>
+                        <a:t>▲7,200</a:t>
+                      </a:r>
+                    </a:p>
+                  </a:txBody>
+                  <a:tcPr>
+                    <a:solidFill>
+                      <a:srgbClr val="FFFFFF"/>
+                    </a:solidFill>
+                  </a:tcPr>
+                </a:tc>
+                <a:tc>
+                  <a:txBody>
+                    <a:bodyPr/>
+                    <a:lstStyle/>
+                    <a:p>
+                      <a:pPr algn="ctr"/>
+                      <a:r>
+                        <a:rPr sz="1000" b="0">
+                          <a:solidFill>
+                            <a:srgbClr val="1A1A1A"/>
+                          </a:solidFill>
+                          <a:latin typeface="IPAGothic"/>
+                        </a:rPr>
+                        <a:t>▲11,000</a:t>
+                      </a:r>
+                    </a:p>
+                  </a:txBody>
+                  <a:tcPr>
+                    <a:solidFill>
+                      <a:srgbClr val="FFFFFF"/>
+                    </a:solidFill>
+                  </a:tcPr>
+                </a:tc>
+                <a:tc>
+                  <a:txBody>
+                    <a:bodyPr/>
+                    <a:lstStyle/>
+                    <a:p>
+                      <a:pPr algn="ctr"/>
+                      <a:r>
+                        <a:rPr sz="1000" b="0">
+                          <a:solidFill>
+                            <a:srgbClr val="1A1A1A"/>
+                          </a:solidFill>
+                          <a:latin typeface="IPAGothic"/>
+                        </a:rPr>
+                        <a:t>▲17,000</a:t>
+                      </a:r>
+                    </a:p>
+                  </a:txBody>
+                  <a:tcPr>
+                    <a:solidFill>
+                      <a:srgbClr val="FFFFFF"/>
+                    </a:solidFill>
+                  </a:tcPr>
+                </a:tc>
+              </a:tr>
+              <a:tr h="411480">
+                <a:tc>
+                  <a:txBody>
+                    <a:bodyPr/>
+                    <a:lstStyle/>
+                    <a:p>
+                      <a:pPr algn="l"/>
+                      <a:r>
+                        <a:rPr sz="1000" b="0">
+                          <a:solidFill>
+                            <a:srgbClr val="1A1A1A"/>
+                          </a:solidFill>
+                          <a:latin typeface="IPAGothic"/>
+                        </a:rPr>
+                        <a:t>　その他（光熱費等）</a:t>
+                      </a:r>
+                    </a:p>
+                  </a:txBody>
+                  <a:tcPr>
+                    <a:solidFill>
+                      <a:srgbClr val="F0EEE8"/>
+                    </a:solidFill>
+                  </a:tcPr>
+                </a:tc>
+                <a:tc>
+                  <a:txBody>
+                    <a:bodyPr/>
+                    <a:lstStyle/>
+                    <a:p>
+                      <a:pPr algn="ctr"/>
+                      <a:r>
+                        <a:rPr sz="1000" b="0">
+                          <a:solidFill>
+                            <a:srgbClr val="1A1A1A"/>
+                          </a:solidFill>
+                          <a:latin typeface="IPAGothic"/>
+                        </a:rPr>
+                        <a:t>▲2,400</a:t>
+                      </a:r>
+                    </a:p>
+                  </a:txBody>
+                  <a:tcPr>
+                    <a:solidFill>
+                      <a:srgbClr val="F0EEE8"/>
+                    </a:solidFill>
+                  </a:tcPr>
+                </a:tc>
+                <a:tc>
+                  <a:txBody>
+                    <a:bodyPr/>
+                    <a:lstStyle/>
+                    <a:p>
+                      <a:pPr algn="ctr"/>
+                      <a:r>
+                        <a:rPr sz="1000" b="0">
+                          <a:solidFill>
+                            <a:srgbClr val="1A1A1A"/>
+                          </a:solidFill>
+                          <a:latin typeface="IPAGothic"/>
+                        </a:rPr>
+                        <a:t>▲5,600</a:t>
+                      </a:r>
+                    </a:p>
+                  </a:txBody>
+                  <a:tcPr>
+                    <a:solidFill>
+                      <a:srgbClr val="F0EEE8"/>
+                    </a:solidFill>
+                  </a:tcPr>
+                </a:tc>
+                <a:tc>
+                  <a:txBody>
+                    <a:bodyPr/>
+                    <a:lstStyle/>
+                    <a:p>
+                      <a:pPr algn="ctr"/>
+                      <a:r>
+                        <a:rPr sz="1000" b="0">
+                          <a:solidFill>
+                            <a:srgbClr val="1A1A1A"/>
+                          </a:solidFill>
+                          <a:latin typeface="IPAGothic"/>
+                        </a:rPr>
+                        <a:t>▲11,600</a:t>
+                      </a:r>
+                    </a:p>
+                  </a:txBody>
+                  <a:tcPr>
+                    <a:solidFill>
+                      <a:srgbClr val="F0EEE8"/>
+                    </a:solidFill>
+                  </a:tcPr>
+                </a:tc>
+                <a:tc>
+                  <a:txBody>
+                    <a:bodyPr/>
+                    <a:lstStyle/>
+                    <a:p>
+                      <a:pPr algn="ctr"/>
+                      <a:r>
+                        <a:rPr sz="1000" b="0">
+                          <a:solidFill>
+                            <a:srgbClr val="1A1A1A"/>
+                          </a:solidFill>
+                          <a:latin typeface="IPAGothic"/>
+                        </a:rPr>
+                        <a:t>▲18,000</a:t>
+                      </a:r>
+                    </a:p>
+                  </a:txBody>
+                  <a:tcPr>
+                    <a:solidFill>
+                      <a:srgbClr val="F0EEE8"/>
+                    </a:solidFill>
+                  </a:tcPr>
+                </a:tc>
+                <a:tc>
+                  <a:txBody>
+                    <a:bodyPr/>
+                    <a:lstStyle/>
+                    <a:p>
+                      <a:pPr algn="ctr"/>
+                      <a:r>
+                        <a:rPr sz="1000" b="0">
+                          <a:solidFill>
+                            <a:srgbClr val="1A1A1A"/>
+                          </a:solidFill>
+                          <a:latin typeface="IPAGothic"/>
+                        </a:rPr>
+                        <a:t>▲31,000</a:t>
+                      </a:r>
+                    </a:p>
+                  </a:txBody>
+                  <a:tcPr>
+                    <a:solidFill>
+                      <a:srgbClr val="F0EEE8"/>
+                    </a:solidFill>
+                  </a:tcPr>
+                </a:tc>
+              </a:tr>
+              <a:tr h="411480">
+                <a:tc>
+                  <a:txBody>
+                    <a:bodyPr/>
+                    <a:lstStyle/>
+                    <a:p>
+                      <a:pPr algn="l"/>
+                      <a:r>
+                        <a:rPr sz="1000" b="1">
+                          <a:solidFill>
+                            <a:srgbClr val="FFFFFF"/>
+                          </a:solidFill>
+                          <a:latin typeface="IPAGothic"/>
+                        </a:rPr>
+                        <a:t>EBITDA</a:t>
+                      </a:r>
+                    </a:p>
+                  </a:txBody>
+                  <a:tcPr>
+                    <a:solidFill>
+                      <a:srgbClr val="2C4A3E"/>
+                    </a:solidFill>
+                  </a:tcPr>
+                </a:tc>
+                <a:tc>
+                  <a:txBody>
+                    <a:bodyPr/>
+                    <a:lstStyle/>
+                    <a:p>
+                      <a:pPr algn="ctr"/>
+                      <a:r>
+                        <a:rPr sz="1000" b="1">
+                          <a:solidFill>
+                            <a:srgbClr val="FFFFFF"/>
+                          </a:solidFill>
+                          <a:latin typeface="IPAGothic"/>
+                        </a:rPr>
+                        <a:t>2,260</a:t>
+                      </a:r>
+                    </a:p>
+                  </a:txBody>
+                  <a:tcPr>
+                    <a:solidFill>
+                      <a:srgbClr val="2C4A3E"/>
+                    </a:solidFill>
+                  </a:tcPr>
+                </a:tc>
+                <a:tc>
+                  <a:txBody>
+                    <a:bodyPr/>
+                    <a:lstStyle/>
+                    <a:p>
+                      <a:pPr algn="ctr"/>
+                      <a:r>
+                        <a:rPr sz="1000" b="1">
+                          <a:solidFill>
+                            <a:srgbClr val="FFFFFF"/>
+                          </a:solidFill>
+                          <a:latin typeface="IPAGothic"/>
+                        </a:rPr>
+                        <a:t>7,140</a:t>
+                      </a:r>
+                    </a:p>
+                  </a:txBody>
+                  <a:tcPr>
+                    <a:solidFill>
+                      <a:srgbClr val="2C4A3E"/>
+                    </a:solidFill>
+                  </a:tcPr>
+                </a:tc>
+                <a:tc>
+                  <a:txBody>
+                    <a:bodyPr/>
+                    <a:lstStyle/>
+                    <a:p>
+                      <a:pPr algn="ctr"/>
+                      <a:r>
+                        <a:rPr sz="1000" b="1">
+                          <a:solidFill>
+                            <a:srgbClr val="FFFFFF"/>
+                          </a:solidFill>
+                          <a:latin typeface="IPAGothic"/>
+                        </a:rPr>
+                        <a:t>14,880</a:t>
+                      </a:r>
+                    </a:p>
+                  </a:txBody>
+                  <a:tcPr>
+                    <a:solidFill>
+                      <a:srgbClr val="2C4A3E"/>
+                    </a:solidFill>
+                  </a:tcPr>
+                </a:tc>
+                <a:tc>
+                  <a:txBody>
+                    <a:bodyPr/>
+                    <a:lstStyle/>
+                    <a:p>
+                      <a:pPr algn="ctr"/>
+                      <a:r>
+                        <a:rPr sz="1000" b="1">
+                          <a:solidFill>
+                            <a:srgbClr val="FFFFFF"/>
+                          </a:solidFill>
+                          <a:latin typeface="IPAGothic"/>
+                        </a:rPr>
+                        <a:t>27,800</a:t>
+                      </a:r>
+                    </a:p>
+                  </a:txBody>
+                  <a:tcPr>
+                    <a:solidFill>
+                      <a:srgbClr val="2C4A3E"/>
+                    </a:solidFill>
+                  </a:tcPr>
+                </a:tc>
+                <a:tc>
+                  <a:txBody>
+                    <a:bodyPr/>
+                    <a:lstStyle/>
+                    <a:p>
+                      <a:pPr algn="ctr"/>
+                      <a:r>
+                        <a:rPr sz="1000" b="1">
+                          <a:solidFill>
+                            <a:srgbClr val="FFFFFF"/>
+                          </a:solidFill>
+                          <a:latin typeface="IPAGothic"/>
+                        </a:rPr>
+                        <a:t>48,000</a:t>
+                      </a:r>
+                    </a:p>
+                  </a:txBody>
+                  <a:tcPr>
+                    <a:solidFill>
+                      <a:srgbClr val="2C4A3E"/>
+                    </a:solidFill>
+                  </a:tcPr>
+                </a:tc>
+              </a:tr>
+              <a:tr h="411480">
+                <a:tc>
+                  <a:txBody>
+                    <a:bodyPr/>
+                    <a:lstStyle/>
+                    <a:p>
+                      <a:pPr algn="l"/>
+                      <a:r>
+                        <a:rPr sz="1000" b="0">
+                          <a:solidFill>
+                            <a:srgbClr val="1A1A1A"/>
+                          </a:solidFill>
+                          <a:latin typeface="IPAGothic"/>
+                        </a:rPr>
+                        <a:t>EBITDA率</a:t>
+                      </a:r>
+                    </a:p>
+                  </a:txBody>
+                  <a:tcPr>
+                    <a:solidFill>
+                      <a:srgbClr val="F0EEE8"/>
+                    </a:solidFill>
+                  </a:tcPr>
+                </a:tc>
+                <a:tc>
+                  <a:txBody>
+                    <a:bodyPr/>
+                    <a:lstStyle/>
+                    <a:p>
+                      <a:pPr algn="ctr"/>
+                      <a:r>
+                        <a:rPr sz="1000" b="0">
+                          <a:solidFill>
+                            <a:srgbClr val="1A1A1A"/>
+                          </a:solidFill>
+                          <a:latin typeface="IPAGothic"/>
+                        </a:rPr>
+                        <a:t>16%</a:t>
+                      </a:r>
+                    </a:p>
+                  </a:txBody>
+                  <a:tcPr>
+                    <a:solidFill>
+                      <a:srgbClr val="F0EEE8"/>
+                    </a:solidFill>
+                  </a:tcPr>
+                </a:tc>
+                <a:tc>
+                  <a:txBody>
+                    <a:bodyPr/>
+                    <a:lstStyle/>
+                    <a:p>
+                      <a:pPr algn="ctr"/>
+                      <a:r>
+                        <a:rPr sz="1000" b="0">
+                          <a:solidFill>
+                            <a:srgbClr val="1A1A1A"/>
+                          </a:solidFill>
+                          <a:latin typeface="IPAGothic"/>
+                        </a:rPr>
+                        <a:t>20%</a:t>
+                      </a:r>
+                    </a:p>
+                  </a:txBody>
+                  <a:tcPr>
+                    <a:solidFill>
+                      <a:srgbClr val="F0EEE8"/>
+                    </a:solidFill>
+                  </a:tcPr>
+                </a:tc>
+                <a:tc>
+                  <a:txBody>
+                    <a:bodyPr/>
+                    <a:lstStyle/>
+                    <a:p>
+                      <a:pPr algn="ctr"/>
+                      <a:r>
+                        <a:rPr sz="1000" b="0">
+                          <a:solidFill>
+                            <a:srgbClr val="1A1A1A"/>
+                          </a:solidFill>
+                          <a:latin typeface="IPAGothic"/>
+                        </a:rPr>
+                        <a:t>21%</a:t>
+                      </a:r>
+                    </a:p>
+                  </a:txBody>
+                  <a:tcPr>
+                    <a:solidFill>
+                      <a:srgbClr val="F0EEE8"/>
+                    </a:solidFill>
+                  </a:tcPr>
+                </a:tc>
+                <a:tc>
+                  <a:txBody>
+                    <a:bodyPr/>
+                    <a:lstStyle/>
+                    <a:p>
+                      <a:pPr algn="ctr"/>
+                      <a:r>
+                        <a:rPr sz="1000" b="0">
+                          <a:solidFill>
+                            <a:srgbClr val="1A1A1A"/>
+                          </a:solidFill>
+                          <a:latin typeface="IPAGothic"/>
+                        </a:rPr>
+                        <a:t>23%</a:t>
+                      </a:r>
+                    </a:p>
+                  </a:txBody>
+                  <a:tcPr>
+                    <a:solidFill>
+                      <a:srgbClr val="F0EEE8"/>
+                    </a:solidFill>
+                  </a:tcPr>
+                </a:tc>
+                <a:tc>
+                  <a:txBody>
+                    <a:bodyPr/>
+                    <a:lstStyle/>
+                    <a:p>
+                      <a:pPr algn="ctr"/>
+                      <a:r>
+                        <a:rPr sz="1000" b="0">
+                          <a:solidFill>
+                            <a:srgbClr val="1A1A1A"/>
+                          </a:solidFill>
+                          <a:latin typeface="IPAGothic"/>
+                        </a:rPr>
+                        <a:t>24%</a:t>
+                      </a:r>
+                    </a:p>
+                  </a:txBody>
+                  <a:tcPr>
+                    <a:solidFill>
+                      <a:srgbClr val="F0EEE8"/>
+                    </a:solidFill>
+                  </a:tcPr>
+                </a:tc>
+              </a:tr>
+            </a:tbl>
+          </a:graphicData>
+        </a:graphic>
+      </p:graphicFrame>
+      <p:pic>
+        <p:nvPicPr>
+          <p:cNvPr id="5" name="Picture 4" descr="image.png"/>
+          <p:cNvPicPr>
+            <a:picLocks noChangeAspect="1"/>
+          </p:cNvPicPr>
+          <p:nvPr/>
+        </p:nvPicPr>
+        <p:blipFill>
+          <a:blip r:embed="rId2"/>
+          <a:stretch>
+            <a:fillRect/>
+          </a:stretch>
+        </p:blipFill>
+        <p:spPr>
+          <a:xfrm>
+            <a:off x="274320" y="5303520"/>
+            <a:ext cx="11612880" cy="1280160"/>
+          </a:xfrm>
+          <a:prstGeom prst="rect">
+            <a:avLst/>
+          </a:prstGeom>
+        </p:spPr>
+      </p:pic>
+    </p:spTree>
+  </p:cSld>
+  <p:clrMapOvr>
+    <a:masterClrMapping/>
+  </p:clrMapOvr>
+</p:sld>
+</file>
+
+<file path=ppt/slides/slide13.xml><?xml version="1.0" encoding="utf-8"?>
+<p:sld xmlns:a="http://schemas.openxmlformats.org/drawingml/2006/main" xmlns:p="http://schemas.openxmlformats.org/presentationml/2006/main" xmlns:r="http://schemas.openxmlformats.org/officeDocument/2006/relationships">
+  <p:cSld>
+    <p:bg>
+      <p:bgPr>
+        <a:solidFill>
+          <a:srgbClr val="FAFAF6"/>
+        </a:solidFill>
+        <a:effectLst/>
+      </p:bgPr>
+    </p:bg>
+    <p:spTree>
+      <p:nvGrpSpPr>
+        <p:cNvPr id="1" name=""/>
+        <p:cNvGrpSpPr/>
+        <p:nvPr/>
+      </p:nvGrpSpPr>
+      <p:grpSpPr/>
+      <p:sp>
+        <p:nvSpPr>
+          <p:cNvPr id="2" name="Rectangle 1"/>
+          <p:cNvSpPr/>
+          <p:nvPr/>
+        </p:nvSpPr>
+        <p:spPr>
+          <a:xfrm>
+            <a:off x="0" y="0"/>
+            <a:ext cx="12188952" cy="868680"/>
+          </a:xfrm>
+          <a:prstGeom prst="rect">
+            <a:avLst/>
+          </a:prstGeom>
+          <a:solidFill>
+            <a:srgbClr val="2C4A3E"/>
+          </a:solidFill>
+          <a:ln>
+            <a:noFill/>
+          </a:ln>
+        </p:spPr>
+        <p:style>
+          <a:lnRef idx="1">
+            <a:schemeClr val="accent1"/>
+          </a:lnRef>
+          <a:fillRef idx="3">
+            <a:schemeClr val="accent1"/>
+          </a:fillRef>
+          <a:effectRef idx="2">
+            <a:schemeClr val="accent1"/>
+          </a:effectRef>
+          <a:fontRef idx="minor">
+            <a:schemeClr val="lt1"/>
+          </a:fontRef>
+        </p:style>
+        <p:txBody>
+          <a:bodyPr rtlCol="0" anchor="ctr"/>
+          <a:lstStyle/>
+          <a:p>
+            <a:pPr algn="ctr"/>
+          </a:p>
+        </p:txBody>
+      </p:sp>
+      <p:sp>
+        <p:nvSpPr>
+          <p:cNvPr id="3" name="TextBox 2"/>
+          <p:cNvSpPr txBox="1"/>
+          <p:nvPr/>
+        </p:nvSpPr>
+        <p:spPr>
+          <a:xfrm>
+            <a:off x="365760" y="91440"/>
+            <a:ext cx="10972800" cy="777240"/>
+          </a:xfrm>
+          <a:prstGeom prst="rect">
+            <a:avLst/>
+          </a:prstGeom>
+          <a:noFill/>
+        </p:spPr>
+        <p:txBody>
+          <a:bodyPr wrap="none">
+            <a:spAutoFit/>
+          </a:bodyPr>
+          <a:lstStyle/>
+          <a:p>
+            <a:pPr algn="l"/>
+            <a:r>
+              <a:rPr sz="2600" b="1">
+                <a:solidFill>
+                  <a:srgbClr val="FFFFFF"/>
+                </a:solidFill>
+                <a:latin typeface="IPAGothic"/>
+              </a:rPr>
+              <a:t>キャッシュフロー計画</a:t>
+            </a:r>
+          </a:p>
+        </p:txBody>
+      </p:sp>
+      <p:pic>
+        <p:nvPicPr>
+          <p:cNvPr id="4" name="Picture 3" descr="image.png"/>
+          <p:cNvPicPr>
+            <a:picLocks noChangeAspect="1"/>
+          </p:cNvPicPr>
+          <p:nvPr/>
+        </p:nvPicPr>
+        <p:blipFill>
+          <a:blip r:embed="rId2"/>
+          <a:stretch>
+            <a:fillRect/>
+          </a:stretch>
+        </p:blipFill>
+        <p:spPr>
+          <a:xfrm>
+            <a:off x="274320" y="1005840"/>
+            <a:ext cx="6858000" cy="3200400"/>
+          </a:xfrm>
+          <a:prstGeom prst="rect">
+            <a:avLst/>
+          </a:prstGeom>
+        </p:spPr>
+      </p:pic>
+      <p:graphicFrame>
+        <p:nvGraphicFramePr>
+          <p:cNvPr id="5" name="Table 4"/>
+          <p:cNvGraphicFramePr>
+            <a:graphicFrameLocks noGrp="1"/>
+          </p:cNvGraphicFramePr>
+          <p:nvPr/>
+        </p:nvGraphicFramePr>
+        <p:xfrm>
+          <a:off x="7132320" y="1005840"/>
+          <a:ext cx="4754876" cy="2286000"/>
+        </p:xfrm>
+        <a:graphic>
+          <a:graphicData uri="http://schemas.openxmlformats.org/drawingml/2006/table">
+            <a:tbl>
+              <a:tblPr firstRow="1" bandRow="1">
+                <a:tableStyleId>{5C22544A-7EE6-4342-B048-85BDC9FD1C3A}</a:tableStyleId>
+              </a:tblPr>
+              <a:tblGrid>
+                <a:gridCol w="679268"/>
+                <a:gridCol w="679268"/>
+                <a:gridCol w="679268"/>
+                <a:gridCol w="679268"/>
+                <a:gridCol w="679268"/>
+                <a:gridCol w="679268"/>
+                <a:gridCol w="679268"/>
+              </a:tblGrid>
+              <a:tr h="457200">
+                <a:tc>
+                  <a:txBody>
+                    <a:bodyPr/>
+                    <a:lstStyle/>
+                    <a:p>
+                      <a:pPr algn="ctr"/>
+                      <a:r>
+                        <a:rPr sz="1000" b="1">
+                          <a:solidFill>
+                            <a:srgbClr val="FFFFFF"/>
+                          </a:solidFill>
+                          <a:latin typeface="IPAGothic"/>
+                        </a:rPr>
+                        <a:t/>
+                      </a:r>
+                    </a:p>
+                  </a:txBody>
+                  <a:tcPr>
+                    <a:solidFill>
+                      <a:srgbClr val="2C4A3E"/>
+                    </a:solidFill>
+                  </a:tcPr>
+                </a:tc>
+                <a:tc>
+                  <a:txBody>
+                    <a:bodyPr/>
+                    <a:lstStyle/>
+                    <a:p>
+                      <a:pPr algn="ctr"/>
+                      <a:r>
+                        <a:rPr sz="1000" b="1">
+                          <a:solidFill>
+                            <a:srgbClr val="FFFFFF"/>
+                          </a:solidFill>
+                          <a:latin typeface="IPAGothic"/>
+                        </a:rPr>
+                        <a:t>調達時</a:t>
+                      </a:r>
+                    </a:p>
+                  </a:txBody>
+                  <a:tcPr>
+                    <a:solidFill>
+                      <a:srgbClr val="2C4A3E"/>
+                    </a:solidFill>
+                  </a:tcPr>
+                </a:tc>
+                <a:tc>
+                  <a:txBody>
+                    <a:bodyPr/>
+                    <a:lstStyle/>
+                    <a:p>
+                      <a:pPr algn="ctr"/>
+                      <a:r>
+                        <a:rPr sz="1000" b="1">
+                          <a:solidFill>
+                            <a:srgbClr val="FFFFFF"/>
+                          </a:solidFill>
+                          <a:latin typeface="IPAGothic"/>
+                        </a:rPr>
+                        <a:t>Y1末</a:t>
+                      </a:r>
+                    </a:p>
+                  </a:txBody>
+                  <a:tcPr>
+                    <a:solidFill>
+                      <a:srgbClr val="2C4A3E"/>
+                    </a:solidFill>
+                  </a:tcPr>
+                </a:tc>
+                <a:tc>
+                  <a:txBody>
+                    <a:bodyPr/>
+                    <a:lstStyle/>
+                    <a:p>
+                      <a:pPr algn="ctr"/>
+                      <a:r>
+                        <a:rPr sz="1000" b="1">
+                          <a:solidFill>
+                            <a:srgbClr val="FFFFFF"/>
+                          </a:solidFill>
+                          <a:latin typeface="IPAGothic"/>
+                        </a:rPr>
+                        <a:t>Y2末</a:t>
+                      </a:r>
+                    </a:p>
+                  </a:txBody>
+                  <a:tcPr>
+                    <a:solidFill>
+                      <a:srgbClr val="2C4A3E"/>
+                    </a:solidFill>
+                  </a:tcPr>
+                </a:tc>
+                <a:tc>
+                  <a:txBody>
+                    <a:bodyPr/>
+                    <a:lstStyle/>
+                    <a:p>
+                      <a:pPr algn="ctr"/>
+                      <a:r>
+                        <a:rPr sz="1000" b="1">
+                          <a:solidFill>
+                            <a:srgbClr val="FFFFFF"/>
+                          </a:solidFill>
+                          <a:latin typeface="IPAGothic"/>
+                        </a:rPr>
+                        <a:t>Y3末</a:t>
+                      </a:r>
+                    </a:p>
+                  </a:txBody>
+                  <a:tcPr>
+                    <a:solidFill>
+                      <a:srgbClr val="2C4A3E"/>
+                    </a:solidFill>
+                  </a:tcPr>
+                </a:tc>
+                <a:tc>
+                  <a:txBody>
+                    <a:bodyPr/>
+                    <a:lstStyle/>
+                    <a:p>
+                      <a:pPr algn="ctr"/>
+                      <a:r>
+                        <a:rPr sz="1000" b="1">
+                          <a:solidFill>
+                            <a:srgbClr val="FFFFFF"/>
+                          </a:solidFill>
+                          <a:latin typeface="IPAGothic"/>
+                        </a:rPr>
+                        <a:t>Y4末</a:t>
+                      </a:r>
+                    </a:p>
+                  </a:txBody>
+                  <a:tcPr>
+                    <a:solidFill>
+                      <a:srgbClr val="2C4A3E"/>
+                    </a:solidFill>
+                  </a:tcPr>
+                </a:tc>
+                <a:tc>
+                  <a:txBody>
+                    <a:bodyPr/>
+                    <a:lstStyle/>
+                    <a:p>
+                      <a:pPr algn="ctr"/>
+                      <a:r>
+                        <a:rPr sz="1000" b="1">
+                          <a:solidFill>
+                            <a:srgbClr val="FFFFFF"/>
+                          </a:solidFill>
+                          <a:latin typeface="IPAGothic"/>
+                        </a:rPr>
+                        <a:t>Y5末</a:t>
+                      </a:r>
+                    </a:p>
+                  </a:txBody>
+                  <a:tcPr>
+                    <a:solidFill>
+                      <a:srgbClr val="2C4A3E"/>
+                    </a:solidFill>
+                  </a:tcPr>
+                </a:tc>
+              </a:tr>
+              <a:tr h="457200">
+                <a:tc>
+                  <a:txBody>
+                    <a:bodyPr/>
+                    <a:lstStyle/>
+                    <a:p>
+                      <a:pPr algn="ctr"/>
+                      <a:r>
+                        <a:rPr sz="1000">
+                          <a:solidFill>
+                            <a:srgbClr val="1A1A1A"/>
+                          </a:solidFill>
+                          <a:latin typeface="IPAGothic"/>
+                        </a:rPr>
+                        <a:t>営業CF（万円）</a:t>
+                      </a:r>
+                    </a:p>
+                  </a:txBody>
+                  <a:tcPr>
+                    <a:solidFill>
+                      <a:srgbClr val="F0EEE8"/>
+                    </a:solidFill>
+                  </a:tcPr>
+                </a:tc>
+                <a:tc>
+                  <a:txBody>
+                    <a:bodyPr/>
+                    <a:lstStyle/>
+                    <a:p>
+                      <a:pPr algn="ctr"/>
+                      <a:r>
+                        <a:rPr sz="1000">
+                          <a:solidFill>
+                            <a:srgbClr val="1A1A1A"/>
+                          </a:solidFill>
+                          <a:latin typeface="IPAGothic"/>
+                        </a:rPr>
+                        <a:t>─</a:t>
+                      </a:r>
+                    </a:p>
+                  </a:txBody>
+                  <a:tcPr>
+                    <a:solidFill>
+                      <a:srgbClr val="F0EEE8"/>
+                    </a:solidFill>
+                  </a:tcPr>
+                </a:tc>
+                <a:tc>
+                  <a:txBody>
+                    <a:bodyPr/>
+                    <a:lstStyle/>
+                    <a:p>
+                      <a:pPr algn="ctr"/>
+                      <a:r>
+                        <a:rPr sz="1000">
+                          <a:solidFill>
+                            <a:srgbClr val="1A1A1A"/>
+                          </a:solidFill>
+                          <a:latin typeface="IPAGothic"/>
+                        </a:rPr>
+                        <a:t>+2,260</a:t>
+                      </a:r>
+                    </a:p>
+                  </a:txBody>
+                  <a:tcPr>
+                    <a:solidFill>
+                      <a:srgbClr val="F0EEE8"/>
+                    </a:solidFill>
+                  </a:tcPr>
+                </a:tc>
+                <a:tc>
+                  <a:txBody>
+                    <a:bodyPr/>
+                    <a:lstStyle/>
+                    <a:p>
+                      <a:pPr algn="ctr"/>
+                      <a:r>
+                        <a:rPr sz="1000">
+                          <a:solidFill>
+                            <a:srgbClr val="1A1A1A"/>
+                          </a:solidFill>
+                          <a:latin typeface="IPAGothic"/>
+                        </a:rPr>
+                        <a:t>+7,140</a:t>
+                      </a:r>
+                    </a:p>
+                  </a:txBody>
+                  <a:tcPr>
+                    <a:solidFill>
+                      <a:srgbClr val="F0EEE8"/>
+                    </a:solidFill>
+                  </a:tcPr>
+                </a:tc>
+                <a:tc>
+                  <a:txBody>
+                    <a:bodyPr/>
+                    <a:lstStyle/>
+                    <a:p>
+                      <a:pPr algn="ctr"/>
+                      <a:r>
+                        <a:rPr sz="1000">
+                          <a:solidFill>
+                            <a:srgbClr val="1A1A1A"/>
+                          </a:solidFill>
+                          <a:latin typeface="IPAGothic"/>
+                        </a:rPr>
+                        <a:t>+14,880</a:t>
+                      </a:r>
+                    </a:p>
+                  </a:txBody>
+                  <a:tcPr>
+                    <a:solidFill>
+                      <a:srgbClr val="F0EEE8"/>
+                    </a:solidFill>
+                  </a:tcPr>
+                </a:tc>
+                <a:tc>
+                  <a:txBody>
+                    <a:bodyPr/>
+                    <a:lstStyle/>
+                    <a:p>
+                      <a:pPr algn="ctr"/>
+                      <a:r>
+                        <a:rPr sz="1000">
+                          <a:solidFill>
+                            <a:srgbClr val="1A1A1A"/>
+                          </a:solidFill>
+                          <a:latin typeface="IPAGothic"/>
+                        </a:rPr>
+                        <a:t>+27,800</a:t>
+                      </a:r>
+                    </a:p>
+                  </a:txBody>
+                  <a:tcPr>
+                    <a:solidFill>
+                      <a:srgbClr val="F0EEE8"/>
+                    </a:solidFill>
+                  </a:tcPr>
+                </a:tc>
+                <a:tc>
+                  <a:txBody>
+                    <a:bodyPr/>
+                    <a:lstStyle/>
+                    <a:p>
+                      <a:pPr algn="ctr"/>
+                      <a:r>
+                        <a:rPr sz="1000">
+                          <a:solidFill>
+                            <a:srgbClr val="1A1A1A"/>
+                          </a:solidFill>
+                          <a:latin typeface="IPAGothic"/>
+                        </a:rPr>
+                        <a:t>+48,000</a:t>
+                      </a:r>
+                    </a:p>
+                  </a:txBody>
+                  <a:tcPr>
+                    <a:solidFill>
+                      <a:srgbClr val="F0EEE8"/>
+                    </a:solidFill>
+                  </a:tcPr>
+                </a:tc>
+              </a:tr>
+              <a:tr h="457200">
+                <a:tc>
+                  <a:txBody>
+                    <a:bodyPr/>
+                    <a:lstStyle/>
+                    <a:p>
+                      <a:pPr algn="ctr"/>
+                      <a:r>
+                        <a:rPr sz="1000">
+                          <a:solidFill>
+                            <a:srgbClr val="1A1A1A"/>
+                          </a:solidFill>
+                          <a:latin typeface="IPAGothic"/>
+                        </a:rPr>
+                        <a:t>投資CF（万円）</a:t>
+                      </a:r>
+                    </a:p>
+                  </a:txBody>
+                  <a:tcPr>
+                    <a:solidFill>
+                      <a:srgbClr val="FFFFFF"/>
+                    </a:solidFill>
+                  </a:tcPr>
+                </a:tc>
+                <a:tc>
+                  <a:txBody>
+                    <a:bodyPr/>
+                    <a:lstStyle/>
+                    <a:p>
+                      <a:pPr algn="ctr"/>
+                      <a:r>
+                        <a:rPr sz="1000">
+                          <a:solidFill>
+                            <a:srgbClr val="1A1A1A"/>
+                          </a:solidFill>
+                          <a:latin typeface="IPAGothic"/>
+                        </a:rPr>
+                        <a:t>▲3,500</a:t>
+                      </a:r>
+                    </a:p>
+                  </a:txBody>
+                  <a:tcPr>
+                    <a:solidFill>
+                      <a:srgbClr val="FFFFFF"/>
+                    </a:solidFill>
+                  </a:tcPr>
+                </a:tc>
+                <a:tc>
+                  <a:txBody>
+                    <a:bodyPr/>
+                    <a:lstStyle/>
+                    <a:p>
+                      <a:pPr algn="ctr"/>
+                      <a:r>
+                        <a:rPr sz="1000">
+                          <a:solidFill>
+                            <a:srgbClr val="1A1A1A"/>
+                          </a:solidFill>
+                          <a:latin typeface="IPAGothic"/>
+                        </a:rPr>
+                        <a:t>▲1,000</a:t>
+                      </a:r>
+                    </a:p>
+                  </a:txBody>
+                  <a:tcPr>
+                    <a:solidFill>
+                      <a:srgbClr val="FFFFFF"/>
+                    </a:solidFill>
+                  </a:tcPr>
+                </a:tc>
+                <a:tc>
+                  <a:txBody>
+                    <a:bodyPr/>
+                    <a:lstStyle/>
+                    <a:p>
+                      <a:pPr algn="ctr"/>
+                      <a:r>
+                        <a:rPr sz="1000">
+                          <a:solidFill>
+                            <a:srgbClr val="1A1A1A"/>
+                          </a:solidFill>
+                          <a:latin typeface="IPAGothic"/>
+                        </a:rPr>
+                        <a:t>▲5,000</a:t>
+                      </a:r>
+                    </a:p>
+                  </a:txBody>
+                  <a:tcPr>
+                    <a:solidFill>
+                      <a:srgbClr val="FFFFFF"/>
+                    </a:solidFill>
+                  </a:tcPr>
+                </a:tc>
+                <a:tc>
+                  <a:txBody>
+                    <a:bodyPr/>
+                    <a:lstStyle/>
+                    <a:p>
+                      <a:pPr algn="ctr"/>
+                      <a:r>
+                        <a:rPr sz="1000">
+                          <a:solidFill>
+                            <a:srgbClr val="1A1A1A"/>
+                          </a:solidFill>
+                          <a:latin typeface="IPAGothic"/>
+                        </a:rPr>
+                        <a:t>▲8,000</a:t>
+                      </a:r>
+                    </a:p>
+                  </a:txBody>
+                  <a:tcPr>
+                    <a:solidFill>
+                      <a:srgbClr val="FFFFFF"/>
+                    </a:solidFill>
+                  </a:tcPr>
+                </a:tc>
+                <a:tc>
+                  <a:txBody>
+                    <a:bodyPr/>
+                    <a:lstStyle/>
+                    <a:p>
+                      <a:pPr algn="ctr"/>
+                      <a:r>
+                        <a:rPr sz="1000">
+                          <a:solidFill>
+                            <a:srgbClr val="1A1A1A"/>
+                          </a:solidFill>
+                          <a:latin typeface="IPAGothic"/>
+                        </a:rPr>
+                        <a:t>▲10,000</a:t>
+                      </a:r>
+                    </a:p>
+                  </a:txBody>
+                  <a:tcPr>
+                    <a:solidFill>
+                      <a:srgbClr val="FFFFFF"/>
+                    </a:solidFill>
+                  </a:tcPr>
+                </a:tc>
+                <a:tc>
+                  <a:txBody>
+                    <a:bodyPr/>
+                    <a:lstStyle/>
+                    <a:p>
+                      <a:pPr algn="ctr"/>
+                      <a:r>
+                        <a:rPr sz="1000">
+                          <a:solidFill>
+                            <a:srgbClr val="1A1A1A"/>
+                          </a:solidFill>
+                          <a:latin typeface="IPAGothic"/>
+                        </a:rPr>
+                        <a:t>▲5,000</a:t>
+                      </a:r>
+                    </a:p>
+                  </a:txBody>
+                  <a:tcPr>
+                    <a:solidFill>
+                      <a:srgbClr val="FFFFFF"/>
+                    </a:solidFill>
+                  </a:tcPr>
+                </a:tc>
+              </a:tr>
+              <a:tr h="457200">
+                <a:tc>
+                  <a:txBody>
+                    <a:bodyPr/>
+                    <a:lstStyle/>
+                    <a:p>
+                      <a:pPr algn="ctr"/>
+                      <a:r>
+                        <a:rPr sz="1000">
+                          <a:solidFill>
+                            <a:srgbClr val="1A1A1A"/>
+                          </a:solidFill>
+                          <a:latin typeface="IPAGothic"/>
+                        </a:rPr>
+                        <a:t>純CF（万円）</a:t>
+                      </a:r>
+                    </a:p>
+                  </a:txBody>
+                  <a:tcPr>
+                    <a:solidFill>
+                      <a:srgbClr val="F0EEE8"/>
+                    </a:solidFill>
+                  </a:tcPr>
+                </a:tc>
+                <a:tc>
+                  <a:txBody>
+                    <a:bodyPr/>
+                    <a:lstStyle/>
+                    <a:p>
+                      <a:pPr algn="ctr"/>
+                      <a:r>
+                        <a:rPr sz="1000">
+                          <a:solidFill>
+                            <a:srgbClr val="1A1A1A"/>
+                          </a:solidFill>
+                          <a:latin typeface="IPAGothic"/>
+                        </a:rPr>
+                        <a:t>+3,500</a:t>
+                      </a:r>
+                    </a:p>
+                  </a:txBody>
+                  <a:tcPr>
+                    <a:solidFill>
+                      <a:srgbClr val="F0EEE8"/>
+                    </a:solidFill>
+                  </a:tcPr>
+                </a:tc>
+                <a:tc>
+                  <a:txBody>
+                    <a:bodyPr/>
+                    <a:lstStyle/>
+                    <a:p>
+                      <a:pPr algn="ctr"/>
+                      <a:r>
+                        <a:rPr sz="1000">
+                          <a:solidFill>
+                            <a:srgbClr val="1A1A1A"/>
+                          </a:solidFill>
+                          <a:latin typeface="IPAGothic"/>
+                        </a:rPr>
+                        <a:t>+1,260</a:t>
+                      </a:r>
+                    </a:p>
+                  </a:txBody>
+                  <a:tcPr>
+                    <a:solidFill>
+                      <a:srgbClr val="F0EEE8"/>
+                    </a:solidFill>
+                  </a:tcPr>
+                </a:tc>
+                <a:tc>
+                  <a:txBody>
+                    <a:bodyPr/>
+                    <a:lstStyle/>
+                    <a:p>
+                      <a:pPr algn="ctr"/>
+                      <a:r>
+                        <a:rPr sz="1000">
+                          <a:solidFill>
+                            <a:srgbClr val="1A1A1A"/>
+                          </a:solidFill>
+                          <a:latin typeface="IPAGothic"/>
+                        </a:rPr>
+                        <a:t>+2,140</a:t>
+                      </a:r>
+                    </a:p>
+                  </a:txBody>
+                  <a:tcPr>
+                    <a:solidFill>
+                      <a:srgbClr val="F0EEE8"/>
+                    </a:solidFill>
+                  </a:tcPr>
+                </a:tc>
+                <a:tc>
+                  <a:txBody>
+                    <a:bodyPr/>
+                    <a:lstStyle/>
+                    <a:p>
+                      <a:pPr algn="ctr"/>
+                      <a:r>
+                        <a:rPr sz="1000">
+                          <a:solidFill>
+                            <a:srgbClr val="1A1A1A"/>
+                          </a:solidFill>
+                          <a:latin typeface="IPAGothic"/>
+                        </a:rPr>
+                        <a:t>+6,880</a:t>
+                      </a:r>
+                    </a:p>
+                  </a:txBody>
+                  <a:tcPr>
+                    <a:solidFill>
+                      <a:srgbClr val="F0EEE8"/>
+                    </a:solidFill>
+                  </a:tcPr>
+                </a:tc>
+                <a:tc>
+                  <a:txBody>
+                    <a:bodyPr/>
+                    <a:lstStyle/>
+                    <a:p>
+                      <a:pPr algn="ctr"/>
+                      <a:r>
+                        <a:rPr sz="1000">
+                          <a:solidFill>
+                            <a:srgbClr val="1A1A1A"/>
+                          </a:solidFill>
+                          <a:latin typeface="IPAGothic"/>
+                        </a:rPr>
+                        <a:t>+17,800</a:t>
+                      </a:r>
+                    </a:p>
+                  </a:txBody>
+                  <a:tcPr>
+                    <a:solidFill>
+                      <a:srgbClr val="F0EEE8"/>
+                    </a:solidFill>
+                  </a:tcPr>
+                </a:tc>
+                <a:tc>
+                  <a:txBody>
+                    <a:bodyPr/>
+                    <a:lstStyle/>
+                    <a:p>
+                      <a:pPr algn="ctr"/>
+                      <a:r>
+                        <a:rPr sz="1000">
+                          <a:solidFill>
+                            <a:srgbClr val="1A1A1A"/>
+                          </a:solidFill>
+                          <a:latin typeface="IPAGothic"/>
+                        </a:rPr>
+                        <a:t>+43,000</a:t>
+                      </a:r>
+                    </a:p>
+                  </a:txBody>
+                  <a:tcPr>
+                    <a:solidFill>
+                      <a:srgbClr val="F0EEE8"/>
+                    </a:solidFill>
+                  </a:tcPr>
+                </a:tc>
+              </a:tr>
+              <a:tr h="457200">
+                <a:tc>
+                  <a:txBody>
+                    <a:bodyPr/>
+                    <a:lstStyle/>
+                    <a:p>
+                      <a:pPr algn="ctr"/>
+                      <a:r>
+                        <a:rPr sz="1000">
+                          <a:solidFill>
+                            <a:srgbClr val="1A1A1A"/>
+                          </a:solidFill>
+                          <a:latin typeface="IPAGothic"/>
+                        </a:rPr>
+                        <a:t>累計CF（万円）</a:t>
+                      </a:r>
+                    </a:p>
+                  </a:txBody>
+                  <a:tcPr>
+                    <a:solidFill>
+                      <a:srgbClr val="FFFFFF"/>
+                    </a:solidFill>
+                  </a:tcPr>
+                </a:tc>
+                <a:tc>
+                  <a:txBody>
+                    <a:bodyPr/>
+                    <a:lstStyle/>
+                    <a:p>
+                      <a:pPr algn="ctr"/>
+                      <a:r>
+                        <a:rPr sz="1000">
+                          <a:solidFill>
+                            <a:srgbClr val="1A1A1A"/>
+                          </a:solidFill>
+                          <a:latin typeface="IPAGothic"/>
+                        </a:rPr>
+                        <a:t>3,500</a:t>
+                      </a:r>
+                    </a:p>
+                  </a:txBody>
+                  <a:tcPr>
+                    <a:solidFill>
+                      <a:srgbClr val="FFFFFF"/>
+                    </a:solidFill>
+                  </a:tcPr>
+                </a:tc>
+                <a:tc>
+                  <a:txBody>
+                    <a:bodyPr/>
+                    <a:lstStyle/>
+                    <a:p>
+                      <a:pPr algn="ctr"/>
+                      <a:r>
+                        <a:rPr sz="1000">
+                          <a:solidFill>
+                            <a:srgbClr val="1A1A1A"/>
+                          </a:solidFill>
+                          <a:latin typeface="IPAGothic"/>
+                        </a:rPr>
+                        <a:t>4,760</a:t>
+                      </a:r>
+                    </a:p>
+                  </a:txBody>
+                  <a:tcPr>
+                    <a:solidFill>
+                      <a:srgbClr val="FFFFFF"/>
+                    </a:solidFill>
+                  </a:tcPr>
+                </a:tc>
+                <a:tc>
+                  <a:txBody>
+                    <a:bodyPr/>
+                    <a:lstStyle/>
+                    <a:p>
+                      <a:pPr algn="ctr"/>
+                      <a:r>
+                        <a:rPr sz="1000">
+                          <a:solidFill>
+                            <a:srgbClr val="1A1A1A"/>
+                          </a:solidFill>
+                          <a:latin typeface="IPAGothic"/>
+                        </a:rPr>
+                        <a:t>6,900</a:t>
+                      </a:r>
+                    </a:p>
+                  </a:txBody>
+                  <a:tcPr>
+                    <a:solidFill>
+                      <a:srgbClr val="FFFFFF"/>
+                    </a:solidFill>
+                  </a:tcPr>
+                </a:tc>
+                <a:tc>
+                  <a:txBody>
+                    <a:bodyPr/>
+                    <a:lstStyle/>
+                    <a:p>
+                      <a:pPr algn="ctr"/>
+                      <a:r>
+                        <a:rPr sz="1000">
+                          <a:solidFill>
+                            <a:srgbClr val="1A1A1A"/>
+                          </a:solidFill>
+                          <a:latin typeface="IPAGothic"/>
+                        </a:rPr>
+                        <a:t>13,780</a:t>
+                      </a:r>
+                    </a:p>
+                  </a:txBody>
+                  <a:tcPr>
+                    <a:solidFill>
+                      <a:srgbClr val="FFFFFF"/>
+                    </a:solidFill>
+                  </a:tcPr>
+                </a:tc>
+                <a:tc>
+                  <a:txBody>
+                    <a:bodyPr/>
+                    <a:lstStyle/>
+                    <a:p>
+                      <a:pPr algn="ctr"/>
+                      <a:r>
+                        <a:rPr sz="1000">
+                          <a:solidFill>
+                            <a:srgbClr val="1A1A1A"/>
+                          </a:solidFill>
+                          <a:latin typeface="IPAGothic"/>
+                        </a:rPr>
+                        <a:t>31,580</a:t>
+                      </a:r>
+                    </a:p>
+                  </a:txBody>
+                  <a:tcPr>
+                    <a:solidFill>
+                      <a:srgbClr val="FFFFFF"/>
+                    </a:solidFill>
+                  </a:tcPr>
+                </a:tc>
+                <a:tc>
+                  <a:txBody>
+                    <a:bodyPr/>
+                    <a:lstStyle/>
+                    <a:p>
+                      <a:pPr algn="ctr"/>
+                      <a:r>
+                        <a:rPr sz="1000">
+                          <a:solidFill>
+                            <a:srgbClr val="1A1A1A"/>
+                          </a:solidFill>
+                          <a:latin typeface="IPAGothic"/>
+                        </a:rPr>
+                        <a:t>74,580</a:t>
+                      </a:r>
+                    </a:p>
+                  </a:txBody>
+                  <a:tcPr>
+                    <a:solidFill>
+                      <a:srgbClr val="FFFFFF"/>
+                    </a:solidFill>
+                  </a:tcPr>
+                </a:tc>
+              </a:tr>
+            </a:tbl>
+          </a:graphicData>
+        </a:graphic>
+      </p:graphicFrame>
+      <p:sp>
+        <p:nvSpPr>
+          <p:cNvPr id="6" name="Rectangle 5"/>
+          <p:cNvSpPr/>
+          <p:nvPr/>
+        </p:nvSpPr>
+        <p:spPr>
+          <a:xfrm>
+            <a:off x="7132320" y="3474720"/>
+            <a:ext cx="4754880" cy="347472"/>
+          </a:xfrm>
+          <a:prstGeom prst="rect">
+            <a:avLst/>
+          </a:prstGeom>
+          <a:solidFill>
+            <a:srgbClr val="2C4A3E"/>
+          </a:solidFill>
+          <a:ln>
+            <a:noFill/>
+          </a:ln>
+        </p:spPr>
+        <p:style>
+          <a:lnRef idx="1">
+            <a:schemeClr val="accent1"/>
+          </a:lnRef>
+          <a:fillRef idx="3">
+            <a:schemeClr val="accent1"/>
+          </a:fillRef>
+          <a:effectRef idx="2">
+            <a:schemeClr val="accent1"/>
+          </a:effectRef>
+          <a:fontRef idx="minor">
+            <a:schemeClr val="lt1"/>
+          </a:fontRef>
+        </p:style>
+        <p:txBody>
+          <a:bodyPr rtlCol="0" anchor="ctr"/>
+          <a:lstStyle/>
+          <a:p>
+            <a:pPr algn="ctr"/>
+          </a:p>
+        </p:txBody>
+      </p:sp>
+      <p:sp>
+        <p:nvSpPr>
+          <p:cNvPr id="7" name="TextBox 6"/>
+          <p:cNvSpPr txBox="1"/>
+          <p:nvPr/>
+        </p:nvSpPr>
+        <p:spPr>
+          <a:xfrm>
+            <a:off x="7223760" y="3511296"/>
+            <a:ext cx="4572000" cy="292608"/>
+          </a:xfrm>
+          <a:prstGeom prst="rect">
+            <a:avLst/>
+          </a:prstGeom>
+          <a:noFill/>
+        </p:spPr>
+        <p:txBody>
+          <a:bodyPr wrap="square">
+            <a:spAutoFit/>
+          </a:bodyPr>
+          <a:lstStyle/>
+          <a:p>
+            <a:pPr algn="l"/>
+            <a:r>
+              <a:rPr sz="1200" b="1" i="0">
+                <a:solidFill>
+                  <a:srgbClr val="FFFFFF"/>
+                </a:solidFill>
+                <a:latin typeface="IPAGothic"/>
+              </a:rPr>
+              <a:t>CFのポイント</a:t>
+            </a:r>
+          </a:p>
+        </p:txBody>
+      </p:sp>
+      <p:sp>
+        <p:nvSpPr>
+          <p:cNvPr id="8" name="TextBox 7"/>
+          <p:cNvSpPr txBox="1"/>
+          <p:nvPr/>
+        </p:nvSpPr>
+        <p:spPr>
+          <a:xfrm>
+            <a:off x="7223760" y="3858768"/>
+            <a:ext cx="4572000" cy="347472"/>
+          </a:xfrm>
+          <a:prstGeom prst="rect">
+            <a:avLst/>
+          </a:prstGeom>
+          <a:noFill/>
+        </p:spPr>
+        <p:txBody>
+          <a:bodyPr wrap="square">
+            <a:spAutoFit/>
+          </a:bodyPr>
+          <a:lstStyle/>
+          <a:p>
+            <a:pPr algn="l"/>
+            <a:r>
+              <a:rPr sz="1100" b="0" i="0">
+                <a:solidFill>
+                  <a:srgbClr val="1A1A1A"/>
+                </a:solidFill>
+                <a:latin typeface="IPAGothic"/>
+              </a:rPr>
+              <a:t>▸ 資金調達3,500万を起点にY1末で累計CF4,760万（黒字転換・返済原資確保）</a:t>
+            </a:r>
+          </a:p>
+        </p:txBody>
+      </p:sp>
+      <p:sp>
+        <p:nvSpPr>
+          <p:cNvPr id="9" name="TextBox 8"/>
+          <p:cNvSpPr txBox="1"/>
+          <p:nvPr/>
+        </p:nvSpPr>
+        <p:spPr>
+          <a:xfrm>
+            <a:off x="7223760" y="4206240"/>
+            <a:ext cx="4572000" cy="347472"/>
+          </a:xfrm>
+          <a:prstGeom prst="rect">
+            <a:avLst/>
+          </a:prstGeom>
+          <a:noFill/>
+        </p:spPr>
+        <p:txBody>
+          <a:bodyPr wrap="square">
+            <a:spAutoFit/>
+          </a:bodyPr>
+          <a:lstStyle/>
+          <a:p>
+            <a:pPr algn="l"/>
+            <a:r>
+              <a:rPr sz="1100" b="0" i="0">
+                <a:solidFill>
+                  <a:srgbClr val="1A1A1A"/>
+                </a:solidFill>
+                <a:latin typeface="IPAGothic"/>
+              </a:rPr>
+              <a:t>▸ Y2: FC展開への投資5,000万は営業CF7,140万の範囲内でまかなえる</a:t>
+            </a:r>
+          </a:p>
+        </p:txBody>
+      </p:sp>
+      <p:sp>
+        <p:nvSpPr>
+          <p:cNvPr id="10" name="TextBox 9"/>
+          <p:cNvSpPr txBox="1"/>
+          <p:nvPr/>
+        </p:nvSpPr>
+        <p:spPr>
+          <a:xfrm>
+            <a:off x="7223760" y="4553712"/>
+            <a:ext cx="4572000" cy="347472"/>
+          </a:xfrm>
+          <a:prstGeom prst="rect">
+            <a:avLst/>
+          </a:prstGeom>
+          <a:noFill/>
+        </p:spPr>
+        <p:txBody>
+          <a:bodyPr wrap="square">
+            <a:spAutoFit/>
+          </a:bodyPr>
+          <a:lstStyle/>
+          <a:p>
+            <a:pPr algn="l"/>
+            <a:r>
+              <a:rPr sz="1100" b="0" i="0">
+                <a:solidFill>
+                  <a:srgbClr val="1A1A1A"/>
+                </a:solidFill>
+                <a:latin typeface="IPAGothic"/>
+              </a:rPr>
+              <a:t>▸ Y3以降: 投資超過分もFCロイヤルティ等のストック収益で補填、累計CFが急拡大</a:t>
+            </a:r>
+          </a:p>
+        </p:txBody>
+      </p:sp>
+      <p:sp>
+        <p:nvSpPr>
+          <p:cNvPr id="11" name="TextBox 10"/>
+          <p:cNvSpPr txBox="1"/>
+          <p:nvPr/>
+        </p:nvSpPr>
+        <p:spPr>
+          <a:xfrm>
+            <a:off x="7223760" y="4901184"/>
+            <a:ext cx="4572000" cy="347472"/>
+          </a:xfrm>
+          <a:prstGeom prst="rect">
+            <a:avLst/>
+          </a:prstGeom>
+          <a:noFill/>
+        </p:spPr>
+        <p:txBody>
+          <a:bodyPr wrap="square">
+            <a:spAutoFit/>
+          </a:bodyPr>
+          <a:lstStyle/>
+          <a:p>
+            <a:pPr algn="l"/>
+            <a:r>
+              <a:rPr sz="1100" b="0" i="0">
+                <a:solidFill>
+                  <a:srgbClr val="1A1A1A"/>
+                </a:solidFill>
+                <a:latin typeface="IPAGothic"/>
+              </a:rPr>
+              <a:t>▸ Y5末: 累計CF 7.5億円 → 配当・EXIT・追加投資の原資として十分な水準</a:t>
+            </a:r>
+          </a:p>
+        </p:txBody>
+      </p:sp>
+      <p:sp>
+        <p:nvSpPr>
+          <p:cNvPr id="12" name="Rectangle 11"/>
+          <p:cNvSpPr/>
+          <p:nvPr/>
+        </p:nvSpPr>
+        <p:spPr>
+          <a:xfrm>
+            <a:off x="274320" y="4389120"/>
+            <a:ext cx="6675120" cy="2194560"/>
+          </a:xfrm>
+          <a:prstGeom prst="rect">
+            <a:avLst/>
+          </a:prstGeom>
+          <a:solidFill>
+            <a:srgbClr val="F0EEE8"/>
+          </a:solidFill>
+          <a:ln>
+            <a:noFill/>
+          </a:ln>
+        </p:spPr>
+        <p:style>
+          <a:lnRef idx="1">
+            <a:schemeClr val="accent1"/>
+          </a:lnRef>
+          <a:fillRef idx="3">
+            <a:schemeClr val="accent1"/>
+          </a:fillRef>
+          <a:effectRef idx="2">
+            <a:schemeClr val="accent1"/>
+          </a:effectRef>
+          <a:fontRef idx="minor">
+            <a:schemeClr val="lt1"/>
+          </a:fontRef>
+        </p:style>
+        <p:txBody>
+          <a:bodyPr rtlCol="0" anchor="ctr"/>
+          <a:lstStyle/>
+          <a:p>
+            <a:pPr algn="ctr"/>
+          </a:p>
+        </p:txBody>
+      </p:sp>
+      <p:sp>
+        <p:nvSpPr>
+          <p:cNvPr id="13" name="TextBox 12"/>
+          <p:cNvSpPr txBox="1"/>
+          <p:nvPr/>
+        </p:nvSpPr>
+        <p:spPr>
+          <a:xfrm>
+            <a:off x="365760" y="4434840"/>
+            <a:ext cx="6492240" cy="365760"/>
+          </a:xfrm>
+          <a:prstGeom prst="rect">
+            <a:avLst/>
+          </a:prstGeom>
+          <a:noFill/>
+        </p:spPr>
+        <p:txBody>
+          <a:bodyPr wrap="square">
+            <a:spAutoFit/>
+          </a:bodyPr>
+          <a:lstStyle/>
+          <a:p>
+            <a:pPr algn="l"/>
+            <a:r>
+              <a:rPr sz="1100" b="1" i="0">
+                <a:solidFill>
+                  <a:srgbClr val="2C4A3E"/>
+                </a:solidFill>
+                <a:latin typeface="IPAGothic"/>
+              </a:rPr>
+              <a:t>■ Y1 月次CF イメージ（肉酒場然・稼働済み前提）</a:t>
+            </a:r>
+          </a:p>
+        </p:txBody>
+      </p:sp>
+      <p:sp>
+        <p:nvSpPr>
+          <p:cNvPr id="14" name="TextBox 13"/>
+          <p:cNvSpPr txBox="1"/>
+          <p:nvPr/>
+        </p:nvSpPr>
+        <p:spPr>
+          <a:xfrm>
+            <a:off x="365760" y="4846320"/>
+            <a:ext cx="6492240" cy="1645920"/>
+          </a:xfrm>
+          <a:prstGeom prst="rect">
+            <a:avLst/>
+          </a:prstGeom>
+          <a:noFill/>
+        </p:spPr>
+        <p:txBody>
+          <a:bodyPr wrap="square">
+            <a:spAutoFit/>
+          </a:bodyPr>
+          <a:lstStyle/>
+          <a:p>
+            <a:pPr algn="l"/>
+            <a:r>
+              <a:rPr sz="1050" b="0">
+                <a:solidFill>
+                  <a:srgbClr val="1A1A1A"/>
+                </a:solidFill>
+                <a:latin typeface="IPAGothic"/>
+              </a:rPr>
+              <a:t>月1〜3：肉酒場然のみ稼働 → 月次CF +100〜150万（立ち上げ費用除く）</a:t>
+            </a:r>
+          </a:p>
+          <a:p>
+            <a:pPr algn="l"/>
+            <a:r>
+              <a:rPr sz="1050" b="0">
+                <a:solidFill>
+                  <a:srgbClr val="1A1A1A"/>
+                </a:solidFill>
+                <a:latin typeface="IPAGothic"/>
+              </a:rPr>
+              <a:t>月4〜6：だし然 開業 → 月次CF +200〜280万（稼働率70%）</a:t>
+            </a:r>
+          </a:p>
+          <a:p>
+            <a:pPr algn="l"/>
+            <a:r>
+              <a:rPr sz="1050" b="0">
+                <a:solidFill>
+                  <a:srgbClr val="1A1A1A"/>
+                </a:solidFill>
+                <a:latin typeface="IPAGothic"/>
+              </a:rPr>
+              <a:t>月7〜：蕎麦然 開業 → 月次CF +330〜400万（3ブランド揃い踏み）</a:t>
+            </a:r>
+          </a:p>
+          <a:p>
+            <a:pPr algn="l"/>
+            <a:r>
+              <a:rPr sz="1050" b="0">
+                <a:solidFill>
+                  <a:srgbClr val="1A1A1A"/>
+                </a:solidFill>
+                <a:latin typeface="IPAGothic"/>
+              </a:rPr>
+              <a:t>Y1末時点：累計CF（資金調達後）約4,760万 → BEP到達</a:t>
+            </a:r>
+          </a:p>
+        </p:txBody>
+      </p:sp>
+    </p:spTree>
+  </p:cSld>
+  <p:clrMapOvr>
+    <a:masterClrMapping/>
+  </p:clrMapOvr>
+</p:sld>
+</file>
+
+<file path=ppt/slides/slide14.xml><?xml version="1.0" encoding="utf-8"?>
+<p:sld xmlns:a="http://schemas.openxmlformats.org/drawingml/2006/main" xmlns:p="http://schemas.openxmlformats.org/presentationml/2006/main" xmlns:r="http://schemas.openxmlformats.org/officeDocument/2006/relationships">
+  <p:cSld>
+    <p:bg>
+      <p:bgPr>
+        <a:solidFill>
+          <a:srgbClr val="FAFAF6"/>
+        </a:solidFill>
+        <a:effectLst/>
+      </p:bgPr>
+    </p:bg>
+    <p:spTree>
+      <p:nvGrpSpPr>
+        <p:cNvPr id="1" name=""/>
+        <p:cNvGrpSpPr/>
+        <p:nvPr/>
+      </p:nvGrpSpPr>
+      <p:grpSpPr/>
+      <p:sp>
+        <p:nvSpPr>
+          <p:cNvPr id="2" name="Rectangle 1"/>
+          <p:cNvSpPr/>
+          <p:nvPr/>
+        </p:nvSpPr>
+        <p:spPr>
+          <a:xfrm>
+            <a:off x="0" y="0"/>
+            <a:ext cx="12188952" cy="868680"/>
+          </a:xfrm>
+          <a:prstGeom prst="rect">
+            <a:avLst/>
+          </a:prstGeom>
+          <a:solidFill>
+            <a:srgbClr val="2C4A3E"/>
+          </a:solidFill>
+          <a:ln>
+            <a:noFill/>
+          </a:ln>
+        </p:spPr>
+        <p:style>
+          <a:lnRef idx="1">
+            <a:schemeClr val="accent1"/>
+          </a:lnRef>
+          <a:fillRef idx="3">
+            <a:schemeClr val="accent1"/>
+          </a:fillRef>
+          <a:effectRef idx="2">
+            <a:schemeClr val="accent1"/>
+          </a:effectRef>
+          <a:fontRef idx="minor">
+            <a:schemeClr val="lt1"/>
+          </a:fontRef>
+        </p:style>
+        <p:txBody>
+          <a:bodyPr rtlCol="0" anchor="ctr"/>
+          <a:lstStyle/>
+          <a:p>
+            <a:pPr algn="ctr"/>
+          </a:p>
+        </p:txBody>
+      </p:sp>
+      <p:sp>
+        <p:nvSpPr>
+          <p:cNvPr id="3" name="TextBox 2"/>
+          <p:cNvSpPr txBox="1"/>
+          <p:nvPr/>
+        </p:nvSpPr>
+        <p:spPr>
+          <a:xfrm>
+            <a:off x="365760" y="91440"/>
+            <a:ext cx="10972800" cy="777240"/>
+          </a:xfrm>
+          <a:prstGeom prst="rect">
+            <a:avLst/>
+          </a:prstGeom>
+          <a:noFill/>
+        </p:spPr>
+        <p:txBody>
+          <a:bodyPr wrap="none">
+            <a:spAutoFit/>
+          </a:bodyPr>
+          <a:lstStyle/>
+          <a:p>
+            <a:pPr algn="l"/>
+            <a:r>
+              <a:rPr sz="2600" b="1">
+                <a:solidFill>
+                  <a:srgbClr val="FFFFFF"/>
+                </a:solidFill>
+                <a:latin typeface="IPAGothic"/>
+              </a:rPr>
+              <a:t>資金調達計画</a:t>
+            </a:r>
+          </a:p>
+        </p:txBody>
+      </p:sp>
+      <p:sp>
+        <p:nvSpPr>
+          <p:cNvPr id="4" name="Rectangle 3"/>
+          <p:cNvSpPr/>
+          <p:nvPr/>
+        </p:nvSpPr>
+        <p:spPr>
+          <a:xfrm>
+            <a:off x="274320" y="1005840"/>
+            <a:ext cx="4114800" cy="1188720"/>
+          </a:xfrm>
+          <a:prstGeom prst="rect">
+            <a:avLst/>
+          </a:prstGeom>
+          <a:solidFill>
+            <a:srgbClr val="2C4A3E"/>
+          </a:solidFill>
+          <a:ln>
+            <a:noFill/>
+          </a:ln>
+        </p:spPr>
+        <p:style>
+          <a:lnRef idx="1">
+            <a:schemeClr val="accent1"/>
+          </a:lnRef>
+          <a:fillRef idx="3">
+            <a:schemeClr val="accent1"/>
+          </a:fillRef>
+          <a:effectRef idx="2">
+            <a:schemeClr val="accent1"/>
+          </a:effectRef>
+          <a:fontRef idx="minor">
+            <a:schemeClr val="lt1"/>
+          </a:fontRef>
+        </p:style>
+        <p:txBody>
+          <a:bodyPr rtlCol="0" anchor="ctr"/>
+          <a:lstStyle/>
+          <a:p>
+            <a:pPr algn="ctr"/>
+          </a:p>
+        </p:txBody>
+      </p:sp>
+      <p:sp>
+        <p:nvSpPr>
+          <p:cNvPr id="5" name="TextBox 4"/>
+          <p:cNvSpPr txBox="1"/>
+          <p:nvPr/>
+        </p:nvSpPr>
+        <p:spPr>
+          <a:xfrm>
+            <a:off x="365760" y="1051560"/>
+            <a:ext cx="3931920" cy="365760"/>
+          </a:xfrm>
+          <a:prstGeom prst="rect">
+            <a:avLst/>
+          </a:prstGeom>
+          <a:noFill/>
+        </p:spPr>
+        <p:txBody>
+          <a:bodyPr wrap="square">
+            <a:spAutoFit/>
+          </a:bodyPr>
+          <a:lstStyle/>
+          <a:p>
+            <a:pPr algn="l"/>
+            <a:r>
+              <a:rPr sz="1300" b="0" i="0">
+                <a:solidFill>
+                  <a:srgbClr val="FFFFFF"/>
+                </a:solidFill>
+                <a:latin typeface="IPAGothic"/>
+              </a:rPr>
+              <a:t>第1回 調達目標</a:t>
+            </a:r>
+          </a:p>
+        </p:txBody>
+      </p:sp>
+      <p:sp>
+        <p:nvSpPr>
+          <p:cNvPr id="6" name="TextBox 5"/>
+          <p:cNvSpPr txBox="1"/>
+          <p:nvPr/>
+        </p:nvSpPr>
+        <p:spPr>
+          <a:xfrm>
+            <a:off x="365760" y="1417320"/>
+            <a:ext cx="3931920" cy="685800"/>
+          </a:xfrm>
+          <a:prstGeom prst="rect">
+            <a:avLst/>
+          </a:prstGeom>
+          <a:noFill/>
+        </p:spPr>
+        <p:txBody>
+          <a:bodyPr wrap="square">
+            <a:spAutoFit/>
+          </a:bodyPr>
+          <a:lstStyle/>
+          <a:p>
+            <a:pPr algn="ctr"/>
+            <a:r>
+              <a:rPr sz="3800" b="1" i="0">
+                <a:solidFill>
+                  <a:srgbClr val="C49A22"/>
+                </a:solidFill>
+                <a:latin typeface="IPAGothic"/>
+              </a:rPr>
+              <a:t>3,500万円</a:t>
+            </a:r>
+          </a:p>
+        </p:txBody>
+      </p:sp>
+      <p:sp>
+        <p:nvSpPr>
+          <p:cNvPr id="7" name="Rectangle 6"/>
+          <p:cNvSpPr/>
+          <p:nvPr/>
+        </p:nvSpPr>
+        <p:spPr>
+          <a:xfrm>
+            <a:off x="4663440" y="1005840"/>
+            <a:ext cx="7223760" cy="1188720"/>
+          </a:xfrm>
+          <a:prstGeom prst="rect">
+            <a:avLst/>
+          </a:prstGeom>
+          <a:solidFill>
+            <a:srgbClr val="F0EEE8"/>
+          </a:solidFill>
+          <a:ln>
+            <a:noFill/>
+          </a:ln>
+        </p:spPr>
+        <p:style>
+          <a:lnRef idx="1">
+            <a:schemeClr val="accent1"/>
+          </a:lnRef>
+          <a:fillRef idx="3">
+            <a:schemeClr val="accent1"/>
+          </a:fillRef>
+          <a:effectRef idx="2">
+            <a:schemeClr val="accent1"/>
+          </a:effectRef>
+          <a:fontRef idx="minor">
+            <a:schemeClr val="lt1"/>
+          </a:fontRef>
+        </p:style>
+        <p:txBody>
+          <a:bodyPr rtlCol="0" anchor="ctr"/>
+          <a:lstStyle/>
+          <a:p>
+            <a:pPr algn="ctr"/>
+          </a:p>
+        </p:txBody>
+      </p:sp>
+      <p:sp>
+        <p:nvSpPr>
+          <p:cNvPr id="8" name="TextBox 7"/>
+          <p:cNvSpPr txBox="1"/>
+          <p:nvPr/>
+        </p:nvSpPr>
+        <p:spPr>
+          <a:xfrm>
+            <a:off x="4754880" y="1234440"/>
+            <a:ext cx="7040880" cy="457200"/>
+          </a:xfrm>
+          <a:prstGeom prst="rect">
+            <a:avLst/>
+          </a:prstGeom>
+          <a:noFill/>
+        </p:spPr>
+        <p:txBody>
+          <a:bodyPr wrap="square">
+            <a:spAutoFit/>
+          </a:bodyPr>
+          <a:lstStyle/>
+          <a:p>
+            <a:pPr algn="l"/>
+            <a:r>
+              <a:rPr sz="1500" b="1" i="0">
+                <a:solidFill>
+                  <a:srgbClr val="2C4A3E"/>
+                </a:solidFill>
+                <a:latin typeface="IPAGothic"/>
+              </a:rPr>
+              <a:t>調達方法：日本政策金融公庫 ＋ エンジェル投資家</a:t>
+            </a:r>
+          </a:p>
+        </p:txBody>
+      </p:sp>
+      <p:sp>
+        <p:nvSpPr>
+          <p:cNvPr id="9" name="TextBox 8"/>
+          <p:cNvSpPr txBox="1"/>
+          <p:nvPr/>
+        </p:nvSpPr>
+        <p:spPr>
+          <a:xfrm>
+            <a:off x="4754880" y="1691640"/>
+            <a:ext cx="7040880" cy="365760"/>
+          </a:xfrm>
+          <a:prstGeom prst="rect">
+            <a:avLst/>
+          </a:prstGeom>
+          <a:noFill/>
+        </p:spPr>
+        <p:txBody>
+          <a:bodyPr wrap="square">
+            <a:spAutoFit/>
+          </a:bodyPr>
+          <a:lstStyle/>
+          <a:p>
+            <a:pPr algn="l"/>
+            <a:r>
+              <a:rPr sz="1100" b="0" i="0">
+                <a:solidFill>
+                  <a:srgbClr val="1A1A1A"/>
+                </a:solidFill>
+                <a:latin typeface="IPAGothic"/>
+              </a:rPr>
+              <a:t>第2回（Y2〜3）：1〜2億円  /  VC・事業会社提携  /  FC加速・関西展開</a:t>
+            </a:r>
+          </a:p>
+        </p:txBody>
+      </p:sp>
+      <p:graphicFrame>
+        <p:nvGraphicFramePr>
+          <p:cNvPr id="10" name="Table 9"/>
+          <p:cNvGraphicFramePr>
+            <a:graphicFrameLocks noGrp="1"/>
+          </p:cNvGraphicFramePr>
+          <p:nvPr/>
+        </p:nvGraphicFramePr>
+        <p:xfrm>
+          <a:off x="274320" y="2377440"/>
+          <a:ext cx="11612880" cy="2926080"/>
+        </p:xfrm>
+        <a:graphic>
+          <a:graphicData uri="http://schemas.openxmlformats.org/drawingml/2006/table">
+            <a:tbl>
+              <a:tblPr firstRow="1" bandRow="1">
+                <a:tableStyleId>{5C22544A-7EE6-4342-B048-85BDC9FD1C3A}</a:tableStyleId>
+              </a:tblPr>
+              <a:tblGrid>
+                <a:gridCol w="3870960"/>
+                <a:gridCol w="3870960"/>
+                <a:gridCol w="3870960"/>
+              </a:tblGrid>
+              <a:tr h="418011">
+                <a:tc>
+                  <a:txBody>
+                    <a:bodyPr/>
+                    <a:lstStyle/>
+                    <a:p>
+                      <a:pPr algn="ctr"/>
+                      <a:r>
+                        <a:rPr sz="1100" b="1">
+                          <a:solidFill>
+                            <a:srgbClr val="FFFFFF"/>
+                          </a:solidFill>
+                          <a:latin typeface="IPAGothic"/>
+                        </a:rPr>
+                        <a:t>用途</a:t>
+                      </a:r>
+                    </a:p>
+                  </a:txBody>
+                  <a:tcPr>
+                    <a:solidFill>
+                      <a:srgbClr val="2C4A3E"/>
+                    </a:solidFill>
+                  </a:tcPr>
+                </a:tc>
+                <a:tc>
+                  <a:txBody>
+                    <a:bodyPr/>
+                    <a:lstStyle/>
+                    <a:p>
+                      <a:pPr algn="ctr"/>
+                      <a:r>
+                        <a:rPr sz="1100" b="1">
+                          <a:solidFill>
+                            <a:srgbClr val="FFFFFF"/>
+                          </a:solidFill>
+                          <a:latin typeface="IPAGothic"/>
+                        </a:rPr>
+                        <a:t>金額</a:t>
+                      </a:r>
+                    </a:p>
+                  </a:txBody>
+                  <a:tcPr>
+                    <a:solidFill>
+                      <a:srgbClr val="2C4A3E"/>
+                    </a:solidFill>
+                  </a:tcPr>
+                </a:tc>
+                <a:tc>
+                  <a:txBody>
+                    <a:bodyPr/>
+                    <a:lstStyle/>
+                    <a:p>
+                      <a:pPr algn="ctr"/>
+                      <a:r>
+                        <a:rPr sz="1100" b="1">
+                          <a:solidFill>
+                            <a:srgbClr val="FFFFFF"/>
+                          </a:solidFill>
+                          <a:latin typeface="IPAGothic"/>
+                        </a:rPr>
+                        <a:t>内訳</a:t>
+                      </a:r>
+                    </a:p>
+                  </a:txBody>
+                  <a:tcPr>
+                    <a:solidFill>
+                      <a:srgbClr val="2C4A3E"/>
+                    </a:solidFill>
+                  </a:tcPr>
+                </a:tc>
+              </a:tr>
+              <a:tr h="418011">
+                <a:tc>
+                  <a:txBody>
+                    <a:bodyPr/>
+                    <a:lstStyle/>
+                    <a:p>
+                      <a:pPr algn="ctr"/>
+                      <a:r>
+                        <a:rPr sz="1100">
+                          <a:solidFill>
+                            <a:srgbClr val="1A1A1A"/>
+                          </a:solidFill>
+                          <a:latin typeface="IPAGothic"/>
+                        </a:rPr>
+                        <a:t>だし 然 1号店 開業費</a:t>
+                      </a:r>
+                    </a:p>
+                  </a:txBody>
+                  <a:tcPr>
+                    <a:solidFill>
+                      <a:srgbClr val="F0EEE8"/>
+                    </a:solidFill>
+                  </a:tcPr>
+                </a:tc>
+                <a:tc>
+                  <a:txBody>
+                    <a:bodyPr/>
+                    <a:lstStyle/>
+                    <a:p>
+                      <a:pPr algn="ctr"/>
+                      <a:r>
+                        <a:rPr sz="1100">
+                          <a:solidFill>
+                            <a:srgbClr val="1A1A1A"/>
+                          </a:solidFill>
+                          <a:latin typeface="IPAGothic"/>
+                        </a:rPr>
+                        <a:t>2,000万円</a:t>
+                      </a:r>
+                    </a:p>
+                  </a:txBody>
+                  <a:tcPr>
+                    <a:solidFill>
+                      <a:srgbClr val="F0EEE8"/>
+                    </a:solidFill>
+                  </a:tcPr>
+                </a:tc>
+                <a:tc>
+                  <a:txBody>
+                    <a:bodyPr/>
+                    <a:lstStyle/>
+                    <a:p>
+                      <a:pPr algn="ctr"/>
+                      <a:r>
+                        <a:rPr sz="1100">
+                          <a:solidFill>
+                            <a:srgbClr val="1A1A1A"/>
+                          </a:solidFill>
+                          <a:latin typeface="IPAGothic"/>
+                        </a:rPr>
+                        <a:t>内装900万＋厨房450万＋敷金（60万×3ヶ月）＋運転資金</a:t>
+                      </a:r>
+                    </a:p>
+                  </a:txBody>
+                  <a:tcPr>
+                    <a:solidFill>
+                      <a:srgbClr val="F0EEE8"/>
+                    </a:solidFill>
+                  </a:tcPr>
+                </a:tc>
+              </a:tr>
+              <a:tr h="418011">
+                <a:tc>
+                  <a:txBody>
+                    <a:bodyPr/>
+                    <a:lstStyle/>
+                    <a:p>
+                      <a:pPr algn="ctr"/>
+                      <a:r>
+                        <a:rPr sz="1100">
+                          <a:solidFill>
+                            <a:srgbClr val="1A1A1A"/>
+                          </a:solidFill>
+                          <a:latin typeface="IPAGothic"/>
+                        </a:rPr>
+                        <a:t>蕎麦 然 1号店 開業費（小型8坪）</a:t>
+                      </a:r>
+                    </a:p>
+                  </a:txBody>
+                  <a:tcPr>
+                    <a:solidFill>
+                      <a:srgbClr val="FFFFFF"/>
+                    </a:solidFill>
+                  </a:tcPr>
+                </a:tc>
+                <a:tc>
+                  <a:txBody>
+                    <a:bodyPr/>
+                    <a:lstStyle/>
+                    <a:p>
+                      <a:pPr algn="ctr"/>
+                      <a:r>
+                        <a:rPr sz="1100">
+                          <a:solidFill>
+                            <a:srgbClr val="1A1A1A"/>
+                          </a:solidFill>
+                          <a:latin typeface="IPAGothic"/>
+                        </a:rPr>
+                        <a:t>500万円</a:t>
+                      </a:r>
+                    </a:p>
+                  </a:txBody>
+                  <a:tcPr>
+                    <a:solidFill>
+                      <a:srgbClr val="FFFFFF"/>
+                    </a:solidFill>
+                  </a:tcPr>
+                </a:tc>
+                <a:tc>
+                  <a:txBody>
+                    <a:bodyPr/>
+                    <a:lstStyle/>
+                    <a:p>
+                      <a:pPr algn="ctr"/>
+                      <a:r>
+                        <a:rPr sz="1100">
+                          <a:solidFill>
+                            <a:srgbClr val="1A1A1A"/>
+                          </a:solidFill>
+                          <a:latin typeface="IPAGothic"/>
+                        </a:rPr>
+                        <a:t>内装200万＋設備150万＋敷金＋初期運転資金</a:t>
+                      </a:r>
+                    </a:p>
+                  </a:txBody>
+                  <a:tcPr>
+                    <a:solidFill>
+                      <a:srgbClr val="FFFFFF"/>
+                    </a:solidFill>
+                  </a:tcPr>
+                </a:tc>
+              </a:tr>
+              <a:tr h="418011">
+                <a:tc>
+                  <a:txBody>
+                    <a:bodyPr/>
+                    <a:lstStyle/>
+                    <a:p>
+                      <a:pPr algn="ctr"/>
+                      <a:r>
+                        <a:rPr sz="1100">
+                          <a:solidFill>
+                            <a:srgbClr val="1A1A1A"/>
+                          </a:solidFill>
+                          <a:latin typeface="IPAGothic"/>
+                        </a:rPr>
+                        <a:t>SNSコンサル・スタートダッシュ</a:t>
+                      </a:r>
+                    </a:p>
+                  </a:txBody>
+                  <a:tcPr>
+                    <a:solidFill>
+                      <a:srgbClr val="F0EEE8"/>
+                    </a:solidFill>
+                  </a:tcPr>
+                </a:tc>
+                <a:tc>
+                  <a:txBody>
+                    <a:bodyPr/>
+                    <a:lstStyle/>
+                    <a:p>
+                      <a:pPr algn="ctr"/>
+                      <a:r>
+                        <a:rPr sz="1100">
+                          <a:solidFill>
+                            <a:srgbClr val="1A1A1A"/>
+                          </a:solidFill>
+                          <a:latin typeface="IPAGothic"/>
+                        </a:rPr>
+                        <a:t>300万円</a:t>
+                      </a:r>
+                    </a:p>
+                  </a:txBody>
+                  <a:tcPr>
+                    <a:solidFill>
+                      <a:srgbClr val="F0EEE8"/>
+                    </a:solidFill>
+                  </a:tcPr>
+                </a:tc>
+                <a:tc>
+                  <a:txBody>
+                    <a:bodyPr/>
+                    <a:lstStyle/>
+                    <a:p>
+                      <a:pPr algn="ctr"/>
+                      <a:r>
+                        <a:rPr sz="1100">
+                          <a:solidFill>
+                            <a:srgbClr val="1A1A1A"/>
+                          </a:solidFill>
+                          <a:latin typeface="IPAGothic"/>
+                        </a:rPr>
+                        <a:t>外部コンサル起用・開業前3〜6ヶ月集中投資</a:t>
+                      </a:r>
+                    </a:p>
+                  </a:txBody>
+                  <a:tcPr>
+                    <a:solidFill>
+                      <a:srgbClr val="F0EEE8"/>
+                    </a:solidFill>
+                  </a:tcPr>
+                </a:tc>
+              </a:tr>
+              <a:tr h="418011">
+                <a:tc>
+                  <a:txBody>
+                    <a:bodyPr/>
+                    <a:lstStyle/>
+                    <a:p>
+                      <a:pPr algn="ctr"/>
+                      <a:r>
+                        <a:rPr sz="1100">
+                          <a:solidFill>
+                            <a:srgbClr val="1A1A1A"/>
+                          </a:solidFill>
+                          <a:latin typeface="IPAGothic"/>
+                        </a:rPr>
+                        <a:t>人材採用・研修費</a:t>
+                      </a:r>
+                    </a:p>
+                  </a:txBody>
+                  <a:tcPr>
+                    <a:solidFill>
+                      <a:srgbClr val="FFFFFF"/>
+                    </a:solidFill>
+                  </a:tcPr>
+                </a:tc>
+                <a:tc>
+                  <a:txBody>
+                    <a:bodyPr/>
+                    <a:lstStyle/>
+                    <a:p>
+                      <a:pPr algn="ctr"/>
+                      <a:r>
+                        <a:rPr sz="1100">
+                          <a:solidFill>
+                            <a:srgbClr val="1A1A1A"/>
+                          </a:solidFill>
+                          <a:latin typeface="IPAGothic"/>
+                        </a:rPr>
+                        <a:t>300万円</a:t>
+                      </a:r>
+                    </a:p>
+                  </a:txBody>
+                  <a:tcPr>
+                    <a:solidFill>
+                      <a:srgbClr val="FFFFFF"/>
+                    </a:solidFill>
+                  </a:tcPr>
+                </a:tc>
+                <a:tc>
+                  <a:txBody>
+                    <a:bodyPr/>
+                    <a:lstStyle/>
+                    <a:p>
+                      <a:pPr algn="ctr"/>
+                      <a:r>
+                        <a:rPr sz="1100">
+                          <a:solidFill>
+                            <a:srgbClr val="1A1A1A"/>
+                          </a:solidFill>
+                          <a:latin typeface="IPAGothic"/>
+                        </a:rPr>
+                        <a:t>店長・料理長採用・マニュアル・研修体制構築</a:t>
+                      </a:r>
+                    </a:p>
+                  </a:txBody>
+                  <a:tcPr>
+                    <a:solidFill>
+                      <a:srgbClr val="FFFFFF"/>
+                    </a:solidFill>
+                  </a:tcPr>
+                </a:tc>
+              </a:tr>
+              <a:tr h="418011">
+                <a:tc>
+                  <a:txBody>
+                    <a:bodyPr/>
+                    <a:lstStyle/>
+                    <a:p>
+                      <a:pPr algn="ctr"/>
+                      <a:r>
+                        <a:rPr sz="1100">
+                          <a:solidFill>
+                            <a:srgbClr val="1A1A1A"/>
+                          </a:solidFill>
+                          <a:latin typeface="IPAGothic"/>
+                        </a:rPr>
+                        <a:t>運転資金・予備費</a:t>
+                      </a:r>
+                    </a:p>
+                  </a:txBody>
+                  <a:tcPr>
+                    <a:solidFill>
+                      <a:srgbClr val="F0EEE8"/>
+                    </a:solidFill>
+                  </a:tcPr>
+                </a:tc>
+                <a:tc>
+                  <a:txBody>
+                    <a:bodyPr/>
+                    <a:lstStyle/>
+                    <a:p>
+                      <a:pPr algn="ctr"/>
+                      <a:r>
+                        <a:rPr sz="1100">
+                          <a:solidFill>
+                            <a:srgbClr val="1A1A1A"/>
+                          </a:solidFill>
+                          <a:latin typeface="IPAGothic"/>
+                        </a:rPr>
+                        <a:t>400万円</a:t>
+                      </a:r>
+                    </a:p>
+                  </a:txBody>
+                  <a:tcPr>
+                    <a:solidFill>
+                      <a:srgbClr val="F0EEE8"/>
+                    </a:solidFill>
+                  </a:tcPr>
+                </a:tc>
+                <a:tc>
+                  <a:txBody>
+                    <a:bodyPr/>
+                    <a:lstStyle/>
+                    <a:p>
+                      <a:pPr algn="ctr"/>
+                      <a:r>
+                        <a:rPr sz="1100">
+                          <a:solidFill>
+                            <a:srgbClr val="1A1A1A"/>
+                          </a:solidFill>
+                          <a:latin typeface="IPAGothic"/>
+                        </a:rPr>
+                        <a:t>グループ管理・広告・オープン販促・予備</a:t>
+                      </a:r>
+                    </a:p>
+                  </a:txBody>
+                  <a:tcPr>
+                    <a:solidFill>
+                      <a:srgbClr val="F0EEE8"/>
+                    </a:solidFill>
+                  </a:tcPr>
+                </a:tc>
+              </a:tr>
+              <a:tr h="418014">
+                <a:tc>
+                  <a:txBody>
+                    <a:bodyPr/>
+                    <a:lstStyle/>
+                    <a:p>
+                      <a:pPr algn="ctr"/>
+                      <a:r>
+                        <a:rPr sz="1100">
+                          <a:solidFill>
+                            <a:srgbClr val="1A1A1A"/>
+                          </a:solidFill>
+                          <a:latin typeface="IPAGothic"/>
+                        </a:rPr>
+                        <a:t>合計</a:t>
+                      </a:r>
+                    </a:p>
+                  </a:txBody>
+                  <a:tcPr>
+                    <a:solidFill>
+                      <a:srgbClr val="FFFFFF"/>
+                    </a:solidFill>
+                  </a:tcPr>
+                </a:tc>
+                <a:tc>
+                  <a:txBody>
+                    <a:bodyPr/>
+                    <a:lstStyle/>
+                    <a:p>
+                      <a:pPr algn="ctr"/>
+                      <a:r>
+                        <a:rPr sz="1100">
+                          <a:solidFill>
+                            <a:srgbClr val="1A1A1A"/>
+                          </a:solidFill>
+                          <a:latin typeface="IPAGothic"/>
+                        </a:rPr>
+                        <a:t>3,500万円</a:t>
+                      </a:r>
+                    </a:p>
+                  </a:txBody>
+                  <a:tcPr>
+                    <a:solidFill>
+                      <a:srgbClr val="FFFFFF"/>
+                    </a:solidFill>
+                  </a:tcPr>
+                </a:tc>
+                <a:tc>
+                  <a:txBody>
+                    <a:bodyPr/>
+                    <a:lstStyle/>
+                    <a:p>
+                      <a:pPr algn="ctr"/>
+                      <a:r>
+                        <a:rPr sz="1100">
+                          <a:solidFill>
+                            <a:srgbClr val="1A1A1A"/>
+                          </a:solidFill>
+                          <a:latin typeface="IPAGothic"/>
+                        </a:rPr>
+                        <a:t/>
+                      </a:r>
+                    </a:p>
+                  </a:txBody>
+                  <a:tcPr>
+                    <a:solidFill>
+                      <a:srgbClr val="FFFFFF"/>
+                    </a:solidFill>
+                  </a:tcPr>
+                </a:tc>
+              </a:tr>
+            </a:tbl>
+          </a:graphicData>
+        </a:graphic>
+      </p:graphicFrame>
+      <p:sp>
+        <p:nvSpPr>
+          <p:cNvPr id="11" name="TextBox 10"/>
+          <p:cNvSpPr txBox="1"/>
+          <p:nvPr/>
+        </p:nvSpPr>
+        <p:spPr>
+          <a:xfrm>
+            <a:off x="274320" y="5120640"/>
+            <a:ext cx="11612880" cy="1463040"/>
+          </a:xfrm>
+          <a:prstGeom prst="rect">
+            <a:avLst/>
+          </a:prstGeom>
+          <a:noFill/>
+        </p:spPr>
+        <p:txBody>
+          <a:bodyPr wrap="square">
+            <a:spAutoFit/>
+          </a:bodyPr>
+          <a:lstStyle/>
+          <a:p>
+            <a:pPr algn="l"/>
+            <a:r>
+              <a:rPr sz="1100" b="0">
+                <a:solidFill>
+                  <a:srgbClr val="1A1A1A"/>
+                </a:solidFill>
+                <a:latin typeface="IPAGothic"/>
+              </a:rPr>
+              <a:t>■ 投資家へのリターンイメージ</a:t>
+            </a:r>
+          </a:p>
+          <a:p>
+            <a:pPr algn="l"/>
+            <a:r>
+              <a:rPr sz="1100" b="0">
+                <a:solidFill>
+                  <a:srgbClr val="1A1A1A"/>
+                </a:solidFill>
+                <a:latin typeface="IPAGothic"/>
+              </a:rPr>
+              <a:t>・Y1〜2：初期投資回収フェーズ。各店舗の安定稼働と収益基盤の構築に集中</a:t>
+            </a:r>
+          </a:p>
+          <a:p>
+            <a:pPr algn="l"/>
+            <a:r>
+              <a:rPr sz="1100" b="0">
+                <a:solidFill>
+                  <a:srgbClr val="1A1A1A"/>
+                </a:solidFill>
+                <a:latin typeface="IPAGothic"/>
+              </a:rPr>
+              <a:t>・Y3以降：FCスケールで利益率が改善。EBITDA1.8億円（月商6,000万）で成長が加速</a:t>
+            </a:r>
+          </a:p>
+          <a:p>
+            <a:pPr algn="l"/>
+            <a:r>
+              <a:rPr sz="1100" b="0">
+                <a:solidFill>
+                  <a:srgbClr val="1A1A1A"/>
+                </a:solidFill>
+                <a:latin typeface="IPAGothic"/>
+              </a:rPr>
+              <a:t>・Y5：年商20億円・EBITDA6億円  →  EXIT（M&amp;A or IPO）を視野に</a:t>
+            </a:r>
+          </a:p>
+          <a:p>
+            <a:pPr algn="l"/>
+            <a:r>
+              <a:rPr sz="1100" b="0">
+                <a:solidFill>
+                  <a:srgbClr val="1A1A1A"/>
+                </a:solidFill>
+                <a:latin typeface="IPAGothic"/>
+              </a:rPr>
+              <a:t>・FCロイヤルティ収入はストック型のため、EXIT評価倍率向上に寄与</a:t>
+            </a:r>
+          </a:p>
+        </p:txBody>
+      </p:sp>
+    </p:spTree>
+  </p:cSld>
+  <p:clrMapOvr>
+    <a:masterClrMapping/>
+  </p:clrMapOvr>
+</p:sld>
+</file>
+
+<file path=ppt/slides/slide15.xml><?xml version="1.0" encoding="utf-8"?>
+<p:sld xmlns:a="http://schemas.openxmlformats.org/drawingml/2006/main" xmlns:p="http://schemas.openxmlformats.org/presentationml/2006/main" xmlns:r="http://schemas.openxmlformats.org/officeDocument/2006/relationships">
+  <p:cSld>
+    <p:bg>
+      <p:bgPr>
+        <a:solidFill>
+          <a:srgbClr val="FAFAF6"/>
+        </a:solidFill>
+        <a:effectLst/>
+      </p:bgPr>
+    </p:bg>
+    <p:spTree>
+      <p:nvGrpSpPr>
+        <p:cNvPr id="1" name=""/>
+        <p:cNvGrpSpPr/>
+        <p:nvPr/>
+      </p:nvGrpSpPr>
+      <p:grpSpPr/>
+      <p:sp>
+        <p:nvSpPr>
+          <p:cNvPr id="2" name="Rectangle 1"/>
+          <p:cNvSpPr/>
+          <p:nvPr/>
+        </p:nvSpPr>
+        <p:spPr>
+          <a:xfrm>
+            <a:off x="0" y="0"/>
+            <a:ext cx="12188952" cy="868680"/>
+          </a:xfrm>
+          <a:prstGeom prst="rect">
+            <a:avLst/>
+          </a:prstGeom>
+          <a:solidFill>
+            <a:srgbClr val="2C4A3E"/>
+          </a:solidFill>
+          <a:ln>
+            <a:noFill/>
+          </a:ln>
+        </p:spPr>
+        <p:style>
+          <a:lnRef idx="1">
+            <a:schemeClr val="accent1"/>
+          </a:lnRef>
+          <a:fillRef idx="3">
+            <a:schemeClr val="accent1"/>
+          </a:fillRef>
+          <a:effectRef idx="2">
+            <a:schemeClr val="accent1"/>
+          </a:effectRef>
+          <a:fontRef idx="minor">
+            <a:schemeClr val="lt1"/>
+          </a:fontRef>
+        </p:style>
+        <p:txBody>
+          <a:bodyPr rtlCol="0" anchor="ctr"/>
+          <a:lstStyle/>
+          <a:p>
+            <a:pPr algn="ctr"/>
+          </a:p>
+        </p:txBody>
+      </p:sp>
+      <p:sp>
+        <p:nvSpPr>
+          <p:cNvPr id="3" name="TextBox 2"/>
+          <p:cNvSpPr txBox="1"/>
+          <p:nvPr/>
+        </p:nvSpPr>
+        <p:spPr>
+          <a:xfrm>
+            <a:off x="365760" y="91440"/>
+            <a:ext cx="10972800" cy="777240"/>
+          </a:xfrm>
+          <a:prstGeom prst="rect">
+            <a:avLst/>
+          </a:prstGeom>
+          <a:noFill/>
+        </p:spPr>
+        <p:txBody>
+          <a:bodyPr wrap="none">
+            <a:spAutoFit/>
+          </a:bodyPr>
+          <a:lstStyle/>
+          <a:p>
+            <a:pPr algn="l"/>
+            <a:r>
+              <a:rPr sz="2600" b="1">
+                <a:solidFill>
+                  <a:srgbClr val="FFFFFF"/>
+                </a:solidFill>
+                <a:latin typeface="IPAGothic"/>
+              </a:rPr>
               <a:t>リスクと対策</a:t>
             </a:r>
           </a:p>
@@ -6538,7 +10796,7 @@
 </p:sld>
 </file>
 
-<file path=ppt/slides/slide13.xml><?xml version="1.0" encoding="utf-8"?>
+<file path=ppt/slides/slide16.xml><?xml version="1.0" encoding="utf-8"?>
 <p:sld xmlns:a="http://schemas.openxmlformats.org/drawingml/2006/main" xmlns:p="http://schemas.openxmlformats.org/presentationml/2006/main" xmlns:r="http://schemas.openxmlformats.org/officeDocument/2006/relationships">
   <p:cSld>
     <p:bg>
@@ -9078,7 +13336,7 @@
                           </a:solidFill>
                           <a:latin typeface="IPAGothic"/>
                         </a:rPr>
-                        <a:t>展開モデル</a:t>
+                        <a:t>家賃/月</a:t>
                       </a:r>
                     </a:p>
                   </a:txBody>
@@ -9218,7 +13476,7 @@
                           </a:solidFill>
                           <a:latin typeface="IPAGothic"/>
                         </a:rPr>
-                        <a:t>直営＋FC</a:t>
+                        <a:t>60万円（25坪）</a:t>
                       </a:r>
                     </a:p>
                   </a:txBody>
@@ -9358,7 +13616,7 @@
                           </a:solidFill>
                           <a:latin typeface="IPAGothic"/>
                         </a:rPr>
-                        <a:t>直営中心</a:t>
+                        <a:t>80万円（38坪）</a:t>
                       </a:r>
                     </a:p>
                   </a:txBody>
@@ -9429,7 +13687,7 @@
                           </a:solidFill>
                           <a:latin typeface="IPAGothic"/>
                         </a:rPr>
-                        <a:t>立ち食い蕎麦</a:t>
+                        <a:t>立ち食い蕎麦（8坪・小型）</a:t>
                       </a:r>
                     </a:p>
                   </a:txBody>
@@ -9452,7 +13710,7 @@
                           </a:solidFill>
                           <a:latin typeface="IPAGothic"/>
                         </a:rPr>
-                        <a:t>480万円</a:t>
+                        <a:t>350万円</a:t>
                       </a:r>
                     </a:p>
                   </a:txBody>
@@ -9475,7 +13733,7 @@
                           </a:solidFill>
                           <a:latin typeface="IPAGothic"/>
                         </a:rPr>
-                        <a:t>12.5%</a:t>
+                        <a:t>12%</a:t>
                       </a:r>
                     </a:p>
                   </a:txBody>
@@ -9498,7 +13756,7 @@
                           </a:solidFill>
                           <a:latin typeface="IPAGothic"/>
                         </a:rPr>
-                        <a:t>FC特化</a:t>
+                        <a:t>30万円（8坪）</a:t>
                       </a:r>
                     </a:p>
                   </a:txBody>
@@ -9521,7 +13779,7 @@
                           </a:solidFill>
                           <a:latin typeface="IPAGothic"/>
                         </a:rPr>
-                        <a:t>60万円</a:t>
+                        <a:t>42万円</a:t>
                       </a:r>
                     </a:p>
                   </a:txBody>
@@ -9638,7 +13896,7 @@
                           </a:solidFill>
                           <a:latin typeface="IPAGothic"/>
                         </a:rPr>
-                        <a:t>コンサル</a:t>
+                        <a:t>─</a:t>
                       </a:r>
                     </a:p>
                   </a:txBody>
@@ -10896,7 +15154,42 @@
       </p:sp>
       <p:sp>
         <p:nvSpPr>
-          <p:cNvPr id="11" name="Rectangle 10"/>
+          <p:cNvPr id="11" name="TextBox 10"/>
+          <p:cNvSpPr txBox="1"/>
+          <p:nvPr/>
+        </p:nvSpPr>
+        <p:spPr>
+          <a:xfrm>
+            <a:off x="365760" y="3419856"/>
+            <a:ext cx="5486400" cy="347472"/>
+          </a:xfrm>
+          <a:prstGeom prst="rect">
+            <a:avLst/>
+          </a:prstGeom>
+          <a:noFill/>
+        </p:spPr>
+        <p:txBody>
+          <a:bodyPr wrap="square">
+            <a:spAutoFit/>
+          </a:bodyPr>
+          <a:lstStyle/>
+          <a:p>
+            <a:pPr algn="l"/>
+            <a:r>
+              <a:rPr sz="1100" b="0" i="0">
+                <a:solidFill>
+                  <a:srgbClr val="1A1A1A"/>
+                </a:solidFill>
+                <a:latin typeface="IPAGothic"/>
+              </a:rPr>
+              <a:t>▸ 【家賃】60万円/月（25坪・坪2.4万）│ 原価33% │ 人件費28%</a:t>
+            </a:r>
+          </a:p>
+        </p:txBody>
+      </p:sp>
+      <p:sp>
+        <p:nvSpPr>
+          <p:cNvPr id="12" name="Rectangle 11"/>
           <p:cNvSpPr/>
           <p:nvPr/>
         </p:nvSpPr>
@@ -10939,7 +15232,7 @@
       </p:sp>
       <p:sp>
         <p:nvSpPr>
-          <p:cNvPr id="12" name="TextBox 11"/>
+          <p:cNvPr id="13" name="TextBox 12"/>
           <p:cNvSpPr txBox="1"/>
           <p:nvPr/>
         </p:nvSpPr>
@@ -10974,7 +15267,7 @@
       </p:sp>
       <p:sp>
         <p:nvSpPr>
-          <p:cNvPr id="13" name="TextBox 12"/>
+          <p:cNvPr id="14" name="TextBox 13"/>
           <p:cNvSpPr txBox="1"/>
           <p:nvPr/>
         </p:nvSpPr>
@@ -11009,7 +15302,7 @@
       </p:sp>
       <p:sp>
         <p:nvSpPr>
-          <p:cNvPr id="14" name="TextBox 13"/>
+          <p:cNvPr id="15" name="TextBox 14"/>
           <p:cNvSpPr txBox="1"/>
           <p:nvPr/>
         </p:nvSpPr>
@@ -11044,7 +15337,7 @@
       </p:sp>
       <p:sp>
         <p:nvSpPr>
-          <p:cNvPr id="15" name="TextBox 14"/>
+          <p:cNvPr id="16" name="TextBox 15"/>
           <p:cNvSpPr txBox="1"/>
           <p:nvPr/>
         </p:nvSpPr>
@@ -11079,7 +15372,7 @@
       </p:sp>
       <p:sp>
         <p:nvSpPr>
-          <p:cNvPr id="16" name="TextBox 15"/>
+          <p:cNvPr id="17" name="TextBox 16"/>
           <p:cNvSpPr txBox="1"/>
           <p:nvPr/>
         </p:nvSpPr>
@@ -11114,7 +15407,7 @@
       </p:sp>
       <p:pic>
         <p:nvPicPr>
-          <p:cNvPr id="17" name="Picture 16" descr="image.png"/>
+          <p:cNvPr id="18" name="Picture 17" descr="image.png"/>
           <p:cNvPicPr>
             <a:picLocks noChangeAspect="1"/>
           </p:cNvPicPr>
@@ -11138,7 +15431,7 @@
       </p:pic>
       <p:sp>
         <p:nvSpPr>
-          <p:cNvPr id="18" name="Rectangle 17"/>
+          <p:cNvPr id="19" name="Rectangle 18"/>
           <p:cNvSpPr/>
           <p:nvPr/>
         </p:nvSpPr>
@@ -11181,7 +15474,7 @@
       </p:sp>
       <p:sp>
         <p:nvSpPr>
-          <p:cNvPr id="19" name="TextBox 18"/>
+          <p:cNvPr id="20" name="TextBox 19"/>
           <p:cNvSpPr txBox="1"/>
           <p:nvPr/>
         </p:nvSpPr>
@@ -11216,7 +15509,7 @@
       </p:sp>
       <p:sp>
         <p:nvSpPr>
-          <p:cNvPr id="20" name="TextBox 19"/>
+          <p:cNvPr id="21" name="TextBox 20"/>
           <p:cNvSpPr txBox="1"/>
           <p:nvPr/>
         </p:nvSpPr>
@@ -11251,7 +15544,7 @@
       </p:sp>
       <p:sp>
         <p:nvSpPr>
-          <p:cNvPr id="21" name="Rectangle 20"/>
+          <p:cNvPr id="22" name="Rectangle 21"/>
           <p:cNvSpPr/>
           <p:nvPr/>
         </p:nvSpPr>
@@ -11294,7 +15587,7 @@
       </p:sp>
       <p:sp>
         <p:nvSpPr>
-          <p:cNvPr id="22" name="TextBox 21"/>
+          <p:cNvPr id="23" name="TextBox 22"/>
           <p:cNvSpPr txBox="1"/>
           <p:nvPr/>
         </p:nvSpPr>
@@ -11329,7 +15622,7 @@
       </p:sp>
       <p:sp>
         <p:nvSpPr>
-          <p:cNvPr id="23" name="TextBox 22"/>
+          <p:cNvPr id="24" name="TextBox 23"/>
           <p:cNvSpPr txBox="1"/>
           <p:nvPr/>
         </p:nvSpPr>
@@ -11364,7 +15657,7 @@
       </p:sp>
       <p:sp>
         <p:nvSpPr>
-          <p:cNvPr id="24" name="Rectangle 23"/>
+          <p:cNvPr id="25" name="Rectangle 24"/>
           <p:cNvSpPr/>
           <p:nvPr/>
         </p:nvSpPr>
@@ -11407,7 +15700,7 @@
       </p:sp>
       <p:sp>
         <p:nvSpPr>
-          <p:cNvPr id="25" name="TextBox 24"/>
+          <p:cNvPr id="26" name="TextBox 25"/>
           <p:cNvSpPr txBox="1"/>
           <p:nvPr/>
         </p:nvSpPr>
@@ -11442,7 +15735,7 @@
       </p:sp>
       <p:sp>
         <p:nvSpPr>
-          <p:cNvPr id="26" name="TextBox 25"/>
+          <p:cNvPr id="27" name="TextBox 26"/>
           <p:cNvSpPr txBox="1"/>
           <p:nvPr/>
         </p:nvSpPr>
@@ -11477,7 +15770,7 @@
       </p:sp>
       <p:sp>
         <p:nvSpPr>
-          <p:cNvPr id="27" name="Rectangle 26"/>
+          <p:cNvPr id="28" name="Rectangle 27"/>
           <p:cNvSpPr/>
           <p:nvPr/>
         </p:nvSpPr>
@@ -11520,7 +15813,7 @@
       </p:sp>
       <p:sp>
         <p:nvSpPr>
-          <p:cNvPr id="28" name="TextBox 27"/>
+          <p:cNvPr id="29" name="TextBox 28"/>
           <p:cNvSpPr txBox="1"/>
           <p:nvPr/>
         </p:nvSpPr>
@@ -11555,7 +15848,7 @@
       </p:sp>
       <p:sp>
         <p:nvSpPr>
-          <p:cNvPr id="29" name="TextBox 28"/>
+          <p:cNvPr id="30" name="TextBox 29"/>
           <p:cNvSpPr txBox="1"/>
           <p:nvPr/>
         </p:nvSpPr>
@@ -11590,7 +15883,7 @@
       </p:sp>
       <p:sp>
         <p:nvSpPr>
-          <p:cNvPr id="30" name="Rectangle 29"/>
+          <p:cNvPr id="31" name="Rectangle 30"/>
           <p:cNvSpPr/>
           <p:nvPr/>
         </p:nvSpPr>
@@ -11633,7 +15926,7 @@
       </p:sp>
       <p:sp>
         <p:nvSpPr>
-          <p:cNvPr id="31" name="TextBox 30"/>
+          <p:cNvPr id="32" name="TextBox 31"/>
           <p:cNvSpPr txBox="1"/>
           <p:nvPr/>
         </p:nvSpPr>
@@ -11668,7 +15961,7 @@
       </p:sp>
       <p:sp>
         <p:nvSpPr>
-          <p:cNvPr id="32" name="TextBox 31"/>
+          <p:cNvPr id="33" name="TextBox 32"/>
           <p:cNvSpPr txBox="1"/>
           <p:nvPr/>
         </p:nvSpPr>
@@ -11996,7 +16289,7 @@
                 </a:solidFill>
                 <a:latin typeface="IPAGothic"/>
               </a:rPr>
-              <a:t>▸ 35〜40坪・55席（個室・半個室15席含む）で宴会需要を獲得</a:t>
+              <a:t>▸ 38坪・55席（個室・半個室15席含む）で宴会需要を獲得</a:t>
             </a:r>
           </a:p>
         </p:txBody>
@@ -12136,7 +16429,7 @@
                 </a:solidFill>
                 <a:latin typeface="IPAGothic"/>
               </a:rPr>
-              <a:t>▸ 週5日ランチ＋週7日ディナーで昼夜二毛作を実現</a:t>
+              <a:t>▸ 【家賃】80万円/月（38坪・坪2.1万）│ 原価35% │ 人件費27.5%</a:t>
             </a:r>
           </a:p>
         </p:txBody>
@@ -13241,7 +17534,7 @@
                 </a:solidFill>
                 <a:latin typeface="IPAGothic"/>
               </a:rPr>
-              <a:t>▸ 10坪・12スタンド・2人オペレーション</a:t>
+              <a:t>▸ 8坪・8スタンド・1〜2人オペレーション（小型化）</a:t>
             </a:r>
           </a:p>
         </p:txBody>
@@ -13276,7 +17569,7 @@
                 </a:solidFill>
                 <a:latin typeface="IPAGothic"/>
               </a:rPr>
-              <a:t>▸ 客単価1,500円・回転時間12分・稼働率80%</a:t>
+              <a:t>▸ 客単価1,500円・回転時間12分・1日80〜90人集客</a:t>
             </a:r>
           </a:p>
         </p:txBody>
@@ -13381,7 +17674,7 @@
                 </a:solidFill>
                 <a:latin typeface="IPAGothic"/>
               </a:rPr>
-              <a:t>▸ BEP：1日43人（月商174万円）で黒字化</a:t>
+              <a:t>▸ 【家賃】30万円/月（8坪・坪3.75万）│ 原価33%</a:t>
             </a:r>
           </a:p>
         </p:txBody>
@@ -13529,7 +17822,7 @@
                 </a:solidFill>
                 <a:latin typeface="IPAGothic"/>
               </a:rPr>
-              <a:t>▸ 標準内装パッケージで施工期間2.5ヶ月</a:t>
+              <a:t>▸ 標準内装パッケージで施工期間2ヶ月以内</a:t>
             </a:r>
           </a:p>
         </p:txBody>
@@ -13599,6 +17892,41 @@
                 </a:solidFill>
                 <a:latin typeface="IPAGothic"/>
               </a:rPr>
+              <a:t>▸ 小型化でFC初期投資を抑え加盟ハードルを下げる</a:t>
+            </a:r>
+          </a:p>
+        </p:txBody>
+      </p:sp>
+      <p:sp>
+        <p:nvSpPr>
+          <p:cNvPr id="18" name="TextBox 17"/>
+          <p:cNvSpPr txBox="1"/>
+          <p:nvPr/>
+        </p:nvSpPr>
+        <p:spPr>
+          <a:xfrm>
+            <a:off x="6309360" y="3419856"/>
+            <a:ext cx="5486400" cy="347472"/>
+          </a:xfrm>
+          <a:prstGeom prst="rect">
+            <a:avLst/>
+          </a:prstGeom>
+          <a:noFill/>
+        </p:spPr>
+        <p:txBody>
+          <a:bodyPr wrap="square">
+            <a:spAutoFit/>
+          </a:bodyPr>
+          <a:lstStyle/>
+          <a:p>
+            <a:pPr algn="l"/>
+            <a:r>
+              <a:rPr sz="1100" b="0" i="0">
+                <a:solidFill>
+                  <a:srgbClr val="1A1A1A"/>
+                </a:solidFill>
+                <a:latin typeface="IPAGothic"/>
+              </a:rPr>
               <a:t>▸ 目標：30店舗（直営3＋FC27）</a:t>
             </a:r>
           </a:p>
@@ -13606,7 +17934,7 @@
       </p:sp>
       <p:pic>
         <p:nvPicPr>
-          <p:cNvPr id="18" name="Picture 17" descr="image.png"/>
+          <p:cNvPr id="19" name="Picture 18" descr="image.png"/>
           <p:cNvPicPr>
             <a:picLocks noChangeAspect="1"/>
           </p:cNvPicPr>
@@ -13630,7 +17958,7 @@
       </p:pic>
       <p:sp>
         <p:nvSpPr>
-          <p:cNvPr id="19" name="Rectangle 18"/>
+          <p:cNvPr id="20" name="Rectangle 19"/>
           <p:cNvSpPr/>
           <p:nvPr/>
         </p:nvSpPr>
@@ -13673,7 +18001,7 @@
       </p:sp>
       <p:sp>
         <p:nvSpPr>
-          <p:cNvPr id="20" name="TextBox 19"/>
+          <p:cNvPr id="21" name="TextBox 20"/>
           <p:cNvSpPr txBox="1"/>
           <p:nvPr/>
         </p:nvSpPr>
@@ -13701,14 +18029,14 @@
                 </a:solidFill>
                 <a:latin typeface="IPAGothic"/>
               </a:rPr>
-              <a:t>480万円</a:t>
-            </a:r>
-          </a:p>
-        </p:txBody>
-      </p:sp>
-      <p:sp>
-        <p:nvSpPr>
-          <p:cNvPr id="21" name="TextBox 20"/>
+              <a:t>350万円</a:t>
+            </a:r>
+          </a:p>
+        </p:txBody>
+      </p:sp>
+      <p:sp>
+        <p:nvSpPr>
+          <p:cNvPr id="22" name="TextBox 21"/>
           <p:cNvSpPr txBox="1"/>
           <p:nvPr/>
         </p:nvSpPr>
@@ -13743,7 +18071,7 @@
       </p:sp>
       <p:sp>
         <p:nvSpPr>
-          <p:cNvPr id="22" name="Rectangle 21"/>
+          <p:cNvPr id="23" name="Rectangle 22"/>
           <p:cNvSpPr/>
           <p:nvPr/>
         </p:nvSpPr>
@@ -13786,7 +18114,7 @@
       </p:sp>
       <p:sp>
         <p:nvSpPr>
-          <p:cNvPr id="23" name="TextBox 22"/>
+          <p:cNvPr id="24" name="TextBox 23"/>
           <p:cNvSpPr txBox="1"/>
           <p:nvPr/>
         </p:nvSpPr>
@@ -13814,14 +18142,14 @@
                 </a:solidFill>
                 <a:latin typeface="IPAGothic"/>
               </a:rPr>
-              <a:t>60万円</a:t>
-            </a:r>
-          </a:p>
-        </p:txBody>
-      </p:sp>
-      <p:sp>
-        <p:nvSpPr>
-          <p:cNvPr id="24" name="TextBox 23"/>
+              <a:t>42万円</a:t>
+            </a:r>
+          </a:p>
+        </p:txBody>
+      </p:sp>
+      <p:sp>
+        <p:nvSpPr>
+          <p:cNvPr id="25" name="TextBox 24"/>
           <p:cNvSpPr txBox="1"/>
           <p:nvPr/>
         </p:nvSpPr>
@@ -13856,7 +18184,7 @@
       </p:sp>
       <p:sp>
         <p:nvSpPr>
-          <p:cNvPr id="25" name="Rectangle 24"/>
+          <p:cNvPr id="26" name="Rectangle 25"/>
           <p:cNvSpPr/>
           <p:nvPr/>
         </p:nvSpPr>
@@ -13899,7 +18227,7 @@
       </p:sp>
       <p:sp>
         <p:nvSpPr>
-          <p:cNvPr id="26" name="TextBox 25"/>
+          <p:cNvPr id="27" name="TextBox 26"/>
           <p:cNvSpPr txBox="1"/>
           <p:nvPr/>
         </p:nvSpPr>
@@ -13927,14 +18255,14 @@
                 </a:solidFill>
                 <a:latin typeface="IPAGothic"/>
               </a:rPr>
-              <a:t>12.5%</a:t>
-            </a:r>
-          </a:p>
-        </p:txBody>
-      </p:sp>
-      <p:sp>
-        <p:nvSpPr>
-          <p:cNvPr id="27" name="TextBox 26"/>
+              <a:t>12%</a:t>
+            </a:r>
+          </a:p>
+        </p:txBody>
+      </p:sp>
+      <p:sp>
+        <p:nvSpPr>
+          <p:cNvPr id="28" name="TextBox 27"/>
           <p:cNvSpPr txBox="1"/>
           <p:nvPr/>
         </p:nvSpPr>
@@ -13969,7 +18297,7 @@
       </p:sp>
       <p:sp>
         <p:nvSpPr>
-          <p:cNvPr id="28" name="Rectangle 27"/>
+          <p:cNvPr id="29" name="Rectangle 28"/>
           <p:cNvSpPr/>
           <p:nvPr/>
         </p:nvSpPr>
@@ -14012,7 +18340,7 @@
       </p:sp>
       <p:sp>
         <p:nvSpPr>
-          <p:cNvPr id="29" name="TextBox 28"/>
+          <p:cNvPr id="30" name="TextBox 29"/>
           <p:cNvSpPr txBox="1"/>
           <p:nvPr/>
         </p:nvSpPr>
@@ -14040,14 +18368,14 @@
                 </a:solidFill>
                 <a:latin typeface="IPAGothic"/>
               </a:rPr>
-              <a:t>15〜18ヶ月</a:t>
-            </a:r>
-          </a:p>
-        </p:txBody>
-      </p:sp>
-      <p:sp>
-        <p:nvSpPr>
-          <p:cNvPr id="30" name="TextBox 29"/>
+              <a:t>12〜15ヶ月</a:t>
+            </a:r>
+          </a:p>
+        </p:txBody>
+      </p:sp>
+      <p:sp>
+        <p:nvSpPr>
+          <p:cNvPr id="31" name="TextBox 30"/>
           <p:cNvSpPr txBox="1"/>
           <p:nvPr/>
         </p:nvSpPr>
@@ -14082,7 +18410,7 @@
       </p:sp>
       <p:sp>
         <p:nvSpPr>
-          <p:cNvPr id="31" name="TextBox 30"/>
+          <p:cNvPr id="32" name="TextBox 31"/>
           <p:cNvSpPr txBox="1"/>
           <p:nvPr/>
         </p:nvSpPr>
@@ -14110,7 +18438,7 @@
                 </a:solidFill>
                 <a:latin typeface="IPAGothic"/>
               </a:rPr>
-              <a:t>■ FC収益シミュレーション（FC1店舗）</a:t>
+              <a:t>■ FC収益シミュレーション（FC1店舗・小型8坪）</a:t>
             </a:r>
           </a:p>
           <a:p>
@@ -14122,7 +18450,7 @@
                 </a:solidFill>
                 <a:latin typeface="IPAGothic"/>
               </a:rPr>
-              <a:t>初期投資合計：1,100万円</a:t>
+              <a:t>初期投資合計：500万円（居抜き活用・小型化）</a:t>
             </a:r>
           </a:p>
           <a:p>
@@ -14134,7 +18462,7 @@
                 </a:solidFill>
                 <a:latin typeface="IPAGothic"/>
               </a:rPr>
-              <a:t>月次売上：480万円</a:t>
+              <a:t>月次売上：350万円</a:t>
             </a:r>
           </a:p>
           <a:p>
@@ -14146,7 +18474,7 @@
                 </a:solidFill>
                 <a:latin typeface="IPAGothic"/>
               </a:rPr>
-              <a:t>月次営業利益：約50万円（ロイヤルティ控除後）</a:t>
+              <a:t>月次営業利益：約28万円（ロイヤルティ控除後）</a:t>
             </a:r>
           </a:p>
           <a:p>
@@ -14158,7 +18486,7 @@
                 </a:solidFill>
                 <a:latin typeface="IPAGothic"/>
               </a:rPr>
-              <a:t>投資回収期間：約18〜22ヶ月</a:t>
+              <a:t>投資回収期間：約14〜18ヶ月</a:t>
             </a:r>
           </a:p>
           <a:p>
@@ -14170,7 +18498,7 @@
                 </a:solidFill>
                 <a:latin typeface="IPAGothic"/>
               </a:rPr>
-              <a:t>本部ロイヤルティ：FC10店で月192万円（売上の4%）</a:t>
+              <a:t>本部ロイヤルティ：FC10店で月140万円（売上の4%）</a:t>
             </a:r>
           </a:p>
         </p:txBody>
@@ -15222,637 +19550,193 @@
                 </a:solidFill>
                 <a:latin typeface="IPAGothic"/>
               </a:rPr>
-              <a:t>5カ年数値計画</a:t>
-            </a:r>
-          </a:p>
-        </p:txBody>
-      </p:sp>
-      <p:pic>
-        <p:nvPicPr>
-          <p:cNvPr id="4" name="Picture 3" descr="image.png"/>
-          <p:cNvPicPr>
-            <a:picLocks noChangeAspect="1"/>
-          </p:cNvPicPr>
-          <p:nvPr/>
-        </p:nvPicPr>
-        <p:blipFill>
-          <a:blip r:embed="rId2"/>
-          <a:stretch>
-            <a:fillRect/>
-          </a:stretch>
-        </p:blipFill>
-        <p:spPr>
-          <a:xfrm>
-            <a:off x="274320" y="1005840"/>
-            <a:ext cx="6858000" cy="3840480"/>
-          </a:xfrm>
-          <a:prstGeom prst="rect">
-            <a:avLst/>
-          </a:prstGeom>
-        </p:spPr>
-      </p:pic>
-      <p:graphicFrame>
-        <p:nvGraphicFramePr>
-          <p:cNvPr id="5" name="Table 4"/>
-          <p:cNvGraphicFramePr>
-            <a:graphicFrameLocks noGrp="1"/>
-          </p:cNvGraphicFramePr>
-          <p:nvPr/>
-        </p:nvGraphicFramePr>
-        <p:xfrm>
-          <a:off x="7315200" y="1005840"/>
-          <a:ext cx="4572000" cy="3017520"/>
-        </p:xfrm>
-        <a:graphic>
-          <a:graphicData uri="http://schemas.openxmlformats.org/drawingml/2006/table">
-            <a:tbl>
-              <a:tblPr firstRow="1" bandRow="1">
-                <a:tableStyleId>{5C22544A-7EE6-4342-B048-85BDC9FD1C3A}</a:tableStyleId>
-              </a:tblPr>
-              <a:tblGrid>
-                <a:gridCol w="1143000"/>
-                <a:gridCol w="1143000"/>
-                <a:gridCol w="1143000"/>
-                <a:gridCol w="1143000"/>
-              </a:tblGrid>
-              <a:tr h="502920">
-                <a:tc>
-                  <a:txBody>
-                    <a:bodyPr/>
-                    <a:lstStyle/>
-                    <a:p>
-                      <a:pPr algn="ctr"/>
-                      <a:r>
-                        <a:rPr sz="1200" b="1">
-                          <a:solidFill>
-                            <a:srgbClr val="FFFFFF"/>
-                          </a:solidFill>
-                          <a:latin typeface="IPAGothic"/>
-                        </a:rPr>
-                        <a:t>年度</a:t>
-                      </a:r>
-                    </a:p>
-                  </a:txBody>
-                  <a:tcPr>
-                    <a:solidFill>
-                      <a:srgbClr val="2C4A3E"/>
-                    </a:solidFill>
-                  </a:tcPr>
-                </a:tc>
-                <a:tc>
-                  <a:txBody>
-                    <a:bodyPr/>
-                    <a:lstStyle/>
-                    <a:p>
-                      <a:pPr algn="ctr"/>
-                      <a:r>
-                        <a:rPr sz="1200" b="1">
-                          <a:solidFill>
-                            <a:srgbClr val="FFFFFF"/>
-                          </a:solidFill>
-                          <a:latin typeface="IPAGothic"/>
-                        </a:rPr>
-                        <a:t>店舗数</a:t>
-                      </a:r>
-                    </a:p>
-                  </a:txBody>
-                  <a:tcPr>
-                    <a:solidFill>
-                      <a:srgbClr val="2C4A3E"/>
-                    </a:solidFill>
-                  </a:tcPr>
-                </a:tc>
-                <a:tc>
-                  <a:txBody>
-                    <a:bodyPr/>
-                    <a:lstStyle/>
-                    <a:p>
-                      <a:pPr algn="ctr"/>
-                      <a:r>
-                        <a:rPr sz="1200" b="1">
-                          <a:solidFill>
-                            <a:srgbClr val="FFFFFF"/>
-                          </a:solidFill>
-                          <a:latin typeface="IPAGothic"/>
-                        </a:rPr>
-                        <a:t>月商</a:t>
-                      </a:r>
-                    </a:p>
-                  </a:txBody>
-                  <a:tcPr>
-                    <a:solidFill>
-                      <a:srgbClr val="2C4A3E"/>
-                    </a:solidFill>
-                  </a:tcPr>
-                </a:tc>
-                <a:tc>
-                  <a:txBody>
-                    <a:bodyPr/>
-                    <a:lstStyle/>
-                    <a:p>
-                      <a:pPr algn="ctr"/>
-                      <a:r>
-                        <a:rPr sz="1200" b="1">
-                          <a:solidFill>
-                            <a:srgbClr val="FFFFFF"/>
-                          </a:solidFill>
-                          <a:latin typeface="IPAGothic"/>
-                        </a:rPr>
-                        <a:t>年商</a:t>
-                      </a:r>
-                    </a:p>
-                  </a:txBody>
-                  <a:tcPr>
-                    <a:solidFill>
-                      <a:srgbClr val="2C4A3E"/>
-                    </a:solidFill>
-                  </a:tcPr>
-                </a:tc>
-              </a:tr>
-              <a:tr h="502920">
-                <a:tc>
-                  <a:txBody>
-                    <a:bodyPr/>
-                    <a:lstStyle/>
-                    <a:p>
-                      <a:pPr algn="ctr"/>
-                      <a:r>
-                        <a:rPr sz="1200">
-                          <a:solidFill>
-                            <a:srgbClr val="1A1A1A"/>
-                          </a:solidFill>
-                          <a:latin typeface="IPAGothic"/>
-                        </a:rPr>
-                        <a:t>Y1 2026</a:t>
-                      </a:r>
-                    </a:p>
-                  </a:txBody>
-                  <a:tcPr>
-                    <a:solidFill>
-                      <a:srgbClr val="F0EEE8"/>
-                    </a:solidFill>
-                  </a:tcPr>
-                </a:tc>
-                <a:tc>
-                  <a:txBody>
-                    <a:bodyPr/>
-                    <a:lstStyle/>
-                    <a:p>
-                      <a:pPr algn="ctr"/>
-                      <a:r>
-                        <a:rPr sz="1200">
-                          <a:solidFill>
-                            <a:srgbClr val="1A1A1A"/>
-                          </a:solidFill>
-                          <a:latin typeface="IPAGothic"/>
-                        </a:rPr>
-                        <a:t>3店</a:t>
-                      </a:r>
-                    </a:p>
-                  </a:txBody>
-                  <a:tcPr>
-                    <a:solidFill>
-                      <a:srgbClr val="F0EEE8"/>
-                    </a:solidFill>
-                  </a:tcPr>
-                </a:tc>
-                <a:tc>
-                  <a:txBody>
-                    <a:bodyPr/>
-                    <a:lstStyle/>
-                    <a:p>
-                      <a:pPr algn="ctr"/>
-                      <a:r>
-                        <a:rPr sz="1200">
-                          <a:solidFill>
-                            <a:srgbClr val="1A1A1A"/>
-                          </a:solidFill>
-                          <a:latin typeface="IPAGothic"/>
-                        </a:rPr>
-                        <a:t>1,200万</a:t>
-                      </a:r>
-                    </a:p>
-                  </a:txBody>
-                  <a:tcPr>
-                    <a:solidFill>
-                      <a:srgbClr val="F0EEE8"/>
-                    </a:solidFill>
-                  </a:tcPr>
-                </a:tc>
-                <a:tc>
-                  <a:txBody>
-                    <a:bodyPr/>
-                    <a:lstStyle/>
-                    <a:p>
-                      <a:pPr algn="ctr"/>
-                      <a:r>
-                        <a:rPr sz="1200">
-                          <a:solidFill>
-                            <a:srgbClr val="1A1A1A"/>
-                          </a:solidFill>
-                          <a:latin typeface="IPAGothic"/>
-                        </a:rPr>
-                        <a:t>1.4億</a:t>
-                      </a:r>
-                    </a:p>
-                  </a:txBody>
-                  <a:tcPr>
-                    <a:solidFill>
-                      <a:srgbClr val="F0EEE8"/>
-                    </a:solidFill>
-                  </a:tcPr>
-                </a:tc>
-              </a:tr>
-              <a:tr h="502920">
-                <a:tc>
-                  <a:txBody>
-                    <a:bodyPr/>
-                    <a:lstStyle/>
-                    <a:p>
-                      <a:pPr algn="ctr"/>
-                      <a:r>
-                        <a:rPr sz="1200">
-                          <a:solidFill>
-                            <a:srgbClr val="1A1A1A"/>
-                          </a:solidFill>
-                          <a:latin typeface="IPAGothic"/>
-                        </a:rPr>
-                        <a:t>Y2 2027</a:t>
-                      </a:r>
-                    </a:p>
-                  </a:txBody>
-                  <a:tcPr>
-                    <a:solidFill>
-                      <a:srgbClr val="FFFFFF"/>
-                    </a:solidFill>
-                  </a:tcPr>
-                </a:tc>
-                <a:tc>
-                  <a:txBody>
-                    <a:bodyPr/>
-                    <a:lstStyle/>
-                    <a:p>
-                      <a:pPr algn="ctr"/>
-                      <a:r>
-                        <a:rPr sz="1200">
-                          <a:solidFill>
-                            <a:srgbClr val="1A1A1A"/>
-                          </a:solidFill>
-                          <a:latin typeface="IPAGothic"/>
-                        </a:rPr>
-                        <a:t>9店</a:t>
-                      </a:r>
-                    </a:p>
-                  </a:txBody>
-                  <a:tcPr>
-                    <a:solidFill>
-                      <a:srgbClr val="FFFFFF"/>
-                    </a:solidFill>
-                  </a:tcPr>
-                </a:tc>
-                <a:tc>
-                  <a:txBody>
-                    <a:bodyPr/>
-                    <a:lstStyle/>
-                    <a:p>
-                      <a:pPr algn="ctr"/>
-                      <a:r>
-                        <a:rPr sz="1200">
-                          <a:solidFill>
-                            <a:srgbClr val="1A1A1A"/>
-                          </a:solidFill>
-                          <a:latin typeface="IPAGothic"/>
-                        </a:rPr>
-                        <a:t>3,000万</a:t>
-                      </a:r>
-                    </a:p>
-                  </a:txBody>
-                  <a:tcPr>
-                    <a:solidFill>
-                      <a:srgbClr val="FFFFFF"/>
-                    </a:solidFill>
-                  </a:tcPr>
-                </a:tc>
-                <a:tc>
-                  <a:txBody>
-                    <a:bodyPr/>
-                    <a:lstStyle/>
-                    <a:p>
-                      <a:pPr algn="ctr"/>
-                      <a:r>
-                        <a:rPr sz="1200">
-                          <a:solidFill>
-                            <a:srgbClr val="1A1A1A"/>
-                          </a:solidFill>
-                          <a:latin typeface="IPAGothic"/>
-                        </a:rPr>
-                        <a:t>3.6億</a:t>
-                      </a:r>
-                    </a:p>
-                  </a:txBody>
-                  <a:tcPr>
-                    <a:solidFill>
-                      <a:srgbClr val="FFFFFF"/>
-                    </a:solidFill>
-                  </a:tcPr>
-                </a:tc>
-              </a:tr>
-              <a:tr h="502920">
-                <a:tc>
-                  <a:txBody>
-                    <a:bodyPr/>
-                    <a:lstStyle/>
-                    <a:p>
-                      <a:pPr algn="ctr"/>
-                      <a:r>
-                        <a:rPr sz="1200">
-                          <a:solidFill>
-                            <a:srgbClr val="1A1A1A"/>
-                          </a:solidFill>
-                          <a:latin typeface="IPAGothic"/>
-                        </a:rPr>
-                        <a:t>Y3 2028</a:t>
-                      </a:r>
-                    </a:p>
-                  </a:txBody>
-                  <a:tcPr>
-                    <a:solidFill>
-                      <a:srgbClr val="F0EEE8"/>
-                    </a:solidFill>
-                  </a:tcPr>
-                </a:tc>
-                <a:tc>
-                  <a:txBody>
-                    <a:bodyPr/>
-                    <a:lstStyle/>
-                    <a:p>
-                      <a:pPr algn="ctr"/>
-                      <a:r>
-                        <a:rPr sz="1200">
-                          <a:solidFill>
-                            <a:srgbClr val="1A1A1A"/>
-                          </a:solidFill>
-                          <a:latin typeface="IPAGothic"/>
-                        </a:rPr>
-                        <a:t>22店</a:t>
-                      </a:r>
-                    </a:p>
-                  </a:txBody>
-                  <a:tcPr>
-                    <a:solidFill>
-                      <a:srgbClr val="F0EEE8"/>
-                    </a:solidFill>
-                  </a:tcPr>
-                </a:tc>
-                <a:tc>
-                  <a:txBody>
-                    <a:bodyPr/>
-                    <a:lstStyle/>
-                    <a:p>
-                      <a:pPr algn="ctr"/>
-                      <a:r>
-                        <a:rPr sz="1200">
-                          <a:solidFill>
-                            <a:srgbClr val="1A1A1A"/>
-                          </a:solidFill>
-                          <a:latin typeface="IPAGothic"/>
-                        </a:rPr>
-                        <a:t>6,000万</a:t>
-                      </a:r>
-                    </a:p>
-                  </a:txBody>
-                  <a:tcPr>
-                    <a:solidFill>
-                      <a:srgbClr val="F0EEE8"/>
-                    </a:solidFill>
-                  </a:tcPr>
-                </a:tc>
-                <a:tc>
-                  <a:txBody>
-                    <a:bodyPr/>
-                    <a:lstStyle/>
-                    <a:p>
-                      <a:pPr algn="ctr"/>
-                      <a:r>
-                        <a:rPr sz="1200">
-                          <a:solidFill>
-                            <a:srgbClr val="1A1A1A"/>
-                          </a:solidFill>
-                          <a:latin typeface="IPAGothic"/>
-                        </a:rPr>
-                        <a:t>7.2億</a:t>
-                      </a:r>
-                    </a:p>
-                  </a:txBody>
-                  <a:tcPr>
-                    <a:solidFill>
-                      <a:srgbClr val="F0EEE8"/>
-                    </a:solidFill>
-                  </a:tcPr>
-                </a:tc>
-              </a:tr>
-              <a:tr h="502920">
-                <a:tc>
-                  <a:txBody>
-                    <a:bodyPr/>
-                    <a:lstStyle/>
-                    <a:p>
-                      <a:pPr algn="ctr"/>
-                      <a:r>
-                        <a:rPr sz="1200">
-                          <a:solidFill>
-                            <a:srgbClr val="1A1A1A"/>
-                          </a:solidFill>
-                          <a:latin typeface="IPAGothic"/>
-                        </a:rPr>
-                        <a:t>Y4 2029</a:t>
-                      </a:r>
-                    </a:p>
-                  </a:txBody>
-                  <a:tcPr>
-                    <a:solidFill>
-                      <a:srgbClr val="FFFFFF"/>
-                    </a:solidFill>
-                  </a:tcPr>
-                </a:tc>
-                <a:tc>
-                  <a:txBody>
-                    <a:bodyPr/>
-                    <a:lstStyle/>
-                    <a:p>
-                      <a:pPr algn="ctr"/>
-                      <a:r>
-                        <a:rPr sz="1200">
-                          <a:solidFill>
-                            <a:srgbClr val="1A1A1A"/>
-                          </a:solidFill>
-                          <a:latin typeface="IPAGothic"/>
-                        </a:rPr>
-                        <a:t>35店</a:t>
-                      </a:r>
-                    </a:p>
-                  </a:txBody>
-                  <a:tcPr>
-                    <a:solidFill>
-                      <a:srgbClr val="FFFFFF"/>
-                    </a:solidFill>
-                  </a:tcPr>
-                </a:tc>
-                <a:tc>
-                  <a:txBody>
-                    <a:bodyPr/>
-                    <a:lstStyle/>
-                    <a:p>
-                      <a:pPr algn="ctr"/>
-                      <a:r>
-                        <a:rPr sz="1200">
-                          <a:solidFill>
-                            <a:srgbClr val="1A1A1A"/>
-                          </a:solidFill>
-                          <a:latin typeface="IPAGothic"/>
-                        </a:rPr>
-                        <a:t>10,000万</a:t>
-                      </a:r>
-                    </a:p>
-                  </a:txBody>
-                  <a:tcPr>
-                    <a:solidFill>
-                      <a:srgbClr val="FFFFFF"/>
-                    </a:solidFill>
-                  </a:tcPr>
-                </a:tc>
-                <a:tc>
-                  <a:txBody>
-                    <a:bodyPr/>
-                    <a:lstStyle/>
-                    <a:p>
-                      <a:pPr algn="ctr"/>
-                      <a:r>
-                        <a:rPr sz="1200">
-                          <a:solidFill>
-                            <a:srgbClr val="1A1A1A"/>
-                          </a:solidFill>
-                          <a:latin typeface="IPAGothic"/>
-                        </a:rPr>
-                        <a:t>12億</a:t>
-                      </a:r>
-                    </a:p>
-                  </a:txBody>
-                  <a:tcPr>
-                    <a:solidFill>
-                      <a:srgbClr val="FFFFFF"/>
-                    </a:solidFill>
-                  </a:tcPr>
-                </a:tc>
-              </a:tr>
-              <a:tr h="502920">
-                <a:tc>
-                  <a:txBody>
-                    <a:bodyPr/>
-                    <a:lstStyle/>
-                    <a:p>
-                      <a:pPr algn="ctr"/>
-                      <a:r>
-                        <a:rPr sz="1200">
-                          <a:solidFill>
-                            <a:srgbClr val="1A1A1A"/>
-                          </a:solidFill>
-                          <a:latin typeface="IPAGothic"/>
-                        </a:rPr>
-                        <a:t>Y5 2030</a:t>
-                      </a:r>
-                    </a:p>
-                  </a:txBody>
-                  <a:tcPr>
-                    <a:solidFill>
-                      <a:srgbClr val="F0EEE8"/>
-                    </a:solidFill>
-                  </a:tcPr>
-                </a:tc>
-                <a:tc>
-                  <a:txBody>
-                    <a:bodyPr/>
-                    <a:lstStyle/>
-                    <a:p>
-                      <a:pPr algn="ctr"/>
-                      <a:r>
-                        <a:rPr sz="1200">
-                          <a:solidFill>
-                            <a:srgbClr val="1A1A1A"/>
-                          </a:solidFill>
-                          <a:latin typeface="IPAGothic"/>
-                        </a:rPr>
-                        <a:t>55店</a:t>
-                      </a:r>
-                    </a:p>
-                  </a:txBody>
-                  <a:tcPr>
-                    <a:solidFill>
-                      <a:srgbClr val="F0EEE8"/>
-                    </a:solidFill>
-                  </a:tcPr>
-                </a:tc>
-                <a:tc>
-                  <a:txBody>
-                    <a:bodyPr/>
-                    <a:lstStyle/>
-                    <a:p>
-                      <a:pPr algn="ctr"/>
-                      <a:r>
-                        <a:rPr sz="1200">
-                          <a:solidFill>
-                            <a:srgbClr val="1A1A1A"/>
-                          </a:solidFill>
-                          <a:latin typeface="IPAGothic"/>
-                        </a:rPr>
-                        <a:t>17,000万</a:t>
-                      </a:r>
-                    </a:p>
-                  </a:txBody>
-                  <a:tcPr>
-                    <a:solidFill>
-                      <a:srgbClr val="F0EEE8"/>
-                    </a:solidFill>
-                  </a:tcPr>
-                </a:tc>
-                <a:tc>
-                  <a:txBody>
-                    <a:bodyPr/>
-                    <a:lstStyle/>
-                    <a:p>
-                      <a:pPr algn="ctr"/>
-                      <a:r>
-                        <a:rPr sz="1200">
-                          <a:solidFill>
-                            <a:srgbClr val="1A1A1A"/>
-                          </a:solidFill>
-                          <a:latin typeface="IPAGothic"/>
-                        </a:rPr>
-                        <a:t>20億</a:t>
-                      </a:r>
-                    </a:p>
-                  </a:txBody>
-                  <a:tcPr>
-                    <a:solidFill>
-                      <a:srgbClr val="F0EEE8"/>
-                    </a:solidFill>
-                  </a:tcPr>
-                </a:tc>
-              </a:tr>
-            </a:tbl>
-          </a:graphicData>
-        </a:graphic>
-      </p:graphicFrame>
-      <p:sp>
-        <p:nvSpPr>
-          <p:cNvPr id="6" name="Rectangle 5"/>
+              <a:t>販売・SNSマーケティング戦略</a:t>
+            </a:r>
+          </a:p>
+        </p:txBody>
+      </p:sp>
+      <p:sp>
+        <p:nvSpPr>
+          <p:cNvPr id="4" name="TextBox 3"/>
+          <p:cNvSpPr txBox="1"/>
+          <p:nvPr/>
+        </p:nvSpPr>
+        <p:spPr>
+          <a:xfrm>
+            <a:off x="457200" y="1005840"/>
+            <a:ext cx="10972800" cy="457200"/>
+          </a:xfrm>
+          <a:prstGeom prst="rect">
+            <a:avLst/>
+          </a:prstGeom>
+          <a:noFill/>
+        </p:spPr>
+        <p:txBody>
+          <a:bodyPr wrap="square">
+            <a:spAutoFit/>
+          </a:bodyPr>
+          <a:lstStyle/>
+          <a:p>
+            <a:pPr algn="ctr"/>
+            <a:r>
+              <a:rPr sz="1600" b="1" i="0">
+                <a:solidFill>
+                  <a:srgbClr val="2C4A3E"/>
+                </a:solidFill>
+                <a:latin typeface="IPAGothic"/>
+              </a:rPr>
+              <a:t>「SNSで集客する飲食グループ」を自ら実証し、外販へ</a:t>
+            </a:r>
+          </a:p>
+        </p:txBody>
+      </p:sp>
+      <p:sp>
+        <p:nvSpPr>
+          <p:cNvPr id="5" name="Rectangle 4"/>
           <p:cNvSpPr/>
           <p:nvPr/>
         </p:nvSpPr>
         <p:spPr>
           <a:xfrm>
-            <a:off x="7315200" y="4206240"/>
-            <a:ext cx="4572000" cy="640080"/>
+            <a:off x="274320" y="1645920"/>
+            <a:ext cx="3657600" cy="1463040"/>
+          </a:xfrm>
+          <a:prstGeom prst="rect">
+            <a:avLst/>
+          </a:prstGeom>
+          <a:solidFill>
+            <a:srgbClr val="8B2020"/>
+          </a:solidFill>
+          <a:ln>
+            <a:noFill/>
+          </a:ln>
+        </p:spPr>
+        <p:style>
+          <a:lnRef idx="1">
+            <a:schemeClr val="accent1"/>
+          </a:lnRef>
+          <a:fillRef idx="3">
+            <a:schemeClr val="accent1"/>
+          </a:fillRef>
+          <a:effectRef idx="2">
+            <a:schemeClr val="accent1"/>
+          </a:effectRef>
+          <a:fontRef idx="minor">
+            <a:schemeClr val="lt1"/>
+          </a:fontRef>
+        </p:style>
+        <p:txBody>
+          <a:bodyPr rtlCol="0" anchor="ctr"/>
+          <a:lstStyle/>
+          <a:p>
+            <a:pPr algn="ctr"/>
+          </a:p>
+        </p:txBody>
+      </p:sp>
+      <p:sp>
+        <p:nvSpPr>
+          <p:cNvPr id="6" name="TextBox 5"/>
+          <p:cNvSpPr txBox="1"/>
+          <p:nvPr/>
+        </p:nvSpPr>
+        <p:spPr>
+          <a:xfrm>
+            <a:off x="274320" y="1691640"/>
+            <a:ext cx="3657600" cy="640080"/>
+          </a:xfrm>
+          <a:prstGeom prst="rect">
+            <a:avLst/>
+          </a:prstGeom>
+          <a:noFill/>
+        </p:spPr>
+        <p:txBody>
+          <a:bodyPr wrap="square">
+            <a:spAutoFit/>
+          </a:bodyPr>
+          <a:lstStyle/>
+          <a:p>
+            <a:pPr algn="ctr"/>
+            <a:r>
+              <a:rPr sz="1300" b="1">
+                <a:solidFill>
+                  <a:srgbClr val="FFFFFF"/>
+                </a:solidFill>
+                <a:latin typeface="IPAGothic"/>
+              </a:rPr>
+              <a:t>PHASE 1</a:t>
+            </a:r>
+          </a:p>
+          <a:p>
+            <a:pPr algn="ctr"/>
+            <a:r>
+              <a:rPr sz="1300" b="1">
+                <a:solidFill>
+                  <a:srgbClr val="FFFFFF"/>
+                </a:solidFill>
+                <a:latin typeface="IPAGothic"/>
+              </a:rPr>
+              <a:t>開業前3〜6ヶ月</a:t>
+            </a:r>
+          </a:p>
+        </p:txBody>
+      </p:sp>
+      <p:sp>
+        <p:nvSpPr>
+          <p:cNvPr id="7" name="TextBox 6"/>
+          <p:cNvSpPr txBox="1"/>
+          <p:nvPr/>
+        </p:nvSpPr>
+        <p:spPr>
+          <a:xfrm>
+            <a:off x="274320" y="2377440"/>
+            <a:ext cx="3657600" cy="640080"/>
+          </a:xfrm>
+          <a:prstGeom prst="rect">
+            <a:avLst/>
+          </a:prstGeom>
+          <a:noFill/>
+        </p:spPr>
+        <p:txBody>
+          <a:bodyPr wrap="square">
+            <a:spAutoFit/>
+          </a:bodyPr>
+          <a:lstStyle/>
+          <a:p>
+            <a:pPr algn="ctr"/>
+            <a:r>
+              <a:rPr sz="1000" b="0">
+                <a:solidFill>
+                  <a:srgbClr val="FFFFFF"/>
+                </a:solidFill>
+                <a:latin typeface="IPAGothic"/>
+              </a:rPr>
+              <a:t>外部SNSコンサル起用</a:t>
+            </a:r>
+          </a:p>
+          <a:p>
+            <a:pPr algn="ctr"/>
+            <a:r>
+              <a:rPr sz="1000" b="0">
+                <a:solidFill>
+                  <a:srgbClr val="FFFFFF"/>
+                </a:solidFill>
+                <a:latin typeface="IPAGothic"/>
+              </a:rPr>
+              <a:t>スタートダッシュ</a:t>
+            </a:r>
+          </a:p>
+        </p:txBody>
+      </p:sp>
+      <p:sp>
+        <p:nvSpPr>
+          <p:cNvPr id="8" name="Rectangle 7"/>
+          <p:cNvSpPr/>
+          <p:nvPr/>
+        </p:nvSpPr>
+        <p:spPr>
+          <a:xfrm>
+            <a:off x="4206240" y="1645920"/>
+            <a:ext cx="3657600" cy="1463040"/>
           </a:xfrm>
           <a:prstGeom prst="rect">
             <a:avLst/>
@@ -15888,14 +19772,14 @@
       </p:sp>
       <p:sp>
         <p:nvSpPr>
-          <p:cNvPr id="7" name="TextBox 6"/>
+          <p:cNvPr id="9" name="TextBox 8"/>
           <p:cNvSpPr txBox="1"/>
           <p:nvPr/>
         </p:nvSpPr>
         <p:spPr>
           <a:xfrm>
-            <a:off x="7406640" y="4251960"/>
-            <a:ext cx="4389120" cy="274320"/>
+            <a:off x="4206240" y="1691640"/>
+            <a:ext cx="3657600" cy="640080"/>
           </a:xfrm>
           <a:prstGeom prst="rect">
             <a:avLst/>
@@ -15908,29 +19792,41 @@
           </a:bodyPr>
           <a:lstStyle/>
           <a:p>
-            <a:pPr algn="l"/>
-            <a:r>
-              <a:rPr sz="1000" b="1" i="0">
+            <a:pPr algn="ctr"/>
+            <a:r>
+              <a:rPr sz="1300" b="1">
                 <a:solidFill>
                   <a:srgbClr val="FFFFFF"/>
                 </a:solidFill>
                 <a:latin typeface="IPAGothic"/>
               </a:rPr>
-              <a:t>Year 5 目標</a:t>
-            </a:r>
-          </a:p>
-        </p:txBody>
-      </p:sp>
-      <p:sp>
-        <p:nvSpPr>
-          <p:cNvPr id="8" name="TextBox 7"/>
+              <a:t>PHASE 2</a:t>
+            </a:r>
+          </a:p>
+          <a:p>
+            <a:pPr algn="ctr"/>
+            <a:r>
+              <a:rPr sz="1300" b="1">
+                <a:solidFill>
+                  <a:srgbClr val="FFFFFF"/>
+                </a:solidFill>
+                <a:latin typeface="IPAGothic"/>
+              </a:rPr>
+              <a:t>Y1〜Y2</a:t>
+            </a:r>
+          </a:p>
+        </p:txBody>
+      </p:sp>
+      <p:sp>
+        <p:nvSpPr>
+          <p:cNvPr id="10" name="TextBox 9"/>
           <p:cNvSpPr txBox="1"/>
           <p:nvPr/>
         </p:nvSpPr>
         <p:spPr>
           <a:xfrm>
-            <a:off x="7406640" y="4526280"/>
-            <a:ext cx="4389120" cy="320040"/>
+            <a:off x="4206240" y="2377440"/>
+            <a:ext cx="3657600" cy="640080"/>
           </a:xfrm>
           <a:prstGeom prst="rect">
             <a:avLst/>
@@ -15945,27 +19841,325 @@
           <a:p>
             <a:pPr algn="ctr"/>
             <a:r>
-              <a:rPr sz="1100" b="1" i="0">
+              <a:rPr sz="1000" b="0">
                 <a:solidFill>
                   <a:srgbClr val="FFFFFF"/>
                 </a:solidFill>
                 <a:latin typeface="IPAGothic"/>
               </a:rPr>
-              <a:t>年商 20億円  /  55店舗  /  EBITDA 6億円</a:t>
-            </a:r>
-          </a:p>
-        </p:txBody>
-      </p:sp>
-      <p:sp>
-        <p:nvSpPr>
-          <p:cNvPr id="9" name="Rectangle 8"/>
+              <a:t>内製移行＋毎日トレンドリサーチ</a:t>
+            </a:r>
+          </a:p>
+          <a:p>
+            <a:pPr algn="ctr"/>
+            <a:r>
+              <a:rPr sz="1000" b="0">
+                <a:solidFill>
+                  <a:srgbClr val="FFFFFF"/>
+                </a:solidFill>
+                <a:latin typeface="IPAGothic"/>
+              </a:rPr>
+              <a:t>コンテンツ量産体制</a:t>
+            </a:r>
+          </a:p>
+        </p:txBody>
+      </p:sp>
+      <p:sp>
+        <p:nvSpPr>
+          <p:cNvPr id="11" name="Rectangle 10"/>
           <p:cNvSpPr/>
           <p:nvPr/>
         </p:nvSpPr>
         <p:spPr>
           <a:xfrm>
-            <a:off x="274320" y="5074920"/>
-            <a:ext cx="2743200" cy="1463040"/>
+            <a:off x="8138160" y="1645920"/>
+            <a:ext cx="3657600" cy="1463040"/>
+          </a:xfrm>
+          <a:prstGeom prst="rect">
+            <a:avLst/>
+          </a:prstGeom>
+          <a:solidFill>
+            <a:srgbClr val="2C4A3E"/>
+          </a:solidFill>
+          <a:ln>
+            <a:noFill/>
+          </a:ln>
+        </p:spPr>
+        <p:style>
+          <a:lnRef idx="1">
+            <a:schemeClr val="accent1"/>
+          </a:lnRef>
+          <a:fillRef idx="3">
+            <a:schemeClr val="accent1"/>
+          </a:fillRef>
+          <a:effectRef idx="2">
+            <a:schemeClr val="accent1"/>
+          </a:effectRef>
+          <a:fontRef idx="minor">
+            <a:schemeClr val="lt1"/>
+          </a:fontRef>
+        </p:style>
+        <p:txBody>
+          <a:bodyPr rtlCol="0" anchor="ctr"/>
+          <a:lstStyle/>
+          <a:p>
+            <a:pPr algn="ctr"/>
+          </a:p>
+        </p:txBody>
+      </p:sp>
+      <p:sp>
+        <p:nvSpPr>
+          <p:cNvPr id="12" name="TextBox 11"/>
+          <p:cNvSpPr txBox="1"/>
+          <p:nvPr/>
+        </p:nvSpPr>
+        <p:spPr>
+          <a:xfrm>
+            <a:off x="8138160" y="1691640"/>
+            <a:ext cx="3657600" cy="640080"/>
+          </a:xfrm>
+          <a:prstGeom prst="rect">
+            <a:avLst/>
+          </a:prstGeom>
+          <a:noFill/>
+        </p:spPr>
+        <p:txBody>
+          <a:bodyPr wrap="square">
+            <a:spAutoFit/>
+          </a:bodyPr>
+          <a:lstStyle/>
+          <a:p>
+            <a:pPr algn="ctr"/>
+            <a:r>
+              <a:rPr sz="1300" b="1">
+                <a:solidFill>
+                  <a:srgbClr val="FFFFFF"/>
+                </a:solidFill>
+                <a:latin typeface="IPAGothic"/>
+              </a:rPr>
+              <a:t>PHASE 3</a:t>
+            </a:r>
+          </a:p>
+          <a:p>
+            <a:pPr algn="ctr"/>
+            <a:r>
+              <a:rPr sz="1300" b="1">
+                <a:solidFill>
+                  <a:srgbClr val="FFFFFF"/>
+                </a:solidFill>
+                <a:latin typeface="IPAGothic"/>
+              </a:rPr>
+              <a:t>Y3〜</a:t>
+            </a:r>
+          </a:p>
+        </p:txBody>
+      </p:sp>
+      <p:sp>
+        <p:nvSpPr>
+          <p:cNvPr id="13" name="TextBox 12"/>
+          <p:cNvSpPr txBox="1"/>
+          <p:nvPr/>
+        </p:nvSpPr>
+        <p:spPr>
+          <a:xfrm>
+            <a:off x="8138160" y="2377440"/>
+            <a:ext cx="3657600" cy="640080"/>
+          </a:xfrm>
+          <a:prstGeom prst="rect">
+            <a:avLst/>
+          </a:prstGeom>
+          <a:noFill/>
+        </p:spPr>
+        <p:txBody>
+          <a:bodyPr wrap="square">
+            <a:spAutoFit/>
+          </a:bodyPr>
+          <a:lstStyle/>
+          <a:p>
+            <a:pPr algn="ctr"/>
+            <a:r>
+              <a:rPr sz="1000" b="0">
+                <a:solidFill>
+                  <a:srgbClr val="FFFFFF"/>
+                </a:solidFill>
+                <a:latin typeface="IPAGothic"/>
+              </a:rPr>
+              <a:t>SNS事業部外販スタート</a:t>
+            </a:r>
+          </a:p>
+          <a:p>
+            <a:pPr algn="ctr"/>
+            <a:r>
+              <a:rPr sz="1000" b="0">
+                <a:solidFill>
+                  <a:srgbClr val="FFFFFF"/>
+                </a:solidFill>
+                <a:latin typeface="IPAGothic"/>
+              </a:rPr>
+              <a:t>然グループが証明した手法を商品化</a:t>
+            </a:r>
+          </a:p>
+        </p:txBody>
+      </p:sp>
+      <p:sp>
+        <p:nvSpPr>
+          <p:cNvPr id="14" name="Rectangle 13"/>
+          <p:cNvSpPr/>
+          <p:nvPr/>
+        </p:nvSpPr>
+        <p:spPr>
+          <a:xfrm>
+            <a:off x="274320" y="3337560"/>
+            <a:ext cx="2743200" cy="384048"/>
+          </a:xfrm>
+          <a:prstGeom prst="rect">
+            <a:avLst/>
+          </a:prstGeom>
+          <a:solidFill>
+            <a:srgbClr val="8B2020"/>
+          </a:solidFill>
+          <a:ln>
+            <a:noFill/>
+          </a:ln>
+        </p:spPr>
+        <p:style>
+          <a:lnRef idx="1">
+            <a:schemeClr val="accent1"/>
+          </a:lnRef>
+          <a:fillRef idx="3">
+            <a:schemeClr val="accent1"/>
+          </a:fillRef>
+          <a:effectRef idx="2">
+            <a:schemeClr val="accent1"/>
+          </a:effectRef>
+          <a:fontRef idx="minor">
+            <a:schemeClr val="lt1"/>
+          </a:fontRef>
+        </p:style>
+        <p:txBody>
+          <a:bodyPr rtlCol="0" anchor="ctr"/>
+          <a:lstStyle/>
+          <a:p>
+            <a:pPr algn="ctr"/>
+          </a:p>
+        </p:txBody>
+      </p:sp>
+      <p:sp>
+        <p:nvSpPr>
+          <p:cNvPr id="15" name="TextBox 14"/>
+          <p:cNvSpPr txBox="1"/>
+          <p:nvPr/>
+        </p:nvSpPr>
+        <p:spPr>
+          <a:xfrm>
+            <a:off x="274320" y="3364992"/>
+            <a:ext cx="2743200" cy="320040"/>
+          </a:xfrm>
+          <a:prstGeom prst="rect">
+            <a:avLst/>
+          </a:prstGeom>
+          <a:noFill/>
+        </p:spPr>
+        <p:txBody>
+          <a:bodyPr wrap="square">
+            <a:spAutoFit/>
+          </a:bodyPr>
+          <a:lstStyle/>
+          <a:p>
+            <a:pPr algn="ctr"/>
+            <a:r>
+              <a:rPr sz="1300" b="1" i="0">
+                <a:solidFill>
+                  <a:srgbClr val="FFFFFF"/>
+                </a:solidFill>
+                <a:latin typeface="IPAGothic"/>
+              </a:rPr>
+              <a:t>YouTube</a:t>
+            </a:r>
+          </a:p>
+        </p:txBody>
+      </p:sp>
+      <p:sp>
+        <p:nvSpPr>
+          <p:cNvPr id="16" name="TextBox 15"/>
+          <p:cNvSpPr txBox="1"/>
+          <p:nvPr/>
+        </p:nvSpPr>
+        <p:spPr>
+          <a:xfrm>
+            <a:off x="365760" y="3767328"/>
+            <a:ext cx="2560320" cy="1645920"/>
+          </a:xfrm>
+          <a:prstGeom prst="rect">
+            <a:avLst/>
+          </a:prstGeom>
+          <a:noFill/>
+        </p:spPr>
+        <p:txBody>
+          <a:bodyPr wrap="square">
+            <a:spAutoFit/>
+          </a:bodyPr>
+          <a:lstStyle/>
+          <a:p>
+            <a:pPr algn="l"/>
+            <a:r>
+              <a:rPr sz="1000" b="0">
+                <a:solidFill>
+                  <a:srgbClr val="1A1A1A"/>
+                </a:solidFill>
+                <a:latin typeface="IPAGothic"/>
+              </a:rPr>
+              <a:t>然グループ公式チャンネル</a:t>
+            </a:r>
+          </a:p>
+          <a:p>
+            <a:pPr algn="l"/>
+            <a:r>
+              <a:rPr sz="1000" b="0">
+                <a:solidFill>
+                  <a:srgbClr val="1A1A1A"/>
+                </a:solidFill>
+                <a:latin typeface="IPAGothic"/>
+              </a:rPr>
+              <a:t>仕込み・料理動画・代表ブログ</a:t>
+            </a:r>
+          </a:p>
+          <a:p>
+            <a:pPr algn="l"/>
+            <a:r>
+              <a:rPr sz="1000" b="0">
+                <a:solidFill>
+                  <a:srgbClr val="1A1A1A"/>
+                </a:solidFill>
+                <a:latin typeface="IPAGothic"/>
+              </a:rPr>
+              <a:t>発酵・出汁の解説コンテンツ</a:t>
+            </a:r>
+          </a:p>
+          <a:p>
+            <a:pPr algn="l"/>
+            <a:r>
+              <a:rPr sz="1000" b="0">
+                <a:solidFill>
+                  <a:srgbClr val="1A1A1A"/>
+                </a:solidFill>
+                <a:latin typeface="IPAGothic"/>
+              </a:rPr>
+              <a:t>→ チャンネル登録→来店転換</a:t>
+            </a:r>
+          </a:p>
+        </p:txBody>
+      </p:sp>
+      <p:sp>
+        <p:nvSpPr>
+          <p:cNvPr id="17" name="Rectangle 16"/>
+          <p:cNvSpPr/>
+          <p:nvPr/>
+        </p:nvSpPr>
+        <p:spPr>
+          <a:xfrm>
+            <a:off x="3246120" y="3337560"/>
+            <a:ext cx="2743200" cy="384048"/>
           </a:xfrm>
           <a:prstGeom prst="rect">
             <a:avLst/>
@@ -16001,14 +20195,14 @@
       </p:sp>
       <p:sp>
         <p:nvSpPr>
-          <p:cNvPr id="10" name="TextBox 9"/>
+          <p:cNvPr id="18" name="TextBox 17"/>
           <p:cNvSpPr txBox="1"/>
           <p:nvPr/>
         </p:nvSpPr>
         <p:spPr>
           <a:xfrm>
-            <a:off x="274320" y="5120640"/>
-            <a:ext cx="2743200" cy="411480"/>
+            <a:off x="3246120" y="3364992"/>
+            <a:ext cx="2743200" cy="320040"/>
           </a:xfrm>
           <a:prstGeom prst="rect">
             <a:avLst/>
@@ -16023,27 +20217,27 @@
           <a:p>
             <a:pPr algn="ctr"/>
             <a:r>
-              <a:rPr sz="1800" b="1" i="0">
+              <a:rPr sz="1300" b="1" i="0">
                 <a:solidFill>
                   <a:srgbClr val="FFFFFF"/>
                 </a:solidFill>
                 <a:latin typeface="IPAGothic"/>
               </a:rPr>
-              <a:t>Y1</a:t>
-            </a:r>
-          </a:p>
-        </p:txBody>
-      </p:sp>
-      <p:sp>
-        <p:nvSpPr>
-          <p:cNvPr id="11" name="TextBox 10"/>
+              <a:t>Instagram</a:t>
+            </a:r>
+          </a:p>
+        </p:txBody>
+      </p:sp>
+      <p:sp>
+        <p:nvSpPr>
+          <p:cNvPr id="19" name="TextBox 18"/>
           <p:cNvSpPr txBox="1"/>
           <p:nvPr/>
         </p:nvSpPr>
         <p:spPr>
           <a:xfrm>
-            <a:off x="365760" y="5577840"/>
-            <a:ext cx="2560320" cy="822960"/>
+            <a:off x="3337560" y="3767328"/>
+            <a:ext cx="2560320" cy="1645920"/>
           </a:xfrm>
           <a:prstGeom prst="rect">
             <a:avLst/>
@@ -16056,142 +20250,65 @@
           </a:bodyPr>
           <a:lstStyle/>
           <a:p>
-            <a:pPr algn="ctr"/>
-            <a:r>
-              <a:rPr sz="1000" b="0" i="0">
-                <a:solidFill>
-                  <a:srgbClr val="FFFFFF"/>
-                </a:solidFill>
-                <a:latin typeface="IPAGothic"/>
-              </a:rPr>
-              <a:t>だし然・蕎麦然1号店開業</a:t>
-            </a:r>
-          </a:p>
-        </p:txBody>
-      </p:sp>
-      <p:sp>
-        <p:nvSpPr>
-          <p:cNvPr id="12" name="Rectangle 11"/>
+            <a:pPr algn="l"/>
+            <a:r>
+              <a:rPr sz="1000" b="0">
+                <a:solidFill>
+                  <a:srgbClr val="1A1A1A"/>
+                </a:solidFill>
+                <a:latin typeface="IPAGothic"/>
+              </a:rPr>
+              <a:t>ブランド別アカウント＋統合アカウント</a:t>
+            </a:r>
+          </a:p>
+          <a:p>
+            <a:pPr algn="l"/>
+            <a:r>
+              <a:rPr sz="1000" b="0">
+                <a:solidFill>
+                  <a:srgbClr val="1A1A1A"/>
+                </a:solidFill>
+                <a:latin typeface="IPAGothic"/>
+              </a:rPr>
+              <a:t>出汁の湯気・炭火の煙=映えコンテンツ</a:t>
+            </a:r>
+          </a:p>
+          <a:p>
+            <a:pPr algn="l"/>
+            <a:r>
+              <a:rPr sz="1000" b="0">
+                <a:solidFill>
+                  <a:srgbClr val="1A1A1A"/>
+                </a:solidFill>
+                <a:latin typeface="IPAGothic"/>
+              </a:rPr>
+              <a:t>ストーリーズで日常・ビハインドシーン</a:t>
+            </a:r>
+          </a:p>
+          <a:p>
+            <a:pPr algn="l"/>
+            <a:r>
+              <a:rPr sz="1000" b="0">
+                <a:solidFill>
+                  <a:srgbClr val="1A1A1A"/>
+                </a:solidFill>
+                <a:latin typeface="IPAGothic"/>
+              </a:rPr>
+              <a:t>→ フォロワーをリザーブに誘導</a:t>
+            </a:r>
+          </a:p>
+        </p:txBody>
+      </p:sp>
+      <p:sp>
+        <p:nvSpPr>
+          <p:cNvPr id="20" name="Rectangle 19"/>
           <p:cNvSpPr/>
           <p:nvPr/>
         </p:nvSpPr>
         <p:spPr>
           <a:xfrm>
-            <a:off x="3200400" y="5074920"/>
-            <a:ext cx="2743200" cy="1463040"/>
-          </a:xfrm>
-          <a:prstGeom prst="rect">
-            <a:avLst/>
-          </a:prstGeom>
-          <a:solidFill>
-            <a:srgbClr val="8B2020"/>
-          </a:solidFill>
-          <a:ln>
-            <a:noFill/>
-          </a:ln>
-        </p:spPr>
-        <p:style>
-          <a:lnRef idx="1">
-            <a:schemeClr val="accent1"/>
-          </a:lnRef>
-          <a:fillRef idx="3">
-            <a:schemeClr val="accent1"/>
-          </a:fillRef>
-          <a:effectRef idx="2">
-            <a:schemeClr val="accent1"/>
-          </a:effectRef>
-          <a:fontRef idx="minor">
-            <a:schemeClr val="lt1"/>
-          </a:fontRef>
-        </p:style>
-        <p:txBody>
-          <a:bodyPr rtlCol="0" anchor="ctr"/>
-          <a:lstStyle/>
-          <a:p>
-            <a:pPr algn="ctr"/>
-          </a:p>
-        </p:txBody>
-      </p:sp>
-      <p:sp>
-        <p:nvSpPr>
-          <p:cNvPr id="13" name="TextBox 12"/>
-          <p:cNvSpPr txBox="1"/>
-          <p:nvPr/>
-        </p:nvSpPr>
-        <p:spPr>
-          <a:xfrm>
-            <a:off x="3200400" y="5120640"/>
-            <a:ext cx="2743200" cy="411480"/>
-          </a:xfrm>
-          <a:prstGeom prst="rect">
-            <a:avLst/>
-          </a:prstGeom>
-          <a:noFill/>
-        </p:spPr>
-        <p:txBody>
-          <a:bodyPr wrap="square">
-            <a:spAutoFit/>
-          </a:bodyPr>
-          <a:lstStyle/>
-          <a:p>
-            <a:pPr algn="ctr"/>
-            <a:r>
-              <a:rPr sz="1800" b="1" i="0">
-                <a:solidFill>
-                  <a:srgbClr val="C49A22"/>
-                </a:solidFill>
-                <a:latin typeface="IPAGothic"/>
-              </a:rPr>
-              <a:t>Y2</a:t>
-            </a:r>
-          </a:p>
-        </p:txBody>
-      </p:sp>
-      <p:sp>
-        <p:nvSpPr>
-          <p:cNvPr id="14" name="TextBox 13"/>
-          <p:cNvSpPr txBox="1"/>
-          <p:nvPr/>
-        </p:nvSpPr>
-        <p:spPr>
-          <a:xfrm>
-            <a:off x="3291840" y="5577840"/>
-            <a:ext cx="2560320" cy="822960"/>
-          </a:xfrm>
-          <a:prstGeom prst="rect">
-            <a:avLst/>
-          </a:prstGeom>
-          <a:noFill/>
-        </p:spPr>
-        <p:txBody>
-          <a:bodyPr wrap="square">
-            <a:spAutoFit/>
-          </a:bodyPr>
-          <a:lstStyle/>
-          <a:p>
-            <a:pPr algn="ctr"/>
-            <a:r>
-              <a:rPr sz="1000" b="0" i="0">
-                <a:solidFill>
-                  <a:srgbClr val="FFFFFF"/>
-                </a:solidFill>
-                <a:latin typeface="IPAGothic"/>
-              </a:rPr>
-              <a:t>FC展開開始・肉酒場然2号店</a:t>
-            </a:r>
-          </a:p>
-        </p:txBody>
-      </p:sp>
-      <p:sp>
-        <p:nvSpPr>
-          <p:cNvPr id="15" name="Rectangle 14"/>
-          <p:cNvSpPr/>
-          <p:nvPr/>
-        </p:nvSpPr>
-        <p:spPr>
-          <a:xfrm>
-            <a:off x="6126480" y="5074920"/>
-            <a:ext cx="2743200" cy="1463040"/>
+            <a:off x="6217920" y="3337560"/>
+            <a:ext cx="2743200" cy="384048"/>
           </a:xfrm>
           <a:prstGeom prst="rect">
             <a:avLst/>
@@ -16227,14 +20344,14 @@
       </p:sp>
       <p:sp>
         <p:nvSpPr>
-          <p:cNvPr id="16" name="TextBox 15"/>
+          <p:cNvPr id="21" name="TextBox 20"/>
           <p:cNvSpPr txBox="1"/>
           <p:nvPr/>
         </p:nvSpPr>
         <p:spPr>
           <a:xfrm>
-            <a:off x="6126480" y="5120640"/>
-            <a:ext cx="2743200" cy="411480"/>
+            <a:off x="6217920" y="3364992"/>
+            <a:ext cx="2743200" cy="320040"/>
           </a:xfrm>
           <a:prstGeom prst="rect">
             <a:avLst/>
@@ -16249,27 +20366,27 @@
           <a:p>
             <a:pPr algn="ctr"/>
             <a:r>
-              <a:rPr sz="1800" b="1" i="0">
-                <a:solidFill>
-                  <a:srgbClr val="C49A22"/>
-                </a:solidFill>
-                <a:latin typeface="IPAGothic"/>
-              </a:rPr>
-              <a:t>Y3</a:t>
-            </a:r>
-          </a:p>
-        </p:txBody>
-      </p:sp>
-      <p:sp>
-        <p:nvSpPr>
-          <p:cNvPr id="17" name="TextBox 16"/>
+              <a:rPr sz="1300" b="1" i="0">
+                <a:solidFill>
+                  <a:srgbClr val="FFFFFF"/>
+                </a:solidFill>
+                <a:latin typeface="IPAGothic"/>
+              </a:rPr>
+              <a:t>TikTok</a:t>
+            </a:r>
+          </a:p>
+        </p:txBody>
+      </p:sp>
+      <p:sp>
+        <p:nvSpPr>
+          <p:cNvPr id="22" name="TextBox 21"/>
           <p:cNvSpPr txBox="1"/>
           <p:nvPr/>
         </p:nvSpPr>
         <p:spPr>
           <a:xfrm>
-            <a:off x="6217920" y="5577840"/>
-            <a:ext cx="2560320" cy="822960"/>
+            <a:off x="6309360" y="3767328"/>
+            <a:ext cx="2560320" cy="1645920"/>
           </a:xfrm>
           <a:prstGeom prst="rect">
             <a:avLst/>
@@ -16282,29 +20399,65 @@
           </a:bodyPr>
           <a:lstStyle/>
           <a:p>
-            <a:pPr algn="ctr"/>
-            <a:r>
-              <a:rPr sz="1000" b="0" i="0">
-                <a:solidFill>
-                  <a:srgbClr val="FFFFFF"/>
-                </a:solidFill>
-                <a:latin typeface="IPAGothic"/>
-              </a:rPr>
-              <a:t>関西進出・SNS事業部外販</a:t>
-            </a:r>
-          </a:p>
-        </p:txBody>
-      </p:sp>
-      <p:sp>
-        <p:nvSpPr>
-          <p:cNvPr id="18" name="Rectangle 17"/>
+            <a:pPr algn="l"/>
+            <a:r>
+              <a:rPr sz="1000" b="0">
+                <a:solidFill>
+                  <a:srgbClr val="1A1A1A"/>
+                </a:solidFill>
+                <a:latin typeface="IPAGothic"/>
+              </a:rPr>
+              <a:t>短尺料理動画・発酵解説</a:t>
+            </a:r>
+          </a:p>
+          <a:p>
+            <a:pPr algn="l"/>
+            <a:r>
+              <a:rPr sz="1000" b="0">
+                <a:solidFill>
+                  <a:srgbClr val="1A1A1A"/>
+                </a:solidFill>
+                <a:latin typeface="IPAGothic"/>
+              </a:rPr>
+              <a:t>インバウンド向け多言語対応</a:t>
+            </a:r>
+          </a:p>
+          <a:p>
+            <a:pPr algn="l"/>
+            <a:r>
+              <a:rPr sz="1000" b="0">
+                <a:solidFill>
+                  <a:srgbClr val="1A1A1A"/>
+                </a:solidFill>
+                <a:latin typeface="IPAGothic"/>
+              </a:rPr>
+              <a:t>ハッシュタグ戦略でバズ狙い</a:t>
+            </a:r>
+          </a:p>
+          <a:p>
+            <a:pPr algn="l"/>
+            <a:r>
+              <a:rPr sz="1000" b="0">
+                <a:solidFill>
+                  <a:srgbClr val="1A1A1A"/>
+                </a:solidFill>
+                <a:latin typeface="IPAGothic"/>
+              </a:rPr>
+              <a:t>→ 若年層・外国人の来店促進</a:t>
+            </a:r>
+          </a:p>
+        </p:txBody>
+      </p:sp>
+      <p:sp>
+        <p:nvSpPr>
+          <p:cNvPr id="23" name="Rectangle 22"/>
           <p:cNvSpPr/>
           <p:nvPr/>
         </p:nvSpPr>
         <p:spPr>
           <a:xfrm>
-            <a:off x="9052560" y="5074920"/>
-            <a:ext cx="2743200" cy="1463040"/>
+            <a:off x="9189720" y="3337560"/>
+            <a:ext cx="2743200" cy="384048"/>
           </a:xfrm>
           <a:prstGeom prst="rect">
             <a:avLst/>
@@ -16340,14 +20493,14 @@
       </p:sp>
       <p:sp>
         <p:nvSpPr>
-          <p:cNvPr id="19" name="TextBox 18"/>
+          <p:cNvPr id="24" name="TextBox 23"/>
           <p:cNvSpPr txBox="1"/>
           <p:nvPr/>
         </p:nvSpPr>
         <p:spPr>
           <a:xfrm>
-            <a:off x="9052560" y="5120640"/>
-            <a:ext cx="2743200" cy="411480"/>
+            <a:off x="9189720" y="3364992"/>
+            <a:ext cx="2743200" cy="320040"/>
           </a:xfrm>
           <a:prstGeom prst="rect">
             <a:avLst/>
@@ -16362,27 +20515,27 @@
           <a:p>
             <a:pPr algn="ctr"/>
             <a:r>
-              <a:rPr sz="1800" b="1" i="0">
-                <a:solidFill>
-                  <a:srgbClr val="C49A22"/>
-                </a:solidFill>
-                <a:latin typeface="IPAGothic"/>
-              </a:rPr>
-              <a:t>Y5</a:t>
-            </a:r>
-          </a:p>
-        </p:txBody>
-      </p:sp>
-      <p:sp>
-        <p:nvSpPr>
-          <p:cNvPr id="20" name="TextBox 19"/>
+              <a:rPr sz="1300" b="1" i="0">
+                <a:solidFill>
+                  <a:srgbClr val="FFFFFF"/>
+                </a:solidFill>
+                <a:latin typeface="IPAGothic"/>
+              </a:rPr>
+              <a:t>Google / OTA</a:t>
+            </a:r>
+          </a:p>
+        </p:txBody>
+      </p:sp>
+      <p:sp>
+        <p:nvSpPr>
+          <p:cNvPr id="25" name="TextBox 24"/>
           <p:cNvSpPr txBox="1"/>
           <p:nvPr/>
         </p:nvSpPr>
         <p:spPr>
           <a:xfrm>
-            <a:off x="9144000" y="5577840"/>
-            <a:ext cx="2560320" cy="822960"/>
+            <a:off x="9281160" y="3767328"/>
+            <a:ext cx="2560320" cy="1645920"/>
           </a:xfrm>
           <a:prstGeom prst="rect">
             <a:avLst/>
@@ -16395,15 +20548,86 @@
           </a:bodyPr>
           <a:lstStyle/>
           <a:p>
+            <a:pPr algn="l"/>
+            <a:r>
+              <a:rPr sz="1000" b="0">
+                <a:solidFill>
+                  <a:srgbClr val="1A1A1A"/>
+                </a:solidFill>
+                <a:latin typeface="IPAGothic"/>
+              </a:rPr>
+              <a:t>Googleマップ口コミ管理</a:t>
+            </a:r>
+          </a:p>
+          <a:p>
+            <a:pPr algn="l"/>
+            <a:r>
+              <a:rPr sz="1000" b="0">
+                <a:solidFill>
+                  <a:srgbClr val="1A1A1A"/>
+                </a:solidFill>
+                <a:latin typeface="IPAGothic"/>
+              </a:rPr>
+              <a:t>食べログ・ぐるなびSEO</a:t>
+            </a:r>
+          </a:p>
+          <a:p>
+            <a:pPr algn="l"/>
+            <a:r>
+              <a:rPr sz="1000" b="0">
+                <a:solidFill>
+                  <a:srgbClr val="1A1A1A"/>
+                </a:solidFill>
+                <a:latin typeface="IPAGothic"/>
+              </a:rPr>
+              <a:t>Booking.com / Airbnb体験登録</a:t>
+            </a:r>
+          </a:p>
+          <a:p>
+            <a:pPr algn="l"/>
+            <a:r>
+              <a:rPr sz="1000" b="0">
+                <a:solidFill>
+                  <a:srgbClr val="1A1A1A"/>
+                </a:solidFill>
+                <a:latin typeface="IPAGothic"/>
+              </a:rPr>
+              <a:t>→ インバウンド流入確保</a:t>
+            </a:r>
+          </a:p>
+        </p:txBody>
+      </p:sp>
+      <p:sp>
+        <p:nvSpPr>
+          <p:cNvPr id="26" name="TextBox 25"/>
+          <p:cNvSpPr txBox="1"/>
+          <p:nvPr/>
+        </p:nvSpPr>
+        <p:spPr>
+          <a:xfrm>
+            <a:off x="274320" y="5989320"/>
+            <a:ext cx="11612880" cy="502920"/>
+          </a:xfrm>
+          <a:prstGeom prst="rect">
+            <a:avLst/>
+          </a:prstGeom>
+          <a:noFill/>
+        </p:spPr>
+        <p:txBody>
+          <a:bodyPr wrap="square">
+            <a:spAutoFit/>
+          </a:bodyPr>
+          <a:lstStyle/>
+          <a:p>
             <a:pPr algn="ctr"/>
             <a:r>
-              <a:rPr sz="1000" b="0" i="0">
-                <a:solidFill>
-                  <a:srgbClr val="FFFFFF"/>
-                </a:solidFill>
-                <a:latin typeface="IPAGothic"/>
-              </a:rPr>
-              <a:t>55店舗・年商20億・EXIT準備</a:t>
+              <a:rPr sz="1200" b="1" i="0">
+                <a:solidFill>
+                  <a:srgbClr val="C49A22"/>
+                </a:solidFill>
+                <a:latin typeface="IPAGothic"/>
+              </a:rPr>
+              <a:t>開業前コンサル費用 300万円を資金調達に組み込み済み → Y1からSNS集客を最大化</a:t>
             </a:r>
           </a:p>
         </p:txBody>

--- a/zen/07_融資・投資家資料/然グループ_統合ピッチデッキ_強化版.pptx
+++ b/zen/07_融資・投資家資料/然グループ_統合ピッチデッキ_強化版.pptx
@@ -3154,16 +3154,40 @@
           </a:p>
         </p:txBody>
       </p:sp>
-      <p:sp>
-        <p:nvSpPr>
-          <p:cNvPr id="3" name="TextBox 2"/>
+      <p:pic>
+        <p:nvPicPr>
+          <p:cNvPr id="3" name="Picture 2" descr="zen_brand_logo.png"/>
+          <p:cNvPicPr>
+            <a:picLocks noChangeAspect="1"/>
+          </p:cNvPicPr>
+          <p:nvPr/>
+        </p:nvPicPr>
+        <p:blipFill>
+          <a:blip r:embed="rId2"/>
+          <a:stretch>
+            <a:fillRect/>
+          </a:stretch>
+        </p:blipFill>
+        <p:spPr>
+          <a:xfrm>
+            <a:off x="228600" y="1097280"/>
+            <a:ext cx="3657600" cy="3657600"/>
+          </a:xfrm>
+          <a:prstGeom prst="rect">
+            <a:avLst/>
+          </a:prstGeom>
+        </p:spPr>
+      </p:pic>
+      <p:sp>
+        <p:nvSpPr>
+          <p:cNvPr id="4" name="TextBox 3"/>
           <p:cNvSpPr txBox="1"/>
           <p:nvPr/>
         </p:nvSpPr>
         <p:spPr>
           <a:xfrm>
-            <a:off x="0" y="457200"/>
-            <a:ext cx="4114800" cy="4114800"/>
+            <a:off x="0" y="4846320"/>
+            <a:ext cx="4114800" cy="457200"/>
           </a:xfrm>
           <a:prstGeom prst="rect">
             <a:avLst/>
@@ -3178,42 +3202,7 @@
           <a:p>
             <a:pPr algn="ctr"/>
             <a:r>
-              <a:rPr sz="20000" b="1" i="0">
-                <a:solidFill>
-                  <a:srgbClr val="C49A22"/>
-                </a:solidFill>
-                <a:latin typeface="IPAGothic"/>
-              </a:rPr>
-              <a:t>然</a:t>
-            </a:r>
-          </a:p>
-        </p:txBody>
-      </p:sp>
-      <p:sp>
-        <p:nvSpPr>
-          <p:cNvPr id="4" name="TextBox 3"/>
-          <p:cNvSpPr txBox="1"/>
-          <p:nvPr/>
-        </p:nvSpPr>
-        <p:spPr>
-          <a:xfrm>
-            <a:off x="0" y="4389120"/>
-            <a:ext cx="4114800" cy="457200"/>
-          </a:xfrm>
-          <a:prstGeom prst="rect">
-            <a:avLst/>
-          </a:prstGeom>
-          <a:noFill/>
-        </p:spPr>
-        <p:txBody>
-          <a:bodyPr wrap="square">
-            <a:spAutoFit/>
-          </a:bodyPr>
-          <a:lstStyle/>
-          <a:p>
-            <a:pPr algn="ctr"/>
-            <a:r>
-              <a:rPr sz="1400" b="0" i="1">
+              <a:rPr sz="1300" b="0" i="1">
                 <a:solidFill>
                   <a:srgbClr val="F0EEE8"/>
                 </a:solidFill>
@@ -3739,7 +3728,7 @@
         <p:spPr>
           <a:xfrm>
             <a:off x="365760" y="91440"/>
-            <a:ext cx="10972800" cy="777240"/>
+            <a:ext cx="9601200" cy="777240"/>
           </a:xfrm>
           <a:prstGeom prst="rect">
             <a:avLst/>
@@ -3767,7 +3756,7 @@
       </p:sp>
       <p:pic>
         <p:nvPicPr>
-          <p:cNvPr id="4" name="Picture 3" descr="image.png"/>
+          <p:cNvPr id="4" name="Picture 3" descr="zen_brand_logo.png"/>
           <p:cNvPicPr>
             <a:picLocks noChangeAspect="1"/>
           </p:cNvPicPr>
@@ -3781,6 +3770,30 @@
         </p:blipFill>
         <p:spPr>
           <a:xfrm>
+            <a:off x="9875520" y="45720"/>
+            <a:ext cx="2103120" cy="749808"/>
+          </a:xfrm>
+          <a:prstGeom prst="rect">
+            <a:avLst/>
+          </a:prstGeom>
+        </p:spPr>
+      </p:pic>
+      <p:pic>
+        <p:nvPicPr>
+          <p:cNvPr id="5" name="Picture 4" descr="image.png"/>
+          <p:cNvPicPr>
+            <a:picLocks noChangeAspect="1"/>
+          </p:cNvPicPr>
+          <p:nvPr/>
+        </p:nvPicPr>
+        <p:blipFill>
+          <a:blip r:embed="rId3"/>
+          <a:stretch>
+            <a:fillRect/>
+          </a:stretch>
+        </p:blipFill>
+        <p:spPr>
+          <a:xfrm>
             <a:off x="274320" y="1005840"/>
             <a:ext cx="6858000" cy="3840480"/>
           </a:xfrm>
@@ -3791,7 +3804,7 @@
       </p:pic>
       <p:graphicFrame>
         <p:nvGraphicFramePr>
-          <p:cNvPr id="5" name="Table 4"/>
+          <p:cNvPr id="6" name="Table 5"/>
           <p:cNvGraphicFramePr>
             <a:graphicFrameLocks noGrp="1"/>
           </p:cNvGraphicFramePr>
@@ -4383,7 +4396,7 @@
       </p:graphicFrame>
       <p:sp>
         <p:nvSpPr>
-          <p:cNvPr id="6" name="Rectangle 5"/>
+          <p:cNvPr id="7" name="Rectangle 6"/>
           <p:cNvSpPr/>
           <p:nvPr/>
         </p:nvSpPr>
@@ -4426,7 +4439,7 @@
       </p:sp>
       <p:sp>
         <p:nvSpPr>
-          <p:cNvPr id="7" name="TextBox 6"/>
+          <p:cNvPr id="8" name="TextBox 7"/>
           <p:cNvSpPr txBox="1"/>
           <p:nvPr/>
         </p:nvSpPr>
@@ -4461,7 +4474,7 @@
       </p:sp>
       <p:sp>
         <p:nvSpPr>
-          <p:cNvPr id="8" name="TextBox 7"/>
+          <p:cNvPr id="9" name="TextBox 8"/>
           <p:cNvSpPr txBox="1"/>
           <p:nvPr/>
         </p:nvSpPr>
@@ -4496,7 +4509,7 @@
       </p:sp>
       <p:sp>
         <p:nvSpPr>
-          <p:cNvPr id="9" name="Rectangle 8"/>
+          <p:cNvPr id="10" name="Rectangle 9"/>
           <p:cNvSpPr/>
           <p:nvPr/>
         </p:nvSpPr>
@@ -4539,7 +4552,7 @@
       </p:sp>
       <p:sp>
         <p:nvSpPr>
-          <p:cNvPr id="10" name="TextBox 9"/>
+          <p:cNvPr id="11" name="TextBox 10"/>
           <p:cNvSpPr txBox="1"/>
           <p:nvPr/>
         </p:nvSpPr>
@@ -4574,7 +4587,7 @@
       </p:sp>
       <p:sp>
         <p:nvSpPr>
-          <p:cNvPr id="11" name="TextBox 10"/>
+          <p:cNvPr id="12" name="TextBox 11"/>
           <p:cNvSpPr txBox="1"/>
           <p:nvPr/>
         </p:nvSpPr>
@@ -4609,7 +4622,7 @@
       </p:sp>
       <p:sp>
         <p:nvSpPr>
-          <p:cNvPr id="12" name="Rectangle 11"/>
+          <p:cNvPr id="13" name="Rectangle 12"/>
           <p:cNvSpPr/>
           <p:nvPr/>
         </p:nvSpPr>
@@ -4652,7 +4665,7 @@
       </p:sp>
       <p:sp>
         <p:nvSpPr>
-          <p:cNvPr id="13" name="TextBox 12"/>
+          <p:cNvPr id="14" name="TextBox 13"/>
           <p:cNvSpPr txBox="1"/>
           <p:nvPr/>
         </p:nvSpPr>
@@ -4687,7 +4700,7 @@
       </p:sp>
       <p:sp>
         <p:nvSpPr>
-          <p:cNvPr id="14" name="TextBox 13"/>
+          <p:cNvPr id="15" name="TextBox 14"/>
           <p:cNvSpPr txBox="1"/>
           <p:nvPr/>
         </p:nvSpPr>
@@ -4722,7 +4735,7 @@
       </p:sp>
       <p:sp>
         <p:nvSpPr>
-          <p:cNvPr id="15" name="Rectangle 14"/>
+          <p:cNvPr id="16" name="Rectangle 15"/>
           <p:cNvSpPr/>
           <p:nvPr/>
         </p:nvSpPr>
@@ -4765,7 +4778,7 @@
       </p:sp>
       <p:sp>
         <p:nvSpPr>
-          <p:cNvPr id="16" name="TextBox 15"/>
+          <p:cNvPr id="17" name="TextBox 16"/>
           <p:cNvSpPr txBox="1"/>
           <p:nvPr/>
         </p:nvSpPr>
@@ -4800,7 +4813,7 @@
       </p:sp>
       <p:sp>
         <p:nvSpPr>
-          <p:cNvPr id="17" name="TextBox 16"/>
+          <p:cNvPr id="18" name="TextBox 17"/>
           <p:cNvSpPr txBox="1"/>
           <p:nvPr/>
         </p:nvSpPr>
@@ -4835,7 +4848,7 @@
       </p:sp>
       <p:sp>
         <p:nvSpPr>
-          <p:cNvPr id="18" name="Rectangle 17"/>
+          <p:cNvPr id="19" name="Rectangle 18"/>
           <p:cNvSpPr/>
           <p:nvPr/>
         </p:nvSpPr>
@@ -4878,7 +4891,7 @@
       </p:sp>
       <p:sp>
         <p:nvSpPr>
-          <p:cNvPr id="19" name="TextBox 18"/>
+          <p:cNvPr id="20" name="TextBox 19"/>
           <p:cNvSpPr txBox="1"/>
           <p:nvPr/>
         </p:nvSpPr>
@@ -4913,7 +4926,7 @@
       </p:sp>
       <p:sp>
         <p:nvSpPr>
-          <p:cNvPr id="20" name="TextBox 19"/>
+          <p:cNvPr id="21" name="TextBox 20"/>
           <p:cNvSpPr txBox="1"/>
           <p:nvPr/>
         </p:nvSpPr>
@@ -5024,7 +5037,7 @@
         <p:spPr>
           <a:xfrm>
             <a:off x="365760" y="91440"/>
-            <a:ext cx="10972800" cy="777240"/>
+            <a:ext cx="9601200" cy="777240"/>
           </a:xfrm>
           <a:prstGeom prst="rect">
             <a:avLst/>
@@ -5052,7 +5065,7 @@
       </p:sp>
       <p:pic>
         <p:nvPicPr>
-          <p:cNvPr id="4" name="Picture 3" descr="image.png"/>
+          <p:cNvPr id="4" name="Picture 3" descr="zen_brand_logo.png"/>
           <p:cNvPicPr>
             <a:picLocks noChangeAspect="1"/>
           </p:cNvPicPr>
@@ -5066,6 +5079,30 @@
         </p:blipFill>
         <p:spPr>
           <a:xfrm>
+            <a:off x="9875520" y="45720"/>
+            <a:ext cx="2103120" cy="749808"/>
+          </a:xfrm>
+          <a:prstGeom prst="rect">
+            <a:avLst/>
+          </a:prstGeom>
+        </p:spPr>
+      </p:pic>
+      <p:pic>
+        <p:nvPicPr>
+          <p:cNvPr id="5" name="Picture 4" descr="image.png"/>
+          <p:cNvPicPr>
+            <a:picLocks noChangeAspect="1"/>
+          </p:cNvPicPr>
+          <p:nvPr/>
+        </p:nvPicPr>
+        <p:blipFill>
+          <a:blip r:embed="rId3"/>
+          <a:stretch>
+            <a:fillRect/>
+          </a:stretch>
+        </p:blipFill>
+        <p:spPr>
+          <a:xfrm>
             <a:off x="274320" y="1005840"/>
             <a:ext cx="5669280" cy="2834640"/>
           </a:xfrm>
@@ -5076,7 +5113,7 @@
       </p:pic>
       <p:graphicFrame>
         <p:nvGraphicFramePr>
-          <p:cNvPr id="5" name="Table 4"/>
+          <p:cNvPr id="6" name="Table 5"/>
           <p:cNvGraphicFramePr>
             <a:graphicFrameLocks noGrp="1"/>
           </p:cNvGraphicFramePr>
@@ -5946,7 +5983,7 @@
       </p:graphicFrame>
       <p:sp>
         <p:nvSpPr>
-          <p:cNvPr id="6" name="Rectangle 5"/>
+          <p:cNvPr id="7" name="Rectangle 6"/>
           <p:cNvSpPr/>
           <p:nvPr/>
         </p:nvSpPr>
@@ -5989,7 +6026,7 @@
       </p:sp>
       <p:sp>
         <p:nvSpPr>
-          <p:cNvPr id="7" name="TextBox 6"/>
+          <p:cNvPr id="8" name="TextBox 7"/>
           <p:cNvSpPr txBox="1"/>
           <p:nvPr/>
         </p:nvSpPr>
@@ -6024,7 +6061,7 @@
       </p:sp>
       <p:sp>
         <p:nvSpPr>
-          <p:cNvPr id="8" name="TextBox 7"/>
+          <p:cNvPr id="9" name="TextBox 8"/>
           <p:cNvSpPr txBox="1"/>
           <p:nvPr/>
         </p:nvSpPr>
@@ -6059,7 +6096,7 @@
       </p:sp>
       <p:sp>
         <p:nvSpPr>
-          <p:cNvPr id="9" name="TextBox 8"/>
+          <p:cNvPr id="10" name="TextBox 9"/>
           <p:cNvSpPr txBox="1"/>
           <p:nvPr/>
         </p:nvSpPr>
@@ -6094,7 +6131,7 @@
       </p:sp>
       <p:sp>
         <p:nvSpPr>
-          <p:cNvPr id="10" name="TextBox 9"/>
+          <p:cNvPr id="11" name="TextBox 10"/>
           <p:cNvSpPr txBox="1"/>
           <p:nvPr/>
         </p:nvSpPr>
@@ -6129,7 +6166,7 @@
       </p:sp>
       <p:sp>
         <p:nvSpPr>
-          <p:cNvPr id="11" name="TextBox 10"/>
+          <p:cNvPr id="12" name="TextBox 11"/>
           <p:cNvSpPr txBox="1"/>
           <p:nvPr/>
         </p:nvSpPr>
@@ -6240,7 +6277,7 @@
         <p:spPr>
           <a:xfrm>
             <a:off x="365760" y="91440"/>
-            <a:ext cx="10972800" cy="777240"/>
+            <a:ext cx="9601200" cy="777240"/>
           </a:xfrm>
           <a:prstGeom prst="rect">
             <a:avLst/>
@@ -6266,9 +6303,33 @@
           </a:p>
         </p:txBody>
       </p:sp>
+      <p:pic>
+        <p:nvPicPr>
+          <p:cNvPr id="4" name="Picture 3" descr="zen_brand_logo.png"/>
+          <p:cNvPicPr>
+            <a:picLocks noChangeAspect="1"/>
+          </p:cNvPicPr>
+          <p:nvPr/>
+        </p:nvPicPr>
+        <p:blipFill>
+          <a:blip r:embed="rId2"/>
+          <a:stretch>
+            <a:fillRect/>
+          </a:stretch>
+        </p:blipFill>
+        <p:spPr>
+          <a:xfrm>
+            <a:off x="9875520" y="45720"/>
+            <a:ext cx="2103120" cy="749808"/>
+          </a:xfrm>
+          <a:prstGeom prst="rect">
+            <a:avLst/>
+          </a:prstGeom>
+        </p:spPr>
+      </p:pic>
       <p:graphicFrame>
         <p:nvGraphicFramePr>
-          <p:cNvPr id="4" name="Table 3"/>
+          <p:cNvPr id="5" name="Table 4"/>
           <p:cNvGraphicFramePr>
             <a:graphicFrameLocks noGrp="1"/>
           </p:cNvGraphicFramePr>
@@ -7698,14 +7759,14 @@
       </p:graphicFrame>
       <p:pic>
         <p:nvPicPr>
-          <p:cNvPr id="5" name="Picture 4" descr="image.png"/>
+          <p:cNvPr id="6" name="Picture 5" descr="image.png"/>
           <p:cNvPicPr>
             <a:picLocks noChangeAspect="1"/>
           </p:cNvPicPr>
           <p:nvPr/>
         </p:nvPicPr>
         <p:blipFill>
-          <a:blip r:embed="rId2"/>
+          <a:blip r:embed="rId3"/>
           <a:stretch>
             <a:fillRect/>
           </a:stretch>
@@ -7798,7 +7859,7 @@
         <p:spPr>
           <a:xfrm>
             <a:off x="365760" y="91440"/>
-            <a:ext cx="10972800" cy="777240"/>
+            <a:ext cx="9601200" cy="777240"/>
           </a:xfrm>
           <a:prstGeom prst="rect">
             <a:avLst/>
@@ -7826,7 +7887,7 @@
       </p:sp>
       <p:pic>
         <p:nvPicPr>
-          <p:cNvPr id="4" name="Picture 3" descr="image.png"/>
+          <p:cNvPr id="4" name="Picture 3" descr="zen_brand_logo.png"/>
           <p:cNvPicPr>
             <a:picLocks noChangeAspect="1"/>
           </p:cNvPicPr>
@@ -7840,6 +7901,30 @@
         </p:blipFill>
         <p:spPr>
           <a:xfrm>
+            <a:off x="9875520" y="45720"/>
+            <a:ext cx="2103120" cy="749808"/>
+          </a:xfrm>
+          <a:prstGeom prst="rect">
+            <a:avLst/>
+          </a:prstGeom>
+        </p:spPr>
+      </p:pic>
+      <p:pic>
+        <p:nvPicPr>
+          <p:cNvPr id="5" name="Picture 4" descr="image.png"/>
+          <p:cNvPicPr>
+            <a:picLocks noChangeAspect="1"/>
+          </p:cNvPicPr>
+          <p:nvPr/>
+        </p:nvPicPr>
+        <p:blipFill>
+          <a:blip r:embed="rId3"/>
+          <a:stretch>
+            <a:fillRect/>
+          </a:stretch>
+        </p:blipFill>
+        <p:spPr>
+          <a:xfrm>
             <a:off x="274320" y="1005840"/>
             <a:ext cx="6858000" cy="3200400"/>
           </a:xfrm>
@@ -7850,7 +7935,7 @@
       </p:pic>
       <p:graphicFrame>
         <p:nvGraphicFramePr>
-          <p:cNvPr id="5" name="Table 4"/>
+          <p:cNvPr id="6" name="Table 5"/>
           <p:cNvGraphicFramePr>
             <a:graphicFrameLocks noGrp="1"/>
           </p:cNvGraphicFramePr>
@@ -8696,7 +8781,7 @@
       </p:graphicFrame>
       <p:sp>
         <p:nvSpPr>
-          <p:cNvPr id="6" name="Rectangle 5"/>
+          <p:cNvPr id="7" name="Rectangle 6"/>
           <p:cNvSpPr/>
           <p:nvPr/>
         </p:nvSpPr>
@@ -8739,7 +8824,7 @@
       </p:sp>
       <p:sp>
         <p:nvSpPr>
-          <p:cNvPr id="7" name="TextBox 6"/>
+          <p:cNvPr id="8" name="TextBox 7"/>
           <p:cNvSpPr txBox="1"/>
           <p:nvPr/>
         </p:nvSpPr>
@@ -8774,7 +8859,7 @@
       </p:sp>
       <p:sp>
         <p:nvSpPr>
-          <p:cNvPr id="8" name="TextBox 7"/>
+          <p:cNvPr id="9" name="TextBox 8"/>
           <p:cNvSpPr txBox="1"/>
           <p:nvPr/>
         </p:nvSpPr>
@@ -8809,7 +8894,7 @@
       </p:sp>
       <p:sp>
         <p:nvSpPr>
-          <p:cNvPr id="9" name="TextBox 8"/>
+          <p:cNvPr id="10" name="TextBox 9"/>
           <p:cNvSpPr txBox="1"/>
           <p:nvPr/>
         </p:nvSpPr>
@@ -8844,7 +8929,7 @@
       </p:sp>
       <p:sp>
         <p:nvSpPr>
-          <p:cNvPr id="10" name="TextBox 9"/>
+          <p:cNvPr id="11" name="TextBox 10"/>
           <p:cNvSpPr txBox="1"/>
           <p:nvPr/>
         </p:nvSpPr>
@@ -8879,7 +8964,7 @@
       </p:sp>
       <p:sp>
         <p:nvSpPr>
-          <p:cNvPr id="11" name="TextBox 10"/>
+          <p:cNvPr id="12" name="TextBox 11"/>
           <p:cNvSpPr txBox="1"/>
           <p:nvPr/>
         </p:nvSpPr>
@@ -8914,7 +8999,7 @@
       </p:sp>
       <p:sp>
         <p:nvSpPr>
-          <p:cNvPr id="12" name="Rectangle 11"/>
+          <p:cNvPr id="13" name="Rectangle 12"/>
           <p:cNvSpPr/>
           <p:nvPr/>
         </p:nvSpPr>
@@ -8957,7 +9042,7 @@
       </p:sp>
       <p:sp>
         <p:nvSpPr>
-          <p:cNvPr id="13" name="TextBox 12"/>
+          <p:cNvPr id="14" name="TextBox 13"/>
           <p:cNvSpPr txBox="1"/>
           <p:nvPr/>
         </p:nvSpPr>
@@ -8992,7 +9077,7 @@
       </p:sp>
       <p:sp>
         <p:nvSpPr>
-          <p:cNvPr id="14" name="TextBox 13"/>
+          <p:cNvPr id="15" name="TextBox 14"/>
           <p:cNvSpPr txBox="1"/>
           <p:nvPr/>
         </p:nvSpPr>
@@ -9139,7 +9224,7 @@
         <p:spPr>
           <a:xfrm>
             <a:off x="365760" y="91440"/>
-            <a:ext cx="10972800" cy="777240"/>
+            <a:ext cx="9601200" cy="777240"/>
           </a:xfrm>
           <a:prstGeom prst="rect">
             <a:avLst/>
@@ -9165,9 +9250,33 @@
           </a:p>
         </p:txBody>
       </p:sp>
-      <p:sp>
-        <p:nvSpPr>
-          <p:cNvPr id="4" name="Rectangle 3"/>
+      <p:pic>
+        <p:nvPicPr>
+          <p:cNvPr id="4" name="Picture 3" descr="zen_brand_logo.png"/>
+          <p:cNvPicPr>
+            <a:picLocks noChangeAspect="1"/>
+          </p:cNvPicPr>
+          <p:nvPr/>
+        </p:nvPicPr>
+        <p:blipFill>
+          <a:blip r:embed="rId2"/>
+          <a:stretch>
+            <a:fillRect/>
+          </a:stretch>
+        </p:blipFill>
+        <p:spPr>
+          <a:xfrm>
+            <a:off x="9875520" y="45720"/>
+            <a:ext cx="2103120" cy="749808"/>
+          </a:xfrm>
+          <a:prstGeom prst="rect">
+            <a:avLst/>
+          </a:prstGeom>
+        </p:spPr>
+      </p:pic>
+      <p:sp>
+        <p:nvSpPr>
+          <p:cNvPr id="5" name="Rectangle 4"/>
           <p:cNvSpPr/>
           <p:nvPr/>
         </p:nvSpPr>
@@ -9210,7 +9319,7 @@
       </p:sp>
       <p:sp>
         <p:nvSpPr>
-          <p:cNvPr id="5" name="TextBox 4"/>
+          <p:cNvPr id="6" name="TextBox 5"/>
           <p:cNvSpPr txBox="1"/>
           <p:nvPr/>
         </p:nvSpPr>
@@ -9245,7 +9354,7 @@
       </p:sp>
       <p:sp>
         <p:nvSpPr>
-          <p:cNvPr id="6" name="TextBox 5"/>
+          <p:cNvPr id="7" name="TextBox 6"/>
           <p:cNvSpPr txBox="1"/>
           <p:nvPr/>
         </p:nvSpPr>
@@ -9280,7 +9389,7 @@
       </p:sp>
       <p:sp>
         <p:nvSpPr>
-          <p:cNvPr id="7" name="Rectangle 6"/>
+          <p:cNvPr id="8" name="Rectangle 7"/>
           <p:cNvSpPr/>
           <p:nvPr/>
         </p:nvSpPr>
@@ -9323,7 +9432,7 @@
       </p:sp>
       <p:sp>
         <p:nvSpPr>
-          <p:cNvPr id="8" name="TextBox 7"/>
+          <p:cNvPr id="9" name="TextBox 8"/>
           <p:cNvSpPr txBox="1"/>
           <p:nvPr/>
         </p:nvSpPr>
@@ -9358,7 +9467,7 @@
       </p:sp>
       <p:sp>
         <p:nvSpPr>
-          <p:cNvPr id="9" name="TextBox 8"/>
+          <p:cNvPr id="10" name="TextBox 9"/>
           <p:cNvSpPr txBox="1"/>
           <p:nvPr/>
         </p:nvSpPr>
@@ -9393,7 +9502,7 @@
       </p:sp>
       <p:graphicFrame>
         <p:nvGraphicFramePr>
-          <p:cNvPr id="10" name="Table 9"/>
+          <p:cNvPr id="11" name="Table 10"/>
           <p:cNvGraphicFramePr>
             <a:graphicFrameLocks noGrp="1"/>
           </p:cNvGraphicFramePr>
@@ -9917,7 +10026,7 @@
       </p:graphicFrame>
       <p:sp>
         <p:nvSpPr>
-          <p:cNvPr id="11" name="TextBox 10"/>
+          <p:cNvPr id="12" name="TextBox 11"/>
           <p:cNvSpPr txBox="1"/>
           <p:nvPr/>
         </p:nvSpPr>
@@ -10076,7 +10185,7 @@
         <p:spPr>
           <a:xfrm>
             <a:off x="365760" y="91440"/>
-            <a:ext cx="10972800" cy="777240"/>
+            <a:ext cx="9601200" cy="777240"/>
           </a:xfrm>
           <a:prstGeom prst="rect">
             <a:avLst/>
@@ -10102,9 +10211,33 @@
           </a:p>
         </p:txBody>
       </p:sp>
+      <p:pic>
+        <p:nvPicPr>
+          <p:cNvPr id="4" name="Picture 3" descr="zen_brand_logo.png"/>
+          <p:cNvPicPr>
+            <a:picLocks noChangeAspect="1"/>
+          </p:cNvPicPr>
+          <p:nvPr/>
+        </p:nvPicPr>
+        <p:blipFill>
+          <a:blip r:embed="rId2"/>
+          <a:stretch>
+            <a:fillRect/>
+          </a:stretch>
+        </p:blipFill>
+        <p:spPr>
+          <a:xfrm>
+            <a:off x="9875520" y="45720"/>
+            <a:ext cx="2103120" cy="749808"/>
+          </a:xfrm>
+          <a:prstGeom prst="rect">
+            <a:avLst/>
+          </a:prstGeom>
+        </p:spPr>
+      </p:pic>
       <p:graphicFrame>
         <p:nvGraphicFramePr>
-          <p:cNvPr id="4" name="Table 3"/>
+          <p:cNvPr id="5" name="Table 4"/>
           <p:cNvGraphicFramePr>
             <a:graphicFrameLocks noGrp="1"/>
           </p:cNvGraphicFramePr>
@@ -11223,7 +11356,7 @@
         <p:spPr>
           <a:xfrm>
             <a:off x="365760" y="91440"/>
-            <a:ext cx="10972800" cy="777240"/>
+            <a:ext cx="9601200" cy="777240"/>
           </a:xfrm>
           <a:prstGeom prst="rect">
             <a:avLst/>
@@ -11249,9 +11382,57 @@
           </a:p>
         </p:txBody>
       </p:sp>
-      <p:sp>
-        <p:nvSpPr>
-          <p:cNvPr id="4" name="TextBox 3"/>
+      <p:pic>
+        <p:nvPicPr>
+          <p:cNvPr id="4" name="Picture 3" descr="zen_brand_logo.png"/>
+          <p:cNvPicPr>
+            <a:picLocks noChangeAspect="1"/>
+          </p:cNvPicPr>
+          <p:nvPr/>
+        </p:nvPicPr>
+        <p:blipFill>
+          <a:blip r:embed="rId2"/>
+          <a:stretch>
+            <a:fillRect/>
+          </a:stretch>
+        </p:blipFill>
+        <p:spPr>
+          <a:xfrm>
+            <a:off x="9875520" y="45720"/>
+            <a:ext cx="2103120" cy="749808"/>
+          </a:xfrm>
+          <a:prstGeom prst="rect">
+            <a:avLst/>
+          </a:prstGeom>
+        </p:spPr>
+      </p:pic>
+      <p:pic>
+        <p:nvPicPr>
+          <p:cNvPr id="5" name="Picture 4" descr="zen_brand_logo.png"/>
+          <p:cNvPicPr>
+            <a:picLocks noChangeAspect="1"/>
+          </p:cNvPicPr>
+          <p:nvPr/>
+        </p:nvPicPr>
+        <p:blipFill>
+          <a:blip r:embed="rId2"/>
+          <a:stretch>
+            <a:fillRect/>
+          </a:stretch>
+        </p:blipFill>
+        <p:spPr>
+          <a:xfrm>
+            <a:off x="9875520" y="45720"/>
+            <a:ext cx="2103120" cy="749808"/>
+          </a:xfrm>
+          <a:prstGeom prst="rect">
+            <a:avLst/>
+          </a:prstGeom>
+        </p:spPr>
+      </p:pic>
+      <p:sp>
+        <p:nvSpPr>
+          <p:cNvPr id="6" name="TextBox 5"/>
           <p:cNvSpPr txBox="1"/>
           <p:nvPr/>
         </p:nvSpPr>
@@ -11286,7 +11467,7 @@
       </p:sp>
       <p:sp>
         <p:nvSpPr>
-          <p:cNvPr id="5" name="TextBox 4"/>
+          <p:cNvPr id="7" name="TextBox 6"/>
           <p:cNvSpPr txBox="1"/>
           <p:nvPr/>
         </p:nvSpPr>
@@ -11321,7 +11502,7 @@
       </p:sp>
       <p:sp>
         <p:nvSpPr>
-          <p:cNvPr id="6" name="Rectangle 5"/>
+          <p:cNvPr id="8" name="Rectangle 7"/>
           <p:cNvSpPr/>
           <p:nvPr/>
         </p:nvSpPr>
@@ -11364,7 +11545,7 @@
       </p:sp>
       <p:sp>
         <p:nvSpPr>
-          <p:cNvPr id="7" name="TextBox 6"/>
+          <p:cNvPr id="9" name="TextBox 8"/>
           <p:cNvSpPr txBox="1"/>
           <p:nvPr/>
         </p:nvSpPr>
@@ -11399,7 +11580,7 @@
       </p:sp>
       <p:sp>
         <p:nvSpPr>
-          <p:cNvPr id="8" name="TextBox 7"/>
+          <p:cNvPr id="10" name="TextBox 9"/>
           <p:cNvSpPr txBox="1"/>
           <p:nvPr/>
         </p:nvSpPr>
@@ -11434,7 +11615,7 @@
       </p:sp>
       <p:sp>
         <p:nvSpPr>
-          <p:cNvPr id="9" name="Rectangle 8"/>
+          <p:cNvPr id="11" name="Rectangle 10"/>
           <p:cNvSpPr/>
           <p:nvPr/>
         </p:nvSpPr>
@@ -11477,7 +11658,7 @@
       </p:sp>
       <p:sp>
         <p:nvSpPr>
-          <p:cNvPr id="10" name="TextBox 9"/>
+          <p:cNvPr id="12" name="TextBox 11"/>
           <p:cNvSpPr txBox="1"/>
           <p:nvPr/>
         </p:nvSpPr>
@@ -11512,7 +11693,7 @@
       </p:sp>
       <p:sp>
         <p:nvSpPr>
-          <p:cNvPr id="11" name="TextBox 10"/>
+          <p:cNvPr id="13" name="TextBox 12"/>
           <p:cNvSpPr txBox="1"/>
           <p:nvPr/>
         </p:nvSpPr>
@@ -11571,7 +11752,7 @@
       </p:sp>
       <p:sp>
         <p:nvSpPr>
-          <p:cNvPr id="12" name="Rectangle 11"/>
+          <p:cNvPr id="14" name="Rectangle 13"/>
           <p:cNvSpPr/>
           <p:nvPr/>
         </p:nvSpPr>
@@ -11614,7 +11795,7 @@
       </p:sp>
       <p:sp>
         <p:nvSpPr>
-          <p:cNvPr id="13" name="TextBox 12"/>
+          <p:cNvPr id="15" name="TextBox 14"/>
           <p:cNvSpPr txBox="1"/>
           <p:nvPr/>
         </p:nvSpPr>
@@ -11649,7 +11830,7 @@
       </p:sp>
       <p:sp>
         <p:nvSpPr>
-          <p:cNvPr id="14" name="TextBox 13"/>
+          <p:cNvPr id="16" name="TextBox 15"/>
           <p:cNvSpPr txBox="1"/>
           <p:nvPr/>
         </p:nvSpPr>
@@ -11684,7 +11865,7 @@
       </p:sp>
       <p:sp>
         <p:nvSpPr>
-          <p:cNvPr id="15" name="Rectangle 14"/>
+          <p:cNvPr id="17" name="Rectangle 16"/>
           <p:cNvSpPr/>
           <p:nvPr/>
         </p:nvSpPr>
@@ -11727,7 +11908,7 @@
       </p:sp>
       <p:sp>
         <p:nvSpPr>
-          <p:cNvPr id="16" name="TextBox 15"/>
+          <p:cNvPr id="18" name="TextBox 17"/>
           <p:cNvSpPr txBox="1"/>
           <p:nvPr/>
         </p:nvSpPr>
@@ -11762,7 +11943,7 @@
       </p:sp>
       <p:sp>
         <p:nvSpPr>
-          <p:cNvPr id="17" name="TextBox 16"/>
+          <p:cNvPr id="19" name="TextBox 18"/>
           <p:cNvSpPr txBox="1"/>
           <p:nvPr/>
         </p:nvSpPr>
@@ -11821,7 +12002,7 @@
       </p:sp>
       <p:sp>
         <p:nvSpPr>
-          <p:cNvPr id="18" name="Rectangle 17"/>
+          <p:cNvPr id="20" name="Rectangle 19"/>
           <p:cNvSpPr/>
           <p:nvPr/>
         </p:nvSpPr>
@@ -11864,7 +12045,7 @@
       </p:sp>
       <p:sp>
         <p:nvSpPr>
-          <p:cNvPr id="19" name="TextBox 18"/>
+          <p:cNvPr id="21" name="TextBox 20"/>
           <p:cNvSpPr txBox="1"/>
           <p:nvPr/>
         </p:nvSpPr>
@@ -11899,7 +12080,7 @@
       </p:sp>
       <p:sp>
         <p:nvSpPr>
-          <p:cNvPr id="20" name="TextBox 19"/>
+          <p:cNvPr id="22" name="TextBox 21"/>
           <p:cNvSpPr txBox="1"/>
           <p:nvPr/>
         </p:nvSpPr>
@@ -11934,7 +12115,7 @@
       </p:sp>
       <p:sp>
         <p:nvSpPr>
-          <p:cNvPr id="21" name="Rectangle 20"/>
+          <p:cNvPr id="23" name="Rectangle 22"/>
           <p:cNvSpPr/>
           <p:nvPr/>
         </p:nvSpPr>
@@ -11977,7 +12158,7 @@
       </p:sp>
       <p:sp>
         <p:nvSpPr>
-          <p:cNvPr id="22" name="TextBox 21"/>
+          <p:cNvPr id="24" name="TextBox 23"/>
           <p:cNvSpPr txBox="1"/>
           <p:nvPr/>
         </p:nvSpPr>
@@ -12012,7 +12193,7 @@
       </p:sp>
       <p:sp>
         <p:nvSpPr>
-          <p:cNvPr id="23" name="TextBox 22"/>
+          <p:cNvPr id="25" name="TextBox 24"/>
           <p:cNvSpPr txBox="1"/>
           <p:nvPr/>
         </p:nvSpPr>
@@ -12147,7 +12328,7 @@
         <p:spPr>
           <a:xfrm>
             <a:off x="365760" y="91440"/>
-            <a:ext cx="10972800" cy="777240"/>
+            <a:ext cx="9601200" cy="777240"/>
           </a:xfrm>
           <a:prstGeom prst="rect">
             <a:avLst/>
@@ -12173,9 +12354,33 @@
           </a:p>
         </p:txBody>
       </p:sp>
-      <p:sp>
-        <p:nvSpPr>
-          <p:cNvPr id="4" name="Rectangle 3"/>
+      <p:pic>
+        <p:nvPicPr>
+          <p:cNvPr id="4" name="Picture 3" descr="zen_brand_logo.png"/>
+          <p:cNvPicPr>
+            <a:picLocks noChangeAspect="1"/>
+          </p:cNvPicPr>
+          <p:nvPr/>
+        </p:nvPicPr>
+        <p:blipFill>
+          <a:blip r:embed="rId2"/>
+          <a:stretch>
+            <a:fillRect/>
+          </a:stretch>
+        </p:blipFill>
+        <p:spPr>
+          <a:xfrm>
+            <a:off x="9875520" y="45720"/>
+            <a:ext cx="2103120" cy="749808"/>
+          </a:xfrm>
+          <a:prstGeom prst="rect">
+            <a:avLst/>
+          </a:prstGeom>
+        </p:spPr>
+      </p:pic>
+      <p:sp>
+        <p:nvSpPr>
+          <p:cNvPr id="5" name="Rectangle 4"/>
           <p:cNvSpPr/>
           <p:nvPr/>
         </p:nvSpPr>
@@ -12218,7 +12423,7 @@
       </p:sp>
       <p:sp>
         <p:nvSpPr>
-          <p:cNvPr id="5" name="TextBox 4"/>
+          <p:cNvPr id="6" name="TextBox 5"/>
           <p:cNvSpPr txBox="1"/>
           <p:nvPr/>
         </p:nvSpPr>
@@ -12253,7 +12458,7 @@
       </p:sp>
       <p:sp>
         <p:nvSpPr>
-          <p:cNvPr id="6" name="TextBox 5"/>
+          <p:cNvPr id="7" name="TextBox 6"/>
           <p:cNvSpPr txBox="1"/>
           <p:nvPr/>
         </p:nvSpPr>
@@ -12289,7 +12494,7 @@
       </p:sp>
       <p:sp>
         <p:nvSpPr>
-          <p:cNvPr id="7" name="Rectangle 6"/>
+          <p:cNvPr id="8" name="Rectangle 7"/>
           <p:cNvSpPr/>
           <p:nvPr/>
         </p:nvSpPr>
@@ -12332,7 +12537,7 @@
       </p:sp>
       <p:sp>
         <p:nvSpPr>
-          <p:cNvPr id="8" name="TextBox 7"/>
+          <p:cNvPr id="9" name="TextBox 8"/>
           <p:cNvSpPr txBox="1"/>
           <p:nvPr/>
         </p:nvSpPr>
@@ -12367,7 +12572,7 @@
       </p:sp>
       <p:sp>
         <p:nvSpPr>
-          <p:cNvPr id="9" name="TextBox 8"/>
+          <p:cNvPr id="10" name="TextBox 9"/>
           <p:cNvSpPr txBox="1"/>
           <p:nvPr/>
         </p:nvSpPr>
@@ -12403,7 +12608,7 @@
       </p:sp>
       <p:sp>
         <p:nvSpPr>
-          <p:cNvPr id="10" name="Rectangle 9"/>
+          <p:cNvPr id="11" name="Rectangle 10"/>
           <p:cNvSpPr/>
           <p:nvPr/>
         </p:nvSpPr>
@@ -12446,7 +12651,7 @@
       </p:sp>
       <p:sp>
         <p:nvSpPr>
-          <p:cNvPr id="11" name="TextBox 10"/>
+          <p:cNvPr id="12" name="TextBox 11"/>
           <p:cNvSpPr txBox="1"/>
           <p:nvPr/>
         </p:nvSpPr>
@@ -12481,7 +12686,7 @@
       </p:sp>
       <p:sp>
         <p:nvSpPr>
-          <p:cNvPr id="12" name="TextBox 11"/>
+          <p:cNvPr id="13" name="TextBox 12"/>
           <p:cNvSpPr txBox="1"/>
           <p:nvPr/>
         </p:nvSpPr>
@@ -12517,7 +12722,7 @@
       </p:sp>
       <p:sp>
         <p:nvSpPr>
-          <p:cNvPr id="13" name="Rectangle 12"/>
+          <p:cNvPr id="14" name="Rectangle 13"/>
           <p:cNvSpPr/>
           <p:nvPr/>
         </p:nvSpPr>
@@ -12560,7 +12765,7 @@
       </p:sp>
       <p:sp>
         <p:nvSpPr>
-          <p:cNvPr id="14" name="TextBox 13"/>
+          <p:cNvPr id="15" name="TextBox 14"/>
           <p:cNvSpPr txBox="1"/>
           <p:nvPr/>
         </p:nvSpPr>
@@ -12595,7 +12800,7 @@
       </p:sp>
       <p:sp>
         <p:nvSpPr>
-          <p:cNvPr id="15" name="TextBox 14"/>
+          <p:cNvPr id="16" name="TextBox 15"/>
           <p:cNvSpPr txBox="1"/>
           <p:nvPr/>
         </p:nvSpPr>
@@ -12631,7 +12836,7 @@
       </p:sp>
       <p:sp>
         <p:nvSpPr>
-          <p:cNvPr id="16" name="Rectangle 15"/>
+          <p:cNvPr id="17" name="Rectangle 16"/>
           <p:cNvSpPr/>
           <p:nvPr/>
         </p:nvSpPr>
@@ -12674,7 +12879,7 @@
       </p:sp>
       <p:sp>
         <p:nvSpPr>
-          <p:cNvPr id="17" name="TextBox 16"/>
+          <p:cNvPr id="18" name="TextBox 17"/>
           <p:cNvSpPr txBox="1"/>
           <p:nvPr/>
         </p:nvSpPr>
@@ -12709,7 +12914,7 @@
       </p:sp>
       <p:sp>
         <p:nvSpPr>
-          <p:cNvPr id="18" name="TextBox 17"/>
+          <p:cNvPr id="19" name="TextBox 18"/>
           <p:cNvSpPr txBox="1"/>
           <p:nvPr/>
         </p:nvSpPr>
@@ -12744,7 +12949,7 @@
       </p:sp>
       <p:sp>
         <p:nvSpPr>
-          <p:cNvPr id="19" name="TextBox 18"/>
+          <p:cNvPr id="20" name="TextBox 19"/>
           <p:cNvSpPr txBox="1"/>
           <p:nvPr/>
         </p:nvSpPr>
@@ -12779,7 +12984,7 @@
       </p:sp>
       <p:sp>
         <p:nvSpPr>
-          <p:cNvPr id="20" name="TextBox 19"/>
+          <p:cNvPr id="21" name="TextBox 20"/>
           <p:cNvSpPr txBox="1"/>
           <p:nvPr/>
         </p:nvSpPr>
@@ -12814,7 +13019,7 @@
       </p:sp>
       <p:sp>
         <p:nvSpPr>
-          <p:cNvPr id="21" name="TextBox 20"/>
+          <p:cNvPr id="22" name="TextBox 21"/>
           <p:cNvSpPr txBox="1"/>
           <p:nvPr/>
         </p:nvSpPr>
@@ -12849,7 +13054,7 @@
       </p:sp>
       <p:sp>
         <p:nvSpPr>
-          <p:cNvPr id="22" name="Rectangle 21"/>
+          <p:cNvPr id="23" name="Rectangle 22"/>
           <p:cNvSpPr/>
           <p:nvPr/>
         </p:nvSpPr>
@@ -12892,7 +13097,7 @@
       </p:sp>
       <p:sp>
         <p:nvSpPr>
-          <p:cNvPr id="23" name="TextBox 22"/>
+          <p:cNvPr id="24" name="TextBox 23"/>
           <p:cNvSpPr txBox="1"/>
           <p:nvPr/>
         </p:nvSpPr>
@@ -12927,7 +13132,7 @@
       </p:sp>
       <p:sp>
         <p:nvSpPr>
-          <p:cNvPr id="24" name="TextBox 23"/>
+          <p:cNvPr id="25" name="TextBox 24"/>
           <p:cNvSpPr txBox="1"/>
           <p:nvPr/>
         </p:nvSpPr>
@@ -12962,7 +13167,7 @@
       </p:sp>
       <p:sp>
         <p:nvSpPr>
-          <p:cNvPr id="25" name="TextBox 24"/>
+          <p:cNvPr id="26" name="TextBox 25"/>
           <p:cNvSpPr txBox="1"/>
           <p:nvPr/>
         </p:nvSpPr>
@@ -12997,7 +13202,7 @@
       </p:sp>
       <p:sp>
         <p:nvSpPr>
-          <p:cNvPr id="26" name="TextBox 25"/>
+          <p:cNvPr id="27" name="TextBox 26"/>
           <p:cNvSpPr txBox="1"/>
           <p:nvPr/>
         </p:nvSpPr>
@@ -13032,7 +13237,7 @@
       </p:sp>
       <p:sp>
         <p:nvSpPr>
-          <p:cNvPr id="27" name="TextBox 26"/>
+          <p:cNvPr id="28" name="TextBox 27"/>
           <p:cNvSpPr txBox="1"/>
           <p:nvPr/>
         </p:nvSpPr>
@@ -13067,7 +13272,7 @@
       </p:sp>
       <p:sp>
         <p:nvSpPr>
-          <p:cNvPr id="28" name="TextBox 27"/>
+          <p:cNvPr id="29" name="TextBox 28"/>
           <p:cNvSpPr txBox="1"/>
           <p:nvPr/>
         </p:nvSpPr>
@@ -13178,7 +13383,7 @@
         <p:spPr>
           <a:xfrm>
             <a:off x="365760" y="91440"/>
-            <a:ext cx="10972800" cy="777240"/>
+            <a:ext cx="9601200" cy="777240"/>
           </a:xfrm>
           <a:prstGeom prst="rect">
             <a:avLst/>
@@ -13204,9 +13409,33 @@
           </a:p>
         </p:txBody>
       </p:sp>
+      <p:pic>
+        <p:nvPicPr>
+          <p:cNvPr id="4" name="Picture 3" descr="zen_brand_logo.png"/>
+          <p:cNvPicPr>
+            <a:picLocks noChangeAspect="1"/>
+          </p:cNvPicPr>
+          <p:nvPr/>
+        </p:nvPicPr>
+        <p:blipFill>
+          <a:blip r:embed="rId2"/>
+          <a:stretch>
+            <a:fillRect/>
+          </a:stretch>
+        </p:blipFill>
+        <p:spPr>
+          <a:xfrm>
+            <a:off x="9875520" y="45720"/>
+            <a:ext cx="2103120" cy="749808"/>
+          </a:xfrm>
+          <a:prstGeom prst="rect">
+            <a:avLst/>
+          </a:prstGeom>
+        </p:spPr>
+      </p:pic>
       <p:graphicFrame>
         <p:nvGraphicFramePr>
-          <p:cNvPr id="4" name="Table 3"/>
+          <p:cNvPr id="5" name="Table 4"/>
           <p:cNvGraphicFramePr>
             <a:graphicFrameLocks noGrp="1"/>
           </p:cNvGraphicFramePr>
@@ -13936,7 +14165,7 @@
       </p:graphicFrame>
       <p:sp>
         <p:nvSpPr>
-          <p:cNvPr id="5" name="TextBox 4"/>
+          <p:cNvPr id="6" name="TextBox 5"/>
           <p:cNvSpPr txBox="1"/>
           <p:nvPr/>
         </p:nvSpPr>
@@ -13971,7 +14200,7 @@
       </p:sp>
       <p:sp>
         <p:nvSpPr>
-          <p:cNvPr id="6" name="Rectangle 5"/>
+          <p:cNvPr id="7" name="Rectangle 6"/>
           <p:cNvSpPr/>
           <p:nvPr/>
         </p:nvSpPr>
@@ -14014,7 +14243,7 @@
       </p:sp>
       <p:sp>
         <p:nvSpPr>
-          <p:cNvPr id="7" name="TextBox 6"/>
+          <p:cNvPr id="8" name="TextBox 7"/>
           <p:cNvSpPr txBox="1"/>
           <p:nvPr/>
         </p:nvSpPr>
@@ -14049,7 +14278,7 @@
       </p:sp>
       <p:sp>
         <p:nvSpPr>
-          <p:cNvPr id="8" name="TextBox 7"/>
+          <p:cNvPr id="9" name="TextBox 8"/>
           <p:cNvSpPr txBox="1"/>
           <p:nvPr/>
         </p:nvSpPr>
@@ -14084,7 +14313,7 @@
       </p:sp>
       <p:sp>
         <p:nvSpPr>
-          <p:cNvPr id="9" name="Rectangle 8"/>
+          <p:cNvPr id="10" name="Rectangle 9"/>
           <p:cNvSpPr/>
           <p:nvPr/>
         </p:nvSpPr>
@@ -14127,7 +14356,7 @@
       </p:sp>
       <p:sp>
         <p:nvSpPr>
-          <p:cNvPr id="10" name="TextBox 9"/>
+          <p:cNvPr id="11" name="TextBox 10"/>
           <p:cNvSpPr txBox="1"/>
           <p:nvPr/>
         </p:nvSpPr>
@@ -14162,7 +14391,7 @@
       </p:sp>
       <p:sp>
         <p:nvSpPr>
-          <p:cNvPr id="11" name="TextBox 10"/>
+          <p:cNvPr id="12" name="TextBox 11"/>
           <p:cNvSpPr txBox="1"/>
           <p:nvPr/>
         </p:nvSpPr>
@@ -14197,7 +14426,7 @@
       </p:sp>
       <p:sp>
         <p:nvSpPr>
-          <p:cNvPr id="12" name="Rectangle 11"/>
+          <p:cNvPr id="13" name="Rectangle 12"/>
           <p:cNvSpPr/>
           <p:nvPr/>
         </p:nvSpPr>
@@ -14240,7 +14469,7 @@
       </p:sp>
       <p:sp>
         <p:nvSpPr>
-          <p:cNvPr id="13" name="TextBox 12"/>
+          <p:cNvPr id="14" name="TextBox 13"/>
           <p:cNvSpPr txBox="1"/>
           <p:nvPr/>
         </p:nvSpPr>
@@ -14275,7 +14504,7 @@
       </p:sp>
       <p:sp>
         <p:nvSpPr>
-          <p:cNvPr id="14" name="TextBox 13"/>
+          <p:cNvPr id="15" name="TextBox 14"/>
           <p:cNvSpPr txBox="1"/>
           <p:nvPr/>
         </p:nvSpPr>
@@ -14310,7 +14539,7 @@
       </p:sp>
       <p:sp>
         <p:nvSpPr>
-          <p:cNvPr id="15" name="TextBox 14"/>
+          <p:cNvPr id="16" name="TextBox 15"/>
           <p:cNvSpPr txBox="1"/>
           <p:nvPr/>
         </p:nvSpPr>
@@ -14345,7 +14574,7 @@
       </p:sp>
       <p:sp>
         <p:nvSpPr>
-          <p:cNvPr id="16" name="Rectangle 15"/>
+          <p:cNvPr id="17" name="Rectangle 16"/>
           <p:cNvSpPr/>
           <p:nvPr/>
         </p:nvSpPr>
@@ -14388,7 +14617,7 @@
       </p:sp>
       <p:sp>
         <p:nvSpPr>
-          <p:cNvPr id="17" name="TextBox 16"/>
+          <p:cNvPr id="18" name="TextBox 17"/>
           <p:cNvSpPr txBox="1"/>
           <p:nvPr/>
         </p:nvSpPr>
@@ -14423,7 +14652,7 @@
       </p:sp>
       <p:sp>
         <p:nvSpPr>
-          <p:cNvPr id="18" name="TextBox 17"/>
+          <p:cNvPr id="19" name="TextBox 18"/>
           <p:cNvSpPr txBox="1"/>
           <p:nvPr/>
         </p:nvSpPr>
@@ -14458,7 +14687,7 @@
       </p:sp>
       <p:sp>
         <p:nvSpPr>
-          <p:cNvPr id="19" name="Rectangle 18"/>
+          <p:cNvPr id="20" name="Rectangle 19"/>
           <p:cNvSpPr/>
           <p:nvPr/>
         </p:nvSpPr>
@@ -14501,7 +14730,7 @@
       </p:sp>
       <p:sp>
         <p:nvSpPr>
-          <p:cNvPr id="20" name="TextBox 19"/>
+          <p:cNvPr id="21" name="TextBox 20"/>
           <p:cNvSpPr txBox="1"/>
           <p:nvPr/>
         </p:nvSpPr>
@@ -14536,7 +14765,7 @@
       </p:sp>
       <p:sp>
         <p:nvSpPr>
-          <p:cNvPr id="21" name="TextBox 20"/>
+          <p:cNvPr id="22" name="TextBox 21"/>
           <p:cNvSpPr txBox="1"/>
           <p:nvPr/>
         </p:nvSpPr>
@@ -14571,7 +14800,7 @@
       </p:sp>
       <p:sp>
         <p:nvSpPr>
-          <p:cNvPr id="22" name="Rectangle 21"/>
+          <p:cNvPr id="23" name="Rectangle 22"/>
           <p:cNvSpPr/>
           <p:nvPr/>
         </p:nvSpPr>
@@ -14614,7 +14843,7 @@
       </p:sp>
       <p:sp>
         <p:nvSpPr>
-          <p:cNvPr id="23" name="TextBox 22"/>
+          <p:cNvPr id="24" name="TextBox 23"/>
           <p:cNvSpPr txBox="1"/>
           <p:nvPr/>
         </p:nvSpPr>
@@ -14649,7 +14878,7 @@
       </p:sp>
       <p:sp>
         <p:nvSpPr>
-          <p:cNvPr id="24" name="TextBox 23"/>
+          <p:cNvPr id="25" name="TextBox 24"/>
           <p:cNvSpPr txBox="1"/>
           <p:nvPr/>
         </p:nvSpPr>
@@ -14684,7 +14913,7 @@
       </p:sp>
       <p:sp>
         <p:nvSpPr>
-          <p:cNvPr id="25" name="Rectangle 24"/>
+          <p:cNvPr id="26" name="Rectangle 25"/>
           <p:cNvSpPr/>
           <p:nvPr/>
         </p:nvSpPr>
@@ -14727,7 +14956,7 @@
       </p:sp>
       <p:sp>
         <p:nvSpPr>
-          <p:cNvPr id="26" name="TextBox 25"/>
+          <p:cNvPr id="27" name="TextBox 26"/>
           <p:cNvSpPr txBox="1"/>
           <p:nvPr/>
         </p:nvSpPr>
@@ -14762,7 +14991,7 @@
       </p:sp>
       <p:sp>
         <p:nvSpPr>
-          <p:cNvPr id="27" name="TextBox 26"/>
+          <p:cNvPr id="28" name="TextBox 27"/>
           <p:cNvSpPr txBox="1"/>
           <p:nvPr/>
         </p:nvSpPr>
@@ -14873,7 +15102,7 @@
         <p:spPr>
           <a:xfrm>
             <a:off x="365760" y="91440"/>
-            <a:ext cx="10972800" cy="777240"/>
+            <a:ext cx="9601200" cy="777240"/>
           </a:xfrm>
           <a:prstGeom prst="rect">
             <a:avLst/>
@@ -14899,515 +15128,9 @@
           </a:p>
         </p:txBody>
       </p:sp>
-      <p:sp>
-        <p:nvSpPr>
-          <p:cNvPr id="4" name="TextBox 3"/>
-          <p:cNvSpPr txBox="1"/>
-          <p:nvPr/>
-        </p:nvSpPr>
-        <p:spPr>
-          <a:xfrm>
-            <a:off x="457200" y="1005840"/>
-            <a:ext cx="10972800" cy="502920"/>
-          </a:xfrm>
-          <a:prstGeom prst="rect">
-            <a:avLst/>
-          </a:prstGeom>
-          <a:noFill/>
-        </p:spPr>
-        <p:txBody>
-          <a:bodyPr wrap="square">
-            <a:spAutoFit/>
-          </a:bodyPr>
-          <a:lstStyle/>
-          <a:p>
-            <a:pPr algn="l"/>
-            <a:r>
-              <a:rPr sz="2000" b="1" i="0">
-                <a:solidFill>
-                  <a:srgbClr val="C49A22"/>
-                </a:solidFill>
-                <a:latin typeface="IPAGothic"/>
-              </a:rPr>
-              <a:t>「一杯の出汁が、今日を整える。」</a:t>
-            </a:r>
-          </a:p>
-        </p:txBody>
-      </p:sp>
-      <p:sp>
-        <p:nvSpPr>
-          <p:cNvPr id="5" name="Rectangle 4"/>
-          <p:cNvSpPr/>
-          <p:nvPr/>
-        </p:nvSpPr>
-        <p:spPr>
-          <a:xfrm>
-            <a:off x="274320" y="1645920"/>
-            <a:ext cx="5669280" cy="347472"/>
-          </a:xfrm>
-          <a:prstGeom prst="rect">
-            <a:avLst/>
-          </a:prstGeom>
-          <a:solidFill>
-            <a:srgbClr val="C49A22"/>
-          </a:solidFill>
-          <a:ln>
-            <a:noFill/>
-          </a:ln>
-        </p:spPr>
-        <p:style>
-          <a:lnRef idx="1">
-            <a:schemeClr val="accent1"/>
-          </a:lnRef>
-          <a:fillRef idx="3">
-            <a:schemeClr val="accent1"/>
-          </a:fillRef>
-          <a:effectRef idx="2">
-            <a:schemeClr val="accent1"/>
-          </a:effectRef>
-          <a:fontRef idx="minor">
-            <a:schemeClr val="lt1"/>
-          </a:fontRef>
-        </p:style>
-        <p:txBody>
-          <a:bodyPr rtlCol="0" anchor="ctr"/>
-          <a:lstStyle/>
-          <a:p>
-            <a:pPr algn="ctr"/>
-          </a:p>
-        </p:txBody>
-      </p:sp>
-      <p:sp>
-        <p:nvSpPr>
-          <p:cNvPr id="6" name="TextBox 5"/>
-          <p:cNvSpPr txBox="1"/>
-          <p:nvPr/>
-        </p:nvSpPr>
-        <p:spPr>
-          <a:xfrm>
-            <a:off x="365760" y="1682496"/>
-            <a:ext cx="5486400" cy="292608"/>
-          </a:xfrm>
-          <a:prstGeom prst="rect">
-            <a:avLst/>
-          </a:prstGeom>
-          <a:noFill/>
-        </p:spPr>
-        <p:txBody>
-          <a:bodyPr wrap="square">
-            <a:spAutoFit/>
-          </a:bodyPr>
-          <a:lstStyle/>
-          <a:p>
-            <a:pPr algn="l"/>
-            <a:r>
-              <a:rPr sz="1200" b="1" i="0">
-                <a:solidFill>
-                  <a:srgbClr val="FFFFFF"/>
-                </a:solidFill>
-                <a:latin typeface="IPAGothic"/>
-              </a:rPr>
-              <a:t>ビジネスモデル（昼夜二毛作）</a:t>
-            </a:r>
-          </a:p>
-        </p:txBody>
-      </p:sp>
-      <p:sp>
-        <p:nvSpPr>
-          <p:cNvPr id="7" name="TextBox 6"/>
-          <p:cNvSpPr txBox="1"/>
-          <p:nvPr/>
-        </p:nvSpPr>
-        <p:spPr>
-          <a:xfrm>
-            <a:off x="365760" y="2029968"/>
-            <a:ext cx="5486400" cy="347472"/>
-          </a:xfrm>
-          <a:prstGeom prst="rect">
-            <a:avLst/>
-          </a:prstGeom>
-          <a:noFill/>
-        </p:spPr>
-        <p:txBody>
-          <a:bodyPr wrap="square">
-            <a:spAutoFit/>
-          </a:bodyPr>
-          <a:lstStyle/>
-          <a:p>
-            <a:pPr algn="l"/>
-            <a:r>
-              <a:rPr sz="1100" b="0" i="0">
-                <a:solidFill>
-                  <a:srgbClr val="1A1A1A"/>
-                </a:solidFill>
-                <a:latin typeface="IPAGothic"/>
-              </a:rPr>
-              <a:t>▸ 昼：出汁定食 1,600〜1,900円 ／ 地元ワーカー向け 平日22日安定集客</a:t>
-            </a:r>
-          </a:p>
-        </p:txBody>
-      </p:sp>
-      <p:sp>
-        <p:nvSpPr>
-          <p:cNvPr id="8" name="TextBox 7"/>
-          <p:cNvSpPr txBox="1"/>
-          <p:nvPr/>
-        </p:nvSpPr>
-        <p:spPr>
-          <a:xfrm>
-            <a:off x="365760" y="2377440"/>
-            <a:ext cx="5486400" cy="347472"/>
-          </a:xfrm>
-          <a:prstGeom prst="rect">
-            <a:avLst/>
-          </a:prstGeom>
-          <a:noFill/>
-        </p:spPr>
-        <p:txBody>
-          <a:bodyPr wrap="square">
-            <a:spAutoFit/>
-          </a:bodyPr>
-          <a:lstStyle/>
-          <a:p>
-            <a:pPr algn="l"/>
-            <a:r>
-              <a:rPr sz="1100" b="0" i="0">
-                <a:solidFill>
-                  <a:srgbClr val="1A1A1A"/>
-                </a:solidFill>
-                <a:latin typeface="IPAGothic"/>
-              </a:rPr>
-              <a:t>▸ 夜：出汁しゃぶ・体験コース 8,000〜12,000円 ／ インバウンド向け体験型</a:t>
-            </a:r>
-          </a:p>
-        </p:txBody>
-      </p:sp>
-      <p:sp>
-        <p:nvSpPr>
-          <p:cNvPr id="9" name="TextBox 8"/>
-          <p:cNvSpPr txBox="1"/>
-          <p:nvPr/>
-        </p:nvSpPr>
-        <p:spPr>
-          <a:xfrm>
-            <a:off x="365760" y="2724912"/>
-            <a:ext cx="5486400" cy="347472"/>
-          </a:xfrm>
-          <a:prstGeom prst="rect">
-            <a:avLst/>
-          </a:prstGeom>
-          <a:noFill/>
-        </p:spPr>
-        <p:txBody>
-          <a:bodyPr wrap="square">
-            <a:spAutoFit/>
-          </a:bodyPr>
-          <a:lstStyle/>
-          <a:p>
-            <a:pPr algn="l"/>
-            <a:r>
-              <a:rPr sz="1100" b="0" i="0">
-                <a:solidFill>
-                  <a:srgbClr val="1A1A1A"/>
-                </a:solidFill>
-                <a:latin typeface="IPAGothic"/>
-              </a:rPr>
-              <a:t>▸ 昆布×本枯れ節×麹発酵のオリジナルブレンド出汁が核心差別化</a:t>
-            </a:r>
-          </a:p>
-        </p:txBody>
-      </p:sp>
-      <p:sp>
-        <p:nvSpPr>
-          <p:cNvPr id="10" name="TextBox 9"/>
-          <p:cNvSpPr txBox="1"/>
-          <p:nvPr/>
-        </p:nvSpPr>
-        <p:spPr>
-          <a:xfrm>
-            <a:off x="365760" y="3072384"/>
-            <a:ext cx="5486400" cy="347472"/>
-          </a:xfrm>
-          <a:prstGeom prst="rect">
-            <a:avLst/>
-          </a:prstGeom>
-          <a:noFill/>
-        </p:spPr>
-        <p:txBody>
-          <a:bodyPr wrap="square">
-            <a:spAutoFit/>
-          </a:bodyPr>
-          <a:lstStyle/>
-          <a:p>
-            <a:pPr algn="l"/>
-            <a:r>
-              <a:rPr sz="1100" b="0" i="0">
-                <a:solidFill>
-                  <a:srgbClr val="1A1A1A"/>
-                </a:solidFill>
-                <a:latin typeface="IPAGothic"/>
-              </a:rPr>
-              <a:t>▸ 25坪・34席（カウンター10席）・4ヶ国語対応・Alipay/WeChatPay導入</a:t>
-            </a:r>
-          </a:p>
-        </p:txBody>
-      </p:sp>
-      <p:sp>
-        <p:nvSpPr>
-          <p:cNvPr id="11" name="TextBox 10"/>
-          <p:cNvSpPr txBox="1"/>
-          <p:nvPr/>
-        </p:nvSpPr>
-        <p:spPr>
-          <a:xfrm>
-            <a:off x="365760" y="3419856"/>
-            <a:ext cx="5486400" cy="347472"/>
-          </a:xfrm>
-          <a:prstGeom prst="rect">
-            <a:avLst/>
-          </a:prstGeom>
-          <a:noFill/>
-        </p:spPr>
-        <p:txBody>
-          <a:bodyPr wrap="square">
-            <a:spAutoFit/>
-          </a:bodyPr>
-          <a:lstStyle/>
-          <a:p>
-            <a:pPr algn="l"/>
-            <a:r>
-              <a:rPr sz="1100" b="0" i="0">
-                <a:solidFill>
-                  <a:srgbClr val="1A1A1A"/>
-                </a:solidFill>
-                <a:latin typeface="IPAGothic"/>
-              </a:rPr>
-              <a:t>▸ 【家賃】60万円/月（25坪・坪2.4万）│ 原価33% │ 人件費28%</a:t>
-            </a:r>
-          </a:p>
-        </p:txBody>
-      </p:sp>
-      <p:sp>
-        <p:nvSpPr>
-          <p:cNvPr id="12" name="Rectangle 11"/>
-          <p:cNvSpPr/>
-          <p:nvPr/>
-        </p:nvSpPr>
-        <p:spPr>
-          <a:xfrm>
-            <a:off x="6217920" y="1645920"/>
-            <a:ext cx="5669280" cy="347472"/>
-          </a:xfrm>
-          <a:prstGeom prst="rect">
-            <a:avLst/>
-          </a:prstGeom>
-          <a:solidFill>
-            <a:srgbClr val="2C4A3E"/>
-          </a:solidFill>
-          <a:ln>
-            <a:noFill/>
-          </a:ln>
-        </p:spPr>
-        <p:style>
-          <a:lnRef idx="1">
-            <a:schemeClr val="accent1"/>
-          </a:lnRef>
-          <a:fillRef idx="3">
-            <a:schemeClr val="accent1"/>
-          </a:fillRef>
-          <a:effectRef idx="2">
-            <a:schemeClr val="accent1"/>
-          </a:effectRef>
-          <a:fontRef idx="minor">
-            <a:schemeClr val="lt1"/>
-          </a:fontRef>
-        </p:style>
-        <p:txBody>
-          <a:bodyPr rtlCol="0" anchor="ctr"/>
-          <a:lstStyle/>
-          <a:p>
-            <a:pPr algn="ctr"/>
-          </a:p>
-        </p:txBody>
-      </p:sp>
-      <p:sp>
-        <p:nvSpPr>
-          <p:cNvPr id="13" name="TextBox 12"/>
-          <p:cNvSpPr txBox="1"/>
-          <p:nvPr/>
-        </p:nvSpPr>
-        <p:spPr>
-          <a:xfrm>
-            <a:off x="6309360" y="1682496"/>
-            <a:ext cx="5486400" cy="292608"/>
-          </a:xfrm>
-          <a:prstGeom prst="rect">
-            <a:avLst/>
-          </a:prstGeom>
-          <a:noFill/>
-        </p:spPr>
-        <p:txBody>
-          <a:bodyPr wrap="square">
-            <a:spAutoFit/>
-          </a:bodyPr>
-          <a:lstStyle/>
-          <a:p>
-            <a:pPr algn="l"/>
-            <a:r>
-              <a:rPr sz="1200" b="1" i="0">
-                <a:solidFill>
-                  <a:srgbClr val="FFFFFF"/>
-                </a:solidFill>
-                <a:latin typeface="IPAGothic"/>
-              </a:rPr>
-              <a:t>展開計画</a:t>
-            </a:r>
-          </a:p>
-        </p:txBody>
-      </p:sp>
-      <p:sp>
-        <p:nvSpPr>
-          <p:cNvPr id="14" name="TextBox 13"/>
-          <p:cNvSpPr txBox="1"/>
-          <p:nvPr/>
-        </p:nvSpPr>
-        <p:spPr>
-          <a:xfrm>
-            <a:off x="6309360" y="2029968"/>
-            <a:ext cx="5486400" cy="347472"/>
-          </a:xfrm>
-          <a:prstGeom prst="rect">
-            <a:avLst/>
-          </a:prstGeom>
-          <a:noFill/>
-        </p:spPr>
-        <p:txBody>
-          <a:bodyPr wrap="square">
-            <a:spAutoFit/>
-          </a:bodyPr>
-          <a:lstStyle/>
-          <a:p>
-            <a:pPr algn="l"/>
-            <a:r>
-              <a:rPr sz="1100" b="0" i="0">
-                <a:solidFill>
-                  <a:srgbClr val="1A1A1A"/>
-                </a:solidFill>
-                <a:latin typeface="IPAGothic"/>
-              </a:rPr>
-              <a:t>▸ Phase1：東京直営 浅草・銀座・上野</a:t>
-            </a:r>
-          </a:p>
-        </p:txBody>
-      </p:sp>
-      <p:sp>
-        <p:nvSpPr>
-          <p:cNvPr id="15" name="TextBox 14"/>
-          <p:cNvSpPr txBox="1"/>
-          <p:nvPr/>
-        </p:nvSpPr>
-        <p:spPr>
-          <a:xfrm>
-            <a:off x="6309360" y="2377440"/>
-            <a:ext cx="5486400" cy="347472"/>
-          </a:xfrm>
-          <a:prstGeom prst="rect">
-            <a:avLst/>
-          </a:prstGeom>
-          <a:noFill/>
-        </p:spPr>
-        <p:txBody>
-          <a:bodyPr wrap="square">
-            <a:spAutoFit/>
-          </a:bodyPr>
-          <a:lstStyle/>
-          <a:p>
-            <a:pPr algn="l"/>
-            <a:r>
-              <a:rPr sz="1100" b="0" i="0">
-                <a:solidFill>
-                  <a:srgbClr val="1A1A1A"/>
-                </a:solidFill>
-                <a:latin typeface="IPAGothic"/>
-              </a:rPr>
-              <a:t>▸ Phase2：関西FC 京都祇園・大阪道頓堀</a:t>
-            </a:r>
-          </a:p>
-        </p:txBody>
-      </p:sp>
-      <p:sp>
-        <p:nvSpPr>
-          <p:cNvPr id="16" name="TextBox 15"/>
-          <p:cNvSpPr txBox="1"/>
-          <p:nvPr/>
-        </p:nvSpPr>
-        <p:spPr>
-          <a:xfrm>
-            <a:off x="6309360" y="2724912"/>
-            <a:ext cx="5486400" cy="347472"/>
-          </a:xfrm>
-          <a:prstGeom prst="rect">
-            <a:avLst/>
-          </a:prstGeom>
-          <a:noFill/>
-        </p:spPr>
-        <p:txBody>
-          <a:bodyPr wrap="square">
-            <a:spAutoFit/>
-          </a:bodyPr>
-          <a:lstStyle/>
-          <a:p>
-            <a:pPr algn="l"/>
-            <a:r>
-              <a:rPr sz="1100" b="0" i="0">
-                <a:solidFill>
-                  <a:srgbClr val="1A1A1A"/>
-                </a:solidFill>
-                <a:latin typeface="IPAGothic"/>
-              </a:rPr>
-              <a:t>▸ Phase3：20店舗（直営5＋FC15）</a:t>
-            </a:r>
-          </a:p>
-        </p:txBody>
-      </p:sp>
-      <p:sp>
-        <p:nvSpPr>
-          <p:cNvPr id="17" name="TextBox 16"/>
-          <p:cNvSpPr txBox="1"/>
-          <p:nvPr/>
-        </p:nvSpPr>
-        <p:spPr>
-          <a:xfrm>
-            <a:off x="6309360" y="3072384"/>
-            <a:ext cx="5486400" cy="347472"/>
-          </a:xfrm>
-          <a:prstGeom prst="rect">
-            <a:avLst/>
-          </a:prstGeom>
-          <a:noFill/>
-        </p:spPr>
-        <p:txBody>
-          <a:bodyPr wrap="square">
-            <a:spAutoFit/>
-          </a:bodyPr>
-          <a:lstStyle/>
-          <a:p>
-            <a:pPr algn="l"/>
-            <a:r>
-              <a:rPr sz="1100" b="0" i="0">
-                <a:solidFill>
-                  <a:srgbClr val="1A1A1A"/>
-                </a:solidFill>
-                <a:latin typeface="IPAGothic"/>
-              </a:rPr>
-              <a:t>▸ Phase4：海外 台湾・シンガポール（DASHI ZEN）</a:t>
-            </a:r>
-          </a:p>
-        </p:txBody>
-      </p:sp>
       <p:pic>
         <p:nvPicPr>
-          <p:cNvPr id="18" name="Picture 17" descr="image.png"/>
+          <p:cNvPr id="4" name="Picture 3" descr="zen_brand_logo.png"/>
           <p:cNvPicPr>
             <a:picLocks noChangeAspect="1"/>
           </p:cNvPicPr>
@@ -15421,8 +15144,8 @@
         </p:blipFill>
         <p:spPr>
           <a:xfrm>
-            <a:off x="274320" y="3474720"/>
-            <a:ext cx="5303520" cy="3017520"/>
+            <a:off x="9875520" y="45720"/>
+            <a:ext cx="2103120" cy="749808"/>
           </a:xfrm>
           <a:prstGeom prst="rect">
             <a:avLst/>
@@ -15431,14 +15154,302 @@
       </p:pic>
       <p:sp>
         <p:nvSpPr>
-          <p:cNvPr id="19" name="Rectangle 18"/>
+          <p:cNvPr id="5" name="TextBox 4"/>
+          <p:cNvSpPr txBox="1"/>
+          <p:nvPr/>
+        </p:nvSpPr>
+        <p:spPr>
+          <a:xfrm>
+            <a:off x="457200" y="1005840"/>
+            <a:ext cx="10972800" cy="502920"/>
+          </a:xfrm>
+          <a:prstGeom prst="rect">
+            <a:avLst/>
+          </a:prstGeom>
+          <a:noFill/>
+        </p:spPr>
+        <p:txBody>
+          <a:bodyPr wrap="square">
+            <a:spAutoFit/>
+          </a:bodyPr>
+          <a:lstStyle/>
+          <a:p>
+            <a:pPr algn="l"/>
+            <a:r>
+              <a:rPr sz="2000" b="1" i="0">
+                <a:solidFill>
+                  <a:srgbClr val="C49A22"/>
+                </a:solidFill>
+                <a:latin typeface="IPAGothic"/>
+              </a:rPr>
+              <a:t>「一杯の出汁が、今日を整える。」</a:t>
+            </a:r>
+          </a:p>
+        </p:txBody>
+      </p:sp>
+      <p:sp>
+        <p:nvSpPr>
+          <p:cNvPr id="6" name="Rectangle 5"/>
           <p:cNvSpPr/>
           <p:nvPr/>
         </p:nvSpPr>
         <p:spPr>
           <a:xfrm>
-            <a:off x="5852160" y="3474720"/>
-            <a:ext cx="1371600" cy="914400"/>
+            <a:off x="274320" y="1645920"/>
+            <a:ext cx="5669280" cy="347472"/>
+          </a:xfrm>
+          <a:prstGeom prst="rect">
+            <a:avLst/>
+          </a:prstGeom>
+          <a:solidFill>
+            <a:srgbClr val="C49A22"/>
+          </a:solidFill>
+          <a:ln>
+            <a:noFill/>
+          </a:ln>
+        </p:spPr>
+        <p:style>
+          <a:lnRef idx="1">
+            <a:schemeClr val="accent1"/>
+          </a:lnRef>
+          <a:fillRef idx="3">
+            <a:schemeClr val="accent1"/>
+          </a:fillRef>
+          <a:effectRef idx="2">
+            <a:schemeClr val="accent1"/>
+          </a:effectRef>
+          <a:fontRef idx="minor">
+            <a:schemeClr val="lt1"/>
+          </a:fontRef>
+        </p:style>
+        <p:txBody>
+          <a:bodyPr rtlCol="0" anchor="ctr"/>
+          <a:lstStyle/>
+          <a:p>
+            <a:pPr algn="ctr"/>
+          </a:p>
+        </p:txBody>
+      </p:sp>
+      <p:sp>
+        <p:nvSpPr>
+          <p:cNvPr id="7" name="TextBox 6"/>
+          <p:cNvSpPr txBox="1"/>
+          <p:nvPr/>
+        </p:nvSpPr>
+        <p:spPr>
+          <a:xfrm>
+            <a:off x="365760" y="1682496"/>
+            <a:ext cx="5486400" cy="292608"/>
+          </a:xfrm>
+          <a:prstGeom prst="rect">
+            <a:avLst/>
+          </a:prstGeom>
+          <a:noFill/>
+        </p:spPr>
+        <p:txBody>
+          <a:bodyPr wrap="square">
+            <a:spAutoFit/>
+          </a:bodyPr>
+          <a:lstStyle/>
+          <a:p>
+            <a:pPr algn="l"/>
+            <a:r>
+              <a:rPr sz="1200" b="1" i="0">
+                <a:solidFill>
+                  <a:srgbClr val="FFFFFF"/>
+                </a:solidFill>
+                <a:latin typeface="IPAGothic"/>
+              </a:rPr>
+              <a:t>ビジネスモデル（昼夜二毛作）</a:t>
+            </a:r>
+          </a:p>
+        </p:txBody>
+      </p:sp>
+      <p:sp>
+        <p:nvSpPr>
+          <p:cNvPr id="8" name="TextBox 7"/>
+          <p:cNvSpPr txBox="1"/>
+          <p:nvPr/>
+        </p:nvSpPr>
+        <p:spPr>
+          <a:xfrm>
+            <a:off x="365760" y="2029968"/>
+            <a:ext cx="5486400" cy="347472"/>
+          </a:xfrm>
+          <a:prstGeom prst="rect">
+            <a:avLst/>
+          </a:prstGeom>
+          <a:noFill/>
+        </p:spPr>
+        <p:txBody>
+          <a:bodyPr wrap="square">
+            <a:spAutoFit/>
+          </a:bodyPr>
+          <a:lstStyle/>
+          <a:p>
+            <a:pPr algn="l"/>
+            <a:r>
+              <a:rPr sz="1100" b="0" i="0">
+                <a:solidFill>
+                  <a:srgbClr val="1A1A1A"/>
+                </a:solidFill>
+                <a:latin typeface="IPAGothic"/>
+              </a:rPr>
+              <a:t>▸ 昼：出汁定食 1,600〜1,900円 ／ 地元ワーカー向け 平日22日安定集客</a:t>
+            </a:r>
+          </a:p>
+        </p:txBody>
+      </p:sp>
+      <p:sp>
+        <p:nvSpPr>
+          <p:cNvPr id="9" name="TextBox 8"/>
+          <p:cNvSpPr txBox="1"/>
+          <p:nvPr/>
+        </p:nvSpPr>
+        <p:spPr>
+          <a:xfrm>
+            <a:off x="365760" y="2377440"/>
+            <a:ext cx="5486400" cy="347472"/>
+          </a:xfrm>
+          <a:prstGeom prst="rect">
+            <a:avLst/>
+          </a:prstGeom>
+          <a:noFill/>
+        </p:spPr>
+        <p:txBody>
+          <a:bodyPr wrap="square">
+            <a:spAutoFit/>
+          </a:bodyPr>
+          <a:lstStyle/>
+          <a:p>
+            <a:pPr algn="l"/>
+            <a:r>
+              <a:rPr sz="1100" b="0" i="0">
+                <a:solidFill>
+                  <a:srgbClr val="1A1A1A"/>
+                </a:solidFill>
+                <a:latin typeface="IPAGothic"/>
+              </a:rPr>
+              <a:t>▸ 夜：出汁しゃぶ・体験コース 8,000〜12,000円 ／ インバウンド向け体験型</a:t>
+            </a:r>
+          </a:p>
+        </p:txBody>
+      </p:sp>
+      <p:sp>
+        <p:nvSpPr>
+          <p:cNvPr id="10" name="TextBox 9"/>
+          <p:cNvSpPr txBox="1"/>
+          <p:nvPr/>
+        </p:nvSpPr>
+        <p:spPr>
+          <a:xfrm>
+            <a:off x="365760" y="2724912"/>
+            <a:ext cx="5486400" cy="347472"/>
+          </a:xfrm>
+          <a:prstGeom prst="rect">
+            <a:avLst/>
+          </a:prstGeom>
+          <a:noFill/>
+        </p:spPr>
+        <p:txBody>
+          <a:bodyPr wrap="square">
+            <a:spAutoFit/>
+          </a:bodyPr>
+          <a:lstStyle/>
+          <a:p>
+            <a:pPr algn="l"/>
+            <a:r>
+              <a:rPr sz="1100" b="0" i="0">
+                <a:solidFill>
+                  <a:srgbClr val="1A1A1A"/>
+                </a:solidFill>
+                <a:latin typeface="IPAGothic"/>
+              </a:rPr>
+              <a:t>▸ 昆布×本枯れ節×麹発酵のオリジナルブレンド出汁が核心差別化</a:t>
+            </a:r>
+          </a:p>
+        </p:txBody>
+      </p:sp>
+      <p:sp>
+        <p:nvSpPr>
+          <p:cNvPr id="11" name="TextBox 10"/>
+          <p:cNvSpPr txBox="1"/>
+          <p:nvPr/>
+        </p:nvSpPr>
+        <p:spPr>
+          <a:xfrm>
+            <a:off x="365760" y="3072384"/>
+            <a:ext cx="5486400" cy="347472"/>
+          </a:xfrm>
+          <a:prstGeom prst="rect">
+            <a:avLst/>
+          </a:prstGeom>
+          <a:noFill/>
+        </p:spPr>
+        <p:txBody>
+          <a:bodyPr wrap="square">
+            <a:spAutoFit/>
+          </a:bodyPr>
+          <a:lstStyle/>
+          <a:p>
+            <a:pPr algn="l"/>
+            <a:r>
+              <a:rPr sz="1100" b="0" i="0">
+                <a:solidFill>
+                  <a:srgbClr val="1A1A1A"/>
+                </a:solidFill>
+                <a:latin typeface="IPAGothic"/>
+              </a:rPr>
+              <a:t>▸ 25坪・34席（カウンター10席）・4ヶ国語対応・Alipay/WeChatPay導入</a:t>
+            </a:r>
+          </a:p>
+        </p:txBody>
+      </p:sp>
+      <p:sp>
+        <p:nvSpPr>
+          <p:cNvPr id="12" name="TextBox 11"/>
+          <p:cNvSpPr txBox="1"/>
+          <p:nvPr/>
+        </p:nvSpPr>
+        <p:spPr>
+          <a:xfrm>
+            <a:off x="365760" y="3419856"/>
+            <a:ext cx="5486400" cy="347472"/>
+          </a:xfrm>
+          <a:prstGeom prst="rect">
+            <a:avLst/>
+          </a:prstGeom>
+          <a:noFill/>
+        </p:spPr>
+        <p:txBody>
+          <a:bodyPr wrap="square">
+            <a:spAutoFit/>
+          </a:bodyPr>
+          <a:lstStyle/>
+          <a:p>
+            <a:pPr algn="l"/>
+            <a:r>
+              <a:rPr sz="1100" b="0" i="0">
+                <a:solidFill>
+                  <a:srgbClr val="1A1A1A"/>
+                </a:solidFill>
+                <a:latin typeface="IPAGothic"/>
+              </a:rPr>
+              <a:t>▸ 【家賃】60万円/月（25坪・坪2.4万）│ 原価33% │ 人件費28%</a:t>
+            </a:r>
+          </a:p>
+        </p:txBody>
+      </p:sp>
+      <p:sp>
+        <p:nvSpPr>
+          <p:cNvPr id="13" name="Rectangle 12"/>
+          <p:cNvSpPr/>
+          <p:nvPr/>
+        </p:nvSpPr>
+        <p:spPr>
+          <a:xfrm>
+            <a:off x="6217920" y="1645920"/>
+            <a:ext cx="5669280" cy="347472"/>
           </a:xfrm>
           <a:prstGeom prst="rect">
             <a:avLst/>
@@ -15474,14 +15485,14 @@
       </p:sp>
       <p:sp>
         <p:nvSpPr>
-          <p:cNvPr id="20" name="TextBox 19"/>
+          <p:cNvPr id="14" name="TextBox 13"/>
           <p:cNvSpPr txBox="1"/>
           <p:nvPr/>
         </p:nvSpPr>
         <p:spPr>
           <a:xfrm>
-            <a:off x="5852160" y="3520440"/>
-            <a:ext cx="1371600" cy="502920"/>
+            <a:off x="6309360" y="1682496"/>
+            <a:ext cx="5486400" cy="292608"/>
           </a:xfrm>
           <a:prstGeom prst="rect">
             <a:avLst/>
@@ -15494,29 +15505,29 @@
           </a:bodyPr>
           <a:lstStyle/>
           <a:p>
-            <a:pPr algn="ctr"/>
-            <a:r>
-              <a:rPr sz="1800" b="1" i="0">
-                <a:solidFill>
-                  <a:srgbClr val="C49A22"/>
-                </a:solidFill>
-                <a:latin typeface="IPAGothic"/>
-              </a:rPr>
-              <a:t>960万円</a:t>
-            </a:r>
-          </a:p>
-        </p:txBody>
-      </p:sp>
-      <p:sp>
-        <p:nvSpPr>
-          <p:cNvPr id="21" name="TextBox 20"/>
+            <a:pPr algn="l"/>
+            <a:r>
+              <a:rPr sz="1200" b="1" i="0">
+                <a:solidFill>
+                  <a:srgbClr val="FFFFFF"/>
+                </a:solidFill>
+                <a:latin typeface="IPAGothic"/>
+              </a:rPr>
+              <a:t>展開計画</a:t>
+            </a:r>
+          </a:p>
+        </p:txBody>
+      </p:sp>
+      <p:sp>
+        <p:nvSpPr>
+          <p:cNvPr id="15" name="TextBox 14"/>
           <p:cNvSpPr txBox="1"/>
           <p:nvPr/>
         </p:nvSpPr>
         <p:spPr>
           <a:xfrm>
-            <a:off x="5852160" y="4041648"/>
-            <a:ext cx="1371600" cy="320040"/>
+            <a:off x="6309360" y="2029968"/>
+            <a:ext cx="5486400" cy="347472"/>
           </a:xfrm>
           <a:prstGeom prst="rect">
             <a:avLst/>
@@ -15529,28 +15540,157 @@
           </a:bodyPr>
           <a:lstStyle/>
           <a:p>
-            <a:pPr algn="ctr"/>
-            <a:r>
-              <a:rPr sz="900" b="0" i="0">
-                <a:solidFill>
-                  <a:srgbClr val="FFFFFF"/>
-                </a:solidFill>
-                <a:latin typeface="IPAGothic"/>
-              </a:rPr>
-              <a:t>月次売上</a:t>
-            </a:r>
-          </a:p>
-        </p:txBody>
-      </p:sp>
-      <p:sp>
-        <p:nvSpPr>
-          <p:cNvPr id="22" name="Rectangle 21"/>
+            <a:pPr algn="l"/>
+            <a:r>
+              <a:rPr sz="1100" b="0" i="0">
+                <a:solidFill>
+                  <a:srgbClr val="1A1A1A"/>
+                </a:solidFill>
+                <a:latin typeface="IPAGothic"/>
+              </a:rPr>
+              <a:t>▸ Phase1：東京直営 浅草・銀座・上野</a:t>
+            </a:r>
+          </a:p>
+        </p:txBody>
+      </p:sp>
+      <p:sp>
+        <p:nvSpPr>
+          <p:cNvPr id="16" name="TextBox 15"/>
+          <p:cNvSpPr txBox="1"/>
+          <p:nvPr/>
+        </p:nvSpPr>
+        <p:spPr>
+          <a:xfrm>
+            <a:off x="6309360" y="2377440"/>
+            <a:ext cx="5486400" cy="347472"/>
+          </a:xfrm>
+          <a:prstGeom prst="rect">
+            <a:avLst/>
+          </a:prstGeom>
+          <a:noFill/>
+        </p:spPr>
+        <p:txBody>
+          <a:bodyPr wrap="square">
+            <a:spAutoFit/>
+          </a:bodyPr>
+          <a:lstStyle/>
+          <a:p>
+            <a:pPr algn="l"/>
+            <a:r>
+              <a:rPr sz="1100" b="0" i="0">
+                <a:solidFill>
+                  <a:srgbClr val="1A1A1A"/>
+                </a:solidFill>
+                <a:latin typeface="IPAGothic"/>
+              </a:rPr>
+              <a:t>▸ Phase2：関西FC 京都祇園・大阪道頓堀</a:t>
+            </a:r>
+          </a:p>
+        </p:txBody>
+      </p:sp>
+      <p:sp>
+        <p:nvSpPr>
+          <p:cNvPr id="17" name="TextBox 16"/>
+          <p:cNvSpPr txBox="1"/>
+          <p:nvPr/>
+        </p:nvSpPr>
+        <p:spPr>
+          <a:xfrm>
+            <a:off x="6309360" y="2724912"/>
+            <a:ext cx="5486400" cy="347472"/>
+          </a:xfrm>
+          <a:prstGeom prst="rect">
+            <a:avLst/>
+          </a:prstGeom>
+          <a:noFill/>
+        </p:spPr>
+        <p:txBody>
+          <a:bodyPr wrap="square">
+            <a:spAutoFit/>
+          </a:bodyPr>
+          <a:lstStyle/>
+          <a:p>
+            <a:pPr algn="l"/>
+            <a:r>
+              <a:rPr sz="1100" b="0" i="0">
+                <a:solidFill>
+                  <a:srgbClr val="1A1A1A"/>
+                </a:solidFill>
+                <a:latin typeface="IPAGothic"/>
+              </a:rPr>
+              <a:t>▸ Phase3：20店舗（直営5＋FC15）</a:t>
+            </a:r>
+          </a:p>
+        </p:txBody>
+      </p:sp>
+      <p:sp>
+        <p:nvSpPr>
+          <p:cNvPr id="18" name="TextBox 17"/>
+          <p:cNvSpPr txBox="1"/>
+          <p:nvPr/>
+        </p:nvSpPr>
+        <p:spPr>
+          <a:xfrm>
+            <a:off x="6309360" y="3072384"/>
+            <a:ext cx="5486400" cy="347472"/>
+          </a:xfrm>
+          <a:prstGeom prst="rect">
+            <a:avLst/>
+          </a:prstGeom>
+          <a:noFill/>
+        </p:spPr>
+        <p:txBody>
+          <a:bodyPr wrap="square">
+            <a:spAutoFit/>
+          </a:bodyPr>
+          <a:lstStyle/>
+          <a:p>
+            <a:pPr algn="l"/>
+            <a:r>
+              <a:rPr sz="1100" b="0" i="0">
+                <a:solidFill>
+                  <a:srgbClr val="1A1A1A"/>
+                </a:solidFill>
+                <a:latin typeface="IPAGothic"/>
+              </a:rPr>
+              <a:t>▸ Phase4：海外 台湾・シンガポール（DASHI ZEN）</a:t>
+            </a:r>
+          </a:p>
+        </p:txBody>
+      </p:sp>
+      <p:pic>
+        <p:nvPicPr>
+          <p:cNvPr id="19" name="Picture 18" descr="image.png"/>
+          <p:cNvPicPr>
+            <a:picLocks noChangeAspect="1"/>
+          </p:cNvPicPr>
+          <p:nvPr/>
+        </p:nvPicPr>
+        <p:blipFill>
+          <a:blip r:embed="rId3"/>
+          <a:stretch>
+            <a:fillRect/>
+          </a:stretch>
+        </p:blipFill>
+        <p:spPr>
+          <a:xfrm>
+            <a:off x="274320" y="3474720"/>
+            <a:ext cx="5303520" cy="3017520"/>
+          </a:xfrm>
+          <a:prstGeom prst="rect">
+            <a:avLst/>
+          </a:prstGeom>
+        </p:spPr>
+      </p:pic>
+      <p:sp>
+        <p:nvSpPr>
+          <p:cNvPr id="20" name="Rectangle 19"/>
           <p:cNvSpPr/>
           <p:nvPr/>
         </p:nvSpPr>
         <p:spPr>
           <a:xfrm>
-            <a:off x="7406640" y="3474720"/>
+            <a:off x="5852160" y="3474720"/>
             <a:ext cx="1371600" cy="914400"/>
           </a:xfrm>
           <a:prstGeom prst="rect">
@@ -15587,13 +15727,13 @@
       </p:sp>
       <p:sp>
         <p:nvSpPr>
-          <p:cNvPr id="23" name="TextBox 22"/>
+          <p:cNvPr id="21" name="TextBox 20"/>
           <p:cNvSpPr txBox="1"/>
           <p:nvPr/>
         </p:nvSpPr>
         <p:spPr>
           <a:xfrm>
-            <a:off x="7406640" y="3520440"/>
+            <a:off x="5852160" y="3520440"/>
             <a:ext cx="1371600" cy="502920"/>
           </a:xfrm>
           <a:prstGeom prst="rect">
@@ -15615,20 +15755,20 @@
                 </a:solidFill>
                 <a:latin typeface="IPAGothic"/>
               </a:rPr>
-              <a:t>144万円</a:t>
-            </a:r>
-          </a:p>
-        </p:txBody>
-      </p:sp>
-      <p:sp>
-        <p:nvSpPr>
-          <p:cNvPr id="24" name="TextBox 23"/>
+              <a:t>960万円</a:t>
+            </a:r>
+          </a:p>
+        </p:txBody>
+      </p:sp>
+      <p:sp>
+        <p:nvSpPr>
+          <p:cNvPr id="22" name="TextBox 21"/>
           <p:cNvSpPr txBox="1"/>
           <p:nvPr/>
         </p:nvSpPr>
         <p:spPr>
           <a:xfrm>
-            <a:off x="7406640" y="4041648"/>
+            <a:off x="5852160" y="4041648"/>
             <a:ext cx="1371600" cy="320040"/>
           </a:xfrm>
           <a:prstGeom prst="rect">
@@ -15650,20 +15790,20 @@
                 </a:solidFill>
                 <a:latin typeface="IPAGothic"/>
               </a:rPr>
-              <a:t>営業利益</a:t>
-            </a:r>
-          </a:p>
-        </p:txBody>
-      </p:sp>
-      <p:sp>
-        <p:nvSpPr>
-          <p:cNvPr id="25" name="Rectangle 24"/>
+              <a:t>月次売上</a:t>
+            </a:r>
+          </a:p>
+        </p:txBody>
+      </p:sp>
+      <p:sp>
+        <p:nvSpPr>
+          <p:cNvPr id="23" name="Rectangle 22"/>
           <p:cNvSpPr/>
           <p:nvPr/>
         </p:nvSpPr>
         <p:spPr>
           <a:xfrm>
-            <a:off x="8961120" y="3474720"/>
+            <a:off x="7406640" y="3474720"/>
             <a:ext cx="1371600" cy="914400"/>
           </a:xfrm>
           <a:prstGeom prst="rect">
@@ -15700,13 +15840,13 @@
       </p:sp>
       <p:sp>
         <p:nvSpPr>
-          <p:cNvPr id="26" name="TextBox 25"/>
+          <p:cNvPr id="24" name="TextBox 23"/>
           <p:cNvSpPr txBox="1"/>
           <p:nvPr/>
         </p:nvSpPr>
         <p:spPr>
           <a:xfrm>
-            <a:off x="8961120" y="3520440"/>
+            <a:off x="7406640" y="3520440"/>
             <a:ext cx="1371600" cy="502920"/>
           </a:xfrm>
           <a:prstGeom prst="rect">
@@ -15728,20 +15868,20 @@
                 </a:solidFill>
                 <a:latin typeface="IPAGothic"/>
               </a:rPr>
-              <a:t>15%</a:t>
-            </a:r>
-          </a:p>
-        </p:txBody>
-      </p:sp>
-      <p:sp>
-        <p:nvSpPr>
-          <p:cNvPr id="27" name="TextBox 26"/>
+              <a:t>144万円</a:t>
+            </a:r>
+          </a:p>
+        </p:txBody>
+      </p:sp>
+      <p:sp>
+        <p:nvSpPr>
+          <p:cNvPr id="25" name="TextBox 24"/>
           <p:cNvSpPr txBox="1"/>
           <p:nvPr/>
         </p:nvSpPr>
         <p:spPr>
           <a:xfrm>
-            <a:off x="8961120" y="4041648"/>
+            <a:off x="7406640" y="4041648"/>
             <a:ext cx="1371600" cy="320040"/>
           </a:xfrm>
           <a:prstGeom prst="rect">
@@ -15763,20 +15903,20 @@
                 </a:solidFill>
                 <a:latin typeface="IPAGothic"/>
               </a:rPr>
-              <a:t>利益率</a:t>
-            </a:r>
-          </a:p>
-        </p:txBody>
-      </p:sp>
-      <p:sp>
-        <p:nvSpPr>
-          <p:cNvPr id="28" name="Rectangle 27"/>
+              <a:t>営業利益</a:t>
+            </a:r>
+          </a:p>
+        </p:txBody>
+      </p:sp>
+      <p:sp>
+        <p:nvSpPr>
+          <p:cNvPr id="26" name="Rectangle 25"/>
           <p:cNvSpPr/>
           <p:nvPr/>
         </p:nvSpPr>
         <p:spPr>
           <a:xfrm>
-            <a:off x="10515600" y="3474720"/>
+            <a:off x="8961120" y="3474720"/>
             <a:ext cx="1371600" cy="914400"/>
           </a:xfrm>
           <a:prstGeom prst="rect">
@@ -15813,13 +15953,13 @@
       </p:sp>
       <p:sp>
         <p:nvSpPr>
-          <p:cNvPr id="29" name="TextBox 28"/>
+          <p:cNvPr id="27" name="TextBox 26"/>
           <p:cNvSpPr txBox="1"/>
           <p:nvPr/>
         </p:nvSpPr>
         <p:spPr>
           <a:xfrm>
-            <a:off x="10515600" y="3520440"/>
+            <a:off x="8961120" y="3520440"/>
             <a:ext cx="1371600" cy="502920"/>
           </a:xfrm>
           <a:prstGeom prst="rect">
@@ -15841,20 +15981,20 @@
                 </a:solidFill>
                 <a:latin typeface="IPAGothic"/>
               </a:rPr>
-              <a:t>18〜24ヶ月</a:t>
-            </a:r>
-          </a:p>
-        </p:txBody>
-      </p:sp>
-      <p:sp>
-        <p:nvSpPr>
-          <p:cNvPr id="30" name="TextBox 29"/>
+              <a:t>15%</a:t>
+            </a:r>
+          </a:p>
+        </p:txBody>
+      </p:sp>
+      <p:sp>
+        <p:nvSpPr>
+          <p:cNvPr id="28" name="TextBox 27"/>
           <p:cNvSpPr txBox="1"/>
           <p:nvPr/>
         </p:nvSpPr>
         <p:spPr>
           <a:xfrm>
-            <a:off x="10515600" y="4041648"/>
+            <a:off x="8961120" y="4041648"/>
             <a:ext cx="1371600" cy="320040"/>
           </a:xfrm>
           <a:prstGeom prst="rect">
@@ -15876,6 +16016,119 @@
                 </a:solidFill>
                 <a:latin typeface="IPAGothic"/>
               </a:rPr>
+              <a:t>利益率</a:t>
+            </a:r>
+          </a:p>
+        </p:txBody>
+      </p:sp>
+      <p:sp>
+        <p:nvSpPr>
+          <p:cNvPr id="29" name="Rectangle 28"/>
+          <p:cNvSpPr/>
+          <p:nvPr/>
+        </p:nvSpPr>
+        <p:spPr>
+          <a:xfrm>
+            <a:off x="10515600" y="3474720"/>
+            <a:ext cx="1371600" cy="914400"/>
+          </a:xfrm>
+          <a:prstGeom prst="rect">
+            <a:avLst/>
+          </a:prstGeom>
+          <a:solidFill>
+            <a:srgbClr val="2C4A3E"/>
+          </a:solidFill>
+          <a:ln>
+            <a:noFill/>
+          </a:ln>
+        </p:spPr>
+        <p:style>
+          <a:lnRef idx="1">
+            <a:schemeClr val="accent1"/>
+          </a:lnRef>
+          <a:fillRef idx="3">
+            <a:schemeClr val="accent1"/>
+          </a:fillRef>
+          <a:effectRef idx="2">
+            <a:schemeClr val="accent1"/>
+          </a:effectRef>
+          <a:fontRef idx="minor">
+            <a:schemeClr val="lt1"/>
+          </a:fontRef>
+        </p:style>
+        <p:txBody>
+          <a:bodyPr rtlCol="0" anchor="ctr"/>
+          <a:lstStyle/>
+          <a:p>
+            <a:pPr algn="ctr"/>
+          </a:p>
+        </p:txBody>
+      </p:sp>
+      <p:sp>
+        <p:nvSpPr>
+          <p:cNvPr id="30" name="TextBox 29"/>
+          <p:cNvSpPr txBox="1"/>
+          <p:nvPr/>
+        </p:nvSpPr>
+        <p:spPr>
+          <a:xfrm>
+            <a:off x="10515600" y="3520440"/>
+            <a:ext cx="1371600" cy="502920"/>
+          </a:xfrm>
+          <a:prstGeom prst="rect">
+            <a:avLst/>
+          </a:prstGeom>
+          <a:noFill/>
+        </p:spPr>
+        <p:txBody>
+          <a:bodyPr wrap="square">
+            <a:spAutoFit/>
+          </a:bodyPr>
+          <a:lstStyle/>
+          <a:p>
+            <a:pPr algn="ctr"/>
+            <a:r>
+              <a:rPr sz="1800" b="1" i="0">
+                <a:solidFill>
+                  <a:srgbClr val="C49A22"/>
+                </a:solidFill>
+                <a:latin typeface="IPAGothic"/>
+              </a:rPr>
+              <a:t>18〜24ヶ月</a:t>
+            </a:r>
+          </a:p>
+        </p:txBody>
+      </p:sp>
+      <p:sp>
+        <p:nvSpPr>
+          <p:cNvPr id="31" name="TextBox 30"/>
+          <p:cNvSpPr txBox="1"/>
+          <p:nvPr/>
+        </p:nvSpPr>
+        <p:spPr>
+          <a:xfrm>
+            <a:off x="10515600" y="4041648"/>
+            <a:ext cx="1371600" cy="320040"/>
+          </a:xfrm>
+          <a:prstGeom prst="rect">
+            <a:avLst/>
+          </a:prstGeom>
+          <a:noFill/>
+        </p:spPr>
+        <p:txBody>
+          <a:bodyPr wrap="square">
+            <a:spAutoFit/>
+          </a:bodyPr>
+          <a:lstStyle/>
+          <a:p>
+            <a:pPr algn="ctr"/>
+            <a:r>
+              <a:rPr sz="900" b="0" i="0">
+                <a:solidFill>
+                  <a:srgbClr val="FFFFFF"/>
+                </a:solidFill>
+                <a:latin typeface="IPAGothic"/>
+              </a:rPr>
               <a:t>投資回収</a:t>
             </a:r>
           </a:p>
@@ -15883,7 +16136,7 @@
       </p:sp>
       <p:sp>
         <p:nvSpPr>
-          <p:cNvPr id="31" name="Rectangle 30"/>
+          <p:cNvPr id="32" name="Rectangle 31"/>
           <p:cNvSpPr/>
           <p:nvPr/>
         </p:nvSpPr>
@@ -15926,7 +16179,7 @@
       </p:sp>
       <p:sp>
         <p:nvSpPr>
-          <p:cNvPr id="32" name="TextBox 31"/>
+          <p:cNvPr id="33" name="TextBox 32"/>
           <p:cNvSpPr txBox="1"/>
           <p:nvPr/>
         </p:nvSpPr>
@@ -15961,7 +16214,7 @@
       </p:sp>
       <p:sp>
         <p:nvSpPr>
-          <p:cNvPr id="33" name="TextBox 32"/>
+          <p:cNvPr id="34" name="TextBox 33"/>
           <p:cNvSpPr txBox="1"/>
           <p:nvPr/>
         </p:nvSpPr>
@@ -16120,7 +16373,7 @@
         <p:spPr>
           <a:xfrm>
             <a:off x="365760" y="91440"/>
-            <a:ext cx="10972800" cy="777240"/>
+            <a:ext cx="9601200" cy="777240"/>
           </a:xfrm>
           <a:prstGeom prst="rect">
             <a:avLst/>
@@ -16146,9 +16399,33 @@
           </a:p>
         </p:txBody>
       </p:sp>
-      <p:sp>
-        <p:nvSpPr>
-          <p:cNvPr id="4" name="TextBox 3"/>
+      <p:pic>
+        <p:nvPicPr>
+          <p:cNvPr id="4" name="Picture 3" descr="zen_brand_logo.png"/>
+          <p:cNvPicPr>
+            <a:picLocks noChangeAspect="1"/>
+          </p:cNvPicPr>
+          <p:nvPr/>
+        </p:nvPicPr>
+        <p:blipFill>
+          <a:blip r:embed="rId2"/>
+          <a:stretch>
+            <a:fillRect/>
+          </a:stretch>
+        </p:blipFill>
+        <p:spPr>
+          <a:xfrm>
+            <a:off x="9875520" y="45720"/>
+            <a:ext cx="2103120" cy="749808"/>
+          </a:xfrm>
+          <a:prstGeom prst="rect">
+            <a:avLst/>
+          </a:prstGeom>
+        </p:spPr>
+      </p:pic>
+      <p:sp>
+        <p:nvSpPr>
+          <p:cNvPr id="5" name="TextBox 4"/>
           <p:cNvSpPr txBox="1"/>
           <p:nvPr/>
         </p:nvSpPr>
@@ -16183,7 +16460,7 @@
       </p:sp>
       <p:sp>
         <p:nvSpPr>
-          <p:cNvPr id="5" name="Rectangle 4"/>
+          <p:cNvPr id="6" name="Rectangle 5"/>
           <p:cNvSpPr/>
           <p:nvPr/>
         </p:nvSpPr>
@@ -16226,7 +16503,7 @@
       </p:sp>
       <p:sp>
         <p:nvSpPr>
-          <p:cNvPr id="6" name="TextBox 5"/>
+          <p:cNvPr id="7" name="TextBox 6"/>
           <p:cNvSpPr txBox="1"/>
           <p:nvPr/>
         </p:nvSpPr>
@@ -16261,7 +16538,7 @@
       </p:sp>
       <p:sp>
         <p:nvSpPr>
-          <p:cNvPr id="7" name="TextBox 6"/>
+          <p:cNvPr id="8" name="TextBox 7"/>
           <p:cNvSpPr txBox="1"/>
           <p:nvPr/>
         </p:nvSpPr>
@@ -16296,7 +16573,7 @@
       </p:sp>
       <p:sp>
         <p:nvSpPr>
-          <p:cNvPr id="8" name="TextBox 7"/>
+          <p:cNvPr id="9" name="TextBox 8"/>
           <p:cNvSpPr txBox="1"/>
           <p:nvPr/>
         </p:nvSpPr>
@@ -16331,7 +16608,7 @@
       </p:sp>
       <p:sp>
         <p:nvSpPr>
-          <p:cNvPr id="9" name="TextBox 8"/>
+          <p:cNvPr id="10" name="TextBox 9"/>
           <p:cNvSpPr txBox="1"/>
           <p:nvPr/>
         </p:nvSpPr>
@@ -16366,7 +16643,7 @@
       </p:sp>
       <p:sp>
         <p:nvSpPr>
-          <p:cNvPr id="10" name="TextBox 9"/>
+          <p:cNvPr id="11" name="TextBox 10"/>
           <p:cNvSpPr txBox="1"/>
           <p:nvPr/>
         </p:nvSpPr>
@@ -16401,7 +16678,7 @@
       </p:sp>
       <p:sp>
         <p:nvSpPr>
-          <p:cNvPr id="11" name="TextBox 10"/>
+          <p:cNvPr id="12" name="TextBox 11"/>
           <p:cNvSpPr txBox="1"/>
           <p:nvPr/>
         </p:nvSpPr>
@@ -16436,7 +16713,7 @@
       </p:sp>
       <p:sp>
         <p:nvSpPr>
-          <p:cNvPr id="12" name="Rectangle 11"/>
+          <p:cNvPr id="13" name="Rectangle 12"/>
           <p:cNvSpPr/>
           <p:nvPr/>
         </p:nvSpPr>
@@ -16479,7 +16756,7 @@
       </p:sp>
       <p:sp>
         <p:nvSpPr>
-          <p:cNvPr id="13" name="TextBox 12"/>
+          <p:cNvPr id="14" name="TextBox 13"/>
           <p:cNvSpPr txBox="1"/>
           <p:nvPr/>
         </p:nvSpPr>
@@ -16514,7 +16791,7 @@
       </p:sp>
       <p:sp>
         <p:nvSpPr>
-          <p:cNvPr id="14" name="TextBox 13"/>
+          <p:cNvPr id="15" name="TextBox 14"/>
           <p:cNvSpPr txBox="1"/>
           <p:nvPr/>
         </p:nvSpPr>
@@ -16549,7 +16826,7 @@
       </p:sp>
       <p:sp>
         <p:nvSpPr>
-          <p:cNvPr id="15" name="TextBox 14"/>
+          <p:cNvPr id="16" name="TextBox 15"/>
           <p:cNvSpPr txBox="1"/>
           <p:nvPr/>
         </p:nvSpPr>
@@ -16584,7 +16861,7 @@
       </p:sp>
       <p:sp>
         <p:nvSpPr>
-          <p:cNvPr id="16" name="TextBox 15"/>
+          <p:cNvPr id="17" name="TextBox 16"/>
           <p:cNvSpPr txBox="1"/>
           <p:nvPr/>
         </p:nvSpPr>
@@ -16619,7 +16896,7 @@
       </p:sp>
       <p:sp>
         <p:nvSpPr>
-          <p:cNvPr id="17" name="TextBox 16"/>
+          <p:cNvPr id="18" name="TextBox 17"/>
           <p:cNvSpPr txBox="1"/>
           <p:nvPr/>
         </p:nvSpPr>
@@ -16654,7 +16931,7 @@
       </p:sp>
       <p:sp>
         <p:nvSpPr>
-          <p:cNvPr id="18" name="Rectangle 17"/>
+          <p:cNvPr id="19" name="Rectangle 18"/>
           <p:cNvSpPr/>
           <p:nvPr/>
         </p:nvSpPr>
@@ -16697,7 +16974,7 @@
       </p:sp>
       <p:sp>
         <p:nvSpPr>
-          <p:cNvPr id="19" name="TextBox 18"/>
+          <p:cNvPr id="20" name="TextBox 19"/>
           <p:cNvSpPr txBox="1"/>
           <p:nvPr/>
         </p:nvSpPr>
@@ -16732,7 +17009,7 @@
       </p:sp>
       <p:sp>
         <p:nvSpPr>
-          <p:cNvPr id="20" name="TextBox 19"/>
+          <p:cNvPr id="21" name="TextBox 20"/>
           <p:cNvSpPr txBox="1"/>
           <p:nvPr/>
         </p:nvSpPr>
@@ -16767,7 +17044,7 @@
       </p:sp>
       <p:sp>
         <p:nvSpPr>
-          <p:cNvPr id="21" name="Rectangle 20"/>
+          <p:cNvPr id="22" name="Rectangle 21"/>
           <p:cNvSpPr/>
           <p:nvPr/>
         </p:nvSpPr>
@@ -16810,7 +17087,7 @@
       </p:sp>
       <p:sp>
         <p:nvSpPr>
-          <p:cNvPr id="22" name="TextBox 21"/>
+          <p:cNvPr id="23" name="TextBox 22"/>
           <p:cNvSpPr txBox="1"/>
           <p:nvPr/>
         </p:nvSpPr>
@@ -16845,7 +17122,7 @@
       </p:sp>
       <p:sp>
         <p:nvSpPr>
-          <p:cNvPr id="23" name="TextBox 22"/>
+          <p:cNvPr id="24" name="TextBox 23"/>
           <p:cNvSpPr txBox="1"/>
           <p:nvPr/>
         </p:nvSpPr>
@@ -16880,7 +17157,7 @@
       </p:sp>
       <p:sp>
         <p:nvSpPr>
-          <p:cNvPr id="24" name="Rectangle 23"/>
+          <p:cNvPr id="25" name="Rectangle 24"/>
           <p:cNvSpPr/>
           <p:nvPr/>
         </p:nvSpPr>
@@ -16923,7 +17200,7 @@
       </p:sp>
       <p:sp>
         <p:nvSpPr>
-          <p:cNvPr id="25" name="TextBox 24"/>
+          <p:cNvPr id="26" name="TextBox 25"/>
           <p:cNvSpPr txBox="1"/>
           <p:nvPr/>
         </p:nvSpPr>
@@ -16958,7 +17235,7 @@
       </p:sp>
       <p:sp>
         <p:nvSpPr>
-          <p:cNvPr id="26" name="TextBox 25"/>
+          <p:cNvPr id="27" name="TextBox 26"/>
           <p:cNvSpPr txBox="1"/>
           <p:nvPr/>
         </p:nvSpPr>
@@ -16993,7 +17270,7 @@
       </p:sp>
       <p:sp>
         <p:nvSpPr>
-          <p:cNvPr id="27" name="Rectangle 26"/>
+          <p:cNvPr id="28" name="Rectangle 27"/>
           <p:cNvSpPr/>
           <p:nvPr/>
         </p:nvSpPr>
@@ -17036,7 +17313,7 @@
       </p:sp>
       <p:sp>
         <p:nvSpPr>
-          <p:cNvPr id="28" name="TextBox 27"/>
+          <p:cNvPr id="29" name="TextBox 28"/>
           <p:cNvSpPr txBox="1"/>
           <p:nvPr/>
         </p:nvSpPr>
@@ -17071,7 +17348,7 @@
       </p:sp>
       <p:sp>
         <p:nvSpPr>
-          <p:cNvPr id="29" name="TextBox 28"/>
+          <p:cNvPr id="30" name="TextBox 29"/>
           <p:cNvSpPr txBox="1"/>
           <p:nvPr/>
         </p:nvSpPr>
@@ -17106,7 +17383,7 @@
       </p:sp>
       <p:sp>
         <p:nvSpPr>
-          <p:cNvPr id="30" name="Rectangle 29"/>
+          <p:cNvPr id="31" name="Rectangle 30"/>
           <p:cNvSpPr/>
           <p:nvPr/>
         </p:nvSpPr>
@@ -17149,7 +17426,7 @@
       </p:sp>
       <p:sp>
         <p:nvSpPr>
-          <p:cNvPr id="31" name="TextBox 30"/>
+          <p:cNvPr id="32" name="TextBox 31"/>
           <p:cNvSpPr txBox="1"/>
           <p:nvPr/>
         </p:nvSpPr>
@@ -17184,7 +17461,7 @@
       </p:sp>
       <p:sp>
         <p:nvSpPr>
-          <p:cNvPr id="32" name="TextBox 31"/>
+          <p:cNvPr id="33" name="TextBox 32"/>
           <p:cNvSpPr txBox="1"/>
           <p:nvPr/>
         </p:nvSpPr>
@@ -17219,7 +17496,7 @@
       </p:sp>
       <p:sp>
         <p:nvSpPr>
-          <p:cNvPr id="33" name="TextBox 32"/>
+          <p:cNvPr id="34" name="TextBox 33"/>
           <p:cNvSpPr txBox="1"/>
           <p:nvPr/>
         </p:nvSpPr>
@@ -17254,7 +17531,7 @@
       </p:sp>
       <p:sp>
         <p:nvSpPr>
-          <p:cNvPr id="34" name="TextBox 33"/>
+          <p:cNvPr id="35" name="TextBox 34"/>
           <p:cNvSpPr txBox="1"/>
           <p:nvPr/>
         </p:nvSpPr>
@@ -17365,7 +17642,7 @@
         <p:spPr>
           <a:xfrm>
             <a:off x="365760" y="91440"/>
-            <a:ext cx="10972800" cy="777240"/>
+            <a:ext cx="9601200" cy="777240"/>
           </a:xfrm>
           <a:prstGeom prst="rect">
             <a:avLst/>
@@ -17391,550 +17668,9 @@
           </a:p>
         </p:txBody>
       </p:sp>
-      <p:sp>
-        <p:nvSpPr>
-          <p:cNvPr id="4" name="TextBox 3"/>
-          <p:cNvSpPr txBox="1"/>
-          <p:nvPr/>
-        </p:nvSpPr>
-        <p:spPr>
-          <a:xfrm>
-            <a:off x="457200" y="1005840"/>
-            <a:ext cx="10972800" cy="502920"/>
-          </a:xfrm>
-          <a:prstGeom prst="rect">
-            <a:avLst/>
-          </a:prstGeom>
-          <a:noFill/>
-        </p:spPr>
-        <p:txBody>
-          <a:bodyPr wrap="square">
-            <a:spAutoFit/>
-          </a:bodyPr>
-          <a:lstStyle/>
-          <a:p>
-            <a:pPr algn="l"/>
-            <a:r>
-              <a:rPr sz="2000" b="1" i="0">
-                <a:solidFill>
-                  <a:srgbClr val="1A2A4A"/>
-                </a:solidFill>
-                <a:latin typeface="IPAGothic"/>
-              </a:rPr>
-              <a:t>「2分で届く、本物の蕎麦。」</a:t>
-            </a:r>
-          </a:p>
-        </p:txBody>
-      </p:sp>
-      <p:sp>
-        <p:nvSpPr>
-          <p:cNvPr id="5" name="Rectangle 4"/>
-          <p:cNvSpPr/>
-          <p:nvPr/>
-        </p:nvSpPr>
-        <p:spPr>
-          <a:xfrm>
-            <a:off x="274320" y="1645920"/>
-            <a:ext cx="5669280" cy="347472"/>
-          </a:xfrm>
-          <a:prstGeom prst="rect">
-            <a:avLst/>
-          </a:prstGeom>
-          <a:solidFill>
-            <a:srgbClr val="1A2A4A"/>
-          </a:solidFill>
-          <a:ln>
-            <a:noFill/>
-          </a:ln>
-        </p:spPr>
-        <p:style>
-          <a:lnRef idx="1">
-            <a:schemeClr val="accent1"/>
-          </a:lnRef>
-          <a:fillRef idx="3">
-            <a:schemeClr val="accent1"/>
-          </a:fillRef>
-          <a:effectRef idx="2">
-            <a:schemeClr val="accent1"/>
-          </a:effectRef>
-          <a:fontRef idx="minor">
-            <a:schemeClr val="lt1"/>
-          </a:fontRef>
-        </p:style>
-        <p:txBody>
-          <a:bodyPr rtlCol="0" anchor="ctr"/>
-          <a:lstStyle/>
-          <a:p>
-            <a:pPr algn="ctr"/>
-          </a:p>
-        </p:txBody>
-      </p:sp>
-      <p:sp>
-        <p:nvSpPr>
-          <p:cNvPr id="6" name="TextBox 5"/>
-          <p:cNvSpPr txBox="1"/>
-          <p:nvPr/>
-        </p:nvSpPr>
-        <p:spPr>
-          <a:xfrm>
-            <a:off x="365760" y="1682496"/>
-            <a:ext cx="5486400" cy="292608"/>
-          </a:xfrm>
-          <a:prstGeom prst="rect">
-            <a:avLst/>
-          </a:prstGeom>
-          <a:noFill/>
-        </p:spPr>
-        <p:txBody>
-          <a:bodyPr wrap="square">
-            <a:spAutoFit/>
-          </a:bodyPr>
-          <a:lstStyle/>
-          <a:p>
-            <a:pPr algn="l"/>
-            <a:r>
-              <a:rPr sz="1200" b="1" i="0">
-                <a:solidFill>
-                  <a:srgbClr val="FFFFFF"/>
-                </a:solidFill>
-                <a:latin typeface="IPAGothic"/>
-              </a:rPr>
-              <a:t>業態設計</a:t>
-            </a:r>
-          </a:p>
-        </p:txBody>
-      </p:sp>
-      <p:sp>
-        <p:nvSpPr>
-          <p:cNvPr id="7" name="TextBox 6"/>
-          <p:cNvSpPr txBox="1"/>
-          <p:nvPr/>
-        </p:nvSpPr>
-        <p:spPr>
-          <a:xfrm>
-            <a:off x="365760" y="2029968"/>
-            <a:ext cx="5486400" cy="347472"/>
-          </a:xfrm>
-          <a:prstGeom prst="rect">
-            <a:avLst/>
-          </a:prstGeom>
-          <a:noFill/>
-        </p:spPr>
-        <p:txBody>
-          <a:bodyPr wrap="square">
-            <a:spAutoFit/>
-          </a:bodyPr>
-          <a:lstStyle/>
-          <a:p>
-            <a:pPr algn="l"/>
-            <a:r>
-              <a:rPr sz="1100" b="0" i="0">
-                <a:solidFill>
-                  <a:srgbClr val="1A1A1A"/>
-                </a:solidFill>
-                <a:latin typeface="IPAGothic"/>
-              </a:rPr>
-              <a:t>▸ 8坪・8スタンド・1〜2人オペレーション（小型化）</a:t>
-            </a:r>
-          </a:p>
-        </p:txBody>
-      </p:sp>
-      <p:sp>
-        <p:nvSpPr>
-          <p:cNvPr id="8" name="TextBox 7"/>
-          <p:cNvSpPr txBox="1"/>
-          <p:nvPr/>
-        </p:nvSpPr>
-        <p:spPr>
-          <a:xfrm>
-            <a:off x="365760" y="2377440"/>
-            <a:ext cx="5486400" cy="347472"/>
-          </a:xfrm>
-          <a:prstGeom prst="rect">
-            <a:avLst/>
-          </a:prstGeom>
-          <a:noFill/>
-        </p:spPr>
-        <p:txBody>
-          <a:bodyPr wrap="square">
-            <a:spAutoFit/>
-          </a:bodyPr>
-          <a:lstStyle/>
-          <a:p>
-            <a:pPr algn="l"/>
-            <a:r>
-              <a:rPr sz="1100" b="0" i="0">
-                <a:solidFill>
-                  <a:srgbClr val="1A1A1A"/>
-                </a:solidFill>
-                <a:latin typeface="IPAGothic"/>
-              </a:rPr>
-              <a:t>▸ 客単価1,500円・回転時間12分・1日80〜90人集客</a:t>
-            </a:r>
-          </a:p>
-        </p:txBody>
-      </p:sp>
-      <p:sp>
-        <p:nvSpPr>
-          <p:cNvPr id="9" name="TextBox 8"/>
-          <p:cNvSpPr txBox="1"/>
-          <p:nvPr/>
-        </p:nvSpPr>
-        <p:spPr>
-          <a:xfrm>
-            <a:off x="365760" y="2724912"/>
-            <a:ext cx="5486400" cy="347472"/>
-          </a:xfrm>
-          <a:prstGeom prst="rect">
-            <a:avLst/>
-          </a:prstGeom>
-          <a:noFill/>
-        </p:spPr>
-        <p:txBody>
-          <a:bodyPr wrap="square">
-            <a:spAutoFit/>
-          </a:bodyPr>
-          <a:lstStyle/>
-          <a:p>
-            <a:pPr algn="l"/>
-            <a:r>
-              <a:rPr sz="1100" b="0" i="0">
-                <a:solidFill>
-                  <a:srgbClr val="1A1A1A"/>
-                </a:solidFill>
-                <a:latin typeface="IPAGothic"/>
-              </a:rPr>
-              <a:t>▸ 揚げたて天ぷら・北海道幌加内産蕎麦を使用</a:t>
-            </a:r>
-          </a:p>
-        </p:txBody>
-      </p:sp>
-      <p:sp>
-        <p:nvSpPr>
-          <p:cNvPr id="10" name="TextBox 9"/>
-          <p:cNvSpPr txBox="1"/>
-          <p:nvPr/>
-        </p:nvSpPr>
-        <p:spPr>
-          <a:xfrm>
-            <a:off x="365760" y="3072384"/>
-            <a:ext cx="5486400" cy="347472"/>
-          </a:xfrm>
-          <a:prstGeom prst="rect">
-            <a:avLst/>
-          </a:prstGeom>
-          <a:noFill/>
-        </p:spPr>
-        <p:txBody>
-          <a:bodyPr wrap="square">
-            <a:spAutoFit/>
-          </a:bodyPr>
-          <a:lstStyle/>
-          <a:p>
-            <a:pPr algn="l"/>
-            <a:r>
-              <a:rPr sz="1100" b="0" i="0">
-                <a:solidFill>
-                  <a:srgbClr val="1A1A1A"/>
-                </a:solidFill>
-                <a:latin typeface="IPAGothic"/>
-              </a:rPr>
-              <a:t>▸ QR前払い・キャッシュレス100%で人件費最適化</a:t>
-            </a:r>
-          </a:p>
-        </p:txBody>
-      </p:sp>
-      <p:sp>
-        <p:nvSpPr>
-          <p:cNvPr id="11" name="TextBox 10"/>
-          <p:cNvSpPr txBox="1"/>
-          <p:nvPr/>
-        </p:nvSpPr>
-        <p:spPr>
-          <a:xfrm>
-            <a:off x="365760" y="3419856"/>
-            <a:ext cx="5486400" cy="347472"/>
-          </a:xfrm>
-          <a:prstGeom prst="rect">
-            <a:avLst/>
-          </a:prstGeom>
-          <a:noFill/>
-        </p:spPr>
-        <p:txBody>
-          <a:bodyPr wrap="square">
-            <a:spAutoFit/>
-          </a:bodyPr>
-          <a:lstStyle/>
-          <a:p>
-            <a:pPr algn="l"/>
-            <a:r>
-              <a:rPr sz="1100" b="0" i="0">
-                <a:solidFill>
-                  <a:srgbClr val="1A1A1A"/>
-                </a:solidFill>
-                <a:latin typeface="IPAGothic"/>
-              </a:rPr>
-              <a:t>▸ 【家賃】30万円/月（8坪・坪3.75万）│ 原価33%</a:t>
-            </a:r>
-          </a:p>
-        </p:txBody>
-      </p:sp>
-      <p:sp>
-        <p:nvSpPr>
-          <p:cNvPr id="12" name="Rectangle 11"/>
-          <p:cNvSpPr/>
-          <p:nvPr/>
-        </p:nvSpPr>
-        <p:spPr>
-          <a:xfrm>
-            <a:off x="6217920" y="1645920"/>
-            <a:ext cx="5669280" cy="347472"/>
-          </a:xfrm>
-          <a:prstGeom prst="rect">
-            <a:avLst/>
-          </a:prstGeom>
-          <a:solidFill>
-            <a:srgbClr val="2C4A3E"/>
-          </a:solidFill>
-          <a:ln>
-            <a:noFill/>
-          </a:ln>
-        </p:spPr>
-        <p:style>
-          <a:lnRef idx="1">
-            <a:schemeClr val="accent1"/>
-          </a:lnRef>
-          <a:fillRef idx="3">
-            <a:schemeClr val="accent1"/>
-          </a:fillRef>
-          <a:effectRef idx="2">
-            <a:schemeClr val="accent1"/>
-          </a:effectRef>
-          <a:fontRef idx="minor">
-            <a:schemeClr val="lt1"/>
-          </a:fontRef>
-        </p:style>
-        <p:txBody>
-          <a:bodyPr rtlCol="0" anchor="ctr"/>
-          <a:lstStyle/>
-          <a:p>
-            <a:pPr algn="ctr"/>
-          </a:p>
-        </p:txBody>
-      </p:sp>
-      <p:sp>
-        <p:nvSpPr>
-          <p:cNvPr id="13" name="TextBox 12"/>
-          <p:cNvSpPr txBox="1"/>
-          <p:nvPr/>
-        </p:nvSpPr>
-        <p:spPr>
-          <a:xfrm>
-            <a:off x="6309360" y="1682496"/>
-            <a:ext cx="5486400" cy="292608"/>
-          </a:xfrm>
-          <a:prstGeom prst="rect">
-            <a:avLst/>
-          </a:prstGeom>
-          <a:noFill/>
-        </p:spPr>
-        <p:txBody>
-          <a:bodyPr wrap="square">
-            <a:spAutoFit/>
-          </a:bodyPr>
-          <a:lstStyle/>
-          <a:p>
-            <a:pPr algn="l"/>
-            <a:r>
-              <a:rPr sz="1200" b="1" i="0">
-                <a:solidFill>
-                  <a:srgbClr val="FFFFFF"/>
-                </a:solidFill>
-                <a:latin typeface="IPAGothic"/>
-              </a:rPr>
-              <a:t>FC展開モデル</a:t>
-            </a:r>
-          </a:p>
-        </p:txBody>
-      </p:sp>
-      <p:sp>
-        <p:nvSpPr>
-          <p:cNvPr id="14" name="TextBox 13"/>
-          <p:cNvSpPr txBox="1"/>
-          <p:nvPr/>
-        </p:nvSpPr>
-        <p:spPr>
-          <a:xfrm>
-            <a:off x="6309360" y="2029968"/>
-            <a:ext cx="5486400" cy="347472"/>
-          </a:xfrm>
-          <a:prstGeom prst="rect">
-            <a:avLst/>
-          </a:prstGeom>
-          <a:noFill/>
-        </p:spPr>
-        <p:txBody>
-          <a:bodyPr wrap="square">
-            <a:spAutoFit/>
-          </a:bodyPr>
-          <a:lstStyle/>
-          <a:p>
-            <a:pPr algn="l"/>
-            <a:r>
-              <a:rPr sz="1100" b="0" i="0">
-                <a:solidFill>
-                  <a:srgbClr val="1A1A1A"/>
-                </a:solidFill>
-                <a:latin typeface="IPAGothic"/>
-              </a:rPr>
-              <a:t>▸ FC加盟金200万円・ロイヤルティ4%</a:t>
-            </a:r>
-          </a:p>
-        </p:txBody>
-      </p:sp>
-      <p:sp>
-        <p:nvSpPr>
-          <p:cNvPr id="15" name="TextBox 14"/>
-          <p:cNvSpPr txBox="1"/>
-          <p:nvPr/>
-        </p:nvSpPr>
-        <p:spPr>
-          <a:xfrm>
-            <a:off x="6309360" y="2377440"/>
-            <a:ext cx="5486400" cy="347472"/>
-          </a:xfrm>
-          <a:prstGeom prst="rect">
-            <a:avLst/>
-          </a:prstGeom>
-          <a:noFill/>
-        </p:spPr>
-        <p:txBody>
-          <a:bodyPr wrap="square">
-            <a:spAutoFit/>
-          </a:bodyPr>
-          <a:lstStyle/>
-          <a:p>
-            <a:pPr algn="l"/>
-            <a:r>
-              <a:rPr sz="1100" b="0" i="0">
-                <a:solidFill>
-                  <a:srgbClr val="1A1A1A"/>
-                </a:solidFill>
-                <a:latin typeface="IPAGothic"/>
-              </a:rPr>
-              <a:t>▸ 標準内装パッケージで施工期間2ヶ月以内</a:t>
-            </a:r>
-          </a:p>
-        </p:txBody>
-      </p:sp>
-      <p:sp>
-        <p:nvSpPr>
-          <p:cNvPr id="16" name="TextBox 15"/>
-          <p:cNvSpPr txBox="1"/>
-          <p:nvPr/>
-        </p:nvSpPr>
-        <p:spPr>
-          <a:xfrm>
-            <a:off x="6309360" y="2724912"/>
-            <a:ext cx="5486400" cy="347472"/>
-          </a:xfrm>
-          <a:prstGeom prst="rect">
-            <a:avLst/>
-          </a:prstGeom>
-          <a:noFill/>
-        </p:spPr>
-        <p:txBody>
-          <a:bodyPr wrap="square">
-            <a:spAutoFit/>
-          </a:bodyPr>
-          <a:lstStyle/>
-          <a:p>
-            <a:pPr algn="l"/>
-            <a:r>
-              <a:rPr sz="1100" b="0" i="0">
-                <a:solidFill>
-                  <a:srgbClr val="1A1A1A"/>
-                </a:solidFill>
-                <a:latin typeface="IPAGothic"/>
-              </a:rPr>
-              <a:t>▸ 首都圏駅前・オフィス街から展開</a:t>
-            </a:r>
-          </a:p>
-        </p:txBody>
-      </p:sp>
-      <p:sp>
-        <p:nvSpPr>
-          <p:cNvPr id="17" name="TextBox 16"/>
-          <p:cNvSpPr txBox="1"/>
-          <p:nvPr/>
-        </p:nvSpPr>
-        <p:spPr>
-          <a:xfrm>
-            <a:off x="6309360" y="3072384"/>
-            <a:ext cx="5486400" cy="347472"/>
-          </a:xfrm>
-          <a:prstGeom prst="rect">
-            <a:avLst/>
-          </a:prstGeom>
-          <a:noFill/>
-        </p:spPr>
-        <p:txBody>
-          <a:bodyPr wrap="square">
-            <a:spAutoFit/>
-          </a:bodyPr>
-          <a:lstStyle/>
-          <a:p>
-            <a:pPr algn="l"/>
-            <a:r>
-              <a:rPr sz="1100" b="0" i="0">
-                <a:solidFill>
-                  <a:srgbClr val="1A1A1A"/>
-                </a:solidFill>
-                <a:latin typeface="IPAGothic"/>
-              </a:rPr>
-              <a:t>▸ 小型化でFC初期投資を抑え加盟ハードルを下げる</a:t>
-            </a:r>
-          </a:p>
-        </p:txBody>
-      </p:sp>
-      <p:sp>
-        <p:nvSpPr>
-          <p:cNvPr id="18" name="TextBox 17"/>
-          <p:cNvSpPr txBox="1"/>
-          <p:nvPr/>
-        </p:nvSpPr>
-        <p:spPr>
-          <a:xfrm>
-            <a:off x="6309360" y="3419856"/>
-            <a:ext cx="5486400" cy="347472"/>
-          </a:xfrm>
-          <a:prstGeom prst="rect">
-            <a:avLst/>
-          </a:prstGeom>
-          <a:noFill/>
-        </p:spPr>
-        <p:txBody>
-          <a:bodyPr wrap="square">
-            <a:spAutoFit/>
-          </a:bodyPr>
-          <a:lstStyle/>
-          <a:p>
-            <a:pPr algn="l"/>
-            <a:r>
-              <a:rPr sz="1100" b="0" i="0">
-                <a:solidFill>
-                  <a:srgbClr val="1A1A1A"/>
-                </a:solidFill>
-                <a:latin typeface="IPAGothic"/>
-              </a:rPr>
-              <a:t>▸ 目標：30店舗（直営3＋FC27）</a:t>
-            </a:r>
-          </a:p>
-        </p:txBody>
-      </p:sp>
       <p:pic>
         <p:nvPicPr>
-          <p:cNvPr id="19" name="Picture 18" descr="image.png"/>
+          <p:cNvPr id="4" name="Picture 3" descr="zen_brand_logo.png"/>
           <p:cNvPicPr>
             <a:picLocks noChangeAspect="1"/>
           </p:cNvPicPr>
@@ -17948,8 +17684,8 @@
         </p:blipFill>
         <p:spPr>
           <a:xfrm>
-            <a:off x="274320" y="3657600"/>
-            <a:ext cx="5486400" cy="2834640"/>
+            <a:off x="9875520" y="45720"/>
+            <a:ext cx="2103120" cy="749808"/>
           </a:xfrm>
           <a:prstGeom prst="rect">
             <a:avLst/>
@@ -17958,14 +17694,49 @@
       </p:pic>
       <p:sp>
         <p:nvSpPr>
-          <p:cNvPr id="20" name="Rectangle 19"/>
+          <p:cNvPr id="5" name="TextBox 4"/>
+          <p:cNvSpPr txBox="1"/>
+          <p:nvPr/>
+        </p:nvSpPr>
+        <p:spPr>
+          <a:xfrm>
+            <a:off x="457200" y="1005840"/>
+            <a:ext cx="10972800" cy="502920"/>
+          </a:xfrm>
+          <a:prstGeom prst="rect">
+            <a:avLst/>
+          </a:prstGeom>
+          <a:noFill/>
+        </p:spPr>
+        <p:txBody>
+          <a:bodyPr wrap="square">
+            <a:spAutoFit/>
+          </a:bodyPr>
+          <a:lstStyle/>
+          <a:p>
+            <a:pPr algn="l"/>
+            <a:r>
+              <a:rPr sz="2000" b="1" i="0">
+                <a:solidFill>
+                  <a:srgbClr val="1A2A4A"/>
+                </a:solidFill>
+                <a:latin typeface="IPAGothic"/>
+              </a:rPr>
+              <a:t>「2分で届く、本物の蕎麦。」</a:t>
+            </a:r>
+          </a:p>
+        </p:txBody>
+      </p:sp>
+      <p:sp>
+        <p:nvSpPr>
+          <p:cNvPr id="6" name="Rectangle 5"/>
           <p:cNvSpPr/>
           <p:nvPr/>
         </p:nvSpPr>
         <p:spPr>
           <a:xfrm>
-            <a:off x="5943600" y="3657600"/>
-            <a:ext cx="1371600" cy="868680"/>
+            <a:off x="274320" y="1645920"/>
+            <a:ext cx="5669280" cy="347472"/>
           </a:xfrm>
           <a:prstGeom prst="rect">
             <a:avLst/>
@@ -18001,14 +17772,14 @@
       </p:sp>
       <p:sp>
         <p:nvSpPr>
-          <p:cNvPr id="21" name="TextBox 20"/>
+          <p:cNvPr id="7" name="TextBox 6"/>
           <p:cNvSpPr txBox="1"/>
           <p:nvPr/>
         </p:nvSpPr>
         <p:spPr>
           <a:xfrm>
-            <a:off x="5943600" y="3703320"/>
-            <a:ext cx="1371600" cy="475488"/>
+            <a:off x="365760" y="1682496"/>
+            <a:ext cx="5486400" cy="292608"/>
           </a:xfrm>
           <a:prstGeom prst="rect">
             <a:avLst/>
@@ -18021,29 +17792,29 @@
           </a:bodyPr>
           <a:lstStyle/>
           <a:p>
-            <a:pPr algn="ctr"/>
-            <a:r>
-              <a:rPr sz="1700" b="1" i="0">
-                <a:solidFill>
-                  <a:srgbClr val="C49A22"/>
-                </a:solidFill>
-                <a:latin typeface="IPAGothic"/>
-              </a:rPr>
-              <a:t>350万円</a:t>
-            </a:r>
-          </a:p>
-        </p:txBody>
-      </p:sp>
-      <p:sp>
-        <p:nvSpPr>
-          <p:cNvPr id="22" name="TextBox 21"/>
+            <a:pPr algn="l"/>
+            <a:r>
+              <a:rPr sz="1200" b="1" i="0">
+                <a:solidFill>
+                  <a:srgbClr val="FFFFFF"/>
+                </a:solidFill>
+                <a:latin typeface="IPAGothic"/>
+              </a:rPr>
+              <a:t>業態設計</a:t>
+            </a:r>
+          </a:p>
+        </p:txBody>
+      </p:sp>
+      <p:sp>
+        <p:nvSpPr>
+          <p:cNvPr id="8" name="TextBox 7"/>
           <p:cNvSpPr txBox="1"/>
           <p:nvPr/>
         </p:nvSpPr>
         <p:spPr>
           <a:xfrm>
-            <a:off x="5943600" y="4206240"/>
-            <a:ext cx="1371600" cy="292608"/>
+            <a:off x="365760" y="2029968"/>
+            <a:ext cx="5486400" cy="347472"/>
           </a:xfrm>
           <a:prstGeom prst="rect">
             <a:avLst/>
@@ -18056,29 +17827,169 @@
           </a:bodyPr>
           <a:lstStyle/>
           <a:p>
-            <a:pPr algn="ctr"/>
-            <a:r>
-              <a:rPr sz="900" b="0" i="0">
-                <a:solidFill>
-                  <a:srgbClr val="FFFFFF"/>
-                </a:solidFill>
-                <a:latin typeface="IPAGothic"/>
-              </a:rPr>
-              <a:t>月次売上</a:t>
-            </a:r>
-          </a:p>
-        </p:txBody>
-      </p:sp>
-      <p:sp>
-        <p:nvSpPr>
-          <p:cNvPr id="23" name="Rectangle 22"/>
+            <a:pPr algn="l"/>
+            <a:r>
+              <a:rPr sz="1100" b="0" i="0">
+                <a:solidFill>
+                  <a:srgbClr val="1A1A1A"/>
+                </a:solidFill>
+                <a:latin typeface="IPAGothic"/>
+              </a:rPr>
+              <a:t>▸ 8坪・8スタンド・1〜2人オペレーション（小型化）</a:t>
+            </a:r>
+          </a:p>
+        </p:txBody>
+      </p:sp>
+      <p:sp>
+        <p:nvSpPr>
+          <p:cNvPr id="9" name="TextBox 8"/>
+          <p:cNvSpPr txBox="1"/>
+          <p:nvPr/>
+        </p:nvSpPr>
+        <p:spPr>
+          <a:xfrm>
+            <a:off x="365760" y="2377440"/>
+            <a:ext cx="5486400" cy="347472"/>
+          </a:xfrm>
+          <a:prstGeom prst="rect">
+            <a:avLst/>
+          </a:prstGeom>
+          <a:noFill/>
+        </p:spPr>
+        <p:txBody>
+          <a:bodyPr wrap="square">
+            <a:spAutoFit/>
+          </a:bodyPr>
+          <a:lstStyle/>
+          <a:p>
+            <a:pPr algn="l"/>
+            <a:r>
+              <a:rPr sz="1100" b="0" i="0">
+                <a:solidFill>
+                  <a:srgbClr val="1A1A1A"/>
+                </a:solidFill>
+                <a:latin typeface="IPAGothic"/>
+              </a:rPr>
+              <a:t>▸ 客単価1,500円・回転時間12分・1日80〜90人集客</a:t>
+            </a:r>
+          </a:p>
+        </p:txBody>
+      </p:sp>
+      <p:sp>
+        <p:nvSpPr>
+          <p:cNvPr id="10" name="TextBox 9"/>
+          <p:cNvSpPr txBox="1"/>
+          <p:nvPr/>
+        </p:nvSpPr>
+        <p:spPr>
+          <a:xfrm>
+            <a:off x="365760" y="2724912"/>
+            <a:ext cx="5486400" cy="347472"/>
+          </a:xfrm>
+          <a:prstGeom prst="rect">
+            <a:avLst/>
+          </a:prstGeom>
+          <a:noFill/>
+        </p:spPr>
+        <p:txBody>
+          <a:bodyPr wrap="square">
+            <a:spAutoFit/>
+          </a:bodyPr>
+          <a:lstStyle/>
+          <a:p>
+            <a:pPr algn="l"/>
+            <a:r>
+              <a:rPr sz="1100" b="0" i="0">
+                <a:solidFill>
+                  <a:srgbClr val="1A1A1A"/>
+                </a:solidFill>
+                <a:latin typeface="IPAGothic"/>
+              </a:rPr>
+              <a:t>▸ 揚げたて天ぷら・北海道幌加内産蕎麦を使用</a:t>
+            </a:r>
+          </a:p>
+        </p:txBody>
+      </p:sp>
+      <p:sp>
+        <p:nvSpPr>
+          <p:cNvPr id="11" name="TextBox 10"/>
+          <p:cNvSpPr txBox="1"/>
+          <p:nvPr/>
+        </p:nvSpPr>
+        <p:spPr>
+          <a:xfrm>
+            <a:off x="365760" y="3072384"/>
+            <a:ext cx="5486400" cy="347472"/>
+          </a:xfrm>
+          <a:prstGeom prst="rect">
+            <a:avLst/>
+          </a:prstGeom>
+          <a:noFill/>
+        </p:spPr>
+        <p:txBody>
+          <a:bodyPr wrap="square">
+            <a:spAutoFit/>
+          </a:bodyPr>
+          <a:lstStyle/>
+          <a:p>
+            <a:pPr algn="l"/>
+            <a:r>
+              <a:rPr sz="1100" b="0" i="0">
+                <a:solidFill>
+                  <a:srgbClr val="1A1A1A"/>
+                </a:solidFill>
+                <a:latin typeface="IPAGothic"/>
+              </a:rPr>
+              <a:t>▸ QR前払い・キャッシュレス100%で人件費最適化</a:t>
+            </a:r>
+          </a:p>
+        </p:txBody>
+      </p:sp>
+      <p:sp>
+        <p:nvSpPr>
+          <p:cNvPr id="12" name="TextBox 11"/>
+          <p:cNvSpPr txBox="1"/>
+          <p:nvPr/>
+        </p:nvSpPr>
+        <p:spPr>
+          <a:xfrm>
+            <a:off x="365760" y="3419856"/>
+            <a:ext cx="5486400" cy="347472"/>
+          </a:xfrm>
+          <a:prstGeom prst="rect">
+            <a:avLst/>
+          </a:prstGeom>
+          <a:noFill/>
+        </p:spPr>
+        <p:txBody>
+          <a:bodyPr wrap="square">
+            <a:spAutoFit/>
+          </a:bodyPr>
+          <a:lstStyle/>
+          <a:p>
+            <a:pPr algn="l"/>
+            <a:r>
+              <a:rPr sz="1100" b="0" i="0">
+                <a:solidFill>
+                  <a:srgbClr val="1A1A1A"/>
+                </a:solidFill>
+                <a:latin typeface="IPAGothic"/>
+              </a:rPr>
+              <a:t>▸ 【家賃】30万円/月（8坪・坪3.75万）│ 原価33%</a:t>
+            </a:r>
+          </a:p>
+        </p:txBody>
+      </p:sp>
+      <p:sp>
+        <p:nvSpPr>
+          <p:cNvPr id="13" name="Rectangle 12"/>
           <p:cNvSpPr/>
           <p:nvPr/>
         </p:nvSpPr>
         <p:spPr>
           <a:xfrm>
-            <a:off x="7498079" y="3657600"/>
-            <a:ext cx="1371600" cy="868680"/>
+            <a:off x="6217920" y="1645920"/>
+            <a:ext cx="5669280" cy="347472"/>
           </a:xfrm>
           <a:prstGeom prst="rect">
             <a:avLst/>
@@ -18114,14 +18025,14 @@
       </p:sp>
       <p:sp>
         <p:nvSpPr>
-          <p:cNvPr id="24" name="TextBox 23"/>
+          <p:cNvPr id="14" name="TextBox 13"/>
           <p:cNvSpPr txBox="1"/>
           <p:nvPr/>
         </p:nvSpPr>
         <p:spPr>
           <a:xfrm>
-            <a:off x="7498079" y="3703320"/>
-            <a:ext cx="1371600" cy="475488"/>
+            <a:off x="6309360" y="1682496"/>
+            <a:ext cx="5486400" cy="292608"/>
           </a:xfrm>
           <a:prstGeom prst="rect">
             <a:avLst/>
@@ -18134,29 +18045,29 @@
           </a:bodyPr>
           <a:lstStyle/>
           <a:p>
-            <a:pPr algn="ctr"/>
-            <a:r>
-              <a:rPr sz="1700" b="1" i="0">
-                <a:solidFill>
-                  <a:srgbClr val="C49A22"/>
-                </a:solidFill>
-                <a:latin typeface="IPAGothic"/>
-              </a:rPr>
-              <a:t>42万円</a:t>
-            </a:r>
-          </a:p>
-        </p:txBody>
-      </p:sp>
-      <p:sp>
-        <p:nvSpPr>
-          <p:cNvPr id="25" name="TextBox 24"/>
+            <a:pPr algn="l"/>
+            <a:r>
+              <a:rPr sz="1200" b="1" i="0">
+                <a:solidFill>
+                  <a:srgbClr val="FFFFFF"/>
+                </a:solidFill>
+                <a:latin typeface="IPAGothic"/>
+              </a:rPr>
+              <a:t>FC展開モデル</a:t>
+            </a:r>
+          </a:p>
+        </p:txBody>
+      </p:sp>
+      <p:sp>
+        <p:nvSpPr>
+          <p:cNvPr id="15" name="TextBox 14"/>
           <p:cNvSpPr txBox="1"/>
           <p:nvPr/>
         </p:nvSpPr>
         <p:spPr>
           <a:xfrm>
-            <a:off x="7498079" y="4206240"/>
-            <a:ext cx="1371600" cy="292608"/>
+            <a:off x="6309360" y="2029968"/>
+            <a:ext cx="5486400" cy="347472"/>
           </a:xfrm>
           <a:prstGeom prst="rect">
             <a:avLst/>
@@ -18169,28 +18080,192 @@
           </a:bodyPr>
           <a:lstStyle/>
           <a:p>
-            <a:pPr algn="ctr"/>
-            <a:r>
-              <a:rPr sz="900" b="0" i="0">
-                <a:solidFill>
-                  <a:srgbClr val="FFFFFF"/>
-                </a:solidFill>
-                <a:latin typeface="IPAGothic"/>
-              </a:rPr>
-              <a:t>月次利益</a:t>
-            </a:r>
-          </a:p>
-        </p:txBody>
-      </p:sp>
-      <p:sp>
-        <p:nvSpPr>
-          <p:cNvPr id="26" name="Rectangle 25"/>
+            <a:pPr algn="l"/>
+            <a:r>
+              <a:rPr sz="1100" b="0" i="0">
+                <a:solidFill>
+                  <a:srgbClr val="1A1A1A"/>
+                </a:solidFill>
+                <a:latin typeface="IPAGothic"/>
+              </a:rPr>
+              <a:t>▸ FC加盟金200万円・ロイヤルティ4%</a:t>
+            </a:r>
+          </a:p>
+        </p:txBody>
+      </p:sp>
+      <p:sp>
+        <p:nvSpPr>
+          <p:cNvPr id="16" name="TextBox 15"/>
+          <p:cNvSpPr txBox="1"/>
+          <p:nvPr/>
+        </p:nvSpPr>
+        <p:spPr>
+          <a:xfrm>
+            <a:off x="6309360" y="2377440"/>
+            <a:ext cx="5486400" cy="347472"/>
+          </a:xfrm>
+          <a:prstGeom prst="rect">
+            <a:avLst/>
+          </a:prstGeom>
+          <a:noFill/>
+        </p:spPr>
+        <p:txBody>
+          <a:bodyPr wrap="square">
+            <a:spAutoFit/>
+          </a:bodyPr>
+          <a:lstStyle/>
+          <a:p>
+            <a:pPr algn="l"/>
+            <a:r>
+              <a:rPr sz="1100" b="0" i="0">
+                <a:solidFill>
+                  <a:srgbClr val="1A1A1A"/>
+                </a:solidFill>
+                <a:latin typeface="IPAGothic"/>
+              </a:rPr>
+              <a:t>▸ 標準内装パッケージで施工期間2ヶ月以内</a:t>
+            </a:r>
+          </a:p>
+        </p:txBody>
+      </p:sp>
+      <p:sp>
+        <p:nvSpPr>
+          <p:cNvPr id="17" name="TextBox 16"/>
+          <p:cNvSpPr txBox="1"/>
+          <p:nvPr/>
+        </p:nvSpPr>
+        <p:spPr>
+          <a:xfrm>
+            <a:off x="6309360" y="2724912"/>
+            <a:ext cx="5486400" cy="347472"/>
+          </a:xfrm>
+          <a:prstGeom prst="rect">
+            <a:avLst/>
+          </a:prstGeom>
+          <a:noFill/>
+        </p:spPr>
+        <p:txBody>
+          <a:bodyPr wrap="square">
+            <a:spAutoFit/>
+          </a:bodyPr>
+          <a:lstStyle/>
+          <a:p>
+            <a:pPr algn="l"/>
+            <a:r>
+              <a:rPr sz="1100" b="0" i="0">
+                <a:solidFill>
+                  <a:srgbClr val="1A1A1A"/>
+                </a:solidFill>
+                <a:latin typeface="IPAGothic"/>
+              </a:rPr>
+              <a:t>▸ 首都圏駅前・オフィス街から展開</a:t>
+            </a:r>
+          </a:p>
+        </p:txBody>
+      </p:sp>
+      <p:sp>
+        <p:nvSpPr>
+          <p:cNvPr id="18" name="TextBox 17"/>
+          <p:cNvSpPr txBox="1"/>
+          <p:nvPr/>
+        </p:nvSpPr>
+        <p:spPr>
+          <a:xfrm>
+            <a:off x="6309360" y="3072384"/>
+            <a:ext cx="5486400" cy="347472"/>
+          </a:xfrm>
+          <a:prstGeom prst="rect">
+            <a:avLst/>
+          </a:prstGeom>
+          <a:noFill/>
+        </p:spPr>
+        <p:txBody>
+          <a:bodyPr wrap="square">
+            <a:spAutoFit/>
+          </a:bodyPr>
+          <a:lstStyle/>
+          <a:p>
+            <a:pPr algn="l"/>
+            <a:r>
+              <a:rPr sz="1100" b="0" i="0">
+                <a:solidFill>
+                  <a:srgbClr val="1A1A1A"/>
+                </a:solidFill>
+                <a:latin typeface="IPAGothic"/>
+              </a:rPr>
+              <a:t>▸ 小型化でFC初期投資を抑え加盟ハードルを下げる</a:t>
+            </a:r>
+          </a:p>
+        </p:txBody>
+      </p:sp>
+      <p:sp>
+        <p:nvSpPr>
+          <p:cNvPr id="19" name="TextBox 18"/>
+          <p:cNvSpPr txBox="1"/>
+          <p:nvPr/>
+        </p:nvSpPr>
+        <p:spPr>
+          <a:xfrm>
+            <a:off x="6309360" y="3419856"/>
+            <a:ext cx="5486400" cy="347472"/>
+          </a:xfrm>
+          <a:prstGeom prst="rect">
+            <a:avLst/>
+          </a:prstGeom>
+          <a:noFill/>
+        </p:spPr>
+        <p:txBody>
+          <a:bodyPr wrap="square">
+            <a:spAutoFit/>
+          </a:bodyPr>
+          <a:lstStyle/>
+          <a:p>
+            <a:pPr algn="l"/>
+            <a:r>
+              <a:rPr sz="1100" b="0" i="0">
+                <a:solidFill>
+                  <a:srgbClr val="1A1A1A"/>
+                </a:solidFill>
+                <a:latin typeface="IPAGothic"/>
+              </a:rPr>
+              <a:t>▸ 目標：30店舗（直営3＋FC27）</a:t>
+            </a:r>
+          </a:p>
+        </p:txBody>
+      </p:sp>
+      <p:pic>
+        <p:nvPicPr>
+          <p:cNvPr id="20" name="Picture 19" descr="image.png"/>
+          <p:cNvPicPr>
+            <a:picLocks noChangeAspect="1"/>
+          </p:cNvPicPr>
+          <p:nvPr/>
+        </p:nvPicPr>
+        <p:blipFill>
+          <a:blip r:embed="rId3"/>
+          <a:stretch>
+            <a:fillRect/>
+          </a:stretch>
+        </p:blipFill>
+        <p:spPr>
+          <a:xfrm>
+            <a:off x="274320" y="3657600"/>
+            <a:ext cx="5486400" cy="2834640"/>
+          </a:xfrm>
+          <a:prstGeom prst="rect">
+            <a:avLst/>
+          </a:prstGeom>
+        </p:spPr>
+      </p:pic>
+      <p:sp>
+        <p:nvSpPr>
+          <p:cNvPr id="21" name="Rectangle 20"/>
           <p:cNvSpPr/>
           <p:nvPr/>
         </p:nvSpPr>
         <p:spPr>
           <a:xfrm>
-            <a:off x="9052560" y="3657600"/>
+            <a:off x="5943600" y="3657600"/>
             <a:ext cx="1371600" cy="868680"/>
           </a:xfrm>
           <a:prstGeom prst="rect">
@@ -18227,13 +18302,13 @@
       </p:sp>
       <p:sp>
         <p:nvSpPr>
-          <p:cNvPr id="27" name="TextBox 26"/>
+          <p:cNvPr id="22" name="TextBox 21"/>
           <p:cNvSpPr txBox="1"/>
           <p:nvPr/>
         </p:nvSpPr>
         <p:spPr>
           <a:xfrm>
-            <a:off x="9052560" y="3703320"/>
+            <a:off x="5943600" y="3703320"/>
             <a:ext cx="1371600" cy="475488"/>
           </a:xfrm>
           <a:prstGeom prst="rect">
@@ -18255,20 +18330,20 @@
                 </a:solidFill>
                 <a:latin typeface="IPAGothic"/>
               </a:rPr>
-              <a:t>12%</a:t>
-            </a:r>
-          </a:p>
-        </p:txBody>
-      </p:sp>
-      <p:sp>
-        <p:nvSpPr>
-          <p:cNvPr id="28" name="TextBox 27"/>
+              <a:t>350万円</a:t>
+            </a:r>
+          </a:p>
+        </p:txBody>
+      </p:sp>
+      <p:sp>
+        <p:nvSpPr>
+          <p:cNvPr id="23" name="TextBox 22"/>
           <p:cNvSpPr txBox="1"/>
           <p:nvPr/>
         </p:nvSpPr>
         <p:spPr>
           <a:xfrm>
-            <a:off x="9052560" y="4206240"/>
+            <a:off x="5943600" y="4206240"/>
             <a:ext cx="1371600" cy="292608"/>
           </a:xfrm>
           <a:prstGeom prst="rect">
@@ -18290,20 +18365,20 @@
                 </a:solidFill>
                 <a:latin typeface="IPAGothic"/>
               </a:rPr>
-              <a:t>利益率</a:t>
-            </a:r>
-          </a:p>
-        </p:txBody>
-      </p:sp>
-      <p:sp>
-        <p:nvSpPr>
-          <p:cNvPr id="29" name="Rectangle 28"/>
+              <a:t>月次売上</a:t>
+            </a:r>
+          </a:p>
+        </p:txBody>
+      </p:sp>
+      <p:sp>
+        <p:nvSpPr>
+          <p:cNvPr id="24" name="Rectangle 23"/>
           <p:cNvSpPr/>
           <p:nvPr/>
         </p:nvSpPr>
         <p:spPr>
           <a:xfrm>
-            <a:off x="10607040" y="3657600"/>
+            <a:off x="7498079" y="3657600"/>
             <a:ext cx="1371600" cy="868680"/>
           </a:xfrm>
           <a:prstGeom prst="rect">
@@ -18340,13 +18415,13 @@
       </p:sp>
       <p:sp>
         <p:nvSpPr>
-          <p:cNvPr id="30" name="TextBox 29"/>
+          <p:cNvPr id="25" name="TextBox 24"/>
           <p:cNvSpPr txBox="1"/>
           <p:nvPr/>
         </p:nvSpPr>
         <p:spPr>
           <a:xfrm>
-            <a:off x="10607040" y="3703320"/>
+            <a:off x="7498079" y="3703320"/>
             <a:ext cx="1371600" cy="475488"/>
           </a:xfrm>
           <a:prstGeom prst="rect">
@@ -18368,20 +18443,20 @@
                 </a:solidFill>
                 <a:latin typeface="IPAGothic"/>
               </a:rPr>
-              <a:t>12〜15ヶ月</a:t>
-            </a:r>
-          </a:p>
-        </p:txBody>
-      </p:sp>
-      <p:sp>
-        <p:nvSpPr>
-          <p:cNvPr id="31" name="TextBox 30"/>
+              <a:t>42万円</a:t>
+            </a:r>
+          </a:p>
+        </p:txBody>
+      </p:sp>
+      <p:sp>
+        <p:nvSpPr>
+          <p:cNvPr id="26" name="TextBox 25"/>
           <p:cNvSpPr txBox="1"/>
           <p:nvPr/>
         </p:nvSpPr>
         <p:spPr>
           <a:xfrm>
-            <a:off x="10607040" y="4206240"/>
+            <a:off x="7498079" y="4206240"/>
             <a:ext cx="1371600" cy="292608"/>
           </a:xfrm>
           <a:prstGeom prst="rect">
@@ -18403,6 +18478,232 @@
                 </a:solidFill>
                 <a:latin typeface="IPAGothic"/>
               </a:rPr>
+              <a:t>月次利益</a:t>
+            </a:r>
+          </a:p>
+        </p:txBody>
+      </p:sp>
+      <p:sp>
+        <p:nvSpPr>
+          <p:cNvPr id="27" name="Rectangle 26"/>
+          <p:cNvSpPr/>
+          <p:nvPr/>
+        </p:nvSpPr>
+        <p:spPr>
+          <a:xfrm>
+            <a:off x="9052560" y="3657600"/>
+            <a:ext cx="1371600" cy="868680"/>
+          </a:xfrm>
+          <a:prstGeom prst="rect">
+            <a:avLst/>
+          </a:prstGeom>
+          <a:solidFill>
+            <a:srgbClr val="1A2A4A"/>
+          </a:solidFill>
+          <a:ln>
+            <a:noFill/>
+          </a:ln>
+        </p:spPr>
+        <p:style>
+          <a:lnRef idx="1">
+            <a:schemeClr val="accent1"/>
+          </a:lnRef>
+          <a:fillRef idx="3">
+            <a:schemeClr val="accent1"/>
+          </a:fillRef>
+          <a:effectRef idx="2">
+            <a:schemeClr val="accent1"/>
+          </a:effectRef>
+          <a:fontRef idx="minor">
+            <a:schemeClr val="lt1"/>
+          </a:fontRef>
+        </p:style>
+        <p:txBody>
+          <a:bodyPr rtlCol="0" anchor="ctr"/>
+          <a:lstStyle/>
+          <a:p>
+            <a:pPr algn="ctr"/>
+          </a:p>
+        </p:txBody>
+      </p:sp>
+      <p:sp>
+        <p:nvSpPr>
+          <p:cNvPr id="28" name="TextBox 27"/>
+          <p:cNvSpPr txBox="1"/>
+          <p:nvPr/>
+        </p:nvSpPr>
+        <p:spPr>
+          <a:xfrm>
+            <a:off x="9052560" y="3703320"/>
+            <a:ext cx="1371600" cy="475488"/>
+          </a:xfrm>
+          <a:prstGeom prst="rect">
+            <a:avLst/>
+          </a:prstGeom>
+          <a:noFill/>
+        </p:spPr>
+        <p:txBody>
+          <a:bodyPr wrap="square">
+            <a:spAutoFit/>
+          </a:bodyPr>
+          <a:lstStyle/>
+          <a:p>
+            <a:pPr algn="ctr"/>
+            <a:r>
+              <a:rPr sz="1700" b="1" i="0">
+                <a:solidFill>
+                  <a:srgbClr val="C49A22"/>
+                </a:solidFill>
+                <a:latin typeface="IPAGothic"/>
+              </a:rPr>
+              <a:t>12%</a:t>
+            </a:r>
+          </a:p>
+        </p:txBody>
+      </p:sp>
+      <p:sp>
+        <p:nvSpPr>
+          <p:cNvPr id="29" name="TextBox 28"/>
+          <p:cNvSpPr txBox="1"/>
+          <p:nvPr/>
+        </p:nvSpPr>
+        <p:spPr>
+          <a:xfrm>
+            <a:off x="9052560" y="4206240"/>
+            <a:ext cx="1371600" cy="292608"/>
+          </a:xfrm>
+          <a:prstGeom prst="rect">
+            <a:avLst/>
+          </a:prstGeom>
+          <a:noFill/>
+        </p:spPr>
+        <p:txBody>
+          <a:bodyPr wrap="square">
+            <a:spAutoFit/>
+          </a:bodyPr>
+          <a:lstStyle/>
+          <a:p>
+            <a:pPr algn="ctr"/>
+            <a:r>
+              <a:rPr sz="900" b="0" i="0">
+                <a:solidFill>
+                  <a:srgbClr val="FFFFFF"/>
+                </a:solidFill>
+                <a:latin typeface="IPAGothic"/>
+              </a:rPr>
+              <a:t>利益率</a:t>
+            </a:r>
+          </a:p>
+        </p:txBody>
+      </p:sp>
+      <p:sp>
+        <p:nvSpPr>
+          <p:cNvPr id="30" name="Rectangle 29"/>
+          <p:cNvSpPr/>
+          <p:nvPr/>
+        </p:nvSpPr>
+        <p:spPr>
+          <a:xfrm>
+            <a:off x="10607040" y="3657600"/>
+            <a:ext cx="1371600" cy="868680"/>
+          </a:xfrm>
+          <a:prstGeom prst="rect">
+            <a:avLst/>
+          </a:prstGeom>
+          <a:solidFill>
+            <a:srgbClr val="2C4A3E"/>
+          </a:solidFill>
+          <a:ln>
+            <a:noFill/>
+          </a:ln>
+        </p:spPr>
+        <p:style>
+          <a:lnRef idx="1">
+            <a:schemeClr val="accent1"/>
+          </a:lnRef>
+          <a:fillRef idx="3">
+            <a:schemeClr val="accent1"/>
+          </a:fillRef>
+          <a:effectRef idx="2">
+            <a:schemeClr val="accent1"/>
+          </a:effectRef>
+          <a:fontRef idx="minor">
+            <a:schemeClr val="lt1"/>
+          </a:fontRef>
+        </p:style>
+        <p:txBody>
+          <a:bodyPr rtlCol="0" anchor="ctr"/>
+          <a:lstStyle/>
+          <a:p>
+            <a:pPr algn="ctr"/>
+          </a:p>
+        </p:txBody>
+      </p:sp>
+      <p:sp>
+        <p:nvSpPr>
+          <p:cNvPr id="31" name="TextBox 30"/>
+          <p:cNvSpPr txBox="1"/>
+          <p:nvPr/>
+        </p:nvSpPr>
+        <p:spPr>
+          <a:xfrm>
+            <a:off x="10607040" y="3703320"/>
+            <a:ext cx="1371600" cy="475488"/>
+          </a:xfrm>
+          <a:prstGeom prst="rect">
+            <a:avLst/>
+          </a:prstGeom>
+          <a:noFill/>
+        </p:spPr>
+        <p:txBody>
+          <a:bodyPr wrap="square">
+            <a:spAutoFit/>
+          </a:bodyPr>
+          <a:lstStyle/>
+          <a:p>
+            <a:pPr algn="ctr"/>
+            <a:r>
+              <a:rPr sz="1700" b="1" i="0">
+                <a:solidFill>
+                  <a:srgbClr val="C49A22"/>
+                </a:solidFill>
+                <a:latin typeface="IPAGothic"/>
+              </a:rPr>
+              <a:t>12〜15ヶ月</a:t>
+            </a:r>
+          </a:p>
+        </p:txBody>
+      </p:sp>
+      <p:sp>
+        <p:nvSpPr>
+          <p:cNvPr id="32" name="TextBox 31"/>
+          <p:cNvSpPr txBox="1"/>
+          <p:nvPr/>
+        </p:nvSpPr>
+        <p:spPr>
+          <a:xfrm>
+            <a:off x="10607040" y="4206240"/>
+            <a:ext cx="1371600" cy="292608"/>
+          </a:xfrm>
+          <a:prstGeom prst="rect">
+            <a:avLst/>
+          </a:prstGeom>
+          <a:noFill/>
+        </p:spPr>
+        <p:txBody>
+          <a:bodyPr wrap="square">
+            <a:spAutoFit/>
+          </a:bodyPr>
+          <a:lstStyle/>
+          <a:p>
+            <a:pPr algn="ctr"/>
+            <a:r>
+              <a:rPr sz="900" b="0" i="0">
+                <a:solidFill>
+                  <a:srgbClr val="FFFFFF"/>
+                </a:solidFill>
+                <a:latin typeface="IPAGothic"/>
+              </a:rPr>
               <a:t>投資回収</a:t>
             </a:r>
           </a:p>
@@ -18410,7 +18711,7 @@
       </p:sp>
       <p:sp>
         <p:nvSpPr>
-          <p:cNvPr id="32" name="TextBox 31"/>
+          <p:cNvPr id="33" name="TextBox 32"/>
           <p:cNvSpPr txBox="1"/>
           <p:nvPr/>
         </p:nvSpPr>
@@ -18581,7 +18882,7 @@
         <p:spPr>
           <a:xfrm>
             <a:off x="365760" y="91440"/>
-            <a:ext cx="10972800" cy="777240"/>
+            <a:ext cx="9601200" cy="777240"/>
           </a:xfrm>
           <a:prstGeom prst="rect">
             <a:avLst/>
@@ -18609,7 +18910,7 @@
       </p:sp>
       <p:pic>
         <p:nvPicPr>
-          <p:cNvPr id="4" name="Picture 3" descr="image.png"/>
+          <p:cNvPr id="4" name="Picture 3" descr="zen_brand_logo.png"/>
           <p:cNvPicPr>
             <a:picLocks noChangeAspect="1"/>
           </p:cNvPicPr>
@@ -18623,6 +18924,30 @@
         </p:blipFill>
         <p:spPr>
           <a:xfrm>
+            <a:off x="9875520" y="45720"/>
+            <a:ext cx="2103120" cy="749808"/>
+          </a:xfrm>
+          <a:prstGeom prst="rect">
+            <a:avLst/>
+          </a:prstGeom>
+        </p:spPr>
+      </p:pic>
+      <p:pic>
+        <p:nvPicPr>
+          <p:cNvPr id="5" name="Picture 4" descr="image.png"/>
+          <p:cNvPicPr>
+            <a:picLocks noChangeAspect="1"/>
+          </p:cNvPicPr>
+          <p:nvPr/>
+        </p:nvPicPr>
+        <p:blipFill>
+          <a:blip r:embed="rId3"/>
+          <a:stretch>
+            <a:fillRect/>
+          </a:stretch>
+        </p:blipFill>
+        <p:spPr>
+          <a:xfrm>
             <a:off x="274320" y="1005840"/>
             <a:ext cx="4846320" cy="4114800"/>
           </a:xfrm>
@@ -18633,7 +18958,7 @@
       </p:pic>
       <p:sp>
         <p:nvSpPr>
-          <p:cNvPr id="5" name="Rectangle 4"/>
+          <p:cNvPr id="6" name="Rectangle 5"/>
           <p:cNvSpPr/>
           <p:nvPr/>
         </p:nvSpPr>
@@ -18676,7 +19001,7 @@
       </p:sp>
       <p:sp>
         <p:nvSpPr>
-          <p:cNvPr id="6" name="Rectangle 5"/>
+          <p:cNvPr id="7" name="Rectangle 6"/>
           <p:cNvSpPr/>
           <p:nvPr/>
         </p:nvSpPr>
@@ -18719,7 +19044,7 @@
       </p:sp>
       <p:sp>
         <p:nvSpPr>
-          <p:cNvPr id="7" name="TextBox 6"/>
+          <p:cNvPr id="8" name="TextBox 7"/>
           <p:cNvSpPr txBox="1"/>
           <p:nvPr/>
         </p:nvSpPr>
@@ -18754,7 +19079,7 @@
       </p:sp>
       <p:sp>
         <p:nvSpPr>
-          <p:cNvPr id="8" name="TextBox 7"/>
+          <p:cNvPr id="9" name="TextBox 8"/>
           <p:cNvSpPr txBox="1"/>
           <p:nvPr/>
         </p:nvSpPr>
@@ -18790,7 +19115,7 @@
       </p:sp>
       <p:sp>
         <p:nvSpPr>
-          <p:cNvPr id="9" name="Rectangle 8"/>
+          <p:cNvPr id="10" name="Rectangle 9"/>
           <p:cNvSpPr/>
           <p:nvPr/>
         </p:nvSpPr>
@@ -18833,7 +19158,7 @@
       </p:sp>
       <p:sp>
         <p:nvSpPr>
-          <p:cNvPr id="10" name="Rectangle 9"/>
+          <p:cNvPr id="11" name="Rectangle 10"/>
           <p:cNvSpPr/>
           <p:nvPr/>
         </p:nvSpPr>
@@ -18876,7 +19201,7 @@
       </p:sp>
       <p:sp>
         <p:nvSpPr>
-          <p:cNvPr id="11" name="TextBox 10"/>
+          <p:cNvPr id="12" name="TextBox 11"/>
           <p:cNvSpPr txBox="1"/>
           <p:nvPr/>
         </p:nvSpPr>
@@ -18911,7 +19236,7 @@
       </p:sp>
       <p:sp>
         <p:nvSpPr>
-          <p:cNvPr id="12" name="TextBox 11"/>
+          <p:cNvPr id="13" name="TextBox 12"/>
           <p:cNvSpPr txBox="1"/>
           <p:nvPr/>
         </p:nvSpPr>
@@ -18947,7 +19272,7 @@
       </p:sp>
       <p:sp>
         <p:nvSpPr>
-          <p:cNvPr id="13" name="Rectangle 12"/>
+          <p:cNvPr id="14" name="Rectangle 13"/>
           <p:cNvSpPr/>
           <p:nvPr/>
         </p:nvSpPr>
@@ -18990,7 +19315,7 @@
       </p:sp>
       <p:sp>
         <p:nvSpPr>
-          <p:cNvPr id="14" name="Rectangle 13"/>
+          <p:cNvPr id="15" name="Rectangle 14"/>
           <p:cNvSpPr/>
           <p:nvPr/>
         </p:nvSpPr>
@@ -19033,7 +19358,7 @@
       </p:sp>
       <p:sp>
         <p:nvSpPr>
-          <p:cNvPr id="15" name="TextBox 14"/>
+          <p:cNvPr id="16" name="TextBox 15"/>
           <p:cNvSpPr txBox="1"/>
           <p:nvPr/>
         </p:nvSpPr>
@@ -19068,7 +19393,7 @@
       </p:sp>
       <p:sp>
         <p:nvSpPr>
-          <p:cNvPr id="16" name="TextBox 15"/>
+          <p:cNvPr id="17" name="TextBox 16"/>
           <p:cNvSpPr txBox="1"/>
           <p:nvPr/>
         </p:nvSpPr>
@@ -19104,7 +19429,7 @@
       </p:sp>
       <p:sp>
         <p:nvSpPr>
-          <p:cNvPr id="17" name="Rectangle 16"/>
+          <p:cNvPr id="18" name="Rectangle 17"/>
           <p:cNvSpPr/>
           <p:nvPr/>
         </p:nvSpPr>
@@ -19147,7 +19472,7 @@
       </p:sp>
       <p:sp>
         <p:nvSpPr>
-          <p:cNvPr id="18" name="Rectangle 17"/>
+          <p:cNvPr id="19" name="Rectangle 18"/>
           <p:cNvSpPr/>
           <p:nvPr/>
         </p:nvSpPr>
@@ -19190,7 +19515,7 @@
       </p:sp>
       <p:sp>
         <p:nvSpPr>
-          <p:cNvPr id="19" name="TextBox 18"/>
+          <p:cNvPr id="20" name="TextBox 19"/>
           <p:cNvSpPr txBox="1"/>
           <p:nvPr/>
         </p:nvSpPr>
@@ -19225,7 +19550,7 @@
       </p:sp>
       <p:sp>
         <p:nvSpPr>
-          <p:cNvPr id="20" name="TextBox 19"/>
+          <p:cNvPr id="21" name="TextBox 20"/>
           <p:cNvSpPr txBox="1"/>
           <p:nvPr/>
         </p:nvSpPr>
@@ -19261,7 +19586,7 @@
       </p:sp>
       <p:sp>
         <p:nvSpPr>
-          <p:cNvPr id="21" name="Rectangle 20"/>
+          <p:cNvPr id="22" name="Rectangle 21"/>
           <p:cNvSpPr/>
           <p:nvPr/>
         </p:nvSpPr>
@@ -19304,7 +19629,7 @@
       </p:sp>
       <p:sp>
         <p:nvSpPr>
-          <p:cNvPr id="22" name="Rectangle 21"/>
+          <p:cNvPr id="23" name="Rectangle 22"/>
           <p:cNvSpPr/>
           <p:nvPr/>
         </p:nvSpPr>
@@ -19347,7 +19672,7 @@
       </p:sp>
       <p:sp>
         <p:nvSpPr>
-          <p:cNvPr id="23" name="TextBox 22"/>
+          <p:cNvPr id="24" name="TextBox 23"/>
           <p:cNvSpPr txBox="1"/>
           <p:nvPr/>
         </p:nvSpPr>
@@ -19382,7 +19707,7 @@
       </p:sp>
       <p:sp>
         <p:nvSpPr>
-          <p:cNvPr id="24" name="TextBox 23"/>
+          <p:cNvPr id="25" name="TextBox 24"/>
           <p:cNvSpPr txBox="1"/>
           <p:nvPr/>
         </p:nvSpPr>
@@ -19418,7 +19743,7 @@
       </p:sp>
       <p:sp>
         <p:nvSpPr>
-          <p:cNvPr id="25" name="TextBox 24"/>
+          <p:cNvPr id="26" name="TextBox 25"/>
           <p:cNvSpPr txBox="1"/>
           <p:nvPr/>
         </p:nvSpPr>
@@ -19529,7 +19854,7 @@
         <p:spPr>
           <a:xfrm>
             <a:off x="365760" y="91440"/>
-            <a:ext cx="10972800" cy="777240"/>
+            <a:ext cx="9601200" cy="777240"/>
           </a:xfrm>
           <a:prstGeom prst="rect">
             <a:avLst/>
@@ -19555,9 +19880,33 @@
           </a:p>
         </p:txBody>
       </p:sp>
-      <p:sp>
-        <p:nvSpPr>
-          <p:cNvPr id="4" name="TextBox 3"/>
+      <p:pic>
+        <p:nvPicPr>
+          <p:cNvPr id="4" name="Picture 3" descr="zen_brand_logo.png"/>
+          <p:cNvPicPr>
+            <a:picLocks noChangeAspect="1"/>
+          </p:cNvPicPr>
+          <p:nvPr/>
+        </p:nvPicPr>
+        <p:blipFill>
+          <a:blip r:embed="rId2"/>
+          <a:stretch>
+            <a:fillRect/>
+          </a:stretch>
+        </p:blipFill>
+        <p:spPr>
+          <a:xfrm>
+            <a:off x="9875520" y="45720"/>
+            <a:ext cx="2103120" cy="749808"/>
+          </a:xfrm>
+          <a:prstGeom prst="rect">
+            <a:avLst/>
+          </a:prstGeom>
+        </p:spPr>
+      </p:pic>
+      <p:sp>
+        <p:nvSpPr>
+          <p:cNvPr id="5" name="TextBox 4"/>
           <p:cNvSpPr txBox="1"/>
           <p:nvPr/>
         </p:nvSpPr>
@@ -19592,7 +19941,7 @@
       </p:sp>
       <p:sp>
         <p:nvSpPr>
-          <p:cNvPr id="5" name="Rectangle 4"/>
+          <p:cNvPr id="6" name="Rectangle 5"/>
           <p:cNvSpPr/>
           <p:nvPr/>
         </p:nvSpPr>
@@ -19635,7 +19984,7 @@
       </p:sp>
       <p:sp>
         <p:nvSpPr>
-          <p:cNvPr id="6" name="TextBox 5"/>
+          <p:cNvPr id="7" name="TextBox 6"/>
           <p:cNvSpPr txBox="1"/>
           <p:nvPr/>
         </p:nvSpPr>
@@ -19682,7 +20031,7 @@
       </p:sp>
       <p:sp>
         <p:nvSpPr>
-          <p:cNvPr id="7" name="TextBox 6"/>
+          <p:cNvPr id="8" name="TextBox 7"/>
           <p:cNvSpPr txBox="1"/>
           <p:nvPr/>
         </p:nvSpPr>
@@ -19729,7 +20078,7 @@
       </p:sp>
       <p:sp>
         <p:nvSpPr>
-          <p:cNvPr id="8" name="Rectangle 7"/>
+          <p:cNvPr id="9" name="Rectangle 8"/>
           <p:cNvSpPr/>
           <p:nvPr/>
         </p:nvSpPr>
@@ -19772,7 +20121,7 @@
       </p:sp>
       <p:sp>
         <p:nvSpPr>
-          <p:cNvPr id="9" name="TextBox 8"/>
+          <p:cNvPr id="10" name="TextBox 9"/>
           <p:cNvSpPr txBox="1"/>
           <p:nvPr/>
         </p:nvSpPr>
@@ -19819,7 +20168,7 @@
       </p:sp>
       <p:sp>
         <p:nvSpPr>
-          <p:cNvPr id="10" name="TextBox 9"/>
+          <p:cNvPr id="11" name="TextBox 10"/>
           <p:cNvSpPr txBox="1"/>
           <p:nvPr/>
         </p:nvSpPr>
@@ -19866,7 +20215,7 @@
       </p:sp>
       <p:sp>
         <p:nvSpPr>
-          <p:cNvPr id="11" name="Rectangle 10"/>
+          <p:cNvPr id="12" name="Rectangle 11"/>
           <p:cNvSpPr/>
           <p:nvPr/>
         </p:nvSpPr>
@@ -19909,7 +20258,7 @@
       </p:sp>
       <p:sp>
         <p:nvSpPr>
-          <p:cNvPr id="12" name="TextBox 11"/>
+          <p:cNvPr id="13" name="TextBox 12"/>
           <p:cNvSpPr txBox="1"/>
           <p:nvPr/>
         </p:nvSpPr>
@@ -19956,7 +20305,7 @@
       </p:sp>
       <p:sp>
         <p:nvSpPr>
-          <p:cNvPr id="13" name="TextBox 12"/>
+          <p:cNvPr id="14" name="TextBox 13"/>
           <p:cNvSpPr txBox="1"/>
           <p:nvPr/>
         </p:nvSpPr>
@@ -20003,7 +20352,7 @@
       </p:sp>
       <p:sp>
         <p:nvSpPr>
-          <p:cNvPr id="14" name="Rectangle 13"/>
+          <p:cNvPr id="15" name="Rectangle 14"/>
           <p:cNvSpPr/>
           <p:nvPr/>
         </p:nvSpPr>
@@ -20046,7 +20395,7 @@
       </p:sp>
       <p:sp>
         <p:nvSpPr>
-          <p:cNvPr id="15" name="TextBox 14"/>
+          <p:cNvPr id="16" name="TextBox 15"/>
           <p:cNvSpPr txBox="1"/>
           <p:nvPr/>
         </p:nvSpPr>
@@ -20081,7 +20430,7 @@
       </p:sp>
       <p:sp>
         <p:nvSpPr>
-          <p:cNvPr id="16" name="TextBox 15"/>
+          <p:cNvPr id="17" name="TextBox 16"/>
           <p:cNvSpPr txBox="1"/>
           <p:nvPr/>
         </p:nvSpPr>
@@ -20152,7 +20501,7 @@
       </p:sp>
       <p:sp>
         <p:nvSpPr>
-          <p:cNvPr id="17" name="Rectangle 16"/>
+          <p:cNvPr id="18" name="Rectangle 17"/>
           <p:cNvSpPr/>
           <p:nvPr/>
         </p:nvSpPr>
@@ -20195,7 +20544,7 @@
       </p:sp>
       <p:sp>
         <p:nvSpPr>
-          <p:cNvPr id="18" name="TextBox 17"/>
+          <p:cNvPr id="19" name="TextBox 18"/>
           <p:cNvSpPr txBox="1"/>
           <p:nvPr/>
         </p:nvSpPr>
@@ -20230,7 +20579,7 @@
       </p:sp>
       <p:sp>
         <p:nvSpPr>
-          <p:cNvPr id="19" name="TextBox 18"/>
+          <p:cNvPr id="20" name="TextBox 19"/>
           <p:cNvSpPr txBox="1"/>
           <p:nvPr/>
         </p:nvSpPr>
@@ -20301,7 +20650,7 @@
       </p:sp>
       <p:sp>
         <p:nvSpPr>
-          <p:cNvPr id="20" name="Rectangle 19"/>
+          <p:cNvPr id="21" name="Rectangle 20"/>
           <p:cNvSpPr/>
           <p:nvPr/>
         </p:nvSpPr>
@@ -20344,7 +20693,7 @@
       </p:sp>
       <p:sp>
         <p:nvSpPr>
-          <p:cNvPr id="21" name="TextBox 20"/>
+          <p:cNvPr id="22" name="TextBox 21"/>
           <p:cNvSpPr txBox="1"/>
           <p:nvPr/>
         </p:nvSpPr>
@@ -20379,7 +20728,7 @@
       </p:sp>
       <p:sp>
         <p:nvSpPr>
-          <p:cNvPr id="22" name="TextBox 21"/>
+          <p:cNvPr id="23" name="TextBox 22"/>
           <p:cNvSpPr txBox="1"/>
           <p:nvPr/>
         </p:nvSpPr>
@@ -20450,7 +20799,7 @@
       </p:sp>
       <p:sp>
         <p:nvSpPr>
-          <p:cNvPr id="23" name="Rectangle 22"/>
+          <p:cNvPr id="24" name="Rectangle 23"/>
           <p:cNvSpPr/>
           <p:nvPr/>
         </p:nvSpPr>
@@ -20493,7 +20842,7 @@
       </p:sp>
       <p:sp>
         <p:nvSpPr>
-          <p:cNvPr id="24" name="TextBox 23"/>
+          <p:cNvPr id="25" name="TextBox 24"/>
           <p:cNvSpPr txBox="1"/>
           <p:nvPr/>
         </p:nvSpPr>
@@ -20528,7 +20877,7 @@
       </p:sp>
       <p:sp>
         <p:nvSpPr>
-          <p:cNvPr id="25" name="TextBox 24"/>
+          <p:cNvPr id="26" name="TextBox 25"/>
           <p:cNvSpPr txBox="1"/>
           <p:nvPr/>
         </p:nvSpPr>
@@ -20599,7 +20948,7 @@
       </p:sp>
       <p:sp>
         <p:nvSpPr>
-          <p:cNvPr id="26" name="TextBox 25"/>
+          <p:cNvPr id="27" name="TextBox 26"/>
           <p:cNvSpPr txBox="1"/>
           <p:nvPr/>
         </p:nvSpPr>

--- a/zen/07_融資・投資家資料/然グループ_統合ピッチデッキ_強化版.pptx
+++ b/zen/07_融資・投資家資料/然グループ_統合ピッチデッキ_強化版.pptx
@@ -3156,7 +3156,7 @@
       </p:sp>
       <p:pic>
         <p:nvPicPr>
-          <p:cNvPr id="3" name="Picture 2" descr="zen_brand_logo.png"/>
+          <p:cNvPr id="3" name="Picture 2" descr="ZEN_GROUP_LOGO.png"/>
           <p:cNvPicPr>
             <a:picLocks noChangeAspect="1"/>
           </p:cNvPicPr>
@@ -3170,24 +3170,96 @@
         </p:blipFill>
         <p:spPr>
           <a:xfrm>
-            <a:off x="228600" y="1097280"/>
-            <a:ext cx="3657600" cy="3657600"/>
+            <a:off x="91440" y="1645920"/>
+            <a:ext cx="3931920" cy="1188720"/>
           </a:xfrm>
           <a:prstGeom prst="rect">
             <a:avLst/>
           </a:prstGeom>
         </p:spPr>
       </p:pic>
-      <p:sp>
-        <p:nvSpPr>
-          <p:cNvPr id="4" name="TextBox 3"/>
+      <p:pic>
+        <p:nvPicPr>
+          <p:cNvPr id="4" name="Picture 3" descr="ZEN_DASHI_LOGO.png"/>
+          <p:cNvPicPr>
+            <a:picLocks noChangeAspect="1"/>
+          </p:cNvPicPr>
+          <p:nvPr/>
+        </p:nvPicPr>
+        <p:blipFill>
+          <a:blip r:embed="rId3"/>
+          <a:stretch>
+            <a:fillRect/>
+          </a:stretch>
+        </p:blipFill>
+        <p:spPr>
+          <a:xfrm>
+            <a:off x="274320" y="3017520"/>
+            <a:ext cx="3566160" cy="868680"/>
+          </a:xfrm>
+          <a:prstGeom prst="rect">
+            <a:avLst/>
+          </a:prstGeom>
+        </p:spPr>
+      </p:pic>
+      <p:pic>
+        <p:nvPicPr>
+          <p:cNvPr id="5" name="Picture 4" descr="ZEN_NIKU_LOGO.png"/>
+          <p:cNvPicPr>
+            <a:picLocks noChangeAspect="1"/>
+          </p:cNvPicPr>
+          <p:nvPr/>
+        </p:nvPicPr>
+        <p:blipFill>
+          <a:blip r:embed="rId4"/>
+          <a:stretch>
+            <a:fillRect/>
+          </a:stretch>
+        </p:blipFill>
+        <p:spPr>
+          <a:xfrm>
+            <a:off x="274320" y="4023360"/>
+            <a:ext cx="3566160" cy="868680"/>
+          </a:xfrm>
+          <a:prstGeom prst="rect">
+            <a:avLst/>
+          </a:prstGeom>
+        </p:spPr>
+      </p:pic>
+      <p:pic>
+        <p:nvPicPr>
+          <p:cNvPr id="6" name="Picture 5" descr="ZEN_SOBA_LOGO.png"/>
+          <p:cNvPicPr>
+            <a:picLocks noChangeAspect="1"/>
+          </p:cNvPicPr>
+          <p:nvPr/>
+        </p:nvPicPr>
+        <p:blipFill>
+          <a:blip r:embed="rId5"/>
+          <a:stretch>
+            <a:fillRect/>
+          </a:stretch>
+        </p:blipFill>
+        <p:spPr>
+          <a:xfrm>
+            <a:off x="274320" y="5029200"/>
+            <a:ext cx="3566160" cy="868680"/>
+          </a:xfrm>
+          <a:prstGeom prst="rect">
+            <a:avLst/>
+          </a:prstGeom>
+        </p:spPr>
+      </p:pic>
+      <p:sp>
+        <p:nvSpPr>
+          <p:cNvPr id="7" name="TextBox 6"/>
           <p:cNvSpPr txBox="1"/>
           <p:nvPr/>
         </p:nvSpPr>
         <p:spPr>
           <a:xfrm>
-            <a:off x="0" y="4846320"/>
-            <a:ext cx="4114800" cy="457200"/>
+            <a:off x="0" y="5989320"/>
+            <a:ext cx="4114800" cy="365760"/>
           </a:xfrm>
           <a:prstGeom prst="rect">
             <a:avLst/>
@@ -3202,7 +3274,7 @@
           <a:p>
             <a:pPr algn="ctr"/>
             <a:r>
-              <a:rPr sz="1300" b="0" i="1">
+              <a:rPr sz="1100" b="0" i="1">
                 <a:solidFill>
                   <a:srgbClr val="F0EEE8"/>
                 </a:solidFill>
@@ -3215,7 +3287,7 @@
       </p:sp>
       <p:sp>
         <p:nvSpPr>
-          <p:cNvPr id="5" name="TextBox 4"/>
+          <p:cNvPr id="8" name="TextBox 7"/>
           <p:cNvSpPr txBox="1"/>
           <p:nvPr/>
         </p:nvSpPr>
@@ -3250,7 +3322,7 @@
       </p:sp>
       <p:sp>
         <p:nvSpPr>
-          <p:cNvPr id="6" name="TextBox 5"/>
+          <p:cNvPr id="9" name="TextBox 8"/>
           <p:cNvSpPr txBox="1"/>
           <p:nvPr/>
         </p:nvSpPr>
@@ -3285,7 +3357,7 @@
       </p:sp>
       <p:sp>
         <p:nvSpPr>
-          <p:cNvPr id="7" name="Rectangle 6"/>
+          <p:cNvPr id="10" name="Rectangle 9"/>
           <p:cNvSpPr/>
           <p:nvPr/>
         </p:nvSpPr>
@@ -3328,7 +3400,7 @@
       </p:sp>
       <p:sp>
         <p:nvSpPr>
-          <p:cNvPr id="8" name="TextBox 7"/>
+          <p:cNvPr id="11" name="TextBox 10"/>
           <p:cNvSpPr txBox="1"/>
           <p:nvPr/>
         </p:nvSpPr>
@@ -3363,7 +3435,7 @@
       </p:sp>
       <p:sp>
         <p:nvSpPr>
-          <p:cNvPr id="9" name="TextBox 8"/>
+          <p:cNvPr id="12" name="TextBox 11"/>
           <p:cNvSpPr txBox="1"/>
           <p:nvPr/>
         </p:nvSpPr>
@@ -3410,7 +3482,7 @@
       </p:sp>
       <p:sp>
         <p:nvSpPr>
-          <p:cNvPr id="10" name="Rectangle 9"/>
+          <p:cNvPr id="13" name="Rectangle 12"/>
           <p:cNvSpPr/>
           <p:nvPr/>
         </p:nvSpPr>
@@ -3453,7 +3525,7 @@
       </p:sp>
       <p:sp>
         <p:nvSpPr>
-          <p:cNvPr id="11" name="Rectangle 10"/>
+          <p:cNvPr id="14" name="Rectangle 13"/>
           <p:cNvSpPr/>
           <p:nvPr/>
         </p:nvSpPr>
@@ -3496,7 +3568,7 @@
       </p:sp>
       <p:sp>
         <p:nvSpPr>
-          <p:cNvPr id="12" name="Rectangle 11"/>
+          <p:cNvPr id="15" name="Rectangle 14"/>
           <p:cNvSpPr/>
           <p:nvPr/>
         </p:nvSpPr>
@@ -3539,7 +3611,7 @@
       </p:sp>
       <p:sp>
         <p:nvSpPr>
-          <p:cNvPr id="13" name="TextBox 12"/>
+          <p:cNvPr id="16" name="TextBox 15"/>
           <p:cNvSpPr txBox="1"/>
           <p:nvPr/>
         </p:nvSpPr>
@@ -3574,7 +3646,7 @@
       </p:sp>
       <p:sp>
         <p:nvSpPr>
-          <p:cNvPr id="14" name="Rectangle 13"/>
+          <p:cNvPr id="17" name="Rectangle 16"/>
           <p:cNvSpPr/>
           <p:nvPr/>
         </p:nvSpPr>
@@ -3617,7 +3689,7 @@
       </p:sp>
       <p:sp>
         <p:nvSpPr>
-          <p:cNvPr id="15" name="TextBox 14"/>
+          <p:cNvPr id="18" name="TextBox 17"/>
           <p:cNvSpPr txBox="1"/>
           <p:nvPr/>
         </p:nvSpPr>
@@ -15660,7 +15732,7 @@
       </p:sp>
       <p:pic>
         <p:nvPicPr>
-          <p:cNvPr id="19" name="Picture 18" descr="image.png"/>
+          <p:cNvPr id="19" name="Picture 18" descr="ZEN_DASHI_LOGO.png"/>
           <p:cNvPicPr>
             <a:picLocks noChangeAspect="1"/>
           </p:cNvPicPr>
@@ -15674,6 +15746,30 @@
         </p:blipFill>
         <p:spPr>
           <a:xfrm>
+            <a:off x="6035040" y="1600200"/>
+            <a:ext cx="2560320" cy="640080"/>
+          </a:xfrm>
+          <a:prstGeom prst="rect">
+            <a:avLst/>
+          </a:prstGeom>
+        </p:spPr>
+      </p:pic>
+      <p:pic>
+        <p:nvPicPr>
+          <p:cNvPr id="20" name="Picture 19" descr="image.png"/>
+          <p:cNvPicPr>
+            <a:picLocks noChangeAspect="1"/>
+          </p:cNvPicPr>
+          <p:nvPr/>
+        </p:nvPicPr>
+        <p:blipFill>
+          <a:blip r:embed="rId4"/>
+          <a:stretch>
+            <a:fillRect/>
+          </a:stretch>
+        </p:blipFill>
+        <p:spPr>
+          <a:xfrm>
             <a:off x="274320" y="3474720"/>
             <a:ext cx="5303520" cy="3017520"/>
           </a:xfrm>
@@ -15684,7 +15780,7 @@
       </p:pic>
       <p:sp>
         <p:nvSpPr>
-          <p:cNvPr id="20" name="Rectangle 19"/>
+          <p:cNvPr id="21" name="Rectangle 20"/>
           <p:cNvSpPr/>
           <p:nvPr/>
         </p:nvSpPr>
@@ -15727,7 +15823,7 @@
       </p:sp>
       <p:sp>
         <p:nvSpPr>
-          <p:cNvPr id="21" name="TextBox 20"/>
+          <p:cNvPr id="22" name="TextBox 21"/>
           <p:cNvSpPr txBox="1"/>
           <p:nvPr/>
         </p:nvSpPr>
@@ -15762,7 +15858,7 @@
       </p:sp>
       <p:sp>
         <p:nvSpPr>
-          <p:cNvPr id="22" name="TextBox 21"/>
+          <p:cNvPr id="23" name="TextBox 22"/>
           <p:cNvSpPr txBox="1"/>
           <p:nvPr/>
         </p:nvSpPr>
@@ -15797,7 +15893,7 @@
       </p:sp>
       <p:sp>
         <p:nvSpPr>
-          <p:cNvPr id="23" name="Rectangle 22"/>
+          <p:cNvPr id="24" name="Rectangle 23"/>
           <p:cNvSpPr/>
           <p:nvPr/>
         </p:nvSpPr>
@@ -15840,7 +15936,7 @@
       </p:sp>
       <p:sp>
         <p:nvSpPr>
-          <p:cNvPr id="24" name="TextBox 23"/>
+          <p:cNvPr id="25" name="TextBox 24"/>
           <p:cNvSpPr txBox="1"/>
           <p:nvPr/>
         </p:nvSpPr>
@@ -15875,7 +15971,7 @@
       </p:sp>
       <p:sp>
         <p:nvSpPr>
-          <p:cNvPr id="25" name="TextBox 24"/>
+          <p:cNvPr id="26" name="TextBox 25"/>
           <p:cNvSpPr txBox="1"/>
           <p:nvPr/>
         </p:nvSpPr>
@@ -15910,7 +16006,7 @@
       </p:sp>
       <p:sp>
         <p:nvSpPr>
-          <p:cNvPr id="26" name="Rectangle 25"/>
+          <p:cNvPr id="27" name="Rectangle 26"/>
           <p:cNvSpPr/>
           <p:nvPr/>
         </p:nvSpPr>
@@ -15953,7 +16049,7 @@
       </p:sp>
       <p:sp>
         <p:nvSpPr>
-          <p:cNvPr id="27" name="TextBox 26"/>
+          <p:cNvPr id="28" name="TextBox 27"/>
           <p:cNvSpPr txBox="1"/>
           <p:nvPr/>
         </p:nvSpPr>
@@ -15988,7 +16084,7 @@
       </p:sp>
       <p:sp>
         <p:nvSpPr>
-          <p:cNvPr id="28" name="TextBox 27"/>
+          <p:cNvPr id="29" name="TextBox 28"/>
           <p:cNvSpPr txBox="1"/>
           <p:nvPr/>
         </p:nvSpPr>
@@ -16023,7 +16119,7 @@
       </p:sp>
       <p:sp>
         <p:nvSpPr>
-          <p:cNvPr id="29" name="Rectangle 28"/>
+          <p:cNvPr id="30" name="Rectangle 29"/>
           <p:cNvSpPr/>
           <p:nvPr/>
         </p:nvSpPr>
@@ -16066,7 +16162,7 @@
       </p:sp>
       <p:sp>
         <p:nvSpPr>
-          <p:cNvPr id="30" name="TextBox 29"/>
+          <p:cNvPr id="31" name="TextBox 30"/>
           <p:cNvSpPr txBox="1"/>
           <p:nvPr/>
         </p:nvSpPr>
@@ -16101,7 +16197,7 @@
       </p:sp>
       <p:sp>
         <p:nvSpPr>
-          <p:cNvPr id="31" name="TextBox 30"/>
+          <p:cNvPr id="32" name="TextBox 31"/>
           <p:cNvSpPr txBox="1"/>
           <p:nvPr/>
         </p:nvSpPr>
@@ -16136,7 +16232,7 @@
       </p:sp>
       <p:sp>
         <p:nvSpPr>
-          <p:cNvPr id="32" name="Rectangle 31"/>
+          <p:cNvPr id="33" name="Rectangle 32"/>
           <p:cNvSpPr/>
           <p:nvPr/>
         </p:nvSpPr>
@@ -16179,7 +16275,7 @@
       </p:sp>
       <p:sp>
         <p:nvSpPr>
-          <p:cNvPr id="33" name="TextBox 32"/>
+          <p:cNvPr id="34" name="TextBox 33"/>
           <p:cNvSpPr txBox="1"/>
           <p:nvPr/>
         </p:nvSpPr>
@@ -16214,7 +16310,7 @@
       </p:sp>
       <p:sp>
         <p:nvSpPr>
-          <p:cNvPr id="34" name="TextBox 33"/>
+          <p:cNvPr id="35" name="TextBox 34"/>
           <p:cNvSpPr txBox="1"/>
           <p:nvPr/>
         </p:nvSpPr>
@@ -16929,9 +17025,33 @@
           </a:p>
         </p:txBody>
       </p:sp>
-      <p:sp>
-        <p:nvSpPr>
-          <p:cNvPr id="19" name="Rectangle 18"/>
+      <p:pic>
+        <p:nvPicPr>
+          <p:cNvPr id="19" name="Picture 18" descr="ZEN_NIKU_LOGO.png"/>
+          <p:cNvPicPr>
+            <a:picLocks noChangeAspect="1"/>
+          </p:cNvPicPr>
+          <p:nvPr/>
+        </p:nvPicPr>
+        <p:blipFill>
+          <a:blip r:embed="rId3"/>
+          <a:stretch>
+            <a:fillRect/>
+          </a:stretch>
+        </p:blipFill>
+        <p:spPr>
+          <a:xfrm>
+            <a:off x="6035040" y="1600200"/>
+            <a:ext cx="2560320" cy="640080"/>
+          </a:xfrm>
+          <a:prstGeom prst="rect">
+            <a:avLst/>
+          </a:prstGeom>
+        </p:spPr>
+      </p:pic>
+      <p:sp>
+        <p:nvSpPr>
+          <p:cNvPr id="20" name="Rectangle 19"/>
           <p:cNvSpPr/>
           <p:nvPr/>
         </p:nvSpPr>
@@ -16974,7 +17094,7 @@
       </p:sp>
       <p:sp>
         <p:nvSpPr>
-          <p:cNvPr id="20" name="TextBox 19"/>
+          <p:cNvPr id="21" name="TextBox 20"/>
           <p:cNvSpPr txBox="1"/>
           <p:nvPr/>
         </p:nvSpPr>
@@ -17009,7 +17129,7 @@
       </p:sp>
       <p:sp>
         <p:nvSpPr>
-          <p:cNvPr id="21" name="TextBox 20"/>
+          <p:cNvPr id="22" name="TextBox 21"/>
           <p:cNvSpPr txBox="1"/>
           <p:nvPr/>
         </p:nvSpPr>
@@ -17044,7 +17164,7 @@
       </p:sp>
       <p:sp>
         <p:nvSpPr>
-          <p:cNvPr id="22" name="Rectangle 21"/>
+          <p:cNvPr id="23" name="Rectangle 22"/>
           <p:cNvSpPr/>
           <p:nvPr/>
         </p:nvSpPr>
@@ -17087,7 +17207,7 @@
       </p:sp>
       <p:sp>
         <p:nvSpPr>
-          <p:cNvPr id="23" name="TextBox 22"/>
+          <p:cNvPr id="24" name="TextBox 23"/>
           <p:cNvSpPr txBox="1"/>
           <p:nvPr/>
         </p:nvSpPr>
@@ -17122,7 +17242,7 @@
       </p:sp>
       <p:sp>
         <p:nvSpPr>
-          <p:cNvPr id="24" name="TextBox 23"/>
+          <p:cNvPr id="25" name="TextBox 24"/>
           <p:cNvSpPr txBox="1"/>
           <p:nvPr/>
         </p:nvSpPr>
@@ -17157,7 +17277,7 @@
       </p:sp>
       <p:sp>
         <p:nvSpPr>
-          <p:cNvPr id="25" name="Rectangle 24"/>
+          <p:cNvPr id="26" name="Rectangle 25"/>
           <p:cNvSpPr/>
           <p:nvPr/>
         </p:nvSpPr>
@@ -17200,7 +17320,7 @@
       </p:sp>
       <p:sp>
         <p:nvSpPr>
-          <p:cNvPr id="26" name="TextBox 25"/>
+          <p:cNvPr id="27" name="TextBox 26"/>
           <p:cNvSpPr txBox="1"/>
           <p:nvPr/>
         </p:nvSpPr>
@@ -17235,7 +17355,7 @@
       </p:sp>
       <p:sp>
         <p:nvSpPr>
-          <p:cNvPr id="27" name="TextBox 26"/>
+          <p:cNvPr id="28" name="TextBox 27"/>
           <p:cNvSpPr txBox="1"/>
           <p:nvPr/>
         </p:nvSpPr>
@@ -17270,7 +17390,7 @@
       </p:sp>
       <p:sp>
         <p:nvSpPr>
-          <p:cNvPr id="28" name="Rectangle 27"/>
+          <p:cNvPr id="29" name="Rectangle 28"/>
           <p:cNvSpPr/>
           <p:nvPr/>
         </p:nvSpPr>
@@ -17313,7 +17433,7 @@
       </p:sp>
       <p:sp>
         <p:nvSpPr>
-          <p:cNvPr id="29" name="TextBox 28"/>
+          <p:cNvPr id="30" name="TextBox 29"/>
           <p:cNvSpPr txBox="1"/>
           <p:nvPr/>
         </p:nvSpPr>
@@ -17348,7 +17468,7 @@
       </p:sp>
       <p:sp>
         <p:nvSpPr>
-          <p:cNvPr id="30" name="TextBox 29"/>
+          <p:cNvPr id="31" name="TextBox 30"/>
           <p:cNvSpPr txBox="1"/>
           <p:nvPr/>
         </p:nvSpPr>
@@ -17383,7 +17503,7 @@
       </p:sp>
       <p:sp>
         <p:nvSpPr>
-          <p:cNvPr id="31" name="Rectangle 30"/>
+          <p:cNvPr id="32" name="Rectangle 31"/>
           <p:cNvSpPr/>
           <p:nvPr/>
         </p:nvSpPr>
@@ -17426,7 +17546,7 @@
       </p:sp>
       <p:sp>
         <p:nvSpPr>
-          <p:cNvPr id="32" name="TextBox 31"/>
+          <p:cNvPr id="33" name="TextBox 32"/>
           <p:cNvSpPr txBox="1"/>
           <p:nvPr/>
         </p:nvSpPr>
@@ -17461,7 +17581,7 @@
       </p:sp>
       <p:sp>
         <p:nvSpPr>
-          <p:cNvPr id="33" name="TextBox 32"/>
+          <p:cNvPr id="34" name="TextBox 33"/>
           <p:cNvSpPr txBox="1"/>
           <p:nvPr/>
         </p:nvSpPr>
@@ -17496,7 +17616,7 @@
       </p:sp>
       <p:sp>
         <p:nvSpPr>
-          <p:cNvPr id="34" name="TextBox 33"/>
+          <p:cNvPr id="35" name="TextBox 34"/>
           <p:cNvSpPr txBox="1"/>
           <p:nvPr/>
         </p:nvSpPr>
@@ -17531,7 +17651,7 @@
       </p:sp>
       <p:sp>
         <p:nvSpPr>
-          <p:cNvPr id="35" name="TextBox 34"/>
+          <p:cNvPr id="36" name="TextBox 35"/>
           <p:cNvSpPr txBox="1"/>
           <p:nvPr/>
         </p:nvSpPr>
@@ -18235,7 +18355,7 @@
       </p:sp>
       <p:pic>
         <p:nvPicPr>
-          <p:cNvPr id="20" name="Picture 19" descr="image.png"/>
+          <p:cNvPr id="20" name="Picture 19" descr="ZEN_SOBA_LOGO.png"/>
           <p:cNvPicPr>
             <a:picLocks noChangeAspect="1"/>
           </p:cNvPicPr>
@@ -18249,6 +18369,30 @@
         </p:blipFill>
         <p:spPr>
           <a:xfrm>
+            <a:off x="6035040" y="1600200"/>
+            <a:ext cx="2560320" cy="640080"/>
+          </a:xfrm>
+          <a:prstGeom prst="rect">
+            <a:avLst/>
+          </a:prstGeom>
+        </p:spPr>
+      </p:pic>
+      <p:pic>
+        <p:nvPicPr>
+          <p:cNvPr id="21" name="Picture 20" descr="image.png"/>
+          <p:cNvPicPr>
+            <a:picLocks noChangeAspect="1"/>
+          </p:cNvPicPr>
+          <p:nvPr/>
+        </p:nvPicPr>
+        <p:blipFill>
+          <a:blip r:embed="rId4"/>
+          <a:stretch>
+            <a:fillRect/>
+          </a:stretch>
+        </p:blipFill>
+        <p:spPr>
+          <a:xfrm>
             <a:off x="274320" y="3657600"/>
             <a:ext cx="5486400" cy="2834640"/>
           </a:xfrm>
@@ -18259,7 +18403,7 @@
       </p:pic>
       <p:sp>
         <p:nvSpPr>
-          <p:cNvPr id="21" name="Rectangle 20"/>
+          <p:cNvPr id="22" name="Rectangle 21"/>
           <p:cNvSpPr/>
           <p:nvPr/>
         </p:nvSpPr>
@@ -18302,7 +18446,7 @@
       </p:sp>
       <p:sp>
         <p:nvSpPr>
-          <p:cNvPr id="22" name="TextBox 21"/>
+          <p:cNvPr id="23" name="TextBox 22"/>
           <p:cNvSpPr txBox="1"/>
           <p:nvPr/>
         </p:nvSpPr>
@@ -18337,7 +18481,7 @@
       </p:sp>
       <p:sp>
         <p:nvSpPr>
-          <p:cNvPr id="23" name="TextBox 22"/>
+          <p:cNvPr id="24" name="TextBox 23"/>
           <p:cNvSpPr txBox="1"/>
           <p:nvPr/>
         </p:nvSpPr>
@@ -18372,7 +18516,7 @@
       </p:sp>
       <p:sp>
         <p:nvSpPr>
-          <p:cNvPr id="24" name="Rectangle 23"/>
+          <p:cNvPr id="25" name="Rectangle 24"/>
           <p:cNvSpPr/>
           <p:nvPr/>
         </p:nvSpPr>
@@ -18415,7 +18559,7 @@
       </p:sp>
       <p:sp>
         <p:nvSpPr>
-          <p:cNvPr id="25" name="TextBox 24"/>
+          <p:cNvPr id="26" name="TextBox 25"/>
           <p:cNvSpPr txBox="1"/>
           <p:nvPr/>
         </p:nvSpPr>
@@ -18450,7 +18594,7 @@
       </p:sp>
       <p:sp>
         <p:nvSpPr>
-          <p:cNvPr id="26" name="TextBox 25"/>
+          <p:cNvPr id="27" name="TextBox 26"/>
           <p:cNvSpPr txBox="1"/>
           <p:nvPr/>
         </p:nvSpPr>
@@ -18485,7 +18629,7 @@
       </p:sp>
       <p:sp>
         <p:nvSpPr>
-          <p:cNvPr id="27" name="Rectangle 26"/>
+          <p:cNvPr id="28" name="Rectangle 27"/>
           <p:cNvSpPr/>
           <p:nvPr/>
         </p:nvSpPr>
@@ -18528,7 +18672,7 @@
       </p:sp>
       <p:sp>
         <p:nvSpPr>
-          <p:cNvPr id="28" name="TextBox 27"/>
+          <p:cNvPr id="29" name="TextBox 28"/>
           <p:cNvSpPr txBox="1"/>
           <p:nvPr/>
         </p:nvSpPr>
@@ -18563,7 +18707,7 @@
       </p:sp>
       <p:sp>
         <p:nvSpPr>
-          <p:cNvPr id="29" name="TextBox 28"/>
+          <p:cNvPr id="30" name="TextBox 29"/>
           <p:cNvSpPr txBox="1"/>
           <p:nvPr/>
         </p:nvSpPr>
@@ -18598,7 +18742,7 @@
       </p:sp>
       <p:sp>
         <p:nvSpPr>
-          <p:cNvPr id="30" name="Rectangle 29"/>
+          <p:cNvPr id="31" name="Rectangle 30"/>
           <p:cNvSpPr/>
           <p:nvPr/>
         </p:nvSpPr>
@@ -18641,7 +18785,7 @@
       </p:sp>
       <p:sp>
         <p:nvSpPr>
-          <p:cNvPr id="31" name="TextBox 30"/>
+          <p:cNvPr id="32" name="TextBox 31"/>
           <p:cNvSpPr txBox="1"/>
           <p:nvPr/>
         </p:nvSpPr>
@@ -18676,7 +18820,7 @@
       </p:sp>
       <p:sp>
         <p:nvSpPr>
-          <p:cNvPr id="32" name="TextBox 31"/>
+          <p:cNvPr id="33" name="TextBox 32"/>
           <p:cNvSpPr txBox="1"/>
           <p:nvPr/>
         </p:nvSpPr>
@@ -18711,7 +18855,7 @@
       </p:sp>
       <p:sp>
         <p:nvSpPr>
-          <p:cNvPr id="33" name="TextBox 32"/>
+          <p:cNvPr id="34" name="TextBox 33"/>
           <p:cNvSpPr txBox="1"/>
           <p:nvPr/>
         </p:nvSpPr>

--- a/zen/07_融資・投資家資料/然グループ_統合ピッチデッキ_強化版.pptx
+++ b/zen/07_融資・投資家資料/然グループ_統合ピッチデッキ_強化版.pptx
@@ -5689,7 +5689,7 @@
                           </a:solidFill>
                           <a:latin typeface="IPAGothic"/>
                         </a:rPr>
-                        <a:t>12%</a:t>
+                        <a:t>20%</a:t>
                       </a:r>
                     </a:p>
                   </a:txBody>
@@ -5712,7 +5712,7 @@
                           </a:solidFill>
                           <a:latin typeface="IPAGothic"/>
                         </a:rPr>
-                        <a:t>42万円</a:t>
+                        <a:t>70万円</a:t>
                       </a:r>
                     </a:p>
                   </a:txBody>
@@ -5758,7 +5758,7 @@
                           </a:solidFill>
                           <a:latin typeface="IPAGothic"/>
                         </a:rPr>
-                        <a:t>1,260万円</a:t>
+                        <a:t>2,100万円</a:t>
                       </a:r>
                     </a:p>
                   </a:txBody>
@@ -6038,7 +6038,7 @@
                           </a:solidFill>
                           <a:latin typeface="IPAGothic"/>
                         </a:rPr>
-                        <a:t>5,223万円〜</a:t>
+                        <a:t>6,063万円〜</a:t>
                       </a:r>
                     </a:p>
                   </a:txBody>
@@ -6161,7 +6161,7 @@
                 </a:solidFill>
                 <a:latin typeface="IPAGothic"/>
               </a:rPr>
-              <a:t>▸ Y1 グループ月次売上：約2,510万円（利益率約15%、月次利益約386万円）</a:t>
+              <a:t>▸ Y1 グループ月次売上：約2,510万円（利益率約17%、月次利益約418万円）</a:t>
             </a:r>
           </a:p>
         </p:txBody>
@@ -8255,7 +8255,7 @@
                           </a:solidFill>
                           <a:latin typeface="IPAGothic"/>
                         </a:rPr>
-                        <a:t>+2,260</a:t>
+                        <a:t>+2,600</a:t>
                       </a:r>
                     </a:p>
                   </a:txBody>
@@ -8278,7 +8278,7 @@
                           </a:solidFill>
                           <a:latin typeface="IPAGothic"/>
                         </a:rPr>
-                        <a:t>+7,140</a:t>
+                        <a:t>+7,500</a:t>
                       </a:r>
                     </a:p>
                   </a:txBody>
@@ -8301,7 +8301,7 @@
                           </a:solidFill>
                           <a:latin typeface="IPAGothic"/>
                         </a:rPr>
-                        <a:t>+14,880</a:t>
+                        <a:t>+15,000</a:t>
                       </a:r>
                     </a:p>
                   </a:txBody>
@@ -8324,7 +8324,7 @@
                           </a:solidFill>
                           <a:latin typeface="IPAGothic"/>
                         </a:rPr>
-                        <a:t>+27,800</a:t>
+                        <a:t>+28,000</a:t>
                       </a:r>
                     </a:p>
                   </a:txBody>
@@ -8395,7 +8395,7 @@
                           </a:solidFill>
                           <a:latin typeface="IPAGothic"/>
                         </a:rPr>
-                        <a:t>▲3,500</a:t>
+                        <a:t>▲3,800</a:t>
                       </a:r>
                     </a:p>
                   </a:txBody>
@@ -8558,7 +8558,7 @@
                           </a:solidFill>
                           <a:latin typeface="IPAGothic"/>
                         </a:rPr>
-                        <a:t>+3,500</a:t>
+                        <a:t>+3,800</a:t>
                       </a:r>
                     </a:p>
                   </a:txBody>
@@ -8581,7 +8581,7 @@
                           </a:solidFill>
                           <a:latin typeface="IPAGothic"/>
                         </a:rPr>
-                        <a:t>+1,260</a:t>
+                        <a:t>+1,600</a:t>
                       </a:r>
                     </a:p>
                   </a:txBody>
@@ -8604,7 +8604,7 @@
                           </a:solidFill>
                           <a:latin typeface="IPAGothic"/>
                         </a:rPr>
-                        <a:t>+2,140</a:t>
+                        <a:t>+2,500</a:t>
                       </a:r>
                     </a:p>
                   </a:txBody>
@@ -8627,7 +8627,7 @@
                           </a:solidFill>
                           <a:latin typeface="IPAGothic"/>
                         </a:rPr>
-                        <a:t>+6,880</a:t>
+                        <a:t>+7,000</a:t>
                       </a:r>
                     </a:p>
                   </a:txBody>
@@ -8650,7 +8650,7 @@
                           </a:solidFill>
                           <a:latin typeface="IPAGothic"/>
                         </a:rPr>
-                        <a:t>+17,800</a:t>
+                        <a:t>+18,000</a:t>
                       </a:r>
                     </a:p>
                   </a:txBody>
@@ -8721,7 +8721,7 @@
                           </a:solidFill>
                           <a:latin typeface="IPAGothic"/>
                         </a:rPr>
-                        <a:t>3,500</a:t>
+                        <a:t>3,800</a:t>
                       </a:r>
                     </a:p>
                   </a:txBody>
@@ -8744,7 +8744,7 @@
                           </a:solidFill>
                           <a:latin typeface="IPAGothic"/>
                         </a:rPr>
-                        <a:t>4,760</a:t>
+                        <a:t>5,400</a:t>
                       </a:r>
                     </a:p>
                   </a:txBody>
@@ -8767,7 +8767,7 @@
                           </a:solidFill>
                           <a:latin typeface="IPAGothic"/>
                         </a:rPr>
-                        <a:t>6,900</a:t>
+                        <a:t>7,900</a:t>
                       </a:r>
                     </a:p>
                   </a:txBody>
@@ -8790,7 +8790,7 @@
                           </a:solidFill>
                           <a:latin typeface="IPAGothic"/>
                         </a:rPr>
-                        <a:t>13,780</a:t>
+                        <a:t>14,900</a:t>
                       </a:r>
                     </a:p>
                   </a:txBody>
@@ -8813,7 +8813,7 @@
                           </a:solidFill>
                           <a:latin typeface="IPAGothic"/>
                         </a:rPr>
-                        <a:t>31,580</a:t>
+                        <a:t>32,900</a:t>
                       </a:r>
                     </a:p>
                   </a:txBody>
@@ -8836,7 +8836,7 @@
                           </a:solidFill>
                           <a:latin typeface="IPAGothic"/>
                         </a:rPr>
-                        <a:t>74,580</a:t>
+                        <a:t>75,900</a:t>
                       </a:r>
                     </a:p>
                   </a:txBody>
@@ -8959,7 +8959,7 @@
                 </a:solidFill>
                 <a:latin typeface="IPAGothic"/>
               </a:rPr>
-              <a:t>▸ 資金調達3,500万を起点にY1末で累計CF4,760万（黒字転換・返済原資確保）</a:t>
+              <a:t>▸ 資金調達3,800万を起点にY1末で累計CF黒字転換（返済原資確保）</a:t>
             </a:r>
           </a:p>
         </p:txBody>
@@ -9201,7 +9201,7 @@
                 </a:solidFill>
                 <a:latin typeface="IPAGothic"/>
               </a:rPr>
-              <a:t>月7〜：蕎麦然 開業 → 月次CF +330〜400万（3ブランド揃い踏み）</a:t>
+              <a:t>月7〜：蕎麦然 開業 → 月次CF +350〜430万（3ブランド揃い踏み）</a:t>
             </a:r>
           </a:p>
           <a:p>
@@ -9213,7 +9213,7 @@
                 </a:solidFill>
                 <a:latin typeface="IPAGothic"/>
               </a:rPr>
-              <a:t>Y1末時点：累計CF（資金調達後）約4,760万 → BEP到達</a:t>
+              <a:t>Y1末時点：累計CF（資金調達後）約5,400万 → BEP到達</a:t>
             </a:r>
           </a:p>
         </p:txBody>
@@ -9454,7 +9454,7 @@
                 </a:solidFill>
                 <a:latin typeface="IPAGothic"/>
               </a:rPr>
-              <a:t>3,500万円</a:t>
+              <a:t>3,800万円</a:t>
             </a:r>
           </a:p>
         </p:txBody>
@@ -9751,7 +9751,7 @@
                           </a:solidFill>
                           <a:latin typeface="IPAGothic"/>
                         </a:rPr>
-                        <a:t>蕎麦 然 1号店 開業費（小型8坪）</a:t>
+                        <a:t>蕎麦 然 1号店 開業費（8坪）</a:t>
                       </a:r>
                     </a:p>
                   </a:txBody>
@@ -9774,7 +9774,7 @@
                           </a:solidFill>
                           <a:latin typeface="IPAGothic"/>
                         </a:rPr>
-                        <a:t>500万円</a:t>
+                        <a:t>800万円</a:t>
                       </a:r>
                     </a:p>
                   </a:txBody>
@@ -9797,7 +9797,7 @@
                           </a:solidFill>
                           <a:latin typeface="IPAGothic"/>
                         </a:rPr>
-                        <a:t>内装200万＋設備150万＋敷金＋初期運転資金</a:t>
+                        <a:t>内装250万＋設備200万＋敷金（45万×6ヶ月）＋運転資金</a:t>
                       </a:r>
                     </a:p>
                   </a:txBody>
@@ -10058,7 +10058,7 @@
                           </a:solidFill>
                           <a:latin typeface="IPAGothic"/>
                         </a:rPr>
-                        <a:t>3,500万円</a:t>
+                        <a:t>3,800万円</a:t>
                       </a:r>
                     </a:p>
                   </a:txBody>
@@ -13940,7 +13940,7 @@
                           </a:solidFill>
                           <a:latin typeface="IPAGothic"/>
                         </a:rPr>
-                        <a:t>200万円</a:t>
+                        <a:t>204万円</a:t>
                       </a:r>
                     </a:p>
                   </a:txBody>
@@ -14034,7 +14034,7 @@
                           </a:solidFill>
                           <a:latin typeface="IPAGothic"/>
                         </a:rPr>
-                        <a:t>12%</a:t>
+                        <a:t>20%</a:t>
                       </a:r>
                     </a:p>
                   </a:txBody>
@@ -14057,7 +14057,7 @@
                           </a:solidFill>
                           <a:latin typeface="IPAGothic"/>
                         </a:rPr>
-                        <a:t>30万円（8坪）</a:t>
+                        <a:t>45万円（8坪）</a:t>
                       </a:r>
                     </a:p>
                   </a:txBody>
@@ -14080,7 +14080,7 @@
                           </a:solidFill>
                           <a:latin typeface="IPAGothic"/>
                         </a:rPr>
-                        <a:t>42万円</a:t>
+                        <a:t>70万円</a:t>
                       </a:r>
                     </a:p>
                   </a:txBody>
@@ -18095,7 +18095,7 @@
                 </a:solidFill>
                 <a:latin typeface="IPAGothic"/>
               </a:rPr>
-              <a:t>▸ 【家賃】30万円/月（8坪・坪3.75万）│ 原価33%</a:t>
+              <a:t>▸ 【家賃】45万円/月（8坪・坪5.6万）│ 原価30% │ 人件費23%</a:t>
             </a:r>
           </a:p>
         </p:txBody>
@@ -18587,7 +18587,7 @@
                 </a:solidFill>
                 <a:latin typeface="IPAGothic"/>
               </a:rPr>
-              <a:t>42万円</a:t>
+              <a:t>70万円</a:t>
             </a:r>
           </a:p>
         </p:txBody>
@@ -18700,7 +18700,7 @@
                 </a:solidFill>
                 <a:latin typeface="IPAGothic"/>
               </a:rPr>
-              <a:t>12%</a:t>
+              <a:t>20%</a:t>
             </a:r>
           </a:p>
         </p:txBody>
@@ -18895,7 +18895,7 @@
                 </a:solidFill>
                 <a:latin typeface="IPAGothic"/>
               </a:rPr>
-              <a:t>初期投資合計：500万円（居抜き活用・小型化）</a:t>
+              <a:t>初期投資合計：800万円（内装・設備・物件取得費）</a:t>
             </a:r>
           </a:p>
           <a:p>
@@ -18919,7 +18919,7 @@
                 </a:solidFill>
                 <a:latin typeface="IPAGothic"/>
               </a:rPr>
-              <a:t>月次営業利益：約28万円（ロイヤルティ控除後）</a:t>
+              <a:t>月次営業利益：約56万円（ロイヤルティ控除後）</a:t>
             </a:r>
           </a:p>
           <a:p>
@@ -18931,7 +18931,7 @@
                 </a:solidFill>
                 <a:latin typeface="IPAGothic"/>
               </a:rPr>
-              <a:t>投資回収期間：約14〜18ヶ月</a:t>
+              <a:t>投資回収期間：約14〜16ヶ月</a:t>
             </a:r>
           </a:p>
           <a:p>

--- a/zen/07_融資・投資家資料/然グループ_統合ピッチデッキ_強化版.pptx
+++ b/zen/07_融資・投資家資料/然グループ_統合ピッチデッキ_強化版.pptx
@@ -19893,7 +19893,42 @@
         </p:nvSpPr>
         <p:spPr>
           <a:xfrm>
-            <a:off x="274320" y="5852160"/>
+            <a:off x="274320" y="5577840"/>
+            <a:ext cx="11612880" cy="365760"/>
+          </a:xfrm>
+          <a:prstGeom prst="rect">
+            <a:avLst/>
+          </a:prstGeom>
+          <a:noFill/>
+        </p:spPr>
+        <p:txBody>
+          <a:bodyPr wrap="square">
+            <a:spAutoFit/>
+          </a:bodyPr>
+          <a:lstStyle/>
+          <a:p>
+            <a:pPr algn="ctr"/>
+            <a:r>
+              <a:rPr sz="900" b="0" i="0">
+                <a:solidFill>
+                  <a:srgbClr val="1A1A1A"/>
+                </a:solidFill>
+                <a:latin typeface="IPAGothic"/>
+              </a:rPr>
+              <a:t>調査対象：みなとや・ひまり堂・ひまり商店・びゃく・三谷・なかよし（恵比寿/新橋/学芸大学）→ いずれも「こだわり×展開力」の両立なし</a:t>
+            </a:r>
+          </a:p>
+        </p:txBody>
+      </p:sp>
+      <p:sp>
+        <p:nvSpPr>
+          <p:cNvPr id="27" name="TextBox 26"/>
+          <p:cNvSpPr txBox="1"/>
+          <p:nvPr/>
+        </p:nvSpPr>
+        <p:spPr>
+          <a:xfrm>
+            <a:off x="274320" y="5943600"/>
             <a:ext cx="11612880" cy="457200"/>
           </a:xfrm>
           <a:prstGeom prst="rect">

--- a/zen/07_融資・投資家資料/然グループ_統合ピッチデッキ_強化版.pptx
+++ b/zen/07_融資・投資家資料/然グループ_統合ピッチデッキ_強化版.pptx
@@ -3935,7 +3935,7 @@
             <a:avLst/>
           </a:prstGeom>
           <a:solidFill>
-            <a:srgbClr val="C49A22"/>
+            <a:srgbClr val="8B2020"/>
           </a:solidFill>
           <a:ln>
             <a:noFill/>
@@ -3989,11 +3989,11 @@
             <a:r>
               <a:rPr sz="1100" b="1" i="0">
                 <a:solidFill>
-                  <a:srgbClr val="C49A22"/>
-                </a:solidFill>
-                <a:latin typeface="IPAGothic"/>
-              </a:rPr>
-              <a:t>ひまり堂（恵比寿）との差</a:t>
+                  <a:srgbClr val="8B2020"/>
+                </a:solidFill>
+                <a:latin typeface="IPAGothic"/>
+              </a:rPr>
+              <a:t>やきとり家すみれとの差（最重要比較）</a:t>
             </a:r>
           </a:p>
         </p:txBody>
@@ -4028,9 +4028,9 @@
                 </a:solidFill>
                 <a:latin typeface="IPAGothic"/>
               </a:rPr>
-              <a:t>• こだわり度は同等だが展開力が決定的に違う
-• 然グループはFC化で1店の成功を30店に複製できる
-• ひまり堂は単店の「職人店」─ スケールしない</a:t>
+              <a:t>• すみれはFC展開力★4.5と高いが「素材・発酵コア」が弱い
+• 然グループは大山どりではなく出汁・麹・発酵という唯一無二の軸を持つ
+• ブランド統一度も低く3ブランド横断シナジーがない</a:t>
             </a:r>
           </a:p>
         </p:txBody>
@@ -4151,7 +4151,7 @@
                 </a:solidFill>
                 <a:latin typeface="IPAGothic"/>
               </a:rPr>
-              <a:t>びゃく・三谷との差</a:t>
+              <a:t>ひまり堂・びゃく・三谷との差</a:t>
             </a:r>
           </a:p>
         </p:txBody>
@@ -4186,9 +4186,9 @@
                 </a:solidFill>
                 <a:latin typeface="IPAGothic"/>
               </a:rPr>
-              <a:t>• 職人系の最高品質だが客単価¥8,000超で市場が狭い
-• 蕎麦然は¥2,500帯で「日常使いできるこだわり蕎麦」
-• 立地も8坪小型で回転率×FC数で勝負</a:t>
+              <a:t>• 職人系の高こだわりだが単店止まり・スケールしない
+• 客単価¥8,000超（びゃく）は市場が狭く景気敏感
+• 然グループは「再現可能なこだわり」でFC30店に複製できる</a:t>
             </a:r>
           </a:p>
         </p:txBody>
@@ -4251,7 +4251,7 @@
             <a:avLst/>
           </a:prstGeom>
           <a:solidFill>
-            <a:srgbClr val="8B2020"/>
+            <a:srgbClr val="C49A22"/>
           </a:solidFill>
           <a:ln>
             <a:noFill/>
@@ -4305,7 +4305,7 @@
             <a:r>
               <a:rPr sz="1100" b="1" i="0">
                 <a:solidFill>
-                  <a:srgbClr val="8B2020"/>
+                  <a:srgbClr val="C49A22"/>
                 </a:solidFill>
                 <a:latin typeface="IPAGothic"/>
               </a:rPr>
@@ -4344,9 +4344,9 @@
                 </a:solidFill>
                 <a:latin typeface="IPAGothic"/>
               </a:rPr>
-              <a:t>• 価格帯は近いが「素材・発酵」の軸が弱い
-• 然グループは出汁・麹・発酵を共通コアとして全ブランドが連動
-• SNS情報力で口コミ・インバウンドを自力で取込む</a:t>
+              <a:t>• 価格帯は近いが「素材・発酵」の明確なコアがない
+• 然グループは出汁・麹・発酵を共通軸に全ブランドが連動
+• SNS内製でマーケ費ゼロのまま情報優位を維持</a:t>
             </a:r>
           </a:p>
         </p:txBody>
@@ -4467,7 +4467,7 @@
                 </a:solidFill>
                 <a:latin typeface="IPAGothic"/>
               </a:rPr>
-              <a:t>然グループ固有の強み（競合ゼロ）</a:t>
+              <a:t>然グループ固有の強み（競合不在ゾーン）</a:t>
             </a:r>
           </a:p>
         </p:txBody>
@@ -4502,9 +4502,9 @@
                 </a:solidFill>
                 <a:latin typeface="IPAGothic"/>
               </a:rPr>
-              <a:t>• 3ブランド×FC展開：1業態の不振を他で補うリスクヘッジ
-• 素材へのこだわり + FC展開力の両立 = 競合不在ゾーン
-• SNS内製 = 月次マーケ費ゼロで情報優位を維持</a:t>
+              <a:t>• 素材こだわり★4.5 × FC展開力★4.2 の両立はすみれも実現できていない
+• 3ブランド構成で景気・トレンドのリスク分散が効く
+• 発酵・出汁コアのR&amp;Dをグループで共有 = 1店あたりコスト最小</a:t>
             </a:r>
           </a:p>
         </p:txBody>
@@ -4812,7 +4812,7 @@
                 </a:solidFill>
                 <a:latin typeface="IPAGothic"/>
               </a:rPr>
-              <a:t>1店→55店への複製力</a:t>
+              <a:t>すみれとの決定的な差</a:t>
             </a:r>
           </a:p>
         </p:txBody>
@@ -4847,8 +4847,9 @@
                 </a:solidFill>
                 <a:latin typeface="IPAGothic"/>
               </a:rPr>
-              <a:t>成功レシピをFC化で横展開
-競合は単店の技術・関係性に依存</a:t>
+              <a:t>やきとり家すみれ（約90店）はFC展開力は高いが
+素材・発酵コアの独自性がない＝差別化軸が弱い
+然グループは「こだわり×スケール」を同時実現</a:t>
             </a:r>
           </a:p>
         </p:txBody>
@@ -4969,7 +4970,7 @@
                 </a:solidFill>
                 <a:latin typeface="IPAGothic"/>
               </a:rPr>
-              <a:t>ロイヤルティ収入</a:t>
+              <a:t>ロイヤルティ収入エンジン</a:t>
             </a:r>
           </a:p>
         </p:txBody>
@@ -5005,7 +5006,8 @@
                 <a:latin typeface="IPAGothic"/>
               </a:rPr>
               <a:t>売上の3〜4%が直営費用ゼロで入る
-店舗数×ロイヤルティ＝純粋な利益エンジン</a:t>
+店舗数×ロイヤルティ＝純粋な利益エンジン
+55店舗で月間6,000万円超の安定収入</a:t>
             </a:r>
           </a:p>
         </p:txBody>
@@ -5126,7 +5128,7 @@
                 </a:solidFill>
                 <a:latin typeface="IPAGothic"/>
               </a:rPr>
-              <a:t>リスク分散</a:t>
+              <a:t>3ブランドのリスク分散</a:t>
             </a:r>
           </a:p>
         </p:txBody>
@@ -5161,8 +5163,9 @@
                 </a:solidFill>
                 <a:latin typeface="IPAGothic"/>
               </a:rPr>
-              <a:t>3ブランド×FC＝景気・トレンドに左右されない
-単店競合は1業態の不振で即ダメージ</a:t>
+              <a:t>だし然・肉酒場然・蕎麦然の価格帯分散
+不況時は蕎麦然、好況・インバウンドはだし然
+単一ブランドのすみれにはできないヘッジ</a:t>
             </a:r>
           </a:p>
         </p:txBody>
@@ -23523,7 +23526,7 @@
         </p:nvGraphicFramePr>
         <p:xfrm>
           <a:off x="274320" y="1371600"/>
-          <a:ext cx="11612880" cy="4114800"/>
+          <a:ext cx="11612880" cy="4572000"/>
         </p:xfrm>
         <a:graphic>
           <a:graphicData uri="http://schemas.openxmlformats.org/drawingml/2006/table">
@@ -23541,15 +23544,15 @@
                 <a:gridCol w="1451610"/>
                 <a:gridCol w="1451610"/>
               </a:tblGrid>
-              <a:tr h="587828">
-                <a:tc>
-                  <a:txBody>
-                    <a:bodyPr/>
-                    <a:lstStyle/>
-                    <a:p>
-                      <a:pPr algn="ctr"/>
-                      <a:r>
-                        <a:rPr sz="1000" b="1">
+              <a:tr h="571500">
+                <a:tc>
+                  <a:txBody>
+                    <a:bodyPr/>
+                    <a:lstStyle/>
+                    <a:p>
+                      <a:pPr algn="ctr"/>
+                      <a:r>
+                        <a:rPr sz="950" b="1">
                           <a:solidFill>
                             <a:srgbClr val="FFFFFF"/>
                           </a:solidFill>
@@ -23572,7 +23575,7 @@
                     <a:p>
                       <a:pPr algn="ctr"/>
                       <a:r>
-                        <a:rPr sz="1000" b="1">
+                        <a:rPr sz="950" b="1">
                           <a:solidFill>
                             <a:srgbClr val="FFFFFF"/>
                           </a:solidFill>
@@ -23595,7 +23598,7 @@
                     <a:p>
                       <a:pPr algn="ctr"/>
                       <a:r>
-                        <a:rPr sz="1000" b="1">
+                        <a:rPr sz="950" b="1">
                           <a:solidFill>
                             <a:srgbClr val="FFFFFF"/>
                           </a:solidFill>
@@ -23618,7 +23621,7 @@
                     <a:p>
                       <a:pPr algn="ctr"/>
                       <a:r>
-                        <a:rPr sz="1000" b="1">
+                        <a:rPr sz="950" b="1">
                           <a:solidFill>
                             <a:srgbClr val="FFFFFF"/>
                           </a:solidFill>
@@ -23641,13 +23644,13 @@
                     <a:p>
                       <a:pPr algn="ctr"/>
                       <a:r>
-                        <a:rPr sz="1000" b="1">
+                        <a:rPr sz="950" b="1">
                           <a:solidFill>
                             <a:srgbClr val="FFFFFF"/>
                           </a:solidFill>
                           <a:latin typeface="IPAGothic"/>
                         </a:rPr>
-                        <a:t>席数目安</a:t>
+                        <a:t>店舗数/展開</a:t>
                       </a:r>
                     </a:p>
                   </a:txBody>
@@ -23664,7 +23667,7 @@
                     <a:p>
                       <a:pPr algn="ctr"/>
                       <a:r>
-                        <a:rPr sz="1000" b="1">
+                        <a:rPr sz="950" b="1">
                           <a:solidFill>
                             <a:srgbClr val="FFFFFF"/>
                           </a:solidFill>
@@ -23687,7 +23690,7 @@
                     <a:p>
                       <a:pPr algn="ctr"/>
                       <a:r>
-                        <a:rPr sz="1000" b="1">
+                        <a:rPr sz="950" b="1">
                           <a:solidFill>
                             <a:srgbClr val="FFFFFF"/>
                           </a:solidFill>
@@ -23710,7 +23713,7 @@
                     <a:p>
                       <a:pPr algn="ctr"/>
                       <a:r>
-                        <a:rPr sz="1000" b="1">
+                        <a:rPr sz="950" b="1">
                           <a:solidFill>
                             <a:srgbClr val="FFFFFF"/>
                           </a:solidFill>
@@ -23727,15 +23730,15 @@
                   </a:tcPr>
                 </a:tc>
               </a:tr>
-              <a:tr h="587828">
-                <a:tc>
-                  <a:txBody>
-                    <a:bodyPr/>
-                    <a:lstStyle/>
-                    <a:p>
-                      <a:pPr algn="ctr"/>
-                      <a:r>
-                        <a:rPr sz="1000">
+              <a:tr h="571500">
+                <a:tc>
+                  <a:txBody>
+                    <a:bodyPr/>
+                    <a:lstStyle/>
+                    <a:p>
+                      <a:pPr algn="ctr"/>
+                      <a:r>
+                        <a:rPr sz="950">
                           <a:solidFill>
                             <a:srgbClr val="1A1A1A"/>
                           </a:solidFill>
@@ -23758,7 +23761,7 @@
                     <a:p>
                       <a:pPr algn="ctr"/>
                       <a:r>
-                        <a:rPr sz="1000">
+                        <a:rPr sz="950">
                           <a:solidFill>
                             <a:srgbClr val="1A1A1A"/>
                           </a:solidFill>
@@ -23781,7 +23784,7 @@
                     <a:p>
                       <a:pPr algn="ctr"/>
                       <a:r>
-                        <a:rPr sz="1000">
+                        <a:rPr sz="950">
                           <a:solidFill>
                             <a:srgbClr val="1A1A1A"/>
                           </a:solidFill>
@@ -23804,7 +23807,7 @@
                     <a:p>
                       <a:pPr algn="ctr"/>
                       <a:r>
-                        <a:rPr sz="1000">
+                        <a:rPr sz="950">
                           <a:solidFill>
                             <a:srgbClr val="1A1A1A"/>
                           </a:solidFill>
@@ -23827,13 +23830,13 @@
                     <a:p>
                       <a:pPr algn="ctr"/>
                       <a:r>
-                        <a:rPr sz="1000">
+                        <a:rPr sz="950">
                           <a:solidFill>
                             <a:srgbClr val="1A1A1A"/>
                           </a:solidFill>
                           <a:latin typeface="IPAGothic"/>
                         </a:rPr>
-                        <a:t>30〜40席</a:t>
+                        <a:t>単店</a:t>
                       </a:r>
                     </a:p>
                   </a:txBody>
@@ -23850,7 +23853,7 @@
                     <a:p>
                       <a:pPr algn="ctr"/>
                       <a:r>
-                        <a:rPr sz="1000">
+                        <a:rPr sz="950">
                           <a:solidFill>
                             <a:srgbClr val="1A1A1A"/>
                           </a:solidFill>
@@ -23873,7 +23876,7 @@
                     <a:p>
                       <a:pPr algn="ctr"/>
                       <a:r>
-                        <a:rPr sz="1000">
+                        <a:rPr sz="950">
                           <a:solidFill>
                             <a:srgbClr val="1A1A1A"/>
                           </a:solidFill>
@@ -23896,7 +23899,7 @@
                     <a:p>
                       <a:pPr algn="ctr"/>
                       <a:r>
-                        <a:rPr sz="1000">
+                        <a:rPr sz="950">
                           <a:solidFill>
                             <a:srgbClr val="1A1A1A"/>
                           </a:solidFill>
@@ -23913,15 +23916,15 @@
                   </a:tcPr>
                 </a:tc>
               </a:tr>
-              <a:tr h="587828">
-                <a:tc>
-                  <a:txBody>
-                    <a:bodyPr/>
-                    <a:lstStyle/>
-                    <a:p>
-                      <a:pPr algn="ctr"/>
-                      <a:r>
-                        <a:rPr sz="1000">
+              <a:tr h="571500">
+                <a:tc>
+                  <a:txBody>
+                    <a:bodyPr/>
+                    <a:lstStyle/>
+                    <a:p>
+                      <a:pPr algn="ctr"/>
+                      <a:r>
+                        <a:rPr sz="950">
                           <a:solidFill>
                             <a:srgbClr val="1A1A1A"/>
                           </a:solidFill>
@@ -23944,7 +23947,7 @@
                     <a:p>
                       <a:pPr algn="ctr"/>
                       <a:r>
-                        <a:rPr sz="1000">
+                        <a:rPr sz="950">
                           <a:solidFill>
                             <a:srgbClr val="1A1A1A"/>
                           </a:solidFill>
@@ -23967,7 +23970,7 @@
                     <a:p>
                       <a:pPr algn="ctr"/>
                       <a:r>
-                        <a:rPr sz="1000">
+                        <a:rPr sz="950">
                           <a:solidFill>
                             <a:srgbClr val="1A1A1A"/>
                           </a:solidFill>
@@ -23990,7 +23993,7 @@
                     <a:p>
                       <a:pPr algn="ctr"/>
                       <a:r>
-                        <a:rPr sz="1000">
+                        <a:rPr sz="950">
                           <a:solidFill>
                             <a:srgbClr val="1A1A1A"/>
                           </a:solidFill>
@@ -24013,13 +24016,13 @@
                     <a:p>
                       <a:pPr algn="ctr"/>
                       <a:r>
-                        <a:rPr sz="1000">
+                        <a:rPr sz="950">
                           <a:solidFill>
                             <a:srgbClr val="1A1A1A"/>
                           </a:solidFill>
                           <a:latin typeface="IPAGothic"/>
                         </a:rPr>
-                        <a:t>20〜25席</a:t>
+                        <a:t>単店</a:t>
                       </a:r>
                     </a:p>
                   </a:txBody>
@@ -24036,7 +24039,7 @@
                     <a:p>
                       <a:pPr algn="ctr"/>
                       <a:r>
-                        <a:rPr sz="1000">
+                        <a:rPr sz="950">
                           <a:solidFill>
                             <a:srgbClr val="1A1A1A"/>
                           </a:solidFill>
@@ -24059,7 +24062,7 @@
                     <a:p>
                       <a:pPr algn="ctr"/>
                       <a:r>
-                        <a:rPr sz="1000">
+                        <a:rPr sz="950">
                           <a:solidFill>
                             <a:srgbClr val="1A1A1A"/>
                           </a:solidFill>
@@ -24082,7 +24085,7 @@
                     <a:p>
                       <a:pPr algn="ctr"/>
                       <a:r>
-                        <a:rPr sz="1000">
+                        <a:rPr sz="950">
                           <a:solidFill>
                             <a:srgbClr val="1A1A1A"/>
                           </a:solidFill>
@@ -24099,15 +24102,15 @@
                   </a:tcPr>
                 </a:tc>
               </a:tr>
-              <a:tr h="587828">
-                <a:tc>
-                  <a:txBody>
-                    <a:bodyPr/>
-                    <a:lstStyle/>
-                    <a:p>
-                      <a:pPr algn="ctr"/>
-                      <a:r>
-                        <a:rPr sz="1000">
+              <a:tr h="571500">
+                <a:tc>
+                  <a:txBody>
+                    <a:bodyPr/>
+                    <a:lstStyle/>
+                    <a:p>
+                      <a:pPr algn="ctr"/>
+                      <a:r>
+                        <a:rPr sz="950">
                           <a:solidFill>
                             <a:srgbClr val="1A1A1A"/>
                           </a:solidFill>
@@ -24130,7 +24133,7 @@
                     <a:p>
                       <a:pPr algn="ctr"/>
                       <a:r>
-                        <a:rPr sz="1000">
+                        <a:rPr sz="950">
                           <a:solidFill>
                             <a:srgbClr val="1A1A1A"/>
                           </a:solidFill>
@@ -24153,7 +24156,7 @@
                     <a:p>
                       <a:pPr algn="ctr"/>
                       <a:r>
-                        <a:rPr sz="1000">
+                        <a:rPr sz="950">
                           <a:solidFill>
                             <a:srgbClr val="1A1A1A"/>
                           </a:solidFill>
@@ -24176,7 +24179,7 @@
                     <a:p>
                       <a:pPr algn="ctr"/>
                       <a:r>
-                        <a:rPr sz="1000">
+                        <a:rPr sz="950">
                           <a:solidFill>
                             <a:srgbClr val="1A1A1A"/>
                           </a:solidFill>
@@ -24199,13 +24202,13 @@
                     <a:p>
                       <a:pPr algn="ctr"/>
                       <a:r>
-                        <a:rPr sz="1000">
+                        <a:rPr sz="950">
                           <a:solidFill>
                             <a:srgbClr val="1A1A1A"/>
                           </a:solidFill>
                           <a:latin typeface="IPAGothic"/>
                         </a:rPr>
-                        <a:t>40〜50席</a:t>
+                        <a:t>単店</a:t>
                       </a:r>
                     </a:p>
                   </a:txBody>
@@ -24222,7 +24225,7 @@
                     <a:p>
                       <a:pPr algn="ctr"/>
                       <a:r>
-                        <a:rPr sz="1000">
+                        <a:rPr sz="950">
                           <a:solidFill>
                             <a:srgbClr val="1A1A1A"/>
                           </a:solidFill>
@@ -24245,7 +24248,7 @@
                     <a:p>
                       <a:pPr algn="ctr"/>
                       <a:r>
-                        <a:rPr sz="1000">
+                        <a:rPr sz="950">
                           <a:solidFill>
                             <a:srgbClr val="1A1A1A"/>
                           </a:solidFill>
@@ -24268,7 +24271,7 @@
                     <a:p>
                       <a:pPr algn="ctr"/>
                       <a:r>
-                        <a:rPr sz="1000">
+                        <a:rPr sz="950">
                           <a:solidFill>
                             <a:srgbClr val="1A1A1A"/>
                           </a:solidFill>
@@ -24285,15 +24288,15 @@
                   </a:tcPr>
                 </a:tc>
               </a:tr>
-              <a:tr h="587828">
-                <a:tc>
-                  <a:txBody>
-                    <a:bodyPr/>
-                    <a:lstStyle/>
-                    <a:p>
-                      <a:pPr algn="ctr"/>
-                      <a:r>
-                        <a:rPr sz="1000">
+              <a:tr h="571500">
+                <a:tc>
+                  <a:txBody>
+                    <a:bodyPr/>
+                    <a:lstStyle/>
+                    <a:p>
+                      <a:pPr algn="ctr"/>
+                      <a:r>
+                        <a:rPr sz="950">
                           <a:solidFill>
                             <a:srgbClr val="1A1A1A"/>
                           </a:solidFill>
@@ -24316,7 +24319,7 @@
                     <a:p>
                       <a:pPr algn="ctr"/>
                       <a:r>
-                        <a:rPr sz="1000">
+                        <a:rPr sz="950">
                           <a:solidFill>
                             <a:srgbClr val="1A1A1A"/>
                           </a:solidFill>
@@ -24339,7 +24342,7 @@
                     <a:p>
                       <a:pPr algn="ctr"/>
                       <a:r>
-                        <a:rPr sz="1000">
+                        <a:rPr sz="950">
                           <a:solidFill>
                             <a:srgbClr val="1A1A1A"/>
                           </a:solidFill>
@@ -24362,7 +24365,7 @@
                     <a:p>
                       <a:pPr algn="ctr"/>
                       <a:r>
-                        <a:rPr sz="1000">
+                        <a:rPr sz="950">
                           <a:solidFill>
                             <a:srgbClr val="1A1A1A"/>
                           </a:solidFill>
@@ -24385,13 +24388,13 @@
                     <a:p>
                       <a:pPr algn="ctr"/>
                       <a:r>
-                        <a:rPr sz="1000">
+                        <a:rPr sz="950">
                           <a:solidFill>
                             <a:srgbClr val="1A1A1A"/>
                           </a:solidFill>
                           <a:latin typeface="IPAGothic"/>
                         </a:rPr>
-                        <a:t>15〜20席</a:t>
+                        <a:t>単店</a:t>
                       </a:r>
                     </a:p>
                   </a:txBody>
@@ -24408,7 +24411,7 @@
                     <a:p>
                       <a:pPr algn="ctr"/>
                       <a:r>
-                        <a:rPr sz="1000">
+                        <a:rPr sz="950">
                           <a:solidFill>
                             <a:srgbClr val="1A1A1A"/>
                           </a:solidFill>
@@ -24431,7 +24434,7 @@
                     <a:p>
                       <a:pPr algn="ctr"/>
                       <a:r>
-                        <a:rPr sz="1000">
+                        <a:rPr sz="950">
                           <a:solidFill>
                             <a:srgbClr val="1A1A1A"/>
                           </a:solidFill>
@@ -24454,7 +24457,7 @@
                     <a:p>
                       <a:pPr algn="ctr"/>
                       <a:r>
-                        <a:rPr sz="1000">
+                        <a:rPr sz="950">
                           <a:solidFill>
                             <a:srgbClr val="1A1A1A"/>
                           </a:solidFill>
@@ -24471,15 +24474,15 @@
                   </a:tcPr>
                 </a:tc>
               </a:tr>
-              <a:tr h="587828">
-                <a:tc>
-                  <a:txBody>
-                    <a:bodyPr/>
-                    <a:lstStyle/>
-                    <a:p>
-                      <a:pPr algn="ctr"/>
-                      <a:r>
-                        <a:rPr sz="1000">
+              <a:tr h="571500">
+                <a:tc>
+                  <a:txBody>
+                    <a:bodyPr/>
+                    <a:lstStyle/>
+                    <a:p>
+                      <a:pPr algn="ctr"/>
+                      <a:r>
+                        <a:rPr sz="950">
                           <a:solidFill>
                             <a:srgbClr val="1A1A1A"/>
                           </a:solidFill>
@@ -24502,7 +24505,7 @@
                     <a:p>
                       <a:pPr algn="ctr"/>
                       <a:r>
-                        <a:rPr sz="1000">
+                        <a:rPr sz="950">
                           <a:solidFill>
                             <a:srgbClr val="1A1A1A"/>
                           </a:solidFill>
@@ -24525,7 +24528,7 @@
                     <a:p>
                       <a:pPr algn="ctr"/>
                       <a:r>
-                        <a:rPr sz="1000">
+                        <a:rPr sz="950">
                           <a:solidFill>
                             <a:srgbClr val="1A1A1A"/>
                           </a:solidFill>
@@ -24548,7 +24551,7 @@
                     <a:p>
                       <a:pPr algn="ctr"/>
                       <a:r>
-                        <a:rPr sz="1000">
+                        <a:rPr sz="950">
                           <a:solidFill>
                             <a:srgbClr val="1A1A1A"/>
                           </a:solidFill>
@@ -24571,13 +24574,13 @@
                     <a:p>
                       <a:pPr algn="ctr"/>
                       <a:r>
-                        <a:rPr sz="1000">
+                        <a:rPr sz="950">
                           <a:solidFill>
                             <a:srgbClr val="1A1A1A"/>
                           </a:solidFill>
                           <a:latin typeface="IPAGothic"/>
                         </a:rPr>
-                        <a:t>20〜30席</a:t>
+                        <a:t>単店</a:t>
                       </a:r>
                     </a:p>
                   </a:txBody>
@@ -24594,7 +24597,7 @@
                     <a:p>
                       <a:pPr algn="ctr"/>
                       <a:r>
-                        <a:rPr sz="1000">
+                        <a:rPr sz="950">
                           <a:solidFill>
                             <a:srgbClr val="1A1A1A"/>
                           </a:solidFill>
@@ -24617,7 +24620,7 @@
                     <a:p>
                       <a:pPr algn="ctr"/>
                       <a:r>
-                        <a:rPr sz="1000">
+                        <a:rPr sz="950">
                           <a:solidFill>
                             <a:srgbClr val="1A1A1A"/>
                           </a:solidFill>
@@ -24640,7 +24643,7 @@
                     <a:p>
                       <a:pPr algn="ctr"/>
                       <a:r>
-                        <a:rPr sz="1000">
+                        <a:rPr sz="950">
                           <a:solidFill>
                             <a:srgbClr val="1A1A1A"/>
                           </a:solidFill>
@@ -24657,15 +24660,15 @@
                   </a:tcPr>
                 </a:tc>
               </a:tr>
-              <a:tr h="587832">
-                <a:tc>
-                  <a:txBody>
-                    <a:bodyPr/>
-                    <a:lstStyle/>
-                    <a:p>
-                      <a:pPr algn="ctr"/>
-                      <a:r>
-                        <a:rPr sz="1000">
+              <a:tr h="571500">
+                <a:tc>
+                  <a:txBody>
+                    <a:bodyPr/>
+                    <a:lstStyle/>
+                    <a:p>
+                      <a:pPr algn="ctr"/>
+                      <a:r>
+                        <a:rPr sz="950">
                           <a:solidFill>
                             <a:srgbClr val="1A1A1A"/>
                           </a:solidFill>
@@ -24688,7 +24691,7 @@
                     <a:p>
                       <a:pPr algn="ctr"/>
                       <a:r>
-                        <a:rPr sz="1000">
+                        <a:rPr sz="950">
                           <a:solidFill>
                             <a:srgbClr val="1A1A1A"/>
                           </a:solidFill>
@@ -24711,7 +24714,7 @@
                     <a:p>
                       <a:pPr algn="ctr"/>
                       <a:r>
-                        <a:rPr sz="1000">
+                        <a:rPr sz="950">
                           <a:solidFill>
                             <a:srgbClr val="1A1A1A"/>
                           </a:solidFill>
@@ -24734,7 +24737,7 @@
                     <a:p>
                       <a:pPr algn="ctr"/>
                       <a:r>
-                        <a:rPr sz="1000">
+                        <a:rPr sz="950">
                           <a:solidFill>
                             <a:srgbClr val="1A1A1A"/>
                           </a:solidFill>
@@ -24757,13 +24760,13 @@
                     <a:p>
                       <a:pPr algn="ctr"/>
                       <a:r>
-                        <a:rPr sz="1000">
+                        <a:rPr sz="950">
                           <a:solidFill>
                             <a:srgbClr val="1A1A1A"/>
                           </a:solidFill>
                           <a:latin typeface="IPAGothic"/>
                         </a:rPr>
-                        <a:t>25〜35席</a:t>
+                        <a:t>単店</a:t>
                       </a:r>
                     </a:p>
                   </a:txBody>
@@ -24780,7 +24783,7 @@
                     <a:p>
                       <a:pPr algn="ctr"/>
                       <a:r>
-                        <a:rPr sz="1000">
+                        <a:rPr sz="950">
                           <a:solidFill>
                             <a:srgbClr val="1A1A1A"/>
                           </a:solidFill>
@@ -24803,7 +24806,7 @@
                     <a:p>
                       <a:pPr algn="ctr"/>
                       <a:r>
-                        <a:rPr sz="1000">
+                        <a:rPr sz="950">
                           <a:solidFill>
                             <a:srgbClr val="1A1A1A"/>
                           </a:solidFill>
@@ -24826,7 +24829,7 @@
                     <a:p>
                       <a:pPr algn="ctr"/>
                       <a:r>
-                        <a:rPr sz="1000">
+                        <a:rPr sz="950">
                           <a:solidFill>
                             <a:srgbClr val="1A1A1A"/>
                           </a:solidFill>
@@ -24839,6 +24842,192 @@
                   <a:tcPr>
                     <a:solidFill>
                       <a:srgbClr val="FFFFFF"/>
+                    </a:solidFill>
+                  </a:tcPr>
+                </a:tc>
+              </a:tr>
+              <a:tr h="571500">
+                <a:tc>
+                  <a:txBody>
+                    <a:bodyPr/>
+                    <a:lstStyle/>
+                    <a:p>
+                      <a:pPr algn="ctr"/>
+                      <a:r>
+                        <a:rPr sz="950">
+                          <a:solidFill>
+                            <a:srgbClr val="1A1A1A"/>
+                          </a:solidFill>
+                          <a:latin typeface="IPAGothic"/>
+                        </a:rPr>
+                        <a:t>やきとり家すみれ</a:t>
+                      </a:r>
+                    </a:p>
+                  </a:txBody>
+                  <a:tcPr>
+                    <a:solidFill>
+                      <a:srgbClr val="F0EEE8"/>
+                    </a:solidFill>
+                  </a:tcPr>
+                </a:tc>
+                <a:tc>
+                  <a:txBody>
+                    <a:bodyPr/>
+                    <a:lstStyle/>
+                    <a:p>
+                      <a:pPr algn="ctr"/>
+                      <a:r>
+                        <a:rPr sz="950">
+                          <a:solidFill>
+                            <a:srgbClr val="1A1A1A"/>
+                          </a:solidFill>
+                          <a:latin typeface="IPAGothic"/>
+                        </a:rPr>
+                        <a:t>全国展開</a:t>
+                      </a:r>
+                    </a:p>
+                  </a:txBody>
+                  <a:tcPr>
+                    <a:solidFill>
+                      <a:srgbClr val="F0EEE8"/>
+                    </a:solidFill>
+                  </a:tcPr>
+                </a:tc>
+                <a:tc>
+                  <a:txBody>
+                    <a:bodyPr/>
+                    <a:lstStyle/>
+                    <a:p>
+                      <a:pPr algn="ctr"/>
+                      <a:r>
+                        <a:rPr sz="950">
+                          <a:solidFill>
+                            <a:srgbClr val="1A1A1A"/>
+                          </a:solidFill>
+                          <a:latin typeface="IPAGothic"/>
+                        </a:rPr>
+                        <a:t>FC焼鳥・ファミリー/女性向け</a:t>
+                      </a:r>
+                    </a:p>
+                  </a:txBody>
+                  <a:tcPr>
+                    <a:solidFill>
+                      <a:srgbClr val="F0EEE8"/>
+                    </a:solidFill>
+                  </a:tcPr>
+                </a:tc>
+                <a:tc>
+                  <a:txBody>
+                    <a:bodyPr/>
+                    <a:lstStyle/>
+                    <a:p>
+                      <a:pPr algn="ctr"/>
+                      <a:r>
+                        <a:rPr sz="950">
+                          <a:solidFill>
+                            <a:srgbClr val="1A1A1A"/>
+                          </a:solidFill>
+                          <a:latin typeface="IPAGothic"/>
+                        </a:rPr>
+                        <a:t>¥2,500</a:t>
+                      </a:r>
+                    </a:p>
+                  </a:txBody>
+                  <a:tcPr>
+                    <a:solidFill>
+                      <a:srgbClr val="F0EEE8"/>
+                    </a:solidFill>
+                  </a:tcPr>
+                </a:tc>
+                <a:tc>
+                  <a:txBody>
+                    <a:bodyPr/>
+                    <a:lstStyle/>
+                    <a:p>
+                      <a:pPr algn="ctr"/>
+                      <a:r>
+                        <a:rPr sz="950">
+                          <a:solidFill>
+                            <a:srgbClr val="1A1A1A"/>
+                          </a:solidFill>
+                          <a:latin typeface="IPAGothic"/>
+                        </a:rPr>
+                        <a:t>約90店(FC67)</a:t>
+                      </a:r>
+                    </a:p>
+                  </a:txBody>
+                  <a:tcPr>
+                    <a:solidFill>
+                      <a:srgbClr val="F0EEE8"/>
+                    </a:solidFill>
+                  </a:tcPr>
+                </a:tc>
+                <a:tc>
+                  <a:txBody>
+                    <a:bodyPr/>
+                    <a:lstStyle/>
+                    <a:p>
+                      <a:pPr algn="ctr"/>
+                      <a:r>
+                        <a:rPr sz="950">
+                          <a:solidFill>
+                            <a:srgbClr val="1A1A1A"/>
+                          </a:solidFill>
+                          <a:latin typeface="IPAGothic"/>
+                        </a:rPr>
+                        <a:t>★★★☆☆</a:t>
+                      </a:r>
+                    </a:p>
+                  </a:txBody>
+                  <a:tcPr>
+                    <a:solidFill>
+                      <a:srgbClr val="F0EEE8"/>
+                    </a:solidFill>
+                  </a:tcPr>
+                </a:tc>
+                <a:tc>
+                  <a:txBody>
+                    <a:bodyPr/>
+                    <a:lstStyle/>
+                    <a:p>
+                      <a:pPr algn="ctr"/>
+                      <a:r>
+                        <a:rPr sz="950">
+                          <a:solidFill>
+                            <a:srgbClr val="1A1A1A"/>
+                          </a:solidFill>
+                          <a:latin typeface="IPAGothic"/>
+                        </a:rPr>
+                        <a:t>★★★★☆</a:t>
+                      </a:r>
+                    </a:p>
+                  </a:txBody>
+                  <a:tcPr>
+                    <a:solidFill>
+                      <a:srgbClr val="F0EEE8"/>
+                    </a:solidFill>
+                  </a:tcPr>
+                </a:tc>
+                <a:tc>
+                  <a:txBody>
+                    <a:bodyPr/>
+                    <a:lstStyle/>
+                    <a:p>
+                      <a:pPr algn="ctr"/>
+                      <a:r>
+                        <a:rPr sz="950">
+                          <a:solidFill>
+                            <a:srgbClr val="1A1A1A"/>
+                          </a:solidFill>
+                          <a:latin typeface="IPAGothic"/>
+                        </a:rPr>
+                        <a:t>FCモデルの先行事例・直接競合</a:t>
+                      </a:r>
+                    </a:p>
+                  </a:txBody>
+                  <a:tcPr>
+                    <a:solidFill>
+                      <a:srgbClr val="F0EEE8"/>
                     </a:solidFill>
                   </a:tcPr>
                 </a:tc>
@@ -24855,7 +25044,7 @@
         </p:nvSpPr>
         <p:spPr>
           <a:xfrm>
-            <a:off x="365760" y="5577840"/>
+            <a:off x="365760" y="6035040"/>
             <a:ext cx="10972800" cy="320040"/>
           </a:xfrm>
           <a:prstGeom prst="rect">
@@ -24877,7 +25066,7 @@
                 </a:solidFill>
                 <a:latin typeface="IPAGothic"/>
               </a:rPr>
-              <a:t>※ こだわり度・展開可能性は5段階評価（★多い＝高い）　客単価は推計値</a:t>
+              <a:t>※ こだわり度・展開可能性は5段階評価（★多い＝高い）　客単価・店舗数は公開情報に基づく推計</a:t>
             </a:r>
           </a:p>
         </p:txBody>
@@ -24890,8 +25079,8 @@
         </p:nvSpPr>
         <p:spPr>
           <a:xfrm>
-            <a:off x="274320" y="5943600"/>
-            <a:ext cx="11612880" cy="457200"/>
+            <a:off x="274320" y="6400800"/>
+            <a:ext cx="11612880" cy="365760"/>
           </a:xfrm>
           <a:prstGeom prst="rect">
             <a:avLst/>
@@ -24906,13 +25095,13 @@
           <a:p>
             <a:pPr algn="ctr"/>
             <a:r>
-              <a:rPr sz="1300" b="1" i="0">
+              <a:rPr sz="1100" b="1" i="0">
                 <a:solidFill>
                   <a:srgbClr val="C49A22"/>
                 </a:solidFill>
                 <a:latin typeface="IPAGothic"/>
               </a:rPr>
-              <a:t>→ 高こだわり×高展開力を両立している競合はゼロ  ─  然グループの独占ゾーン</a:t>
+              <a:t>→ やきとり家すみれはFC展開力が高いが「素材・発酵コア」の独自性で然グループが差別化できる</a:t>
             </a:r>
           </a:p>
         </p:txBody>

--- a/zen/07_融資・投資家資料/然グループ_統合ピッチデッキ_強化版.pptx
+++ b/zen/07_融資・投資家資料/然グループ_統合ピッチデッキ_強化版.pptx
@@ -3935,7 +3935,7 @@
             <a:avLst/>
           </a:prstGeom>
           <a:solidFill>
-            <a:srgbClr val="8B2020"/>
+            <a:srgbClr val="C49A22"/>
           </a:solidFill>
           <a:ln>
             <a:noFill/>
@@ -3989,11 +3989,11 @@
             <a:r>
               <a:rPr sz="1100" b="1" i="0">
                 <a:solidFill>
-                  <a:srgbClr val="8B2020"/>
-                </a:solidFill>
-                <a:latin typeface="IPAGothic"/>
-              </a:rPr>
-              <a:t>やきとり家すみれとの差（最重要比較）</a:t>
+                  <a:srgbClr val="C49A22"/>
+                </a:solidFill>
+                <a:latin typeface="IPAGothic"/>
+              </a:rPr>
+              <a:t>ひまり堂（恵比寿）との差</a:t>
             </a:r>
           </a:p>
         </p:txBody>
@@ -4028,9 +4028,9 @@
                 </a:solidFill>
                 <a:latin typeface="IPAGothic"/>
               </a:rPr>
-              <a:t>• すみれはFC展開力★4.5と高いが「素材・発酵コア」が弱い
-• 然グループは大山どりではなく出汁・麹・発酵という唯一無二の軸を持つ
-• ブランド統一度も低く3ブランド横断シナジーがない</a:t>
+              <a:t>• こだわり度は同等だが展開力が決定的に違う
+• 然グループはFC化で1店の成功を30店に複製できる
+• ひまり堂は単店の「職人店」─ スケールしない</a:t>
             </a:r>
           </a:p>
         </p:txBody>
@@ -4151,7 +4151,7 @@
                 </a:solidFill>
                 <a:latin typeface="IPAGothic"/>
               </a:rPr>
-              <a:t>ひまり堂・びゃく・三谷との差</a:t>
+              <a:t>びゃく・三谷との差</a:t>
             </a:r>
           </a:p>
         </p:txBody>
@@ -4186,9 +4186,9 @@
                 </a:solidFill>
                 <a:latin typeface="IPAGothic"/>
               </a:rPr>
-              <a:t>• 職人系の高こだわりだが単店止まり・スケールしない
-• 客単価¥8,000超（びゃく）は市場が狭く景気敏感
-• 然グループは「再現可能なこだわり」でFC30店に複製できる</a:t>
+              <a:t>• 職人系の最高品質だが客単価¥8,000超で市場が狭い
+• 蕎麦然は¥2,500帯で「日常使いできるこだわり蕎麦」
+• 立地も8坪小型で回転率×FC数で勝負</a:t>
             </a:r>
           </a:p>
         </p:txBody>
@@ -4251,7 +4251,7 @@
             <a:avLst/>
           </a:prstGeom>
           <a:solidFill>
-            <a:srgbClr val="C49A22"/>
+            <a:srgbClr val="8B2020"/>
           </a:solidFill>
           <a:ln>
             <a:noFill/>
@@ -4305,7 +4305,7 @@
             <a:r>
               <a:rPr sz="1100" b="1" i="0">
                 <a:solidFill>
-                  <a:srgbClr val="C49A22"/>
+                  <a:srgbClr val="8B2020"/>
                 </a:solidFill>
                 <a:latin typeface="IPAGothic"/>
               </a:rPr>
@@ -4344,9 +4344,9 @@
                 </a:solidFill>
                 <a:latin typeface="IPAGothic"/>
               </a:rPr>
-              <a:t>• 価格帯は近いが「素材・発酵」の明確なコアがない
-• 然グループは出汁・麹・発酵を共通軸に全ブランドが連動
-• SNS内製でマーケ費ゼロのまま情報優位を維持</a:t>
+              <a:t>• 価格帯は近いが「素材・発酵」の軸が弱い
+• 然グループは出汁・麹・発酵を共通コアとして全ブランドが連動
+• SNS情報力で口コミ・インバウンドを自力で取込む</a:t>
             </a:r>
           </a:p>
         </p:txBody>
@@ -4467,7 +4467,7 @@
                 </a:solidFill>
                 <a:latin typeface="IPAGothic"/>
               </a:rPr>
-              <a:t>然グループ固有の強み（競合不在ゾーン）</a:t>
+              <a:t>然グループ固有の強み（競合ゼロ）</a:t>
             </a:r>
           </a:p>
         </p:txBody>
@@ -4502,9 +4502,9 @@
                 </a:solidFill>
                 <a:latin typeface="IPAGothic"/>
               </a:rPr>
-              <a:t>• 素材こだわり★4.5 × FC展開力★4.2 の両立はすみれも実現できていない
-• 3ブランド構成で景気・トレンドのリスク分散が効く
-• 発酵・出汁コアのR&amp;Dをグループで共有 = 1店あたりコスト最小</a:t>
+              <a:t>• 3ブランド×FC展開：1業態の不振を他で補うリスクヘッジ
+• 素材へのこだわり + FC展開力の両立 = 競合不在ゾーン
+• SNS内製 = 月次マーケ費ゼロで情報優位を維持</a:t>
             </a:r>
           </a:p>
         </p:txBody>
@@ -4812,7 +4812,7 @@
                 </a:solidFill>
                 <a:latin typeface="IPAGothic"/>
               </a:rPr>
-              <a:t>すみれとの決定的な差</a:t>
+              <a:t>1店→55店への複製力</a:t>
             </a:r>
           </a:p>
         </p:txBody>
@@ -4847,9 +4847,8 @@
                 </a:solidFill>
                 <a:latin typeface="IPAGothic"/>
               </a:rPr>
-              <a:t>やきとり家すみれ（約90店）はFC展開力は高いが
-素材・発酵コアの独自性がない＝差別化軸が弱い
-然グループは「こだわり×スケール」を同時実現</a:t>
+              <a:t>成功レシピをFC化で横展開
+競合は単店の技術・関係性に依存</a:t>
             </a:r>
           </a:p>
         </p:txBody>
@@ -4970,7 +4969,7 @@
                 </a:solidFill>
                 <a:latin typeface="IPAGothic"/>
               </a:rPr>
-              <a:t>ロイヤルティ収入エンジン</a:t>
+              <a:t>ロイヤルティ収入</a:t>
             </a:r>
           </a:p>
         </p:txBody>
@@ -5006,8 +5005,7 @@
                 <a:latin typeface="IPAGothic"/>
               </a:rPr>
               <a:t>売上の3〜4%が直営費用ゼロで入る
-店舗数×ロイヤルティ＝純粋な利益エンジン
-55店舗で月間6,000万円超の安定収入</a:t>
+店舗数×ロイヤルティ＝純粋な利益エンジン</a:t>
             </a:r>
           </a:p>
         </p:txBody>
@@ -5128,7 +5126,7 @@
                 </a:solidFill>
                 <a:latin typeface="IPAGothic"/>
               </a:rPr>
-              <a:t>3ブランドのリスク分散</a:t>
+              <a:t>リスク分散</a:t>
             </a:r>
           </a:p>
         </p:txBody>
@@ -5163,9 +5161,8 @@
                 </a:solidFill>
                 <a:latin typeface="IPAGothic"/>
               </a:rPr>
-              <a:t>だし然・肉酒場然・蕎麦然の価格帯分散
-不況時は蕎麦然、好況・インバウンドはだし然
-単一ブランドのすみれにはできないヘッジ</a:t>
+              <a:t>3ブランド×FC＝景気・トレンドに左右されない
+単店競合は1業態の不振で即ダメージ</a:t>
             </a:r>
           </a:p>
         </p:txBody>
@@ -23526,7 +23523,7 @@
         </p:nvGraphicFramePr>
         <p:xfrm>
           <a:off x="274320" y="1371600"/>
-          <a:ext cx="11612880" cy="4572000"/>
+          <a:ext cx="11612880" cy="4114800"/>
         </p:xfrm>
         <a:graphic>
           <a:graphicData uri="http://schemas.openxmlformats.org/drawingml/2006/table">
@@ -23544,15 +23541,15 @@
                 <a:gridCol w="1451610"/>
                 <a:gridCol w="1451610"/>
               </a:tblGrid>
-              <a:tr h="571500">
-                <a:tc>
-                  <a:txBody>
-                    <a:bodyPr/>
-                    <a:lstStyle/>
-                    <a:p>
-                      <a:pPr algn="ctr"/>
-                      <a:r>
-                        <a:rPr sz="950" b="1">
+              <a:tr h="587828">
+                <a:tc>
+                  <a:txBody>
+                    <a:bodyPr/>
+                    <a:lstStyle/>
+                    <a:p>
+                      <a:pPr algn="ctr"/>
+                      <a:r>
+                        <a:rPr sz="1000" b="1">
                           <a:solidFill>
                             <a:srgbClr val="FFFFFF"/>
                           </a:solidFill>
@@ -23575,7 +23572,7 @@
                     <a:p>
                       <a:pPr algn="ctr"/>
                       <a:r>
-                        <a:rPr sz="950" b="1">
+                        <a:rPr sz="1000" b="1">
                           <a:solidFill>
                             <a:srgbClr val="FFFFFF"/>
                           </a:solidFill>
@@ -23598,7 +23595,7 @@
                     <a:p>
                       <a:pPr algn="ctr"/>
                       <a:r>
-                        <a:rPr sz="950" b="1">
+                        <a:rPr sz="1000" b="1">
                           <a:solidFill>
                             <a:srgbClr val="FFFFFF"/>
                           </a:solidFill>
@@ -23621,7 +23618,7 @@
                     <a:p>
                       <a:pPr algn="ctr"/>
                       <a:r>
-                        <a:rPr sz="950" b="1">
+                        <a:rPr sz="1000" b="1">
                           <a:solidFill>
                             <a:srgbClr val="FFFFFF"/>
                           </a:solidFill>
@@ -23644,7 +23641,7 @@
                     <a:p>
                       <a:pPr algn="ctr"/>
                       <a:r>
-                        <a:rPr sz="950" b="1">
+                        <a:rPr sz="1000" b="1">
                           <a:solidFill>
                             <a:srgbClr val="FFFFFF"/>
                           </a:solidFill>
@@ -23667,7 +23664,7 @@
                     <a:p>
                       <a:pPr algn="ctr"/>
                       <a:r>
-                        <a:rPr sz="950" b="1">
+                        <a:rPr sz="1000" b="1">
                           <a:solidFill>
                             <a:srgbClr val="FFFFFF"/>
                           </a:solidFill>
@@ -23690,7 +23687,7 @@
                     <a:p>
                       <a:pPr algn="ctr"/>
                       <a:r>
-                        <a:rPr sz="950" b="1">
+                        <a:rPr sz="1000" b="1">
                           <a:solidFill>
                             <a:srgbClr val="FFFFFF"/>
                           </a:solidFill>
@@ -23713,7 +23710,7 @@
                     <a:p>
                       <a:pPr algn="ctr"/>
                       <a:r>
-                        <a:rPr sz="950" b="1">
+                        <a:rPr sz="1000" b="1">
                           <a:solidFill>
                             <a:srgbClr val="FFFFFF"/>
                           </a:solidFill>
@@ -23730,15 +23727,15 @@
                   </a:tcPr>
                 </a:tc>
               </a:tr>
-              <a:tr h="571500">
-                <a:tc>
-                  <a:txBody>
-                    <a:bodyPr/>
-                    <a:lstStyle/>
-                    <a:p>
-                      <a:pPr algn="ctr"/>
-                      <a:r>
-                        <a:rPr sz="950">
+              <a:tr h="587828">
+                <a:tc>
+                  <a:txBody>
+                    <a:bodyPr/>
+                    <a:lstStyle/>
+                    <a:p>
+                      <a:pPr algn="ctr"/>
+                      <a:r>
+                        <a:rPr sz="1000">
                           <a:solidFill>
                             <a:srgbClr val="1A1A1A"/>
                           </a:solidFill>
@@ -23761,7 +23758,7 @@
                     <a:p>
                       <a:pPr algn="ctr"/>
                       <a:r>
-                        <a:rPr sz="950">
+                        <a:rPr sz="1000">
                           <a:solidFill>
                             <a:srgbClr val="1A1A1A"/>
                           </a:solidFill>
@@ -23784,7 +23781,7 @@
                     <a:p>
                       <a:pPr algn="ctr"/>
                       <a:r>
-                        <a:rPr sz="950">
+                        <a:rPr sz="1000">
                           <a:solidFill>
                             <a:srgbClr val="1A1A1A"/>
                           </a:solidFill>
@@ -23807,7 +23804,7 @@
                     <a:p>
                       <a:pPr algn="ctr"/>
                       <a:r>
-                        <a:rPr sz="950">
+                        <a:rPr sz="1000">
                           <a:solidFill>
                             <a:srgbClr val="1A1A1A"/>
                           </a:solidFill>
@@ -23830,7 +23827,7 @@
                     <a:p>
                       <a:pPr algn="ctr"/>
                       <a:r>
-                        <a:rPr sz="950">
+                        <a:rPr sz="1000">
                           <a:solidFill>
                             <a:srgbClr val="1A1A1A"/>
                           </a:solidFill>
@@ -23853,7 +23850,7 @@
                     <a:p>
                       <a:pPr algn="ctr"/>
                       <a:r>
-                        <a:rPr sz="950">
+                        <a:rPr sz="1000">
                           <a:solidFill>
                             <a:srgbClr val="1A1A1A"/>
                           </a:solidFill>
@@ -23876,7 +23873,7 @@
                     <a:p>
                       <a:pPr algn="ctr"/>
                       <a:r>
-                        <a:rPr sz="950">
+                        <a:rPr sz="1000">
                           <a:solidFill>
                             <a:srgbClr val="1A1A1A"/>
                           </a:solidFill>
@@ -23899,7 +23896,7 @@
                     <a:p>
                       <a:pPr algn="ctr"/>
                       <a:r>
-                        <a:rPr sz="950">
+                        <a:rPr sz="1000">
                           <a:solidFill>
                             <a:srgbClr val="1A1A1A"/>
                           </a:solidFill>
@@ -23916,15 +23913,15 @@
                   </a:tcPr>
                 </a:tc>
               </a:tr>
-              <a:tr h="571500">
-                <a:tc>
-                  <a:txBody>
-                    <a:bodyPr/>
-                    <a:lstStyle/>
-                    <a:p>
-                      <a:pPr algn="ctr"/>
-                      <a:r>
-                        <a:rPr sz="950">
+              <a:tr h="587828">
+                <a:tc>
+                  <a:txBody>
+                    <a:bodyPr/>
+                    <a:lstStyle/>
+                    <a:p>
+                      <a:pPr algn="ctr"/>
+                      <a:r>
+                        <a:rPr sz="1000">
                           <a:solidFill>
                             <a:srgbClr val="1A1A1A"/>
                           </a:solidFill>
@@ -23947,7 +23944,7 @@
                     <a:p>
                       <a:pPr algn="ctr"/>
                       <a:r>
-                        <a:rPr sz="950">
+                        <a:rPr sz="1000">
                           <a:solidFill>
                             <a:srgbClr val="1A1A1A"/>
                           </a:solidFill>
@@ -23970,7 +23967,7 @@
                     <a:p>
                       <a:pPr algn="ctr"/>
                       <a:r>
-                        <a:rPr sz="950">
+                        <a:rPr sz="1000">
                           <a:solidFill>
                             <a:srgbClr val="1A1A1A"/>
                           </a:solidFill>
@@ -23993,7 +23990,7 @@
                     <a:p>
                       <a:pPr algn="ctr"/>
                       <a:r>
-                        <a:rPr sz="950">
+                        <a:rPr sz="1000">
                           <a:solidFill>
                             <a:srgbClr val="1A1A1A"/>
                           </a:solidFill>
@@ -24016,7 +24013,7 @@
                     <a:p>
                       <a:pPr algn="ctr"/>
                       <a:r>
-                        <a:rPr sz="950">
+                        <a:rPr sz="1000">
                           <a:solidFill>
                             <a:srgbClr val="1A1A1A"/>
                           </a:solidFill>
@@ -24039,7 +24036,7 @@
                     <a:p>
                       <a:pPr algn="ctr"/>
                       <a:r>
-                        <a:rPr sz="950">
+                        <a:rPr sz="1000">
                           <a:solidFill>
                             <a:srgbClr val="1A1A1A"/>
                           </a:solidFill>
@@ -24062,7 +24059,7 @@
                     <a:p>
                       <a:pPr algn="ctr"/>
                       <a:r>
-                        <a:rPr sz="950">
+                        <a:rPr sz="1000">
                           <a:solidFill>
                             <a:srgbClr val="1A1A1A"/>
                           </a:solidFill>
@@ -24085,7 +24082,7 @@
                     <a:p>
                       <a:pPr algn="ctr"/>
                       <a:r>
-                        <a:rPr sz="950">
+                        <a:rPr sz="1000">
                           <a:solidFill>
                             <a:srgbClr val="1A1A1A"/>
                           </a:solidFill>
@@ -24102,15 +24099,15 @@
                   </a:tcPr>
                 </a:tc>
               </a:tr>
-              <a:tr h="571500">
-                <a:tc>
-                  <a:txBody>
-                    <a:bodyPr/>
-                    <a:lstStyle/>
-                    <a:p>
-                      <a:pPr algn="ctr"/>
-                      <a:r>
-                        <a:rPr sz="950">
+              <a:tr h="587828">
+                <a:tc>
+                  <a:txBody>
+                    <a:bodyPr/>
+                    <a:lstStyle/>
+                    <a:p>
+                      <a:pPr algn="ctr"/>
+                      <a:r>
+                        <a:rPr sz="1000">
                           <a:solidFill>
                             <a:srgbClr val="1A1A1A"/>
                           </a:solidFill>
@@ -24133,7 +24130,7 @@
                     <a:p>
                       <a:pPr algn="ctr"/>
                       <a:r>
-                        <a:rPr sz="950">
+                        <a:rPr sz="1000">
                           <a:solidFill>
                             <a:srgbClr val="1A1A1A"/>
                           </a:solidFill>
@@ -24156,7 +24153,7 @@
                     <a:p>
                       <a:pPr algn="ctr"/>
                       <a:r>
-                        <a:rPr sz="950">
+                        <a:rPr sz="1000">
                           <a:solidFill>
                             <a:srgbClr val="1A1A1A"/>
                           </a:solidFill>
@@ -24179,7 +24176,7 @@
                     <a:p>
                       <a:pPr algn="ctr"/>
                       <a:r>
-                        <a:rPr sz="950">
+                        <a:rPr sz="1000">
                           <a:solidFill>
                             <a:srgbClr val="1A1A1A"/>
                           </a:solidFill>
@@ -24202,7 +24199,7 @@
                     <a:p>
                       <a:pPr algn="ctr"/>
                       <a:r>
-                        <a:rPr sz="950">
+                        <a:rPr sz="1000">
                           <a:solidFill>
                             <a:srgbClr val="1A1A1A"/>
                           </a:solidFill>
@@ -24225,7 +24222,7 @@
                     <a:p>
                       <a:pPr algn="ctr"/>
                       <a:r>
-                        <a:rPr sz="950">
+                        <a:rPr sz="1000">
                           <a:solidFill>
                             <a:srgbClr val="1A1A1A"/>
                           </a:solidFill>
@@ -24248,7 +24245,7 @@
                     <a:p>
                       <a:pPr algn="ctr"/>
                       <a:r>
-                        <a:rPr sz="950">
+                        <a:rPr sz="1000">
                           <a:solidFill>
                             <a:srgbClr val="1A1A1A"/>
                           </a:solidFill>
@@ -24271,7 +24268,7 @@
                     <a:p>
                       <a:pPr algn="ctr"/>
                       <a:r>
-                        <a:rPr sz="950">
+                        <a:rPr sz="1000">
                           <a:solidFill>
                             <a:srgbClr val="1A1A1A"/>
                           </a:solidFill>
@@ -24288,15 +24285,15 @@
                   </a:tcPr>
                 </a:tc>
               </a:tr>
-              <a:tr h="571500">
-                <a:tc>
-                  <a:txBody>
-                    <a:bodyPr/>
-                    <a:lstStyle/>
-                    <a:p>
-                      <a:pPr algn="ctr"/>
-                      <a:r>
-                        <a:rPr sz="950">
+              <a:tr h="587828">
+                <a:tc>
+                  <a:txBody>
+                    <a:bodyPr/>
+                    <a:lstStyle/>
+                    <a:p>
+                      <a:pPr algn="ctr"/>
+                      <a:r>
+                        <a:rPr sz="1000">
                           <a:solidFill>
                             <a:srgbClr val="1A1A1A"/>
                           </a:solidFill>
@@ -24319,7 +24316,7 @@
                     <a:p>
                       <a:pPr algn="ctr"/>
                       <a:r>
-                        <a:rPr sz="950">
+                        <a:rPr sz="1000">
                           <a:solidFill>
                             <a:srgbClr val="1A1A1A"/>
                           </a:solidFill>
@@ -24342,7 +24339,7 @@
                     <a:p>
                       <a:pPr algn="ctr"/>
                       <a:r>
-                        <a:rPr sz="950">
+                        <a:rPr sz="1000">
                           <a:solidFill>
                             <a:srgbClr val="1A1A1A"/>
                           </a:solidFill>
@@ -24365,7 +24362,7 @@
                     <a:p>
                       <a:pPr algn="ctr"/>
                       <a:r>
-                        <a:rPr sz="950">
+                        <a:rPr sz="1000">
                           <a:solidFill>
                             <a:srgbClr val="1A1A1A"/>
                           </a:solidFill>
@@ -24388,7 +24385,7 @@
                     <a:p>
                       <a:pPr algn="ctr"/>
                       <a:r>
-                        <a:rPr sz="950">
+                        <a:rPr sz="1000">
                           <a:solidFill>
                             <a:srgbClr val="1A1A1A"/>
                           </a:solidFill>
@@ -24411,7 +24408,7 @@
                     <a:p>
                       <a:pPr algn="ctr"/>
                       <a:r>
-                        <a:rPr sz="950">
+                        <a:rPr sz="1000">
                           <a:solidFill>
                             <a:srgbClr val="1A1A1A"/>
                           </a:solidFill>
@@ -24434,7 +24431,7 @@
                     <a:p>
                       <a:pPr algn="ctr"/>
                       <a:r>
-                        <a:rPr sz="950">
+                        <a:rPr sz="1000">
                           <a:solidFill>
                             <a:srgbClr val="1A1A1A"/>
                           </a:solidFill>
@@ -24457,7 +24454,7 @@
                     <a:p>
                       <a:pPr algn="ctr"/>
                       <a:r>
-                        <a:rPr sz="950">
+                        <a:rPr sz="1000">
                           <a:solidFill>
                             <a:srgbClr val="1A1A1A"/>
                           </a:solidFill>
@@ -24474,15 +24471,15 @@
                   </a:tcPr>
                 </a:tc>
               </a:tr>
-              <a:tr h="571500">
-                <a:tc>
-                  <a:txBody>
-                    <a:bodyPr/>
-                    <a:lstStyle/>
-                    <a:p>
-                      <a:pPr algn="ctr"/>
-                      <a:r>
-                        <a:rPr sz="950">
+              <a:tr h="587828">
+                <a:tc>
+                  <a:txBody>
+                    <a:bodyPr/>
+                    <a:lstStyle/>
+                    <a:p>
+                      <a:pPr algn="ctr"/>
+                      <a:r>
+                        <a:rPr sz="1000">
                           <a:solidFill>
                             <a:srgbClr val="1A1A1A"/>
                           </a:solidFill>
@@ -24505,7 +24502,7 @@
                     <a:p>
                       <a:pPr algn="ctr"/>
                       <a:r>
-                        <a:rPr sz="950">
+                        <a:rPr sz="1000">
                           <a:solidFill>
                             <a:srgbClr val="1A1A1A"/>
                           </a:solidFill>
@@ -24528,7 +24525,7 @@
                     <a:p>
                       <a:pPr algn="ctr"/>
                       <a:r>
-                        <a:rPr sz="950">
+                        <a:rPr sz="1000">
                           <a:solidFill>
                             <a:srgbClr val="1A1A1A"/>
                           </a:solidFill>
@@ -24551,7 +24548,7 @@
                     <a:p>
                       <a:pPr algn="ctr"/>
                       <a:r>
-                        <a:rPr sz="950">
+                        <a:rPr sz="1000">
                           <a:solidFill>
                             <a:srgbClr val="1A1A1A"/>
                           </a:solidFill>
@@ -24574,7 +24571,7 @@
                     <a:p>
                       <a:pPr algn="ctr"/>
                       <a:r>
-                        <a:rPr sz="950">
+                        <a:rPr sz="1000">
                           <a:solidFill>
                             <a:srgbClr val="1A1A1A"/>
                           </a:solidFill>
@@ -24597,7 +24594,7 @@
                     <a:p>
                       <a:pPr algn="ctr"/>
                       <a:r>
-                        <a:rPr sz="950">
+                        <a:rPr sz="1000">
                           <a:solidFill>
                             <a:srgbClr val="1A1A1A"/>
                           </a:solidFill>
@@ -24620,7 +24617,7 @@
                     <a:p>
                       <a:pPr algn="ctr"/>
                       <a:r>
-                        <a:rPr sz="950">
+                        <a:rPr sz="1000">
                           <a:solidFill>
                             <a:srgbClr val="1A1A1A"/>
                           </a:solidFill>
@@ -24643,7 +24640,7 @@
                     <a:p>
                       <a:pPr algn="ctr"/>
                       <a:r>
-                        <a:rPr sz="950">
+                        <a:rPr sz="1000">
                           <a:solidFill>
                             <a:srgbClr val="1A1A1A"/>
                           </a:solidFill>
@@ -24660,15 +24657,15 @@
                   </a:tcPr>
                 </a:tc>
               </a:tr>
-              <a:tr h="571500">
-                <a:tc>
-                  <a:txBody>
-                    <a:bodyPr/>
-                    <a:lstStyle/>
-                    <a:p>
-                      <a:pPr algn="ctr"/>
-                      <a:r>
-                        <a:rPr sz="950">
+              <a:tr h="587832">
+                <a:tc>
+                  <a:txBody>
+                    <a:bodyPr/>
+                    <a:lstStyle/>
+                    <a:p>
+                      <a:pPr algn="ctr"/>
+                      <a:r>
+                        <a:rPr sz="1000">
                           <a:solidFill>
                             <a:srgbClr val="1A1A1A"/>
                           </a:solidFill>
@@ -24691,7 +24688,7 @@
                     <a:p>
                       <a:pPr algn="ctr"/>
                       <a:r>
-                        <a:rPr sz="950">
+                        <a:rPr sz="1000">
                           <a:solidFill>
                             <a:srgbClr val="1A1A1A"/>
                           </a:solidFill>
@@ -24714,7 +24711,7 @@
                     <a:p>
                       <a:pPr algn="ctr"/>
                       <a:r>
-                        <a:rPr sz="950">
+                        <a:rPr sz="1000">
                           <a:solidFill>
                             <a:srgbClr val="1A1A1A"/>
                           </a:solidFill>
@@ -24737,7 +24734,7 @@
                     <a:p>
                       <a:pPr algn="ctr"/>
                       <a:r>
-                        <a:rPr sz="950">
+                        <a:rPr sz="1000">
                           <a:solidFill>
                             <a:srgbClr val="1A1A1A"/>
                           </a:solidFill>
@@ -24760,7 +24757,7 @@
                     <a:p>
                       <a:pPr algn="ctr"/>
                       <a:r>
-                        <a:rPr sz="950">
+                        <a:rPr sz="1000">
                           <a:solidFill>
                             <a:srgbClr val="1A1A1A"/>
                           </a:solidFill>
@@ -24783,7 +24780,7 @@
                     <a:p>
                       <a:pPr algn="ctr"/>
                       <a:r>
-                        <a:rPr sz="950">
+                        <a:rPr sz="1000">
                           <a:solidFill>
                             <a:srgbClr val="1A1A1A"/>
                           </a:solidFill>
@@ -24806,7 +24803,7 @@
                     <a:p>
                       <a:pPr algn="ctr"/>
                       <a:r>
-                        <a:rPr sz="950">
+                        <a:rPr sz="1000">
                           <a:solidFill>
                             <a:srgbClr val="1A1A1A"/>
                           </a:solidFill>
@@ -24829,7 +24826,7 @@
                     <a:p>
                       <a:pPr algn="ctr"/>
                       <a:r>
-                        <a:rPr sz="950">
+                        <a:rPr sz="1000">
                           <a:solidFill>
                             <a:srgbClr val="1A1A1A"/>
                           </a:solidFill>
@@ -24842,192 +24839,6 @@
                   <a:tcPr>
                     <a:solidFill>
                       <a:srgbClr val="FFFFFF"/>
-                    </a:solidFill>
-                  </a:tcPr>
-                </a:tc>
-              </a:tr>
-              <a:tr h="571500">
-                <a:tc>
-                  <a:txBody>
-                    <a:bodyPr/>
-                    <a:lstStyle/>
-                    <a:p>
-                      <a:pPr algn="ctr"/>
-                      <a:r>
-                        <a:rPr sz="950">
-                          <a:solidFill>
-                            <a:srgbClr val="1A1A1A"/>
-                          </a:solidFill>
-                          <a:latin typeface="IPAGothic"/>
-                        </a:rPr>
-                        <a:t>やきとり家すみれ</a:t>
-                      </a:r>
-                    </a:p>
-                  </a:txBody>
-                  <a:tcPr>
-                    <a:solidFill>
-                      <a:srgbClr val="F0EEE8"/>
-                    </a:solidFill>
-                  </a:tcPr>
-                </a:tc>
-                <a:tc>
-                  <a:txBody>
-                    <a:bodyPr/>
-                    <a:lstStyle/>
-                    <a:p>
-                      <a:pPr algn="ctr"/>
-                      <a:r>
-                        <a:rPr sz="950">
-                          <a:solidFill>
-                            <a:srgbClr val="1A1A1A"/>
-                          </a:solidFill>
-                          <a:latin typeface="IPAGothic"/>
-                        </a:rPr>
-                        <a:t>全国展開</a:t>
-                      </a:r>
-                    </a:p>
-                  </a:txBody>
-                  <a:tcPr>
-                    <a:solidFill>
-                      <a:srgbClr val="F0EEE8"/>
-                    </a:solidFill>
-                  </a:tcPr>
-                </a:tc>
-                <a:tc>
-                  <a:txBody>
-                    <a:bodyPr/>
-                    <a:lstStyle/>
-                    <a:p>
-                      <a:pPr algn="ctr"/>
-                      <a:r>
-                        <a:rPr sz="950">
-                          <a:solidFill>
-                            <a:srgbClr val="1A1A1A"/>
-                          </a:solidFill>
-                          <a:latin typeface="IPAGothic"/>
-                        </a:rPr>
-                        <a:t>FC焼鳥・ファミリー/女性向け</a:t>
-                      </a:r>
-                    </a:p>
-                  </a:txBody>
-                  <a:tcPr>
-                    <a:solidFill>
-                      <a:srgbClr val="F0EEE8"/>
-                    </a:solidFill>
-                  </a:tcPr>
-                </a:tc>
-                <a:tc>
-                  <a:txBody>
-                    <a:bodyPr/>
-                    <a:lstStyle/>
-                    <a:p>
-                      <a:pPr algn="ctr"/>
-                      <a:r>
-                        <a:rPr sz="950">
-                          <a:solidFill>
-                            <a:srgbClr val="1A1A1A"/>
-                          </a:solidFill>
-                          <a:latin typeface="IPAGothic"/>
-                        </a:rPr>
-                        <a:t>¥2,500</a:t>
-                      </a:r>
-                    </a:p>
-                  </a:txBody>
-                  <a:tcPr>
-                    <a:solidFill>
-                      <a:srgbClr val="F0EEE8"/>
-                    </a:solidFill>
-                  </a:tcPr>
-                </a:tc>
-                <a:tc>
-                  <a:txBody>
-                    <a:bodyPr/>
-                    <a:lstStyle/>
-                    <a:p>
-                      <a:pPr algn="ctr"/>
-                      <a:r>
-                        <a:rPr sz="950">
-                          <a:solidFill>
-                            <a:srgbClr val="1A1A1A"/>
-                          </a:solidFill>
-                          <a:latin typeface="IPAGothic"/>
-                        </a:rPr>
-                        <a:t>約90店(FC67)</a:t>
-                      </a:r>
-                    </a:p>
-                  </a:txBody>
-                  <a:tcPr>
-                    <a:solidFill>
-                      <a:srgbClr val="F0EEE8"/>
-                    </a:solidFill>
-                  </a:tcPr>
-                </a:tc>
-                <a:tc>
-                  <a:txBody>
-                    <a:bodyPr/>
-                    <a:lstStyle/>
-                    <a:p>
-                      <a:pPr algn="ctr"/>
-                      <a:r>
-                        <a:rPr sz="950">
-                          <a:solidFill>
-                            <a:srgbClr val="1A1A1A"/>
-                          </a:solidFill>
-                          <a:latin typeface="IPAGothic"/>
-                        </a:rPr>
-                        <a:t>★★★☆☆</a:t>
-                      </a:r>
-                    </a:p>
-                  </a:txBody>
-                  <a:tcPr>
-                    <a:solidFill>
-                      <a:srgbClr val="F0EEE8"/>
-                    </a:solidFill>
-                  </a:tcPr>
-                </a:tc>
-                <a:tc>
-                  <a:txBody>
-                    <a:bodyPr/>
-                    <a:lstStyle/>
-                    <a:p>
-                      <a:pPr algn="ctr"/>
-                      <a:r>
-                        <a:rPr sz="950">
-                          <a:solidFill>
-                            <a:srgbClr val="1A1A1A"/>
-                          </a:solidFill>
-                          <a:latin typeface="IPAGothic"/>
-                        </a:rPr>
-                        <a:t>★★★★☆</a:t>
-                      </a:r>
-                    </a:p>
-                  </a:txBody>
-                  <a:tcPr>
-                    <a:solidFill>
-                      <a:srgbClr val="F0EEE8"/>
-                    </a:solidFill>
-                  </a:tcPr>
-                </a:tc>
-                <a:tc>
-                  <a:txBody>
-                    <a:bodyPr/>
-                    <a:lstStyle/>
-                    <a:p>
-                      <a:pPr algn="ctr"/>
-                      <a:r>
-                        <a:rPr sz="950">
-                          <a:solidFill>
-                            <a:srgbClr val="1A1A1A"/>
-                          </a:solidFill>
-                          <a:latin typeface="IPAGothic"/>
-                        </a:rPr>
-                        <a:t>FCモデルの先行事例・直接競合</a:t>
-                      </a:r>
-                    </a:p>
-                  </a:txBody>
-                  <a:tcPr>
-                    <a:solidFill>
-                      <a:srgbClr val="F0EEE8"/>
                     </a:solidFill>
                   </a:tcPr>
                 </a:tc>
@@ -25044,7 +24855,7 @@
         </p:nvSpPr>
         <p:spPr>
           <a:xfrm>
-            <a:off x="365760" y="6035040"/>
+            <a:off x="365760" y="5577840"/>
             <a:ext cx="10972800" cy="320040"/>
           </a:xfrm>
           <a:prstGeom prst="rect">
@@ -25066,7 +24877,7 @@
                 </a:solidFill>
                 <a:latin typeface="IPAGothic"/>
               </a:rPr>
-              <a:t>※ こだわり度・展開可能性は5段階評価（★多い＝高い）　客単価・店舗数は公開情報に基づく推計</a:t>
+              <a:t>※ こだわり度・展開可能性は5段階評価（★多い＝高い）　客単価は推計値</a:t>
             </a:r>
           </a:p>
         </p:txBody>
@@ -25079,8 +24890,8 @@
         </p:nvSpPr>
         <p:spPr>
           <a:xfrm>
-            <a:off x="274320" y="6400800"/>
-            <a:ext cx="11612880" cy="365760"/>
+            <a:off x="274320" y="5943600"/>
+            <a:ext cx="11612880" cy="457200"/>
           </a:xfrm>
           <a:prstGeom prst="rect">
             <a:avLst/>
@@ -25095,13 +24906,13 @@
           <a:p>
             <a:pPr algn="ctr"/>
             <a:r>
-              <a:rPr sz="1100" b="1" i="0">
+              <a:rPr sz="1300" b="1" i="0">
                 <a:solidFill>
                   <a:srgbClr val="C49A22"/>
                 </a:solidFill>
                 <a:latin typeface="IPAGothic"/>
               </a:rPr>
-              <a:t>→ やきとり家すみれはFC展開力が高いが「素材・発酵コア」の独自性で然グループが差別化できる</a:t>
+              <a:t>→ 高こだわり×高展開力を両立している競合はゼロ  ─  然グループの独占ゾーン</a:t>
             </a:r>
           </a:p>
         </p:txBody>

--- a/zen/07_融資・投資家資料/然グループ_統合ピッチデッキ_強化版.pptx
+++ b/zen/07_融資・投資家資料/然グループ_統合ピッチデッキ_強化版.pptx
@@ -7969,7 +7969,7 @@
                 </a:solidFill>
                 <a:latin typeface="IPAGothic"/>
               </a:rPr>
-              <a:t>年商 20億円  /  55店舗  /  EBITDA 6億円</a:t>
+              <a:t>年商 20億円  /  55店舗  /  EBITDA 4億円</a:t>
             </a:r>
           </a:p>
         </p:txBody>
@@ -10649,7 +10649,7 @@
                           </a:solidFill>
                           <a:latin typeface="IPAGothic"/>
                         </a:rPr>
-                        <a:t>▲42,000</a:t>
+                        <a:t>▲46,000</a:t>
                       </a:r>
                     </a:p>
                   </a:txBody>
@@ -10929,7 +10929,7 @@
                           </a:solidFill>
                           <a:latin typeface="IPAGothic"/>
                         </a:rPr>
-                        <a:t>▲31,000</a:t>
+                        <a:t>▲35,000</a:t>
                       </a:r>
                     </a:p>
                   </a:txBody>
@@ -11069,7 +11069,7 @@
                           </a:solidFill>
                           <a:latin typeface="IPAGothic"/>
                         </a:rPr>
-                        <a:t>48,000</a:t>
+                        <a:t>40,000</a:t>
                       </a:r>
                     </a:p>
                   </a:txBody>
@@ -11209,7 +11209,7 @@
                           </a:solidFill>
                           <a:latin typeface="IPAGothic"/>
                         </a:rPr>
-                        <a:t>24%</a:t>
+                        <a:t>20%</a:t>
                       </a:r>
                     </a:p>
                   </a:txBody>
@@ -13557,7 +13557,7 @@
                 </a:solidFill>
                 <a:latin typeface="IPAGothic"/>
               </a:rPr>
-              <a:t>・Y5：年商20億円・EBITDA6億円  →  EXIT（M&amp;A or IPO）を視野に</a:t>
+              <a:t>・Y5：年商20億円・EBITDA4億円  →  EXIT（M&amp;A or IPO）を視野に</a:t>
             </a:r>
           </a:p>
           <a:p>

--- a/zen/07_融資・投資家資料/然グループ_統合ピッチデッキ_強化版.pptx
+++ b/zen/07_融資・投資家資料/然グループ_統合ピッチデッキ_強化版.pptx
@@ -10557,7 +10557,7 @@
                           </a:solidFill>
                           <a:latin typeface="IPAGothic"/>
                         </a:rPr>
-                        <a:t>▲3,500</a:t>
+                        <a:t>▲3,840</a:t>
                       </a:r>
                     </a:p>
                   </a:txBody>
@@ -10580,7 +10580,7 @@
                           </a:solidFill>
                           <a:latin typeface="IPAGothic"/>
                         </a:rPr>
-                        <a:t>▲8,500</a:t>
+                        <a:t>▲9,200</a:t>
                       </a:r>
                     </a:p>
                   </a:txBody>
@@ -10603,7 +10603,7 @@
                           </a:solidFill>
                           <a:latin typeface="IPAGothic"/>
                         </a:rPr>
-                        <a:t>▲16,000</a:t>
+                        <a:t>▲16,480</a:t>
                       </a:r>
                     </a:p>
                   </a:txBody>
@@ -10626,7 +10626,7 @@
                           </a:solidFill>
                           <a:latin typeface="IPAGothic"/>
                         </a:rPr>
-                        <a:t>▲26,000</a:t>
+                        <a:t>▲29,000</a:t>
                       </a:r>
                     </a:p>
                   </a:txBody>
@@ -10837,7 +10837,7 @@
                           </a:solidFill>
                           <a:latin typeface="IPAGothic"/>
                         </a:rPr>
-                        <a:t>▲2,400</a:t>
+                        <a:t>▲2,500</a:t>
                       </a:r>
                     </a:p>
                   </a:txBody>
@@ -10860,7 +10860,7 @@
                           </a:solidFill>
                           <a:latin typeface="IPAGothic"/>
                         </a:rPr>
-                        <a:t>▲5,600</a:t>
+                        <a:t>▲5,560</a:t>
                       </a:r>
                     </a:p>
                   </a:txBody>
@@ -10906,7 +10906,7 @@
                           </a:solidFill>
                           <a:latin typeface="IPAGothic"/>
                         </a:rPr>
-                        <a:t>▲18,000</a:t>
+                        <a:t>▲18,800</a:t>
                       </a:r>
                     </a:p>
                   </a:txBody>
@@ -10977,7 +10977,7 @@
                           </a:solidFill>
                           <a:latin typeface="IPAGothic"/>
                         </a:rPr>
-                        <a:t>2,260</a:t>
+                        <a:t>1,820</a:t>
                       </a:r>
                     </a:p>
                   </a:txBody>
@@ -11000,7 +11000,7 @@
                           </a:solidFill>
                           <a:latin typeface="IPAGothic"/>
                         </a:rPr>
-                        <a:t>7,140</a:t>
+                        <a:t>6,480</a:t>
                       </a:r>
                     </a:p>
                   </a:txBody>
@@ -11023,7 +11023,7 @@
                           </a:solidFill>
                           <a:latin typeface="IPAGothic"/>
                         </a:rPr>
-                        <a:t>14,880</a:t>
+                        <a:t>14,400</a:t>
                       </a:r>
                     </a:p>
                   </a:txBody>
@@ -11046,7 +11046,7 @@
                           </a:solidFill>
                           <a:latin typeface="IPAGothic"/>
                         </a:rPr>
-                        <a:t>27,800</a:t>
+                        <a:t>24,000</a:t>
                       </a:r>
                     </a:p>
                   </a:txBody>
@@ -11117,7 +11117,7 @@
                           </a:solidFill>
                           <a:latin typeface="IPAGothic"/>
                         </a:rPr>
-                        <a:t>16%</a:t>
+                        <a:t>13%</a:t>
                       </a:r>
                     </a:p>
                   </a:txBody>
@@ -11140,6 +11140,29 @@
                           </a:solidFill>
                           <a:latin typeface="IPAGothic"/>
                         </a:rPr>
+                        <a:t>18%</a:t>
+                      </a:r>
+                    </a:p>
+                  </a:txBody>
+                  <a:tcPr>
+                    <a:solidFill>
+                      <a:srgbClr val="F0EEE8"/>
+                    </a:solidFill>
+                  </a:tcPr>
+                </a:tc>
+                <a:tc>
+                  <a:txBody>
+                    <a:bodyPr/>
+                    <a:lstStyle/>
+                    <a:p>
+                      <a:pPr algn="ctr"/>
+                      <a:r>
+                        <a:rPr sz="1000" b="0">
+                          <a:solidFill>
+                            <a:srgbClr val="1A1A1A"/>
+                          </a:solidFill>
+                          <a:latin typeface="IPAGothic"/>
+                        </a:rPr>
                         <a:t>20%</a:t>
                       </a:r>
                     </a:p>
@@ -11163,30 +11186,7 @@
                           </a:solidFill>
                           <a:latin typeface="IPAGothic"/>
                         </a:rPr>
-                        <a:t>21%</a:t>
-                      </a:r>
-                    </a:p>
-                  </a:txBody>
-                  <a:tcPr>
-                    <a:solidFill>
-                      <a:srgbClr val="F0EEE8"/>
-                    </a:solidFill>
-                  </a:tcPr>
-                </a:tc>
-                <a:tc>
-                  <a:txBody>
-                    <a:bodyPr/>
-                    <a:lstStyle/>
-                    <a:p>
-                      <a:pPr algn="ctr"/>
-                      <a:r>
-                        <a:rPr sz="1000" b="0">
-                          <a:solidFill>
-                            <a:srgbClr val="1A1A1A"/>
-                          </a:solidFill>
-                          <a:latin typeface="IPAGothic"/>
-                        </a:rPr>
-                        <a:t>23%</a:t>
+                        <a:t>20%</a:t>
                       </a:r>
                     </a:p>
                   </a:txBody>
@@ -13545,7 +13545,7 @@
                 </a:solidFill>
                 <a:latin typeface="IPAGothic"/>
               </a:rPr>
-              <a:t>・Y3以降：FCスケールで利益率が改善。EBITDA1.8億円（月商6,000万）で成長が加速</a:t>
+              <a:t>・Y3以降：FCスケールで利益率が20%に安定。EBITDA1.4億円（月商6,000万）で成長が加速</a:t>
             </a:r>
           </a:p>
           <a:p>

--- a/zen/07_融資・投資家資料/然グループ_統合ピッチデッキ_強化版.pptx
+++ b/zen/07_融資・投資家資料/然グループ_統合ピッチデッキ_強化版.pptx
@@ -24,6 +24,7 @@
     <p:sldId id="272" r:id="rId23"/>
     <p:sldId id="273" r:id="rId24"/>
     <p:sldId id="274" r:id="rId25"/>
+    <p:sldId id="275" r:id="rId26"/>
   </p:sldIdLst>
   <p:sldSz cx="12188952" cy="6858000" type="screen4x3"/>
   <p:notesSz cx="6858000" cy="9144000"/>
@@ -8525,7 +8526,7 @@
                 </a:solidFill>
                 <a:latin typeface="IPAGothic"/>
               </a:rPr>
-              <a:t>収益モデルサマリー  ─  グループ損益と成長ストック</a:t>
+              <a:t>採用・組織計画  ─  人材投資で成長を支える体制づくり</a:t>
             </a:r>
           </a:p>
         </p:txBody>
@@ -8570,25 +8571,1136 @@
         </p:blipFill>
         <p:spPr>
           <a:xfrm>
-            <a:off x="274320" y="1005840"/>
-            <a:ext cx="5669280" cy="2834640"/>
+            <a:off x="274320" y="960120"/>
+            <a:ext cx="6217920" cy="3200400"/>
           </a:xfrm>
           <a:prstGeom prst="rect">
             <a:avLst/>
           </a:prstGeom>
         </p:spPr>
       </p:pic>
+      <p:sp>
+        <p:nvSpPr>
+          <p:cNvPr id="6" name="Rectangle 5"/>
+          <p:cNvSpPr/>
+          <p:nvPr/>
+        </p:nvSpPr>
+        <p:spPr>
+          <a:xfrm>
+            <a:off x="6675120" y="960120"/>
+            <a:ext cx="5212080" cy="347472"/>
+          </a:xfrm>
+          <a:prstGeom prst="rect">
+            <a:avLst/>
+          </a:prstGeom>
+          <a:solidFill>
+            <a:srgbClr val="2C4A3E"/>
+          </a:solidFill>
+          <a:ln>
+            <a:noFill/>
+          </a:ln>
+        </p:spPr>
+        <p:style>
+          <a:lnRef idx="1">
+            <a:schemeClr val="accent1"/>
+          </a:lnRef>
+          <a:fillRef idx="3">
+            <a:schemeClr val="accent1"/>
+          </a:fillRef>
+          <a:effectRef idx="2">
+            <a:schemeClr val="accent1"/>
+          </a:effectRef>
+          <a:fontRef idx="minor">
+            <a:schemeClr val="lt1"/>
+          </a:fontRef>
+        </p:style>
+        <p:txBody>
+          <a:bodyPr rtlCol="0" anchor="ctr"/>
+          <a:lstStyle/>
+          <a:p>
+            <a:pPr algn="ctr"/>
+          </a:p>
+        </p:txBody>
+      </p:sp>
+      <p:sp>
+        <p:nvSpPr>
+          <p:cNvPr id="7" name="TextBox 6"/>
+          <p:cNvSpPr txBox="1"/>
+          <p:nvPr/>
+        </p:nvSpPr>
+        <p:spPr>
+          <a:xfrm>
+            <a:off x="6766560" y="987552"/>
+            <a:ext cx="5029200" cy="310896"/>
+          </a:xfrm>
+          <a:prstGeom prst="rect">
+            <a:avLst/>
+          </a:prstGeom>
+          <a:noFill/>
+        </p:spPr>
+        <p:txBody>
+          <a:bodyPr wrap="square">
+            <a:spAutoFit/>
+          </a:bodyPr>
+          <a:lstStyle/>
+          <a:p>
+            <a:pPr algn="l"/>
+            <a:r>
+              <a:rPr sz="1100" b="1" i="0">
+                <a:solidFill>
+                  <a:srgbClr val="FFFFFF"/>
+                </a:solidFill>
+                <a:latin typeface="IPAGothic"/>
+              </a:rPr>
+              <a:t>職種別 月給レンジ目安</a:t>
+            </a:r>
+          </a:p>
+        </p:txBody>
+      </p:sp>
+      <p:sp>
+        <p:nvSpPr>
+          <p:cNvPr id="8" name="Rectangle 7"/>
+          <p:cNvSpPr/>
+          <p:nvPr/>
+        </p:nvSpPr>
+        <p:spPr>
+          <a:xfrm>
+            <a:off x="6675120" y="1399032"/>
+            <a:ext cx="5212080" cy="612648"/>
+          </a:xfrm>
+          <a:prstGeom prst="rect">
+            <a:avLst/>
+          </a:prstGeom>
+          <a:solidFill>
+            <a:srgbClr val="F0EEE8"/>
+          </a:solidFill>
+          <a:ln>
+            <a:noFill/>
+          </a:ln>
+        </p:spPr>
+        <p:style>
+          <a:lnRef idx="1">
+            <a:schemeClr val="accent1"/>
+          </a:lnRef>
+          <a:fillRef idx="3">
+            <a:schemeClr val="accent1"/>
+          </a:fillRef>
+          <a:effectRef idx="2">
+            <a:schemeClr val="accent1"/>
+          </a:effectRef>
+          <a:fontRef idx="minor">
+            <a:schemeClr val="lt1"/>
+          </a:fontRef>
+        </p:style>
+        <p:txBody>
+          <a:bodyPr rtlCol="0" anchor="ctr"/>
+          <a:lstStyle/>
+          <a:p>
+            <a:pPr algn="ctr"/>
+          </a:p>
+        </p:txBody>
+      </p:sp>
+      <p:sp>
+        <p:nvSpPr>
+          <p:cNvPr id="9" name="Rectangle 8"/>
+          <p:cNvSpPr/>
+          <p:nvPr/>
+        </p:nvSpPr>
+        <p:spPr>
+          <a:xfrm>
+            <a:off x="6675120" y="1399032"/>
+            <a:ext cx="73152" cy="612648"/>
+          </a:xfrm>
+          <a:prstGeom prst="rect">
+            <a:avLst/>
+          </a:prstGeom>
+          <a:solidFill>
+            <a:srgbClr val="8B2020"/>
+          </a:solidFill>
+          <a:ln>
+            <a:noFill/>
+          </a:ln>
+        </p:spPr>
+        <p:style>
+          <a:lnRef idx="1">
+            <a:schemeClr val="accent1"/>
+          </a:lnRef>
+          <a:fillRef idx="3">
+            <a:schemeClr val="accent1"/>
+          </a:fillRef>
+          <a:effectRef idx="2">
+            <a:schemeClr val="accent1"/>
+          </a:effectRef>
+          <a:fontRef idx="minor">
+            <a:schemeClr val="lt1"/>
+          </a:fontRef>
+        </p:style>
+        <p:txBody>
+          <a:bodyPr rtlCol="0" anchor="ctr"/>
+          <a:lstStyle/>
+          <a:p>
+            <a:pPr algn="ctr"/>
+          </a:p>
+        </p:txBody>
+      </p:sp>
+      <p:sp>
+        <p:nvSpPr>
+          <p:cNvPr id="10" name="TextBox 9"/>
+          <p:cNvSpPr txBox="1"/>
+          <p:nvPr/>
+        </p:nvSpPr>
+        <p:spPr>
+          <a:xfrm>
+            <a:off x="6812280" y="1426464"/>
+            <a:ext cx="4937760" cy="274320"/>
+          </a:xfrm>
+          <a:prstGeom prst="rect">
+            <a:avLst/>
+          </a:prstGeom>
+          <a:noFill/>
+        </p:spPr>
+        <p:txBody>
+          <a:bodyPr wrap="square">
+            <a:spAutoFit/>
+          </a:bodyPr>
+          <a:lstStyle/>
+          <a:p>
+            <a:pPr algn="l"/>
+            <a:r>
+              <a:rPr sz="950" b="1" i="0">
+                <a:solidFill>
+                  <a:srgbClr val="8B2020"/>
+                </a:solidFill>
+                <a:latin typeface="IPAGothic"/>
+              </a:rPr>
+              <a:t>執行役員（Y3昇格・初期採用から）</a:t>
+            </a:r>
+          </a:p>
+        </p:txBody>
+      </p:sp>
+      <p:sp>
+        <p:nvSpPr>
+          <p:cNvPr id="11" name="TextBox 10"/>
+          <p:cNvSpPr txBox="1"/>
+          <p:nvPr/>
+        </p:nvSpPr>
+        <p:spPr>
+          <a:xfrm>
+            <a:off x="6812280" y="1700784"/>
+            <a:ext cx="4937760" cy="274320"/>
+          </a:xfrm>
+          <a:prstGeom prst="rect">
+            <a:avLst/>
+          </a:prstGeom>
+          <a:noFill/>
+        </p:spPr>
+        <p:txBody>
+          <a:bodyPr wrap="square">
+            <a:spAutoFit/>
+          </a:bodyPr>
+          <a:lstStyle/>
+          <a:p>
+            <a:pPr algn="l"/>
+            <a:r>
+              <a:rPr sz="900" b="0" i="0">
+                <a:solidFill>
+                  <a:srgbClr val="1A1A1A"/>
+                </a:solidFill>
+                <a:latin typeface="IPAGothic"/>
+              </a:rPr>
+              <a:t>※別途検討中</a:t>
+            </a:r>
+          </a:p>
+        </p:txBody>
+      </p:sp>
+      <p:sp>
+        <p:nvSpPr>
+          <p:cNvPr id="12" name="TextBox 11"/>
+          <p:cNvSpPr txBox="1"/>
+          <p:nvPr/>
+        </p:nvSpPr>
+        <p:spPr>
+          <a:xfrm>
+            <a:off x="6812280" y="1856232"/>
+            <a:ext cx="4937760" cy="164592"/>
+          </a:xfrm>
+          <a:prstGeom prst="rect">
+            <a:avLst/>
+          </a:prstGeom>
+          <a:noFill/>
+        </p:spPr>
+        <p:txBody>
+          <a:bodyPr wrap="square">
+            <a:spAutoFit/>
+          </a:bodyPr>
+          <a:lstStyle/>
+          <a:p>
+            <a:pPr algn="l"/>
+            <a:r>
+              <a:rPr sz="800" b="0" i="1">
+                <a:solidFill>
+                  <a:srgbClr val="1A1A1A"/>
+                </a:solidFill>
+                <a:latin typeface="IPAGothic"/>
+              </a:rPr>
+              <a:t>Y1入社→Y3執行役員昇格ルート</a:t>
+            </a:r>
+          </a:p>
+        </p:txBody>
+      </p:sp>
+      <p:sp>
+        <p:nvSpPr>
+          <p:cNvPr id="13" name="Rectangle 12"/>
+          <p:cNvSpPr/>
+          <p:nvPr/>
+        </p:nvSpPr>
+        <p:spPr>
+          <a:xfrm>
+            <a:off x="6675120" y="2057400"/>
+            <a:ext cx="5212080" cy="612648"/>
+          </a:xfrm>
+          <a:prstGeom prst="rect">
+            <a:avLst/>
+          </a:prstGeom>
+          <a:solidFill>
+            <a:srgbClr val="F0EEE8"/>
+          </a:solidFill>
+          <a:ln>
+            <a:noFill/>
+          </a:ln>
+        </p:spPr>
+        <p:style>
+          <a:lnRef idx="1">
+            <a:schemeClr val="accent1"/>
+          </a:lnRef>
+          <a:fillRef idx="3">
+            <a:schemeClr val="accent1"/>
+          </a:fillRef>
+          <a:effectRef idx="2">
+            <a:schemeClr val="accent1"/>
+          </a:effectRef>
+          <a:fontRef idx="minor">
+            <a:schemeClr val="lt1"/>
+          </a:fontRef>
+        </p:style>
+        <p:txBody>
+          <a:bodyPr rtlCol="0" anchor="ctr"/>
+          <a:lstStyle/>
+          <a:p>
+            <a:pPr algn="ctr"/>
+          </a:p>
+        </p:txBody>
+      </p:sp>
+      <p:sp>
+        <p:nvSpPr>
+          <p:cNvPr id="14" name="Rectangle 13"/>
+          <p:cNvSpPr/>
+          <p:nvPr/>
+        </p:nvSpPr>
+        <p:spPr>
+          <a:xfrm>
+            <a:off x="6675120" y="2057400"/>
+            <a:ext cx="73152" cy="612648"/>
+          </a:xfrm>
+          <a:prstGeom prst="rect">
+            <a:avLst/>
+          </a:prstGeom>
+          <a:solidFill>
+            <a:srgbClr val="2C4A3E"/>
+          </a:solidFill>
+          <a:ln>
+            <a:noFill/>
+          </a:ln>
+        </p:spPr>
+        <p:style>
+          <a:lnRef idx="1">
+            <a:schemeClr val="accent1"/>
+          </a:lnRef>
+          <a:fillRef idx="3">
+            <a:schemeClr val="accent1"/>
+          </a:fillRef>
+          <a:effectRef idx="2">
+            <a:schemeClr val="accent1"/>
+          </a:effectRef>
+          <a:fontRef idx="minor">
+            <a:schemeClr val="lt1"/>
+          </a:fontRef>
+        </p:style>
+        <p:txBody>
+          <a:bodyPr rtlCol="0" anchor="ctr"/>
+          <a:lstStyle/>
+          <a:p>
+            <a:pPr algn="ctr"/>
+          </a:p>
+        </p:txBody>
+      </p:sp>
+      <p:sp>
+        <p:nvSpPr>
+          <p:cNvPr id="15" name="TextBox 14"/>
+          <p:cNvSpPr txBox="1"/>
+          <p:nvPr/>
+        </p:nvSpPr>
+        <p:spPr>
+          <a:xfrm>
+            <a:off x="6812280" y="2084832"/>
+            <a:ext cx="4937760" cy="274320"/>
+          </a:xfrm>
+          <a:prstGeom prst="rect">
+            <a:avLst/>
+          </a:prstGeom>
+          <a:noFill/>
+        </p:spPr>
+        <p:txBody>
+          <a:bodyPr wrap="square">
+            <a:spAutoFit/>
+          </a:bodyPr>
+          <a:lstStyle/>
+          <a:p>
+            <a:pPr algn="l"/>
+            <a:r>
+              <a:rPr sz="950" b="1" i="0">
+                <a:solidFill>
+                  <a:srgbClr val="2C4A3E"/>
+                </a:solidFill>
+                <a:latin typeface="IPAGothic"/>
+              </a:rPr>
+              <a:t>エリアSV（スーパーバイザー）</a:t>
+            </a:r>
+          </a:p>
+        </p:txBody>
+      </p:sp>
+      <p:sp>
+        <p:nvSpPr>
+          <p:cNvPr id="16" name="TextBox 15"/>
+          <p:cNvSpPr txBox="1"/>
+          <p:nvPr/>
+        </p:nvSpPr>
+        <p:spPr>
+          <a:xfrm>
+            <a:off x="6812280" y="2359152"/>
+            <a:ext cx="4937760" cy="274320"/>
+          </a:xfrm>
+          <a:prstGeom prst="rect">
+            <a:avLst/>
+          </a:prstGeom>
+          <a:noFill/>
+        </p:spPr>
+        <p:txBody>
+          <a:bodyPr wrap="square">
+            <a:spAutoFit/>
+          </a:bodyPr>
+          <a:lstStyle/>
+          <a:p>
+            <a:pPr algn="l"/>
+            <a:r>
+              <a:rPr sz="900" b="0" i="0">
+                <a:solidFill>
+                  <a:srgbClr val="1A1A1A"/>
+                </a:solidFill>
+                <a:latin typeface="IPAGothic"/>
+              </a:rPr>
+              <a:t>38〜45万円/月</a:t>
+            </a:r>
+          </a:p>
+        </p:txBody>
+      </p:sp>
+      <p:sp>
+        <p:nvSpPr>
+          <p:cNvPr id="17" name="TextBox 16"/>
+          <p:cNvSpPr txBox="1"/>
+          <p:nvPr/>
+        </p:nvSpPr>
+        <p:spPr>
+          <a:xfrm>
+            <a:off x="6812280" y="2514600"/>
+            <a:ext cx="4937760" cy="164592"/>
+          </a:xfrm>
+          <a:prstGeom prst="rect">
+            <a:avLst/>
+          </a:prstGeom>
+          <a:noFill/>
+        </p:spPr>
+        <p:txBody>
+          <a:bodyPr wrap="square">
+            <a:spAutoFit/>
+          </a:bodyPr>
+          <a:lstStyle/>
+          <a:p>
+            <a:pPr algn="l"/>
+            <a:r>
+              <a:rPr sz="800" b="0" i="1">
+                <a:solidFill>
+                  <a:srgbClr val="1A1A1A"/>
+                </a:solidFill>
+                <a:latin typeface="IPAGothic"/>
+              </a:rPr>
+              <a:t>5〜7店舗を担当・Y3〜設置</a:t>
+            </a:r>
+          </a:p>
+        </p:txBody>
+      </p:sp>
+      <p:sp>
+        <p:nvSpPr>
+          <p:cNvPr id="18" name="Rectangle 17"/>
+          <p:cNvSpPr/>
+          <p:nvPr/>
+        </p:nvSpPr>
+        <p:spPr>
+          <a:xfrm>
+            <a:off x="6675120" y="2715768"/>
+            <a:ext cx="5212080" cy="612648"/>
+          </a:xfrm>
+          <a:prstGeom prst="rect">
+            <a:avLst/>
+          </a:prstGeom>
+          <a:solidFill>
+            <a:srgbClr val="F0EEE8"/>
+          </a:solidFill>
+          <a:ln>
+            <a:noFill/>
+          </a:ln>
+        </p:spPr>
+        <p:style>
+          <a:lnRef idx="1">
+            <a:schemeClr val="accent1"/>
+          </a:lnRef>
+          <a:fillRef idx="3">
+            <a:schemeClr val="accent1"/>
+          </a:fillRef>
+          <a:effectRef idx="2">
+            <a:schemeClr val="accent1"/>
+          </a:effectRef>
+          <a:fontRef idx="minor">
+            <a:schemeClr val="lt1"/>
+          </a:fontRef>
+        </p:style>
+        <p:txBody>
+          <a:bodyPr rtlCol="0" anchor="ctr"/>
+          <a:lstStyle/>
+          <a:p>
+            <a:pPr algn="ctr"/>
+          </a:p>
+        </p:txBody>
+      </p:sp>
+      <p:sp>
+        <p:nvSpPr>
+          <p:cNvPr id="19" name="Rectangle 18"/>
+          <p:cNvSpPr/>
+          <p:nvPr/>
+        </p:nvSpPr>
+        <p:spPr>
+          <a:xfrm>
+            <a:off x="6675120" y="2715768"/>
+            <a:ext cx="73152" cy="612648"/>
+          </a:xfrm>
+          <a:prstGeom prst="rect">
+            <a:avLst/>
+          </a:prstGeom>
+          <a:solidFill>
+            <a:srgbClr val="C49A22"/>
+          </a:solidFill>
+          <a:ln>
+            <a:noFill/>
+          </a:ln>
+        </p:spPr>
+        <p:style>
+          <a:lnRef idx="1">
+            <a:schemeClr val="accent1"/>
+          </a:lnRef>
+          <a:fillRef idx="3">
+            <a:schemeClr val="accent1"/>
+          </a:fillRef>
+          <a:effectRef idx="2">
+            <a:schemeClr val="accent1"/>
+          </a:effectRef>
+          <a:fontRef idx="minor">
+            <a:schemeClr val="lt1"/>
+          </a:fontRef>
+        </p:style>
+        <p:txBody>
+          <a:bodyPr rtlCol="0" anchor="ctr"/>
+          <a:lstStyle/>
+          <a:p>
+            <a:pPr algn="ctr"/>
+          </a:p>
+        </p:txBody>
+      </p:sp>
+      <p:sp>
+        <p:nvSpPr>
+          <p:cNvPr id="20" name="TextBox 19"/>
+          <p:cNvSpPr txBox="1"/>
+          <p:nvPr/>
+        </p:nvSpPr>
+        <p:spPr>
+          <a:xfrm>
+            <a:off x="6812280" y="2743200"/>
+            <a:ext cx="4937760" cy="274320"/>
+          </a:xfrm>
+          <a:prstGeom prst="rect">
+            <a:avLst/>
+          </a:prstGeom>
+          <a:noFill/>
+        </p:spPr>
+        <p:txBody>
+          <a:bodyPr wrap="square">
+            <a:spAutoFit/>
+          </a:bodyPr>
+          <a:lstStyle/>
+          <a:p>
+            <a:pPr algn="l"/>
+            <a:r>
+              <a:rPr sz="950" b="1" i="0">
+                <a:solidFill>
+                  <a:srgbClr val="C49A22"/>
+                </a:solidFill>
+                <a:latin typeface="IPAGothic"/>
+              </a:rPr>
+              <a:t>店長（正社員）</a:t>
+            </a:r>
+          </a:p>
+        </p:txBody>
+      </p:sp>
+      <p:sp>
+        <p:nvSpPr>
+          <p:cNvPr id="21" name="TextBox 20"/>
+          <p:cNvSpPr txBox="1"/>
+          <p:nvPr/>
+        </p:nvSpPr>
+        <p:spPr>
+          <a:xfrm>
+            <a:off x="6812280" y="3017520"/>
+            <a:ext cx="4937760" cy="274320"/>
+          </a:xfrm>
+          <a:prstGeom prst="rect">
+            <a:avLst/>
+          </a:prstGeom>
+          <a:noFill/>
+        </p:spPr>
+        <p:txBody>
+          <a:bodyPr wrap="square">
+            <a:spAutoFit/>
+          </a:bodyPr>
+          <a:lstStyle/>
+          <a:p>
+            <a:pPr algn="l"/>
+            <a:r>
+              <a:rPr sz="900" b="0" i="0">
+                <a:solidFill>
+                  <a:srgbClr val="1A1A1A"/>
+                </a:solidFill>
+                <a:latin typeface="IPAGothic"/>
+              </a:rPr>
+              <a:t>30〜38万円/月＋売上1%インセンティブ</a:t>
+            </a:r>
+          </a:p>
+        </p:txBody>
+      </p:sp>
+      <p:sp>
+        <p:nvSpPr>
+          <p:cNvPr id="22" name="TextBox 21"/>
+          <p:cNvSpPr txBox="1"/>
+          <p:nvPr/>
+        </p:nvSpPr>
+        <p:spPr>
+          <a:xfrm>
+            <a:off x="6812280" y="3172968"/>
+            <a:ext cx="4937760" cy="164592"/>
+          </a:xfrm>
+          <a:prstGeom prst="rect">
+            <a:avLst/>
+          </a:prstGeom>
+          <a:noFill/>
+        </p:spPr>
+        <p:txBody>
+          <a:bodyPr wrap="square">
+            <a:spAutoFit/>
+          </a:bodyPr>
+          <a:lstStyle/>
+          <a:p>
+            <a:pPr algn="l"/>
+            <a:r>
+              <a:rPr sz="800" b="0" i="1">
+                <a:solidFill>
+                  <a:srgbClr val="1A1A1A"/>
+                </a:solidFill>
+                <a:latin typeface="IPAGothic"/>
+              </a:rPr>
+              <a:t>店舗運営・スタッフ育成</a:t>
+            </a:r>
+          </a:p>
+        </p:txBody>
+      </p:sp>
+      <p:sp>
+        <p:nvSpPr>
+          <p:cNvPr id="23" name="Rectangle 22"/>
+          <p:cNvSpPr/>
+          <p:nvPr/>
+        </p:nvSpPr>
+        <p:spPr>
+          <a:xfrm>
+            <a:off x="6675120" y="3374136"/>
+            <a:ext cx="5212080" cy="612648"/>
+          </a:xfrm>
+          <a:prstGeom prst="rect">
+            <a:avLst/>
+          </a:prstGeom>
+          <a:solidFill>
+            <a:srgbClr val="F0EEE8"/>
+          </a:solidFill>
+          <a:ln>
+            <a:noFill/>
+          </a:ln>
+        </p:spPr>
+        <p:style>
+          <a:lnRef idx="1">
+            <a:schemeClr val="accent1"/>
+          </a:lnRef>
+          <a:fillRef idx="3">
+            <a:schemeClr val="accent1"/>
+          </a:fillRef>
+          <a:effectRef idx="2">
+            <a:schemeClr val="accent1"/>
+          </a:effectRef>
+          <a:fontRef idx="minor">
+            <a:schemeClr val="lt1"/>
+          </a:fontRef>
+        </p:style>
+        <p:txBody>
+          <a:bodyPr rtlCol="0" anchor="ctr"/>
+          <a:lstStyle/>
+          <a:p>
+            <a:pPr algn="ctr"/>
+          </a:p>
+        </p:txBody>
+      </p:sp>
+      <p:sp>
+        <p:nvSpPr>
+          <p:cNvPr id="24" name="Rectangle 23"/>
+          <p:cNvSpPr/>
+          <p:nvPr/>
+        </p:nvSpPr>
+        <p:spPr>
+          <a:xfrm>
+            <a:off x="6675120" y="3374136"/>
+            <a:ext cx="73152" cy="612648"/>
+          </a:xfrm>
+          <a:prstGeom prst="rect">
+            <a:avLst/>
+          </a:prstGeom>
+          <a:solidFill>
+            <a:srgbClr val="C49A22"/>
+          </a:solidFill>
+          <a:ln>
+            <a:noFill/>
+          </a:ln>
+        </p:spPr>
+        <p:style>
+          <a:lnRef idx="1">
+            <a:schemeClr val="accent1"/>
+          </a:lnRef>
+          <a:fillRef idx="3">
+            <a:schemeClr val="accent1"/>
+          </a:fillRef>
+          <a:effectRef idx="2">
+            <a:schemeClr val="accent1"/>
+          </a:effectRef>
+          <a:fontRef idx="minor">
+            <a:schemeClr val="lt1"/>
+          </a:fontRef>
+        </p:style>
+        <p:txBody>
+          <a:bodyPr rtlCol="0" anchor="ctr"/>
+          <a:lstStyle/>
+          <a:p>
+            <a:pPr algn="ctr"/>
+          </a:p>
+        </p:txBody>
+      </p:sp>
+      <p:sp>
+        <p:nvSpPr>
+          <p:cNvPr id="25" name="TextBox 24"/>
+          <p:cNvSpPr txBox="1"/>
+          <p:nvPr/>
+        </p:nvSpPr>
+        <p:spPr>
+          <a:xfrm>
+            <a:off x="6812280" y="3401568"/>
+            <a:ext cx="4937760" cy="274320"/>
+          </a:xfrm>
+          <a:prstGeom prst="rect">
+            <a:avLst/>
+          </a:prstGeom>
+          <a:noFill/>
+        </p:spPr>
+        <p:txBody>
+          <a:bodyPr wrap="square">
+            <a:spAutoFit/>
+          </a:bodyPr>
+          <a:lstStyle/>
+          <a:p>
+            <a:pPr algn="l"/>
+            <a:r>
+              <a:rPr sz="950" b="1" i="0">
+                <a:solidFill>
+                  <a:srgbClr val="C49A22"/>
+                </a:solidFill>
+                <a:latin typeface="IPAGothic"/>
+              </a:rPr>
+              <a:t>副店長・社員</a:t>
+            </a:r>
+          </a:p>
+        </p:txBody>
+      </p:sp>
+      <p:sp>
+        <p:nvSpPr>
+          <p:cNvPr id="26" name="TextBox 25"/>
+          <p:cNvSpPr txBox="1"/>
+          <p:nvPr/>
+        </p:nvSpPr>
+        <p:spPr>
+          <a:xfrm>
+            <a:off x="6812280" y="3675888"/>
+            <a:ext cx="4937760" cy="274320"/>
+          </a:xfrm>
+          <a:prstGeom prst="rect">
+            <a:avLst/>
+          </a:prstGeom>
+          <a:noFill/>
+        </p:spPr>
+        <p:txBody>
+          <a:bodyPr wrap="square">
+            <a:spAutoFit/>
+          </a:bodyPr>
+          <a:lstStyle/>
+          <a:p>
+            <a:pPr algn="l"/>
+            <a:r>
+              <a:rPr sz="900" b="0" i="0">
+                <a:solidFill>
+                  <a:srgbClr val="1A1A1A"/>
+                </a:solidFill>
+                <a:latin typeface="IPAGothic"/>
+              </a:rPr>
+              <a:t>25〜30万円/月</a:t>
+            </a:r>
+          </a:p>
+        </p:txBody>
+      </p:sp>
+      <p:sp>
+        <p:nvSpPr>
+          <p:cNvPr id="27" name="TextBox 26"/>
+          <p:cNvSpPr txBox="1"/>
+          <p:nvPr/>
+        </p:nvSpPr>
+        <p:spPr>
+          <a:xfrm>
+            <a:off x="6812280" y="3831336"/>
+            <a:ext cx="4937760" cy="164592"/>
+          </a:xfrm>
+          <a:prstGeom prst="rect">
+            <a:avLst/>
+          </a:prstGeom>
+          <a:noFill/>
+        </p:spPr>
+        <p:txBody>
+          <a:bodyPr wrap="square">
+            <a:spAutoFit/>
+          </a:bodyPr>
+          <a:lstStyle/>
+          <a:p>
+            <a:pPr algn="l"/>
+            <a:r>
+              <a:rPr sz="800" b="0" i="1">
+                <a:solidFill>
+                  <a:srgbClr val="1A1A1A"/>
+                </a:solidFill>
+                <a:latin typeface="IPAGothic"/>
+              </a:rPr>
+              <a:t>調理・ホール・発注</a:t>
+            </a:r>
+          </a:p>
+        </p:txBody>
+      </p:sp>
+      <p:sp>
+        <p:nvSpPr>
+          <p:cNvPr id="28" name="Rectangle 27"/>
+          <p:cNvSpPr/>
+          <p:nvPr/>
+        </p:nvSpPr>
+        <p:spPr>
+          <a:xfrm>
+            <a:off x="6675120" y="4032504"/>
+            <a:ext cx="5212080" cy="612648"/>
+          </a:xfrm>
+          <a:prstGeom prst="rect">
+            <a:avLst/>
+          </a:prstGeom>
+          <a:solidFill>
+            <a:srgbClr val="F0EEE8"/>
+          </a:solidFill>
+          <a:ln>
+            <a:noFill/>
+          </a:ln>
+        </p:spPr>
+        <p:style>
+          <a:lnRef idx="1">
+            <a:schemeClr val="accent1"/>
+          </a:lnRef>
+          <a:fillRef idx="3">
+            <a:schemeClr val="accent1"/>
+          </a:fillRef>
+          <a:effectRef idx="2">
+            <a:schemeClr val="accent1"/>
+          </a:effectRef>
+          <a:fontRef idx="minor">
+            <a:schemeClr val="lt1"/>
+          </a:fontRef>
+        </p:style>
+        <p:txBody>
+          <a:bodyPr rtlCol="0" anchor="ctr"/>
+          <a:lstStyle/>
+          <a:p>
+            <a:pPr algn="ctr"/>
+          </a:p>
+        </p:txBody>
+      </p:sp>
+      <p:sp>
+        <p:nvSpPr>
+          <p:cNvPr id="29" name="Rectangle 28"/>
+          <p:cNvSpPr/>
+          <p:nvPr/>
+        </p:nvSpPr>
+        <p:spPr>
+          <a:xfrm>
+            <a:off x="6675120" y="4032504"/>
+            <a:ext cx="73152" cy="612648"/>
+          </a:xfrm>
+          <a:prstGeom prst="rect">
+            <a:avLst/>
+          </a:prstGeom>
+          <a:solidFill>
+            <a:srgbClr val="AAAAAA"/>
+          </a:solidFill>
+          <a:ln>
+            <a:noFill/>
+          </a:ln>
+        </p:spPr>
+        <p:style>
+          <a:lnRef idx="1">
+            <a:schemeClr val="accent1"/>
+          </a:lnRef>
+          <a:fillRef idx="3">
+            <a:schemeClr val="accent1"/>
+          </a:fillRef>
+          <a:effectRef idx="2">
+            <a:schemeClr val="accent1"/>
+          </a:effectRef>
+          <a:fontRef idx="minor">
+            <a:schemeClr val="lt1"/>
+          </a:fontRef>
+        </p:style>
+        <p:txBody>
+          <a:bodyPr rtlCol="0" anchor="ctr"/>
+          <a:lstStyle/>
+          <a:p>
+            <a:pPr algn="ctr"/>
+          </a:p>
+        </p:txBody>
+      </p:sp>
+      <p:sp>
+        <p:nvSpPr>
+          <p:cNvPr id="30" name="TextBox 29"/>
+          <p:cNvSpPr txBox="1"/>
+          <p:nvPr/>
+        </p:nvSpPr>
+        <p:spPr>
+          <a:xfrm>
+            <a:off x="6812280" y="4059936"/>
+            <a:ext cx="4937760" cy="274320"/>
+          </a:xfrm>
+          <a:prstGeom prst="rect">
+            <a:avLst/>
+          </a:prstGeom>
+          <a:noFill/>
+        </p:spPr>
+        <p:txBody>
+          <a:bodyPr wrap="square">
+            <a:spAutoFit/>
+          </a:bodyPr>
+          <a:lstStyle/>
+          <a:p>
+            <a:pPr algn="l"/>
+            <a:r>
+              <a:rPr sz="950" b="1" i="0">
+                <a:solidFill>
+                  <a:srgbClr val="AAAAAA"/>
+                </a:solidFill>
+                <a:latin typeface="IPAGothic"/>
+              </a:rPr>
+              <a:t>アルバイト</a:t>
+            </a:r>
+          </a:p>
+        </p:txBody>
+      </p:sp>
+      <p:sp>
+        <p:nvSpPr>
+          <p:cNvPr id="31" name="TextBox 30"/>
+          <p:cNvSpPr txBox="1"/>
+          <p:nvPr/>
+        </p:nvSpPr>
+        <p:spPr>
+          <a:xfrm>
+            <a:off x="6812280" y="4334256"/>
+            <a:ext cx="4937760" cy="274320"/>
+          </a:xfrm>
+          <a:prstGeom prst="rect">
+            <a:avLst/>
+          </a:prstGeom>
+          <a:noFill/>
+        </p:spPr>
+        <p:txBody>
+          <a:bodyPr wrap="square">
+            <a:spAutoFit/>
+          </a:bodyPr>
+          <a:lstStyle/>
+          <a:p>
+            <a:pPr algn="l"/>
+            <a:r>
+              <a:rPr sz="900" b="0" i="0">
+                <a:solidFill>
+                  <a:srgbClr val="1A1A1A"/>
+                </a:solidFill>
+                <a:latin typeface="IPAGothic"/>
+              </a:rPr>
+              <a:t>時給1,200〜1,500円</a:t>
+            </a:r>
+          </a:p>
+        </p:txBody>
+      </p:sp>
+      <p:sp>
+        <p:nvSpPr>
+          <p:cNvPr id="32" name="TextBox 31"/>
+          <p:cNvSpPr txBox="1"/>
+          <p:nvPr/>
+        </p:nvSpPr>
+        <p:spPr>
+          <a:xfrm>
+            <a:off x="6812280" y="4489704"/>
+            <a:ext cx="4937760" cy="164592"/>
+          </a:xfrm>
+          <a:prstGeom prst="rect">
+            <a:avLst/>
+          </a:prstGeom>
+          <a:noFill/>
+        </p:spPr>
+        <p:txBody>
+          <a:bodyPr wrap="square">
+            <a:spAutoFit/>
+          </a:bodyPr>
+          <a:lstStyle/>
+          <a:p>
+            <a:pPr algn="l"/>
+            <a:r>
+              <a:rPr sz="800" b="0" i="1">
+                <a:solidFill>
+                  <a:srgbClr val="1A1A1A"/>
+                </a:solidFill>
+                <a:latin typeface="IPAGothic"/>
+              </a:rPr>
+              <a:t>ホール・キッチン補助</a:t>
+            </a:r>
+          </a:p>
+        </p:txBody>
+      </p:sp>
+      <p:sp>
+        <p:nvSpPr>
+          <p:cNvPr id="33" name="Rectangle 32"/>
+          <p:cNvSpPr/>
+          <p:nvPr/>
+        </p:nvSpPr>
+        <p:spPr>
+          <a:xfrm>
+            <a:off x="274320" y="4251960"/>
+            <a:ext cx="11612880" cy="347472"/>
+          </a:xfrm>
+          <a:prstGeom prst="rect">
+            <a:avLst/>
+          </a:prstGeom>
+          <a:solidFill>
+            <a:srgbClr val="1A2A4A"/>
+          </a:solidFill>
+          <a:ln>
+            <a:noFill/>
+          </a:ln>
+        </p:spPr>
+        <p:style>
+          <a:lnRef idx="1">
+            <a:schemeClr val="accent1"/>
+          </a:lnRef>
+          <a:fillRef idx="3">
+            <a:schemeClr val="accent1"/>
+          </a:fillRef>
+          <a:effectRef idx="2">
+            <a:schemeClr val="accent1"/>
+          </a:effectRef>
+          <a:fontRef idx="minor">
+            <a:schemeClr val="lt1"/>
+          </a:fontRef>
+        </p:style>
+        <p:txBody>
+          <a:bodyPr rtlCol="0" anchor="ctr"/>
+          <a:lstStyle/>
+          <a:p>
+            <a:pPr algn="ctr"/>
+          </a:p>
+        </p:txBody>
+      </p:sp>
+      <p:sp>
+        <p:nvSpPr>
+          <p:cNvPr id="34" name="TextBox 33"/>
+          <p:cNvSpPr txBox="1"/>
+          <p:nvPr/>
+        </p:nvSpPr>
+        <p:spPr>
+          <a:xfrm>
+            <a:off x="365760" y="4279392"/>
+            <a:ext cx="11247120" cy="310896"/>
+          </a:xfrm>
+          <a:prstGeom prst="rect">
+            <a:avLst/>
+          </a:prstGeom>
+          <a:noFill/>
+        </p:spPr>
+        <p:txBody>
+          <a:bodyPr wrap="square">
+            <a:spAutoFit/>
+          </a:bodyPr>
+          <a:lstStyle/>
+          <a:p>
+            <a:pPr algn="l"/>
+            <a:r>
+              <a:rPr sz="1100" b="1" i="0">
+                <a:solidFill>
+                  <a:srgbClr val="FFFFFF"/>
+                </a:solidFill>
+                <a:latin typeface="IPAGothic"/>
+              </a:rPr>
+              <a:t>年度別採用計画（人件費逆算ベース）</a:t>
+            </a:r>
+          </a:p>
+        </p:txBody>
+      </p:sp>
       <p:graphicFrame>
         <p:nvGraphicFramePr>
-          <p:cNvPr id="6" name="Table 5"/>
+          <p:cNvPr id="35" name="Table 34"/>
           <p:cNvGraphicFramePr>
             <a:graphicFrameLocks noGrp="1"/>
           </p:cNvGraphicFramePr>
           <p:nvPr/>
         </p:nvGraphicFramePr>
         <p:xfrm>
-          <a:off x="5943600" y="1005840"/>
-          <a:ext cx="5943600" cy="2834640"/>
+          <a:off x="274320" y="4663440"/>
+          <a:ext cx="11612880" cy="2011680"/>
         </p:xfrm>
         <a:graphic>
           <a:graphicData uri="http://schemas.openxmlformats.org/drawingml/2006/table">
@@ -8597,14 +9709,14 @@
                 <a:tableStyleId>{5C22544A-7EE6-4342-B048-85BDC9FD1C3A}</a:tableStyleId>
               </a:tblPr>
               <a:tblGrid>
-                <a:gridCol w="990600"/>
-                <a:gridCol w="990600"/>
-                <a:gridCol w="990600"/>
-                <a:gridCol w="990600"/>
-                <a:gridCol w="990600"/>
-                <a:gridCol w="990600"/>
+                <a:gridCol w="1935480"/>
+                <a:gridCol w="1935480"/>
+                <a:gridCol w="1935480"/>
+                <a:gridCol w="1935480"/>
+                <a:gridCol w="1935480"/>
+                <a:gridCol w="1935480"/>
               </a:tblGrid>
-              <a:tr h="472440">
+              <a:tr h="287382">
                 <a:tc>
                   <a:txBody>
                     <a:bodyPr/>
@@ -8618,13 +9730,13 @@
                           </a:solidFill>
                           <a:latin typeface="IPAGothic"/>
                         </a:rPr>
-                        <a:t>ブランド</a:t>
-                      </a:r>
-                    </a:p>
-                  </a:txBody>
-                  <a:tcPr>
-                    <a:solidFill>
-                      <a:srgbClr val="2C4A3E"/>
+                        <a:t/>
+                      </a:r>
+                    </a:p>
+                  </a:txBody>
+                  <a:tcPr>
+                    <a:solidFill>
+                      <a:srgbClr val="1A2A4A"/>
                     </a:solidFill>
                   </a:tcPr>
                 </a:tc>
@@ -8641,13 +9753,13 @@
                           </a:solidFill>
                           <a:latin typeface="IPAGothic"/>
                         </a:rPr>
-                        <a:t>月次売上/店</a:t>
-                      </a:r>
-                    </a:p>
-                  </a:txBody>
-                  <a:tcPr>
-                    <a:solidFill>
-                      <a:srgbClr val="2C4A3E"/>
+                        <a:t>Y1 2026</a:t>
+                      </a:r>
+                    </a:p>
+                  </a:txBody>
+                  <a:tcPr>
+                    <a:solidFill>
+                      <a:srgbClr val="1A2A4A"/>
                     </a:solidFill>
                   </a:tcPr>
                 </a:tc>
@@ -8664,13 +9776,13 @@
                           </a:solidFill>
                           <a:latin typeface="IPAGothic"/>
                         </a:rPr>
-                        <a:t>利益率</a:t>
-                      </a:r>
-                    </a:p>
-                  </a:txBody>
-                  <a:tcPr>
-                    <a:solidFill>
-                      <a:srgbClr val="2C4A3E"/>
+                        <a:t>Y2 2027</a:t>
+                      </a:r>
+                    </a:p>
+                  </a:txBody>
+                  <a:tcPr>
+                    <a:solidFill>
+                      <a:srgbClr val="1A2A4A"/>
                     </a:solidFill>
                   </a:tcPr>
                 </a:tc>
@@ -8687,13 +9799,13 @@
                           </a:solidFill>
                           <a:latin typeface="IPAGothic"/>
                         </a:rPr>
-                        <a:t>1店月次利益</a:t>
-                      </a:r>
-                    </a:p>
-                  </a:txBody>
-                  <a:tcPr>
-                    <a:solidFill>
-                      <a:srgbClr val="2C4A3E"/>
+                        <a:t>Y3 2028</a:t>
+                      </a:r>
+                    </a:p>
+                  </a:txBody>
+                  <a:tcPr>
+                    <a:solidFill>
+                      <a:srgbClr val="1A2A4A"/>
                     </a:solidFill>
                   </a:tcPr>
                 </a:tc>
@@ -8710,13 +9822,13 @@
                           </a:solidFill>
                           <a:latin typeface="IPAGothic"/>
                         </a:rPr>
-                        <a:t>目標店舗</a:t>
-                      </a:r>
-                    </a:p>
-                  </a:txBody>
-                  <a:tcPr>
-                    <a:solidFill>
-                      <a:srgbClr val="2C4A3E"/>
+                        <a:t>Y4 2029</a:t>
+                      </a:r>
+                    </a:p>
+                  </a:txBody>
+                  <a:tcPr>
+                    <a:solidFill>
+                      <a:srgbClr val="1A2A4A"/>
                     </a:solidFill>
                   </a:tcPr>
                 </a:tc>
@@ -8733,18 +9845,18 @@
                           </a:solidFill>
                           <a:latin typeface="IPAGothic"/>
                         </a:rPr>
-                        <a:t>グループ月次利益</a:t>
-                      </a:r>
-                    </a:p>
-                  </a:txBody>
-                  <a:tcPr>
-                    <a:solidFill>
-                      <a:srgbClr val="2C4A3E"/>
+                        <a:t>Y5 2030</a:t>
+                      </a:r>
+                    </a:p>
+                  </a:txBody>
+                  <a:tcPr>
+                    <a:solidFill>
+                      <a:srgbClr val="1A2A4A"/>
                     </a:solidFill>
                   </a:tcPr>
                 </a:tc>
               </a:tr>
-              <a:tr h="472440">
+              <a:tr h="287382">
                 <a:tc>
                   <a:txBody>
                     <a:bodyPr/>
@@ -8758,7 +9870,7 @@
                           </a:solidFill>
                           <a:latin typeface="IPAGothic"/>
                         </a:rPr>
-                        <a:t>だし 然</a:t>
+                        <a:t>店舗数</a:t>
                       </a:r>
                     </a:p>
                   </a:txBody>
@@ -8781,7 +9893,7 @@
                           </a:solidFill>
                           <a:latin typeface="IPAGothic"/>
                         </a:rPr>
-                        <a:t>960万円</a:t>
+                        <a:t>3店</a:t>
                       </a:r>
                     </a:p>
                   </a:txBody>
@@ -8804,7 +9916,7 @@
                           </a:solidFill>
                           <a:latin typeface="IPAGothic"/>
                         </a:rPr>
-                        <a:t>15%</a:t>
+                        <a:t>9店</a:t>
                       </a:r>
                     </a:p>
                   </a:txBody>
@@ -8827,7 +9939,7 @@
                           </a:solidFill>
                           <a:latin typeface="IPAGothic"/>
                         </a:rPr>
-                        <a:t>144万円</a:t>
+                        <a:t>22店</a:t>
                       </a:r>
                     </a:p>
                   </a:txBody>
@@ -8850,7 +9962,7 @@
                           </a:solidFill>
                           <a:latin typeface="IPAGothic"/>
                         </a:rPr>
-                        <a:t>20店</a:t>
+                        <a:t>35店</a:t>
                       </a:r>
                     </a:p>
                   </a:txBody>
@@ -8873,7 +9985,7 @@
                           </a:solidFill>
                           <a:latin typeface="IPAGothic"/>
                         </a:rPr>
-                        <a:t>2,880万円</a:t>
+                        <a:t>55店</a:t>
                       </a:r>
                     </a:p>
                   </a:txBody>
@@ -8884,7 +9996,7 @@
                   </a:tcPr>
                 </a:tc>
               </a:tr>
-              <a:tr h="472440">
+              <a:tr h="287382">
                 <a:tc>
                   <a:txBody>
                     <a:bodyPr/>
@@ -8898,7 +10010,7 @@
                           </a:solidFill>
                           <a:latin typeface="IPAGothic"/>
                         </a:rPr>
-                        <a:t>肉酒場 然</a:t>
+                        <a:t>本部・SV（名）</a:t>
                       </a:r>
                     </a:p>
                   </a:txBody>
@@ -8921,7 +10033,7 @@
                           </a:solidFill>
                           <a:latin typeface="IPAGothic"/>
                         </a:rPr>
-                        <a:t>1,200万円</a:t>
+                        <a:t>2</a:t>
                       </a:r>
                     </a:p>
                   </a:txBody>
@@ -8944,7 +10056,7 @@
                           </a:solidFill>
                           <a:latin typeface="IPAGothic"/>
                         </a:rPr>
-                        <a:t>17%</a:t>
+                        <a:t>4</a:t>
                       </a:r>
                     </a:p>
                   </a:txBody>
@@ -8967,7 +10079,7 @@
                           </a:solidFill>
                           <a:latin typeface="IPAGothic"/>
                         </a:rPr>
-                        <a:t>200万円</a:t>
+                        <a:t>7</a:t>
                       </a:r>
                     </a:p>
                   </a:txBody>
@@ -8990,7 +10102,7 @@
                           </a:solidFill>
                           <a:latin typeface="IPAGothic"/>
                         </a:rPr>
-                        <a:t>5店</a:t>
+                        <a:t>10</a:t>
                       </a:r>
                     </a:p>
                   </a:txBody>
@@ -9013,7 +10125,7 @@
                           </a:solidFill>
                           <a:latin typeface="IPAGothic"/>
                         </a:rPr>
-                        <a:t>1,000万円</a:t>
+                        <a:t>12</a:t>
                       </a:r>
                     </a:p>
                   </a:txBody>
@@ -9024,7 +10136,7 @@
                   </a:tcPr>
                 </a:tc>
               </a:tr>
-              <a:tr h="472440">
+              <a:tr h="287382">
                 <a:tc>
                   <a:txBody>
                     <a:bodyPr/>
@@ -9038,7 +10150,7 @@
                           </a:solidFill>
                           <a:latin typeface="IPAGothic"/>
                         </a:rPr>
-                        <a:t>蕎麦 然（小型）</a:t>
+                        <a:t>店舗社員（名）</a:t>
                       </a:r>
                     </a:p>
                   </a:txBody>
@@ -9061,7 +10173,7 @@
                           </a:solidFill>
                           <a:latin typeface="IPAGothic"/>
                         </a:rPr>
-                        <a:t>350万円</a:t>
+                        <a:t>6</a:t>
                       </a:r>
                     </a:p>
                   </a:txBody>
@@ -9084,7 +10196,7 @@
                           </a:solidFill>
                           <a:latin typeface="IPAGothic"/>
                         </a:rPr>
-                        <a:t>20%</a:t>
+                        <a:t>18</a:t>
                       </a:r>
                     </a:p>
                   </a:txBody>
@@ -9107,7 +10219,7 @@
                           </a:solidFill>
                           <a:latin typeface="IPAGothic"/>
                         </a:rPr>
-                        <a:t>70万円</a:t>
+                        <a:t>48</a:t>
                       </a:r>
                     </a:p>
                   </a:txBody>
@@ -9130,7 +10242,7 @@
                           </a:solidFill>
                           <a:latin typeface="IPAGothic"/>
                         </a:rPr>
-                        <a:t>30店</a:t>
+                        <a:t>77</a:t>
                       </a:r>
                     </a:p>
                   </a:txBody>
@@ -9153,7 +10265,7 @@
                           </a:solidFill>
                           <a:latin typeface="IPAGothic"/>
                         </a:rPr>
-                        <a:t>2,100万円</a:t>
+                        <a:t>121</a:t>
                       </a:r>
                     </a:p>
                   </a:txBody>
@@ -9164,7 +10276,7 @@
                   </a:tcPr>
                 </a:tc>
               </a:tr>
-              <a:tr h="472440">
+              <a:tr h="287382">
                 <a:tc>
                   <a:txBody>
                     <a:bodyPr/>
@@ -9178,7 +10290,7 @@
                           </a:solidFill>
                           <a:latin typeface="IPAGothic"/>
                         </a:rPr>
-                        <a:t>SNS事業部</a:t>
+                        <a:t>アルバイト（名）</a:t>
                       </a:r>
                     </a:p>
                   </a:txBody>
@@ -9201,7 +10313,7 @@
                           </a:solidFill>
                           <a:latin typeface="IPAGothic"/>
                         </a:rPr>
-                        <a:t>─</a:t>
+                        <a:t>9</a:t>
                       </a:r>
                     </a:p>
                   </a:txBody>
@@ -9224,7 +10336,7 @@
                           </a:solidFill>
                           <a:latin typeface="IPAGothic"/>
                         </a:rPr>
-                        <a:t>─</a:t>
+                        <a:t>27</a:t>
                       </a:r>
                     </a:p>
                   </a:txBody>
@@ -9247,7 +10359,7 @@
                           </a:solidFill>
                           <a:latin typeface="IPAGothic"/>
                         </a:rPr>
-                        <a:t>83万円</a:t>
+                        <a:t>66</a:t>
                       </a:r>
                     </a:p>
                   </a:txBody>
@@ -9270,7 +10382,7 @@
                           </a:solidFill>
                           <a:latin typeface="IPAGothic"/>
                         </a:rPr>
-                        <a:t>─</a:t>
+                        <a:t>105</a:t>
                       </a:r>
                     </a:p>
                   </a:txBody>
@@ -9293,7 +10405,7 @@
                           </a:solidFill>
                           <a:latin typeface="IPAGothic"/>
                         </a:rPr>
-                        <a:t>83万円</a:t>
+                        <a:t>165</a:t>
                       </a:r>
                     </a:p>
                   </a:txBody>
@@ -9304,7 +10416,7 @@
                   </a:tcPr>
                 </a:tc>
               </a:tr>
-              <a:tr h="472440">
+              <a:tr h="287382">
                 <a:tc>
                   <a:txBody>
                     <a:bodyPr/>
@@ -9318,7 +10430,7 @@
                           </a:solidFill>
                           <a:latin typeface="IPAGothic"/>
                         </a:rPr>
-                        <a:t>合計（安定期）</a:t>
+                        <a:t>総人員（名）</a:t>
                       </a:r>
                     </a:p>
                   </a:txBody>
@@ -9341,7 +10453,7 @@
                           </a:solidFill>
                           <a:latin typeface="IPAGothic"/>
                         </a:rPr>
-                        <a:t>─</a:t>
+                        <a:t>17</a:t>
                       </a:r>
                     </a:p>
                   </a:txBody>
@@ -9364,7 +10476,7 @@
                           </a:solidFill>
                           <a:latin typeface="IPAGothic"/>
                         </a:rPr>
-                        <a:t>─</a:t>
+                        <a:t>49</a:t>
                       </a:r>
                     </a:p>
                   </a:txBody>
@@ -9387,7 +10499,7 @@
                           </a:solidFill>
                           <a:latin typeface="IPAGothic"/>
                         </a:rPr>
-                        <a:t>─</a:t>
+                        <a:t>121</a:t>
                       </a:r>
                     </a:p>
                   </a:txBody>
@@ -9410,7 +10522,7 @@
                           </a:solidFill>
                           <a:latin typeface="IPAGothic"/>
                         </a:rPr>
-                        <a:t>55店</a:t>
+                        <a:t>192</a:t>
                       </a:r>
                     </a:p>
                   </a:txBody>
@@ -9433,13 +10545,153 @@
                           </a:solidFill>
                           <a:latin typeface="IPAGothic"/>
                         </a:rPr>
-                        <a:t>6,063万円〜</a:t>
+                        <a:t>298</a:t>
                       </a:r>
                     </a:p>
                   </a:txBody>
                   <a:tcPr>
                     <a:solidFill>
                       <a:srgbClr val="F0EEE8"/>
+                    </a:solidFill>
+                  </a:tcPr>
+                </a:tc>
+              </a:tr>
+              <a:tr h="287388">
+                <a:tc>
+                  <a:txBody>
+                    <a:bodyPr/>
+                    <a:lstStyle/>
+                    <a:p>
+                      <a:pPr algn="ctr"/>
+                      <a:r>
+                        <a:rPr sz="1000">
+                          <a:solidFill>
+                            <a:srgbClr val="1A1A1A"/>
+                          </a:solidFill>
+                          <a:latin typeface="IPAGothic"/>
+                        </a:rPr>
+                        <a:t>人件費（万円）</a:t>
+                      </a:r>
+                    </a:p>
+                  </a:txBody>
+                  <a:tcPr>
+                    <a:solidFill>
+                      <a:srgbClr val="FFFFFF"/>
+                    </a:solidFill>
+                  </a:tcPr>
+                </a:tc>
+                <a:tc>
+                  <a:txBody>
+                    <a:bodyPr/>
+                    <a:lstStyle/>
+                    <a:p>
+                      <a:pPr algn="ctr"/>
+                      <a:r>
+                        <a:rPr sz="1000">
+                          <a:solidFill>
+                            <a:srgbClr val="1A1A1A"/>
+                          </a:solidFill>
+                          <a:latin typeface="IPAGothic"/>
+                        </a:rPr>
+                        <a:t>3,840</a:t>
+                      </a:r>
+                    </a:p>
+                  </a:txBody>
+                  <a:tcPr>
+                    <a:solidFill>
+                      <a:srgbClr val="FFFFFF"/>
+                    </a:solidFill>
+                  </a:tcPr>
+                </a:tc>
+                <a:tc>
+                  <a:txBody>
+                    <a:bodyPr/>
+                    <a:lstStyle/>
+                    <a:p>
+                      <a:pPr algn="ctr"/>
+                      <a:r>
+                        <a:rPr sz="1000">
+                          <a:solidFill>
+                            <a:srgbClr val="1A1A1A"/>
+                          </a:solidFill>
+                          <a:latin typeface="IPAGothic"/>
+                        </a:rPr>
+                        <a:t>9,200</a:t>
+                      </a:r>
+                    </a:p>
+                  </a:txBody>
+                  <a:tcPr>
+                    <a:solidFill>
+                      <a:srgbClr val="FFFFFF"/>
+                    </a:solidFill>
+                  </a:tcPr>
+                </a:tc>
+                <a:tc>
+                  <a:txBody>
+                    <a:bodyPr/>
+                    <a:lstStyle/>
+                    <a:p>
+                      <a:pPr algn="ctr"/>
+                      <a:r>
+                        <a:rPr sz="1000">
+                          <a:solidFill>
+                            <a:srgbClr val="1A1A1A"/>
+                          </a:solidFill>
+                          <a:latin typeface="IPAGothic"/>
+                        </a:rPr>
+                        <a:t>16,480</a:t>
+                      </a:r>
+                    </a:p>
+                  </a:txBody>
+                  <a:tcPr>
+                    <a:solidFill>
+                      <a:srgbClr val="FFFFFF"/>
+                    </a:solidFill>
+                  </a:tcPr>
+                </a:tc>
+                <a:tc>
+                  <a:txBody>
+                    <a:bodyPr/>
+                    <a:lstStyle/>
+                    <a:p>
+                      <a:pPr algn="ctr"/>
+                      <a:r>
+                        <a:rPr sz="1000">
+                          <a:solidFill>
+                            <a:srgbClr val="1A1A1A"/>
+                          </a:solidFill>
+                          <a:latin typeface="IPAGothic"/>
+                        </a:rPr>
+                        <a:t>29,000</a:t>
+                      </a:r>
+                    </a:p>
+                  </a:txBody>
+                  <a:tcPr>
+                    <a:solidFill>
+                      <a:srgbClr val="FFFFFF"/>
+                    </a:solidFill>
+                  </a:tcPr>
+                </a:tc>
+                <a:tc>
+                  <a:txBody>
+                    <a:bodyPr/>
+                    <a:lstStyle/>
+                    <a:p>
+                      <a:pPr algn="ctr"/>
+                      <a:r>
+                        <a:rPr sz="1000">
+                          <a:solidFill>
+                            <a:srgbClr val="1A1A1A"/>
+                          </a:solidFill>
+                          <a:latin typeface="IPAGothic"/>
+                        </a:rPr>
+                        <a:t>46,000</a:t>
+                      </a:r>
+                    </a:p>
+                  </a:txBody>
+                  <a:tcPr>
+                    <a:solidFill>
+                      <a:srgbClr val="FFFFFF"/>
                     </a:solidFill>
                   </a:tcPr>
                 </a:tc>
@@ -9450,57 +10702,14 @@
       </p:graphicFrame>
       <p:sp>
         <p:nvSpPr>
-          <p:cNvPr id="7" name="Rectangle 6"/>
-          <p:cNvSpPr/>
-          <p:nvPr/>
-        </p:nvSpPr>
-        <p:spPr>
-          <a:xfrm>
-            <a:off x="274320" y="4023360"/>
-            <a:ext cx="11612880" cy="347472"/>
-          </a:xfrm>
-          <a:prstGeom prst="rect">
-            <a:avLst/>
-          </a:prstGeom>
-          <a:solidFill>
-            <a:srgbClr val="2C4A3E"/>
-          </a:solidFill>
-          <a:ln>
-            <a:noFill/>
-          </a:ln>
-        </p:spPr>
-        <p:style>
-          <a:lnRef idx="1">
-            <a:schemeClr val="accent1"/>
-          </a:lnRef>
-          <a:fillRef idx="3">
-            <a:schemeClr val="accent1"/>
-          </a:fillRef>
-          <a:effectRef idx="2">
-            <a:schemeClr val="accent1"/>
-          </a:effectRef>
-          <a:fontRef idx="minor">
-            <a:schemeClr val="lt1"/>
-          </a:fontRef>
-        </p:style>
-        <p:txBody>
-          <a:bodyPr rtlCol="0" anchor="ctr"/>
-          <a:lstStyle/>
-          <a:p>
-            <a:pPr algn="ctr"/>
-          </a:p>
-        </p:txBody>
-      </p:sp>
-      <p:sp>
-        <p:nvSpPr>
-          <p:cNvPr id="8" name="TextBox 7"/>
+          <p:cNvPr id="36" name="TextBox 35"/>
           <p:cNvSpPr txBox="1"/>
           <p:nvPr/>
         </p:nvSpPr>
         <p:spPr>
           <a:xfrm>
-            <a:off x="365760" y="4059936"/>
-            <a:ext cx="11430000" cy="292608"/>
+            <a:off x="365760" y="6720840"/>
+            <a:ext cx="11612880" cy="274320"/>
           </a:xfrm>
           <a:prstGeom prst="rect">
             <a:avLst/>
@@ -9515,153 +10724,13 @@
           <a:p>
             <a:pPr algn="l"/>
             <a:r>
-              <a:rPr sz="1200" b="1" i="0">
-                <a:solidFill>
-                  <a:srgbClr val="FFFFFF"/>
-                </a:solidFill>
-                <a:latin typeface="IPAGothic"/>
-              </a:rPr>
-              <a:t>収益構造のポイント</a:t>
-            </a:r>
-          </a:p>
-        </p:txBody>
-      </p:sp>
-      <p:sp>
-        <p:nvSpPr>
-          <p:cNvPr id="9" name="TextBox 8"/>
-          <p:cNvSpPr txBox="1"/>
-          <p:nvPr/>
-        </p:nvSpPr>
-        <p:spPr>
-          <a:xfrm>
-            <a:off x="365760" y="4407408"/>
-            <a:ext cx="11430000" cy="347472"/>
-          </a:xfrm>
-          <a:prstGeom prst="rect">
-            <a:avLst/>
-          </a:prstGeom>
-          <a:noFill/>
-        </p:spPr>
-        <p:txBody>
-          <a:bodyPr wrap="square">
-            <a:spAutoFit/>
-          </a:bodyPr>
-          <a:lstStyle/>
-          <a:p>
-            <a:pPr algn="l"/>
-            <a:r>
-              <a:rPr sz="1100" b="0" i="0">
+              <a:rPr sz="850" b="0" i="1">
                 <a:solidFill>
                   <a:srgbClr val="1A1A1A"/>
                 </a:solidFill>
                 <a:latin typeface="IPAGothic"/>
               </a:rPr>
-              <a:t>▸ Y1 グループ月次売上：約2,510万円（利益率約17%、月次利益約418万円）</a:t>
-            </a:r>
-          </a:p>
-        </p:txBody>
-      </p:sp>
-      <p:sp>
-        <p:nvSpPr>
-          <p:cNvPr id="10" name="TextBox 9"/>
-          <p:cNvSpPr txBox="1"/>
-          <p:nvPr/>
-        </p:nvSpPr>
-        <p:spPr>
-          <a:xfrm>
-            <a:off x="365760" y="4754880"/>
-            <a:ext cx="11430000" cy="347472"/>
-          </a:xfrm>
-          <a:prstGeom prst="rect">
-            <a:avLst/>
-          </a:prstGeom>
-          <a:noFill/>
-        </p:spPr>
-        <p:txBody>
-          <a:bodyPr wrap="square">
-            <a:spAutoFit/>
-          </a:bodyPr>
-          <a:lstStyle/>
-          <a:p>
-            <a:pPr algn="l"/>
-            <a:r>
-              <a:rPr sz="1100" b="0" i="0">
-                <a:solidFill>
-                  <a:srgbClr val="1A1A1A"/>
-                </a:solidFill>
-                <a:latin typeface="IPAGothic"/>
-              </a:rPr>
-              <a:t>▸ FCロイヤルティはFC40店規模で月1,296万円のストック収益（安定成長）</a:t>
-            </a:r>
-          </a:p>
-        </p:txBody>
-      </p:sp>
-      <p:sp>
-        <p:nvSpPr>
-          <p:cNvPr id="11" name="TextBox 10"/>
-          <p:cNvSpPr txBox="1"/>
-          <p:nvPr/>
-        </p:nvSpPr>
-        <p:spPr>
-          <a:xfrm>
-            <a:off x="365760" y="5102352"/>
-            <a:ext cx="11430000" cy="347472"/>
-          </a:xfrm>
-          <a:prstGeom prst="rect">
-            <a:avLst/>
-          </a:prstGeom>
-          <a:noFill/>
-        </p:spPr>
-        <p:txBody>
-          <a:bodyPr wrap="square">
-            <a:spAutoFit/>
-          </a:bodyPr>
-          <a:lstStyle/>
-          <a:p>
-            <a:pPr algn="l"/>
-            <a:r>
-              <a:rPr sz="1100" b="0" i="0">
-                <a:solidFill>
-                  <a:srgbClr val="1A1A1A"/>
-                </a:solidFill>
-                <a:latin typeface="IPAGothic"/>
-              </a:rPr>
-              <a:t>▸ 成長フェーズ（Y3〜）で利益率が改善：規模の経済＋仕入共通化</a:t>
-            </a:r>
-          </a:p>
-        </p:txBody>
-      </p:sp>
-      <p:sp>
-        <p:nvSpPr>
-          <p:cNvPr id="12" name="TextBox 11"/>
-          <p:cNvSpPr txBox="1"/>
-          <p:nvPr/>
-        </p:nvSpPr>
-        <p:spPr>
-          <a:xfrm>
-            <a:off x="365760" y="5449824"/>
-            <a:ext cx="11430000" cy="347472"/>
-          </a:xfrm>
-          <a:prstGeom prst="rect">
-            <a:avLst/>
-          </a:prstGeom>
-          <a:noFill/>
-        </p:spPr>
-        <p:txBody>
-          <a:bodyPr wrap="square">
-            <a:spAutoFit/>
-          </a:bodyPr>
-          <a:lstStyle/>
-          <a:p>
-            <a:pPr algn="l"/>
-            <a:r>
-              <a:rPr sz="1100" b="0" i="0">
-                <a:solidFill>
-                  <a:srgbClr val="1A1A1A"/>
-                </a:solidFill>
-                <a:latin typeface="IPAGothic"/>
-              </a:rPr>
-              <a:t>▸ 直営利益＋FCロイヤルティの二重収益でリスク分散</a:t>
+              <a:t>※ 店舗社員は各店2〜3名（店長1＋社員1〜2）、アルバイトは各店3名で計算　／　店長インセンティブ：月次売上の1%（例：だし然960万円/月 → 約9.6万円/月）</a:t>
             </a:r>
           </a:p>
         </p:txBody>
@@ -9765,7 +10834,7 @@
                 </a:solidFill>
                 <a:latin typeface="IPAGothic"/>
               </a:rPr>
-              <a:t>グループ 事業計画 P&amp;L  ─  5カ年損益計画</a:t>
+              <a:t>収益モデルサマリー  ─  グループ損益と成長ストック</a:t>
             </a:r>
           </a:p>
         </p:txBody>
@@ -9794,17 +10863,41 @@
           </a:prstGeom>
         </p:spPr>
       </p:pic>
+      <p:pic>
+        <p:nvPicPr>
+          <p:cNvPr id="5" name="Picture 4" descr="image.png"/>
+          <p:cNvPicPr>
+            <a:picLocks noChangeAspect="1"/>
+          </p:cNvPicPr>
+          <p:nvPr/>
+        </p:nvPicPr>
+        <p:blipFill>
+          <a:blip r:embed="rId3"/>
+          <a:stretch>
+            <a:fillRect/>
+          </a:stretch>
+        </p:blipFill>
+        <p:spPr>
+          <a:xfrm>
+            <a:off x="274320" y="1005840"/>
+            <a:ext cx="5669280" cy="2834640"/>
+          </a:xfrm>
+          <a:prstGeom prst="rect">
+            <a:avLst/>
+          </a:prstGeom>
+        </p:spPr>
+      </p:pic>
       <p:graphicFrame>
         <p:nvGraphicFramePr>
-          <p:cNvPr id="5" name="Table 4"/>
+          <p:cNvPr id="6" name="Table 5"/>
           <p:cNvGraphicFramePr>
             <a:graphicFrameLocks noGrp="1"/>
           </p:cNvGraphicFramePr>
           <p:nvPr/>
         </p:nvGraphicFramePr>
         <p:xfrm>
-          <a:off x="274320" y="1005840"/>
-          <a:ext cx="11612880" cy="4114800"/>
+          <a:off x="5943600" y="1005840"/>
+          <a:ext cx="5943600" cy="2834640"/>
         </p:xfrm>
         <a:graphic>
           <a:graphicData uri="http://schemas.openxmlformats.org/drawingml/2006/table">
@@ -9813,28 +10906,28 @@
                 <a:tableStyleId>{5C22544A-7EE6-4342-B048-85BDC9FD1C3A}</a:tableStyleId>
               </a:tblPr>
               <a:tblGrid>
-                <a:gridCol w="2286000"/>
-                <a:gridCol w="1865376"/>
-                <a:gridCol w="1865376"/>
-                <a:gridCol w="1865376"/>
-                <a:gridCol w="1865376"/>
-                <a:gridCol w="1865376"/>
+                <a:gridCol w="990600"/>
+                <a:gridCol w="990600"/>
+                <a:gridCol w="990600"/>
+                <a:gridCol w="990600"/>
+                <a:gridCol w="990600"/>
+                <a:gridCol w="990600"/>
               </a:tblGrid>
-              <a:tr h="411480">
-                <a:tc>
-                  <a:txBody>
-                    <a:bodyPr/>
-                    <a:lstStyle/>
-                    <a:p>
-                      <a:pPr algn="ctr"/>
-                      <a:r>
-                        <a:rPr sz="1100" b="1">
+              <a:tr h="472440">
+                <a:tc>
+                  <a:txBody>
+                    <a:bodyPr/>
+                    <a:lstStyle/>
+                    <a:p>
+                      <a:pPr algn="ctr"/>
+                      <a:r>
+                        <a:rPr sz="1000" b="1">
                           <a:solidFill>
                             <a:srgbClr val="FFFFFF"/>
                           </a:solidFill>
                           <a:latin typeface="IPAGothic"/>
                         </a:rPr>
-                        <a:t/>
+                        <a:t>ブランド</a:t>
                       </a:r>
                     </a:p>
                   </a:txBody>
@@ -9851,13 +10944,13 @@
                     <a:p>
                       <a:pPr algn="ctr"/>
                       <a:r>
-                        <a:rPr sz="1100" b="1">
+                        <a:rPr sz="1000" b="1">
                           <a:solidFill>
                             <a:srgbClr val="FFFFFF"/>
                           </a:solidFill>
                           <a:latin typeface="IPAGothic"/>
                         </a:rPr>
-                        <a:t>Y1 2026</a:t>
+                        <a:t>月次売上/店</a:t>
                       </a:r>
                     </a:p>
                   </a:txBody>
@@ -9874,13 +10967,13 @@
                     <a:p>
                       <a:pPr algn="ctr"/>
                       <a:r>
-                        <a:rPr sz="1100" b="1">
+                        <a:rPr sz="1000" b="1">
                           <a:solidFill>
                             <a:srgbClr val="FFFFFF"/>
                           </a:solidFill>
                           <a:latin typeface="IPAGothic"/>
                         </a:rPr>
-                        <a:t>Y2 2027</a:t>
+                        <a:t>利益率</a:t>
                       </a:r>
                     </a:p>
                   </a:txBody>
@@ -9897,13 +10990,13 @@
                     <a:p>
                       <a:pPr algn="ctr"/>
                       <a:r>
-                        <a:rPr sz="1100" b="1">
+                        <a:rPr sz="1000" b="1">
                           <a:solidFill>
                             <a:srgbClr val="FFFFFF"/>
                           </a:solidFill>
                           <a:latin typeface="IPAGothic"/>
                         </a:rPr>
-                        <a:t>Y3 2028</a:t>
+                        <a:t>1店月次利益</a:t>
                       </a:r>
                     </a:p>
                   </a:txBody>
@@ -9920,13 +11013,13 @@
                     <a:p>
                       <a:pPr algn="ctr"/>
                       <a:r>
-                        <a:rPr sz="1100" b="1">
+                        <a:rPr sz="1000" b="1">
                           <a:solidFill>
                             <a:srgbClr val="FFFFFF"/>
                           </a:solidFill>
                           <a:latin typeface="IPAGothic"/>
                         </a:rPr>
-                        <a:t>Y4 2029</a:t>
+                        <a:t>目標店舗</a:t>
                       </a:r>
                     </a:p>
                   </a:txBody>
@@ -9943,13 +11036,13 @@
                     <a:p>
                       <a:pPr algn="ctr"/>
                       <a:r>
-                        <a:rPr sz="1100" b="1">
+                        <a:rPr sz="1000" b="1">
                           <a:solidFill>
                             <a:srgbClr val="FFFFFF"/>
                           </a:solidFill>
                           <a:latin typeface="IPAGothic"/>
                         </a:rPr>
-                        <a:t>Y5 2030</a:t>
+                        <a:t>グループ月次利益</a:t>
                       </a:r>
                     </a:p>
                   </a:txBody>
@@ -9960,21 +11053,21 @@
                   </a:tcPr>
                 </a:tc>
               </a:tr>
-              <a:tr h="411480">
-                <a:tc>
-                  <a:txBody>
-                    <a:bodyPr/>
-                    <a:lstStyle/>
-                    <a:p>
-                      <a:pPr algn="l"/>
-                      <a:r>
-                        <a:rPr sz="1000" b="0">
+              <a:tr h="472440">
+                <a:tc>
+                  <a:txBody>
+                    <a:bodyPr/>
+                    <a:lstStyle/>
+                    <a:p>
+                      <a:pPr algn="ctr"/>
+                      <a:r>
+                        <a:rPr sz="1000">
                           <a:solidFill>
                             <a:srgbClr val="1A1A1A"/>
                           </a:solidFill>
                           <a:latin typeface="IPAGothic"/>
                         </a:rPr>
-                        <a:t>売上高（万円）</a:t>
+                        <a:t>だし 然</a:t>
                       </a:r>
                     </a:p>
                   </a:txBody>
@@ -9991,13 +11084,13 @@
                     <a:p>
                       <a:pPr algn="ctr"/>
                       <a:r>
-                        <a:rPr sz="1000" b="0">
+                        <a:rPr sz="1000">
                           <a:solidFill>
                             <a:srgbClr val="1A1A1A"/>
                           </a:solidFill>
                           <a:latin typeface="IPAGothic"/>
                         </a:rPr>
-                        <a:t>14,000</a:t>
+                        <a:t>960万円</a:t>
                       </a:r>
                     </a:p>
                   </a:txBody>
@@ -10014,13 +11107,13 @@
                     <a:p>
                       <a:pPr algn="ctr"/>
                       <a:r>
-                        <a:rPr sz="1000" b="0">
+                        <a:rPr sz="1000">
                           <a:solidFill>
                             <a:srgbClr val="1A1A1A"/>
                           </a:solidFill>
                           <a:latin typeface="IPAGothic"/>
                         </a:rPr>
-                        <a:t>36,000</a:t>
+                        <a:t>15%</a:t>
                       </a:r>
                     </a:p>
                   </a:txBody>
@@ -10037,13 +11130,13 @@
                     <a:p>
                       <a:pPr algn="ctr"/>
                       <a:r>
-                        <a:rPr sz="1000" b="0">
+                        <a:rPr sz="1000">
                           <a:solidFill>
                             <a:srgbClr val="1A1A1A"/>
                           </a:solidFill>
                           <a:latin typeface="IPAGothic"/>
                         </a:rPr>
-                        <a:t>72,000</a:t>
+                        <a:t>144万円</a:t>
                       </a:r>
                     </a:p>
                   </a:txBody>
@@ -10060,13 +11153,13 @@
                     <a:p>
                       <a:pPr algn="ctr"/>
                       <a:r>
-                        <a:rPr sz="1000" b="0">
+                        <a:rPr sz="1000">
                           <a:solidFill>
                             <a:srgbClr val="1A1A1A"/>
                           </a:solidFill>
                           <a:latin typeface="IPAGothic"/>
                         </a:rPr>
-                        <a:t>120,000</a:t>
+                        <a:t>20店</a:t>
                       </a:r>
                     </a:p>
                   </a:txBody>
@@ -10083,13 +11176,13 @@
                     <a:p>
                       <a:pPr algn="ctr"/>
                       <a:r>
-                        <a:rPr sz="1000" b="0">
+                        <a:rPr sz="1000">
                           <a:solidFill>
                             <a:srgbClr val="1A1A1A"/>
                           </a:solidFill>
                           <a:latin typeface="IPAGothic"/>
                         </a:rPr>
-                        <a:t>200,000</a:t>
+                        <a:t>2,880万円</a:t>
                       </a:r>
                     </a:p>
                   </a:txBody>
@@ -10100,21 +11193,21 @@
                   </a:tcPr>
                 </a:tc>
               </a:tr>
-              <a:tr h="411480">
-                <a:tc>
-                  <a:txBody>
-                    <a:bodyPr/>
-                    <a:lstStyle/>
-                    <a:p>
-                      <a:pPr algn="l"/>
-                      <a:r>
-                        <a:rPr sz="1000" b="0">
+              <a:tr h="472440">
+                <a:tc>
+                  <a:txBody>
+                    <a:bodyPr/>
+                    <a:lstStyle/>
+                    <a:p>
+                      <a:pPr algn="ctr"/>
+                      <a:r>
+                        <a:rPr sz="1000">
                           <a:solidFill>
                             <a:srgbClr val="1A1A1A"/>
                           </a:solidFill>
                           <a:latin typeface="IPAGothic"/>
                         </a:rPr>
-                        <a:t>　売上原価（31%）</a:t>
+                        <a:t>肉酒場 然</a:t>
                       </a:r>
                     </a:p>
                   </a:txBody>
@@ -10131,13 +11224,13 @@
                     <a:p>
                       <a:pPr algn="ctr"/>
                       <a:r>
-                        <a:rPr sz="1000" b="0">
+                        <a:rPr sz="1000">
                           <a:solidFill>
                             <a:srgbClr val="1A1A1A"/>
                           </a:solidFill>
                           <a:latin typeface="IPAGothic"/>
                         </a:rPr>
-                        <a:t>▲4,340</a:t>
+                        <a:t>1,200万円</a:t>
                       </a:r>
                     </a:p>
                   </a:txBody>
@@ -10154,13 +11247,13 @@
                     <a:p>
                       <a:pPr algn="ctr"/>
                       <a:r>
-                        <a:rPr sz="1000" b="0">
+                        <a:rPr sz="1000">
                           <a:solidFill>
                             <a:srgbClr val="1A1A1A"/>
                           </a:solidFill>
                           <a:latin typeface="IPAGothic"/>
                         </a:rPr>
-                        <a:t>▲11,160</a:t>
+                        <a:t>17%</a:t>
                       </a:r>
                     </a:p>
                   </a:txBody>
@@ -10177,13 +11270,13 @@
                     <a:p>
                       <a:pPr algn="ctr"/>
                       <a:r>
-                        <a:rPr sz="1000" b="0">
+                        <a:rPr sz="1000">
                           <a:solidFill>
                             <a:srgbClr val="1A1A1A"/>
                           </a:solidFill>
                           <a:latin typeface="IPAGothic"/>
                         </a:rPr>
-                        <a:t>▲22,320</a:t>
+                        <a:t>200万円</a:t>
                       </a:r>
                     </a:p>
                   </a:txBody>
@@ -10200,13 +11293,13 @@
                     <a:p>
                       <a:pPr algn="ctr"/>
                       <a:r>
-                        <a:rPr sz="1000" b="0">
+                        <a:rPr sz="1000">
                           <a:solidFill>
                             <a:srgbClr val="1A1A1A"/>
                           </a:solidFill>
                           <a:latin typeface="IPAGothic"/>
                         </a:rPr>
-                        <a:t>▲37,200</a:t>
+                        <a:t>5店</a:t>
                       </a:r>
                     </a:p>
                   </a:txBody>
@@ -10223,13 +11316,13 @@
                     <a:p>
                       <a:pPr algn="ctr"/>
                       <a:r>
-                        <a:rPr sz="1000" b="0">
+                        <a:rPr sz="1000">
                           <a:solidFill>
                             <a:srgbClr val="1A1A1A"/>
                           </a:solidFill>
                           <a:latin typeface="IPAGothic"/>
                         </a:rPr>
-                        <a:t>▲62,000</a:t>
+                        <a:t>1,000万円</a:t>
                       </a:r>
                     </a:p>
                   </a:txBody>
@@ -10240,161 +11333,161 @@
                   </a:tcPr>
                 </a:tc>
               </a:tr>
-              <a:tr h="411480">
-                <a:tc>
-                  <a:txBody>
-                    <a:bodyPr/>
-                    <a:lstStyle/>
-                    <a:p>
-                      <a:pPr algn="l"/>
-                      <a:r>
-                        <a:rPr sz="1000" b="1">
+              <a:tr h="472440">
+                <a:tc>
+                  <a:txBody>
+                    <a:bodyPr/>
+                    <a:lstStyle/>
+                    <a:p>
+                      <a:pPr algn="ctr"/>
+                      <a:r>
+                        <a:rPr sz="1000">
                           <a:solidFill>
                             <a:srgbClr val="1A1A1A"/>
                           </a:solidFill>
                           <a:latin typeface="IPAGothic"/>
                         </a:rPr>
-                        <a:t>売上総利益</a:t>
-                      </a:r>
-                    </a:p>
-                  </a:txBody>
-                  <a:tcPr>
-                    <a:solidFill>
-                      <a:srgbClr val="E8F4EE"/>
-                    </a:solidFill>
-                  </a:tcPr>
-                </a:tc>
-                <a:tc>
-                  <a:txBody>
-                    <a:bodyPr/>
-                    <a:lstStyle/>
-                    <a:p>
-                      <a:pPr algn="ctr"/>
-                      <a:r>
-                        <a:rPr sz="1000" b="1">
+                        <a:t>蕎麦 然（小型）</a:t>
+                      </a:r>
+                    </a:p>
+                  </a:txBody>
+                  <a:tcPr>
+                    <a:solidFill>
+                      <a:srgbClr val="F0EEE8"/>
+                    </a:solidFill>
+                  </a:tcPr>
+                </a:tc>
+                <a:tc>
+                  <a:txBody>
+                    <a:bodyPr/>
+                    <a:lstStyle/>
+                    <a:p>
+                      <a:pPr algn="ctr"/>
+                      <a:r>
+                        <a:rPr sz="1000">
                           <a:solidFill>
                             <a:srgbClr val="1A1A1A"/>
                           </a:solidFill>
                           <a:latin typeface="IPAGothic"/>
                         </a:rPr>
-                        <a:t>9,660</a:t>
-                      </a:r>
-                    </a:p>
-                  </a:txBody>
-                  <a:tcPr>
-                    <a:solidFill>
-                      <a:srgbClr val="E8F4EE"/>
-                    </a:solidFill>
-                  </a:tcPr>
-                </a:tc>
-                <a:tc>
-                  <a:txBody>
-                    <a:bodyPr/>
-                    <a:lstStyle/>
-                    <a:p>
-                      <a:pPr algn="ctr"/>
-                      <a:r>
-                        <a:rPr sz="1000" b="1">
+                        <a:t>350万円</a:t>
+                      </a:r>
+                    </a:p>
+                  </a:txBody>
+                  <a:tcPr>
+                    <a:solidFill>
+                      <a:srgbClr val="F0EEE8"/>
+                    </a:solidFill>
+                  </a:tcPr>
+                </a:tc>
+                <a:tc>
+                  <a:txBody>
+                    <a:bodyPr/>
+                    <a:lstStyle/>
+                    <a:p>
+                      <a:pPr algn="ctr"/>
+                      <a:r>
+                        <a:rPr sz="1000">
                           <a:solidFill>
                             <a:srgbClr val="1A1A1A"/>
                           </a:solidFill>
                           <a:latin typeface="IPAGothic"/>
                         </a:rPr>
-                        <a:t>24,840</a:t>
-                      </a:r>
-                    </a:p>
-                  </a:txBody>
-                  <a:tcPr>
-                    <a:solidFill>
-                      <a:srgbClr val="E8F4EE"/>
-                    </a:solidFill>
-                  </a:tcPr>
-                </a:tc>
-                <a:tc>
-                  <a:txBody>
-                    <a:bodyPr/>
-                    <a:lstStyle/>
-                    <a:p>
-                      <a:pPr algn="ctr"/>
-                      <a:r>
-                        <a:rPr sz="1000" b="1">
+                        <a:t>20%</a:t>
+                      </a:r>
+                    </a:p>
+                  </a:txBody>
+                  <a:tcPr>
+                    <a:solidFill>
+                      <a:srgbClr val="F0EEE8"/>
+                    </a:solidFill>
+                  </a:tcPr>
+                </a:tc>
+                <a:tc>
+                  <a:txBody>
+                    <a:bodyPr/>
+                    <a:lstStyle/>
+                    <a:p>
+                      <a:pPr algn="ctr"/>
+                      <a:r>
+                        <a:rPr sz="1000">
                           <a:solidFill>
                             <a:srgbClr val="1A1A1A"/>
                           </a:solidFill>
                           <a:latin typeface="IPAGothic"/>
                         </a:rPr>
-                        <a:t>49,680</a:t>
-                      </a:r>
-                    </a:p>
-                  </a:txBody>
-                  <a:tcPr>
-                    <a:solidFill>
-                      <a:srgbClr val="E8F4EE"/>
-                    </a:solidFill>
-                  </a:tcPr>
-                </a:tc>
-                <a:tc>
-                  <a:txBody>
-                    <a:bodyPr/>
-                    <a:lstStyle/>
-                    <a:p>
-                      <a:pPr algn="ctr"/>
-                      <a:r>
-                        <a:rPr sz="1000" b="1">
+                        <a:t>70万円</a:t>
+                      </a:r>
+                    </a:p>
+                  </a:txBody>
+                  <a:tcPr>
+                    <a:solidFill>
+                      <a:srgbClr val="F0EEE8"/>
+                    </a:solidFill>
+                  </a:tcPr>
+                </a:tc>
+                <a:tc>
+                  <a:txBody>
+                    <a:bodyPr/>
+                    <a:lstStyle/>
+                    <a:p>
+                      <a:pPr algn="ctr"/>
+                      <a:r>
+                        <a:rPr sz="1000">
                           <a:solidFill>
                             <a:srgbClr val="1A1A1A"/>
                           </a:solidFill>
                           <a:latin typeface="IPAGothic"/>
                         </a:rPr>
-                        <a:t>82,800</a:t>
-                      </a:r>
-                    </a:p>
-                  </a:txBody>
-                  <a:tcPr>
-                    <a:solidFill>
-                      <a:srgbClr val="E8F4EE"/>
-                    </a:solidFill>
-                  </a:tcPr>
-                </a:tc>
-                <a:tc>
-                  <a:txBody>
-                    <a:bodyPr/>
-                    <a:lstStyle/>
-                    <a:p>
-                      <a:pPr algn="ctr"/>
-                      <a:r>
-                        <a:rPr sz="1000" b="1">
+                        <a:t>30店</a:t>
+                      </a:r>
+                    </a:p>
+                  </a:txBody>
+                  <a:tcPr>
+                    <a:solidFill>
+                      <a:srgbClr val="F0EEE8"/>
+                    </a:solidFill>
+                  </a:tcPr>
+                </a:tc>
+                <a:tc>
+                  <a:txBody>
+                    <a:bodyPr/>
+                    <a:lstStyle/>
+                    <a:p>
+                      <a:pPr algn="ctr"/>
+                      <a:r>
+                        <a:rPr sz="1000">
                           <a:solidFill>
                             <a:srgbClr val="1A1A1A"/>
                           </a:solidFill>
                           <a:latin typeface="IPAGothic"/>
                         </a:rPr>
-                        <a:t>138,000</a:t>
-                      </a:r>
-                    </a:p>
-                  </a:txBody>
-                  <a:tcPr>
-                    <a:solidFill>
-                      <a:srgbClr val="E8F4EE"/>
+                        <a:t>2,100万円</a:t>
+                      </a:r>
+                    </a:p>
+                  </a:txBody>
+                  <a:tcPr>
+                    <a:solidFill>
+                      <a:srgbClr val="F0EEE8"/>
                     </a:solidFill>
                   </a:tcPr>
                 </a:tc>
               </a:tr>
-              <a:tr h="411480">
-                <a:tc>
-                  <a:txBody>
-                    <a:bodyPr/>
-                    <a:lstStyle/>
-                    <a:p>
-                      <a:pPr algn="l"/>
-                      <a:r>
-                        <a:rPr sz="1000" b="0">
+              <a:tr h="472440">
+                <a:tc>
+                  <a:txBody>
+                    <a:bodyPr/>
+                    <a:lstStyle/>
+                    <a:p>
+                      <a:pPr algn="ctr"/>
+                      <a:r>
+                        <a:rPr sz="1000">
                           <a:solidFill>
                             <a:srgbClr val="1A1A1A"/>
                           </a:solidFill>
                           <a:latin typeface="IPAGothic"/>
                         </a:rPr>
-                        <a:t>　粗利率</a:t>
+                        <a:t>SNS事業部</a:t>
                       </a:r>
                     </a:p>
                   </a:txBody>
@@ -10411,13 +11504,13 @@
                     <a:p>
                       <a:pPr algn="ctr"/>
                       <a:r>
-                        <a:rPr sz="1000" b="0">
+                        <a:rPr sz="1000">
                           <a:solidFill>
                             <a:srgbClr val="1A1A1A"/>
                           </a:solidFill>
                           <a:latin typeface="IPAGothic"/>
                         </a:rPr>
-                        <a:t>69%</a:t>
+                        <a:t>─</a:t>
                       </a:r>
                     </a:p>
                   </a:txBody>
@@ -10434,13 +11527,13 @@
                     <a:p>
                       <a:pPr algn="ctr"/>
                       <a:r>
-                        <a:rPr sz="1000" b="0">
+                        <a:rPr sz="1000">
                           <a:solidFill>
                             <a:srgbClr val="1A1A1A"/>
                           </a:solidFill>
                           <a:latin typeface="IPAGothic"/>
                         </a:rPr>
-                        <a:t>69%</a:t>
+                        <a:t>─</a:t>
                       </a:r>
                     </a:p>
                   </a:txBody>
@@ -10457,13 +11550,13 @@
                     <a:p>
                       <a:pPr algn="ctr"/>
                       <a:r>
-                        <a:rPr sz="1000" b="0">
+                        <a:rPr sz="1000">
                           <a:solidFill>
                             <a:srgbClr val="1A1A1A"/>
                           </a:solidFill>
                           <a:latin typeface="IPAGothic"/>
                         </a:rPr>
-                        <a:t>69%</a:t>
+                        <a:t>83万円</a:t>
                       </a:r>
                     </a:p>
                   </a:txBody>
@@ -10480,13 +11573,13 @@
                     <a:p>
                       <a:pPr algn="ctr"/>
                       <a:r>
-                        <a:rPr sz="1000" b="0">
+                        <a:rPr sz="1000">
                           <a:solidFill>
                             <a:srgbClr val="1A1A1A"/>
                           </a:solidFill>
                           <a:latin typeface="IPAGothic"/>
                         </a:rPr>
-                        <a:t>69%</a:t>
+                        <a:t>─</a:t>
                       </a:r>
                     </a:p>
                   </a:txBody>
@@ -10503,13 +11596,13 @@
                     <a:p>
                       <a:pPr algn="ctr"/>
                       <a:r>
-                        <a:rPr sz="1000" b="0">
+                        <a:rPr sz="1000">
                           <a:solidFill>
                             <a:srgbClr val="1A1A1A"/>
                           </a:solidFill>
                           <a:latin typeface="IPAGothic"/>
                         </a:rPr>
-                        <a:t>69%</a:t>
+                        <a:t>83万円</a:t>
                       </a:r>
                     </a:p>
                   </a:txBody>
@@ -10520,21 +11613,21 @@
                   </a:tcPr>
                 </a:tc>
               </a:tr>
-              <a:tr h="411480">
-                <a:tc>
-                  <a:txBody>
-                    <a:bodyPr/>
-                    <a:lstStyle/>
-                    <a:p>
-                      <a:pPr algn="l"/>
-                      <a:r>
-                        <a:rPr sz="1000" b="0">
+              <a:tr h="472440">
+                <a:tc>
+                  <a:txBody>
+                    <a:bodyPr/>
+                    <a:lstStyle/>
+                    <a:p>
+                      <a:pPr algn="ctr"/>
+                      <a:r>
+                        <a:rPr sz="1000">
                           <a:solidFill>
                             <a:srgbClr val="1A1A1A"/>
                           </a:solidFill>
                           <a:latin typeface="IPAGothic"/>
                         </a:rPr>
-                        <a:t>　人件費</a:t>
+                        <a:t>合計（安定期）</a:t>
                       </a:r>
                     </a:p>
                   </a:txBody>
@@ -10551,13 +11644,13 @@
                     <a:p>
                       <a:pPr algn="ctr"/>
                       <a:r>
-                        <a:rPr sz="1000" b="0">
+                        <a:rPr sz="1000">
                           <a:solidFill>
                             <a:srgbClr val="1A1A1A"/>
                           </a:solidFill>
                           <a:latin typeface="IPAGothic"/>
                         </a:rPr>
-                        <a:t>▲3,840</a:t>
+                        <a:t>─</a:t>
                       </a:r>
                     </a:p>
                   </a:txBody>
@@ -10574,13 +11667,13 @@
                     <a:p>
                       <a:pPr algn="ctr"/>
                       <a:r>
-                        <a:rPr sz="1000" b="0">
+                        <a:rPr sz="1000">
                           <a:solidFill>
                             <a:srgbClr val="1A1A1A"/>
                           </a:solidFill>
                           <a:latin typeface="IPAGothic"/>
                         </a:rPr>
-                        <a:t>▲9,200</a:t>
+                        <a:t>─</a:t>
                       </a:r>
                     </a:p>
                   </a:txBody>
@@ -10597,13 +11690,13 @@
                     <a:p>
                       <a:pPr algn="ctr"/>
                       <a:r>
-                        <a:rPr sz="1000" b="0">
+                        <a:rPr sz="1000">
                           <a:solidFill>
                             <a:srgbClr val="1A1A1A"/>
                           </a:solidFill>
                           <a:latin typeface="IPAGothic"/>
                         </a:rPr>
-                        <a:t>▲16,480</a:t>
+                        <a:t>─</a:t>
                       </a:r>
                     </a:p>
                   </a:txBody>
@@ -10620,13 +11713,13 @@
                     <a:p>
                       <a:pPr algn="ctr"/>
                       <a:r>
-                        <a:rPr sz="1000" b="0">
+                        <a:rPr sz="1000">
                           <a:solidFill>
                             <a:srgbClr val="1A1A1A"/>
                           </a:solidFill>
                           <a:latin typeface="IPAGothic"/>
                         </a:rPr>
-                        <a:t>▲29,000</a:t>
+                        <a:t>55店</a:t>
                       </a:r>
                     </a:p>
                   </a:txBody>
@@ -10643,573 +11736,13 @@
                     <a:p>
                       <a:pPr algn="ctr"/>
                       <a:r>
-                        <a:rPr sz="1000" b="0">
+                        <a:rPr sz="1000">
                           <a:solidFill>
                             <a:srgbClr val="1A1A1A"/>
                           </a:solidFill>
                           <a:latin typeface="IPAGothic"/>
                         </a:rPr>
-                        <a:t>▲46,000</a:t>
-                      </a:r>
-                    </a:p>
-                  </a:txBody>
-                  <a:tcPr>
-                    <a:solidFill>
-                      <a:srgbClr val="F0EEE8"/>
-                    </a:solidFill>
-                  </a:tcPr>
-                </a:tc>
-              </a:tr>
-              <a:tr h="411480">
-                <a:tc>
-                  <a:txBody>
-                    <a:bodyPr/>
-                    <a:lstStyle/>
-                    <a:p>
-                      <a:pPr algn="l"/>
-                      <a:r>
-                        <a:rPr sz="1000" b="0">
-                          <a:solidFill>
-                            <a:srgbClr val="1A1A1A"/>
-                          </a:solidFill>
-                          <a:latin typeface="IPAGothic"/>
-                        </a:rPr>
-                        <a:t>　家賃合計</a:t>
-                      </a:r>
-                    </a:p>
-                  </a:txBody>
-                  <a:tcPr>
-                    <a:solidFill>
-                      <a:srgbClr val="FFFFFF"/>
-                    </a:solidFill>
-                  </a:tcPr>
-                </a:tc>
-                <a:tc>
-                  <a:txBody>
-                    <a:bodyPr/>
-                    <a:lstStyle/>
-                    <a:p>
-                      <a:pPr algn="ctr"/>
-                      <a:r>
-                        <a:rPr sz="1000" b="0">
-                          <a:solidFill>
-                            <a:srgbClr val="1A1A1A"/>
-                          </a:solidFill>
-                          <a:latin typeface="IPAGothic"/>
-                        </a:rPr>
-                        <a:t>▲1,500</a:t>
-                      </a:r>
-                    </a:p>
-                  </a:txBody>
-                  <a:tcPr>
-                    <a:solidFill>
-                      <a:srgbClr val="FFFFFF"/>
-                    </a:solidFill>
-                  </a:tcPr>
-                </a:tc>
-                <a:tc>
-                  <a:txBody>
-                    <a:bodyPr/>
-                    <a:lstStyle/>
-                    <a:p>
-                      <a:pPr algn="ctr"/>
-                      <a:r>
-                        <a:rPr sz="1000" b="0">
-                          <a:solidFill>
-                            <a:srgbClr val="1A1A1A"/>
-                          </a:solidFill>
-                          <a:latin typeface="IPAGothic"/>
-                        </a:rPr>
-                        <a:t>▲3,600</a:t>
-                      </a:r>
-                    </a:p>
-                  </a:txBody>
-                  <a:tcPr>
-                    <a:solidFill>
-                      <a:srgbClr val="FFFFFF"/>
-                    </a:solidFill>
-                  </a:tcPr>
-                </a:tc>
-                <a:tc>
-                  <a:txBody>
-                    <a:bodyPr/>
-                    <a:lstStyle/>
-                    <a:p>
-                      <a:pPr algn="ctr"/>
-                      <a:r>
-                        <a:rPr sz="1000" b="0">
-                          <a:solidFill>
-                            <a:srgbClr val="1A1A1A"/>
-                          </a:solidFill>
-                          <a:latin typeface="IPAGothic"/>
-                        </a:rPr>
-                        <a:t>▲7,200</a:t>
-                      </a:r>
-                    </a:p>
-                  </a:txBody>
-                  <a:tcPr>
-                    <a:solidFill>
-                      <a:srgbClr val="FFFFFF"/>
-                    </a:solidFill>
-                  </a:tcPr>
-                </a:tc>
-                <a:tc>
-                  <a:txBody>
-                    <a:bodyPr/>
-                    <a:lstStyle/>
-                    <a:p>
-                      <a:pPr algn="ctr"/>
-                      <a:r>
-                        <a:rPr sz="1000" b="0">
-                          <a:solidFill>
-                            <a:srgbClr val="1A1A1A"/>
-                          </a:solidFill>
-                          <a:latin typeface="IPAGothic"/>
-                        </a:rPr>
-                        <a:t>▲11,000</a:t>
-                      </a:r>
-                    </a:p>
-                  </a:txBody>
-                  <a:tcPr>
-                    <a:solidFill>
-                      <a:srgbClr val="FFFFFF"/>
-                    </a:solidFill>
-                  </a:tcPr>
-                </a:tc>
-                <a:tc>
-                  <a:txBody>
-                    <a:bodyPr/>
-                    <a:lstStyle/>
-                    <a:p>
-                      <a:pPr algn="ctr"/>
-                      <a:r>
-                        <a:rPr sz="1000" b="0">
-                          <a:solidFill>
-                            <a:srgbClr val="1A1A1A"/>
-                          </a:solidFill>
-                          <a:latin typeface="IPAGothic"/>
-                        </a:rPr>
-                        <a:t>▲17,000</a:t>
-                      </a:r>
-                    </a:p>
-                  </a:txBody>
-                  <a:tcPr>
-                    <a:solidFill>
-                      <a:srgbClr val="FFFFFF"/>
-                    </a:solidFill>
-                  </a:tcPr>
-                </a:tc>
-              </a:tr>
-              <a:tr h="411480">
-                <a:tc>
-                  <a:txBody>
-                    <a:bodyPr/>
-                    <a:lstStyle/>
-                    <a:p>
-                      <a:pPr algn="l"/>
-                      <a:r>
-                        <a:rPr sz="1000" b="0">
-                          <a:solidFill>
-                            <a:srgbClr val="1A1A1A"/>
-                          </a:solidFill>
-                          <a:latin typeface="IPAGothic"/>
-                        </a:rPr>
-                        <a:t>　その他（光熱費等）</a:t>
-                      </a:r>
-                    </a:p>
-                  </a:txBody>
-                  <a:tcPr>
-                    <a:solidFill>
-                      <a:srgbClr val="F0EEE8"/>
-                    </a:solidFill>
-                  </a:tcPr>
-                </a:tc>
-                <a:tc>
-                  <a:txBody>
-                    <a:bodyPr/>
-                    <a:lstStyle/>
-                    <a:p>
-                      <a:pPr algn="ctr"/>
-                      <a:r>
-                        <a:rPr sz="1000" b="0">
-                          <a:solidFill>
-                            <a:srgbClr val="1A1A1A"/>
-                          </a:solidFill>
-                          <a:latin typeface="IPAGothic"/>
-                        </a:rPr>
-                        <a:t>▲2,500</a:t>
-                      </a:r>
-                    </a:p>
-                  </a:txBody>
-                  <a:tcPr>
-                    <a:solidFill>
-                      <a:srgbClr val="F0EEE8"/>
-                    </a:solidFill>
-                  </a:tcPr>
-                </a:tc>
-                <a:tc>
-                  <a:txBody>
-                    <a:bodyPr/>
-                    <a:lstStyle/>
-                    <a:p>
-                      <a:pPr algn="ctr"/>
-                      <a:r>
-                        <a:rPr sz="1000" b="0">
-                          <a:solidFill>
-                            <a:srgbClr val="1A1A1A"/>
-                          </a:solidFill>
-                          <a:latin typeface="IPAGothic"/>
-                        </a:rPr>
-                        <a:t>▲5,560</a:t>
-                      </a:r>
-                    </a:p>
-                  </a:txBody>
-                  <a:tcPr>
-                    <a:solidFill>
-                      <a:srgbClr val="F0EEE8"/>
-                    </a:solidFill>
-                  </a:tcPr>
-                </a:tc>
-                <a:tc>
-                  <a:txBody>
-                    <a:bodyPr/>
-                    <a:lstStyle/>
-                    <a:p>
-                      <a:pPr algn="ctr"/>
-                      <a:r>
-                        <a:rPr sz="1000" b="0">
-                          <a:solidFill>
-                            <a:srgbClr val="1A1A1A"/>
-                          </a:solidFill>
-                          <a:latin typeface="IPAGothic"/>
-                        </a:rPr>
-                        <a:t>▲11,600</a:t>
-                      </a:r>
-                    </a:p>
-                  </a:txBody>
-                  <a:tcPr>
-                    <a:solidFill>
-                      <a:srgbClr val="F0EEE8"/>
-                    </a:solidFill>
-                  </a:tcPr>
-                </a:tc>
-                <a:tc>
-                  <a:txBody>
-                    <a:bodyPr/>
-                    <a:lstStyle/>
-                    <a:p>
-                      <a:pPr algn="ctr"/>
-                      <a:r>
-                        <a:rPr sz="1000" b="0">
-                          <a:solidFill>
-                            <a:srgbClr val="1A1A1A"/>
-                          </a:solidFill>
-                          <a:latin typeface="IPAGothic"/>
-                        </a:rPr>
-                        <a:t>▲18,800</a:t>
-                      </a:r>
-                    </a:p>
-                  </a:txBody>
-                  <a:tcPr>
-                    <a:solidFill>
-                      <a:srgbClr val="F0EEE8"/>
-                    </a:solidFill>
-                  </a:tcPr>
-                </a:tc>
-                <a:tc>
-                  <a:txBody>
-                    <a:bodyPr/>
-                    <a:lstStyle/>
-                    <a:p>
-                      <a:pPr algn="ctr"/>
-                      <a:r>
-                        <a:rPr sz="1000" b="0">
-                          <a:solidFill>
-                            <a:srgbClr val="1A1A1A"/>
-                          </a:solidFill>
-                          <a:latin typeface="IPAGothic"/>
-                        </a:rPr>
-                        <a:t>▲35,000</a:t>
-                      </a:r>
-                    </a:p>
-                  </a:txBody>
-                  <a:tcPr>
-                    <a:solidFill>
-                      <a:srgbClr val="F0EEE8"/>
-                    </a:solidFill>
-                  </a:tcPr>
-                </a:tc>
-              </a:tr>
-              <a:tr h="411480">
-                <a:tc>
-                  <a:txBody>
-                    <a:bodyPr/>
-                    <a:lstStyle/>
-                    <a:p>
-                      <a:pPr algn="l"/>
-                      <a:r>
-                        <a:rPr sz="1000" b="1">
-                          <a:solidFill>
-                            <a:srgbClr val="FFFFFF"/>
-                          </a:solidFill>
-                          <a:latin typeface="IPAGothic"/>
-                        </a:rPr>
-                        <a:t>EBITDA</a:t>
-                      </a:r>
-                    </a:p>
-                  </a:txBody>
-                  <a:tcPr>
-                    <a:solidFill>
-                      <a:srgbClr val="2C4A3E"/>
-                    </a:solidFill>
-                  </a:tcPr>
-                </a:tc>
-                <a:tc>
-                  <a:txBody>
-                    <a:bodyPr/>
-                    <a:lstStyle/>
-                    <a:p>
-                      <a:pPr algn="ctr"/>
-                      <a:r>
-                        <a:rPr sz="1000" b="1">
-                          <a:solidFill>
-                            <a:srgbClr val="FFFFFF"/>
-                          </a:solidFill>
-                          <a:latin typeface="IPAGothic"/>
-                        </a:rPr>
-                        <a:t>1,820</a:t>
-                      </a:r>
-                    </a:p>
-                  </a:txBody>
-                  <a:tcPr>
-                    <a:solidFill>
-                      <a:srgbClr val="2C4A3E"/>
-                    </a:solidFill>
-                  </a:tcPr>
-                </a:tc>
-                <a:tc>
-                  <a:txBody>
-                    <a:bodyPr/>
-                    <a:lstStyle/>
-                    <a:p>
-                      <a:pPr algn="ctr"/>
-                      <a:r>
-                        <a:rPr sz="1000" b="1">
-                          <a:solidFill>
-                            <a:srgbClr val="FFFFFF"/>
-                          </a:solidFill>
-                          <a:latin typeface="IPAGothic"/>
-                        </a:rPr>
-                        <a:t>6,480</a:t>
-                      </a:r>
-                    </a:p>
-                  </a:txBody>
-                  <a:tcPr>
-                    <a:solidFill>
-                      <a:srgbClr val="2C4A3E"/>
-                    </a:solidFill>
-                  </a:tcPr>
-                </a:tc>
-                <a:tc>
-                  <a:txBody>
-                    <a:bodyPr/>
-                    <a:lstStyle/>
-                    <a:p>
-                      <a:pPr algn="ctr"/>
-                      <a:r>
-                        <a:rPr sz="1000" b="1">
-                          <a:solidFill>
-                            <a:srgbClr val="FFFFFF"/>
-                          </a:solidFill>
-                          <a:latin typeface="IPAGothic"/>
-                        </a:rPr>
-                        <a:t>14,400</a:t>
-                      </a:r>
-                    </a:p>
-                  </a:txBody>
-                  <a:tcPr>
-                    <a:solidFill>
-                      <a:srgbClr val="2C4A3E"/>
-                    </a:solidFill>
-                  </a:tcPr>
-                </a:tc>
-                <a:tc>
-                  <a:txBody>
-                    <a:bodyPr/>
-                    <a:lstStyle/>
-                    <a:p>
-                      <a:pPr algn="ctr"/>
-                      <a:r>
-                        <a:rPr sz="1000" b="1">
-                          <a:solidFill>
-                            <a:srgbClr val="FFFFFF"/>
-                          </a:solidFill>
-                          <a:latin typeface="IPAGothic"/>
-                        </a:rPr>
-                        <a:t>24,000</a:t>
-                      </a:r>
-                    </a:p>
-                  </a:txBody>
-                  <a:tcPr>
-                    <a:solidFill>
-                      <a:srgbClr val="2C4A3E"/>
-                    </a:solidFill>
-                  </a:tcPr>
-                </a:tc>
-                <a:tc>
-                  <a:txBody>
-                    <a:bodyPr/>
-                    <a:lstStyle/>
-                    <a:p>
-                      <a:pPr algn="ctr"/>
-                      <a:r>
-                        <a:rPr sz="1000" b="1">
-                          <a:solidFill>
-                            <a:srgbClr val="FFFFFF"/>
-                          </a:solidFill>
-                          <a:latin typeface="IPAGothic"/>
-                        </a:rPr>
-                        <a:t>40,000</a:t>
-                      </a:r>
-                    </a:p>
-                  </a:txBody>
-                  <a:tcPr>
-                    <a:solidFill>
-                      <a:srgbClr val="2C4A3E"/>
-                    </a:solidFill>
-                  </a:tcPr>
-                </a:tc>
-              </a:tr>
-              <a:tr h="411480">
-                <a:tc>
-                  <a:txBody>
-                    <a:bodyPr/>
-                    <a:lstStyle/>
-                    <a:p>
-                      <a:pPr algn="l"/>
-                      <a:r>
-                        <a:rPr sz="1000" b="0">
-                          <a:solidFill>
-                            <a:srgbClr val="1A1A1A"/>
-                          </a:solidFill>
-                          <a:latin typeface="IPAGothic"/>
-                        </a:rPr>
-                        <a:t>EBITDA率</a:t>
-                      </a:r>
-                    </a:p>
-                  </a:txBody>
-                  <a:tcPr>
-                    <a:solidFill>
-                      <a:srgbClr val="F0EEE8"/>
-                    </a:solidFill>
-                  </a:tcPr>
-                </a:tc>
-                <a:tc>
-                  <a:txBody>
-                    <a:bodyPr/>
-                    <a:lstStyle/>
-                    <a:p>
-                      <a:pPr algn="ctr"/>
-                      <a:r>
-                        <a:rPr sz="1000" b="0">
-                          <a:solidFill>
-                            <a:srgbClr val="1A1A1A"/>
-                          </a:solidFill>
-                          <a:latin typeface="IPAGothic"/>
-                        </a:rPr>
-                        <a:t>13%</a:t>
-                      </a:r>
-                    </a:p>
-                  </a:txBody>
-                  <a:tcPr>
-                    <a:solidFill>
-                      <a:srgbClr val="F0EEE8"/>
-                    </a:solidFill>
-                  </a:tcPr>
-                </a:tc>
-                <a:tc>
-                  <a:txBody>
-                    <a:bodyPr/>
-                    <a:lstStyle/>
-                    <a:p>
-                      <a:pPr algn="ctr"/>
-                      <a:r>
-                        <a:rPr sz="1000" b="0">
-                          <a:solidFill>
-                            <a:srgbClr val="1A1A1A"/>
-                          </a:solidFill>
-                          <a:latin typeface="IPAGothic"/>
-                        </a:rPr>
-                        <a:t>18%</a:t>
-                      </a:r>
-                    </a:p>
-                  </a:txBody>
-                  <a:tcPr>
-                    <a:solidFill>
-                      <a:srgbClr val="F0EEE8"/>
-                    </a:solidFill>
-                  </a:tcPr>
-                </a:tc>
-                <a:tc>
-                  <a:txBody>
-                    <a:bodyPr/>
-                    <a:lstStyle/>
-                    <a:p>
-                      <a:pPr algn="ctr"/>
-                      <a:r>
-                        <a:rPr sz="1000" b="0">
-                          <a:solidFill>
-                            <a:srgbClr val="1A1A1A"/>
-                          </a:solidFill>
-                          <a:latin typeface="IPAGothic"/>
-                        </a:rPr>
-                        <a:t>20%</a:t>
-                      </a:r>
-                    </a:p>
-                  </a:txBody>
-                  <a:tcPr>
-                    <a:solidFill>
-                      <a:srgbClr val="F0EEE8"/>
-                    </a:solidFill>
-                  </a:tcPr>
-                </a:tc>
-                <a:tc>
-                  <a:txBody>
-                    <a:bodyPr/>
-                    <a:lstStyle/>
-                    <a:p>
-                      <a:pPr algn="ctr"/>
-                      <a:r>
-                        <a:rPr sz="1000" b="0">
-                          <a:solidFill>
-                            <a:srgbClr val="1A1A1A"/>
-                          </a:solidFill>
-                          <a:latin typeface="IPAGothic"/>
-                        </a:rPr>
-                        <a:t>20%</a:t>
-                      </a:r>
-                    </a:p>
-                  </a:txBody>
-                  <a:tcPr>
-                    <a:solidFill>
-                      <a:srgbClr val="F0EEE8"/>
-                    </a:solidFill>
-                  </a:tcPr>
-                </a:tc>
-                <a:tc>
-                  <a:txBody>
-                    <a:bodyPr/>
-                    <a:lstStyle/>
-                    <a:p>
-                      <a:pPr algn="ctr"/>
-                      <a:r>
-                        <a:rPr sz="1000" b="0">
-                          <a:solidFill>
-                            <a:srgbClr val="1A1A1A"/>
-                          </a:solidFill>
-                          <a:latin typeface="IPAGothic"/>
-                        </a:rPr>
-                        <a:t>20%</a:t>
+                        <a:t>6,063万円〜</a:t>
                       </a:r>
                     </a:p>
                   </a:txBody>
@@ -11224,30 +11757,224 @@
           </a:graphicData>
         </a:graphic>
       </p:graphicFrame>
-      <p:pic>
-        <p:nvPicPr>
-          <p:cNvPr id="6" name="Picture 5" descr="image.png"/>
-          <p:cNvPicPr>
-            <a:picLocks noChangeAspect="1"/>
-          </p:cNvPicPr>
-          <p:nvPr/>
-        </p:nvPicPr>
-        <p:blipFill>
-          <a:blip r:embed="rId3"/>
-          <a:stretch>
-            <a:fillRect/>
-          </a:stretch>
-        </p:blipFill>
-        <p:spPr>
-          <a:xfrm>
-            <a:off x="274320" y="5303520"/>
-            <a:ext cx="11612880" cy="1280160"/>
-          </a:xfrm>
-          <a:prstGeom prst="rect">
-            <a:avLst/>
-          </a:prstGeom>
-        </p:spPr>
-      </p:pic>
+      <p:sp>
+        <p:nvSpPr>
+          <p:cNvPr id="7" name="Rectangle 6"/>
+          <p:cNvSpPr/>
+          <p:nvPr/>
+        </p:nvSpPr>
+        <p:spPr>
+          <a:xfrm>
+            <a:off x="274320" y="4023360"/>
+            <a:ext cx="11612880" cy="347472"/>
+          </a:xfrm>
+          <a:prstGeom prst="rect">
+            <a:avLst/>
+          </a:prstGeom>
+          <a:solidFill>
+            <a:srgbClr val="2C4A3E"/>
+          </a:solidFill>
+          <a:ln>
+            <a:noFill/>
+          </a:ln>
+        </p:spPr>
+        <p:style>
+          <a:lnRef idx="1">
+            <a:schemeClr val="accent1"/>
+          </a:lnRef>
+          <a:fillRef idx="3">
+            <a:schemeClr val="accent1"/>
+          </a:fillRef>
+          <a:effectRef idx="2">
+            <a:schemeClr val="accent1"/>
+          </a:effectRef>
+          <a:fontRef idx="minor">
+            <a:schemeClr val="lt1"/>
+          </a:fontRef>
+        </p:style>
+        <p:txBody>
+          <a:bodyPr rtlCol="0" anchor="ctr"/>
+          <a:lstStyle/>
+          <a:p>
+            <a:pPr algn="ctr"/>
+          </a:p>
+        </p:txBody>
+      </p:sp>
+      <p:sp>
+        <p:nvSpPr>
+          <p:cNvPr id="8" name="TextBox 7"/>
+          <p:cNvSpPr txBox="1"/>
+          <p:nvPr/>
+        </p:nvSpPr>
+        <p:spPr>
+          <a:xfrm>
+            <a:off x="365760" y="4059936"/>
+            <a:ext cx="11430000" cy="292608"/>
+          </a:xfrm>
+          <a:prstGeom prst="rect">
+            <a:avLst/>
+          </a:prstGeom>
+          <a:noFill/>
+        </p:spPr>
+        <p:txBody>
+          <a:bodyPr wrap="square">
+            <a:spAutoFit/>
+          </a:bodyPr>
+          <a:lstStyle/>
+          <a:p>
+            <a:pPr algn="l"/>
+            <a:r>
+              <a:rPr sz="1200" b="1" i="0">
+                <a:solidFill>
+                  <a:srgbClr val="FFFFFF"/>
+                </a:solidFill>
+                <a:latin typeface="IPAGothic"/>
+              </a:rPr>
+              <a:t>収益構造のポイント</a:t>
+            </a:r>
+          </a:p>
+        </p:txBody>
+      </p:sp>
+      <p:sp>
+        <p:nvSpPr>
+          <p:cNvPr id="9" name="TextBox 8"/>
+          <p:cNvSpPr txBox="1"/>
+          <p:nvPr/>
+        </p:nvSpPr>
+        <p:spPr>
+          <a:xfrm>
+            <a:off x="365760" y="4407408"/>
+            <a:ext cx="11430000" cy="347472"/>
+          </a:xfrm>
+          <a:prstGeom prst="rect">
+            <a:avLst/>
+          </a:prstGeom>
+          <a:noFill/>
+        </p:spPr>
+        <p:txBody>
+          <a:bodyPr wrap="square">
+            <a:spAutoFit/>
+          </a:bodyPr>
+          <a:lstStyle/>
+          <a:p>
+            <a:pPr algn="l"/>
+            <a:r>
+              <a:rPr sz="1100" b="0" i="0">
+                <a:solidFill>
+                  <a:srgbClr val="1A1A1A"/>
+                </a:solidFill>
+                <a:latin typeface="IPAGothic"/>
+              </a:rPr>
+              <a:t>▸ Y1 グループ月次売上：約2,510万円（利益率約17%、月次利益約418万円）</a:t>
+            </a:r>
+          </a:p>
+        </p:txBody>
+      </p:sp>
+      <p:sp>
+        <p:nvSpPr>
+          <p:cNvPr id="10" name="TextBox 9"/>
+          <p:cNvSpPr txBox="1"/>
+          <p:nvPr/>
+        </p:nvSpPr>
+        <p:spPr>
+          <a:xfrm>
+            <a:off x="365760" y="4754880"/>
+            <a:ext cx="11430000" cy="347472"/>
+          </a:xfrm>
+          <a:prstGeom prst="rect">
+            <a:avLst/>
+          </a:prstGeom>
+          <a:noFill/>
+        </p:spPr>
+        <p:txBody>
+          <a:bodyPr wrap="square">
+            <a:spAutoFit/>
+          </a:bodyPr>
+          <a:lstStyle/>
+          <a:p>
+            <a:pPr algn="l"/>
+            <a:r>
+              <a:rPr sz="1100" b="0" i="0">
+                <a:solidFill>
+                  <a:srgbClr val="1A1A1A"/>
+                </a:solidFill>
+                <a:latin typeface="IPAGothic"/>
+              </a:rPr>
+              <a:t>▸ FCロイヤルティはFC40店規模で月1,296万円のストック収益（安定成長）</a:t>
+            </a:r>
+          </a:p>
+        </p:txBody>
+      </p:sp>
+      <p:sp>
+        <p:nvSpPr>
+          <p:cNvPr id="11" name="TextBox 10"/>
+          <p:cNvSpPr txBox="1"/>
+          <p:nvPr/>
+        </p:nvSpPr>
+        <p:spPr>
+          <a:xfrm>
+            <a:off x="365760" y="5102352"/>
+            <a:ext cx="11430000" cy="347472"/>
+          </a:xfrm>
+          <a:prstGeom prst="rect">
+            <a:avLst/>
+          </a:prstGeom>
+          <a:noFill/>
+        </p:spPr>
+        <p:txBody>
+          <a:bodyPr wrap="square">
+            <a:spAutoFit/>
+          </a:bodyPr>
+          <a:lstStyle/>
+          <a:p>
+            <a:pPr algn="l"/>
+            <a:r>
+              <a:rPr sz="1100" b="0" i="0">
+                <a:solidFill>
+                  <a:srgbClr val="1A1A1A"/>
+                </a:solidFill>
+                <a:latin typeface="IPAGothic"/>
+              </a:rPr>
+              <a:t>▸ 成長フェーズ（Y3〜）で利益率が改善：規模の経済＋仕入共通化</a:t>
+            </a:r>
+          </a:p>
+        </p:txBody>
+      </p:sp>
+      <p:sp>
+        <p:nvSpPr>
+          <p:cNvPr id="12" name="TextBox 11"/>
+          <p:cNvSpPr txBox="1"/>
+          <p:nvPr/>
+        </p:nvSpPr>
+        <p:spPr>
+          <a:xfrm>
+            <a:off x="365760" y="5449824"/>
+            <a:ext cx="11430000" cy="347472"/>
+          </a:xfrm>
+          <a:prstGeom prst="rect">
+            <a:avLst/>
+          </a:prstGeom>
+          <a:noFill/>
+        </p:spPr>
+        <p:txBody>
+          <a:bodyPr wrap="square">
+            <a:spAutoFit/>
+          </a:bodyPr>
+          <a:lstStyle/>
+          <a:p>
+            <a:pPr algn="l"/>
+            <a:r>
+              <a:rPr sz="1100" b="0" i="0">
+                <a:solidFill>
+                  <a:srgbClr val="1A1A1A"/>
+                </a:solidFill>
+                <a:latin typeface="IPAGothic"/>
+              </a:rPr>
+              <a:t>▸ 直営利益＋FCロイヤルティの二重収益でリスク分散</a:t>
+            </a:r>
+          </a:p>
+        </p:txBody>
+      </p:sp>
     </p:spTree>
   </p:cSld>
   <p:clrMapOvr>
@@ -11347,7 +12074,7 @@
                 </a:solidFill>
                 <a:latin typeface="IPAGothic"/>
               </a:rPr>
-              <a:t>キャッシュフロー計画</a:t>
+              <a:t>グループ 事業計画 P&amp;L  ─  5カ年損益計画</a:t>
             </a:r>
           </a:p>
         </p:txBody>
@@ -11376,41 +12103,17 @@
           </a:prstGeom>
         </p:spPr>
       </p:pic>
-      <p:pic>
-        <p:nvPicPr>
-          <p:cNvPr id="5" name="Picture 4" descr="image.png"/>
-          <p:cNvPicPr>
-            <a:picLocks noChangeAspect="1"/>
-          </p:cNvPicPr>
-          <p:nvPr/>
-        </p:nvPicPr>
-        <p:blipFill>
-          <a:blip r:embed="rId3"/>
-          <a:stretch>
-            <a:fillRect/>
-          </a:stretch>
-        </p:blipFill>
-        <p:spPr>
-          <a:xfrm>
-            <a:off x="274320" y="1005840"/>
-            <a:ext cx="6858000" cy="3200400"/>
-          </a:xfrm>
-          <a:prstGeom prst="rect">
-            <a:avLst/>
-          </a:prstGeom>
-        </p:spPr>
-      </p:pic>
       <p:graphicFrame>
         <p:nvGraphicFramePr>
-          <p:cNvPr id="6" name="Table 5"/>
+          <p:cNvPr id="5" name="Table 4"/>
           <p:cNvGraphicFramePr>
             <a:graphicFrameLocks noGrp="1"/>
           </p:cNvGraphicFramePr>
           <p:nvPr/>
         </p:nvGraphicFramePr>
         <p:xfrm>
-          <a:off x="7132320" y="1005840"/>
-          <a:ext cx="4754876" cy="2286000"/>
+          <a:off x="274320" y="1005840"/>
+          <a:ext cx="11612880" cy="4114800"/>
         </p:xfrm>
         <a:graphic>
           <a:graphicData uri="http://schemas.openxmlformats.org/drawingml/2006/table">
@@ -11419,29 +12122,1148 @@
                 <a:tableStyleId>{5C22544A-7EE6-4342-B048-85BDC9FD1C3A}</a:tableStyleId>
               </a:tblPr>
               <a:tblGrid>
-                <a:gridCol w="679268"/>
-                <a:gridCol w="679268"/>
-                <a:gridCol w="679268"/>
-                <a:gridCol w="679268"/>
-                <a:gridCol w="679268"/>
-                <a:gridCol w="679268"/>
-                <a:gridCol w="679268"/>
+                <a:gridCol w="2286000"/>
+                <a:gridCol w="1865376"/>
+                <a:gridCol w="1865376"/>
+                <a:gridCol w="1865376"/>
+                <a:gridCol w="1865376"/>
+                <a:gridCol w="1865376"/>
               </a:tblGrid>
-              <a:tr h="457200">
-                <a:tc>
-                  <a:txBody>
-                    <a:bodyPr/>
-                    <a:lstStyle/>
-                    <a:p>
-                      <a:pPr algn="ctr"/>
+              <a:tr h="411480">
+                <a:tc>
+                  <a:txBody>
+                    <a:bodyPr/>
+                    <a:lstStyle/>
+                    <a:p>
+                      <a:pPr algn="ctr"/>
+                      <a:r>
+                        <a:rPr sz="1100" b="1">
+                          <a:solidFill>
+                            <a:srgbClr val="FFFFFF"/>
+                          </a:solidFill>
+                          <a:latin typeface="IPAGothic"/>
+                        </a:rPr>
+                        <a:t/>
+                      </a:r>
+                    </a:p>
+                  </a:txBody>
+                  <a:tcPr>
+                    <a:solidFill>
+                      <a:srgbClr val="2C4A3E"/>
+                    </a:solidFill>
+                  </a:tcPr>
+                </a:tc>
+                <a:tc>
+                  <a:txBody>
+                    <a:bodyPr/>
+                    <a:lstStyle/>
+                    <a:p>
+                      <a:pPr algn="ctr"/>
+                      <a:r>
+                        <a:rPr sz="1100" b="1">
+                          <a:solidFill>
+                            <a:srgbClr val="FFFFFF"/>
+                          </a:solidFill>
+                          <a:latin typeface="IPAGothic"/>
+                        </a:rPr>
+                        <a:t>Y1 2026</a:t>
+                      </a:r>
+                    </a:p>
+                  </a:txBody>
+                  <a:tcPr>
+                    <a:solidFill>
+                      <a:srgbClr val="2C4A3E"/>
+                    </a:solidFill>
+                  </a:tcPr>
+                </a:tc>
+                <a:tc>
+                  <a:txBody>
+                    <a:bodyPr/>
+                    <a:lstStyle/>
+                    <a:p>
+                      <a:pPr algn="ctr"/>
+                      <a:r>
+                        <a:rPr sz="1100" b="1">
+                          <a:solidFill>
+                            <a:srgbClr val="FFFFFF"/>
+                          </a:solidFill>
+                          <a:latin typeface="IPAGothic"/>
+                        </a:rPr>
+                        <a:t>Y2 2027</a:t>
+                      </a:r>
+                    </a:p>
+                  </a:txBody>
+                  <a:tcPr>
+                    <a:solidFill>
+                      <a:srgbClr val="2C4A3E"/>
+                    </a:solidFill>
+                  </a:tcPr>
+                </a:tc>
+                <a:tc>
+                  <a:txBody>
+                    <a:bodyPr/>
+                    <a:lstStyle/>
+                    <a:p>
+                      <a:pPr algn="ctr"/>
+                      <a:r>
+                        <a:rPr sz="1100" b="1">
+                          <a:solidFill>
+                            <a:srgbClr val="FFFFFF"/>
+                          </a:solidFill>
+                          <a:latin typeface="IPAGothic"/>
+                        </a:rPr>
+                        <a:t>Y3 2028</a:t>
+                      </a:r>
+                    </a:p>
+                  </a:txBody>
+                  <a:tcPr>
+                    <a:solidFill>
+                      <a:srgbClr val="2C4A3E"/>
+                    </a:solidFill>
+                  </a:tcPr>
+                </a:tc>
+                <a:tc>
+                  <a:txBody>
+                    <a:bodyPr/>
+                    <a:lstStyle/>
+                    <a:p>
+                      <a:pPr algn="ctr"/>
+                      <a:r>
+                        <a:rPr sz="1100" b="1">
+                          <a:solidFill>
+                            <a:srgbClr val="FFFFFF"/>
+                          </a:solidFill>
+                          <a:latin typeface="IPAGothic"/>
+                        </a:rPr>
+                        <a:t>Y4 2029</a:t>
+                      </a:r>
+                    </a:p>
+                  </a:txBody>
+                  <a:tcPr>
+                    <a:solidFill>
+                      <a:srgbClr val="2C4A3E"/>
+                    </a:solidFill>
+                  </a:tcPr>
+                </a:tc>
+                <a:tc>
+                  <a:txBody>
+                    <a:bodyPr/>
+                    <a:lstStyle/>
+                    <a:p>
+                      <a:pPr algn="ctr"/>
+                      <a:r>
+                        <a:rPr sz="1100" b="1">
+                          <a:solidFill>
+                            <a:srgbClr val="FFFFFF"/>
+                          </a:solidFill>
+                          <a:latin typeface="IPAGothic"/>
+                        </a:rPr>
+                        <a:t>Y5 2030</a:t>
+                      </a:r>
+                    </a:p>
+                  </a:txBody>
+                  <a:tcPr>
+                    <a:solidFill>
+                      <a:srgbClr val="2C4A3E"/>
+                    </a:solidFill>
+                  </a:tcPr>
+                </a:tc>
+              </a:tr>
+              <a:tr h="411480">
+                <a:tc>
+                  <a:txBody>
+                    <a:bodyPr/>
+                    <a:lstStyle/>
+                    <a:p>
+                      <a:pPr algn="l"/>
+                      <a:r>
+                        <a:rPr sz="1000" b="0">
+                          <a:solidFill>
+                            <a:srgbClr val="1A1A1A"/>
+                          </a:solidFill>
+                          <a:latin typeface="IPAGothic"/>
+                        </a:rPr>
+                        <a:t>売上高（万円）</a:t>
+                      </a:r>
+                    </a:p>
+                  </a:txBody>
+                  <a:tcPr>
+                    <a:solidFill>
+                      <a:srgbClr val="F0EEE8"/>
+                    </a:solidFill>
+                  </a:tcPr>
+                </a:tc>
+                <a:tc>
+                  <a:txBody>
+                    <a:bodyPr/>
+                    <a:lstStyle/>
+                    <a:p>
+                      <a:pPr algn="ctr"/>
+                      <a:r>
+                        <a:rPr sz="1000" b="0">
+                          <a:solidFill>
+                            <a:srgbClr val="1A1A1A"/>
+                          </a:solidFill>
+                          <a:latin typeface="IPAGothic"/>
+                        </a:rPr>
+                        <a:t>14,000</a:t>
+                      </a:r>
+                    </a:p>
+                  </a:txBody>
+                  <a:tcPr>
+                    <a:solidFill>
+                      <a:srgbClr val="F0EEE8"/>
+                    </a:solidFill>
+                  </a:tcPr>
+                </a:tc>
+                <a:tc>
+                  <a:txBody>
+                    <a:bodyPr/>
+                    <a:lstStyle/>
+                    <a:p>
+                      <a:pPr algn="ctr"/>
+                      <a:r>
+                        <a:rPr sz="1000" b="0">
+                          <a:solidFill>
+                            <a:srgbClr val="1A1A1A"/>
+                          </a:solidFill>
+                          <a:latin typeface="IPAGothic"/>
+                        </a:rPr>
+                        <a:t>36,000</a:t>
+                      </a:r>
+                    </a:p>
+                  </a:txBody>
+                  <a:tcPr>
+                    <a:solidFill>
+                      <a:srgbClr val="F0EEE8"/>
+                    </a:solidFill>
+                  </a:tcPr>
+                </a:tc>
+                <a:tc>
+                  <a:txBody>
+                    <a:bodyPr/>
+                    <a:lstStyle/>
+                    <a:p>
+                      <a:pPr algn="ctr"/>
+                      <a:r>
+                        <a:rPr sz="1000" b="0">
+                          <a:solidFill>
+                            <a:srgbClr val="1A1A1A"/>
+                          </a:solidFill>
+                          <a:latin typeface="IPAGothic"/>
+                        </a:rPr>
+                        <a:t>72,000</a:t>
+                      </a:r>
+                    </a:p>
+                  </a:txBody>
+                  <a:tcPr>
+                    <a:solidFill>
+                      <a:srgbClr val="F0EEE8"/>
+                    </a:solidFill>
+                  </a:tcPr>
+                </a:tc>
+                <a:tc>
+                  <a:txBody>
+                    <a:bodyPr/>
+                    <a:lstStyle/>
+                    <a:p>
+                      <a:pPr algn="ctr"/>
+                      <a:r>
+                        <a:rPr sz="1000" b="0">
+                          <a:solidFill>
+                            <a:srgbClr val="1A1A1A"/>
+                          </a:solidFill>
+                          <a:latin typeface="IPAGothic"/>
+                        </a:rPr>
+                        <a:t>120,000</a:t>
+                      </a:r>
+                    </a:p>
+                  </a:txBody>
+                  <a:tcPr>
+                    <a:solidFill>
+                      <a:srgbClr val="F0EEE8"/>
+                    </a:solidFill>
+                  </a:tcPr>
+                </a:tc>
+                <a:tc>
+                  <a:txBody>
+                    <a:bodyPr/>
+                    <a:lstStyle/>
+                    <a:p>
+                      <a:pPr algn="ctr"/>
+                      <a:r>
+                        <a:rPr sz="1000" b="0">
+                          <a:solidFill>
+                            <a:srgbClr val="1A1A1A"/>
+                          </a:solidFill>
+                          <a:latin typeface="IPAGothic"/>
+                        </a:rPr>
+                        <a:t>200,000</a:t>
+                      </a:r>
+                    </a:p>
+                  </a:txBody>
+                  <a:tcPr>
+                    <a:solidFill>
+                      <a:srgbClr val="F0EEE8"/>
+                    </a:solidFill>
+                  </a:tcPr>
+                </a:tc>
+              </a:tr>
+              <a:tr h="411480">
+                <a:tc>
+                  <a:txBody>
+                    <a:bodyPr/>
+                    <a:lstStyle/>
+                    <a:p>
+                      <a:pPr algn="l"/>
+                      <a:r>
+                        <a:rPr sz="1000" b="0">
+                          <a:solidFill>
+                            <a:srgbClr val="1A1A1A"/>
+                          </a:solidFill>
+                          <a:latin typeface="IPAGothic"/>
+                        </a:rPr>
+                        <a:t>　売上原価（31%）</a:t>
+                      </a:r>
+                    </a:p>
+                  </a:txBody>
+                  <a:tcPr>
+                    <a:solidFill>
+                      <a:srgbClr val="FFFFFF"/>
+                    </a:solidFill>
+                  </a:tcPr>
+                </a:tc>
+                <a:tc>
+                  <a:txBody>
+                    <a:bodyPr/>
+                    <a:lstStyle/>
+                    <a:p>
+                      <a:pPr algn="ctr"/>
+                      <a:r>
+                        <a:rPr sz="1000" b="0">
+                          <a:solidFill>
+                            <a:srgbClr val="1A1A1A"/>
+                          </a:solidFill>
+                          <a:latin typeface="IPAGothic"/>
+                        </a:rPr>
+                        <a:t>▲4,340</a:t>
+                      </a:r>
+                    </a:p>
+                  </a:txBody>
+                  <a:tcPr>
+                    <a:solidFill>
+                      <a:srgbClr val="FFFFFF"/>
+                    </a:solidFill>
+                  </a:tcPr>
+                </a:tc>
+                <a:tc>
+                  <a:txBody>
+                    <a:bodyPr/>
+                    <a:lstStyle/>
+                    <a:p>
+                      <a:pPr algn="ctr"/>
+                      <a:r>
+                        <a:rPr sz="1000" b="0">
+                          <a:solidFill>
+                            <a:srgbClr val="1A1A1A"/>
+                          </a:solidFill>
+                          <a:latin typeface="IPAGothic"/>
+                        </a:rPr>
+                        <a:t>▲11,160</a:t>
+                      </a:r>
+                    </a:p>
+                  </a:txBody>
+                  <a:tcPr>
+                    <a:solidFill>
+                      <a:srgbClr val="FFFFFF"/>
+                    </a:solidFill>
+                  </a:tcPr>
+                </a:tc>
+                <a:tc>
+                  <a:txBody>
+                    <a:bodyPr/>
+                    <a:lstStyle/>
+                    <a:p>
+                      <a:pPr algn="ctr"/>
+                      <a:r>
+                        <a:rPr sz="1000" b="0">
+                          <a:solidFill>
+                            <a:srgbClr val="1A1A1A"/>
+                          </a:solidFill>
+                          <a:latin typeface="IPAGothic"/>
+                        </a:rPr>
+                        <a:t>▲22,320</a:t>
+                      </a:r>
+                    </a:p>
+                  </a:txBody>
+                  <a:tcPr>
+                    <a:solidFill>
+                      <a:srgbClr val="FFFFFF"/>
+                    </a:solidFill>
+                  </a:tcPr>
+                </a:tc>
+                <a:tc>
+                  <a:txBody>
+                    <a:bodyPr/>
+                    <a:lstStyle/>
+                    <a:p>
+                      <a:pPr algn="ctr"/>
+                      <a:r>
+                        <a:rPr sz="1000" b="0">
+                          <a:solidFill>
+                            <a:srgbClr val="1A1A1A"/>
+                          </a:solidFill>
+                          <a:latin typeface="IPAGothic"/>
+                        </a:rPr>
+                        <a:t>▲37,200</a:t>
+                      </a:r>
+                    </a:p>
+                  </a:txBody>
+                  <a:tcPr>
+                    <a:solidFill>
+                      <a:srgbClr val="FFFFFF"/>
+                    </a:solidFill>
+                  </a:tcPr>
+                </a:tc>
+                <a:tc>
+                  <a:txBody>
+                    <a:bodyPr/>
+                    <a:lstStyle/>
+                    <a:p>
+                      <a:pPr algn="ctr"/>
+                      <a:r>
+                        <a:rPr sz="1000" b="0">
+                          <a:solidFill>
+                            <a:srgbClr val="1A1A1A"/>
+                          </a:solidFill>
+                          <a:latin typeface="IPAGothic"/>
+                        </a:rPr>
+                        <a:t>▲62,000</a:t>
+                      </a:r>
+                    </a:p>
+                  </a:txBody>
+                  <a:tcPr>
+                    <a:solidFill>
+                      <a:srgbClr val="FFFFFF"/>
+                    </a:solidFill>
+                  </a:tcPr>
+                </a:tc>
+              </a:tr>
+              <a:tr h="411480">
+                <a:tc>
+                  <a:txBody>
+                    <a:bodyPr/>
+                    <a:lstStyle/>
+                    <a:p>
+                      <a:pPr algn="l"/>
                       <a:r>
                         <a:rPr sz="1000" b="1">
                           <a:solidFill>
+                            <a:srgbClr val="1A1A1A"/>
+                          </a:solidFill>
+                          <a:latin typeface="IPAGothic"/>
+                        </a:rPr>
+                        <a:t>売上総利益</a:t>
+                      </a:r>
+                    </a:p>
+                  </a:txBody>
+                  <a:tcPr>
+                    <a:solidFill>
+                      <a:srgbClr val="E8F4EE"/>
+                    </a:solidFill>
+                  </a:tcPr>
+                </a:tc>
+                <a:tc>
+                  <a:txBody>
+                    <a:bodyPr/>
+                    <a:lstStyle/>
+                    <a:p>
+                      <a:pPr algn="ctr"/>
+                      <a:r>
+                        <a:rPr sz="1000" b="1">
+                          <a:solidFill>
+                            <a:srgbClr val="1A1A1A"/>
+                          </a:solidFill>
+                          <a:latin typeface="IPAGothic"/>
+                        </a:rPr>
+                        <a:t>9,660</a:t>
+                      </a:r>
+                    </a:p>
+                  </a:txBody>
+                  <a:tcPr>
+                    <a:solidFill>
+                      <a:srgbClr val="E8F4EE"/>
+                    </a:solidFill>
+                  </a:tcPr>
+                </a:tc>
+                <a:tc>
+                  <a:txBody>
+                    <a:bodyPr/>
+                    <a:lstStyle/>
+                    <a:p>
+                      <a:pPr algn="ctr"/>
+                      <a:r>
+                        <a:rPr sz="1000" b="1">
+                          <a:solidFill>
+                            <a:srgbClr val="1A1A1A"/>
+                          </a:solidFill>
+                          <a:latin typeface="IPAGothic"/>
+                        </a:rPr>
+                        <a:t>24,840</a:t>
+                      </a:r>
+                    </a:p>
+                  </a:txBody>
+                  <a:tcPr>
+                    <a:solidFill>
+                      <a:srgbClr val="E8F4EE"/>
+                    </a:solidFill>
+                  </a:tcPr>
+                </a:tc>
+                <a:tc>
+                  <a:txBody>
+                    <a:bodyPr/>
+                    <a:lstStyle/>
+                    <a:p>
+                      <a:pPr algn="ctr"/>
+                      <a:r>
+                        <a:rPr sz="1000" b="1">
+                          <a:solidFill>
+                            <a:srgbClr val="1A1A1A"/>
+                          </a:solidFill>
+                          <a:latin typeface="IPAGothic"/>
+                        </a:rPr>
+                        <a:t>49,680</a:t>
+                      </a:r>
+                    </a:p>
+                  </a:txBody>
+                  <a:tcPr>
+                    <a:solidFill>
+                      <a:srgbClr val="E8F4EE"/>
+                    </a:solidFill>
+                  </a:tcPr>
+                </a:tc>
+                <a:tc>
+                  <a:txBody>
+                    <a:bodyPr/>
+                    <a:lstStyle/>
+                    <a:p>
+                      <a:pPr algn="ctr"/>
+                      <a:r>
+                        <a:rPr sz="1000" b="1">
+                          <a:solidFill>
+                            <a:srgbClr val="1A1A1A"/>
+                          </a:solidFill>
+                          <a:latin typeface="IPAGothic"/>
+                        </a:rPr>
+                        <a:t>82,800</a:t>
+                      </a:r>
+                    </a:p>
+                  </a:txBody>
+                  <a:tcPr>
+                    <a:solidFill>
+                      <a:srgbClr val="E8F4EE"/>
+                    </a:solidFill>
+                  </a:tcPr>
+                </a:tc>
+                <a:tc>
+                  <a:txBody>
+                    <a:bodyPr/>
+                    <a:lstStyle/>
+                    <a:p>
+                      <a:pPr algn="ctr"/>
+                      <a:r>
+                        <a:rPr sz="1000" b="1">
+                          <a:solidFill>
+                            <a:srgbClr val="1A1A1A"/>
+                          </a:solidFill>
+                          <a:latin typeface="IPAGothic"/>
+                        </a:rPr>
+                        <a:t>138,000</a:t>
+                      </a:r>
+                    </a:p>
+                  </a:txBody>
+                  <a:tcPr>
+                    <a:solidFill>
+                      <a:srgbClr val="E8F4EE"/>
+                    </a:solidFill>
+                  </a:tcPr>
+                </a:tc>
+              </a:tr>
+              <a:tr h="411480">
+                <a:tc>
+                  <a:txBody>
+                    <a:bodyPr/>
+                    <a:lstStyle/>
+                    <a:p>
+                      <a:pPr algn="l"/>
+                      <a:r>
+                        <a:rPr sz="1000" b="0">
+                          <a:solidFill>
+                            <a:srgbClr val="1A1A1A"/>
+                          </a:solidFill>
+                          <a:latin typeface="IPAGothic"/>
+                        </a:rPr>
+                        <a:t>　粗利率</a:t>
+                      </a:r>
+                    </a:p>
+                  </a:txBody>
+                  <a:tcPr>
+                    <a:solidFill>
+                      <a:srgbClr val="FFFFFF"/>
+                    </a:solidFill>
+                  </a:tcPr>
+                </a:tc>
+                <a:tc>
+                  <a:txBody>
+                    <a:bodyPr/>
+                    <a:lstStyle/>
+                    <a:p>
+                      <a:pPr algn="ctr"/>
+                      <a:r>
+                        <a:rPr sz="1000" b="0">
+                          <a:solidFill>
+                            <a:srgbClr val="1A1A1A"/>
+                          </a:solidFill>
+                          <a:latin typeface="IPAGothic"/>
+                        </a:rPr>
+                        <a:t>69%</a:t>
+                      </a:r>
+                    </a:p>
+                  </a:txBody>
+                  <a:tcPr>
+                    <a:solidFill>
+                      <a:srgbClr val="FFFFFF"/>
+                    </a:solidFill>
+                  </a:tcPr>
+                </a:tc>
+                <a:tc>
+                  <a:txBody>
+                    <a:bodyPr/>
+                    <a:lstStyle/>
+                    <a:p>
+                      <a:pPr algn="ctr"/>
+                      <a:r>
+                        <a:rPr sz="1000" b="0">
+                          <a:solidFill>
+                            <a:srgbClr val="1A1A1A"/>
+                          </a:solidFill>
+                          <a:latin typeface="IPAGothic"/>
+                        </a:rPr>
+                        <a:t>69%</a:t>
+                      </a:r>
+                    </a:p>
+                  </a:txBody>
+                  <a:tcPr>
+                    <a:solidFill>
+                      <a:srgbClr val="FFFFFF"/>
+                    </a:solidFill>
+                  </a:tcPr>
+                </a:tc>
+                <a:tc>
+                  <a:txBody>
+                    <a:bodyPr/>
+                    <a:lstStyle/>
+                    <a:p>
+                      <a:pPr algn="ctr"/>
+                      <a:r>
+                        <a:rPr sz="1000" b="0">
+                          <a:solidFill>
+                            <a:srgbClr val="1A1A1A"/>
+                          </a:solidFill>
+                          <a:latin typeface="IPAGothic"/>
+                        </a:rPr>
+                        <a:t>69%</a:t>
+                      </a:r>
+                    </a:p>
+                  </a:txBody>
+                  <a:tcPr>
+                    <a:solidFill>
+                      <a:srgbClr val="FFFFFF"/>
+                    </a:solidFill>
+                  </a:tcPr>
+                </a:tc>
+                <a:tc>
+                  <a:txBody>
+                    <a:bodyPr/>
+                    <a:lstStyle/>
+                    <a:p>
+                      <a:pPr algn="ctr"/>
+                      <a:r>
+                        <a:rPr sz="1000" b="0">
+                          <a:solidFill>
+                            <a:srgbClr val="1A1A1A"/>
+                          </a:solidFill>
+                          <a:latin typeface="IPAGothic"/>
+                        </a:rPr>
+                        <a:t>69%</a:t>
+                      </a:r>
+                    </a:p>
+                  </a:txBody>
+                  <a:tcPr>
+                    <a:solidFill>
+                      <a:srgbClr val="FFFFFF"/>
+                    </a:solidFill>
+                  </a:tcPr>
+                </a:tc>
+                <a:tc>
+                  <a:txBody>
+                    <a:bodyPr/>
+                    <a:lstStyle/>
+                    <a:p>
+                      <a:pPr algn="ctr"/>
+                      <a:r>
+                        <a:rPr sz="1000" b="0">
+                          <a:solidFill>
+                            <a:srgbClr val="1A1A1A"/>
+                          </a:solidFill>
+                          <a:latin typeface="IPAGothic"/>
+                        </a:rPr>
+                        <a:t>69%</a:t>
+                      </a:r>
+                    </a:p>
+                  </a:txBody>
+                  <a:tcPr>
+                    <a:solidFill>
+                      <a:srgbClr val="FFFFFF"/>
+                    </a:solidFill>
+                  </a:tcPr>
+                </a:tc>
+              </a:tr>
+              <a:tr h="411480">
+                <a:tc>
+                  <a:txBody>
+                    <a:bodyPr/>
+                    <a:lstStyle/>
+                    <a:p>
+                      <a:pPr algn="l"/>
+                      <a:r>
+                        <a:rPr sz="1000" b="0">
+                          <a:solidFill>
+                            <a:srgbClr val="1A1A1A"/>
+                          </a:solidFill>
+                          <a:latin typeface="IPAGothic"/>
+                        </a:rPr>
+                        <a:t>　人件費</a:t>
+                      </a:r>
+                    </a:p>
+                  </a:txBody>
+                  <a:tcPr>
+                    <a:solidFill>
+                      <a:srgbClr val="F0EEE8"/>
+                    </a:solidFill>
+                  </a:tcPr>
+                </a:tc>
+                <a:tc>
+                  <a:txBody>
+                    <a:bodyPr/>
+                    <a:lstStyle/>
+                    <a:p>
+                      <a:pPr algn="ctr"/>
+                      <a:r>
+                        <a:rPr sz="1000" b="0">
+                          <a:solidFill>
+                            <a:srgbClr val="1A1A1A"/>
+                          </a:solidFill>
+                          <a:latin typeface="IPAGothic"/>
+                        </a:rPr>
+                        <a:t>▲3,840</a:t>
+                      </a:r>
+                    </a:p>
+                  </a:txBody>
+                  <a:tcPr>
+                    <a:solidFill>
+                      <a:srgbClr val="F0EEE8"/>
+                    </a:solidFill>
+                  </a:tcPr>
+                </a:tc>
+                <a:tc>
+                  <a:txBody>
+                    <a:bodyPr/>
+                    <a:lstStyle/>
+                    <a:p>
+                      <a:pPr algn="ctr"/>
+                      <a:r>
+                        <a:rPr sz="1000" b="0">
+                          <a:solidFill>
+                            <a:srgbClr val="1A1A1A"/>
+                          </a:solidFill>
+                          <a:latin typeface="IPAGothic"/>
+                        </a:rPr>
+                        <a:t>▲9,200</a:t>
+                      </a:r>
+                    </a:p>
+                  </a:txBody>
+                  <a:tcPr>
+                    <a:solidFill>
+                      <a:srgbClr val="F0EEE8"/>
+                    </a:solidFill>
+                  </a:tcPr>
+                </a:tc>
+                <a:tc>
+                  <a:txBody>
+                    <a:bodyPr/>
+                    <a:lstStyle/>
+                    <a:p>
+                      <a:pPr algn="ctr"/>
+                      <a:r>
+                        <a:rPr sz="1000" b="0">
+                          <a:solidFill>
+                            <a:srgbClr val="1A1A1A"/>
+                          </a:solidFill>
+                          <a:latin typeface="IPAGothic"/>
+                        </a:rPr>
+                        <a:t>▲16,480</a:t>
+                      </a:r>
+                    </a:p>
+                  </a:txBody>
+                  <a:tcPr>
+                    <a:solidFill>
+                      <a:srgbClr val="F0EEE8"/>
+                    </a:solidFill>
+                  </a:tcPr>
+                </a:tc>
+                <a:tc>
+                  <a:txBody>
+                    <a:bodyPr/>
+                    <a:lstStyle/>
+                    <a:p>
+                      <a:pPr algn="ctr"/>
+                      <a:r>
+                        <a:rPr sz="1000" b="0">
+                          <a:solidFill>
+                            <a:srgbClr val="1A1A1A"/>
+                          </a:solidFill>
+                          <a:latin typeface="IPAGothic"/>
+                        </a:rPr>
+                        <a:t>▲29,000</a:t>
+                      </a:r>
+                    </a:p>
+                  </a:txBody>
+                  <a:tcPr>
+                    <a:solidFill>
+                      <a:srgbClr val="F0EEE8"/>
+                    </a:solidFill>
+                  </a:tcPr>
+                </a:tc>
+                <a:tc>
+                  <a:txBody>
+                    <a:bodyPr/>
+                    <a:lstStyle/>
+                    <a:p>
+                      <a:pPr algn="ctr"/>
+                      <a:r>
+                        <a:rPr sz="1000" b="0">
+                          <a:solidFill>
+                            <a:srgbClr val="1A1A1A"/>
+                          </a:solidFill>
+                          <a:latin typeface="IPAGothic"/>
+                        </a:rPr>
+                        <a:t>▲46,000</a:t>
+                      </a:r>
+                    </a:p>
+                  </a:txBody>
+                  <a:tcPr>
+                    <a:solidFill>
+                      <a:srgbClr val="F0EEE8"/>
+                    </a:solidFill>
+                  </a:tcPr>
+                </a:tc>
+              </a:tr>
+              <a:tr h="411480">
+                <a:tc>
+                  <a:txBody>
+                    <a:bodyPr/>
+                    <a:lstStyle/>
+                    <a:p>
+                      <a:pPr algn="l"/>
+                      <a:r>
+                        <a:rPr sz="1000" b="0">
+                          <a:solidFill>
+                            <a:srgbClr val="1A1A1A"/>
+                          </a:solidFill>
+                          <a:latin typeface="IPAGothic"/>
+                        </a:rPr>
+                        <a:t>　家賃合計</a:t>
+                      </a:r>
+                    </a:p>
+                  </a:txBody>
+                  <a:tcPr>
+                    <a:solidFill>
+                      <a:srgbClr val="FFFFFF"/>
+                    </a:solidFill>
+                  </a:tcPr>
+                </a:tc>
+                <a:tc>
+                  <a:txBody>
+                    <a:bodyPr/>
+                    <a:lstStyle/>
+                    <a:p>
+                      <a:pPr algn="ctr"/>
+                      <a:r>
+                        <a:rPr sz="1000" b="0">
+                          <a:solidFill>
+                            <a:srgbClr val="1A1A1A"/>
+                          </a:solidFill>
+                          <a:latin typeface="IPAGothic"/>
+                        </a:rPr>
+                        <a:t>▲1,500</a:t>
+                      </a:r>
+                    </a:p>
+                  </a:txBody>
+                  <a:tcPr>
+                    <a:solidFill>
+                      <a:srgbClr val="FFFFFF"/>
+                    </a:solidFill>
+                  </a:tcPr>
+                </a:tc>
+                <a:tc>
+                  <a:txBody>
+                    <a:bodyPr/>
+                    <a:lstStyle/>
+                    <a:p>
+                      <a:pPr algn="ctr"/>
+                      <a:r>
+                        <a:rPr sz="1000" b="0">
+                          <a:solidFill>
+                            <a:srgbClr val="1A1A1A"/>
+                          </a:solidFill>
+                          <a:latin typeface="IPAGothic"/>
+                        </a:rPr>
+                        <a:t>▲3,600</a:t>
+                      </a:r>
+                    </a:p>
+                  </a:txBody>
+                  <a:tcPr>
+                    <a:solidFill>
+                      <a:srgbClr val="FFFFFF"/>
+                    </a:solidFill>
+                  </a:tcPr>
+                </a:tc>
+                <a:tc>
+                  <a:txBody>
+                    <a:bodyPr/>
+                    <a:lstStyle/>
+                    <a:p>
+                      <a:pPr algn="ctr"/>
+                      <a:r>
+                        <a:rPr sz="1000" b="0">
+                          <a:solidFill>
+                            <a:srgbClr val="1A1A1A"/>
+                          </a:solidFill>
+                          <a:latin typeface="IPAGothic"/>
+                        </a:rPr>
+                        <a:t>▲7,200</a:t>
+                      </a:r>
+                    </a:p>
+                  </a:txBody>
+                  <a:tcPr>
+                    <a:solidFill>
+                      <a:srgbClr val="FFFFFF"/>
+                    </a:solidFill>
+                  </a:tcPr>
+                </a:tc>
+                <a:tc>
+                  <a:txBody>
+                    <a:bodyPr/>
+                    <a:lstStyle/>
+                    <a:p>
+                      <a:pPr algn="ctr"/>
+                      <a:r>
+                        <a:rPr sz="1000" b="0">
+                          <a:solidFill>
+                            <a:srgbClr val="1A1A1A"/>
+                          </a:solidFill>
+                          <a:latin typeface="IPAGothic"/>
+                        </a:rPr>
+                        <a:t>▲11,000</a:t>
+                      </a:r>
+                    </a:p>
+                  </a:txBody>
+                  <a:tcPr>
+                    <a:solidFill>
+                      <a:srgbClr val="FFFFFF"/>
+                    </a:solidFill>
+                  </a:tcPr>
+                </a:tc>
+                <a:tc>
+                  <a:txBody>
+                    <a:bodyPr/>
+                    <a:lstStyle/>
+                    <a:p>
+                      <a:pPr algn="ctr"/>
+                      <a:r>
+                        <a:rPr sz="1000" b="0">
+                          <a:solidFill>
+                            <a:srgbClr val="1A1A1A"/>
+                          </a:solidFill>
+                          <a:latin typeface="IPAGothic"/>
+                        </a:rPr>
+                        <a:t>▲17,000</a:t>
+                      </a:r>
+                    </a:p>
+                  </a:txBody>
+                  <a:tcPr>
+                    <a:solidFill>
+                      <a:srgbClr val="FFFFFF"/>
+                    </a:solidFill>
+                  </a:tcPr>
+                </a:tc>
+              </a:tr>
+              <a:tr h="411480">
+                <a:tc>
+                  <a:txBody>
+                    <a:bodyPr/>
+                    <a:lstStyle/>
+                    <a:p>
+                      <a:pPr algn="l"/>
+                      <a:r>
+                        <a:rPr sz="1000" b="0">
+                          <a:solidFill>
+                            <a:srgbClr val="1A1A1A"/>
+                          </a:solidFill>
+                          <a:latin typeface="IPAGothic"/>
+                        </a:rPr>
+                        <a:t>　その他（光熱費等）</a:t>
+                      </a:r>
+                    </a:p>
+                  </a:txBody>
+                  <a:tcPr>
+                    <a:solidFill>
+                      <a:srgbClr val="F0EEE8"/>
+                    </a:solidFill>
+                  </a:tcPr>
+                </a:tc>
+                <a:tc>
+                  <a:txBody>
+                    <a:bodyPr/>
+                    <a:lstStyle/>
+                    <a:p>
+                      <a:pPr algn="ctr"/>
+                      <a:r>
+                        <a:rPr sz="1000" b="0">
+                          <a:solidFill>
+                            <a:srgbClr val="1A1A1A"/>
+                          </a:solidFill>
+                          <a:latin typeface="IPAGothic"/>
+                        </a:rPr>
+                        <a:t>▲2,500</a:t>
+                      </a:r>
+                    </a:p>
+                  </a:txBody>
+                  <a:tcPr>
+                    <a:solidFill>
+                      <a:srgbClr val="F0EEE8"/>
+                    </a:solidFill>
+                  </a:tcPr>
+                </a:tc>
+                <a:tc>
+                  <a:txBody>
+                    <a:bodyPr/>
+                    <a:lstStyle/>
+                    <a:p>
+                      <a:pPr algn="ctr"/>
+                      <a:r>
+                        <a:rPr sz="1000" b="0">
+                          <a:solidFill>
+                            <a:srgbClr val="1A1A1A"/>
+                          </a:solidFill>
+                          <a:latin typeface="IPAGothic"/>
+                        </a:rPr>
+                        <a:t>▲5,560</a:t>
+                      </a:r>
+                    </a:p>
+                  </a:txBody>
+                  <a:tcPr>
+                    <a:solidFill>
+                      <a:srgbClr val="F0EEE8"/>
+                    </a:solidFill>
+                  </a:tcPr>
+                </a:tc>
+                <a:tc>
+                  <a:txBody>
+                    <a:bodyPr/>
+                    <a:lstStyle/>
+                    <a:p>
+                      <a:pPr algn="ctr"/>
+                      <a:r>
+                        <a:rPr sz="1000" b="0">
+                          <a:solidFill>
+                            <a:srgbClr val="1A1A1A"/>
+                          </a:solidFill>
+                          <a:latin typeface="IPAGothic"/>
+                        </a:rPr>
+                        <a:t>▲11,600</a:t>
+                      </a:r>
+                    </a:p>
+                  </a:txBody>
+                  <a:tcPr>
+                    <a:solidFill>
+                      <a:srgbClr val="F0EEE8"/>
+                    </a:solidFill>
+                  </a:tcPr>
+                </a:tc>
+                <a:tc>
+                  <a:txBody>
+                    <a:bodyPr/>
+                    <a:lstStyle/>
+                    <a:p>
+                      <a:pPr algn="ctr"/>
+                      <a:r>
+                        <a:rPr sz="1000" b="0">
+                          <a:solidFill>
+                            <a:srgbClr val="1A1A1A"/>
+                          </a:solidFill>
+                          <a:latin typeface="IPAGothic"/>
+                        </a:rPr>
+                        <a:t>▲18,800</a:t>
+                      </a:r>
+                    </a:p>
+                  </a:txBody>
+                  <a:tcPr>
+                    <a:solidFill>
+                      <a:srgbClr val="F0EEE8"/>
+                    </a:solidFill>
+                  </a:tcPr>
+                </a:tc>
+                <a:tc>
+                  <a:txBody>
+                    <a:bodyPr/>
+                    <a:lstStyle/>
+                    <a:p>
+                      <a:pPr algn="ctr"/>
+                      <a:r>
+                        <a:rPr sz="1000" b="0">
+                          <a:solidFill>
+                            <a:srgbClr val="1A1A1A"/>
+                          </a:solidFill>
+                          <a:latin typeface="IPAGothic"/>
+                        </a:rPr>
+                        <a:t>▲35,000</a:t>
+                      </a:r>
+                    </a:p>
+                  </a:txBody>
+                  <a:tcPr>
+                    <a:solidFill>
+                      <a:srgbClr val="F0EEE8"/>
+                    </a:solidFill>
+                  </a:tcPr>
+                </a:tc>
+              </a:tr>
+              <a:tr h="411480">
+                <a:tc>
+                  <a:txBody>
+                    <a:bodyPr/>
+                    <a:lstStyle/>
+                    <a:p>
+                      <a:pPr algn="l"/>
+                      <a:r>
+                        <a:rPr sz="1000" b="1">
+                          <a:solidFill>
                             <a:srgbClr val="FFFFFF"/>
                           </a:solidFill>
                           <a:latin typeface="IPAGothic"/>
                         </a:rPr>
-                        <a:t/>
+                        <a:t>EBITDA</a:t>
                       </a:r>
                     </a:p>
                   </a:txBody>
@@ -11464,7 +13286,7 @@
                           </a:solidFill>
                           <a:latin typeface="IPAGothic"/>
                         </a:rPr>
-                        <a:t>調達時</a:t>
+                        <a:t>1,820</a:t>
                       </a:r>
                     </a:p>
                   </a:txBody>
@@ -11487,7 +13309,7 @@
                           </a:solidFill>
                           <a:latin typeface="IPAGothic"/>
                         </a:rPr>
-                        <a:t>Y1末</a:t>
+                        <a:t>6,480</a:t>
                       </a:r>
                     </a:p>
                   </a:txBody>
@@ -11510,7 +13332,7 @@
                           </a:solidFill>
                           <a:latin typeface="IPAGothic"/>
                         </a:rPr>
-                        <a:t>Y2末</a:t>
+                        <a:t>14,400</a:t>
                       </a:r>
                     </a:p>
                   </a:txBody>
@@ -11533,7 +13355,7 @@
                           </a:solidFill>
                           <a:latin typeface="IPAGothic"/>
                         </a:rPr>
-                        <a:t>Y3末</a:t>
+                        <a:t>24,000</a:t>
                       </a:r>
                     </a:p>
                   </a:txBody>
@@ -11556,7 +13378,7 @@
                           </a:solidFill>
                           <a:latin typeface="IPAGothic"/>
                         </a:rPr>
-                        <a:t>Y4末</a:t>
+                        <a:t>40,000</a:t>
                       </a:r>
                     </a:p>
                   </a:txBody>
@@ -11566,45 +13388,22 @@
                     </a:solidFill>
                   </a:tcPr>
                 </a:tc>
-                <a:tc>
-                  <a:txBody>
-                    <a:bodyPr/>
-                    <a:lstStyle/>
-                    <a:p>
-                      <a:pPr algn="ctr"/>
-                      <a:r>
-                        <a:rPr sz="1000" b="1">
-                          <a:solidFill>
-                            <a:srgbClr val="FFFFFF"/>
-                          </a:solidFill>
-                          <a:latin typeface="IPAGothic"/>
-                        </a:rPr>
-                        <a:t>Y5末</a:t>
-                      </a:r>
-                    </a:p>
-                  </a:txBody>
-                  <a:tcPr>
-                    <a:solidFill>
-                      <a:srgbClr val="2C4A3E"/>
-                    </a:solidFill>
-                  </a:tcPr>
-                </a:tc>
               </a:tr>
-              <a:tr h="457200">
-                <a:tc>
-                  <a:txBody>
-                    <a:bodyPr/>
-                    <a:lstStyle/>
-                    <a:p>
-                      <a:pPr algn="ctr"/>
-                      <a:r>
-                        <a:rPr sz="1000">
+              <a:tr h="411480">
+                <a:tc>
+                  <a:txBody>
+                    <a:bodyPr/>
+                    <a:lstStyle/>
+                    <a:p>
+                      <a:pPr algn="l"/>
+                      <a:r>
+                        <a:rPr sz="1000" b="0">
                           <a:solidFill>
                             <a:srgbClr val="1A1A1A"/>
                           </a:solidFill>
                           <a:latin typeface="IPAGothic"/>
                         </a:rPr>
-                        <a:t>営業CF（万円）</a:t>
+                        <a:t>EBITDA率</a:t>
                       </a:r>
                     </a:p>
                   </a:txBody>
@@ -11621,13 +13420,13 @@
                     <a:p>
                       <a:pPr algn="ctr"/>
                       <a:r>
-                        <a:rPr sz="1000">
+                        <a:rPr sz="1000" b="0">
                           <a:solidFill>
                             <a:srgbClr val="1A1A1A"/>
                           </a:solidFill>
                           <a:latin typeface="IPAGothic"/>
                         </a:rPr>
-                        <a:t>─</a:t>
+                        <a:t>13%</a:t>
                       </a:r>
                     </a:p>
                   </a:txBody>
@@ -11644,13 +13443,13 @@
                     <a:p>
                       <a:pPr algn="ctr"/>
                       <a:r>
-                        <a:rPr sz="1000">
+                        <a:rPr sz="1000" b="0">
                           <a:solidFill>
                             <a:srgbClr val="1A1A1A"/>
                           </a:solidFill>
                           <a:latin typeface="IPAGothic"/>
                         </a:rPr>
-                        <a:t>+2,600</a:t>
+                        <a:t>18%</a:t>
                       </a:r>
                     </a:p>
                   </a:txBody>
@@ -11667,13 +13466,13 @@
                     <a:p>
                       <a:pPr algn="ctr"/>
                       <a:r>
-                        <a:rPr sz="1000">
+                        <a:rPr sz="1000" b="0">
                           <a:solidFill>
                             <a:srgbClr val="1A1A1A"/>
                           </a:solidFill>
                           <a:latin typeface="IPAGothic"/>
                         </a:rPr>
-                        <a:t>+7,500</a:t>
+                        <a:t>20%</a:t>
                       </a:r>
                     </a:p>
                   </a:txBody>
@@ -11690,13 +13489,13 @@
                     <a:p>
                       <a:pPr algn="ctr"/>
                       <a:r>
-                        <a:rPr sz="1000">
+                        <a:rPr sz="1000" b="0">
                           <a:solidFill>
                             <a:srgbClr val="1A1A1A"/>
                           </a:solidFill>
                           <a:latin typeface="IPAGothic"/>
                         </a:rPr>
-                        <a:t>+15,000</a:t>
+                        <a:t>20%</a:t>
                       </a:r>
                     </a:p>
                   </a:txBody>
@@ -11713,531 +13512,19 @@
                     <a:p>
                       <a:pPr algn="ctr"/>
                       <a:r>
-                        <a:rPr sz="1000">
+                        <a:rPr sz="1000" b="0">
                           <a:solidFill>
                             <a:srgbClr val="1A1A1A"/>
                           </a:solidFill>
                           <a:latin typeface="IPAGothic"/>
                         </a:rPr>
-                        <a:t>+28,000</a:t>
+                        <a:t>20%</a:t>
                       </a:r>
                     </a:p>
                   </a:txBody>
                   <a:tcPr>
                     <a:solidFill>
                       <a:srgbClr val="F0EEE8"/>
-                    </a:solidFill>
-                  </a:tcPr>
-                </a:tc>
-                <a:tc>
-                  <a:txBody>
-                    <a:bodyPr/>
-                    <a:lstStyle/>
-                    <a:p>
-                      <a:pPr algn="ctr"/>
-                      <a:r>
-                        <a:rPr sz="1000">
-                          <a:solidFill>
-                            <a:srgbClr val="1A1A1A"/>
-                          </a:solidFill>
-                          <a:latin typeface="IPAGothic"/>
-                        </a:rPr>
-                        <a:t>+48,000</a:t>
-                      </a:r>
-                    </a:p>
-                  </a:txBody>
-                  <a:tcPr>
-                    <a:solidFill>
-                      <a:srgbClr val="F0EEE8"/>
-                    </a:solidFill>
-                  </a:tcPr>
-                </a:tc>
-              </a:tr>
-              <a:tr h="457200">
-                <a:tc>
-                  <a:txBody>
-                    <a:bodyPr/>
-                    <a:lstStyle/>
-                    <a:p>
-                      <a:pPr algn="ctr"/>
-                      <a:r>
-                        <a:rPr sz="1000">
-                          <a:solidFill>
-                            <a:srgbClr val="1A1A1A"/>
-                          </a:solidFill>
-                          <a:latin typeface="IPAGothic"/>
-                        </a:rPr>
-                        <a:t>投資CF（万円）</a:t>
-                      </a:r>
-                    </a:p>
-                  </a:txBody>
-                  <a:tcPr>
-                    <a:solidFill>
-                      <a:srgbClr val="FFFFFF"/>
-                    </a:solidFill>
-                  </a:tcPr>
-                </a:tc>
-                <a:tc>
-                  <a:txBody>
-                    <a:bodyPr/>
-                    <a:lstStyle/>
-                    <a:p>
-                      <a:pPr algn="ctr"/>
-                      <a:r>
-                        <a:rPr sz="1000">
-                          <a:solidFill>
-                            <a:srgbClr val="1A1A1A"/>
-                          </a:solidFill>
-                          <a:latin typeface="IPAGothic"/>
-                        </a:rPr>
-                        <a:t>▲3,800</a:t>
-                      </a:r>
-                    </a:p>
-                  </a:txBody>
-                  <a:tcPr>
-                    <a:solidFill>
-                      <a:srgbClr val="FFFFFF"/>
-                    </a:solidFill>
-                  </a:tcPr>
-                </a:tc>
-                <a:tc>
-                  <a:txBody>
-                    <a:bodyPr/>
-                    <a:lstStyle/>
-                    <a:p>
-                      <a:pPr algn="ctr"/>
-                      <a:r>
-                        <a:rPr sz="1000">
-                          <a:solidFill>
-                            <a:srgbClr val="1A1A1A"/>
-                          </a:solidFill>
-                          <a:latin typeface="IPAGothic"/>
-                        </a:rPr>
-                        <a:t>▲1,000</a:t>
-                      </a:r>
-                    </a:p>
-                  </a:txBody>
-                  <a:tcPr>
-                    <a:solidFill>
-                      <a:srgbClr val="FFFFFF"/>
-                    </a:solidFill>
-                  </a:tcPr>
-                </a:tc>
-                <a:tc>
-                  <a:txBody>
-                    <a:bodyPr/>
-                    <a:lstStyle/>
-                    <a:p>
-                      <a:pPr algn="ctr"/>
-                      <a:r>
-                        <a:rPr sz="1000">
-                          <a:solidFill>
-                            <a:srgbClr val="1A1A1A"/>
-                          </a:solidFill>
-                          <a:latin typeface="IPAGothic"/>
-                        </a:rPr>
-                        <a:t>▲5,000</a:t>
-                      </a:r>
-                    </a:p>
-                  </a:txBody>
-                  <a:tcPr>
-                    <a:solidFill>
-                      <a:srgbClr val="FFFFFF"/>
-                    </a:solidFill>
-                  </a:tcPr>
-                </a:tc>
-                <a:tc>
-                  <a:txBody>
-                    <a:bodyPr/>
-                    <a:lstStyle/>
-                    <a:p>
-                      <a:pPr algn="ctr"/>
-                      <a:r>
-                        <a:rPr sz="1000">
-                          <a:solidFill>
-                            <a:srgbClr val="1A1A1A"/>
-                          </a:solidFill>
-                          <a:latin typeface="IPAGothic"/>
-                        </a:rPr>
-                        <a:t>▲8,000</a:t>
-                      </a:r>
-                    </a:p>
-                  </a:txBody>
-                  <a:tcPr>
-                    <a:solidFill>
-                      <a:srgbClr val="FFFFFF"/>
-                    </a:solidFill>
-                  </a:tcPr>
-                </a:tc>
-                <a:tc>
-                  <a:txBody>
-                    <a:bodyPr/>
-                    <a:lstStyle/>
-                    <a:p>
-                      <a:pPr algn="ctr"/>
-                      <a:r>
-                        <a:rPr sz="1000">
-                          <a:solidFill>
-                            <a:srgbClr val="1A1A1A"/>
-                          </a:solidFill>
-                          <a:latin typeface="IPAGothic"/>
-                        </a:rPr>
-                        <a:t>▲10,000</a:t>
-                      </a:r>
-                    </a:p>
-                  </a:txBody>
-                  <a:tcPr>
-                    <a:solidFill>
-                      <a:srgbClr val="FFFFFF"/>
-                    </a:solidFill>
-                  </a:tcPr>
-                </a:tc>
-                <a:tc>
-                  <a:txBody>
-                    <a:bodyPr/>
-                    <a:lstStyle/>
-                    <a:p>
-                      <a:pPr algn="ctr"/>
-                      <a:r>
-                        <a:rPr sz="1000">
-                          <a:solidFill>
-                            <a:srgbClr val="1A1A1A"/>
-                          </a:solidFill>
-                          <a:latin typeface="IPAGothic"/>
-                        </a:rPr>
-                        <a:t>▲5,000</a:t>
-                      </a:r>
-                    </a:p>
-                  </a:txBody>
-                  <a:tcPr>
-                    <a:solidFill>
-                      <a:srgbClr val="FFFFFF"/>
-                    </a:solidFill>
-                  </a:tcPr>
-                </a:tc>
-              </a:tr>
-              <a:tr h="457200">
-                <a:tc>
-                  <a:txBody>
-                    <a:bodyPr/>
-                    <a:lstStyle/>
-                    <a:p>
-                      <a:pPr algn="ctr"/>
-                      <a:r>
-                        <a:rPr sz="1000">
-                          <a:solidFill>
-                            <a:srgbClr val="1A1A1A"/>
-                          </a:solidFill>
-                          <a:latin typeface="IPAGothic"/>
-                        </a:rPr>
-                        <a:t>純CF（万円）</a:t>
-                      </a:r>
-                    </a:p>
-                  </a:txBody>
-                  <a:tcPr>
-                    <a:solidFill>
-                      <a:srgbClr val="F0EEE8"/>
-                    </a:solidFill>
-                  </a:tcPr>
-                </a:tc>
-                <a:tc>
-                  <a:txBody>
-                    <a:bodyPr/>
-                    <a:lstStyle/>
-                    <a:p>
-                      <a:pPr algn="ctr"/>
-                      <a:r>
-                        <a:rPr sz="1000">
-                          <a:solidFill>
-                            <a:srgbClr val="1A1A1A"/>
-                          </a:solidFill>
-                          <a:latin typeface="IPAGothic"/>
-                        </a:rPr>
-                        <a:t>+3,800</a:t>
-                      </a:r>
-                    </a:p>
-                  </a:txBody>
-                  <a:tcPr>
-                    <a:solidFill>
-                      <a:srgbClr val="F0EEE8"/>
-                    </a:solidFill>
-                  </a:tcPr>
-                </a:tc>
-                <a:tc>
-                  <a:txBody>
-                    <a:bodyPr/>
-                    <a:lstStyle/>
-                    <a:p>
-                      <a:pPr algn="ctr"/>
-                      <a:r>
-                        <a:rPr sz="1000">
-                          <a:solidFill>
-                            <a:srgbClr val="1A1A1A"/>
-                          </a:solidFill>
-                          <a:latin typeface="IPAGothic"/>
-                        </a:rPr>
-                        <a:t>+1,600</a:t>
-                      </a:r>
-                    </a:p>
-                  </a:txBody>
-                  <a:tcPr>
-                    <a:solidFill>
-                      <a:srgbClr val="F0EEE8"/>
-                    </a:solidFill>
-                  </a:tcPr>
-                </a:tc>
-                <a:tc>
-                  <a:txBody>
-                    <a:bodyPr/>
-                    <a:lstStyle/>
-                    <a:p>
-                      <a:pPr algn="ctr"/>
-                      <a:r>
-                        <a:rPr sz="1000">
-                          <a:solidFill>
-                            <a:srgbClr val="1A1A1A"/>
-                          </a:solidFill>
-                          <a:latin typeface="IPAGothic"/>
-                        </a:rPr>
-                        <a:t>+2,500</a:t>
-                      </a:r>
-                    </a:p>
-                  </a:txBody>
-                  <a:tcPr>
-                    <a:solidFill>
-                      <a:srgbClr val="F0EEE8"/>
-                    </a:solidFill>
-                  </a:tcPr>
-                </a:tc>
-                <a:tc>
-                  <a:txBody>
-                    <a:bodyPr/>
-                    <a:lstStyle/>
-                    <a:p>
-                      <a:pPr algn="ctr"/>
-                      <a:r>
-                        <a:rPr sz="1000">
-                          <a:solidFill>
-                            <a:srgbClr val="1A1A1A"/>
-                          </a:solidFill>
-                          <a:latin typeface="IPAGothic"/>
-                        </a:rPr>
-                        <a:t>+7,000</a:t>
-                      </a:r>
-                    </a:p>
-                  </a:txBody>
-                  <a:tcPr>
-                    <a:solidFill>
-                      <a:srgbClr val="F0EEE8"/>
-                    </a:solidFill>
-                  </a:tcPr>
-                </a:tc>
-                <a:tc>
-                  <a:txBody>
-                    <a:bodyPr/>
-                    <a:lstStyle/>
-                    <a:p>
-                      <a:pPr algn="ctr"/>
-                      <a:r>
-                        <a:rPr sz="1000">
-                          <a:solidFill>
-                            <a:srgbClr val="1A1A1A"/>
-                          </a:solidFill>
-                          <a:latin typeface="IPAGothic"/>
-                        </a:rPr>
-                        <a:t>+18,000</a:t>
-                      </a:r>
-                    </a:p>
-                  </a:txBody>
-                  <a:tcPr>
-                    <a:solidFill>
-                      <a:srgbClr val="F0EEE8"/>
-                    </a:solidFill>
-                  </a:tcPr>
-                </a:tc>
-                <a:tc>
-                  <a:txBody>
-                    <a:bodyPr/>
-                    <a:lstStyle/>
-                    <a:p>
-                      <a:pPr algn="ctr"/>
-                      <a:r>
-                        <a:rPr sz="1000">
-                          <a:solidFill>
-                            <a:srgbClr val="1A1A1A"/>
-                          </a:solidFill>
-                          <a:latin typeface="IPAGothic"/>
-                        </a:rPr>
-                        <a:t>+43,000</a:t>
-                      </a:r>
-                    </a:p>
-                  </a:txBody>
-                  <a:tcPr>
-                    <a:solidFill>
-                      <a:srgbClr val="F0EEE8"/>
-                    </a:solidFill>
-                  </a:tcPr>
-                </a:tc>
-              </a:tr>
-              <a:tr h="457200">
-                <a:tc>
-                  <a:txBody>
-                    <a:bodyPr/>
-                    <a:lstStyle/>
-                    <a:p>
-                      <a:pPr algn="ctr"/>
-                      <a:r>
-                        <a:rPr sz="1000">
-                          <a:solidFill>
-                            <a:srgbClr val="1A1A1A"/>
-                          </a:solidFill>
-                          <a:latin typeface="IPAGothic"/>
-                        </a:rPr>
-                        <a:t>累計CF（万円）</a:t>
-                      </a:r>
-                    </a:p>
-                  </a:txBody>
-                  <a:tcPr>
-                    <a:solidFill>
-                      <a:srgbClr val="FFFFFF"/>
-                    </a:solidFill>
-                  </a:tcPr>
-                </a:tc>
-                <a:tc>
-                  <a:txBody>
-                    <a:bodyPr/>
-                    <a:lstStyle/>
-                    <a:p>
-                      <a:pPr algn="ctr"/>
-                      <a:r>
-                        <a:rPr sz="1000">
-                          <a:solidFill>
-                            <a:srgbClr val="1A1A1A"/>
-                          </a:solidFill>
-                          <a:latin typeface="IPAGothic"/>
-                        </a:rPr>
-                        <a:t>3,800</a:t>
-                      </a:r>
-                    </a:p>
-                  </a:txBody>
-                  <a:tcPr>
-                    <a:solidFill>
-                      <a:srgbClr val="FFFFFF"/>
-                    </a:solidFill>
-                  </a:tcPr>
-                </a:tc>
-                <a:tc>
-                  <a:txBody>
-                    <a:bodyPr/>
-                    <a:lstStyle/>
-                    <a:p>
-                      <a:pPr algn="ctr"/>
-                      <a:r>
-                        <a:rPr sz="1000">
-                          <a:solidFill>
-                            <a:srgbClr val="1A1A1A"/>
-                          </a:solidFill>
-                          <a:latin typeface="IPAGothic"/>
-                        </a:rPr>
-                        <a:t>5,400</a:t>
-                      </a:r>
-                    </a:p>
-                  </a:txBody>
-                  <a:tcPr>
-                    <a:solidFill>
-                      <a:srgbClr val="FFFFFF"/>
-                    </a:solidFill>
-                  </a:tcPr>
-                </a:tc>
-                <a:tc>
-                  <a:txBody>
-                    <a:bodyPr/>
-                    <a:lstStyle/>
-                    <a:p>
-                      <a:pPr algn="ctr"/>
-                      <a:r>
-                        <a:rPr sz="1000">
-                          <a:solidFill>
-                            <a:srgbClr val="1A1A1A"/>
-                          </a:solidFill>
-                          <a:latin typeface="IPAGothic"/>
-                        </a:rPr>
-                        <a:t>7,900</a:t>
-                      </a:r>
-                    </a:p>
-                  </a:txBody>
-                  <a:tcPr>
-                    <a:solidFill>
-                      <a:srgbClr val="FFFFFF"/>
-                    </a:solidFill>
-                  </a:tcPr>
-                </a:tc>
-                <a:tc>
-                  <a:txBody>
-                    <a:bodyPr/>
-                    <a:lstStyle/>
-                    <a:p>
-                      <a:pPr algn="ctr"/>
-                      <a:r>
-                        <a:rPr sz="1000">
-                          <a:solidFill>
-                            <a:srgbClr val="1A1A1A"/>
-                          </a:solidFill>
-                          <a:latin typeface="IPAGothic"/>
-                        </a:rPr>
-                        <a:t>14,900</a:t>
-                      </a:r>
-                    </a:p>
-                  </a:txBody>
-                  <a:tcPr>
-                    <a:solidFill>
-                      <a:srgbClr val="FFFFFF"/>
-                    </a:solidFill>
-                  </a:tcPr>
-                </a:tc>
-                <a:tc>
-                  <a:txBody>
-                    <a:bodyPr/>
-                    <a:lstStyle/>
-                    <a:p>
-                      <a:pPr algn="ctr"/>
-                      <a:r>
-                        <a:rPr sz="1000">
-                          <a:solidFill>
-                            <a:srgbClr val="1A1A1A"/>
-                          </a:solidFill>
-                          <a:latin typeface="IPAGothic"/>
-                        </a:rPr>
-                        <a:t>32,900</a:t>
-                      </a:r>
-                    </a:p>
-                  </a:txBody>
-                  <a:tcPr>
-                    <a:solidFill>
-                      <a:srgbClr val="FFFFFF"/>
-                    </a:solidFill>
-                  </a:tcPr>
-                </a:tc>
-                <a:tc>
-                  <a:txBody>
-                    <a:bodyPr/>
-                    <a:lstStyle/>
-                    <a:p>
-                      <a:pPr algn="ctr"/>
-                      <a:r>
-                        <a:rPr sz="1000">
-                          <a:solidFill>
-                            <a:srgbClr val="1A1A1A"/>
-                          </a:solidFill>
-                          <a:latin typeface="IPAGothic"/>
-                        </a:rPr>
-                        <a:t>75,900</a:t>
-                      </a:r>
-                    </a:p>
-                  </a:txBody>
-                  <a:tcPr>
-                    <a:solidFill>
-                      <a:srgbClr val="FFFFFF"/>
                     </a:solidFill>
                   </a:tcPr>
                 </a:tc>
@@ -12246,373 +13533,30 @@
           </a:graphicData>
         </a:graphic>
       </p:graphicFrame>
-      <p:sp>
-        <p:nvSpPr>
-          <p:cNvPr id="7" name="Rectangle 6"/>
-          <p:cNvSpPr/>
-          <p:nvPr/>
-        </p:nvSpPr>
-        <p:spPr>
-          <a:xfrm>
-            <a:off x="7132320" y="3474720"/>
-            <a:ext cx="4754880" cy="347472"/>
-          </a:xfrm>
-          <a:prstGeom prst="rect">
-            <a:avLst/>
-          </a:prstGeom>
-          <a:solidFill>
-            <a:srgbClr val="2C4A3E"/>
-          </a:solidFill>
-          <a:ln>
-            <a:noFill/>
-          </a:ln>
-        </p:spPr>
-        <p:style>
-          <a:lnRef idx="1">
-            <a:schemeClr val="accent1"/>
-          </a:lnRef>
-          <a:fillRef idx="3">
-            <a:schemeClr val="accent1"/>
-          </a:fillRef>
-          <a:effectRef idx="2">
-            <a:schemeClr val="accent1"/>
-          </a:effectRef>
-          <a:fontRef idx="minor">
-            <a:schemeClr val="lt1"/>
-          </a:fontRef>
-        </p:style>
-        <p:txBody>
-          <a:bodyPr rtlCol="0" anchor="ctr"/>
-          <a:lstStyle/>
-          <a:p>
-            <a:pPr algn="ctr"/>
-          </a:p>
-        </p:txBody>
-      </p:sp>
-      <p:sp>
-        <p:nvSpPr>
-          <p:cNvPr id="8" name="TextBox 7"/>
-          <p:cNvSpPr txBox="1"/>
-          <p:nvPr/>
-        </p:nvSpPr>
-        <p:spPr>
-          <a:xfrm>
-            <a:off x="7223760" y="3511296"/>
-            <a:ext cx="4572000" cy="292608"/>
-          </a:xfrm>
-          <a:prstGeom prst="rect">
-            <a:avLst/>
-          </a:prstGeom>
-          <a:noFill/>
-        </p:spPr>
-        <p:txBody>
-          <a:bodyPr wrap="square">
-            <a:spAutoFit/>
-          </a:bodyPr>
-          <a:lstStyle/>
-          <a:p>
-            <a:pPr algn="l"/>
-            <a:r>
-              <a:rPr sz="1200" b="1" i="0">
-                <a:solidFill>
-                  <a:srgbClr val="FFFFFF"/>
-                </a:solidFill>
-                <a:latin typeface="IPAGothic"/>
-              </a:rPr>
-              <a:t>CFのポイント</a:t>
-            </a:r>
-          </a:p>
-        </p:txBody>
-      </p:sp>
-      <p:sp>
-        <p:nvSpPr>
-          <p:cNvPr id="9" name="TextBox 8"/>
-          <p:cNvSpPr txBox="1"/>
-          <p:nvPr/>
-        </p:nvSpPr>
-        <p:spPr>
-          <a:xfrm>
-            <a:off x="7223760" y="3858768"/>
-            <a:ext cx="4572000" cy="347472"/>
-          </a:xfrm>
-          <a:prstGeom prst="rect">
-            <a:avLst/>
-          </a:prstGeom>
-          <a:noFill/>
-        </p:spPr>
-        <p:txBody>
-          <a:bodyPr wrap="square">
-            <a:spAutoFit/>
-          </a:bodyPr>
-          <a:lstStyle/>
-          <a:p>
-            <a:pPr algn="l"/>
-            <a:r>
-              <a:rPr sz="1100" b="0" i="0">
-                <a:solidFill>
-                  <a:srgbClr val="1A1A1A"/>
-                </a:solidFill>
-                <a:latin typeface="IPAGothic"/>
-              </a:rPr>
-              <a:t>▸ 資金調達3,800万を起点にY1末で累計CF黒字転換（返済原資確保）</a:t>
-            </a:r>
-          </a:p>
-        </p:txBody>
-      </p:sp>
-      <p:sp>
-        <p:nvSpPr>
-          <p:cNvPr id="10" name="TextBox 9"/>
-          <p:cNvSpPr txBox="1"/>
-          <p:nvPr/>
-        </p:nvSpPr>
-        <p:spPr>
-          <a:xfrm>
-            <a:off x="7223760" y="4206240"/>
-            <a:ext cx="4572000" cy="347472"/>
-          </a:xfrm>
-          <a:prstGeom prst="rect">
-            <a:avLst/>
-          </a:prstGeom>
-          <a:noFill/>
-        </p:spPr>
-        <p:txBody>
-          <a:bodyPr wrap="square">
-            <a:spAutoFit/>
-          </a:bodyPr>
-          <a:lstStyle/>
-          <a:p>
-            <a:pPr algn="l"/>
-            <a:r>
-              <a:rPr sz="1100" b="0" i="0">
-                <a:solidFill>
-                  <a:srgbClr val="1A1A1A"/>
-                </a:solidFill>
-                <a:latin typeface="IPAGothic"/>
-              </a:rPr>
-              <a:t>▸ Y2: FC展開への投資5,000万は営業CF7,140万の範囲内でまかなえる</a:t>
-            </a:r>
-          </a:p>
-        </p:txBody>
-      </p:sp>
-      <p:sp>
-        <p:nvSpPr>
-          <p:cNvPr id="11" name="TextBox 10"/>
-          <p:cNvSpPr txBox="1"/>
-          <p:nvPr/>
-        </p:nvSpPr>
-        <p:spPr>
-          <a:xfrm>
-            <a:off x="7223760" y="4553712"/>
-            <a:ext cx="4572000" cy="347472"/>
-          </a:xfrm>
-          <a:prstGeom prst="rect">
-            <a:avLst/>
-          </a:prstGeom>
-          <a:noFill/>
-        </p:spPr>
-        <p:txBody>
-          <a:bodyPr wrap="square">
-            <a:spAutoFit/>
-          </a:bodyPr>
-          <a:lstStyle/>
-          <a:p>
-            <a:pPr algn="l"/>
-            <a:r>
-              <a:rPr sz="1100" b="0" i="0">
-                <a:solidFill>
-                  <a:srgbClr val="1A1A1A"/>
-                </a:solidFill>
-                <a:latin typeface="IPAGothic"/>
-              </a:rPr>
-              <a:t>▸ Y3以降: 投資超過分もFCロイヤルティ等のストック収益で補填、累計CFが急拡大</a:t>
-            </a:r>
-          </a:p>
-        </p:txBody>
-      </p:sp>
-      <p:sp>
-        <p:nvSpPr>
-          <p:cNvPr id="12" name="TextBox 11"/>
-          <p:cNvSpPr txBox="1"/>
-          <p:nvPr/>
-        </p:nvSpPr>
-        <p:spPr>
-          <a:xfrm>
-            <a:off x="7223760" y="4901184"/>
-            <a:ext cx="4572000" cy="347472"/>
-          </a:xfrm>
-          <a:prstGeom prst="rect">
-            <a:avLst/>
-          </a:prstGeom>
-          <a:noFill/>
-        </p:spPr>
-        <p:txBody>
-          <a:bodyPr wrap="square">
-            <a:spAutoFit/>
-          </a:bodyPr>
-          <a:lstStyle/>
-          <a:p>
-            <a:pPr algn="l"/>
-            <a:r>
-              <a:rPr sz="1100" b="0" i="0">
-                <a:solidFill>
-                  <a:srgbClr val="1A1A1A"/>
-                </a:solidFill>
-                <a:latin typeface="IPAGothic"/>
-              </a:rPr>
-              <a:t>▸ Y5末: 累計CF 7.5億円 → 配当・EXIT・追加投資の原資として十分な水準</a:t>
-            </a:r>
-          </a:p>
-        </p:txBody>
-      </p:sp>
-      <p:sp>
-        <p:nvSpPr>
-          <p:cNvPr id="13" name="Rectangle 12"/>
-          <p:cNvSpPr/>
-          <p:nvPr/>
-        </p:nvSpPr>
-        <p:spPr>
-          <a:xfrm>
-            <a:off x="274320" y="4389120"/>
-            <a:ext cx="6675120" cy="2194560"/>
-          </a:xfrm>
-          <a:prstGeom prst="rect">
-            <a:avLst/>
-          </a:prstGeom>
-          <a:solidFill>
-            <a:srgbClr val="F0EEE8"/>
-          </a:solidFill>
-          <a:ln>
-            <a:noFill/>
-          </a:ln>
-        </p:spPr>
-        <p:style>
-          <a:lnRef idx="1">
-            <a:schemeClr val="accent1"/>
-          </a:lnRef>
-          <a:fillRef idx="3">
-            <a:schemeClr val="accent1"/>
-          </a:fillRef>
-          <a:effectRef idx="2">
-            <a:schemeClr val="accent1"/>
-          </a:effectRef>
-          <a:fontRef idx="minor">
-            <a:schemeClr val="lt1"/>
-          </a:fontRef>
-        </p:style>
-        <p:txBody>
-          <a:bodyPr rtlCol="0" anchor="ctr"/>
-          <a:lstStyle/>
-          <a:p>
-            <a:pPr algn="ctr"/>
-          </a:p>
-        </p:txBody>
-      </p:sp>
-      <p:sp>
-        <p:nvSpPr>
-          <p:cNvPr id="14" name="TextBox 13"/>
-          <p:cNvSpPr txBox="1"/>
-          <p:nvPr/>
-        </p:nvSpPr>
-        <p:spPr>
-          <a:xfrm>
-            <a:off x="365760" y="4434840"/>
-            <a:ext cx="6492240" cy="365760"/>
-          </a:xfrm>
-          <a:prstGeom prst="rect">
-            <a:avLst/>
-          </a:prstGeom>
-          <a:noFill/>
-        </p:spPr>
-        <p:txBody>
-          <a:bodyPr wrap="square">
-            <a:spAutoFit/>
-          </a:bodyPr>
-          <a:lstStyle/>
-          <a:p>
-            <a:pPr algn="l"/>
-            <a:r>
-              <a:rPr sz="1100" b="1" i="0">
-                <a:solidFill>
-                  <a:srgbClr val="2C4A3E"/>
-                </a:solidFill>
-                <a:latin typeface="IPAGothic"/>
-              </a:rPr>
-              <a:t>■ Y1 月次CF イメージ（肉酒場然・稼働済み前提）</a:t>
-            </a:r>
-          </a:p>
-        </p:txBody>
-      </p:sp>
-      <p:sp>
-        <p:nvSpPr>
-          <p:cNvPr id="15" name="TextBox 14"/>
-          <p:cNvSpPr txBox="1"/>
-          <p:nvPr/>
-        </p:nvSpPr>
-        <p:spPr>
-          <a:xfrm>
-            <a:off x="365760" y="4846320"/>
-            <a:ext cx="6492240" cy="1645920"/>
-          </a:xfrm>
-          <a:prstGeom prst="rect">
-            <a:avLst/>
-          </a:prstGeom>
-          <a:noFill/>
-        </p:spPr>
-        <p:txBody>
-          <a:bodyPr wrap="square">
-            <a:spAutoFit/>
-          </a:bodyPr>
-          <a:lstStyle/>
-          <a:p>
-            <a:pPr algn="l"/>
-            <a:r>
-              <a:rPr sz="1050" b="0">
-                <a:solidFill>
-                  <a:srgbClr val="1A1A1A"/>
-                </a:solidFill>
-                <a:latin typeface="IPAGothic"/>
-              </a:rPr>
-              <a:t>月1〜3：肉酒場然のみ稼働 → 月次CF +100〜150万（立ち上げ費用除く）</a:t>
-            </a:r>
-          </a:p>
-          <a:p>
-            <a:pPr algn="l"/>
-            <a:r>
-              <a:rPr sz="1050" b="0">
-                <a:solidFill>
-                  <a:srgbClr val="1A1A1A"/>
-                </a:solidFill>
-                <a:latin typeface="IPAGothic"/>
-              </a:rPr>
-              <a:t>月4〜6：だし然 開業 → 月次CF +200〜280万（稼働率70%）</a:t>
-            </a:r>
-          </a:p>
-          <a:p>
-            <a:pPr algn="l"/>
-            <a:r>
-              <a:rPr sz="1050" b="0">
-                <a:solidFill>
-                  <a:srgbClr val="1A1A1A"/>
-                </a:solidFill>
-                <a:latin typeface="IPAGothic"/>
-              </a:rPr>
-              <a:t>月7〜：蕎麦然 開業 → 月次CF +350〜430万（3ブランド揃い踏み）</a:t>
-            </a:r>
-          </a:p>
-          <a:p>
-            <a:pPr algn="l"/>
-            <a:r>
-              <a:rPr sz="1050" b="0">
-                <a:solidFill>
-                  <a:srgbClr val="1A1A1A"/>
-                </a:solidFill>
-                <a:latin typeface="IPAGothic"/>
-              </a:rPr>
-              <a:t>Y1末時点：累計CF（資金調達後）約5,400万 → BEP到達</a:t>
-            </a:r>
-          </a:p>
-        </p:txBody>
-      </p:sp>
+      <p:pic>
+        <p:nvPicPr>
+          <p:cNvPr id="6" name="Picture 5" descr="image.png"/>
+          <p:cNvPicPr>
+            <a:picLocks noChangeAspect="1"/>
+          </p:cNvPicPr>
+          <p:nvPr/>
+        </p:nvPicPr>
+        <p:blipFill>
+          <a:blip r:embed="rId3"/>
+          <a:stretch>
+            <a:fillRect/>
+          </a:stretch>
+        </p:blipFill>
+        <p:spPr>
+          <a:xfrm>
+            <a:off x="274320" y="5303520"/>
+            <a:ext cx="11612880" cy="1280160"/>
+          </a:xfrm>
+          <a:prstGeom prst="rect">
+            <a:avLst/>
+          </a:prstGeom>
+        </p:spPr>
+      </p:pic>
     </p:spTree>
   </p:cSld>
   <p:clrMapOvr>
@@ -12712,7 +13656,7 @@
                 </a:solidFill>
                 <a:latin typeface="IPAGothic"/>
               </a:rPr>
-              <a:t>資金調達計画</a:t>
+              <a:t>キャッシュフロー計画</a:t>
             </a:r>
           </a:p>
         </p:txBody>
@@ -12741,243 +13685,41 @@
           </a:prstGeom>
         </p:spPr>
       </p:pic>
-      <p:sp>
-        <p:nvSpPr>
-          <p:cNvPr id="5" name="Rectangle 4"/>
-          <p:cNvSpPr/>
-          <p:nvPr/>
-        </p:nvSpPr>
+      <p:pic>
+        <p:nvPicPr>
+          <p:cNvPr id="5" name="Picture 4" descr="image.png"/>
+          <p:cNvPicPr>
+            <a:picLocks noChangeAspect="1"/>
+          </p:cNvPicPr>
+          <p:nvPr/>
+        </p:nvPicPr>
+        <p:blipFill>
+          <a:blip r:embed="rId3"/>
+          <a:stretch>
+            <a:fillRect/>
+          </a:stretch>
+        </p:blipFill>
         <p:spPr>
           <a:xfrm>
             <a:off x="274320" y="1005840"/>
-            <a:ext cx="4114800" cy="1188720"/>
-          </a:xfrm>
-          <a:prstGeom prst="rect">
-            <a:avLst/>
-          </a:prstGeom>
-          <a:solidFill>
-            <a:srgbClr val="2C4A3E"/>
-          </a:solidFill>
-          <a:ln>
-            <a:noFill/>
-          </a:ln>
-        </p:spPr>
-        <p:style>
-          <a:lnRef idx="1">
-            <a:schemeClr val="accent1"/>
-          </a:lnRef>
-          <a:fillRef idx="3">
-            <a:schemeClr val="accent1"/>
-          </a:fillRef>
-          <a:effectRef idx="2">
-            <a:schemeClr val="accent1"/>
-          </a:effectRef>
-          <a:fontRef idx="minor">
-            <a:schemeClr val="lt1"/>
-          </a:fontRef>
-        </p:style>
-        <p:txBody>
-          <a:bodyPr rtlCol="0" anchor="ctr"/>
-          <a:lstStyle/>
-          <a:p>
-            <a:pPr algn="ctr"/>
-          </a:p>
-        </p:txBody>
-      </p:sp>
-      <p:sp>
-        <p:nvSpPr>
-          <p:cNvPr id="6" name="TextBox 5"/>
-          <p:cNvSpPr txBox="1"/>
-          <p:nvPr/>
-        </p:nvSpPr>
-        <p:spPr>
-          <a:xfrm>
-            <a:off x="365760" y="1051560"/>
-            <a:ext cx="3931920" cy="365760"/>
-          </a:xfrm>
-          <a:prstGeom prst="rect">
-            <a:avLst/>
-          </a:prstGeom>
-          <a:noFill/>
-        </p:spPr>
-        <p:txBody>
-          <a:bodyPr wrap="square">
-            <a:spAutoFit/>
-          </a:bodyPr>
-          <a:lstStyle/>
-          <a:p>
-            <a:pPr algn="l"/>
-            <a:r>
-              <a:rPr sz="1300" b="0" i="0">
-                <a:solidFill>
-                  <a:srgbClr val="FFFFFF"/>
-                </a:solidFill>
-                <a:latin typeface="IPAGothic"/>
-              </a:rPr>
-              <a:t>第1回 調達目標</a:t>
-            </a:r>
-          </a:p>
-        </p:txBody>
-      </p:sp>
-      <p:sp>
-        <p:nvSpPr>
-          <p:cNvPr id="7" name="TextBox 6"/>
-          <p:cNvSpPr txBox="1"/>
-          <p:nvPr/>
-        </p:nvSpPr>
-        <p:spPr>
-          <a:xfrm>
-            <a:off x="365760" y="1417320"/>
-            <a:ext cx="3931920" cy="685800"/>
-          </a:xfrm>
-          <a:prstGeom prst="rect">
-            <a:avLst/>
-          </a:prstGeom>
-          <a:noFill/>
-        </p:spPr>
-        <p:txBody>
-          <a:bodyPr wrap="square">
-            <a:spAutoFit/>
-          </a:bodyPr>
-          <a:lstStyle/>
-          <a:p>
-            <a:pPr algn="ctr"/>
-            <a:r>
-              <a:rPr sz="3800" b="1" i="0">
-                <a:solidFill>
-                  <a:srgbClr val="C49A22"/>
-                </a:solidFill>
-                <a:latin typeface="IPAGothic"/>
-              </a:rPr>
-              <a:t>3,800万円</a:t>
-            </a:r>
-          </a:p>
-        </p:txBody>
-      </p:sp>
-      <p:sp>
-        <p:nvSpPr>
-          <p:cNvPr id="8" name="Rectangle 7"/>
-          <p:cNvSpPr/>
-          <p:nvPr/>
-        </p:nvSpPr>
-        <p:spPr>
-          <a:xfrm>
-            <a:off x="4663440" y="1005840"/>
-            <a:ext cx="7223760" cy="1188720"/>
-          </a:xfrm>
-          <a:prstGeom prst="rect">
-            <a:avLst/>
-          </a:prstGeom>
-          <a:solidFill>
-            <a:srgbClr val="F0EEE8"/>
-          </a:solidFill>
-          <a:ln>
-            <a:noFill/>
-          </a:ln>
-        </p:spPr>
-        <p:style>
-          <a:lnRef idx="1">
-            <a:schemeClr val="accent1"/>
-          </a:lnRef>
-          <a:fillRef idx="3">
-            <a:schemeClr val="accent1"/>
-          </a:fillRef>
-          <a:effectRef idx="2">
-            <a:schemeClr val="accent1"/>
-          </a:effectRef>
-          <a:fontRef idx="minor">
-            <a:schemeClr val="lt1"/>
-          </a:fontRef>
-        </p:style>
-        <p:txBody>
-          <a:bodyPr rtlCol="0" anchor="ctr"/>
-          <a:lstStyle/>
-          <a:p>
-            <a:pPr algn="ctr"/>
-          </a:p>
-        </p:txBody>
-      </p:sp>
-      <p:sp>
-        <p:nvSpPr>
-          <p:cNvPr id="9" name="TextBox 8"/>
-          <p:cNvSpPr txBox="1"/>
-          <p:nvPr/>
-        </p:nvSpPr>
-        <p:spPr>
-          <a:xfrm>
-            <a:off x="4754880" y="1234440"/>
-            <a:ext cx="7040880" cy="457200"/>
-          </a:xfrm>
-          <a:prstGeom prst="rect">
-            <a:avLst/>
-          </a:prstGeom>
-          <a:noFill/>
-        </p:spPr>
-        <p:txBody>
-          <a:bodyPr wrap="square">
-            <a:spAutoFit/>
-          </a:bodyPr>
-          <a:lstStyle/>
-          <a:p>
-            <a:pPr algn="l"/>
-            <a:r>
-              <a:rPr sz="1500" b="1" i="0">
-                <a:solidFill>
-                  <a:srgbClr val="2C4A3E"/>
-                </a:solidFill>
-                <a:latin typeface="IPAGothic"/>
-              </a:rPr>
-              <a:t>調達方法：日本政策金融公庫 ＋ エンジェル投資家</a:t>
-            </a:r>
-          </a:p>
-        </p:txBody>
-      </p:sp>
-      <p:sp>
-        <p:nvSpPr>
-          <p:cNvPr id="10" name="TextBox 9"/>
-          <p:cNvSpPr txBox="1"/>
-          <p:nvPr/>
-        </p:nvSpPr>
-        <p:spPr>
-          <a:xfrm>
-            <a:off x="4754880" y="1691640"/>
-            <a:ext cx="7040880" cy="365760"/>
-          </a:xfrm>
-          <a:prstGeom prst="rect">
-            <a:avLst/>
-          </a:prstGeom>
-          <a:noFill/>
-        </p:spPr>
-        <p:txBody>
-          <a:bodyPr wrap="square">
-            <a:spAutoFit/>
-          </a:bodyPr>
-          <a:lstStyle/>
-          <a:p>
-            <a:pPr algn="l"/>
-            <a:r>
-              <a:rPr sz="1100" b="0" i="0">
-                <a:solidFill>
-                  <a:srgbClr val="1A1A1A"/>
-                </a:solidFill>
-                <a:latin typeface="IPAGothic"/>
-              </a:rPr>
-              <a:t>第2回（Y2〜3）：1〜2億円  /  VC・事業会社提携  /  FC加速・関西展開</a:t>
-            </a:r>
-          </a:p>
-        </p:txBody>
-      </p:sp>
+            <a:ext cx="6858000" cy="3200400"/>
+          </a:xfrm>
+          <a:prstGeom prst="rect">
+            <a:avLst/>
+          </a:prstGeom>
+        </p:spPr>
+      </p:pic>
       <p:graphicFrame>
         <p:nvGraphicFramePr>
-          <p:cNvPr id="11" name="Table 10"/>
+          <p:cNvPr id="6" name="Table 5"/>
           <p:cNvGraphicFramePr>
             <a:graphicFrameLocks noGrp="1"/>
           </p:cNvGraphicFramePr>
           <p:nvPr/>
         </p:nvGraphicFramePr>
         <p:xfrm>
-          <a:off x="274320" y="2377440"/>
-          <a:ext cx="11612880" cy="2926080"/>
+          <a:off x="7132320" y="1005840"/>
+          <a:ext cx="4754876" cy="2286000"/>
         </p:xfrm>
         <a:graphic>
           <a:graphicData uri="http://schemas.openxmlformats.org/drawingml/2006/table">
@@ -12986,25 +13728,29 @@
                 <a:tableStyleId>{5C22544A-7EE6-4342-B048-85BDC9FD1C3A}</a:tableStyleId>
               </a:tblPr>
               <a:tblGrid>
-                <a:gridCol w="3870960"/>
-                <a:gridCol w="3870960"/>
-                <a:gridCol w="3870960"/>
+                <a:gridCol w="679268"/>
+                <a:gridCol w="679268"/>
+                <a:gridCol w="679268"/>
+                <a:gridCol w="679268"/>
+                <a:gridCol w="679268"/>
+                <a:gridCol w="679268"/>
+                <a:gridCol w="679268"/>
               </a:tblGrid>
-              <a:tr h="418011">
-                <a:tc>
-                  <a:txBody>
-                    <a:bodyPr/>
-                    <a:lstStyle/>
-                    <a:p>
-                      <a:pPr algn="ctr"/>
-                      <a:r>
-                        <a:rPr sz="1100" b="1">
+              <a:tr h="457200">
+                <a:tc>
+                  <a:txBody>
+                    <a:bodyPr/>
+                    <a:lstStyle/>
+                    <a:p>
+                      <a:pPr algn="ctr"/>
+                      <a:r>
+                        <a:rPr sz="1000" b="1">
                           <a:solidFill>
                             <a:srgbClr val="FFFFFF"/>
                           </a:solidFill>
                           <a:latin typeface="IPAGothic"/>
                         </a:rPr>
-                        <a:t>用途</a:t>
+                        <a:t/>
                       </a:r>
                     </a:p>
                   </a:txBody>
@@ -13021,13 +13767,13 @@
                     <a:p>
                       <a:pPr algn="ctr"/>
                       <a:r>
-                        <a:rPr sz="1100" b="1">
+                        <a:rPr sz="1000" b="1">
                           <a:solidFill>
                             <a:srgbClr val="FFFFFF"/>
                           </a:solidFill>
                           <a:latin typeface="IPAGothic"/>
                         </a:rPr>
-                        <a:t>金額</a:t>
+                        <a:t>調達時</a:t>
                       </a:r>
                     </a:p>
                   </a:txBody>
@@ -13044,13 +13790,13 @@
                     <a:p>
                       <a:pPr algn="ctr"/>
                       <a:r>
-                        <a:rPr sz="1100" b="1">
+                        <a:rPr sz="1000" b="1">
                           <a:solidFill>
                             <a:srgbClr val="FFFFFF"/>
                           </a:solidFill>
                           <a:latin typeface="IPAGothic"/>
                         </a:rPr>
-                        <a:t>内訳</a:t>
+                        <a:t>Y1末</a:t>
                       </a:r>
                     </a:p>
                   </a:txBody>
@@ -13060,22 +13806,114 @@
                     </a:solidFill>
                   </a:tcPr>
                 </a:tc>
+                <a:tc>
+                  <a:txBody>
+                    <a:bodyPr/>
+                    <a:lstStyle/>
+                    <a:p>
+                      <a:pPr algn="ctr"/>
+                      <a:r>
+                        <a:rPr sz="1000" b="1">
+                          <a:solidFill>
+                            <a:srgbClr val="FFFFFF"/>
+                          </a:solidFill>
+                          <a:latin typeface="IPAGothic"/>
+                        </a:rPr>
+                        <a:t>Y2末</a:t>
+                      </a:r>
+                    </a:p>
+                  </a:txBody>
+                  <a:tcPr>
+                    <a:solidFill>
+                      <a:srgbClr val="2C4A3E"/>
+                    </a:solidFill>
+                  </a:tcPr>
+                </a:tc>
+                <a:tc>
+                  <a:txBody>
+                    <a:bodyPr/>
+                    <a:lstStyle/>
+                    <a:p>
+                      <a:pPr algn="ctr"/>
+                      <a:r>
+                        <a:rPr sz="1000" b="1">
+                          <a:solidFill>
+                            <a:srgbClr val="FFFFFF"/>
+                          </a:solidFill>
+                          <a:latin typeface="IPAGothic"/>
+                        </a:rPr>
+                        <a:t>Y3末</a:t>
+                      </a:r>
+                    </a:p>
+                  </a:txBody>
+                  <a:tcPr>
+                    <a:solidFill>
+                      <a:srgbClr val="2C4A3E"/>
+                    </a:solidFill>
+                  </a:tcPr>
+                </a:tc>
+                <a:tc>
+                  <a:txBody>
+                    <a:bodyPr/>
+                    <a:lstStyle/>
+                    <a:p>
+                      <a:pPr algn="ctr"/>
+                      <a:r>
+                        <a:rPr sz="1000" b="1">
+                          <a:solidFill>
+                            <a:srgbClr val="FFFFFF"/>
+                          </a:solidFill>
+                          <a:latin typeface="IPAGothic"/>
+                        </a:rPr>
+                        <a:t>Y4末</a:t>
+                      </a:r>
+                    </a:p>
+                  </a:txBody>
+                  <a:tcPr>
+                    <a:solidFill>
+                      <a:srgbClr val="2C4A3E"/>
+                    </a:solidFill>
+                  </a:tcPr>
+                </a:tc>
+                <a:tc>
+                  <a:txBody>
+                    <a:bodyPr/>
+                    <a:lstStyle/>
+                    <a:p>
+                      <a:pPr algn="ctr"/>
+                      <a:r>
+                        <a:rPr sz="1000" b="1">
+                          <a:solidFill>
+                            <a:srgbClr val="FFFFFF"/>
+                          </a:solidFill>
+                          <a:latin typeface="IPAGothic"/>
+                        </a:rPr>
+                        <a:t>Y5末</a:t>
+                      </a:r>
+                    </a:p>
+                  </a:txBody>
+                  <a:tcPr>
+                    <a:solidFill>
+                      <a:srgbClr val="2C4A3E"/>
+                    </a:solidFill>
+                  </a:tcPr>
+                </a:tc>
               </a:tr>
-              <a:tr h="418011">
-                <a:tc>
-                  <a:txBody>
-                    <a:bodyPr/>
-                    <a:lstStyle/>
-                    <a:p>
-                      <a:pPr algn="ctr"/>
-                      <a:r>
-                        <a:rPr sz="1100">
+              <a:tr h="457200">
+                <a:tc>
+                  <a:txBody>
+                    <a:bodyPr/>
+                    <a:lstStyle/>
+                    <a:p>
+                      <a:pPr algn="ctr"/>
+                      <a:r>
+                        <a:rPr sz="1000">
                           <a:solidFill>
                             <a:srgbClr val="1A1A1A"/>
                           </a:solidFill>
                           <a:latin typeface="IPAGothic"/>
                         </a:rPr>
-                        <a:t>だし 然 1号店 開業費</a:t>
+                        <a:t>営業CF（万円）</a:t>
                       </a:r>
                     </a:p>
                   </a:txBody>
@@ -13092,13 +13930,13 @@
                     <a:p>
                       <a:pPr algn="ctr"/>
                       <a:r>
-                        <a:rPr sz="1100">
+                        <a:rPr sz="1000">
                           <a:solidFill>
                             <a:srgbClr val="1A1A1A"/>
                           </a:solidFill>
                           <a:latin typeface="IPAGothic"/>
                         </a:rPr>
-                        <a:t>2,000万円</a:t>
+                        <a:t>─</a:t>
                       </a:r>
                     </a:p>
                   </a:txBody>
@@ -13115,13 +13953,13 @@
                     <a:p>
                       <a:pPr algn="ctr"/>
                       <a:r>
-                        <a:rPr sz="1100">
+                        <a:rPr sz="1000">
                           <a:solidFill>
                             <a:srgbClr val="1A1A1A"/>
                           </a:solidFill>
                           <a:latin typeface="IPAGothic"/>
                         </a:rPr>
-                        <a:t>内装900万＋厨房450万＋敷金（60万×3ヶ月）＋運転資金</a:t>
+                        <a:t>+2,600</a:t>
                       </a:r>
                     </a:p>
                   </a:txBody>
@@ -13131,22 +13969,114 @@
                     </a:solidFill>
                   </a:tcPr>
                 </a:tc>
+                <a:tc>
+                  <a:txBody>
+                    <a:bodyPr/>
+                    <a:lstStyle/>
+                    <a:p>
+                      <a:pPr algn="ctr"/>
+                      <a:r>
+                        <a:rPr sz="1000">
+                          <a:solidFill>
+                            <a:srgbClr val="1A1A1A"/>
+                          </a:solidFill>
+                          <a:latin typeface="IPAGothic"/>
+                        </a:rPr>
+                        <a:t>+7,500</a:t>
+                      </a:r>
+                    </a:p>
+                  </a:txBody>
+                  <a:tcPr>
+                    <a:solidFill>
+                      <a:srgbClr val="F0EEE8"/>
+                    </a:solidFill>
+                  </a:tcPr>
+                </a:tc>
+                <a:tc>
+                  <a:txBody>
+                    <a:bodyPr/>
+                    <a:lstStyle/>
+                    <a:p>
+                      <a:pPr algn="ctr"/>
+                      <a:r>
+                        <a:rPr sz="1000">
+                          <a:solidFill>
+                            <a:srgbClr val="1A1A1A"/>
+                          </a:solidFill>
+                          <a:latin typeface="IPAGothic"/>
+                        </a:rPr>
+                        <a:t>+15,000</a:t>
+                      </a:r>
+                    </a:p>
+                  </a:txBody>
+                  <a:tcPr>
+                    <a:solidFill>
+                      <a:srgbClr val="F0EEE8"/>
+                    </a:solidFill>
+                  </a:tcPr>
+                </a:tc>
+                <a:tc>
+                  <a:txBody>
+                    <a:bodyPr/>
+                    <a:lstStyle/>
+                    <a:p>
+                      <a:pPr algn="ctr"/>
+                      <a:r>
+                        <a:rPr sz="1000">
+                          <a:solidFill>
+                            <a:srgbClr val="1A1A1A"/>
+                          </a:solidFill>
+                          <a:latin typeface="IPAGothic"/>
+                        </a:rPr>
+                        <a:t>+28,000</a:t>
+                      </a:r>
+                    </a:p>
+                  </a:txBody>
+                  <a:tcPr>
+                    <a:solidFill>
+                      <a:srgbClr val="F0EEE8"/>
+                    </a:solidFill>
+                  </a:tcPr>
+                </a:tc>
+                <a:tc>
+                  <a:txBody>
+                    <a:bodyPr/>
+                    <a:lstStyle/>
+                    <a:p>
+                      <a:pPr algn="ctr"/>
+                      <a:r>
+                        <a:rPr sz="1000">
+                          <a:solidFill>
+                            <a:srgbClr val="1A1A1A"/>
+                          </a:solidFill>
+                          <a:latin typeface="IPAGothic"/>
+                        </a:rPr>
+                        <a:t>+48,000</a:t>
+                      </a:r>
+                    </a:p>
+                  </a:txBody>
+                  <a:tcPr>
+                    <a:solidFill>
+                      <a:srgbClr val="F0EEE8"/>
+                    </a:solidFill>
+                  </a:tcPr>
+                </a:tc>
               </a:tr>
-              <a:tr h="418011">
-                <a:tc>
-                  <a:txBody>
-                    <a:bodyPr/>
-                    <a:lstStyle/>
-                    <a:p>
-                      <a:pPr algn="ctr"/>
-                      <a:r>
-                        <a:rPr sz="1100">
+              <a:tr h="457200">
+                <a:tc>
+                  <a:txBody>
+                    <a:bodyPr/>
+                    <a:lstStyle/>
+                    <a:p>
+                      <a:pPr algn="ctr"/>
+                      <a:r>
+                        <a:rPr sz="1000">
                           <a:solidFill>
                             <a:srgbClr val="1A1A1A"/>
                           </a:solidFill>
                           <a:latin typeface="IPAGothic"/>
                         </a:rPr>
-                        <a:t>蕎麦 然 1号店 開業費（8坪）</a:t>
+                        <a:t>投資CF（万円）</a:t>
                       </a:r>
                     </a:p>
                   </a:txBody>
@@ -13163,13 +14093,13 @@
                     <a:p>
                       <a:pPr algn="ctr"/>
                       <a:r>
-                        <a:rPr sz="1100">
+                        <a:rPr sz="1000">
                           <a:solidFill>
                             <a:srgbClr val="1A1A1A"/>
                           </a:solidFill>
                           <a:latin typeface="IPAGothic"/>
                         </a:rPr>
-                        <a:t>800万円</a:t>
+                        <a:t>▲3,800</a:t>
                       </a:r>
                     </a:p>
                   </a:txBody>
@@ -13186,13 +14116,13 @@
                     <a:p>
                       <a:pPr algn="ctr"/>
                       <a:r>
-                        <a:rPr sz="1100">
+                        <a:rPr sz="1000">
                           <a:solidFill>
                             <a:srgbClr val="1A1A1A"/>
                           </a:solidFill>
                           <a:latin typeface="IPAGothic"/>
                         </a:rPr>
-                        <a:t>内装250万＋設備200万＋敷金（45万×6ヶ月）＋運転資金</a:t>
+                        <a:t>▲1,000</a:t>
                       </a:r>
                     </a:p>
                   </a:txBody>
@@ -13202,22 +14132,114 @@
                     </a:solidFill>
                   </a:tcPr>
                 </a:tc>
+                <a:tc>
+                  <a:txBody>
+                    <a:bodyPr/>
+                    <a:lstStyle/>
+                    <a:p>
+                      <a:pPr algn="ctr"/>
+                      <a:r>
+                        <a:rPr sz="1000">
+                          <a:solidFill>
+                            <a:srgbClr val="1A1A1A"/>
+                          </a:solidFill>
+                          <a:latin typeface="IPAGothic"/>
+                        </a:rPr>
+                        <a:t>▲5,000</a:t>
+                      </a:r>
+                    </a:p>
+                  </a:txBody>
+                  <a:tcPr>
+                    <a:solidFill>
+                      <a:srgbClr val="FFFFFF"/>
+                    </a:solidFill>
+                  </a:tcPr>
+                </a:tc>
+                <a:tc>
+                  <a:txBody>
+                    <a:bodyPr/>
+                    <a:lstStyle/>
+                    <a:p>
+                      <a:pPr algn="ctr"/>
+                      <a:r>
+                        <a:rPr sz="1000">
+                          <a:solidFill>
+                            <a:srgbClr val="1A1A1A"/>
+                          </a:solidFill>
+                          <a:latin typeface="IPAGothic"/>
+                        </a:rPr>
+                        <a:t>▲8,000</a:t>
+                      </a:r>
+                    </a:p>
+                  </a:txBody>
+                  <a:tcPr>
+                    <a:solidFill>
+                      <a:srgbClr val="FFFFFF"/>
+                    </a:solidFill>
+                  </a:tcPr>
+                </a:tc>
+                <a:tc>
+                  <a:txBody>
+                    <a:bodyPr/>
+                    <a:lstStyle/>
+                    <a:p>
+                      <a:pPr algn="ctr"/>
+                      <a:r>
+                        <a:rPr sz="1000">
+                          <a:solidFill>
+                            <a:srgbClr val="1A1A1A"/>
+                          </a:solidFill>
+                          <a:latin typeface="IPAGothic"/>
+                        </a:rPr>
+                        <a:t>▲10,000</a:t>
+                      </a:r>
+                    </a:p>
+                  </a:txBody>
+                  <a:tcPr>
+                    <a:solidFill>
+                      <a:srgbClr val="FFFFFF"/>
+                    </a:solidFill>
+                  </a:tcPr>
+                </a:tc>
+                <a:tc>
+                  <a:txBody>
+                    <a:bodyPr/>
+                    <a:lstStyle/>
+                    <a:p>
+                      <a:pPr algn="ctr"/>
+                      <a:r>
+                        <a:rPr sz="1000">
+                          <a:solidFill>
+                            <a:srgbClr val="1A1A1A"/>
+                          </a:solidFill>
+                          <a:latin typeface="IPAGothic"/>
+                        </a:rPr>
+                        <a:t>▲5,000</a:t>
+                      </a:r>
+                    </a:p>
+                  </a:txBody>
+                  <a:tcPr>
+                    <a:solidFill>
+                      <a:srgbClr val="FFFFFF"/>
+                    </a:solidFill>
+                  </a:tcPr>
+                </a:tc>
               </a:tr>
-              <a:tr h="418011">
-                <a:tc>
-                  <a:txBody>
-                    <a:bodyPr/>
-                    <a:lstStyle/>
-                    <a:p>
-                      <a:pPr algn="ctr"/>
-                      <a:r>
-                        <a:rPr sz="1100">
+              <a:tr h="457200">
+                <a:tc>
+                  <a:txBody>
+                    <a:bodyPr/>
+                    <a:lstStyle/>
+                    <a:p>
+                      <a:pPr algn="ctr"/>
+                      <a:r>
+                        <a:rPr sz="1000">
                           <a:solidFill>
                             <a:srgbClr val="1A1A1A"/>
                           </a:solidFill>
                           <a:latin typeface="IPAGothic"/>
                         </a:rPr>
-                        <a:t>SNSコンサル・スタートダッシュ</a:t>
+                        <a:t>純CF（万円）</a:t>
                       </a:r>
                     </a:p>
                   </a:txBody>
@@ -13234,13 +14256,13 @@
                     <a:p>
                       <a:pPr algn="ctr"/>
                       <a:r>
-                        <a:rPr sz="1100">
+                        <a:rPr sz="1000">
                           <a:solidFill>
                             <a:srgbClr val="1A1A1A"/>
                           </a:solidFill>
                           <a:latin typeface="IPAGothic"/>
                         </a:rPr>
-                        <a:t>300万円</a:t>
+                        <a:t>+3,800</a:t>
                       </a:r>
                     </a:p>
                   </a:txBody>
@@ -13257,13 +14279,13 @@
                     <a:p>
                       <a:pPr algn="ctr"/>
                       <a:r>
-                        <a:rPr sz="1100">
+                        <a:rPr sz="1000">
                           <a:solidFill>
                             <a:srgbClr val="1A1A1A"/>
                           </a:solidFill>
                           <a:latin typeface="IPAGothic"/>
                         </a:rPr>
-                        <a:t>外部コンサル起用・開業前3〜6ヶ月集中投資</a:t>
+                        <a:t>+1,600</a:t>
                       </a:r>
                     </a:p>
                   </a:txBody>
@@ -13273,22 +14295,114 @@
                     </a:solidFill>
                   </a:tcPr>
                 </a:tc>
+                <a:tc>
+                  <a:txBody>
+                    <a:bodyPr/>
+                    <a:lstStyle/>
+                    <a:p>
+                      <a:pPr algn="ctr"/>
+                      <a:r>
+                        <a:rPr sz="1000">
+                          <a:solidFill>
+                            <a:srgbClr val="1A1A1A"/>
+                          </a:solidFill>
+                          <a:latin typeface="IPAGothic"/>
+                        </a:rPr>
+                        <a:t>+2,500</a:t>
+                      </a:r>
+                    </a:p>
+                  </a:txBody>
+                  <a:tcPr>
+                    <a:solidFill>
+                      <a:srgbClr val="F0EEE8"/>
+                    </a:solidFill>
+                  </a:tcPr>
+                </a:tc>
+                <a:tc>
+                  <a:txBody>
+                    <a:bodyPr/>
+                    <a:lstStyle/>
+                    <a:p>
+                      <a:pPr algn="ctr"/>
+                      <a:r>
+                        <a:rPr sz="1000">
+                          <a:solidFill>
+                            <a:srgbClr val="1A1A1A"/>
+                          </a:solidFill>
+                          <a:latin typeface="IPAGothic"/>
+                        </a:rPr>
+                        <a:t>+7,000</a:t>
+                      </a:r>
+                    </a:p>
+                  </a:txBody>
+                  <a:tcPr>
+                    <a:solidFill>
+                      <a:srgbClr val="F0EEE8"/>
+                    </a:solidFill>
+                  </a:tcPr>
+                </a:tc>
+                <a:tc>
+                  <a:txBody>
+                    <a:bodyPr/>
+                    <a:lstStyle/>
+                    <a:p>
+                      <a:pPr algn="ctr"/>
+                      <a:r>
+                        <a:rPr sz="1000">
+                          <a:solidFill>
+                            <a:srgbClr val="1A1A1A"/>
+                          </a:solidFill>
+                          <a:latin typeface="IPAGothic"/>
+                        </a:rPr>
+                        <a:t>+18,000</a:t>
+                      </a:r>
+                    </a:p>
+                  </a:txBody>
+                  <a:tcPr>
+                    <a:solidFill>
+                      <a:srgbClr val="F0EEE8"/>
+                    </a:solidFill>
+                  </a:tcPr>
+                </a:tc>
+                <a:tc>
+                  <a:txBody>
+                    <a:bodyPr/>
+                    <a:lstStyle/>
+                    <a:p>
+                      <a:pPr algn="ctr"/>
+                      <a:r>
+                        <a:rPr sz="1000">
+                          <a:solidFill>
+                            <a:srgbClr val="1A1A1A"/>
+                          </a:solidFill>
+                          <a:latin typeface="IPAGothic"/>
+                        </a:rPr>
+                        <a:t>+43,000</a:t>
+                      </a:r>
+                    </a:p>
+                  </a:txBody>
+                  <a:tcPr>
+                    <a:solidFill>
+                      <a:srgbClr val="F0EEE8"/>
+                    </a:solidFill>
+                  </a:tcPr>
+                </a:tc>
               </a:tr>
-              <a:tr h="418011">
-                <a:tc>
-                  <a:txBody>
-                    <a:bodyPr/>
-                    <a:lstStyle/>
-                    <a:p>
-                      <a:pPr algn="ctr"/>
-                      <a:r>
-                        <a:rPr sz="1100">
+              <a:tr h="457200">
+                <a:tc>
+                  <a:txBody>
+                    <a:bodyPr/>
+                    <a:lstStyle/>
+                    <a:p>
+                      <a:pPr algn="ctr"/>
+                      <a:r>
+                        <a:rPr sz="1000">
                           <a:solidFill>
                             <a:srgbClr val="1A1A1A"/>
                           </a:solidFill>
                           <a:latin typeface="IPAGothic"/>
                         </a:rPr>
-                        <a:t>人材採用・研修費</a:t>
+                        <a:t>累計CF（万円）</a:t>
                       </a:r>
                     </a:p>
                   </a:txBody>
@@ -13305,13 +14419,13 @@
                     <a:p>
                       <a:pPr algn="ctr"/>
                       <a:r>
-                        <a:rPr sz="1100">
+                        <a:rPr sz="1000">
                           <a:solidFill>
                             <a:srgbClr val="1A1A1A"/>
                           </a:solidFill>
                           <a:latin typeface="IPAGothic"/>
                         </a:rPr>
-                        <a:t>300万円</a:t>
+                        <a:t>3,800</a:t>
                       </a:r>
                     </a:p>
                   </a:txBody>
@@ -13328,13 +14442,13 @@
                     <a:p>
                       <a:pPr algn="ctr"/>
                       <a:r>
-                        <a:rPr sz="1100">
+                        <a:rPr sz="1000">
                           <a:solidFill>
                             <a:srgbClr val="1A1A1A"/>
                           </a:solidFill>
                           <a:latin typeface="IPAGothic"/>
                         </a:rPr>
-                        <a:t>店長・料理長採用・マニュアル・研修体制構築</a:t>
+                        <a:t>5,400</a:t>
                       </a:r>
                     </a:p>
                   </a:txBody>
@@ -13344,139 +14458,89 @@
                     </a:solidFill>
                   </a:tcPr>
                 </a:tc>
-              </a:tr>
-              <a:tr h="418011">
-                <a:tc>
-                  <a:txBody>
-                    <a:bodyPr/>
-                    <a:lstStyle/>
-                    <a:p>
-                      <a:pPr algn="ctr"/>
-                      <a:r>
-                        <a:rPr sz="1100">
+                <a:tc>
+                  <a:txBody>
+                    <a:bodyPr/>
+                    <a:lstStyle/>
+                    <a:p>
+                      <a:pPr algn="ctr"/>
+                      <a:r>
+                        <a:rPr sz="1000">
                           <a:solidFill>
                             <a:srgbClr val="1A1A1A"/>
                           </a:solidFill>
                           <a:latin typeface="IPAGothic"/>
                         </a:rPr>
-                        <a:t>運転資金・予備費</a:t>
-                      </a:r>
-                    </a:p>
-                  </a:txBody>
-                  <a:tcPr>
-                    <a:solidFill>
-                      <a:srgbClr val="F0EEE8"/>
-                    </a:solidFill>
-                  </a:tcPr>
-                </a:tc>
-                <a:tc>
-                  <a:txBody>
-                    <a:bodyPr/>
-                    <a:lstStyle/>
-                    <a:p>
-                      <a:pPr algn="ctr"/>
-                      <a:r>
-                        <a:rPr sz="1100">
+                        <a:t>7,900</a:t>
+                      </a:r>
+                    </a:p>
+                  </a:txBody>
+                  <a:tcPr>
+                    <a:solidFill>
+                      <a:srgbClr val="FFFFFF"/>
+                    </a:solidFill>
+                  </a:tcPr>
+                </a:tc>
+                <a:tc>
+                  <a:txBody>
+                    <a:bodyPr/>
+                    <a:lstStyle/>
+                    <a:p>
+                      <a:pPr algn="ctr"/>
+                      <a:r>
+                        <a:rPr sz="1000">
                           <a:solidFill>
                             <a:srgbClr val="1A1A1A"/>
                           </a:solidFill>
                           <a:latin typeface="IPAGothic"/>
                         </a:rPr>
-                        <a:t>400万円</a:t>
-                      </a:r>
-                    </a:p>
-                  </a:txBody>
-                  <a:tcPr>
-                    <a:solidFill>
-                      <a:srgbClr val="F0EEE8"/>
-                    </a:solidFill>
-                  </a:tcPr>
-                </a:tc>
-                <a:tc>
-                  <a:txBody>
-                    <a:bodyPr/>
-                    <a:lstStyle/>
-                    <a:p>
-                      <a:pPr algn="ctr"/>
-                      <a:r>
-                        <a:rPr sz="1100">
+                        <a:t>14,900</a:t>
+                      </a:r>
+                    </a:p>
+                  </a:txBody>
+                  <a:tcPr>
+                    <a:solidFill>
+                      <a:srgbClr val="FFFFFF"/>
+                    </a:solidFill>
+                  </a:tcPr>
+                </a:tc>
+                <a:tc>
+                  <a:txBody>
+                    <a:bodyPr/>
+                    <a:lstStyle/>
+                    <a:p>
+                      <a:pPr algn="ctr"/>
+                      <a:r>
+                        <a:rPr sz="1000">
                           <a:solidFill>
                             <a:srgbClr val="1A1A1A"/>
                           </a:solidFill>
                           <a:latin typeface="IPAGothic"/>
                         </a:rPr>
-                        <a:t>グループ管理・広告・オープン販促・予備</a:t>
-                      </a:r>
-                    </a:p>
-                  </a:txBody>
-                  <a:tcPr>
-                    <a:solidFill>
-                      <a:srgbClr val="F0EEE8"/>
-                    </a:solidFill>
-                  </a:tcPr>
-                </a:tc>
-              </a:tr>
-              <a:tr h="418014">
-                <a:tc>
-                  <a:txBody>
-                    <a:bodyPr/>
-                    <a:lstStyle/>
-                    <a:p>
-                      <a:pPr algn="ctr"/>
-                      <a:r>
-                        <a:rPr sz="1100">
+                        <a:t>32,900</a:t>
+                      </a:r>
+                    </a:p>
+                  </a:txBody>
+                  <a:tcPr>
+                    <a:solidFill>
+                      <a:srgbClr val="FFFFFF"/>
+                    </a:solidFill>
+                  </a:tcPr>
+                </a:tc>
+                <a:tc>
+                  <a:txBody>
+                    <a:bodyPr/>
+                    <a:lstStyle/>
+                    <a:p>
+                      <a:pPr algn="ctr"/>
+                      <a:r>
+                        <a:rPr sz="1000">
                           <a:solidFill>
                             <a:srgbClr val="1A1A1A"/>
                           </a:solidFill>
                           <a:latin typeface="IPAGothic"/>
                         </a:rPr>
-                        <a:t>合計</a:t>
-                      </a:r>
-                    </a:p>
-                  </a:txBody>
-                  <a:tcPr>
-                    <a:solidFill>
-                      <a:srgbClr val="FFFFFF"/>
-                    </a:solidFill>
-                  </a:tcPr>
-                </a:tc>
-                <a:tc>
-                  <a:txBody>
-                    <a:bodyPr/>
-                    <a:lstStyle/>
-                    <a:p>
-                      <a:pPr algn="ctr"/>
-                      <a:r>
-                        <a:rPr sz="1100">
-                          <a:solidFill>
-                            <a:srgbClr val="1A1A1A"/>
-                          </a:solidFill>
-                          <a:latin typeface="IPAGothic"/>
-                        </a:rPr>
-                        <a:t>3,800万円</a:t>
-                      </a:r>
-                    </a:p>
-                  </a:txBody>
-                  <a:tcPr>
-                    <a:solidFill>
-                      <a:srgbClr val="FFFFFF"/>
-                    </a:solidFill>
-                  </a:tcPr>
-                </a:tc>
-                <a:tc>
-                  <a:txBody>
-                    <a:bodyPr/>
-                    <a:lstStyle/>
-                    <a:p>
-                      <a:pPr algn="ctr"/>
-                      <a:r>
-                        <a:rPr sz="1100">
-                          <a:solidFill>
-                            <a:srgbClr val="1A1A1A"/>
-                          </a:solidFill>
-                          <a:latin typeface="IPAGothic"/>
-                        </a:rPr>
-                        <a:t/>
+                        <a:t>75,900</a:t>
                       </a:r>
                     </a:p>
                   </a:txBody>
@@ -13493,14 +14557,57 @@
       </p:graphicFrame>
       <p:sp>
         <p:nvSpPr>
-          <p:cNvPr id="12" name="TextBox 11"/>
+          <p:cNvPr id="7" name="Rectangle 6"/>
+          <p:cNvSpPr/>
+          <p:nvPr/>
+        </p:nvSpPr>
+        <p:spPr>
+          <a:xfrm>
+            <a:off x="7132320" y="3474720"/>
+            <a:ext cx="4754880" cy="347472"/>
+          </a:xfrm>
+          <a:prstGeom prst="rect">
+            <a:avLst/>
+          </a:prstGeom>
+          <a:solidFill>
+            <a:srgbClr val="2C4A3E"/>
+          </a:solidFill>
+          <a:ln>
+            <a:noFill/>
+          </a:ln>
+        </p:spPr>
+        <p:style>
+          <a:lnRef idx="1">
+            <a:schemeClr val="accent1"/>
+          </a:lnRef>
+          <a:fillRef idx="3">
+            <a:schemeClr val="accent1"/>
+          </a:fillRef>
+          <a:effectRef idx="2">
+            <a:schemeClr val="accent1"/>
+          </a:effectRef>
+          <a:fontRef idx="minor">
+            <a:schemeClr val="lt1"/>
+          </a:fontRef>
+        </p:style>
+        <p:txBody>
+          <a:bodyPr rtlCol="0" anchor="ctr"/>
+          <a:lstStyle/>
+          <a:p>
+            <a:pPr algn="ctr"/>
+          </a:p>
+        </p:txBody>
+      </p:sp>
+      <p:sp>
+        <p:nvSpPr>
+          <p:cNvPr id="8" name="TextBox 7"/>
           <p:cNvSpPr txBox="1"/>
           <p:nvPr/>
         </p:nvSpPr>
         <p:spPr>
           <a:xfrm>
-            <a:off x="274320" y="5120640"/>
-            <a:ext cx="11612880" cy="1463040"/>
+            <a:off x="7223760" y="3511296"/>
+            <a:ext cx="4572000" cy="292608"/>
           </a:xfrm>
           <a:prstGeom prst="rect">
             <a:avLst/>
@@ -13515,61 +14622,302 @@
           <a:p>
             <a:pPr algn="l"/>
             <a:r>
-              <a:rPr sz="1100" b="0">
+              <a:rPr sz="1200" b="1" i="0">
+                <a:solidFill>
+                  <a:srgbClr val="FFFFFF"/>
+                </a:solidFill>
+                <a:latin typeface="IPAGothic"/>
+              </a:rPr>
+              <a:t>CFのポイント</a:t>
+            </a:r>
+          </a:p>
+        </p:txBody>
+      </p:sp>
+      <p:sp>
+        <p:nvSpPr>
+          <p:cNvPr id="9" name="TextBox 8"/>
+          <p:cNvSpPr txBox="1"/>
+          <p:nvPr/>
+        </p:nvSpPr>
+        <p:spPr>
+          <a:xfrm>
+            <a:off x="7223760" y="3858768"/>
+            <a:ext cx="4572000" cy="347472"/>
+          </a:xfrm>
+          <a:prstGeom prst="rect">
+            <a:avLst/>
+          </a:prstGeom>
+          <a:noFill/>
+        </p:spPr>
+        <p:txBody>
+          <a:bodyPr wrap="square">
+            <a:spAutoFit/>
+          </a:bodyPr>
+          <a:lstStyle/>
+          <a:p>
+            <a:pPr algn="l"/>
+            <a:r>
+              <a:rPr sz="1100" b="0" i="0">
                 <a:solidFill>
                   <a:srgbClr val="1A1A1A"/>
                 </a:solidFill>
                 <a:latin typeface="IPAGothic"/>
               </a:rPr>
-              <a:t>■ 投資家へのリターンイメージ</a:t>
-            </a:r>
-          </a:p>
+              <a:t>▸ 資金調達3,800万を起点にY1末で累計CF黒字転換（返済原資確保）</a:t>
+            </a:r>
+          </a:p>
+        </p:txBody>
+      </p:sp>
+      <p:sp>
+        <p:nvSpPr>
+          <p:cNvPr id="10" name="TextBox 9"/>
+          <p:cNvSpPr txBox="1"/>
+          <p:nvPr/>
+        </p:nvSpPr>
+        <p:spPr>
+          <a:xfrm>
+            <a:off x="7223760" y="4206240"/>
+            <a:ext cx="4572000" cy="347472"/>
+          </a:xfrm>
+          <a:prstGeom prst="rect">
+            <a:avLst/>
+          </a:prstGeom>
+          <a:noFill/>
+        </p:spPr>
+        <p:txBody>
+          <a:bodyPr wrap="square">
+            <a:spAutoFit/>
+          </a:bodyPr>
+          <a:lstStyle/>
           <a:p>
             <a:pPr algn="l"/>
             <a:r>
-              <a:rPr sz="1100" b="0">
+              <a:rPr sz="1100" b="0" i="0">
                 <a:solidFill>
                   <a:srgbClr val="1A1A1A"/>
                 </a:solidFill>
                 <a:latin typeface="IPAGothic"/>
               </a:rPr>
-              <a:t>・Y1〜2：初期投資回収フェーズ。各店舗の安定稼働と収益基盤の構築に集中</a:t>
-            </a:r>
-          </a:p>
+              <a:t>▸ Y2: FC展開への投資5,000万は営業CF7,140万の範囲内でまかなえる</a:t>
+            </a:r>
+          </a:p>
+        </p:txBody>
+      </p:sp>
+      <p:sp>
+        <p:nvSpPr>
+          <p:cNvPr id="11" name="TextBox 10"/>
+          <p:cNvSpPr txBox="1"/>
+          <p:nvPr/>
+        </p:nvSpPr>
+        <p:spPr>
+          <a:xfrm>
+            <a:off x="7223760" y="4553712"/>
+            <a:ext cx="4572000" cy="347472"/>
+          </a:xfrm>
+          <a:prstGeom prst="rect">
+            <a:avLst/>
+          </a:prstGeom>
+          <a:noFill/>
+        </p:spPr>
+        <p:txBody>
+          <a:bodyPr wrap="square">
+            <a:spAutoFit/>
+          </a:bodyPr>
+          <a:lstStyle/>
           <a:p>
             <a:pPr algn="l"/>
             <a:r>
-              <a:rPr sz="1100" b="0">
+              <a:rPr sz="1100" b="0" i="0">
                 <a:solidFill>
                   <a:srgbClr val="1A1A1A"/>
                 </a:solidFill>
                 <a:latin typeface="IPAGothic"/>
               </a:rPr>
-              <a:t>・Y3以降：FCスケールで利益率が20%に安定。EBITDA1.4億円（月商6,000万）で成長が加速</a:t>
-            </a:r>
-          </a:p>
+              <a:t>▸ Y3以降: 投資超過分もFCロイヤルティ等のストック収益で補填、累計CFが急拡大</a:t>
+            </a:r>
+          </a:p>
+        </p:txBody>
+      </p:sp>
+      <p:sp>
+        <p:nvSpPr>
+          <p:cNvPr id="12" name="TextBox 11"/>
+          <p:cNvSpPr txBox="1"/>
+          <p:nvPr/>
+        </p:nvSpPr>
+        <p:spPr>
+          <a:xfrm>
+            <a:off x="7223760" y="4901184"/>
+            <a:ext cx="4572000" cy="347472"/>
+          </a:xfrm>
+          <a:prstGeom prst="rect">
+            <a:avLst/>
+          </a:prstGeom>
+          <a:noFill/>
+        </p:spPr>
+        <p:txBody>
+          <a:bodyPr wrap="square">
+            <a:spAutoFit/>
+          </a:bodyPr>
+          <a:lstStyle/>
           <a:p>
             <a:pPr algn="l"/>
             <a:r>
-              <a:rPr sz="1100" b="0">
+              <a:rPr sz="1100" b="0" i="0">
                 <a:solidFill>
                   <a:srgbClr val="1A1A1A"/>
                 </a:solidFill>
                 <a:latin typeface="IPAGothic"/>
               </a:rPr>
-              <a:t>・Y5：年商20億円・EBITDA4億円  →  EXIT（M&amp;A or IPO）を視野に</a:t>
-            </a:r>
-          </a:p>
+              <a:t>▸ Y5末: 累計CF 7.5億円 → 配当・EXIT・追加投資の原資として十分な水準</a:t>
+            </a:r>
+          </a:p>
+        </p:txBody>
+      </p:sp>
+      <p:sp>
+        <p:nvSpPr>
+          <p:cNvPr id="13" name="Rectangle 12"/>
+          <p:cNvSpPr/>
+          <p:nvPr/>
+        </p:nvSpPr>
+        <p:spPr>
+          <a:xfrm>
+            <a:off x="274320" y="4389120"/>
+            <a:ext cx="6675120" cy="2194560"/>
+          </a:xfrm>
+          <a:prstGeom prst="rect">
+            <a:avLst/>
+          </a:prstGeom>
+          <a:solidFill>
+            <a:srgbClr val="F0EEE8"/>
+          </a:solidFill>
+          <a:ln>
+            <a:noFill/>
+          </a:ln>
+        </p:spPr>
+        <p:style>
+          <a:lnRef idx="1">
+            <a:schemeClr val="accent1"/>
+          </a:lnRef>
+          <a:fillRef idx="3">
+            <a:schemeClr val="accent1"/>
+          </a:fillRef>
+          <a:effectRef idx="2">
+            <a:schemeClr val="accent1"/>
+          </a:effectRef>
+          <a:fontRef idx="minor">
+            <a:schemeClr val="lt1"/>
+          </a:fontRef>
+        </p:style>
+        <p:txBody>
+          <a:bodyPr rtlCol="0" anchor="ctr"/>
+          <a:lstStyle/>
+          <a:p>
+            <a:pPr algn="ctr"/>
+          </a:p>
+        </p:txBody>
+      </p:sp>
+      <p:sp>
+        <p:nvSpPr>
+          <p:cNvPr id="14" name="TextBox 13"/>
+          <p:cNvSpPr txBox="1"/>
+          <p:nvPr/>
+        </p:nvSpPr>
+        <p:spPr>
+          <a:xfrm>
+            <a:off x="365760" y="4434840"/>
+            <a:ext cx="6492240" cy="365760"/>
+          </a:xfrm>
+          <a:prstGeom prst="rect">
+            <a:avLst/>
+          </a:prstGeom>
+          <a:noFill/>
+        </p:spPr>
+        <p:txBody>
+          <a:bodyPr wrap="square">
+            <a:spAutoFit/>
+          </a:bodyPr>
+          <a:lstStyle/>
           <a:p>
             <a:pPr algn="l"/>
             <a:r>
-              <a:rPr sz="1100" b="0">
+              <a:rPr sz="1100" b="1" i="0">
+                <a:solidFill>
+                  <a:srgbClr val="2C4A3E"/>
+                </a:solidFill>
+                <a:latin typeface="IPAGothic"/>
+              </a:rPr>
+              <a:t>■ Y1 月次CF イメージ（肉酒場然・稼働済み前提）</a:t>
+            </a:r>
+          </a:p>
+        </p:txBody>
+      </p:sp>
+      <p:sp>
+        <p:nvSpPr>
+          <p:cNvPr id="15" name="TextBox 14"/>
+          <p:cNvSpPr txBox="1"/>
+          <p:nvPr/>
+        </p:nvSpPr>
+        <p:spPr>
+          <a:xfrm>
+            <a:off x="365760" y="4846320"/>
+            <a:ext cx="6492240" cy="1645920"/>
+          </a:xfrm>
+          <a:prstGeom prst="rect">
+            <a:avLst/>
+          </a:prstGeom>
+          <a:noFill/>
+        </p:spPr>
+        <p:txBody>
+          <a:bodyPr wrap="square">
+            <a:spAutoFit/>
+          </a:bodyPr>
+          <a:lstStyle/>
+          <a:p>
+            <a:pPr algn="l"/>
+            <a:r>
+              <a:rPr sz="1050" b="0">
                 <a:solidFill>
                   <a:srgbClr val="1A1A1A"/>
                 </a:solidFill>
                 <a:latin typeface="IPAGothic"/>
               </a:rPr>
-              <a:t>・FCロイヤルティ収入はストック型のため、EXIT評価倍率向上に寄与</a:t>
+              <a:t>月1〜3：肉酒場然のみ稼働 → 月次CF +100〜150万（立ち上げ費用除く）</a:t>
+            </a:r>
+          </a:p>
+          <a:p>
+            <a:pPr algn="l"/>
+            <a:r>
+              <a:rPr sz="1050" b="0">
+                <a:solidFill>
+                  <a:srgbClr val="1A1A1A"/>
+                </a:solidFill>
+                <a:latin typeface="IPAGothic"/>
+              </a:rPr>
+              <a:t>月4〜6：だし然 開業 → 月次CF +200〜280万（稼働率70%）</a:t>
+            </a:r>
+          </a:p>
+          <a:p>
+            <a:pPr algn="l"/>
+            <a:r>
+              <a:rPr sz="1050" b="0">
+                <a:solidFill>
+                  <a:srgbClr val="1A1A1A"/>
+                </a:solidFill>
+                <a:latin typeface="IPAGothic"/>
+              </a:rPr>
+              <a:t>月7〜：蕎麦然 開業 → 月次CF +350〜430万（3ブランド揃い踏み）</a:t>
+            </a:r>
+          </a:p>
+          <a:p>
+            <a:pPr algn="l"/>
+            <a:r>
+              <a:rPr sz="1050" b="0">
+                <a:solidFill>
+                  <a:srgbClr val="1A1A1A"/>
+                </a:solidFill>
+                <a:latin typeface="IPAGothic"/>
+              </a:rPr>
+              <a:t>Y1末時点：累計CF（資金調達後）約5,400万 → BEP到達</a:t>
             </a:r>
           </a:p>
         </p:txBody>
@@ -13673,6 +15021,967 @@
                 </a:solidFill>
                 <a:latin typeface="IPAGothic"/>
               </a:rPr>
+              <a:t>資金調達計画</a:t>
+            </a:r>
+          </a:p>
+        </p:txBody>
+      </p:sp>
+      <p:pic>
+        <p:nvPicPr>
+          <p:cNvPr id="4" name="Picture 3" descr="zen_brand_logo.png"/>
+          <p:cNvPicPr>
+            <a:picLocks noChangeAspect="1"/>
+          </p:cNvPicPr>
+          <p:nvPr/>
+        </p:nvPicPr>
+        <p:blipFill>
+          <a:blip r:embed="rId2"/>
+          <a:stretch>
+            <a:fillRect/>
+          </a:stretch>
+        </p:blipFill>
+        <p:spPr>
+          <a:xfrm>
+            <a:off x="9875520" y="45720"/>
+            <a:ext cx="2103120" cy="749808"/>
+          </a:xfrm>
+          <a:prstGeom prst="rect">
+            <a:avLst/>
+          </a:prstGeom>
+        </p:spPr>
+      </p:pic>
+      <p:sp>
+        <p:nvSpPr>
+          <p:cNvPr id="5" name="Rectangle 4"/>
+          <p:cNvSpPr/>
+          <p:nvPr/>
+        </p:nvSpPr>
+        <p:spPr>
+          <a:xfrm>
+            <a:off x="274320" y="1005840"/>
+            <a:ext cx="4114800" cy="1188720"/>
+          </a:xfrm>
+          <a:prstGeom prst="rect">
+            <a:avLst/>
+          </a:prstGeom>
+          <a:solidFill>
+            <a:srgbClr val="2C4A3E"/>
+          </a:solidFill>
+          <a:ln>
+            <a:noFill/>
+          </a:ln>
+        </p:spPr>
+        <p:style>
+          <a:lnRef idx="1">
+            <a:schemeClr val="accent1"/>
+          </a:lnRef>
+          <a:fillRef idx="3">
+            <a:schemeClr val="accent1"/>
+          </a:fillRef>
+          <a:effectRef idx="2">
+            <a:schemeClr val="accent1"/>
+          </a:effectRef>
+          <a:fontRef idx="minor">
+            <a:schemeClr val="lt1"/>
+          </a:fontRef>
+        </p:style>
+        <p:txBody>
+          <a:bodyPr rtlCol="0" anchor="ctr"/>
+          <a:lstStyle/>
+          <a:p>
+            <a:pPr algn="ctr"/>
+          </a:p>
+        </p:txBody>
+      </p:sp>
+      <p:sp>
+        <p:nvSpPr>
+          <p:cNvPr id="6" name="TextBox 5"/>
+          <p:cNvSpPr txBox="1"/>
+          <p:nvPr/>
+        </p:nvSpPr>
+        <p:spPr>
+          <a:xfrm>
+            <a:off x="365760" y="1051560"/>
+            <a:ext cx="3931920" cy="365760"/>
+          </a:xfrm>
+          <a:prstGeom prst="rect">
+            <a:avLst/>
+          </a:prstGeom>
+          <a:noFill/>
+        </p:spPr>
+        <p:txBody>
+          <a:bodyPr wrap="square">
+            <a:spAutoFit/>
+          </a:bodyPr>
+          <a:lstStyle/>
+          <a:p>
+            <a:pPr algn="l"/>
+            <a:r>
+              <a:rPr sz="1300" b="0" i="0">
+                <a:solidFill>
+                  <a:srgbClr val="FFFFFF"/>
+                </a:solidFill>
+                <a:latin typeface="IPAGothic"/>
+              </a:rPr>
+              <a:t>第1回 調達目標</a:t>
+            </a:r>
+          </a:p>
+        </p:txBody>
+      </p:sp>
+      <p:sp>
+        <p:nvSpPr>
+          <p:cNvPr id="7" name="TextBox 6"/>
+          <p:cNvSpPr txBox="1"/>
+          <p:nvPr/>
+        </p:nvSpPr>
+        <p:spPr>
+          <a:xfrm>
+            <a:off x="365760" y="1417320"/>
+            <a:ext cx="3931920" cy="685800"/>
+          </a:xfrm>
+          <a:prstGeom prst="rect">
+            <a:avLst/>
+          </a:prstGeom>
+          <a:noFill/>
+        </p:spPr>
+        <p:txBody>
+          <a:bodyPr wrap="square">
+            <a:spAutoFit/>
+          </a:bodyPr>
+          <a:lstStyle/>
+          <a:p>
+            <a:pPr algn="ctr"/>
+            <a:r>
+              <a:rPr sz="3800" b="1" i="0">
+                <a:solidFill>
+                  <a:srgbClr val="C49A22"/>
+                </a:solidFill>
+                <a:latin typeface="IPAGothic"/>
+              </a:rPr>
+              <a:t>3,800万円</a:t>
+            </a:r>
+          </a:p>
+        </p:txBody>
+      </p:sp>
+      <p:sp>
+        <p:nvSpPr>
+          <p:cNvPr id="8" name="Rectangle 7"/>
+          <p:cNvSpPr/>
+          <p:nvPr/>
+        </p:nvSpPr>
+        <p:spPr>
+          <a:xfrm>
+            <a:off x="4663440" y="1005840"/>
+            <a:ext cx="7223760" cy="1188720"/>
+          </a:xfrm>
+          <a:prstGeom prst="rect">
+            <a:avLst/>
+          </a:prstGeom>
+          <a:solidFill>
+            <a:srgbClr val="F0EEE8"/>
+          </a:solidFill>
+          <a:ln>
+            <a:noFill/>
+          </a:ln>
+        </p:spPr>
+        <p:style>
+          <a:lnRef idx="1">
+            <a:schemeClr val="accent1"/>
+          </a:lnRef>
+          <a:fillRef idx="3">
+            <a:schemeClr val="accent1"/>
+          </a:fillRef>
+          <a:effectRef idx="2">
+            <a:schemeClr val="accent1"/>
+          </a:effectRef>
+          <a:fontRef idx="minor">
+            <a:schemeClr val="lt1"/>
+          </a:fontRef>
+        </p:style>
+        <p:txBody>
+          <a:bodyPr rtlCol="0" anchor="ctr"/>
+          <a:lstStyle/>
+          <a:p>
+            <a:pPr algn="ctr"/>
+          </a:p>
+        </p:txBody>
+      </p:sp>
+      <p:sp>
+        <p:nvSpPr>
+          <p:cNvPr id="9" name="TextBox 8"/>
+          <p:cNvSpPr txBox="1"/>
+          <p:nvPr/>
+        </p:nvSpPr>
+        <p:spPr>
+          <a:xfrm>
+            <a:off x="4754880" y="1234440"/>
+            <a:ext cx="7040880" cy="457200"/>
+          </a:xfrm>
+          <a:prstGeom prst="rect">
+            <a:avLst/>
+          </a:prstGeom>
+          <a:noFill/>
+        </p:spPr>
+        <p:txBody>
+          <a:bodyPr wrap="square">
+            <a:spAutoFit/>
+          </a:bodyPr>
+          <a:lstStyle/>
+          <a:p>
+            <a:pPr algn="l"/>
+            <a:r>
+              <a:rPr sz="1500" b="1" i="0">
+                <a:solidFill>
+                  <a:srgbClr val="2C4A3E"/>
+                </a:solidFill>
+                <a:latin typeface="IPAGothic"/>
+              </a:rPr>
+              <a:t>調達方法：日本政策金融公庫 ＋ エンジェル投資家</a:t>
+            </a:r>
+          </a:p>
+        </p:txBody>
+      </p:sp>
+      <p:sp>
+        <p:nvSpPr>
+          <p:cNvPr id="10" name="TextBox 9"/>
+          <p:cNvSpPr txBox="1"/>
+          <p:nvPr/>
+        </p:nvSpPr>
+        <p:spPr>
+          <a:xfrm>
+            <a:off x="4754880" y="1691640"/>
+            <a:ext cx="7040880" cy="365760"/>
+          </a:xfrm>
+          <a:prstGeom prst="rect">
+            <a:avLst/>
+          </a:prstGeom>
+          <a:noFill/>
+        </p:spPr>
+        <p:txBody>
+          <a:bodyPr wrap="square">
+            <a:spAutoFit/>
+          </a:bodyPr>
+          <a:lstStyle/>
+          <a:p>
+            <a:pPr algn="l"/>
+            <a:r>
+              <a:rPr sz="1100" b="0" i="0">
+                <a:solidFill>
+                  <a:srgbClr val="1A1A1A"/>
+                </a:solidFill>
+                <a:latin typeface="IPAGothic"/>
+              </a:rPr>
+              <a:t>第2回（Y2〜3）：1〜2億円  /  VC・事業会社提携  /  FC加速・関西展開</a:t>
+            </a:r>
+          </a:p>
+        </p:txBody>
+      </p:sp>
+      <p:graphicFrame>
+        <p:nvGraphicFramePr>
+          <p:cNvPr id="11" name="Table 10"/>
+          <p:cNvGraphicFramePr>
+            <a:graphicFrameLocks noGrp="1"/>
+          </p:cNvGraphicFramePr>
+          <p:nvPr/>
+        </p:nvGraphicFramePr>
+        <p:xfrm>
+          <a:off x="274320" y="2377440"/>
+          <a:ext cx="11612880" cy="2926080"/>
+        </p:xfrm>
+        <a:graphic>
+          <a:graphicData uri="http://schemas.openxmlformats.org/drawingml/2006/table">
+            <a:tbl>
+              <a:tblPr firstRow="1" bandRow="1">
+                <a:tableStyleId>{5C22544A-7EE6-4342-B048-85BDC9FD1C3A}</a:tableStyleId>
+              </a:tblPr>
+              <a:tblGrid>
+                <a:gridCol w="3870960"/>
+                <a:gridCol w="3870960"/>
+                <a:gridCol w="3870960"/>
+              </a:tblGrid>
+              <a:tr h="418011">
+                <a:tc>
+                  <a:txBody>
+                    <a:bodyPr/>
+                    <a:lstStyle/>
+                    <a:p>
+                      <a:pPr algn="ctr"/>
+                      <a:r>
+                        <a:rPr sz="1100" b="1">
+                          <a:solidFill>
+                            <a:srgbClr val="FFFFFF"/>
+                          </a:solidFill>
+                          <a:latin typeface="IPAGothic"/>
+                        </a:rPr>
+                        <a:t>用途</a:t>
+                      </a:r>
+                    </a:p>
+                  </a:txBody>
+                  <a:tcPr>
+                    <a:solidFill>
+                      <a:srgbClr val="2C4A3E"/>
+                    </a:solidFill>
+                  </a:tcPr>
+                </a:tc>
+                <a:tc>
+                  <a:txBody>
+                    <a:bodyPr/>
+                    <a:lstStyle/>
+                    <a:p>
+                      <a:pPr algn="ctr"/>
+                      <a:r>
+                        <a:rPr sz="1100" b="1">
+                          <a:solidFill>
+                            <a:srgbClr val="FFFFFF"/>
+                          </a:solidFill>
+                          <a:latin typeface="IPAGothic"/>
+                        </a:rPr>
+                        <a:t>金額</a:t>
+                      </a:r>
+                    </a:p>
+                  </a:txBody>
+                  <a:tcPr>
+                    <a:solidFill>
+                      <a:srgbClr val="2C4A3E"/>
+                    </a:solidFill>
+                  </a:tcPr>
+                </a:tc>
+                <a:tc>
+                  <a:txBody>
+                    <a:bodyPr/>
+                    <a:lstStyle/>
+                    <a:p>
+                      <a:pPr algn="ctr"/>
+                      <a:r>
+                        <a:rPr sz="1100" b="1">
+                          <a:solidFill>
+                            <a:srgbClr val="FFFFFF"/>
+                          </a:solidFill>
+                          <a:latin typeface="IPAGothic"/>
+                        </a:rPr>
+                        <a:t>内訳</a:t>
+                      </a:r>
+                    </a:p>
+                  </a:txBody>
+                  <a:tcPr>
+                    <a:solidFill>
+                      <a:srgbClr val="2C4A3E"/>
+                    </a:solidFill>
+                  </a:tcPr>
+                </a:tc>
+              </a:tr>
+              <a:tr h="418011">
+                <a:tc>
+                  <a:txBody>
+                    <a:bodyPr/>
+                    <a:lstStyle/>
+                    <a:p>
+                      <a:pPr algn="ctr"/>
+                      <a:r>
+                        <a:rPr sz="1100">
+                          <a:solidFill>
+                            <a:srgbClr val="1A1A1A"/>
+                          </a:solidFill>
+                          <a:latin typeface="IPAGothic"/>
+                        </a:rPr>
+                        <a:t>だし 然 1号店 開業費</a:t>
+                      </a:r>
+                    </a:p>
+                  </a:txBody>
+                  <a:tcPr>
+                    <a:solidFill>
+                      <a:srgbClr val="F0EEE8"/>
+                    </a:solidFill>
+                  </a:tcPr>
+                </a:tc>
+                <a:tc>
+                  <a:txBody>
+                    <a:bodyPr/>
+                    <a:lstStyle/>
+                    <a:p>
+                      <a:pPr algn="ctr"/>
+                      <a:r>
+                        <a:rPr sz="1100">
+                          <a:solidFill>
+                            <a:srgbClr val="1A1A1A"/>
+                          </a:solidFill>
+                          <a:latin typeface="IPAGothic"/>
+                        </a:rPr>
+                        <a:t>2,000万円</a:t>
+                      </a:r>
+                    </a:p>
+                  </a:txBody>
+                  <a:tcPr>
+                    <a:solidFill>
+                      <a:srgbClr val="F0EEE8"/>
+                    </a:solidFill>
+                  </a:tcPr>
+                </a:tc>
+                <a:tc>
+                  <a:txBody>
+                    <a:bodyPr/>
+                    <a:lstStyle/>
+                    <a:p>
+                      <a:pPr algn="ctr"/>
+                      <a:r>
+                        <a:rPr sz="1100">
+                          <a:solidFill>
+                            <a:srgbClr val="1A1A1A"/>
+                          </a:solidFill>
+                          <a:latin typeface="IPAGothic"/>
+                        </a:rPr>
+                        <a:t>内装900万＋厨房450万＋敷金（60万×3ヶ月）＋運転資金</a:t>
+                      </a:r>
+                    </a:p>
+                  </a:txBody>
+                  <a:tcPr>
+                    <a:solidFill>
+                      <a:srgbClr val="F0EEE8"/>
+                    </a:solidFill>
+                  </a:tcPr>
+                </a:tc>
+              </a:tr>
+              <a:tr h="418011">
+                <a:tc>
+                  <a:txBody>
+                    <a:bodyPr/>
+                    <a:lstStyle/>
+                    <a:p>
+                      <a:pPr algn="ctr"/>
+                      <a:r>
+                        <a:rPr sz="1100">
+                          <a:solidFill>
+                            <a:srgbClr val="1A1A1A"/>
+                          </a:solidFill>
+                          <a:latin typeface="IPAGothic"/>
+                        </a:rPr>
+                        <a:t>蕎麦 然 1号店 開業費（8坪）</a:t>
+                      </a:r>
+                    </a:p>
+                  </a:txBody>
+                  <a:tcPr>
+                    <a:solidFill>
+                      <a:srgbClr val="FFFFFF"/>
+                    </a:solidFill>
+                  </a:tcPr>
+                </a:tc>
+                <a:tc>
+                  <a:txBody>
+                    <a:bodyPr/>
+                    <a:lstStyle/>
+                    <a:p>
+                      <a:pPr algn="ctr"/>
+                      <a:r>
+                        <a:rPr sz="1100">
+                          <a:solidFill>
+                            <a:srgbClr val="1A1A1A"/>
+                          </a:solidFill>
+                          <a:latin typeface="IPAGothic"/>
+                        </a:rPr>
+                        <a:t>800万円</a:t>
+                      </a:r>
+                    </a:p>
+                  </a:txBody>
+                  <a:tcPr>
+                    <a:solidFill>
+                      <a:srgbClr val="FFFFFF"/>
+                    </a:solidFill>
+                  </a:tcPr>
+                </a:tc>
+                <a:tc>
+                  <a:txBody>
+                    <a:bodyPr/>
+                    <a:lstStyle/>
+                    <a:p>
+                      <a:pPr algn="ctr"/>
+                      <a:r>
+                        <a:rPr sz="1100">
+                          <a:solidFill>
+                            <a:srgbClr val="1A1A1A"/>
+                          </a:solidFill>
+                          <a:latin typeface="IPAGothic"/>
+                        </a:rPr>
+                        <a:t>内装250万＋設備200万＋敷金（45万×6ヶ月）＋運転資金</a:t>
+                      </a:r>
+                    </a:p>
+                  </a:txBody>
+                  <a:tcPr>
+                    <a:solidFill>
+                      <a:srgbClr val="FFFFFF"/>
+                    </a:solidFill>
+                  </a:tcPr>
+                </a:tc>
+              </a:tr>
+              <a:tr h="418011">
+                <a:tc>
+                  <a:txBody>
+                    <a:bodyPr/>
+                    <a:lstStyle/>
+                    <a:p>
+                      <a:pPr algn="ctr"/>
+                      <a:r>
+                        <a:rPr sz="1100">
+                          <a:solidFill>
+                            <a:srgbClr val="1A1A1A"/>
+                          </a:solidFill>
+                          <a:latin typeface="IPAGothic"/>
+                        </a:rPr>
+                        <a:t>SNSコンサル・スタートダッシュ</a:t>
+                      </a:r>
+                    </a:p>
+                  </a:txBody>
+                  <a:tcPr>
+                    <a:solidFill>
+                      <a:srgbClr val="F0EEE8"/>
+                    </a:solidFill>
+                  </a:tcPr>
+                </a:tc>
+                <a:tc>
+                  <a:txBody>
+                    <a:bodyPr/>
+                    <a:lstStyle/>
+                    <a:p>
+                      <a:pPr algn="ctr"/>
+                      <a:r>
+                        <a:rPr sz="1100">
+                          <a:solidFill>
+                            <a:srgbClr val="1A1A1A"/>
+                          </a:solidFill>
+                          <a:latin typeface="IPAGothic"/>
+                        </a:rPr>
+                        <a:t>300万円</a:t>
+                      </a:r>
+                    </a:p>
+                  </a:txBody>
+                  <a:tcPr>
+                    <a:solidFill>
+                      <a:srgbClr val="F0EEE8"/>
+                    </a:solidFill>
+                  </a:tcPr>
+                </a:tc>
+                <a:tc>
+                  <a:txBody>
+                    <a:bodyPr/>
+                    <a:lstStyle/>
+                    <a:p>
+                      <a:pPr algn="ctr"/>
+                      <a:r>
+                        <a:rPr sz="1100">
+                          <a:solidFill>
+                            <a:srgbClr val="1A1A1A"/>
+                          </a:solidFill>
+                          <a:latin typeface="IPAGothic"/>
+                        </a:rPr>
+                        <a:t>外部コンサル起用・開業前3〜6ヶ月集中投資</a:t>
+                      </a:r>
+                    </a:p>
+                  </a:txBody>
+                  <a:tcPr>
+                    <a:solidFill>
+                      <a:srgbClr val="F0EEE8"/>
+                    </a:solidFill>
+                  </a:tcPr>
+                </a:tc>
+              </a:tr>
+              <a:tr h="418011">
+                <a:tc>
+                  <a:txBody>
+                    <a:bodyPr/>
+                    <a:lstStyle/>
+                    <a:p>
+                      <a:pPr algn="ctr"/>
+                      <a:r>
+                        <a:rPr sz="1100">
+                          <a:solidFill>
+                            <a:srgbClr val="1A1A1A"/>
+                          </a:solidFill>
+                          <a:latin typeface="IPAGothic"/>
+                        </a:rPr>
+                        <a:t>人材採用・研修費</a:t>
+                      </a:r>
+                    </a:p>
+                  </a:txBody>
+                  <a:tcPr>
+                    <a:solidFill>
+                      <a:srgbClr val="FFFFFF"/>
+                    </a:solidFill>
+                  </a:tcPr>
+                </a:tc>
+                <a:tc>
+                  <a:txBody>
+                    <a:bodyPr/>
+                    <a:lstStyle/>
+                    <a:p>
+                      <a:pPr algn="ctr"/>
+                      <a:r>
+                        <a:rPr sz="1100">
+                          <a:solidFill>
+                            <a:srgbClr val="1A1A1A"/>
+                          </a:solidFill>
+                          <a:latin typeface="IPAGothic"/>
+                        </a:rPr>
+                        <a:t>300万円</a:t>
+                      </a:r>
+                    </a:p>
+                  </a:txBody>
+                  <a:tcPr>
+                    <a:solidFill>
+                      <a:srgbClr val="FFFFFF"/>
+                    </a:solidFill>
+                  </a:tcPr>
+                </a:tc>
+                <a:tc>
+                  <a:txBody>
+                    <a:bodyPr/>
+                    <a:lstStyle/>
+                    <a:p>
+                      <a:pPr algn="ctr"/>
+                      <a:r>
+                        <a:rPr sz="1100">
+                          <a:solidFill>
+                            <a:srgbClr val="1A1A1A"/>
+                          </a:solidFill>
+                          <a:latin typeface="IPAGothic"/>
+                        </a:rPr>
+                        <a:t>店長・料理長採用・マニュアル・研修体制構築</a:t>
+                      </a:r>
+                    </a:p>
+                  </a:txBody>
+                  <a:tcPr>
+                    <a:solidFill>
+                      <a:srgbClr val="FFFFFF"/>
+                    </a:solidFill>
+                  </a:tcPr>
+                </a:tc>
+              </a:tr>
+              <a:tr h="418011">
+                <a:tc>
+                  <a:txBody>
+                    <a:bodyPr/>
+                    <a:lstStyle/>
+                    <a:p>
+                      <a:pPr algn="ctr"/>
+                      <a:r>
+                        <a:rPr sz="1100">
+                          <a:solidFill>
+                            <a:srgbClr val="1A1A1A"/>
+                          </a:solidFill>
+                          <a:latin typeface="IPAGothic"/>
+                        </a:rPr>
+                        <a:t>運転資金・予備費</a:t>
+                      </a:r>
+                    </a:p>
+                  </a:txBody>
+                  <a:tcPr>
+                    <a:solidFill>
+                      <a:srgbClr val="F0EEE8"/>
+                    </a:solidFill>
+                  </a:tcPr>
+                </a:tc>
+                <a:tc>
+                  <a:txBody>
+                    <a:bodyPr/>
+                    <a:lstStyle/>
+                    <a:p>
+                      <a:pPr algn="ctr"/>
+                      <a:r>
+                        <a:rPr sz="1100">
+                          <a:solidFill>
+                            <a:srgbClr val="1A1A1A"/>
+                          </a:solidFill>
+                          <a:latin typeface="IPAGothic"/>
+                        </a:rPr>
+                        <a:t>400万円</a:t>
+                      </a:r>
+                    </a:p>
+                  </a:txBody>
+                  <a:tcPr>
+                    <a:solidFill>
+                      <a:srgbClr val="F0EEE8"/>
+                    </a:solidFill>
+                  </a:tcPr>
+                </a:tc>
+                <a:tc>
+                  <a:txBody>
+                    <a:bodyPr/>
+                    <a:lstStyle/>
+                    <a:p>
+                      <a:pPr algn="ctr"/>
+                      <a:r>
+                        <a:rPr sz="1100">
+                          <a:solidFill>
+                            <a:srgbClr val="1A1A1A"/>
+                          </a:solidFill>
+                          <a:latin typeface="IPAGothic"/>
+                        </a:rPr>
+                        <a:t>グループ管理・広告・オープン販促・予備</a:t>
+                      </a:r>
+                    </a:p>
+                  </a:txBody>
+                  <a:tcPr>
+                    <a:solidFill>
+                      <a:srgbClr val="F0EEE8"/>
+                    </a:solidFill>
+                  </a:tcPr>
+                </a:tc>
+              </a:tr>
+              <a:tr h="418014">
+                <a:tc>
+                  <a:txBody>
+                    <a:bodyPr/>
+                    <a:lstStyle/>
+                    <a:p>
+                      <a:pPr algn="ctr"/>
+                      <a:r>
+                        <a:rPr sz="1100">
+                          <a:solidFill>
+                            <a:srgbClr val="1A1A1A"/>
+                          </a:solidFill>
+                          <a:latin typeface="IPAGothic"/>
+                        </a:rPr>
+                        <a:t>合計</a:t>
+                      </a:r>
+                    </a:p>
+                  </a:txBody>
+                  <a:tcPr>
+                    <a:solidFill>
+                      <a:srgbClr val="FFFFFF"/>
+                    </a:solidFill>
+                  </a:tcPr>
+                </a:tc>
+                <a:tc>
+                  <a:txBody>
+                    <a:bodyPr/>
+                    <a:lstStyle/>
+                    <a:p>
+                      <a:pPr algn="ctr"/>
+                      <a:r>
+                        <a:rPr sz="1100">
+                          <a:solidFill>
+                            <a:srgbClr val="1A1A1A"/>
+                          </a:solidFill>
+                          <a:latin typeface="IPAGothic"/>
+                        </a:rPr>
+                        <a:t>3,800万円</a:t>
+                      </a:r>
+                    </a:p>
+                  </a:txBody>
+                  <a:tcPr>
+                    <a:solidFill>
+                      <a:srgbClr val="FFFFFF"/>
+                    </a:solidFill>
+                  </a:tcPr>
+                </a:tc>
+                <a:tc>
+                  <a:txBody>
+                    <a:bodyPr/>
+                    <a:lstStyle/>
+                    <a:p>
+                      <a:pPr algn="ctr"/>
+                      <a:r>
+                        <a:rPr sz="1100">
+                          <a:solidFill>
+                            <a:srgbClr val="1A1A1A"/>
+                          </a:solidFill>
+                          <a:latin typeface="IPAGothic"/>
+                        </a:rPr>
+                        <a:t/>
+                      </a:r>
+                    </a:p>
+                  </a:txBody>
+                  <a:tcPr>
+                    <a:solidFill>
+                      <a:srgbClr val="FFFFFF"/>
+                    </a:solidFill>
+                  </a:tcPr>
+                </a:tc>
+              </a:tr>
+            </a:tbl>
+          </a:graphicData>
+        </a:graphic>
+      </p:graphicFrame>
+      <p:sp>
+        <p:nvSpPr>
+          <p:cNvPr id="12" name="TextBox 11"/>
+          <p:cNvSpPr txBox="1"/>
+          <p:nvPr/>
+        </p:nvSpPr>
+        <p:spPr>
+          <a:xfrm>
+            <a:off x="274320" y="5120640"/>
+            <a:ext cx="11612880" cy="1463040"/>
+          </a:xfrm>
+          <a:prstGeom prst="rect">
+            <a:avLst/>
+          </a:prstGeom>
+          <a:noFill/>
+        </p:spPr>
+        <p:txBody>
+          <a:bodyPr wrap="square">
+            <a:spAutoFit/>
+          </a:bodyPr>
+          <a:lstStyle/>
+          <a:p>
+            <a:pPr algn="l"/>
+            <a:r>
+              <a:rPr sz="1100" b="0">
+                <a:solidFill>
+                  <a:srgbClr val="1A1A1A"/>
+                </a:solidFill>
+                <a:latin typeface="IPAGothic"/>
+              </a:rPr>
+              <a:t>■ 投資家へのリターンイメージ</a:t>
+            </a:r>
+          </a:p>
+          <a:p>
+            <a:pPr algn="l"/>
+            <a:r>
+              <a:rPr sz="1100" b="0">
+                <a:solidFill>
+                  <a:srgbClr val="1A1A1A"/>
+                </a:solidFill>
+                <a:latin typeface="IPAGothic"/>
+              </a:rPr>
+              <a:t>・Y1〜2：初期投資回収フェーズ。各店舗の安定稼働と収益基盤の構築に集中</a:t>
+            </a:r>
+          </a:p>
+          <a:p>
+            <a:pPr algn="l"/>
+            <a:r>
+              <a:rPr sz="1100" b="0">
+                <a:solidFill>
+                  <a:srgbClr val="1A1A1A"/>
+                </a:solidFill>
+                <a:latin typeface="IPAGothic"/>
+              </a:rPr>
+              <a:t>・Y3以降：FCスケールで利益率が20%に安定。EBITDA1.4億円（月商6,000万）で成長が加速</a:t>
+            </a:r>
+          </a:p>
+          <a:p>
+            <a:pPr algn="l"/>
+            <a:r>
+              <a:rPr sz="1100" b="0">
+                <a:solidFill>
+                  <a:srgbClr val="1A1A1A"/>
+                </a:solidFill>
+                <a:latin typeface="IPAGothic"/>
+              </a:rPr>
+              <a:t>・Y5：年商20億円・EBITDA4億円  →  EXIT（M&amp;A or IPO）を視野に</a:t>
+            </a:r>
+          </a:p>
+          <a:p>
+            <a:pPr algn="l"/>
+            <a:r>
+              <a:rPr sz="1100" b="0">
+                <a:solidFill>
+                  <a:srgbClr val="1A1A1A"/>
+                </a:solidFill>
+                <a:latin typeface="IPAGothic"/>
+              </a:rPr>
+              <a:t>・FCロイヤルティ収入はストック型のため、EXIT評価倍率向上に寄与</a:t>
+            </a:r>
+          </a:p>
+        </p:txBody>
+      </p:sp>
+    </p:spTree>
+  </p:cSld>
+  <p:clrMapOvr>
+    <a:masterClrMapping/>
+  </p:clrMapOvr>
+</p:sld>
+</file>
+
+<file path=ppt/slides/slide19.xml><?xml version="1.0" encoding="utf-8"?>
+<p:sld xmlns:a="http://schemas.openxmlformats.org/drawingml/2006/main" xmlns:p="http://schemas.openxmlformats.org/presentationml/2006/main" xmlns:r="http://schemas.openxmlformats.org/officeDocument/2006/relationships">
+  <p:cSld>
+    <p:bg>
+      <p:bgPr>
+        <a:solidFill>
+          <a:srgbClr val="FAFAF6"/>
+        </a:solidFill>
+        <a:effectLst/>
+      </p:bgPr>
+    </p:bg>
+    <p:spTree>
+      <p:nvGrpSpPr>
+        <p:cNvPr id="1" name=""/>
+        <p:cNvGrpSpPr/>
+        <p:nvPr/>
+      </p:nvGrpSpPr>
+      <p:grpSpPr/>
+      <p:sp>
+        <p:nvSpPr>
+          <p:cNvPr id="2" name="Rectangle 1"/>
+          <p:cNvSpPr/>
+          <p:nvPr/>
+        </p:nvSpPr>
+        <p:spPr>
+          <a:xfrm>
+            <a:off x="0" y="0"/>
+            <a:ext cx="12188952" cy="868680"/>
+          </a:xfrm>
+          <a:prstGeom prst="rect">
+            <a:avLst/>
+          </a:prstGeom>
+          <a:solidFill>
+            <a:srgbClr val="2C4A3E"/>
+          </a:solidFill>
+          <a:ln>
+            <a:noFill/>
+          </a:ln>
+        </p:spPr>
+        <p:style>
+          <a:lnRef idx="1">
+            <a:schemeClr val="accent1"/>
+          </a:lnRef>
+          <a:fillRef idx="3">
+            <a:schemeClr val="accent1"/>
+          </a:fillRef>
+          <a:effectRef idx="2">
+            <a:schemeClr val="accent1"/>
+          </a:effectRef>
+          <a:fontRef idx="minor">
+            <a:schemeClr val="lt1"/>
+          </a:fontRef>
+        </p:style>
+        <p:txBody>
+          <a:bodyPr rtlCol="0" anchor="ctr"/>
+          <a:lstStyle/>
+          <a:p>
+            <a:pPr algn="ctr"/>
+          </a:p>
+        </p:txBody>
+      </p:sp>
+      <p:sp>
+        <p:nvSpPr>
+          <p:cNvPr id="3" name="TextBox 2"/>
+          <p:cNvSpPr txBox="1"/>
+          <p:nvPr/>
+        </p:nvSpPr>
+        <p:spPr>
+          <a:xfrm>
+            <a:off x="365760" y="91440"/>
+            <a:ext cx="9601200" cy="777240"/>
+          </a:xfrm>
+          <a:prstGeom prst="rect">
+            <a:avLst/>
+          </a:prstGeom>
+          <a:noFill/>
+        </p:spPr>
+        <p:txBody>
+          <a:bodyPr wrap="none">
+            <a:spAutoFit/>
+          </a:bodyPr>
+          <a:lstStyle/>
+          <a:p>
+            <a:pPr algn="l"/>
+            <a:r>
+              <a:rPr sz="2600" b="1">
+                <a:solidFill>
+                  <a:srgbClr val="FFFFFF"/>
+                </a:solidFill>
+                <a:latin typeface="IPAGothic"/>
+              </a:rPr>
               <a:t>リスクと対策</a:t>
             </a:r>
           </a:p>
@@ -14388,363 +16697,6 @@
           </a:graphicData>
         </a:graphic>
       </p:graphicFrame>
-    </p:spTree>
-  </p:cSld>
-  <p:clrMapOvr>
-    <a:masterClrMapping/>
-  </p:clrMapOvr>
-</p:sld>
-</file>
-
-<file path=ppt/slides/slide19.xml><?xml version="1.0" encoding="utf-8"?>
-<p:sld xmlns:a="http://schemas.openxmlformats.org/drawingml/2006/main" xmlns:p="http://schemas.openxmlformats.org/presentationml/2006/main" xmlns:r="http://schemas.openxmlformats.org/officeDocument/2006/relationships">
-  <p:cSld>
-    <p:bg>
-      <p:bgPr>
-        <a:solidFill>
-          <a:srgbClr val="2C4A3E"/>
-        </a:solidFill>
-        <a:effectLst/>
-      </p:bgPr>
-    </p:bg>
-    <p:spTree>
-      <p:nvGrpSpPr>
-        <p:cNvPr id="1" name=""/>
-        <p:cNvGrpSpPr/>
-        <p:nvPr/>
-      </p:nvGrpSpPr>
-      <p:grpSpPr/>
-      <p:sp>
-        <p:nvSpPr>
-          <p:cNvPr id="2" name="TextBox 1"/>
-          <p:cNvSpPr txBox="1"/>
-          <p:nvPr/>
-        </p:nvSpPr>
-        <p:spPr>
-          <a:xfrm>
-            <a:off x="914400" y="1097280"/>
-            <a:ext cx="10058400" cy="1371600"/>
-          </a:xfrm>
-          <a:prstGeom prst="rect">
-            <a:avLst/>
-          </a:prstGeom>
-          <a:noFill/>
-        </p:spPr>
-        <p:txBody>
-          <a:bodyPr wrap="square">
-            <a:spAutoFit/>
-          </a:bodyPr>
-          <a:lstStyle/>
-          <a:p>
-            <a:pPr algn="ctr"/>
-            <a:r>
-              <a:rPr sz="5400" b="1" i="0">
-                <a:solidFill>
-                  <a:srgbClr val="FFFFFF"/>
-                </a:solidFill>
-                <a:latin typeface="IPAGothic"/>
-              </a:rPr>
-              <a:t>然グループ</a:t>
-            </a:r>
-          </a:p>
-        </p:txBody>
-      </p:sp>
-      <p:sp>
-        <p:nvSpPr>
-          <p:cNvPr id="3" name="TextBox 2"/>
-          <p:cNvSpPr txBox="1"/>
-          <p:nvPr/>
-        </p:nvSpPr>
-        <p:spPr>
-          <a:xfrm>
-            <a:off x="914400" y="2468880"/>
-            <a:ext cx="10058400" cy="457200"/>
-          </a:xfrm>
-          <a:prstGeom prst="rect">
-            <a:avLst/>
-          </a:prstGeom>
-          <a:noFill/>
-        </p:spPr>
-        <p:txBody>
-          <a:bodyPr wrap="square">
-            <a:spAutoFit/>
-          </a:bodyPr>
-          <a:lstStyle/>
-          <a:p>
-            <a:pPr algn="ctr"/>
-            <a:r>
-              <a:rPr sz="1600" b="0" i="1">
-                <a:solidFill>
-                  <a:srgbClr val="C49A22"/>
-                </a:solidFill>
-                <a:latin typeface="IPAGothic"/>
-              </a:rPr>
-              <a:t>ZEN GROUP</a:t>
-            </a:r>
-          </a:p>
-        </p:txBody>
-      </p:sp>
-      <p:sp>
-        <p:nvSpPr>
-          <p:cNvPr id="4" name="Rectangle 3"/>
-          <p:cNvSpPr/>
-          <p:nvPr/>
-        </p:nvSpPr>
-        <p:spPr>
-          <a:xfrm>
-            <a:off x="2743200" y="3200400"/>
-            <a:ext cx="6400800" cy="36576"/>
-          </a:xfrm>
-          <a:prstGeom prst="rect">
-            <a:avLst/>
-          </a:prstGeom>
-          <a:solidFill>
-            <a:srgbClr val="C49A22"/>
-          </a:solidFill>
-          <a:ln>
-            <a:noFill/>
-          </a:ln>
-        </p:spPr>
-        <p:style>
-          <a:lnRef idx="1">
-            <a:schemeClr val="accent1"/>
-          </a:lnRef>
-          <a:fillRef idx="3">
-            <a:schemeClr val="accent1"/>
-          </a:fillRef>
-          <a:effectRef idx="2">
-            <a:schemeClr val="accent1"/>
-          </a:effectRef>
-          <a:fontRef idx="minor">
-            <a:schemeClr val="lt1"/>
-          </a:fontRef>
-        </p:style>
-        <p:txBody>
-          <a:bodyPr rtlCol="0" anchor="ctr"/>
-          <a:lstStyle/>
-          <a:p>
-            <a:pPr algn="ctr"/>
-          </a:p>
-        </p:txBody>
-      </p:sp>
-      <p:sp>
-        <p:nvSpPr>
-          <p:cNvPr id="5" name="TextBox 4"/>
-          <p:cNvSpPr txBox="1"/>
-          <p:nvPr/>
-        </p:nvSpPr>
-        <p:spPr>
-          <a:xfrm>
-            <a:off x="914400" y="3383280"/>
-            <a:ext cx="10058400" cy="548640"/>
-          </a:xfrm>
-          <a:prstGeom prst="rect">
-            <a:avLst/>
-          </a:prstGeom>
-          <a:noFill/>
-        </p:spPr>
-        <p:txBody>
-          <a:bodyPr wrap="square">
-            <a:spAutoFit/>
-          </a:bodyPr>
-          <a:lstStyle/>
-          <a:p>
-            <a:pPr algn="ctr"/>
-            <a:r>
-              <a:rPr sz="2000" b="0" i="0">
-                <a:solidFill>
-                  <a:srgbClr val="C49A22"/>
-                </a:solidFill>
-                <a:latin typeface="IPAGothic"/>
-              </a:rPr>
-              <a:t>食の全シーンに、然を。</a:t>
-            </a:r>
-          </a:p>
-        </p:txBody>
-      </p:sp>
-      <p:sp>
-        <p:nvSpPr>
-          <p:cNvPr id="6" name="Rectangle 5"/>
-          <p:cNvSpPr/>
-          <p:nvPr/>
-        </p:nvSpPr>
-        <p:spPr>
-          <a:xfrm>
-            <a:off x="2743200" y="4114800"/>
-            <a:ext cx="6400800" cy="1828800"/>
-          </a:xfrm>
-          <a:prstGeom prst="rect">
-            <a:avLst/>
-          </a:prstGeom>
-          <a:solidFill>
-            <a:srgbClr val="1E352A"/>
-          </a:solidFill>
-          <a:ln>
-            <a:noFill/>
-          </a:ln>
-        </p:spPr>
-        <p:style>
-          <a:lnRef idx="1">
-            <a:schemeClr val="accent1"/>
-          </a:lnRef>
-          <a:fillRef idx="3">
-            <a:schemeClr val="accent1"/>
-          </a:fillRef>
-          <a:effectRef idx="2">
-            <a:schemeClr val="accent1"/>
-          </a:effectRef>
-          <a:fontRef idx="minor">
-            <a:schemeClr val="lt1"/>
-          </a:fontRef>
-        </p:style>
-        <p:txBody>
-          <a:bodyPr rtlCol="0" anchor="ctr"/>
-          <a:lstStyle/>
-          <a:p>
-            <a:pPr algn="ctr"/>
-          </a:p>
-        </p:txBody>
-      </p:sp>
-      <p:sp>
-        <p:nvSpPr>
-          <p:cNvPr id="7" name="TextBox 6"/>
-          <p:cNvSpPr txBox="1"/>
-          <p:nvPr/>
-        </p:nvSpPr>
-        <p:spPr>
-          <a:xfrm>
-            <a:off x="2834640" y="4206240"/>
-            <a:ext cx="6217920" cy="457200"/>
-          </a:xfrm>
-          <a:prstGeom prst="rect">
-            <a:avLst/>
-          </a:prstGeom>
-          <a:noFill/>
-        </p:spPr>
-        <p:txBody>
-          <a:bodyPr wrap="square">
-            <a:spAutoFit/>
-          </a:bodyPr>
-          <a:lstStyle/>
-          <a:p>
-            <a:pPr algn="ctr"/>
-            <a:r>
-              <a:rPr sz="1800" b="1" i="0">
-                <a:solidFill>
-                  <a:srgbClr val="FFFFFF"/>
-                </a:solidFill>
-                <a:latin typeface="IPAGothic"/>
-              </a:rPr>
-              <a:t>然グループ 事業企画室</a:t>
-            </a:r>
-          </a:p>
-        </p:txBody>
-      </p:sp>
-      <p:sp>
-        <p:nvSpPr>
-          <p:cNvPr id="8" name="TextBox 7"/>
-          <p:cNvSpPr txBox="1"/>
-          <p:nvPr/>
-        </p:nvSpPr>
-        <p:spPr>
-          <a:xfrm>
-            <a:off x="2834640" y="4709160"/>
-            <a:ext cx="6217920" cy="411480"/>
-          </a:xfrm>
-          <a:prstGeom prst="rect">
-            <a:avLst/>
-          </a:prstGeom>
-          <a:noFill/>
-        </p:spPr>
-        <p:txBody>
-          <a:bodyPr wrap="square">
-            <a:spAutoFit/>
-          </a:bodyPr>
-          <a:lstStyle/>
-          <a:p>
-            <a:pPr algn="ctr"/>
-            <a:r>
-              <a:rPr sz="1400" b="0" i="0">
-                <a:solidFill>
-                  <a:srgbClr val="F0EEE8"/>
-                </a:solidFill>
-                <a:latin typeface="IPAGothic"/>
-              </a:rPr>
-              <a:t>Email：＿＿＿＿＿＿＿＿＿＿＿＿＿</a:t>
-            </a:r>
-          </a:p>
-        </p:txBody>
-      </p:sp>
-      <p:sp>
-        <p:nvSpPr>
-          <p:cNvPr id="9" name="TextBox 8"/>
-          <p:cNvSpPr txBox="1"/>
-          <p:nvPr/>
-        </p:nvSpPr>
-        <p:spPr>
-          <a:xfrm>
-            <a:off x="2834640" y="5120640"/>
-            <a:ext cx="6217920" cy="411480"/>
-          </a:xfrm>
-          <a:prstGeom prst="rect">
-            <a:avLst/>
-          </a:prstGeom>
-          <a:noFill/>
-        </p:spPr>
-        <p:txBody>
-          <a:bodyPr wrap="square">
-            <a:spAutoFit/>
-          </a:bodyPr>
-          <a:lstStyle/>
-          <a:p>
-            <a:pPr algn="ctr"/>
-            <a:r>
-              <a:rPr sz="1400" b="0" i="0">
-                <a:solidFill>
-                  <a:srgbClr val="F0EEE8"/>
-                </a:solidFill>
-                <a:latin typeface="IPAGothic"/>
-              </a:rPr>
-              <a:t>Tel：＿＿＿＿＿＿＿＿＿</a:t>
-            </a:r>
-          </a:p>
-        </p:txBody>
-      </p:sp>
-      <p:sp>
-        <p:nvSpPr>
-          <p:cNvPr id="10" name="TextBox 9"/>
-          <p:cNvSpPr txBox="1"/>
-          <p:nvPr/>
-        </p:nvSpPr>
-        <p:spPr>
-          <a:xfrm>
-            <a:off x="914400" y="6217920"/>
-            <a:ext cx="10058400" cy="365760"/>
-          </a:xfrm>
-          <a:prstGeom prst="rect">
-            <a:avLst/>
-          </a:prstGeom>
-          <a:noFill/>
-        </p:spPr>
-        <p:txBody>
-          <a:bodyPr wrap="square">
-            <a:spAutoFit/>
-          </a:bodyPr>
-          <a:lstStyle/>
-          <a:p>
-            <a:pPr algn="ctr"/>
-            <a:r>
-              <a:rPr sz="900" b="0" i="0">
-                <a:solidFill>
-                  <a:srgbClr val="C49A22"/>
-                </a:solidFill>
-                <a:latin typeface="IPAGothic"/>
-              </a:rPr>
-              <a:t>本資料は機密情報を含みます。無断転載・配布を禁じます。</a:t>
-            </a:r>
-          </a:p>
-        </p:txBody>
-      </p:sp>
     </p:spTree>
   </p:cSld>
   <p:clrMapOvr>
@@ -15713,6 +17665,363 @@
                 <a:latin typeface="IPAGothic"/>
               </a:rPr>
               <a:t>客単価 1,500円</a:t>
+            </a:r>
+          </a:p>
+        </p:txBody>
+      </p:sp>
+    </p:spTree>
+  </p:cSld>
+  <p:clrMapOvr>
+    <a:masterClrMapping/>
+  </p:clrMapOvr>
+</p:sld>
+</file>
+
+<file path=ppt/slides/slide20.xml><?xml version="1.0" encoding="utf-8"?>
+<p:sld xmlns:a="http://schemas.openxmlformats.org/drawingml/2006/main" xmlns:p="http://schemas.openxmlformats.org/presentationml/2006/main" xmlns:r="http://schemas.openxmlformats.org/officeDocument/2006/relationships">
+  <p:cSld>
+    <p:bg>
+      <p:bgPr>
+        <a:solidFill>
+          <a:srgbClr val="2C4A3E"/>
+        </a:solidFill>
+        <a:effectLst/>
+      </p:bgPr>
+    </p:bg>
+    <p:spTree>
+      <p:nvGrpSpPr>
+        <p:cNvPr id="1" name=""/>
+        <p:cNvGrpSpPr/>
+        <p:nvPr/>
+      </p:nvGrpSpPr>
+      <p:grpSpPr/>
+      <p:sp>
+        <p:nvSpPr>
+          <p:cNvPr id="2" name="TextBox 1"/>
+          <p:cNvSpPr txBox="1"/>
+          <p:nvPr/>
+        </p:nvSpPr>
+        <p:spPr>
+          <a:xfrm>
+            <a:off x="914400" y="1097280"/>
+            <a:ext cx="10058400" cy="1371600"/>
+          </a:xfrm>
+          <a:prstGeom prst="rect">
+            <a:avLst/>
+          </a:prstGeom>
+          <a:noFill/>
+        </p:spPr>
+        <p:txBody>
+          <a:bodyPr wrap="square">
+            <a:spAutoFit/>
+          </a:bodyPr>
+          <a:lstStyle/>
+          <a:p>
+            <a:pPr algn="ctr"/>
+            <a:r>
+              <a:rPr sz="5400" b="1" i="0">
+                <a:solidFill>
+                  <a:srgbClr val="FFFFFF"/>
+                </a:solidFill>
+                <a:latin typeface="IPAGothic"/>
+              </a:rPr>
+              <a:t>然グループ</a:t>
+            </a:r>
+          </a:p>
+        </p:txBody>
+      </p:sp>
+      <p:sp>
+        <p:nvSpPr>
+          <p:cNvPr id="3" name="TextBox 2"/>
+          <p:cNvSpPr txBox="1"/>
+          <p:nvPr/>
+        </p:nvSpPr>
+        <p:spPr>
+          <a:xfrm>
+            <a:off x="914400" y="2468880"/>
+            <a:ext cx="10058400" cy="457200"/>
+          </a:xfrm>
+          <a:prstGeom prst="rect">
+            <a:avLst/>
+          </a:prstGeom>
+          <a:noFill/>
+        </p:spPr>
+        <p:txBody>
+          <a:bodyPr wrap="square">
+            <a:spAutoFit/>
+          </a:bodyPr>
+          <a:lstStyle/>
+          <a:p>
+            <a:pPr algn="ctr"/>
+            <a:r>
+              <a:rPr sz="1600" b="0" i="1">
+                <a:solidFill>
+                  <a:srgbClr val="C49A22"/>
+                </a:solidFill>
+                <a:latin typeface="IPAGothic"/>
+              </a:rPr>
+              <a:t>ZEN GROUP</a:t>
+            </a:r>
+          </a:p>
+        </p:txBody>
+      </p:sp>
+      <p:sp>
+        <p:nvSpPr>
+          <p:cNvPr id="4" name="Rectangle 3"/>
+          <p:cNvSpPr/>
+          <p:nvPr/>
+        </p:nvSpPr>
+        <p:spPr>
+          <a:xfrm>
+            <a:off x="2743200" y="3200400"/>
+            <a:ext cx="6400800" cy="36576"/>
+          </a:xfrm>
+          <a:prstGeom prst="rect">
+            <a:avLst/>
+          </a:prstGeom>
+          <a:solidFill>
+            <a:srgbClr val="C49A22"/>
+          </a:solidFill>
+          <a:ln>
+            <a:noFill/>
+          </a:ln>
+        </p:spPr>
+        <p:style>
+          <a:lnRef idx="1">
+            <a:schemeClr val="accent1"/>
+          </a:lnRef>
+          <a:fillRef idx="3">
+            <a:schemeClr val="accent1"/>
+          </a:fillRef>
+          <a:effectRef idx="2">
+            <a:schemeClr val="accent1"/>
+          </a:effectRef>
+          <a:fontRef idx="minor">
+            <a:schemeClr val="lt1"/>
+          </a:fontRef>
+        </p:style>
+        <p:txBody>
+          <a:bodyPr rtlCol="0" anchor="ctr"/>
+          <a:lstStyle/>
+          <a:p>
+            <a:pPr algn="ctr"/>
+          </a:p>
+        </p:txBody>
+      </p:sp>
+      <p:sp>
+        <p:nvSpPr>
+          <p:cNvPr id="5" name="TextBox 4"/>
+          <p:cNvSpPr txBox="1"/>
+          <p:nvPr/>
+        </p:nvSpPr>
+        <p:spPr>
+          <a:xfrm>
+            <a:off x="914400" y="3383280"/>
+            <a:ext cx="10058400" cy="548640"/>
+          </a:xfrm>
+          <a:prstGeom prst="rect">
+            <a:avLst/>
+          </a:prstGeom>
+          <a:noFill/>
+        </p:spPr>
+        <p:txBody>
+          <a:bodyPr wrap="square">
+            <a:spAutoFit/>
+          </a:bodyPr>
+          <a:lstStyle/>
+          <a:p>
+            <a:pPr algn="ctr"/>
+            <a:r>
+              <a:rPr sz="2000" b="0" i="0">
+                <a:solidFill>
+                  <a:srgbClr val="C49A22"/>
+                </a:solidFill>
+                <a:latin typeface="IPAGothic"/>
+              </a:rPr>
+              <a:t>食の全シーンに、然を。</a:t>
+            </a:r>
+          </a:p>
+        </p:txBody>
+      </p:sp>
+      <p:sp>
+        <p:nvSpPr>
+          <p:cNvPr id="6" name="Rectangle 5"/>
+          <p:cNvSpPr/>
+          <p:nvPr/>
+        </p:nvSpPr>
+        <p:spPr>
+          <a:xfrm>
+            <a:off x="2743200" y="4114800"/>
+            <a:ext cx="6400800" cy="1828800"/>
+          </a:xfrm>
+          <a:prstGeom prst="rect">
+            <a:avLst/>
+          </a:prstGeom>
+          <a:solidFill>
+            <a:srgbClr val="1E352A"/>
+          </a:solidFill>
+          <a:ln>
+            <a:noFill/>
+          </a:ln>
+        </p:spPr>
+        <p:style>
+          <a:lnRef idx="1">
+            <a:schemeClr val="accent1"/>
+          </a:lnRef>
+          <a:fillRef idx="3">
+            <a:schemeClr val="accent1"/>
+          </a:fillRef>
+          <a:effectRef idx="2">
+            <a:schemeClr val="accent1"/>
+          </a:effectRef>
+          <a:fontRef idx="minor">
+            <a:schemeClr val="lt1"/>
+          </a:fontRef>
+        </p:style>
+        <p:txBody>
+          <a:bodyPr rtlCol="0" anchor="ctr"/>
+          <a:lstStyle/>
+          <a:p>
+            <a:pPr algn="ctr"/>
+          </a:p>
+        </p:txBody>
+      </p:sp>
+      <p:sp>
+        <p:nvSpPr>
+          <p:cNvPr id="7" name="TextBox 6"/>
+          <p:cNvSpPr txBox="1"/>
+          <p:nvPr/>
+        </p:nvSpPr>
+        <p:spPr>
+          <a:xfrm>
+            <a:off x="2834640" y="4206240"/>
+            <a:ext cx="6217920" cy="457200"/>
+          </a:xfrm>
+          <a:prstGeom prst="rect">
+            <a:avLst/>
+          </a:prstGeom>
+          <a:noFill/>
+        </p:spPr>
+        <p:txBody>
+          <a:bodyPr wrap="square">
+            <a:spAutoFit/>
+          </a:bodyPr>
+          <a:lstStyle/>
+          <a:p>
+            <a:pPr algn="ctr"/>
+            <a:r>
+              <a:rPr sz="1800" b="1" i="0">
+                <a:solidFill>
+                  <a:srgbClr val="FFFFFF"/>
+                </a:solidFill>
+                <a:latin typeface="IPAGothic"/>
+              </a:rPr>
+              <a:t>然グループ 事業企画室</a:t>
+            </a:r>
+          </a:p>
+        </p:txBody>
+      </p:sp>
+      <p:sp>
+        <p:nvSpPr>
+          <p:cNvPr id="8" name="TextBox 7"/>
+          <p:cNvSpPr txBox="1"/>
+          <p:nvPr/>
+        </p:nvSpPr>
+        <p:spPr>
+          <a:xfrm>
+            <a:off x="2834640" y="4709160"/>
+            <a:ext cx="6217920" cy="411480"/>
+          </a:xfrm>
+          <a:prstGeom prst="rect">
+            <a:avLst/>
+          </a:prstGeom>
+          <a:noFill/>
+        </p:spPr>
+        <p:txBody>
+          <a:bodyPr wrap="square">
+            <a:spAutoFit/>
+          </a:bodyPr>
+          <a:lstStyle/>
+          <a:p>
+            <a:pPr algn="ctr"/>
+            <a:r>
+              <a:rPr sz="1400" b="0" i="0">
+                <a:solidFill>
+                  <a:srgbClr val="F0EEE8"/>
+                </a:solidFill>
+                <a:latin typeface="IPAGothic"/>
+              </a:rPr>
+              <a:t>Email：＿＿＿＿＿＿＿＿＿＿＿＿＿</a:t>
+            </a:r>
+          </a:p>
+        </p:txBody>
+      </p:sp>
+      <p:sp>
+        <p:nvSpPr>
+          <p:cNvPr id="9" name="TextBox 8"/>
+          <p:cNvSpPr txBox="1"/>
+          <p:nvPr/>
+        </p:nvSpPr>
+        <p:spPr>
+          <a:xfrm>
+            <a:off x="2834640" y="5120640"/>
+            <a:ext cx="6217920" cy="411480"/>
+          </a:xfrm>
+          <a:prstGeom prst="rect">
+            <a:avLst/>
+          </a:prstGeom>
+          <a:noFill/>
+        </p:spPr>
+        <p:txBody>
+          <a:bodyPr wrap="square">
+            <a:spAutoFit/>
+          </a:bodyPr>
+          <a:lstStyle/>
+          <a:p>
+            <a:pPr algn="ctr"/>
+            <a:r>
+              <a:rPr sz="1400" b="0" i="0">
+                <a:solidFill>
+                  <a:srgbClr val="F0EEE8"/>
+                </a:solidFill>
+                <a:latin typeface="IPAGothic"/>
+              </a:rPr>
+              <a:t>Tel：＿＿＿＿＿＿＿＿＿</a:t>
+            </a:r>
+          </a:p>
+        </p:txBody>
+      </p:sp>
+      <p:sp>
+        <p:nvSpPr>
+          <p:cNvPr id="10" name="TextBox 9"/>
+          <p:cNvSpPr txBox="1"/>
+          <p:nvPr/>
+        </p:nvSpPr>
+        <p:spPr>
+          <a:xfrm>
+            <a:off x="914400" y="6217920"/>
+            <a:ext cx="10058400" cy="365760"/>
+          </a:xfrm>
+          <a:prstGeom prst="rect">
+            <a:avLst/>
+          </a:prstGeom>
+          <a:noFill/>
+        </p:spPr>
+        <p:txBody>
+          <a:bodyPr wrap="square">
+            <a:spAutoFit/>
+          </a:bodyPr>
+          <a:lstStyle/>
+          <a:p>
+            <a:pPr algn="ctr"/>
+            <a:r>
+              <a:rPr sz="900" b="0" i="0">
+                <a:solidFill>
+                  <a:srgbClr val="C49A22"/>
+                </a:solidFill>
+                <a:latin typeface="IPAGothic"/>
+              </a:rPr>
+              <a:t>本資料は機密情報を含みます。無断転載・配布を禁じます。</a:t>
             </a:r>
           </a:p>
         </p:txBody>

--- a/zen/07_融資・投資家資料/然グループ_統合ピッチデッキ_強化版.pptx
+++ b/zen/07_融資・投資家資料/然グループ_統合ピッチデッキ_強化版.pptx
@@ -8773,7 +8773,7 @@
                 </a:solidFill>
                 <a:latin typeface="IPAGothic"/>
               </a:rPr>
-              <a:t>執行役員（Y3昇格・初期採用から）</a:t>
+              <a:t>代表役員（オーナー）</a:t>
             </a:r>
           </a:p>
         </p:txBody>
@@ -8808,7 +8808,7 @@
                 </a:solidFill>
                 <a:latin typeface="IPAGothic"/>
               </a:rPr>
-              <a:t>※別途検討中</a:t>
+              <a:t>検討中　※Y1-Y2は最小限に抑え再投資優先</a:t>
             </a:r>
           </a:p>
         </p:txBody>
@@ -8843,7 +8843,7 @@
                 </a:solidFill>
                 <a:latin typeface="IPAGothic"/>
               </a:rPr>
-              <a:t>Y1入社→Y3執行役員昇格ルート</a:t>
+              <a:t>Y1-Y2:1名体制　Y3以降:2名体制へ</a:t>
             </a:r>
           </a:p>
         </p:txBody>
@@ -8964,7 +8964,7 @@
                 </a:solidFill>
                 <a:latin typeface="IPAGothic"/>
               </a:rPr>
-              <a:t>エリアSV（スーパーバイザー）</a:t>
+              <a:t>執行役員（Y3〜・初期採用から昇格）</a:t>
             </a:r>
           </a:p>
         </p:txBody>
@@ -8999,7 +8999,7 @@
                 </a:solidFill>
                 <a:latin typeface="IPAGothic"/>
               </a:rPr>
-              <a:t>38〜45万円/月</a:t>
+              <a:t>検討中　※Y3時点で執行役員に昇格</a:t>
             </a:r>
           </a:p>
         </p:txBody>
@@ -9034,7 +9034,7 @@
                 </a:solidFill>
                 <a:latin typeface="IPAGothic"/>
               </a:rPr>
-              <a:t>5〜7店舗を担当・Y3〜設置</a:t>
+              <a:t>Y1入社→Y3執行役員として経営参画</a:t>
             </a:r>
           </a:p>
         </p:txBody>
@@ -9155,7 +9155,7 @@
                 </a:solidFill>
                 <a:latin typeface="IPAGothic"/>
               </a:rPr>
-              <a:t>店長（正社員）</a:t>
+              <a:t>エリアSV（スーパーバイザー）</a:t>
             </a:r>
           </a:p>
         </p:txBody>
@@ -9190,7 +9190,7 @@
                 </a:solidFill>
                 <a:latin typeface="IPAGothic"/>
               </a:rPr>
-              <a:t>30〜38万円/月＋売上1%インセンティブ</a:t>
+              <a:t>38〜45万円/月</a:t>
             </a:r>
           </a:p>
         </p:txBody>
@@ -9225,7 +9225,7 @@
                 </a:solidFill>
                 <a:latin typeface="IPAGothic"/>
               </a:rPr>
-              <a:t>店舗運営・スタッフ育成</a:t>
+              <a:t>5〜7店舗を担当・Y3〜設置</a:t>
             </a:r>
           </a:p>
         </p:txBody>
@@ -9346,7 +9346,7 @@
                 </a:solidFill>
                 <a:latin typeface="IPAGothic"/>
               </a:rPr>
-              <a:t>副店長・社員</a:t>
+              <a:t>店長（正社員）</a:t>
             </a:r>
           </a:p>
         </p:txBody>
@@ -9381,7 +9381,7 @@
                 </a:solidFill>
                 <a:latin typeface="IPAGothic"/>
               </a:rPr>
-              <a:t>25〜30万円/月</a:t>
+              <a:t>30〜38万円/月 ＋ 売上1%インセンティブ</a:t>
             </a:r>
           </a:p>
         </p:txBody>
@@ -9416,7 +9416,7 @@
                 </a:solidFill>
                 <a:latin typeface="IPAGothic"/>
               </a:rPr>
-              <a:t>調理・ホール・発注</a:t>
+              <a:t>例：月商960万→インセンティブ約9.6万</a:t>
             </a:r>
           </a:p>
         </p:txBody>
@@ -9607,7 +9607,7 @@
                 </a:solidFill>
                 <a:latin typeface="IPAGothic"/>
               </a:rPr>
-              <a:t>ホール・キッチン補助</a:t>
+              <a:t>蕎麦然2名/店、だし然・肉酒場然3名/店</a:t>
             </a:r>
           </a:p>
         </p:txBody>
@@ -9700,7 +9700,7 @@
         </p:nvGraphicFramePr>
         <p:xfrm>
           <a:off x="274320" y="4663440"/>
-          <a:ext cx="11612880" cy="2011680"/>
+          <a:ext cx="11612880" cy="2057400"/>
         </p:xfrm>
         <a:graphic>
           <a:graphicData uri="http://schemas.openxmlformats.org/drawingml/2006/table">
@@ -9716,7 +9716,7 @@
                 <a:gridCol w="1935480"/>
                 <a:gridCol w="1935480"/>
               </a:tblGrid>
-              <a:tr h="287382">
+              <a:tr h="257175">
                 <a:tc>
                   <a:txBody>
                     <a:bodyPr/>
@@ -9856,7 +9856,7 @@
                   </a:tcPr>
                 </a:tc>
               </a:tr>
-              <a:tr h="287382">
+              <a:tr h="257175">
                 <a:tc>
                   <a:txBody>
                     <a:bodyPr/>
@@ -9870,7 +9870,7 @@
                           </a:solidFill>
                           <a:latin typeface="IPAGothic"/>
                         </a:rPr>
-                        <a:t>店舗数</a:t>
+                        <a:t>店舗数（直営＋FC）</a:t>
                       </a:r>
                     </a:p>
                   </a:txBody>
@@ -9996,7 +9996,7 @@
                   </a:tcPr>
                 </a:tc>
               </a:tr>
-              <a:tr h="287382">
+              <a:tr h="257175">
                 <a:tc>
                   <a:txBody>
                     <a:bodyPr/>
@@ -10010,12 +10010,292 @@
                           </a:solidFill>
                           <a:latin typeface="IPAGothic"/>
                         </a:rPr>
+                        <a:t>役員（名）</a:t>
+                      </a:r>
+                    </a:p>
+                  </a:txBody>
+                  <a:tcPr>
+                    <a:solidFill>
+                      <a:srgbClr val="FFFFFF"/>
+                    </a:solidFill>
+                  </a:tcPr>
+                </a:tc>
+                <a:tc>
+                  <a:txBody>
+                    <a:bodyPr/>
+                    <a:lstStyle/>
+                    <a:p>
+                      <a:pPr algn="ctr"/>
+                      <a:r>
+                        <a:rPr sz="1000">
+                          <a:solidFill>
+                            <a:srgbClr val="1A1A1A"/>
+                          </a:solidFill>
+                          <a:latin typeface="IPAGothic"/>
+                        </a:rPr>
+                        <a:t>1</a:t>
+                      </a:r>
+                    </a:p>
+                  </a:txBody>
+                  <a:tcPr>
+                    <a:solidFill>
+                      <a:srgbClr val="FFFFFF"/>
+                    </a:solidFill>
+                  </a:tcPr>
+                </a:tc>
+                <a:tc>
+                  <a:txBody>
+                    <a:bodyPr/>
+                    <a:lstStyle/>
+                    <a:p>
+                      <a:pPr algn="ctr"/>
+                      <a:r>
+                        <a:rPr sz="1000">
+                          <a:solidFill>
+                            <a:srgbClr val="1A1A1A"/>
+                          </a:solidFill>
+                          <a:latin typeface="IPAGothic"/>
+                        </a:rPr>
+                        <a:t>1</a:t>
+                      </a:r>
+                    </a:p>
+                  </a:txBody>
+                  <a:tcPr>
+                    <a:solidFill>
+                      <a:srgbClr val="FFFFFF"/>
+                    </a:solidFill>
+                  </a:tcPr>
+                </a:tc>
+                <a:tc>
+                  <a:txBody>
+                    <a:bodyPr/>
+                    <a:lstStyle/>
+                    <a:p>
+                      <a:pPr algn="ctr"/>
+                      <a:r>
+                        <a:rPr sz="1000">
+                          <a:solidFill>
+                            <a:srgbClr val="1A1A1A"/>
+                          </a:solidFill>
+                          <a:latin typeface="IPAGothic"/>
+                        </a:rPr>
+                        <a:t>2</a:t>
+                      </a:r>
+                    </a:p>
+                  </a:txBody>
+                  <a:tcPr>
+                    <a:solidFill>
+                      <a:srgbClr val="FFFFFF"/>
+                    </a:solidFill>
+                  </a:tcPr>
+                </a:tc>
+                <a:tc>
+                  <a:txBody>
+                    <a:bodyPr/>
+                    <a:lstStyle/>
+                    <a:p>
+                      <a:pPr algn="ctr"/>
+                      <a:r>
+                        <a:rPr sz="1000">
+                          <a:solidFill>
+                            <a:srgbClr val="1A1A1A"/>
+                          </a:solidFill>
+                          <a:latin typeface="IPAGothic"/>
+                        </a:rPr>
+                        <a:t>2</a:t>
+                      </a:r>
+                    </a:p>
+                  </a:txBody>
+                  <a:tcPr>
+                    <a:solidFill>
+                      <a:srgbClr val="FFFFFF"/>
+                    </a:solidFill>
+                  </a:tcPr>
+                </a:tc>
+                <a:tc>
+                  <a:txBody>
+                    <a:bodyPr/>
+                    <a:lstStyle/>
+                    <a:p>
+                      <a:pPr algn="ctr"/>
+                      <a:r>
+                        <a:rPr sz="1000">
+                          <a:solidFill>
+                            <a:srgbClr val="1A1A1A"/>
+                          </a:solidFill>
+                          <a:latin typeface="IPAGothic"/>
+                        </a:rPr>
+                        <a:t>2</a:t>
+                      </a:r>
+                    </a:p>
+                  </a:txBody>
+                  <a:tcPr>
+                    <a:solidFill>
+                      <a:srgbClr val="FFFFFF"/>
+                    </a:solidFill>
+                  </a:tcPr>
+                </a:tc>
+              </a:tr>
+              <a:tr h="257175">
+                <a:tc>
+                  <a:txBody>
+                    <a:bodyPr/>
+                    <a:lstStyle/>
+                    <a:p>
+                      <a:pPr algn="ctr"/>
+                      <a:r>
+                        <a:rPr sz="1000">
+                          <a:solidFill>
+                            <a:srgbClr val="1A1A1A"/>
+                          </a:solidFill>
+                          <a:latin typeface="IPAGothic"/>
+                        </a:rPr>
                         <a:t>本部・SV（名）</a:t>
                       </a:r>
                     </a:p>
                   </a:txBody>
                   <a:tcPr>
                     <a:solidFill>
+                      <a:srgbClr val="F0EEE8"/>
+                    </a:solidFill>
+                  </a:tcPr>
+                </a:tc>
+                <a:tc>
+                  <a:txBody>
+                    <a:bodyPr/>
+                    <a:lstStyle/>
+                    <a:p>
+                      <a:pPr algn="ctr"/>
+                      <a:r>
+                        <a:rPr sz="1000">
+                          <a:solidFill>
+                            <a:srgbClr val="1A1A1A"/>
+                          </a:solidFill>
+                          <a:latin typeface="IPAGothic"/>
+                        </a:rPr>
+                        <a:t>1</a:t>
+                      </a:r>
+                    </a:p>
+                  </a:txBody>
+                  <a:tcPr>
+                    <a:solidFill>
+                      <a:srgbClr val="F0EEE8"/>
+                    </a:solidFill>
+                  </a:tcPr>
+                </a:tc>
+                <a:tc>
+                  <a:txBody>
+                    <a:bodyPr/>
+                    <a:lstStyle/>
+                    <a:p>
+                      <a:pPr algn="ctr"/>
+                      <a:r>
+                        <a:rPr sz="1000">
+                          <a:solidFill>
+                            <a:srgbClr val="1A1A1A"/>
+                          </a:solidFill>
+                          <a:latin typeface="IPAGothic"/>
+                        </a:rPr>
+                        <a:t>3</a:t>
+                      </a:r>
+                    </a:p>
+                  </a:txBody>
+                  <a:tcPr>
+                    <a:solidFill>
+                      <a:srgbClr val="F0EEE8"/>
+                    </a:solidFill>
+                  </a:tcPr>
+                </a:tc>
+                <a:tc>
+                  <a:txBody>
+                    <a:bodyPr/>
+                    <a:lstStyle/>
+                    <a:p>
+                      <a:pPr algn="ctr"/>
+                      <a:r>
+                        <a:rPr sz="1000">
+                          <a:solidFill>
+                            <a:srgbClr val="1A1A1A"/>
+                          </a:solidFill>
+                          <a:latin typeface="IPAGothic"/>
+                        </a:rPr>
+                        <a:t>5</a:t>
+                      </a:r>
+                    </a:p>
+                  </a:txBody>
+                  <a:tcPr>
+                    <a:solidFill>
+                      <a:srgbClr val="F0EEE8"/>
+                    </a:solidFill>
+                  </a:tcPr>
+                </a:tc>
+                <a:tc>
+                  <a:txBody>
+                    <a:bodyPr/>
+                    <a:lstStyle/>
+                    <a:p>
+                      <a:pPr algn="ctr"/>
+                      <a:r>
+                        <a:rPr sz="1000">
+                          <a:solidFill>
+                            <a:srgbClr val="1A1A1A"/>
+                          </a:solidFill>
+                          <a:latin typeface="IPAGothic"/>
+                        </a:rPr>
+                        <a:t>8</a:t>
+                      </a:r>
+                    </a:p>
+                  </a:txBody>
+                  <a:tcPr>
+                    <a:solidFill>
+                      <a:srgbClr val="F0EEE8"/>
+                    </a:solidFill>
+                  </a:tcPr>
+                </a:tc>
+                <a:tc>
+                  <a:txBody>
+                    <a:bodyPr/>
+                    <a:lstStyle/>
+                    <a:p>
+                      <a:pPr algn="ctr"/>
+                      <a:r>
+                        <a:rPr sz="1000">
+                          <a:solidFill>
+                            <a:srgbClr val="1A1A1A"/>
+                          </a:solidFill>
+                          <a:latin typeface="IPAGothic"/>
+                        </a:rPr>
+                        <a:t>10</a:t>
+                      </a:r>
+                    </a:p>
+                  </a:txBody>
+                  <a:tcPr>
+                    <a:solidFill>
+                      <a:srgbClr val="F0EEE8"/>
+                    </a:solidFill>
+                  </a:tcPr>
+                </a:tc>
+              </a:tr>
+              <a:tr h="257175">
+                <a:tc>
+                  <a:txBody>
+                    <a:bodyPr/>
+                    <a:lstStyle/>
+                    <a:p>
+                      <a:pPr algn="ctr"/>
+                      <a:r>
+                        <a:rPr sz="1000">
+                          <a:solidFill>
+                            <a:srgbClr val="1A1A1A"/>
+                          </a:solidFill>
+                          <a:latin typeface="IPAGothic"/>
+                        </a:rPr>
+                        <a:t>店舗社員（名）</a:t>
+                      </a:r>
+                    </a:p>
+                  </a:txBody>
+                  <a:tcPr>
+                    <a:solidFill>
                       <a:srgbClr val="FFFFFF"/>
                     </a:solidFill>
                   </a:tcPr>
@@ -10033,7 +10313,7 @@
                           </a:solidFill>
                           <a:latin typeface="IPAGothic"/>
                         </a:rPr>
-                        <a:t>2</a:t>
+                        <a:t>5</a:t>
                       </a:r>
                     </a:p>
                   </a:txBody>
@@ -10056,7 +10336,7 @@
                           </a:solidFill>
                           <a:latin typeface="IPAGothic"/>
                         </a:rPr>
-                        <a:t>4</a:t>
+                        <a:t>15</a:t>
                       </a:r>
                     </a:p>
                   </a:txBody>
@@ -10079,7 +10359,7 @@
                           </a:solidFill>
                           <a:latin typeface="IPAGothic"/>
                         </a:rPr>
-                        <a:t>7</a:t>
+                        <a:t>34</a:t>
                       </a:r>
                     </a:p>
                   </a:txBody>
@@ -10102,7 +10382,7 @@
                           </a:solidFill>
                           <a:latin typeface="IPAGothic"/>
                         </a:rPr>
-                        <a:t>10</a:t>
+                        <a:t>55</a:t>
                       </a:r>
                     </a:p>
                   </a:txBody>
@@ -10125,7 +10405,7 @@
                           </a:solidFill>
                           <a:latin typeface="IPAGothic"/>
                         </a:rPr>
-                        <a:t>12</a:t>
+                        <a:t>80</a:t>
                       </a:r>
                     </a:p>
                   </a:txBody>
@@ -10136,7 +10416,7 @@
                   </a:tcPr>
                 </a:tc>
               </a:tr>
-              <a:tr h="287382">
+              <a:tr h="257175">
                 <a:tc>
                   <a:txBody>
                     <a:bodyPr/>
@@ -10150,7 +10430,7 @@
                           </a:solidFill>
                           <a:latin typeface="IPAGothic"/>
                         </a:rPr>
-                        <a:t>店舗社員（名）</a:t>
+                        <a:t>アルバイト（名）</a:t>
                       </a:r>
                     </a:p>
                   </a:txBody>
@@ -10173,7 +10453,7 @@
                           </a:solidFill>
                           <a:latin typeface="IPAGothic"/>
                         </a:rPr>
-                        <a:t>6</a:t>
+                        <a:t>8</a:t>
                       </a:r>
                     </a:p>
                   </a:txBody>
@@ -10196,7 +10476,7 @@
                           </a:solidFill>
                           <a:latin typeface="IPAGothic"/>
                         </a:rPr>
-                        <a:t>18</a:t>
+                        <a:t>24</a:t>
                       </a:r>
                     </a:p>
                   </a:txBody>
@@ -10219,7 +10499,7 @@
                           </a:solidFill>
                           <a:latin typeface="IPAGothic"/>
                         </a:rPr>
-                        <a:t>48</a:t>
+                        <a:t>56</a:t>
                       </a:r>
                     </a:p>
                   </a:txBody>
@@ -10242,7 +10522,7 @@
                           </a:solidFill>
                           <a:latin typeface="IPAGothic"/>
                         </a:rPr>
-                        <a:t>77</a:t>
+                        <a:t>90</a:t>
                       </a:r>
                     </a:p>
                   </a:txBody>
@@ -10265,7 +10545,7 @@
                           </a:solidFill>
                           <a:latin typeface="IPAGothic"/>
                         </a:rPr>
-                        <a:t>121</a:t>
+                        <a:t>135</a:t>
                       </a:r>
                     </a:p>
                   </a:txBody>
@@ -10276,7 +10556,7 @@
                   </a:tcPr>
                 </a:tc>
               </a:tr>
-              <a:tr h="287382">
+              <a:tr h="257175">
                 <a:tc>
                   <a:txBody>
                     <a:bodyPr/>
@@ -10290,7 +10570,7 @@
                           </a:solidFill>
                           <a:latin typeface="IPAGothic"/>
                         </a:rPr>
-                        <a:t>アルバイト（名）</a:t>
+                        <a:t>総人員（名）</a:t>
                       </a:r>
                     </a:p>
                   </a:txBody>
@@ -10313,7 +10593,7 @@
                           </a:solidFill>
                           <a:latin typeface="IPAGothic"/>
                         </a:rPr>
-                        <a:t>9</a:t>
+                        <a:t>15</a:t>
                       </a:r>
                     </a:p>
                   </a:txBody>
@@ -10336,7 +10616,7 @@
                           </a:solidFill>
                           <a:latin typeface="IPAGothic"/>
                         </a:rPr>
-                        <a:t>27</a:t>
+                        <a:t>43</a:t>
                       </a:r>
                     </a:p>
                   </a:txBody>
@@ -10359,7 +10639,7 @@
                           </a:solidFill>
                           <a:latin typeface="IPAGothic"/>
                         </a:rPr>
-                        <a:t>66</a:t>
+                        <a:t>97</a:t>
                       </a:r>
                     </a:p>
                   </a:txBody>
@@ -10382,7 +10662,7 @@
                           </a:solidFill>
                           <a:latin typeface="IPAGothic"/>
                         </a:rPr>
-                        <a:t>105</a:t>
+                        <a:t>155</a:t>
                       </a:r>
                     </a:p>
                   </a:txBody>
@@ -10405,7 +10685,7 @@
                           </a:solidFill>
                           <a:latin typeface="IPAGothic"/>
                         </a:rPr>
-                        <a:t>165</a:t>
+                        <a:t>227</a:t>
                       </a:r>
                     </a:p>
                   </a:txBody>
@@ -10416,7 +10696,7 @@
                   </a:tcPr>
                 </a:tc>
               </a:tr>
-              <a:tr h="287382">
+              <a:tr h="257175">
                 <a:tc>
                   <a:txBody>
                     <a:bodyPr/>
@@ -10430,7 +10710,7 @@
                           </a:solidFill>
                           <a:latin typeface="IPAGothic"/>
                         </a:rPr>
-                        <a:t>総人員（名）</a:t>
+                        <a:t>人件費（万円）</a:t>
                       </a:r>
                     </a:p>
                   </a:txBody>
@@ -10453,7 +10733,7 @@
                           </a:solidFill>
                           <a:latin typeface="IPAGothic"/>
                         </a:rPr>
-                        <a:t>17</a:t>
+                        <a:t>3,840</a:t>
                       </a:r>
                     </a:p>
                   </a:txBody>
@@ -10476,7 +10756,7 @@
                           </a:solidFill>
                           <a:latin typeface="IPAGothic"/>
                         </a:rPr>
-                        <a:t>49</a:t>
+                        <a:t>9,200</a:t>
                       </a:r>
                     </a:p>
                   </a:txBody>
@@ -10499,7 +10779,7 @@
                           </a:solidFill>
                           <a:latin typeface="IPAGothic"/>
                         </a:rPr>
-                        <a:t>121</a:t>
+                        <a:t>16,480</a:t>
                       </a:r>
                     </a:p>
                   </a:txBody>
@@ -10522,7 +10802,7 @@
                           </a:solidFill>
                           <a:latin typeface="IPAGothic"/>
                         </a:rPr>
-                        <a:t>192</a:t>
+                        <a:t>29,000</a:t>
                       </a:r>
                     </a:p>
                   </a:txBody>
@@ -10545,153 +10825,13 @@
                           </a:solidFill>
                           <a:latin typeface="IPAGothic"/>
                         </a:rPr>
-                        <a:t>298</a:t>
+                        <a:t>46,000</a:t>
                       </a:r>
                     </a:p>
                   </a:txBody>
                   <a:tcPr>
                     <a:solidFill>
                       <a:srgbClr val="F0EEE8"/>
-                    </a:solidFill>
-                  </a:tcPr>
-                </a:tc>
-              </a:tr>
-              <a:tr h="287388">
-                <a:tc>
-                  <a:txBody>
-                    <a:bodyPr/>
-                    <a:lstStyle/>
-                    <a:p>
-                      <a:pPr algn="ctr"/>
-                      <a:r>
-                        <a:rPr sz="1000">
-                          <a:solidFill>
-                            <a:srgbClr val="1A1A1A"/>
-                          </a:solidFill>
-                          <a:latin typeface="IPAGothic"/>
-                        </a:rPr>
-                        <a:t>人件費（万円）</a:t>
-                      </a:r>
-                    </a:p>
-                  </a:txBody>
-                  <a:tcPr>
-                    <a:solidFill>
-                      <a:srgbClr val="FFFFFF"/>
-                    </a:solidFill>
-                  </a:tcPr>
-                </a:tc>
-                <a:tc>
-                  <a:txBody>
-                    <a:bodyPr/>
-                    <a:lstStyle/>
-                    <a:p>
-                      <a:pPr algn="ctr"/>
-                      <a:r>
-                        <a:rPr sz="1000">
-                          <a:solidFill>
-                            <a:srgbClr val="1A1A1A"/>
-                          </a:solidFill>
-                          <a:latin typeface="IPAGothic"/>
-                        </a:rPr>
-                        <a:t>3,840</a:t>
-                      </a:r>
-                    </a:p>
-                  </a:txBody>
-                  <a:tcPr>
-                    <a:solidFill>
-                      <a:srgbClr val="FFFFFF"/>
-                    </a:solidFill>
-                  </a:tcPr>
-                </a:tc>
-                <a:tc>
-                  <a:txBody>
-                    <a:bodyPr/>
-                    <a:lstStyle/>
-                    <a:p>
-                      <a:pPr algn="ctr"/>
-                      <a:r>
-                        <a:rPr sz="1000">
-                          <a:solidFill>
-                            <a:srgbClr val="1A1A1A"/>
-                          </a:solidFill>
-                          <a:latin typeface="IPAGothic"/>
-                        </a:rPr>
-                        <a:t>9,200</a:t>
-                      </a:r>
-                    </a:p>
-                  </a:txBody>
-                  <a:tcPr>
-                    <a:solidFill>
-                      <a:srgbClr val="FFFFFF"/>
-                    </a:solidFill>
-                  </a:tcPr>
-                </a:tc>
-                <a:tc>
-                  <a:txBody>
-                    <a:bodyPr/>
-                    <a:lstStyle/>
-                    <a:p>
-                      <a:pPr algn="ctr"/>
-                      <a:r>
-                        <a:rPr sz="1000">
-                          <a:solidFill>
-                            <a:srgbClr val="1A1A1A"/>
-                          </a:solidFill>
-                          <a:latin typeface="IPAGothic"/>
-                        </a:rPr>
-                        <a:t>16,480</a:t>
-                      </a:r>
-                    </a:p>
-                  </a:txBody>
-                  <a:tcPr>
-                    <a:solidFill>
-                      <a:srgbClr val="FFFFFF"/>
-                    </a:solidFill>
-                  </a:tcPr>
-                </a:tc>
-                <a:tc>
-                  <a:txBody>
-                    <a:bodyPr/>
-                    <a:lstStyle/>
-                    <a:p>
-                      <a:pPr algn="ctr"/>
-                      <a:r>
-                        <a:rPr sz="1000">
-                          <a:solidFill>
-                            <a:srgbClr val="1A1A1A"/>
-                          </a:solidFill>
-                          <a:latin typeface="IPAGothic"/>
-                        </a:rPr>
-                        <a:t>29,000</a:t>
-                      </a:r>
-                    </a:p>
-                  </a:txBody>
-                  <a:tcPr>
-                    <a:solidFill>
-                      <a:srgbClr val="FFFFFF"/>
-                    </a:solidFill>
-                  </a:tcPr>
-                </a:tc>
-                <a:tc>
-                  <a:txBody>
-                    <a:bodyPr/>
-                    <a:lstStyle/>
-                    <a:p>
-                      <a:pPr algn="ctr"/>
-                      <a:r>
-                        <a:rPr sz="1000">
-                          <a:solidFill>
-                            <a:srgbClr val="1A1A1A"/>
-                          </a:solidFill>
-                          <a:latin typeface="IPAGothic"/>
-                        </a:rPr>
-                        <a:t>46,000</a:t>
-                      </a:r>
-                    </a:p>
-                  </a:txBody>
-                  <a:tcPr>
-                    <a:solidFill>
-                      <a:srgbClr val="FFFFFF"/>
                     </a:solidFill>
                   </a:tcPr>
                 </a:tc>
@@ -10708,8 +10848,8 @@
         </p:nvSpPr>
         <p:spPr>
           <a:xfrm>
-            <a:off x="365760" y="6720840"/>
-            <a:ext cx="11612880" cy="274320"/>
+            <a:off x="365760" y="6748272"/>
+            <a:ext cx="11612880" cy="256032"/>
           </a:xfrm>
           <a:prstGeom prst="rect">
             <a:avLst/>
@@ -10730,7 +10870,7 @@
                 </a:solidFill>
                 <a:latin typeface="IPAGothic"/>
               </a:rPr>
-              <a:t>※ 店舗社員は各店2〜3名（店長1＋社員1〜2）、アルバイトは各店3名で計算　／　店長インセンティブ：月次売上の1%（例：だし然960万円/月 → 約9.6万円/月）</a:t>
+              <a:t>※ 蕎麦然:社員1名＋アルバイト2名/店　だし然・肉酒場然:社員2名＋アルバイト3名/店　役員報酬は別途設計予定</a:t>
             </a:r>
           </a:p>
         </p:txBody>

--- a/zen/07_融資・投資家資料/然グループ_統合ピッチデッキ_強化版.pptx
+++ b/zen/07_融資・投資家資料/然グループ_統合ピッチデッキ_強化版.pptx
@@ -8665,8 +8665,8 @@
         </p:nvSpPr>
         <p:spPr>
           <a:xfrm>
-            <a:off x="6675120" y="1399032"/>
-            <a:ext cx="5212080" cy="612648"/>
+            <a:off x="6675120" y="1371600"/>
+            <a:ext cx="5212080" cy="713232"/>
           </a:xfrm>
           <a:prstGeom prst="rect">
             <a:avLst/>
@@ -8708,8 +8708,8 @@
         </p:nvSpPr>
         <p:spPr>
           <a:xfrm>
-            <a:off x="6675120" y="1399032"/>
-            <a:ext cx="73152" cy="612648"/>
+            <a:off x="6675120" y="1371600"/>
+            <a:ext cx="73152" cy="713232"/>
           </a:xfrm>
           <a:prstGeom prst="rect">
             <a:avLst/>
@@ -8751,8 +8751,8 @@
         </p:nvSpPr>
         <p:spPr>
           <a:xfrm>
-            <a:off x="6812280" y="1426464"/>
-            <a:ext cx="4937760" cy="274320"/>
+            <a:off x="6812280" y="1399032"/>
+            <a:ext cx="4937760" cy="256032"/>
           </a:xfrm>
           <a:prstGeom prst="rect">
             <a:avLst/>
@@ -8767,7 +8767,7 @@
           <a:p>
             <a:pPr algn="l"/>
             <a:r>
-              <a:rPr sz="950" b="1" i="0">
+              <a:rPr sz="900" b="1" i="0">
                 <a:solidFill>
                   <a:srgbClr val="8B2020"/>
                 </a:solidFill>
@@ -8786,7 +8786,7 @@
         </p:nvSpPr>
         <p:spPr>
           <a:xfrm>
-            <a:off x="6812280" y="1700784"/>
+            <a:off x="6812280" y="1645920"/>
             <a:ext cx="4937760" cy="274320"/>
           </a:xfrm>
           <a:prstGeom prst="rect">
@@ -8802,13 +8802,14 @@
           <a:p>
             <a:pPr algn="l"/>
             <a:r>
-              <a:rPr sz="900" b="0" i="0">
+              <a:rPr sz="850" b="0" i="0">
                 <a:solidFill>
                   <a:srgbClr val="1A1A1A"/>
                 </a:solidFill>
                 <a:latin typeface="IPAGothic"/>
               </a:rPr>
-              <a:t>検討中　※Y1-Y2は最小限に抑え再投資優先</a:t>
+              <a:t>Y1: 30〜40万円/月（個人コンサル報酬と並行）
+Y2以降: 未定</a:t>
             </a:r>
           </a:p>
         </p:txBody>
@@ -8821,8 +8822,8 @@
         </p:nvSpPr>
         <p:spPr>
           <a:xfrm>
-            <a:off x="6812280" y="1856232"/>
-            <a:ext cx="4937760" cy="164592"/>
+            <a:off x="6812280" y="1901952"/>
+            <a:ext cx="4937760" cy="182880"/>
           </a:xfrm>
           <a:prstGeom prst="rect">
             <a:avLst/>
@@ -8837,13 +8838,13 @@
           <a:p>
             <a:pPr algn="l"/>
             <a:r>
-              <a:rPr sz="800" b="0" i="1">
+              <a:rPr sz="750" b="0" i="1">
                 <a:solidFill>
                   <a:srgbClr val="1A1A1A"/>
                 </a:solidFill>
                 <a:latin typeface="IPAGothic"/>
               </a:rPr>
-              <a:t>Y1-Y2:1名体制　Y3以降:2名体制へ</a:t>
+              <a:t>Y1-Y2は1名体制 → Y3から2名体制へ</a:t>
             </a:r>
           </a:p>
         </p:txBody>
@@ -8856,8 +8857,8 @@
         </p:nvSpPr>
         <p:spPr>
           <a:xfrm>
-            <a:off x="6675120" y="2057400"/>
-            <a:ext cx="5212080" cy="612648"/>
+            <a:off x="6675120" y="2121408"/>
+            <a:ext cx="5212080" cy="713232"/>
           </a:xfrm>
           <a:prstGeom prst="rect">
             <a:avLst/>
@@ -8899,8 +8900,200 @@
         </p:nvSpPr>
         <p:spPr>
           <a:xfrm>
-            <a:off x="6675120" y="2057400"/>
-            <a:ext cx="73152" cy="612648"/>
+            <a:off x="6675120" y="2121408"/>
+            <a:ext cx="73152" cy="713232"/>
+          </a:xfrm>
+          <a:prstGeom prst="rect">
+            <a:avLst/>
+          </a:prstGeom>
+          <a:solidFill>
+            <a:srgbClr val="8B2020"/>
+          </a:solidFill>
+          <a:ln>
+            <a:noFill/>
+          </a:ln>
+        </p:spPr>
+        <p:style>
+          <a:lnRef idx="1">
+            <a:schemeClr val="accent1"/>
+          </a:lnRef>
+          <a:fillRef idx="3">
+            <a:schemeClr val="accent1"/>
+          </a:fillRef>
+          <a:effectRef idx="2">
+            <a:schemeClr val="accent1"/>
+          </a:effectRef>
+          <a:fontRef idx="minor">
+            <a:schemeClr val="lt1"/>
+          </a:fontRef>
+        </p:style>
+        <p:txBody>
+          <a:bodyPr rtlCol="0" anchor="ctr"/>
+          <a:lstStyle/>
+          <a:p>
+            <a:pPr algn="ctr"/>
+          </a:p>
+        </p:txBody>
+      </p:sp>
+      <p:sp>
+        <p:nvSpPr>
+          <p:cNvPr id="15" name="TextBox 14"/>
+          <p:cNvSpPr txBox="1"/>
+          <p:nvPr/>
+        </p:nvSpPr>
+        <p:spPr>
+          <a:xfrm>
+            <a:off x="6812280" y="2148840"/>
+            <a:ext cx="4937760" cy="256032"/>
+          </a:xfrm>
+          <a:prstGeom prst="rect">
+            <a:avLst/>
+          </a:prstGeom>
+          <a:noFill/>
+        </p:spPr>
+        <p:txBody>
+          <a:bodyPr wrap="square">
+            <a:spAutoFit/>
+          </a:bodyPr>
+          <a:lstStyle/>
+          <a:p>
+            <a:pPr algn="l"/>
+            <a:r>
+              <a:rPr sz="900" b="1" i="0">
+                <a:solidFill>
+                  <a:srgbClr val="8B2020"/>
+                </a:solidFill>
+                <a:latin typeface="IPAGothic"/>
+              </a:rPr>
+              <a:t>執行役員候補（Y1-Y2は社員・Y3〜昇格）</a:t>
+            </a:r>
+          </a:p>
+        </p:txBody>
+      </p:sp>
+      <p:sp>
+        <p:nvSpPr>
+          <p:cNvPr id="16" name="TextBox 15"/>
+          <p:cNvSpPr txBox="1"/>
+          <p:nvPr/>
+        </p:nvSpPr>
+        <p:spPr>
+          <a:xfrm>
+            <a:off x="6812280" y="2395728"/>
+            <a:ext cx="4937760" cy="274320"/>
+          </a:xfrm>
+          <a:prstGeom prst="rect">
+            <a:avLst/>
+          </a:prstGeom>
+          <a:noFill/>
+        </p:spPr>
+        <p:txBody>
+          <a:bodyPr wrap="square">
+            <a:spAutoFit/>
+          </a:bodyPr>
+          <a:lstStyle/>
+          <a:p>
+            <a:pPr algn="l"/>
+            <a:r>
+              <a:rPr sz="850" b="0" i="0">
+                <a:solidFill>
+                  <a:srgbClr val="1A1A1A"/>
+                </a:solidFill>
+                <a:latin typeface="IPAGothic"/>
+              </a:rPr>
+              <a:t>Y1-Y2: 50万円/月（固定）＋ 担当売上1%インセンティブ
+Y3〜: 執行役員（報酬は別途設計）</a:t>
+            </a:r>
+          </a:p>
+        </p:txBody>
+      </p:sp>
+      <p:sp>
+        <p:nvSpPr>
+          <p:cNvPr id="17" name="TextBox 16"/>
+          <p:cNvSpPr txBox="1"/>
+          <p:nvPr/>
+        </p:nvSpPr>
+        <p:spPr>
+          <a:xfrm>
+            <a:off x="6812280" y="2651760"/>
+            <a:ext cx="4937760" cy="182880"/>
+          </a:xfrm>
+          <a:prstGeom prst="rect">
+            <a:avLst/>
+          </a:prstGeom>
+          <a:noFill/>
+        </p:spPr>
+        <p:txBody>
+          <a:bodyPr wrap="square">
+            <a:spAutoFit/>
+          </a:bodyPr>
+          <a:lstStyle/>
+          <a:p>
+            <a:pPr algn="l"/>
+            <a:r>
+              <a:rPr sz="750" b="0" i="1">
+                <a:solidFill>
+                  <a:srgbClr val="1A1A1A"/>
+                </a:solidFill>
+                <a:latin typeface="IPAGothic"/>
+              </a:rPr>
+              <a:t>Y1入社の初期メンバーを3年目に執行役員へ</a:t>
+            </a:r>
+          </a:p>
+        </p:txBody>
+      </p:sp>
+      <p:sp>
+        <p:nvSpPr>
+          <p:cNvPr id="18" name="Rectangle 17"/>
+          <p:cNvSpPr/>
+          <p:nvPr/>
+        </p:nvSpPr>
+        <p:spPr>
+          <a:xfrm>
+            <a:off x="6675120" y="2871216"/>
+            <a:ext cx="5212080" cy="713232"/>
+          </a:xfrm>
+          <a:prstGeom prst="rect">
+            <a:avLst/>
+          </a:prstGeom>
+          <a:solidFill>
+            <a:srgbClr val="F0EEE8"/>
+          </a:solidFill>
+          <a:ln>
+            <a:noFill/>
+          </a:ln>
+        </p:spPr>
+        <p:style>
+          <a:lnRef idx="1">
+            <a:schemeClr val="accent1"/>
+          </a:lnRef>
+          <a:fillRef idx="3">
+            <a:schemeClr val="accent1"/>
+          </a:fillRef>
+          <a:effectRef idx="2">
+            <a:schemeClr val="accent1"/>
+          </a:effectRef>
+          <a:fontRef idx="minor">
+            <a:schemeClr val="lt1"/>
+          </a:fontRef>
+        </p:style>
+        <p:txBody>
+          <a:bodyPr rtlCol="0" anchor="ctr"/>
+          <a:lstStyle/>
+          <a:p>
+            <a:pPr algn="ctr"/>
+          </a:p>
+        </p:txBody>
+      </p:sp>
+      <p:sp>
+        <p:nvSpPr>
+          <p:cNvPr id="19" name="Rectangle 18"/>
+          <p:cNvSpPr/>
+          <p:nvPr/>
+        </p:nvSpPr>
+        <p:spPr>
+          <a:xfrm>
+            <a:off x="6675120" y="2871216"/>
+            <a:ext cx="73152" cy="713232"/>
           </a:xfrm>
           <a:prstGeom prst="rect">
             <a:avLst/>
@@ -8936,14 +9129,14 @@
       </p:sp>
       <p:sp>
         <p:nvSpPr>
-          <p:cNvPr id="15" name="TextBox 14"/>
+          <p:cNvPr id="20" name="TextBox 19"/>
           <p:cNvSpPr txBox="1"/>
           <p:nvPr/>
         </p:nvSpPr>
         <p:spPr>
           <a:xfrm>
-            <a:off x="6812280" y="2084832"/>
-            <a:ext cx="4937760" cy="274320"/>
+            <a:off x="6812280" y="2898648"/>
+            <a:ext cx="4937760" cy="256032"/>
           </a:xfrm>
           <a:prstGeom prst="rect">
             <a:avLst/>
@@ -8958,26 +9151,26 @@
           <a:p>
             <a:pPr algn="l"/>
             <a:r>
-              <a:rPr sz="950" b="1" i="0">
+              <a:rPr sz="900" b="1" i="0">
                 <a:solidFill>
                   <a:srgbClr val="2C4A3E"/>
                 </a:solidFill>
                 <a:latin typeface="IPAGothic"/>
               </a:rPr>
-              <a:t>執行役員（Y3〜・初期採用から昇格）</a:t>
-            </a:r>
-          </a:p>
-        </p:txBody>
-      </p:sp>
-      <p:sp>
-        <p:nvSpPr>
-          <p:cNvPr id="16" name="TextBox 15"/>
+              <a:t>エリアSV（スーパーバイザー）</a:t>
+            </a:r>
+          </a:p>
+        </p:txBody>
+      </p:sp>
+      <p:sp>
+        <p:nvSpPr>
+          <p:cNvPr id="21" name="TextBox 20"/>
           <p:cNvSpPr txBox="1"/>
           <p:nvPr/>
         </p:nvSpPr>
         <p:spPr>
           <a:xfrm>
-            <a:off x="6812280" y="2359152"/>
+            <a:off x="6812280" y="3145536"/>
             <a:ext cx="4937760" cy="274320"/>
           </a:xfrm>
           <a:prstGeom prst="rect">
@@ -8993,27 +9186,27 @@
           <a:p>
             <a:pPr algn="l"/>
             <a:r>
-              <a:rPr sz="900" b="0" i="0">
+              <a:rPr sz="850" b="0" i="0">
                 <a:solidFill>
                   <a:srgbClr val="1A1A1A"/>
                 </a:solidFill>
                 <a:latin typeface="IPAGothic"/>
               </a:rPr>
-              <a:t>検討中　※Y3時点で執行役員に昇格</a:t>
-            </a:r>
-          </a:p>
-        </p:txBody>
-      </p:sp>
-      <p:sp>
-        <p:nvSpPr>
-          <p:cNvPr id="17" name="TextBox 16"/>
+              <a:t>38〜45万円/月</a:t>
+            </a:r>
+          </a:p>
+        </p:txBody>
+      </p:sp>
+      <p:sp>
+        <p:nvSpPr>
+          <p:cNvPr id="22" name="TextBox 21"/>
           <p:cNvSpPr txBox="1"/>
           <p:nvPr/>
         </p:nvSpPr>
         <p:spPr>
           <a:xfrm>
-            <a:off x="6812280" y="2514600"/>
-            <a:ext cx="4937760" cy="164592"/>
+            <a:off x="6812280" y="3401568"/>
+            <a:ext cx="4937760" cy="182880"/>
           </a:xfrm>
           <a:prstGeom prst="rect">
             <a:avLst/>
@@ -9028,27 +9221,27 @@
           <a:p>
             <a:pPr algn="l"/>
             <a:r>
-              <a:rPr sz="800" b="0" i="1">
+              <a:rPr sz="750" b="0" i="1">
                 <a:solidFill>
                   <a:srgbClr val="1A1A1A"/>
                 </a:solidFill>
                 <a:latin typeface="IPAGothic"/>
               </a:rPr>
-              <a:t>Y1入社→Y3執行役員として経営参画</a:t>
-            </a:r>
-          </a:p>
-        </p:txBody>
-      </p:sp>
-      <p:sp>
-        <p:nvSpPr>
-          <p:cNvPr id="18" name="Rectangle 17"/>
+              <a:t>5〜7店舗担当・Y3〜設置</a:t>
+            </a:r>
+          </a:p>
+        </p:txBody>
+      </p:sp>
+      <p:sp>
+        <p:nvSpPr>
+          <p:cNvPr id="23" name="Rectangle 22"/>
           <p:cNvSpPr/>
           <p:nvPr/>
         </p:nvSpPr>
         <p:spPr>
           <a:xfrm>
-            <a:off x="6675120" y="2715768"/>
-            <a:ext cx="5212080" cy="612648"/>
+            <a:off x="6675120" y="3621024"/>
+            <a:ext cx="5212080" cy="713232"/>
           </a:xfrm>
           <a:prstGeom prst="rect">
             <a:avLst/>
@@ -9084,14 +9277,14 @@
       </p:sp>
       <p:sp>
         <p:nvSpPr>
-          <p:cNvPr id="19" name="Rectangle 18"/>
+          <p:cNvPr id="24" name="Rectangle 23"/>
           <p:cNvSpPr/>
           <p:nvPr/>
         </p:nvSpPr>
         <p:spPr>
           <a:xfrm>
-            <a:off x="6675120" y="2715768"/>
-            <a:ext cx="73152" cy="612648"/>
+            <a:off x="6675120" y="3621024"/>
+            <a:ext cx="73152" cy="713232"/>
           </a:xfrm>
           <a:prstGeom prst="rect">
             <a:avLst/>
@@ -9127,14 +9320,14 @@
       </p:sp>
       <p:sp>
         <p:nvSpPr>
-          <p:cNvPr id="20" name="TextBox 19"/>
+          <p:cNvPr id="25" name="TextBox 24"/>
           <p:cNvSpPr txBox="1"/>
           <p:nvPr/>
         </p:nvSpPr>
         <p:spPr>
           <a:xfrm>
-            <a:off x="6812280" y="2743200"/>
-            <a:ext cx="4937760" cy="274320"/>
+            <a:off x="6812280" y="3648456"/>
+            <a:ext cx="4937760" cy="256032"/>
           </a:xfrm>
           <a:prstGeom prst="rect">
             <a:avLst/>
@@ -9149,26 +9342,26 @@
           <a:p>
             <a:pPr algn="l"/>
             <a:r>
-              <a:rPr sz="950" b="1" i="0">
+              <a:rPr sz="900" b="1" i="0">
                 <a:solidFill>
                   <a:srgbClr val="C49A22"/>
                 </a:solidFill>
                 <a:latin typeface="IPAGothic"/>
               </a:rPr>
-              <a:t>エリアSV（スーパーバイザー）</a:t>
-            </a:r>
-          </a:p>
-        </p:txBody>
-      </p:sp>
-      <p:sp>
-        <p:nvSpPr>
-          <p:cNvPr id="21" name="TextBox 20"/>
+              <a:t>店長（正社員）</a:t>
+            </a:r>
+          </a:p>
+        </p:txBody>
+      </p:sp>
+      <p:sp>
+        <p:nvSpPr>
+          <p:cNvPr id="26" name="TextBox 25"/>
           <p:cNvSpPr txBox="1"/>
           <p:nvPr/>
         </p:nvSpPr>
         <p:spPr>
           <a:xfrm>
-            <a:off x="6812280" y="3017520"/>
+            <a:off x="6812280" y="3895344"/>
             <a:ext cx="4937760" cy="274320"/>
           </a:xfrm>
           <a:prstGeom prst="rect">
@@ -9184,27 +9377,27 @@
           <a:p>
             <a:pPr algn="l"/>
             <a:r>
-              <a:rPr sz="900" b="0" i="0">
+              <a:rPr sz="850" b="0" i="0">
                 <a:solidFill>
                   <a:srgbClr val="1A1A1A"/>
                 </a:solidFill>
                 <a:latin typeface="IPAGothic"/>
               </a:rPr>
-              <a:t>38〜45万円/月</a:t>
-            </a:r>
-          </a:p>
-        </p:txBody>
-      </p:sp>
-      <p:sp>
-        <p:nvSpPr>
-          <p:cNvPr id="22" name="TextBox 21"/>
+              <a:t>30〜38万円/月 ＋ 担当店売上1%インセンティブ</a:t>
+            </a:r>
+          </a:p>
+        </p:txBody>
+      </p:sp>
+      <p:sp>
+        <p:nvSpPr>
+          <p:cNvPr id="27" name="TextBox 26"/>
           <p:cNvSpPr txBox="1"/>
           <p:nvPr/>
         </p:nvSpPr>
         <p:spPr>
           <a:xfrm>
-            <a:off x="6812280" y="3172968"/>
-            <a:ext cx="4937760" cy="164592"/>
+            <a:off x="6812280" y="4151376"/>
+            <a:ext cx="4937760" cy="182880"/>
           </a:xfrm>
           <a:prstGeom prst="rect">
             <a:avLst/>
@@ -9219,27 +9412,27 @@
           <a:p>
             <a:pPr algn="l"/>
             <a:r>
-              <a:rPr sz="800" b="0" i="1">
+              <a:rPr sz="750" b="0" i="1">
                 <a:solidFill>
                   <a:srgbClr val="1A1A1A"/>
                 </a:solidFill>
                 <a:latin typeface="IPAGothic"/>
               </a:rPr>
-              <a:t>5〜7店舗を担当・Y3〜設置</a:t>
-            </a:r>
-          </a:p>
-        </p:txBody>
-      </p:sp>
-      <p:sp>
-        <p:nvSpPr>
-          <p:cNvPr id="23" name="Rectangle 22"/>
+              <a:t>例：月商960万 → インセンティブ約9.6万/月</a:t>
+            </a:r>
+          </a:p>
+        </p:txBody>
+      </p:sp>
+      <p:sp>
+        <p:nvSpPr>
+          <p:cNvPr id="28" name="Rectangle 27"/>
           <p:cNvSpPr/>
           <p:nvPr/>
         </p:nvSpPr>
         <p:spPr>
           <a:xfrm>
-            <a:off x="6675120" y="3374136"/>
-            <a:ext cx="5212080" cy="612648"/>
+            <a:off x="6675120" y="4370832"/>
+            <a:ext cx="5212080" cy="713232"/>
           </a:xfrm>
           <a:prstGeom prst="rect">
             <a:avLst/>
@@ -9275,205 +9468,14 @@
       </p:sp>
       <p:sp>
         <p:nvSpPr>
-          <p:cNvPr id="24" name="Rectangle 23"/>
-          <p:cNvSpPr/>
-          <p:nvPr/>
-        </p:nvSpPr>
-        <p:spPr>
-          <a:xfrm>
-            <a:off x="6675120" y="3374136"/>
-            <a:ext cx="73152" cy="612648"/>
-          </a:xfrm>
-          <a:prstGeom prst="rect">
-            <a:avLst/>
-          </a:prstGeom>
-          <a:solidFill>
-            <a:srgbClr val="C49A22"/>
-          </a:solidFill>
-          <a:ln>
-            <a:noFill/>
-          </a:ln>
-        </p:spPr>
-        <p:style>
-          <a:lnRef idx="1">
-            <a:schemeClr val="accent1"/>
-          </a:lnRef>
-          <a:fillRef idx="3">
-            <a:schemeClr val="accent1"/>
-          </a:fillRef>
-          <a:effectRef idx="2">
-            <a:schemeClr val="accent1"/>
-          </a:effectRef>
-          <a:fontRef idx="minor">
-            <a:schemeClr val="lt1"/>
-          </a:fontRef>
-        </p:style>
-        <p:txBody>
-          <a:bodyPr rtlCol="0" anchor="ctr"/>
-          <a:lstStyle/>
-          <a:p>
-            <a:pPr algn="ctr"/>
-          </a:p>
-        </p:txBody>
-      </p:sp>
-      <p:sp>
-        <p:nvSpPr>
-          <p:cNvPr id="25" name="TextBox 24"/>
-          <p:cNvSpPr txBox="1"/>
-          <p:nvPr/>
-        </p:nvSpPr>
-        <p:spPr>
-          <a:xfrm>
-            <a:off x="6812280" y="3401568"/>
-            <a:ext cx="4937760" cy="274320"/>
-          </a:xfrm>
-          <a:prstGeom prst="rect">
-            <a:avLst/>
-          </a:prstGeom>
-          <a:noFill/>
-        </p:spPr>
-        <p:txBody>
-          <a:bodyPr wrap="square">
-            <a:spAutoFit/>
-          </a:bodyPr>
-          <a:lstStyle/>
-          <a:p>
-            <a:pPr algn="l"/>
-            <a:r>
-              <a:rPr sz="950" b="1" i="0">
-                <a:solidFill>
-                  <a:srgbClr val="C49A22"/>
-                </a:solidFill>
-                <a:latin typeface="IPAGothic"/>
-              </a:rPr>
-              <a:t>店長（正社員）</a:t>
-            </a:r>
-          </a:p>
-        </p:txBody>
-      </p:sp>
-      <p:sp>
-        <p:nvSpPr>
-          <p:cNvPr id="26" name="TextBox 25"/>
-          <p:cNvSpPr txBox="1"/>
-          <p:nvPr/>
-        </p:nvSpPr>
-        <p:spPr>
-          <a:xfrm>
-            <a:off x="6812280" y="3675888"/>
-            <a:ext cx="4937760" cy="274320"/>
-          </a:xfrm>
-          <a:prstGeom prst="rect">
-            <a:avLst/>
-          </a:prstGeom>
-          <a:noFill/>
-        </p:spPr>
-        <p:txBody>
-          <a:bodyPr wrap="square">
-            <a:spAutoFit/>
-          </a:bodyPr>
-          <a:lstStyle/>
-          <a:p>
-            <a:pPr algn="l"/>
-            <a:r>
-              <a:rPr sz="900" b="0" i="0">
-                <a:solidFill>
-                  <a:srgbClr val="1A1A1A"/>
-                </a:solidFill>
-                <a:latin typeface="IPAGothic"/>
-              </a:rPr>
-              <a:t>30〜38万円/月 ＋ 売上1%インセンティブ</a:t>
-            </a:r>
-          </a:p>
-        </p:txBody>
-      </p:sp>
-      <p:sp>
-        <p:nvSpPr>
-          <p:cNvPr id="27" name="TextBox 26"/>
-          <p:cNvSpPr txBox="1"/>
-          <p:nvPr/>
-        </p:nvSpPr>
-        <p:spPr>
-          <a:xfrm>
-            <a:off x="6812280" y="3831336"/>
-            <a:ext cx="4937760" cy="164592"/>
-          </a:xfrm>
-          <a:prstGeom prst="rect">
-            <a:avLst/>
-          </a:prstGeom>
-          <a:noFill/>
-        </p:spPr>
-        <p:txBody>
-          <a:bodyPr wrap="square">
-            <a:spAutoFit/>
-          </a:bodyPr>
-          <a:lstStyle/>
-          <a:p>
-            <a:pPr algn="l"/>
-            <a:r>
-              <a:rPr sz="800" b="0" i="1">
-                <a:solidFill>
-                  <a:srgbClr val="1A1A1A"/>
-                </a:solidFill>
-                <a:latin typeface="IPAGothic"/>
-              </a:rPr>
-              <a:t>例：月商960万→インセンティブ約9.6万</a:t>
-            </a:r>
-          </a:p>
-        </p:txBody>
-      </p:sp>
-      <p:sp>
-        <p:nvSpPr>
-          <p:cNvPr id="28" name="Rectangle 27"/>
-          <p:cNvSpPr/>
-          <p:nvPr/>
-        </p:nvSpPr>
-        <p:spPr>
-          <a:xfrm>
-            <a:off x="6675120" y="4032504"/>
-            <a:ext cx="5212080" cy="612648"/>
-          </a:xfrm>
-          <a:prstGeom prst="rect">
-            <a:avLst/>
-          </a:prstGeom>
-          <a:solidFill>
-            <a:srgbClr val="F0EEE8"/>
-          </a:solidFill>
-          <a:ln>
-            <a:noFill/>
-          </a:ln>
-        </p:spPr>
-        <p:style>
-          <a:lnRef idx="1">
-            <a:schemeClr val="accent1"/>
-          </a:lnRef>
-          <a:fillRef idx="3">
-            <a:schemeClr val="accent1"/>
-          </a:fillRef>
-          <a:effectRef idx="2">
-            <a:schemeClr val="accent1"/>
-          </a:effectRef>
-          <a:fontRef idx="minor">
-            <a:schemeClr val="lt1"/>
-          </a:fontRef>
-        </p:style>
-        <p:txBody>
-          <a:bodyPr rtlCol="0" anchor="ctr"/>
-          <a:lstStyle/>
-          <a:p>
-            <a:pPr algn="ctr"/>
-          </a:p>
-        </p:txBody>
-      </p:sp>
-      <p:sp>
-        <p:nvSpPr>
           <p:cNvPr id="29" name="Rectangle 28"/>
           <p:cNvSpPr/>
           <p:nvPr/>
         </p:nvSpPr>
         <p:spPr>
           <a:xfrm>
-            <a:off x="6675120" y="4032504"/>
-            <a:ext cx="73152" cy="612648"/>
+            <a:off x="6675120" y="4370832"/>
+            <a:ext cx="73152" cy="713232"/>
           </a:xfrm>
           <a:prstGeom prst="rect">
             <a:avLst/>
@@ -9515,8 +9517,8 @@
         </p:nvSpPr>
         <p:spPr>
           <a:xfrm>
-            <a:off x="6812280" y="4059936"/>
-            <a:ext cx="4937760" cy="274320"/>
+            <a:off x="6812280" y="4398264"/>
+            <a:ext cx="4937760" cy="256032"/>
           </a:xfrm>
           <a:prstGeom prst="rect">
             <a:avLst/>
@@ -9531,7 +9533,7 @@
           <a:p>
             <a:pPr algn="l"/>
             <a:r>
-              <a:rPr sz="950" b="1" i="0">
+              <a:rPr sz="900" b="1" i="0">
                 <a:solidFill>
                   <a:srgbClr val="AAAAAA"/>
                 </a:solidFill>
@@ -9550,7 +9552,7 @@
         </p:nvSpPr>
         <p:spPr>
           <a:xfrm>
-            <a:off x="6812280" y="4334256"/>
+            <a:off x="6812280" y="4645152"/>
             <a:ext cx="4937760" cy="274320"/>
           </a:xfrm>
           <a:prstGeom prst="rect">
@@ -9566,7 +9568,7 @@
           <a:p>
             <a:pPr algn="l"/>
             <a:r>
-              <a:rPr sz="900" b="0" i="0">
+              <a:rPr sz="850" b="0" i="0">
                 <a:solidFill>
                   <a:srgbClr val="1A1A1A"/>
                 </a:solidFill>
@@ -9585,8 +9587,8 @@
         </p:nvSpPr>
         <p:spPr>
           <a:xfrm>
-            <a:off x="6812280" y="4489704"/>
-            <a:ext cx="4937760" cy="164592"/>
+            <a:off x="6812280" y="4901184"/>
+            <a:ext cx="4937760" cy="182880"/>
           </a:xfrm>
           <a:prstGeom prst="rect">
             <a:avLst/>
@@ -9601,7 +9603,7 @@
           <a:p>
             <a:pPr algn="l"/>
             <a:r>
-              <a:rPr sz="800" b="0" i="1">
+              <a:rPr sz="750" b="0" i="1">
                 <a:solidFill>
                   <a:srgbClr val="1A1A1A"/>
                 </a:solidFill>
